--- a/deliverables/VestalPro_Campaign_Readout.pptx
+++ b/deliverables/VestalPro_Campaign_Readout.pptx
@@ -743,22 +743,22 @@
                 <c:formatCode>General</c:formatCode>
                 <c:ptCount val="6"/>
                 <c:pt idx="0">
-                  <c:v>52448</c:v>
+                  <c:v>34500</c:v>
                 </c:pt>
                 <c:pt idx="1">
-                  <c:v>-90051</c:v>
+                  <c:v>-43000</c:v>
                 </c:pt>
                 <c:pt idx="2">
-                  <c:v>142499</c:v>
+                  <c:v>77500</c:v>
                 </c:pt>
                 <c:pt idx="3">
-                  <c:v>7928</c:v>
+                  <c:v>8200</c:v>
                 </c:pt>
                 <c:pt idx="4">
-                  <c:v>-73100</c:v>
+                  <c:v>-30500</c:v>
                 </c:pt>
                 <c:pt idx="5">
-                  <c:v>207671</c:v>
+                  <c:v>99800</c:v>
                 </c:pt>
               </c:numCache>
             </c:numRef>
@@ -1444,10 +1444,10 @@
               <c:strCache>
                 <c:ptCount val="3"/>
                 <c:pt idx="0">
-                  <c:v>Sense Ride</c:v>
+                  <c:v>Ultra Glide</c:v>
                 </c:pt>
                 <c:pt idx="1">
-                  <c:v>Genesis</c:v>
+                  <c:v>Sense Ride</c:v>
                 </c:pt>
                 <c:pt idx="2">
                   <c:v>Speedcross</c:v>
@@ -1462,13 +1462,13 @@
                 <c:formatCode>General</c:formatCode>
                 <c:ptCount val="3"/>
                 <c:pt idx="0">
-                  <c:v>-0.24078834618680378</c:v>
+                  <c:v>-0.25995285309582655</c:v>
                 </c:pt>
                 <c:pt idx="1">
-                  <c:v>-0.18192488262910797</c:v>
+                  <c:v>-0.1523035840703361</c:v>
                 </c:pt>
                 <c:pt idx="2">
-                  <c:v>0.14424242424242426</c:v>
+                  <c:v>0.024882615473534986</c:v>
                 </c:pt>
               </c:numCache>
             </c:numRef>
@@ -12296,7 +12296,7 @@
                 </a:solidFill>
                 <a:latin typeface="Georgia"/>
               </a:rPr>
-              <a:t>After franchise shift and media cost, the launch created ≈$52K of net new revenue</a:t>
+              <a:t>After sales shifted from existing shoes and media cost, the launch added ≈$34.5K</a:t>
             </a:r>
           </a:p>
         </p:txBody>
@@ -12375,7 +12375,7 @@
                 </a:solidFill>
                 <a:latin typeface="Arial"/>
               </a:rPr>
-              <a:t>Baseline business of $494.7K would have occurred without the campaign and is excluded — only movement vs baseline is counted.</a:t>
+              <a:t>Baseline business of $234.0K would have occurred without the campaign and is excluded — only movement vs baseline is counted.</a:t>
             </a:r>
           </a:p>
           <a:p>
@@ -12394,7 +12394,7 @@
                 </a:solidFill>
                 <a:latin typeface="Arial"/>
               </a:rPr>
-              <a:t>Franchise shift: $73.1K of Vestal Pro revenue displaced Sense Ride and Genesis sales, net of Speedcross substitution gains.</a:t>
+              <a:t>Sales shift: $30.5K of Vestal Pro revenue displaced Ultra Glide and Sense Ride sales, net of Speedcross gains.</a:t>
             </a:r>
           </a:p>
           <a:p>
@@ -12413,7 +12413,7 @@
                 </a:solidFill>
                 <a:latin typeface="Arial"/>
               </a:rPr>
-              <a:t>Media basis: $155.8K active spend less the $65.8K pre-period run-rate the business would have spent anyway → $90.1K incremental.</a:t>
+              <a:t>Media basis: $74.6K campaign spend less the $31.6K normal 20-day run rate → $43.0K additional spend.</a:t>
             </a:r>
           </a:p>
           <a:p>
@@ -12432,7 +12432,7 @@
                 </a:solidFill>
                 <a:latin typeface="Arial"/>
               </a:rPr>
-              <a:t>Return on incremental media: $142.5K ÷ $90.1K = 1.58× on a revenue basis. A margin-adjusted view requires COGS, which this dataset does not track.</a:t>
+              <a:t>Return on additional media: $77.5K ÷ $43.0K = 1.80× on a revenue basis. A profit view requires COGS, which this dataset does not track.</a:t>
             </a:r>
           </a:p>
         </p:txBody>
@@ -13459,7 +13459,7 @@
                 </a:solidFill>
                 <a:latin typeface="Georgia"/>
               </a:rPr>
-              <a:t>An estimated 22–30% of Vestal Pro units shifted from existing franchises — at the guardrail</a:t>
+              <a:t>An estimated 19–32% of Vestal Pro units shifted from existing shoes — near or above the 25% goal</a:t>
             </a:r>
           </a:p>
         </p:txBody>
@@ -13494,7 +13494,7 @@
                 </a:solidFill>
                 <a:latin typeface="Arial"/>
               </a:rPr>
-              <a:t>EXISTING-FRANCHISE UNITS VS EXPECTED BASELINE, ACTIVE FLIGHT</a:t>
+              <a:t>EXISTING-SHOE UNITS VS EXPECTED BASELINE, CAMPAIGN</a:t>
             </a:r>
           </a:p>
         </p:txBody>
@@ -13621,7 +13621,7 @@
                 </a:solidFill>
                 <a:latin typeface="Arial"/>
               </a:rPr>
-              <a:t>22–30%</a:t>
+              <a:t>19–32%</a:t>
             </a:r>
             <a:r>
               <a:rPr sz="1300" b="0" i="0">
@@ -13646,7 +13646,7 @@
                 </a:solidFill>
                 <a:latin typeface="Arial"/>
               </a:rPr>
-              <a:t>Guardrail &lt; 25% · </a:t>
+              <a:t>Goal &lt; 25% · </a:t>
             </a:r>
             <a:r>
               <a:rPr sz="1150" b="1" i="0">
@@ -13664,7 +13664,7 @@
                 </a:solidFill>
                 <a:latin typeface="Arial"/>
               </a:rPr>
-              <a:t> — at the line, not clearly through it</a:t>
+              <a:t> — two of three estimates are above it</a:t>
             </a:r>
           </a:p>
         </p:txBody>
@@ -13706,7 +13706,7 @@
                 </a:solidFill>
                 <a:latin typeface="Arial"/>
               </a:rPr>
-              <a:t>•  Central estimates (recent-baseline and flat-seasonal models) span 22–30%; the full range across specifications is 17–42%.</a:t>
+              <a:t>•  The three baseline estimates are 19%, 28%, and 32%, with a median of 28%.</a:t>
             </a:r>
           </a:p>
           <a:p>
@@ -13725,7 +13725,7 @@
                 </a:solidFill>
                 <a:latin typeface="Arial"/>
               </a:rPr>
-              <a:t>•  $73.1K of existing-franchise revenue was displaced — about a third of Vestal Pro's $207.7K direct revenue.</a:t>
+              <a:t>•  $30.5K of existing-shoe revenue was displaced — about 31% of Vestal Pro's $99.8K direct revenue.</a:t>
             </a:r>
           </a:p>
           <a:p>
@@ -13744,7 +13744,7 @@
                 </a:solidFill>
                 <a:latin typeface="Arial"/>
               </a:rPr>
-              <a:t>•  Shift concentrated where positioning overlaps: Sense Ride (−24%) and Genesis (−18%), both high-cushion trail franchises.</a:t>
+              <a:t>•  Shift concentrated where positioning overlaps: Ultra Glide (−26%) and Sense Ride (−15%), both high-cushion trail franchises.</a:t>
             </a:r>
           </a:p>
           <a:p>
@@ -13763,7 +13763,7 @@
                 </a:solidFill>
                 <a:latin typeface="Arial"/>
               </a:rPr>
-              <a:t>•  Launch remains clearly net-positive: +$134.6K incremental footwear revenue after absorbing the shift.</a:t>
+              <a:t>•  The launch remains net positive: +$69.3K in additional footwear revenue after the shift.</a:t>
             </a:r>
           </a:p>
         </p:txBody>

--- a/deliverables/VestalPro_Campaign_Readout.pptx
+++ b/deliverables/VestalPro_Campaign_Readout.pptx
@@ -9,9 +9,9 @@
     <p:sldId id="258" r:id="rId3"/>
     <p:sldId id="257" r:id="rId4"/>
     <p:sldId id="260" r:id="rId5"/>
-    <p:sldId id="261" r:id="rId6"/>
-    <p:sldId id="262" r:id="rId7"/>
-    <p:sldId id="263" r:id="rId8"/>
+    <p:sldId id="270" r:id="rId6"/>
+    <p:sldId id="263" r:id="rId7"/>
+    <p:sldId id="262" r:id="rId8"/>
     <p:sldId id="264" r:id="rId9"/>
     <p:sldId id="265" r:id="rId10"/>
     <p:sldId id="266" r:id="rId11"/>
@@ -136,734 +136,13 @@
 </p:presentation>
 </file>
 
-<file path=ppt/charts/chart1.xml><?xml version="1.0" encoding="utf-8"?>
-<c:chartSpace xmlns:c="http://schemas.openxmlformats.org/drawingml/2006/chart" xmlns:a="http://schemas.openxmlformats.org/drawingml/2006/main" xmlns:r="http://schemas.openxmlformats.org/officeDocument/2006/relationships" xmlns:c16r2="http://schemas.microsoft.com/office/drawing/2015/06/chart">
-  <c:date1904 val="0"/>
-  <c:lang val="en-US"/>
-  <c:roundedCorners val="1"/>
-  <c:style val="2"/>
-  <c:chart>
-    <c:autoTitleDeleted val="1"/>
-    <c:plotArea>
-      <c:layout/>
-      <c:lineChart>
-        <c:grouping val="standard"/>
-        <c:varyColors val="0"/>
-        <c:ser>
-          <c:idx val="0"/>
-          <c:order val="0"/>
-          <c:tx>
-            <c:strRef>
-              <c:f>Sheet1!$B$1</c:f>
-              <c:strCache>
-                <c:ptCount val="1"/>
-                <c:pt idx="0">
-                  <c:v>Observed footwear revenue</c:v>
-                </c:pt>
-              </c:strCache>
-            </c:strRef>
-          </c:tx>
-          <c:spPr>
-            <a:ln w="34925">
-              <a:solidFill>
-                <a:srgbClr val="0057B8"/>
-              </a:solidFill>
-            </a:ln>
-          </c:spPr>
-          <c:marker>
-            <c:symbol val="none"/>
-          </c:marker>
-          <c:cat>
-            <c:strRef>
-              <c:f>Sheet1!$A$2:$A$15</c:f>
-              <c:strCache>
-                <c:ptCount val="14"/>
-                <c:pt idx="0">
-                  <c:v>Jan 5</c:v>
-                </c:pt>
-                <c:pt idx="1">
-                  <c:v>Jan 12</c:v>
-                </c:pt>
-                <c:pt idx="2">
-                  <c:v>Jan 19</c:v>
-                </c:pt>
-                <c:pt idx="3">
-                  <c:v>Jan 26</c:v>
-                </c:pt>
-                <c:pt idx="4">
-                  <c:v>Feb 2</c:v>
-                </c:pt>
-                <c:pt idx="5">
-                  <c:v>Feb 9</c:v>
-                </c:pt>
-                <c:pt idx="6">
-                  <c:v>Feb 16</c:v>
-                </c:pt>
-                <c:pt idx="7">
-                  <c:v>Feb 23</c:v>
-                </c:pt>
-                <c:pt idx="8">
-                  <c:v>Mar 2</c:v>
-                </c:pt>
-                <c:pt idx="9">
-                  <c:v>Mar 9</c:v>
-                </c:pt>
-                <c:pt idx="10">
-                  <c:v>Mar 16</c:v>
-                </c:pt>
-                <c:pt idx="11">
-                  <c:v>Mar 23</c:v>
-                </c:pt>
-                <c:pt idx="12">
-                  <c:v>Mar 30</c:v>
-                </c:pt>
-                <c:pt idx="13">
-                  <c:v>Apr 6</c:v>
-                </c:pt>
-              </c:strCache>
-            </c:strRef>
-          </c:cat>
-          <c:val>
-            <c:numRef>
-              <c:f>Sheet1!$B$2:$B$15</c:f>
-              <c:numCache>
-                <c:formatCode>General</c:formatCode>
-                <c:ptCount val="14"/>
-                <c:pt idx="0">
-                  <c:v>59675</c:v>
-                </c:pt>
-                <c:pt idx="1">
-                  <c:v>59754</c:v>
-                </c:pt>
-                <c:pt idx="2">
-                  <c:v>58025</c:v>
-                </c:pt>
-                <c:pt idx="3">
-                  <c:v>61476</c:v>
-                </c:pt>
-                <c:pt idx="4">
-                  <c:v>62771</c:v>
-                </c:pt>
-                <c:pt idx="5">
-                  <c:v>62908</c:v>
-                </c:pt>
-                <c:pt idx="6">
-                  <c:v>68234</c:v>
-                </c:pt>
-                <c:pt idx="7">
-                  <c:v>61971</c:v>
-                </c:pt>
-                <c:pt idx="8">
-                  <c:v>95778</c:v>
-                </c:pt>
-                <c:pt idx="9">
-                  <c:v>91117</c:v>
-                </c:pt>
-                <c:pt idx="10">
-                  <c:v>93839</c:v>
-                </c:pt>
-                <c:pt idx="11">
-                  <c:v>92751</c:v>
-                </c:pt>
-                <c:pt idx="12">
-                  <c:v>85777</c:v>
-                </c:pt>
-                <c:pt idx="13">
-                  <c:v>83631</c:v>
-                </c:pt>
-              </c:numCache>
-            </c:numRef>
-          </c:val>
-          <c:smooth val="0"/>
-          <c:extLst>
-            <c:ext xmlns:c16="http://schemas.microsoft.com/office/drawing/2014/chart" uri="{C3380CC4-5D6E-409C-BE32-E72D297353CC}">
-              <c16:uniqueId val="{00000000-02AD-492F-AD7A-3A703CAB577A}"/>
-            </c:ext>
-          </c:extLst>
-        </c:ser>
-        <c:ser>
-          <c:idx val="1"/>
-          <c:order val="1"/>
-          <c:tx>
-            <c:strRef>
-              <c:f>Sheet1!$C$1</c:f>
-              <c:strCache>
-                <c:ptCount val="1"/>
-                <c:pt idx="0">
-                  <c:v>No-campaign counterfactual</c:v>
-                </c:pt>
-              </c:strCache>
-            </c:strRef>
-          </c:tx>
-          <c:spPr>
-            <a:ln w="25400">
-              <a:solidFill>
-                <a:srgbClr val="757575"/>
-              </a:solidFill>
-              <a:prstDash val="dash"/>
-            </a:ln>
-          </c:spPr>
-          <c:marker>
-            <c:symbol val="none"/>
-          </c:marker>
-          <c:cat>
-            <c:strRef>
-              <c:f>Sheet1!$A$2:$A$15</c:f>
-              <c:strCache>
-                <c:ptCount val="14"/>
-                <c:pt idx="0">
-                  <c:v>Jan 5</c:v>
-                </c:pt>
-                <c:pt idx="1">
-                  <c:v>Jan 12</c:v>
-                </c:pt>
-                <c:pt idx="2">
-                  <c:v>Jan 19</c:v>
-                </c:pt>
-                <c:pt idx="3">
-                  <c:v>Jan 26</c:v>
-                </c:pt>
-                <c:pt idx="4">
-                  <c:v>Feb 2</c:v>
-                </c:pt>
-                <c:pt idx="5">
-                  <c:v>Feb 9</c:v>
-                </c:pt>
-                <c:pt idx="6">
-                  <c:v>Feb 16</c:v>
-                </c:pt>
-                <c:pt idx="7">
-                  <c:v>Feb 23</c:v>
-                </c:pt>
-                <c:pt idx="8">
-                  <c:v>Mar 2</c:v>
-                </c:pt>
-                <c:pt idx="9">
-                  <c:v>Mar 9</c:v>
-                </c:pt>
-                <c:pt idx="10">
-                  <c:v>Mar 16</c:v>
-                </c:pt>
-                <c:pt idx="11">
-                  <c:v>Mar 23</c:v>
-                </c:pt>
-                <c:pt idx="12">
-                  <c:v>Mar 30</c:v>
-                </c:pt>
-                <c:pt idx="13">
-                  <c:v>Apr 6</c:v>
-                </c:pt>
-              </c:strCache>
-            </c:strRef>
-          </c:cat>
-          <c:val>
-            <c:numRef>
-              <c:f>Sheet1!$C$2:$C$15</c:f>
-              <c:numCache>
-                <c:formatCode>General</c:formatCode>
-                <c:ptCount val="14"/>
-                <c:pt idx="0">
-                  <c:v>58751</c:v>
-                </c:pt>
-                <c:pt idx="1">
-                  <c:v>59637</c:v>
-                </c:pt>
-                <c:pt idx="2">
-                  <c:v>60523</c:v>
-                </c:pt>
-                <c:pt idx="3">
-                  <c:v>61409</c:v>
-                </c:pt>
-                <c:pt idx="4">
-                  <c:v>62295</c:v>
-                </c:pt>
-                <c:pt idx="5">
-                  <c:v>63181</c:v>
-                </c:pt>
-                <c:pt idx="6">
-                  <c:v>64067</c:v>
-                </c:pt>
-                <c:pt idx="7">
-                  <c:v>64953</c:v>
-                </c:pt>
-                <c:pt idx="8">
-                  <c:v>65839</c:v>
-                </c:pt>
-                <c:pt idx="9">
-                  <c:v>66725</c:v>
-                </c:pt>
-                <c:pt idx="10">
-                  <c:v>67611</c:v>
-                </c:pt>
-                <c:pt idx="11">
-                  <c:v>68497</c:v>
-                </c:pt>
-                <c:pt idx="12">
-                  <c:v>69383</c:v>
-                </c:pt>
-                <c:pt idx="13">
-                  <c:v>70269</c:v>
-                </c:pt>
-              </c:numCache>
-            </c:numRef>
-          </c:val>
-          <c:smooth val="0"/>
-          <c:extLst>
-            <c:ext xmlns:c16="http://schemas.microsoft.com/office/drawing/2014/chart" uri="{C3380CC4-5D6E-409C-BE32-E72D297353CC}">
-              <c16:uniqueId val="{00000001-02AD-492F-AD7A-3A703CAB577A}"/>
-            </c:ext>
-          </c:extLst>
-        </c:ser>
-        <c:dLbls>
-          <c:showLegendKey val="0"/>
-          <c:showVal val="0"/>
-          <c:showCatName val="0"/>
-          <c:showSerName val="0"/>
-          <c:showPercent val="0"/>
-          <c:showBubbleSize val="0"/>
-        </c:dLbls>
-        <c:smooth val="0"/>
-        <c:axId val="2118791784"/>
-        <c:axId val="2140495176"/>
-      </c:lineChart>
-      <c:catAx>
-        <c:axId val="2118791784"/>
-        <c:scaling>
-          <c:orientation val="minMax"/>
-        </c:scaling>
-        <c:delete val="0"/>
-        <c:axPos val="b"/>
-        <c:numFmt formatCode="General" sourceLinked="0"/>
-        <c:majorTickMark val="out"/>
-        <c:minorTickMark val="none"/>
-        <c:tickLblPos val="nextTo"/>
-        <c:spPr>
-          <a:ln>
-            <a:solidFill>
-              <a:srgbClr val="D9D9D9"/>
-            </a:solidFill>
-          </a:ln>
-        </c:spPr>
-        <c:txPr>
-          <a:bodyPr/>
-          <a:lstStyle/>
-          <a:p>
-            <a:pPr>
-              <a:defRPr sz="900">
-                <a:solidFill>
-                  <a:srgbClr val="757575"/>
-                </a:solidFill>
-                <a:latin typeface="Arial"/>
-              </a:defRPr>
-            </a:pPr>
-            <a:endParaRPr lang="en-US"/>
-          </a:p>
-        </c:txPr>
-        <c:crossAx val="2140495176"/>
-        <c:crosses val="autoZero"/>
-        <c:auto val="1"/>
-        <c:lblAlgn val="ctr"/>
-        <c:lblOffset val="100"/>
-        <c:noMultiLvlLbl val="0"/>
-      </c:catAx>
-      <c:valAx>
-        <c:axId val="2140495176"/>
-        <c:scaling>
-          <c:orientation val="minMax"/>
-          <c:max val="100000"/>
-          <c:min val="0"/>
-        </c:scaling>
-        <c:delete val="0"/>
-        <c:axPos val="l"/>
-        <c:majorGridlines>
-          <c:spPr>
-            <a:ln w="6350">
-              <a:solidFill>
-                <a:srgbClr val="ECECEC"/>
-              </a:solidFill>
-            </a:ln>
-          </c:spPr>
-        </c:majorGridlines>
-        <c:numFmt formatCode="\$#,##0,&quot;K&quot;" sourceLinked="0"/>
-        <c:majorTickMark val="out"/>
-        <c:minorTickMark val="none"/>
-        <c:tickLblPos val="nextTo"/>
-        <c:spPr>
-          <a:ln>
-            <a:noFill/>
-          </a:ln>
-        </c:spPr>
-        <c:txPr>
-          <a:bodyPr/>
-          <a:lstStyle/>
-          <a:p>
-            <a:pPr>
-              <a:defRPr sz="900">
-                <a:solidFill>
-                  <a:srgbClr val="757575"/>
-                </a:solidFill>
-                <a:latin typeface="Arial"/>
-              </a:defRPr>
-            </a:pPr>
-            <a:endParaRPr lang="en-US"/>
-          </a:p>
-        </c:txPr>
-        <c:crossAx val="2118791784"/>
-        <c:crosses val="autoZero"/>
-        <c:crossBetween val="between"/>
-        <c:majorUnit val="25000"/>
-      </c:valAx>
-    </c:plotArea>
-    <c:legend>
-      <c:legendPos val="b"/>
-      <c:overlay val="0"/>
-      <c:txPr>
-        <a:bodyPr/>
-        <a:lstStyle/>
-        <a:p>
-          <a:pPr>
-            <a:defRPr sz="1000">
-              <a:solidFill>
-                <a:srgbClr val="333333"/>
-              </a:solidFill>
-              <a:latin typeface="Arial"/>
-            </a:defRPr>
-          </a:pPr>
-          <a:endParaRPr lang="en-US"/>
-        </a:p>
-      </c:txPr>
-    </c:legend>
-    <c:plotVisOnly val="1"/>
-    <c:dispBlanksAs val="gap"/>
-    <c:showDLblsOverMax val="0"/>
-  </c:chart>
-  <c:txPr>
-    <a:bodyPr/>
-    <a:lstStyle/>
-    <a:p>
-      <a:pPr>
-        <a:defRPr sz="1800"/>
-      </a:pPr>
-      <a:endParaRPr lang="en-US"/>
-    </a:p>
-  </c:txPr>
-  <c:externalData r:id="rId1">
-    <c:autoUpdate val="0"/>
-  </c:externalData>
-</c:chartSpace>
+<file path=ppt/authors.xml><?xml version="1.0" encoding="utf-8"?>
+<p188:authorLst xmlns:a="http://schemas.openxmlformats.org/drawingml/2006/main" xmlns:r="http://schemas.openxmlformats.org/officeDocument/2006/relationships" xmlns:p188="http://schemas.microsoft.com/office/powerpoint/2018/8/main">
+  <p188:author id="{F7CB7528-0317-1151-A7B7-34D5B6A94F6F}" name="Anderson, Edward Clifford (eca4zm)" initials="EA" userId="S::eca4zm@virginia.edu::8b27aeba-14ab-4313-9339-48da5a11e8c1" providerId="AD"/>
+</p188:authorLst>
 </file>
 
-<file path=ppt/charts/chart2.xml><?xml version="1.0" encoding="utf-8"?>
-<c:chartSpace xmlns:c="http://schemas.openxmlformats.org/drawingml/2006/chart" xmlns:a="http://schemas.openxmlformats.org/drawingml/2006/main" xmlns:r="http://schemas.openxmlformats.org/officeDocument/2006/relationships" xmlns:c16r2="http://schemas.microsoft.com/office/drawing/2015/06/chart">
-  <c:date1904 val="0"/>
-  <c:lang val="en-US"/>
-  <c:roundedCorners val="1"/>
-  <c:style val="2"/>
-  <c:chart>
-    <c:autoTitleDeleted val="1"/>
-    <c:plotArea>
-      <c:layout/>
-      <c:barChart>
-        <c:barDir val="bar"/>
-        <c:grouping val="clustered"/>
-        <c:varyColors val="1"/>
-        <c:ser>
-          <c:idx val="0"/>
-          <c:order val="0"/>
-          <c:tx>
-            <c:strRef>
-              <c:f>Sheet1!$B$1</c:f>
-              <c:strCache>
-                <c:ptCount val="1"/>
-                <c:pt idx="0">
-                  <c:v>Ledger</c:v>
-                </c:pt>
-              </c:strCache>
-            </c:strRef>
-          </c:tx>
-          <c:invertIfNegative val="1"/>
-          <c:dPt>
-            <c:idx val="0"/>
-            <c:invertIfNegative val="1"/>
-            <c:bubble3D val="0"/>
-            <c:spPr>
-              <a:solidFill>
-                <a:srgbClr val="000000"/>
-              </a:solidFill>
-            </c:spPr>
-            <c:extLst>
-              <c:ext xmlns:c16="http://schemas.microsoft.com/office/drawing/2014/chart" uri="{C3380CC4-5D6E-409C-BE32-E72D297353CC}">
-                <c16:uniqueId val="{00000001-2D4B-47E8-8381-BE1D62950621}"/>
-              </c:ext>
-            </c:extLst>
-          </c:dPt>
-          <c:dPt>
-            <c:idx val="1"/>
-            <c:invertIfNegative val="1"/>
-            <c:bubble3D val="0"/>
-            <c:spPr>
-              <a:solidFill>
-                <a:srgbClr val="757575"/>
-              </a:solidFill>
-            </c:spPr>
-            <c:extLst>
-              <c:ext xmlns:c16="http://schemas.microsoft.com/office/drawing/2014/chart" uri="{C3380CC4-5D6E-409C-BE32-E72D297353CC}">
-                <c16:uniqueId val="{00000003-2D4B-47E8-8381-BE1D62950621}"/>
-              </c:ext>
-            </c:extLst>
-          </c:dPt>
-          <c:dPt>
-            <c:idx val="2"/>
-            <c:invertIfNegative val="1"/>
-            <c:bubble3D val="0"/>
-            <c:spPr>
-              <a:solidFill>
-                <a:srgbClr val="000000"/>
-              </a:solidFill>
-            </c:spPr>
-            <c:extLst>
-              <c:ext xmlns:c16="http://schemas.microsoft.com/office/drawing/2014/chart" uri="{C3380CC4-5D6E-409C-BE32-E72D297353CC}">
-                <c16:uniqueId val="{00000005-2D4B-47E8-8381-BE1D62950621}"/>
-              </c:ext>
-            </c:extLst>
-          </c:dPt>
-          <c:dPt>
-            <c:idx val="3"/>
-            <c:invertIfNegative val="1"/>
-            <c:bubble3D val="0"/>
-            <c:spPr>
-              <a:solidFill>
-                <a:srgbClr val="0057B8"/>
-              </a:solidFill>
-            </c:spPr>
-            <c:extLst>
-              <c:ext xmlns:c16="http://schemas.microsoft.com/office/drawing/2014/chart" uri="{C3380CC4-5D6E-409C-BE32-E72D297353CC}">
-                <c16:uniqueId val="{00000007-2D4B-47E8-8381-BE1D62950621}"/>
-              </c:ext>
-            </c:extLst>
-          </c:dPt>
-          <c:dPt>
-            <c:idx val="4"/>
-            <c:invertIfNegative val="1"/>
-            <c:bubble3D val="0"/>
-            <c:spPr>
-              <a:solidFill>
-                <a:srgbClr val="757575"/>
-              </a:solidFill>
-            </c:spPr>
-            <c:extLst>
-              <c:ext xmlns:c16="http://schemas.microsoft.com/office/drawing/2014/chart" uri="{C3380CC4-5D6E-409C-BE32-E72D297353CC}">
-                <c16:uniqueId val="{00000009-2D4B-47E8-8381-BE1D62950621}"/>
-              </c:ext>
-            </c:extLst>
-          </c:dPt>
-          <c:dPt>
-            <c:idx val="5"/>
-            <c:invertIfNegative val="1"/>
-            <c:bubble3D val="0"/>
-            <c:spPr>
-              <a:solidFill>
-                <a:srgbClr val="0057B8"/>
-              </a:solidFill>
-            </c:spPr>
-            <c:extLst>
-              <c:ext xmlns:c16="http://schemas.microsoft.com/office/drawing/2014/chart" uri="{C3380CC4-5D6E-409C-BE32-E72D297353CC}">
-                <c16:uniqueId val="{0000000B-2D4B-47E8-8381-BE1D62950621}"/>
-              </c:ext>
-            </c:extLst>
-          </c:dPt>
-          <c:dLbls>
-            <c:numFmt formatCode="\$#,##0,&quot;K&quot;" sourceLinked="0"/>
-            <c:spPr>
-              <a:noFill/>
-              <a:ln>
-                <a:noFill/>
-              </a:ln>
-              <a:effectLst/>
-            </c:spPr>
-            <c:txPr>
-              <a:bodyPr/>
-              <a:lstStyle/>
-              <a:p>
-                <a:pPr>
-                  <a:defRPr sz="1050" b="1">
-                    <a:solidFill>
-                      <a:srgbClr val="333333"/>
-                    </a:solidFill>
-                    <a:latin typeface="Arial"/>
-                  </a:defRPr>
-                </a:pPr>
-                <a:endParaRPr lang="en-US"/>
-              </a:p>
-            </c:txPr>
-            <c:dLblPos val="outEnd"/>
-            <c:showLegendKey val="0"/>
-            <c:showVal val="1"/>
-            <c:showCatName val="0"/>
-            <c:showSerName val="0"/>
-            <c:showPercent val="0"/>
-            <c:showBubbleSize val="0"/>
-            <c:showLeaderLines val="0"/>
-            <c:extLst>
-              <c:ext xmlns:c15="http://schemas.microsoft.com/office/drawing/2012/chart" uri="{CE6537A1-D6FC-4f65-9D91-7224C49458BB}">
-                <c15:showLeaderLines val="0"/>
-              </c:ext>
-            </c:extLst>
-          </c:dLbls>
-          <c:cat>
-            <c:strRef>
-              <c:f>Sheet1!$A$2:$A$7</c:f>
-              <c:strCache>
-                <c:ptCount val="6"/>
-                <c:pt idx="0">
-                  <c:v>Net campaign value (revenue basis)</c:v>
-                </c:pt>
-                <c:pt idx="1">
-                  <c:v>Incremental media spend</c:v>
-                </c:pt>
-                <c:pt idx="2">
-                  <c:v>Net incremental revenue</c:v>
-                </c:pt>
-                <c:pt idx="3">
-                  <c:v>Adjacent-category halo</c:v>
-                </c:pt>
-                <c:pt idx="4">
-                  <c:v>Franchise shift (cannibalization)</c:v>
-                </c:pt>
-                <c:pt idx="5">
-                  <c:v>Vestal Pro direct revenue</c:v>
-                </c:pt>
-              </c:strCache>
-            </c:strRef>
-          </c:cat>
-          <c:val>
-            <c:numRef>
-              <c:f>Sheet1!$B$2:$B$7</c:f>
-              <c:numCache>
-                <c:formatCode>General</c:formatCode>
-                <c:ptCount val="6"/>
-                <c:pt idx="0">
-                  <c:v>34500</c:v>
-                </c:pt>
-                <c:pt idx="1">
-                  <c:v>-43000</c:v>
-                </c:pt>
-                <c:pt idx="2">
-                  <c:v>77500</c:v>
-                </c:pt>
-                <c:pt idx="3">
-                  <c:v>8200</c:v>
-                </c:pt>
-                <c:pt idx="4">
-                  <c:v>-30500</c:v>
-                </c:pt>
-                <c:pt idx="5">
-                  <c:v>99800</c:v>
-                </c:pt>
-              </c:numCache>
-            </c:numRef>
-          </c:val>
-          <c:extLst>
-            <c:ext xmlns:c16="http://schemas.microsoft.com/office/drawing/2014/chart" uri="{C3380CC4-5D6E-409C-BE32-E72D297353CC}">
-              <c16:uniqueId val="{0000000C-2D4B-47E8-8381-BE1D62950621}"/>
-            </c:ext>
-          </c:extLst>
-        </c:ser>
-        <c:dLbls>
-          <c:dLblPos val="outEnd"/>
-          <c:showLegendKey val="0"/>
-          <c:showVal val="1"/>
-          <c:showCatName val="0"/>
-          <c:showSerName val="0"/>
-          <c:showPercent val="0"/>
-          <c:showBubbleSize val="0"/>
-        </c:dLbls>
-        <c:gapWidth val="70"/>
-        <c:axId val="-2068027336"/>
-        <c:axId val="-2113994440"/>
-      </c:barChart>
-      <c:catAx>
-        <c:axId val="-2068027336"/>
-        <c:scaling>
-          <c:orientation val="minMax"/>
-        </c:scaling>
-        <c:delete val="0"/>
-        <c:axPos val="l"/>
-        <c:numFmt formatCode="General" sourceLinked="0"/>
-        <c:majorTickMark val="out"/>
-        <c:minorTickMark val="none"/>
-        <c:tickLblPos val="low"/>
-        <c:spPr>
-          <a:ln>
-            <a:solidFill>
-              <a:srgbClr val="D9D9D9"/>
-            </a:solidFill>
-          </a:ln>
-        </c:spPr>
-        <c:txPr>
-          <a:bodyPr/>
-          <a:lstStyle/>
-          <a:p>
-            <a:pPr>
-              <a:defRPr sz="1000">
-                <a:solidFill>
-                  <a:srgbClr val="757575"/>
-                </a:solidFill>
-                <a:latin typeface="Arial"/>
-              </a:defRPr>
-            </a:pPr>
-            <a:endParaRPr lang="en-US"/>
-          </a:p>
-        </c:txPr>
-        <c:crossAx val="-2113994440"/>
-        <c:crosses val="autoZero"/>
-        <c:auto val="1"/>
-        <c:lblAlgn val="ctr"/>
-        <c:lblOffset val="100"/>
-        <c:noMultiLvlLbl val="0"/>
-      </c:catAx>
-      <c:valAx>
-        <c:axId val="-2113994440"/>
-        <c:scaling>
-          <c:orientation val="minMax"/>
-        </c:scaling>
-        <c:delete val="0"/>
-        <c:axPos val="b"/>
-        <c:numFmt formatCode=";;;" sourceLinked="0"/>
-        <c:majorTickMark val="out"/>
-        <c:minorTickMark val="none"/>
-        <c:tickLblPos val="nextTo"/>
-        <c:spPr>
-          <a:ln>
-            <a:noFill/>
-          </a:ln>
-        </c:spPr>
-        <c:crossAx val="-2068027336"/>
-        <c:crosses val="autoZero"/>
-        <c:crossBetween val="between"/>
-      </c:valAx>
-    </c:plotArea>
-    <c:plotVisOnly val="1"/>
-    <c:dispBlanksAs val="gap"/>
-    <c:showDLblsOverMax val="1"/>
-  </c:chart>
-  <c:txPr>
-    <a:bodyPr/>
-    <a:lstStyle/>
-    <a:p>
-      <a:pPr>
-        <a:defRPr sz="1800"/>
-      </a:pPr>
-      <a:endParaRPr lang="en-US"/>
-    </a:p>
-  </c:txPr>
-  <c:externalData r:id="rId1">
-    <c:autoUpdate val="0"/>
-  </c:externalData>
-</c:chartSpace>
-</file>
-
-<file path=ppt/charts/chart3.xml><?xml version="1.0" encoding="utf-8"?>
+<file path=ppt/charts/chart1.xml><?xml version="1.0" encoding="utf-8"?>
 <c:chartSpace xmlns:c="http://schemas.openxmlformats.org/drawingml/2006/chart" xmlns:a="http://schemas.openxmlformats.org/drawingml/2006/main" xmlns:r="http://schemas.openxmlformats.org/officeDocument/2006/relationships" xmlns:c16r2="http://schemas.microsoft.com/office/drawing/2015/06/chart">
   <c:date1904 val="0"/>
   <c:lang val="en-US"/>
@@ -995,7 +274,7 @@
 </c:chartSpace>
 </file>
 
-<file path=ppt/charts/chart4.xml><?xml version="1.0" encoding="utf-8"?>
+<file path=ppt/charts/chart2.xml><?xml version="1.0" encoding="utf-8"?>
 <c:chartSpace xmlns:c="http://schemas.openxmlformats.org/drawingml/2006/chart" xmlns:a="http://schemas.openxmlformats.org/drawingml/2006/main" xmlns:r="http://schemas.openxmlformats.org/officeDocument/2006/relationships" xmlns:c16r2="http://schemas.microsoft.com/office/drawing/2015/06/chart">
   <c:date1904 val="0"/>
   <c:lang val="en-US"/>
@@ -1326,254 +605,7 @@
 </c:chartSpace>
 </file>
 
-<file path=ppt/charts/chart5.xml><?xml version="1.0" encoding="utf-8"?>
-<c:chartSpace xmlns:c="http://schemas.openxmlformats.org/drawingml/2006/chart" xmlns:a="http://schemas.openxmlformats.org/drawingml/2006/main" xmlns:r="http://schemas.openxmlformats.org/officeDocument/2006/relationships" xmlns:c16r2="http://schemas.microsoft.com/office/drawing/2015/06/chart">
-  <c:date1904 val="0"/>
-  <c:lang val="en-US"/>
-  <c:roundedCorners val="1"/>
-  <c:style val="2"/>
-  <c:chart>
-    <c:autoTitleDeleted val="1"/>
-    <c:plotArea>
-      <c:layout/>
-      <c:barChart>
-        <c:barDir val="col"/>
-        <c:grouping val="clustered"/>
-        <c:varyColors val="1"/>
-        <c:ser>
-          <c:idx val="0"/>
-          <c:order val="0"/>
-          <c:tx>
-            <c:strRef>
-              <c:f>Sheet1!$B$1</c:f>
-              <c:strCache>
-                <c:ptCount val="1"/>
-                <c:pt idx="0">
-                  <c:v>Units vs baseline</c:v>
-                </c:pt>
-              </c:strCache>
-            </c:strRef>
-          </c:tx>
-          <c:invertIfNegative val="1"/>
-          <c:dPt>
-            <c:idx val="0"/>
-            <c:invertIfNegative val="1"/>
-            <c:bubble3D val="0"/>
-            <c:spPr>
-              <a:solidFill>
-                <a:srgbClr val="DA291C"/>
-              </a:solidFill>
-            </c:spPr>
-            <c:extLst>
-              <c:ext xmlns:c16="http://schemas.microsoft.com/office/drawing/2014/chart" uri="{C3380CC4-5D6E-409C-BE32-E72D297353CC}">
-                <c16:uniqueId val="{00000001-D683-4F3D-BD68-BE719D740B70}"/>
-              </c:ext>
-            </c:extLst>
-          </c:dPt>
-          <c:dPt>
-            <c:idx val="1"/>
-            <c:invertIfNegative val="1"/>
-            <c:bubble3D val="0"/>
-            <c:spPr>
-              <a:solidFill>
-                <a:srgbClr val="DA291C"/>
-              </a:solidFill>
-            </c:spPr>
-            <c:extLst>
-              <c:ext xmlns:c16="http://schemas.microsoft.com/office/drawing/2014/chart" uri="{C3380CC4-5D6E-409C-BE32-E72D297353CC}">
-                <c16:uniqueId val="{00000003-D683-4F3D-BD68-BE719D740B70}"/>
-              </c:ext>
-            </c:extLst>
-          </c:dPt>
-          <c:dPt>
-            <c:idx val="2"/>
-            <c:invertIfNegative val="1"/>
-            <c:bubble3D val="0"/>
-            <c:spPr>
-              <a:solidFill>
-                <a:srgbClr val="1F7A4D"/>
-              </a:solidFill>
-            </c:spPr>
-            <c:extLst>
-              <c:ext xmlns:c16="http://schemas.microsoft.com/office/drawing/2014/chart" uri="{C3380CC4-5D6E-409C-BE32-E72D297353CC}">
-                <c16:uniqueId val="{00000005-D683-4F3D-BD68-BE719D740B70}"/>
-              </c:ext>
-            </c:extLst>
-          </c:dPt>
-          <c:dLbls>
-            <c:numFmt formatCode="\+0%;\-0%" sourceLinked="0"/>
-            <c:spPr>
-              <a:noFill/>
-              <a:ln>
-                <a:noFill/>
-              </a:ln>
-              <a:effectLst/>
-            </c:spPr>
-            <c:txPr>
-              <a:bodyPr/>
-              <a:lstStyle/>
-              <a:p>
-                <a:pPr>
-                  <a:defRPr sz="1200" b="1">
-                    <a:solidFill>
-                      <a:srgbClr val="333333"/>
-                    </a:solidFill>
-                    <a:latin typeface="Arial"/>
-                  </a:defRPr>
-                </a:pPr>
-                <a:endParaRPr lang="en-US"/>
-              </a:p>
-            </c:txPr>
-            <c:dLblPos val="outEnd"/>
-            <c:showLegendKey val="0"/>
-            <c:showVal val="1"/>
-            <c:showCatName val="0"/>
-            <c:showSerName val="0"/>
-            <c:showPercent val="0"/>
-            <c:showBubbleSize val="0"/>
-            <c:showLeaderLines val="0"/>
-            <c:extLst>
-              <c:ext xmlns:c15="http://schemas.microsoft.com/office/drawing/2012/chart" uri="{CE6537A1-D6FC-4f65-9D91-7224C49458BB}">
-                <c15:showLeaderLines val="0"/>
-              </c:ext>
-            </c:extLst>
-          </c:dLbls>
-          <c:cat>
-            <c:strRef>
-              <c:f>Sheet1!$A$2:$A$4</c:f>
-              <c:strCache>
-                <c:ptCount val="3"/>
-                <c:pt idx="0">
-                  <c:v>Ultra Glide</c:v>
-                </c:pt>
-                <c:pt idx="1">
-                  <c:v>Sense Ride</c:v>
-                </c:pt>
-                <c:pt idx="2">
-                  <c:v>Speedcross</c:v>
-                </c:pt>
-              </c:strCache>
-            </c:strRef>
-          </c:cat>
-          <c:val>
-            <c:numRef>
-              <c:f>Sheet1!$B$2:$B$4</c:f>
-              <c:numCache>
-                <c:formatCode>General</c:formatCode>
-                <c:ptCount val="3"/>
-                <c:pt idx="0">
-                  <c:v>-0.25995285309582655</c:v>
-                </c:pt>
-                <c:pt idx="1">
-                  <c:v>-0.1523035840703361</c:v>
-                </c:pt>
-                <c:pt idx="2">
-                  <c:v>0.024882615473534986</c:v>
-                </c:pt>
-              </c:numCache>
-            </c:numRef>
-          </c:val>
-          <c:extLst>
-            <c:ext xmlns:c16="http://schemas.microsoft.com/office/drawing/2014/chart" uri="{C3380CC4-5D6E-409C-BE32-E72D297353CC}">
-              <c16:uniqueId val="{00000006-D683-4F3D-BD68-BE719D740B70}"/>
-            </c:ext>
-          </c:extLst>
-        </c:ser>
-        <c:dLbls>
-          <c:dLblPos val="outEnd"/>
-          <c:showLegendKey val="0"/>
-          <c:showVal val="1"/>
-          <c:showCatName val="0"/>
-          <c:showSerName val="0"/>
-          <c:showPercent val="0"/>
-          <c:showBubbleSize val="0"/>
-        </c:dLbls>
-        <c:gapWidth val="140"/>
-        <c:axId val="-2068027336"/>
-        <c:axId val="-2113994440"/>
-      </c:barChart>
-      <c:catAx>
-        <c:axId val="-2068027336"/>
-        <c:scaling>
-          <c:orientation val="minMax"/>
-        </c:scaling>
-        <c:delete val="0"/>
-        <c:axPos val="b"/>
-        <c:numFmt formatCode="General" sourceLinked="0"/>
-        <c:majorTickMark val="out"/>
-        <c:minorTickMark val="none"/>
-        <c:tickLblPos val="low"/>
-        <c:spPr>
-          <a:ln>
-            <a:solidFill>
-              <a:srgbClr val="D9D9D9"/>
-            </a:solidFill>
-          </a:ln>
-        </c:spPr>
-        <c:txPr>
-          <a:bodyPr/>
-          <a:lstStyle/>
-          <a:p>
-            <a:pPr>
-              <a:defRPr sz="1100">
-                <a:solidFill>
-                  <a:srgbClr val="757575"/>
-                </a:solidFill>
-                <a:latin typeface="Arial"/>
-              </a:defRPr>
-            </a:pPr>
-            <a:endParaRPr lang="en-US"/>
-          </a:p>
-        </c:txPr>
-        <c:crossAx val="-2113994440"/>
-        <c:crosses val="autoZero"/>
-        <c:auto val="1"/>
-        <c:lblAlgn val="ctr"/>
-        <c:lblOffset val="100"/>
-        <c:noMultiLvlLbl val="0"/>
-      </c:catAx>
-      <c:valAx>
-        <c:axId val="-2113994440"/>
-        <c:scaling>
-          <c:orientation val="minMax"/>
-        </c:scaling>
-        <c:delete val="0"/>
-        <c:axPos val="l"/>
-        <c:numFmt formatCode=";;;" sourceLinked="0"/>
-        <c:majorTickMark val="out"/>
-        <c:minorTickMark val="none"/>
-        <c:tickLblPos val="nextTo"/>
-        <c:spPr>
-          <a:ln>
-            <a:noFill/>
-          </a:ln>
-        </c:spPr>
-        <c:crossAx val="-2068027336"/>
-        <c:crosses val="autoZero"/>
-        <c:crossBetween val="between"/>
-      </c:valAx>
-    </c:plotArea>
-    <c:plotVisOnly val="1"/>
-    <c:dispBlanksAs val="gap"/>
-    <c:showDLblsOverMax val="1"/>
-  </c:chart>
-  <c:txPr>
-    <a:bodyPr/>
-    <a:lstStyle/>
-    <a:p>
-      <a:pPr>
-        <a:defRPr sz="1800"/>
-      </a:pPr>
-      <a:endParaRPr lang="en-US"/>
-    </a:p>
-  </c:txPr>
-  <c:externalData r:id="rId1">
-    <c:autoUpdate val="0"/>
-  </c:externalData>
-</c:chartSpace>
-</file>
-
-<file path=ppt/charts/chart6.xml><?xml version="1.0" encoding="utf-8"?>
+<file path=ppt/charts/chart3.xml><?xml version="1.0" encoding="utf-8"?>
 <c:chartSpace xmlns:c="http://schemas.openxmlformats.org/drawingml/2006/chart" xmlns:a="http://schemas.openxmlformats.org/drawingml/2006/main" xmlns:r="http://schemas.openxmlformats.org/officeDocument/2006/relationships" xmlns:c16r2="http://schemas.microsoft.com/office/drawing/2015/06/chart">
   <c:date1904 val="0"/>
   <c:lang val="en-US"/>
@@ -1820,7 +852,7 @@
 </c:chartSpace>
 </file>
 
-<file path=ppt/charts/chart7.xml><?xml version="1.0" encoding="utf-8"?>
+<file path=ppt/charts/chart4.xml><?xml version="1.0" encoding="utf-8"?>
 <c:chartSpace xmlns:c="http://schemas.openxmlformats.org/drawingml/2006/chart" xmlns:a="http://schemas.openxmlformats.org/drawingml/2006/main" xmlns:r="http://schemas.openxmlformats.org/officeDocument/2006/relationships" xmlns:c16r2="http://schemas.microsoft.com/office/drawing/2015/06/chart">
   <c:date1904 val="0"/>
   <c:lang val="en-US"/>
@@ -2109,7 +1141,7 @@
 </c:chartSpace>
 </file>
 
-<file path=ppt/charts/chart8.xml><?xml version="1.0" encoding="utf-8"?>
+<file path=ppt/charts/chart5.xml><?xml version="1.0" encoding="utf-8"?>
 <c:chartSpace xmlns:c="http://schemas.openxmlformats.org/drawingml/2006/chart" xmlns:a="http://schemas.openxmlformats.org/drawingml/2006/main" xmlns:r="http://schemas.openxmlformats.org/officeDocument/2006/relationships" xmlns:c16r2="http://schemas.microsoft.com/office/drawing/2015/06/chart">
   <c:date1904 val="0"/>
   <c:lang val="en-US"/>
@@ -2465,6 +1497,27 @@
 </c:chartSpace>
 </file>
 
+<file path=ppt/comments/modernComment_101_0.xml><?xml version="1.0" encoding="utf-8"?>
+<p188:cmLst xmlns:a="http://schemas.openxmlformats.org/drawingml/2006/main" xmlns:r="http://schemas.openxmlformats.org/officeDocument/2006/relationships" xmlns:p188="http://schemas.microsoft.com/office/powerpoint/2018/8/main">
+  <p188:cm id="{9D37015C-7D34-49FA-BAA9-B6942D33995A}" authorId="{F7CB7528-0317-1151-A7B7-34D5B6A94F6F}" created="2026-07-17T16:24:44.055">
+    <pc:sldMkLst xmlns:pc="http://schemas.microsoft.com/office/powerpoint/2013/main/command">
+      <pc:docMk/>
+      <pc:sldMk cId="0" sldId="257"/>
+    </pc:sldMkLst>
+    <p188:txBody>
+      <a:bodyPr/>
+      <a:lstStyle/>
+      <a:p>
+        <a:r>
+          <a:rPr lang="en-US"/>
+          <a:t>Mention brand awareness on this slide?? </a:t>
+        </a:r>
+      </a:p>
+    </p188:txBody>
+  </p188:cm>
+</p188:cmLst>
+</file>
+
 <file path=ppt/slideLayouts/slideLayout1.xml><?xml version="1.0" encoding="utf-8"?>
 <p:sldLayout xmlns:a="http://schemas.openxmlformats.org/drawingml/2006/main" xmlns:r="http://schemas.openxmlformats.org/officeDocument/2006/relationships" xmlns:p="http://schemas.openxmlformats.org/presentationml/2006/main" type="title" preserve="1">
   <p:cSld name="Title Slide">
@@ -2644,7 +1697,7 @@
           <a:p>
             <a:fld id="{5BCAD085-E8A6-8845-BD4E-CB4CCA059FC4}" type="datetimeFigureOut">
               <a:rPr lang="en-US" smtClean="0"/>
-              <a:t>7/16/2026</a:t>
+              <a:t>7/17/2026</a:t>
             </a:fld>
             <a:endParaRPr lang="en-US"/>
           </a:p>
@@ -2812,7 +1865,7 @@
           <a:p>
             <a:fld id="{5BCAD085-E8A6-8845-BD4E-CB4CCA059FC4}" type="datetimeFigureOut">
               <a:rPr lang="en-US" smtClean="0"/>
-              <a:t>7/16/2026</a:t>
+              <a:t>7/17/2026</a:t>
             </a:fld>
             <a:endParaRPr lang="en-US"/>
           </a:p>
@@ -2990,7 +2043,7 @@
           <a:p>
             <a:fld id="{5BCAD085-E8A6-8845-BD4E-CB4CCA059FC4}" type="datetimeFigureOut">
               <a:rPr lang="en-US" smtClean="0"/>
-              <a:t>7/16/2026</a:t>
+              <a:t>7/17/2026</a:t>
             </a:fld>
             <a:endParaRPr lang="en-US"/>
           </a:p>
@@ -3158,7 +2211,7 @@
           <a:p>
             <a:fld id="{5BCAD085-E8A6-8845-BD4E-CB4CCA059FC4}" type="datetimeFigureOut">
               <a:rPr lang="en-US" smtClean="0"/>
-              <a:t>7/16/2026</a:t>
+              <a:t>7/17/2026</a:t>
             </a:fld>
             <a:endParaRPr lang="en-US"/>
           </a:p>
@@ -3403,7 +2456,7 @@
           <a:p>
             <a:fld id="{5BCAD085-E8A6-8845-BD4E-CB4CCA059FC4}" type="datetimeFigureOut">
               <a:rPr lang="en-US" smtClean="0"/>
-              <a:t>7/16/2026</a:t>
+              <a:t>7/17/2026</a:t>
             </a:fld>
             <a:endParaRPr lang="en-US"/>
           </a:p>
@@ -3688,7 +2741,7 @@
           <a:p>
             <a:fld id="{5BCAD085-E8A6-8845-BD4E-CB4CCA059FC4}" type="datetimeFigureOut">
               <a:rPr lang="en-US" smtClean="0"/>
-              <a:t>7/16/2026</a:t>
+              <a:t>7/17/2026</a:t>
             </a:fld>
             <a:endParaRPr lang="en-US"/>
           </a:p>
@@ -4107,7 +3160,7 @@
           <a:p>
             <a:fld id="{5BCAD085-E8A6-8845-BD4E-CB4CCA059FC4}" type="datetimeFigureOut">
               <a:rPr lang="en-US" smtClean="0"/>
-              <a:t>7/16/2026</a:t>
+              <a:t>7/17/2026</a:t>
             </a:fld>
             <a:endParaRPr lang="en-US"/>
           </a:p>
@@ -4224,7 +3277,7 @@
           <a:p>
             <a:fld id="{5BCAD085-E8A6-8845-BD4E-CB4CCA059FC4}" type="datetimeFigureOut">
               <a:rPr lang="en-US" smtClean="0"/>
-              <a:t>7/16/2026</a:t>
+              <a:t>7/17/2026</a:t>
             </a:fld>
             <a:endParaRPr lang="en-US"/>
           </a:p>
@@ -4319,7 +3372,7 @@
           <a:p>
             <a:fld id="{5BCAD085-E8A6-8845-BD4E-CB4CCA059FC4}" type="datetimeFigureOut">
               <a:rPr lang="en-US" smtClean="0"/>
-              <a:t>7/16/2026</a:t>
+              <a:t>7/17/2026</a:t>
             </a:fld>
             <a:endParaRPr lang="en-US"/>
           </a:p>
@@ -4594,7 +3647,7 @@
           <a:p>
             <a:fld id="{5BCAD085-E8A6-8845-BD4E-CB4CCA059FC4}" type="datetimeFigureOut">
               <a:rPr lang="en-US" smtClean="0"/>
-              <a:t>7/16/2026</a:t>
+              <a:t>7/17/2026</a:t>
             </a:fld>
             <a:endParaRPr lang="en-US"/>
           </a:p>
@@ -4846,7 +3899,7 @@
           <a:p>
             <a:fld id="{5BCAD085-E8A6-8845-BD4E-CB4CCA059FC4}" type="datetimeFigureOut">
               <a:rPr lang="en-US" smtClean="0"/>
-              <a:t>7/16/2026</a:t>
+              <a:t>7/17/2026</a:t>
             </a:fld>
             <a:endParaRPr lang="en-US"/>
           </a:p>
@@ -5057,7 +4110,7 @@
           <a:p>
             <a:fld id="{5BCAD085-E8A6-8845-BD4E-CB4CCA059FC4}" type="datetimeFigureOut">
               <a:rPr lang="en-US" smtClean="0"/>
-              <a:t>7/16/2026</a:t>
+              <a:t>7/17/2026</a:t>
             </a:fld>
             <a:endParaRPr lang="en-US"/>
           </a:p>
@@ -5772,6 +4825,38 @@
           <a:xfrm>
             <a:off x="822960" y="900000"/>
             <a:ext cx="2560320" cy="293370"/>
+          </a:xfrm>
+          <a:prstGeom prst="rect">
+            <a:avLst/>
+          </a:prstGeom>
+        </p:spPr>
+      </p:pic>
+      <p:pic>
+        <p:nvPicPr>
+          <p:cNvPr id="9" name="Picture 8">
+            <a:extLst>
+              <a:ext uri="{FF2B5EF4-FFF2-40B4-BE49-F238E27FC236}">
+                <a16:creationId xmlns:a16="http://schemas.microsoft.com/office/drawing/2014/main" id="{EB768716-E813-22B1-DA55-7CCD827955A8}"/>
+              </a:ext>
+            </a:extLst>
+          </p:cNvPr>
+          <p:cNvPicPr>
+            <a:picLocks noChangeAspect="1"/>
+          </p:cNvPicPr>
+          <p:nvPr/>
+        </p:nvPicPr>
+        <p:blipFill>
+          <a:blip r:embed="rId3">
+            <a:alphaModFix amt="35000"/>
+          </a:blip>
+          <a:stretch>
+            <a:fillRect/>
+          </a:stretch>
+        </p:blipFill>
+        <p:spPr>
+          <a:xfrm>
+            <a:off x="0" y="-531516"/>
+            <a:ext cx="13527464" cy="9018309"/>
           </a:xfrm>
           <a:prstGeom prst="rect">
             <a:avLst/>
@@ -9276,7 +8361,7 @@
                 </a:solidFill>
                 <a:latin typeface="Georgia"/>
               </a:rPr>
-              <a:t>20 day GTM campaign; success measured against campaign forecast.</a:t>
+              <a:t>20-day GTM campaign; success measured against campaign forecast.</a:t>
             </a:r>
             <a:endParaRPr sz="2300" b="0" i="0" dirty="0">
               <a:solidFill>
@@ -10565,11 +9650,807 @@
           <a:prstGeom prst="rect">
             <a:avLst/>
           </a:prstGeom>
+          <a:ln/>
+        </p:spPr>
+        <p:style>
+          <a:lnRef idx="2">
+            <a:schemeClr val="accent3"/>
+          </a:lnRef>
+          <a:fillRef idx="1">
+            <a:schemeClr val="lt1"/>
+          </a:fillRef>
+          <a:effectRef idx="0">
+            <a:schemeClr val="accent3"/>
+          </a:effectRef>
+          <a:fontRef idx="minor">
+            <a:schemeClr val="dk1"/>
+          </a:fontRef>
+        </p:style>
+        <p:txBody>
+          <a:bodyPr rtlCol="0" anchor="ctr"/>
+          <a:lstStyle/>
+          <a:p>
+            <a:pPr algn="ctr"/>
+            <a:endParaRPr/>
+          </a:p>
+        </p:txBody>
+      </p:sp>
+      <p:sp>
+        <p:nvSpPr>
+          <p:cNvPr id="5" name="TextBox 4"/>
+          <p:cNvSpPr txBox="1"/>
+          <p:nvPr/>
+        </p:nvSpPr>
+        <p:spPr>
+          <a:xfrm>
+            <a:off x="704088" y="1700784"/>
+            <a:ext cx="2331720" cy="594360"/>
+          </a:xfrm>
+          <a:prstGeom prst="rect">
+            <a:avLst/>
+          </a:prstGeom>
           <a:noFill/>
-          <a:ln w="9525">
-            <a:solidFill>
-              <a:srgbClr val="D9D9D9"/>
-            </a:solidFill>
+        </p:spPr>
+        <p:txBody>
+          <a:bodyPr wrap="square" lIns="0" tIns="0" rIns="0" bIns="0" anchor="t">
+            <a:spAutoFit/>
+          </a:bodyPr>
+          <a:lstStyle/>
+          <a:p>
+            <a:pPr algn="l"/>
+            <a:r>
+              <a:rPr sz="1000" b="1" i="0" dirty="0">
+                <a:solidFill>
+                  <a:srgbClr val="757575"/>
+                </a:solidFill>
+                <a:latin typeface="Arial"/>
+              </a:rPr>
+              <a:t>INCREMENTAL FOOTWEAR REVENUE</a:t>
+            </a:r>
+          </a:p>
+        </p:txBody>
+      </p:sp>
+      <p:sp>
+        <p:nvSpPr>
+          <p:cNvPr id="6" name="TextBox 5"/>
+          <p:cNvSpPr txBox="1"/>
+          <p:nvPr/>
+        </p:nvSpPr>
+        <p:spPr>
+          <a:xfrm>
+            <a:off x="704088" y="2286000"/>
+            <a:ext cx="2331720" cy="777240"/>
+          </a:xfrm>
+          <a:prstGeom prst="rect">
+            <a:avLst/>
+          </a:prstGeom>
+          <a:noFill/>
+        </p:spPr>
+        <p:txBody>
+          <a:bodyPr wrap="square" lIns="0" tIns="0" rIns="0" bIns="0" anchor="t">
+            <a:spAutoFit/>
+          </a:bodyPr>
+          <a:lstStyle/>
+          <a:p>
+            <a:pPr algn="l"/>
+            <a:r>
+              <a:rPr sz="4000" b="1" i="0" dirty="0">
+                <a:solidFill>
+                  <a:srgbClr val="0057B8"/>
+                </a:solidFill>
+                <a:latin typeface="Arial"/>
+              </a:rPr>
+              <a:t>+33%</a:t>
+            </a:r>
+          </a:p>
+        </p:txBody>
+      </p:sp>
+      <p:sp>
+        <p:nvSpPr>
+          <p:cNvPr id="7" name="TextBox 6"/>
+          <p:cNvSpPr txBox="1"/>
+          <p:nvPr/>
+        </p:nvSpPr>
+        <p:spPr>
+          <a:xfrm>
+            <a:off x="704088" y="3127248"/>
+            <a:ext cx="2331720" cy="548640"/>
+          </a:xfrm>
+          <a:prstGeom prst="rect">
+            <a:avLst/>
+          </a:prstGeom>
+          <a:noFill/>
+        </p:spPr>
+        <p:txBody>
+          <a:bodyPr wrap="square" lIns="0" tIns="0" rIns="0" bIns="0" anchor="t">
+            <a:spAutoFit/>
+          </a:bodyPr>
+          <a:lstStyle/>
+          <a:p>
+            <a:pPr algn="l">
+              <a:lnSpc>
+                <a:spcPct val="105000"/>
+              </a:lnSpc>
+            </a:pPr>
+            <a:r>
+              <a:rPr sz="1050" b="0" i="0" dirty="0">
+                <a:solidFill>
+                  <a:srgbClr val="333333"/>
+                </a:solidFill>
+                <a:latin typeface="Arial"/>
+              </a:rPr>
+              <a:t>+$134.6K vs modeled no-campaign baseline</a:t>
+            </a:r>
+          </a:p>
+        </p:txBody>
+      </p:sp>
+      <p:sp>
+        <p:nvSpPr>
+          <p:cNvPr id="8" name="TextBox 7"/>
+          <p:cNvSpPr txBox="1"/>
+          <p:nvPr/>
+        </p:nvSpPr>
+        <p:spPr>
+          <a:xfrm>
+            <a:off x="704088" y="3712463"/>
+            <a:ext cx="2331720" cy="274320"/>
+          </a:xfrm>
+          <a:prstGeom prst="rect">
+            <a:avLst/>
+          </a:prstGeom>
+          <a:noFill/>
+        </p:spPr>
+        <p:txBody>
+          <a:bodyPr wrap="square" lIns="0" tIns="0" rIns="0" bIns="0" anchor="t">
+            <a:spAutoFit/>
+          </a:bodyPr>
+          <a:lstStyle/>
+          <a:p>
+            <a:pPr algn="l"/>
+            <a:r>
+              <a:rPr sz="1050" b="0" i="0">
+                <a:solidFill>
+                  <a:srgbClr val="757575"/>
+                </a:solidFill>
+                <a:latin typeface="Arial"/>
+              </a:rPr>
+              <a:t>Target ≥ +10%  ·  </a:t>
+            </a:r>
+            <a:r>
+              <a:rPr sz="1050" b="1" i="0">
+                <a:solidFill>
+                  <a:srgbClr val="1F7A4D"/>
+                </a:solidFill>
+                <a:latin typeface="Arial"/>
+              </a:rPr>
+              <a:t>PASS</a:t>
+            </a:r>
+          </a:p>
+        </p:txBody>
+      </p:sp>
+      <p:sp>
+        <p:nvSpPr>
+          <p:cNvPr id="9" name="Rectangle 8"/>
+          <p:cNvSpPr/>
+          <p:nvPr/>
+        </p:nvSpPr>
+        <p:spPr>
+          <a:xfrm>
+            <a:off x="3346704" y="1481328"/>
+            <a:ext cx="2706624" cy="2606040"/>
+          </a:xfrm>
+          <a:prstGeom prst="rect">
+            <a:avLst/>
+          </a:prstGeom>
+          <a:ln/>
+        </p:spPr>
+        <p:style>
+          <a:lnRef idx="2">
+            <a:schemeClr val="accent3"/>
+          </a:lnRef>
+          <a:fillRef idx="1">
+            <a:schemeClr val="lt1"/>
+          </a:fillRef>
+          <a:effectRef idx="0">
+            <a:schemeClr val="accent3"/>
+          </a:effectRef>
+          <a:fontRef idx="minor">
+            <a:schemeClr val="dk1"/>
+          </a:fontRef>
+        </p:style>
+        <p:txBody>
+          <a:bodyPr rtlCol="0" anchor="ctr"/>
+          <a:lstStyle/>
+          <a:p>
+            <a:pPr algn="ctr"/>
+            <a:endParaRPr/>
+          </a:p>
+        </p:txBody>
+      </p:sp>
+      <p:sp>
+        <p:nvSpPr>
+          <p:cNvPr id="10" name="TextBox 9"/>
+          <p:cNvSpPr txBox="1"/>
+          <p:nvPr/>
+        </p:nvSpPr>
+        <p:spPr>
+          <a:xfrm>
+            <a:off x="3547872" y="1700784"/>
+            <a:ext cx="2331720" cy="594360"/>
+          </a:xfrm>
+          <a:prstGeom prst="rect">
+            <a:avLst/>
+          </a:prstGeom>
+          <a:noFill/>
+        </p:spPr>
+        <p:txBody>
+          <a:bodyPr wrap="square" lIns="0" tIns="0" rIns="0" bIns="0" anchor="t">
+            <a:spAutoFit/>
+          </a:bodyPr>
+          <a:lstStyle/>
+          <a:p>
+            <a:pPr algn="l"/>
+            <a:r>
+              <a:rPr sz="1000" b="1" i="0" dirty="0">
+                <a:solidFill>
+                  <a:srgbClr val="757575"/>
+                </a:solidFill>
+                <a:latin typeface="Arial"/>
+              </a:rPr>
+              <a:t>NEW-CUSTOMER SHARE, VESTAL PRO BUYERS</a:t>
+            </a:r>
+          </a:p>
+        </p:txBody>
+      </p:sp>
+      <p:sp>
+        <p:nvSpPr>
+          <p:cNvPr id="11" name="TextBox 10"/>
+          <p:cNvSpPr txBox="1"/>
+          <p:nvPr/>
+        </p:nvSpPr>
+        <p:spPr>
+          <a:xfrm>
+            <a:off x="3547872" y="2286000"/>
+            <a:ext cx="2331720" cy="777240"/>
+          </a:xfrm>
+          <a:prstGeom prst="rect">
+            <a:avLst/>
+          </a:prstGeom>
+          <a:noFill/>
+        </p:spPr>
+        <p:txBody>
+          <a:bodyPr wrap="square" lIns="0" tIns="0" rIns="0" bIns="0" anchor="t">
+            <a:spAutoFit/>
+          </a:bodyPr>
+          <a:lstStyle/>
+          <a:p>
+            <a:pPr algn="l"/>
+            <a:r>
+              <a:rPr sz="4000" b="1" i="0">
+                <a:solidFill>
+                  <a:srgbClr val="0057B8"/>
+                </a:solidFill>
+                <a:latin typeface="Arial"/>
+              </a:rPr>
+              <a:t>44%</a:t>
+            </a:r>
+          </a:p>
+        </p:txBody>
+      </p:sp>
+      <p:sp>
+        <p:nvSpPr>
+          <p:cNvPr id="12" name="TextBox 11"/>
+          <p:cNvSpPr txBox="1"/>
+          <p:nvPr/>
+        </p:nvSpPr>
+        <p:spPr>
+          <a:xfrm>
+            <a:off x="3547872" y="3127248"/>
+            <a:ext cx="2331720" cy="548640"/>
+          </a:xfrm>
+          <a:prstGeom prst="rect">
+            <a:avLst/>
+          </a:prstGeom>
+          <a:noFill/>
+        </p:spPr>
+        <p:txBody>
+          <a:bodyPr wrap="square" lIns="0" tIns="0" rIns="0" bIns="0" anchor="t">
+            <a:spAutoFit/>
+          </a:bodyPr>
+          <a:lstStyle/>
+          <a:p>
+            <a:pPr algn="l">
+              <a:lnSpc>
+                <a:spcPct val="105000"/>
+              </a:lnSpc>
+            </a:pPr>
+            <a:r>
+              <a:rPr sz="1050" b="0" i="0" dirty="0">
+                <a:solidFill>
+                  <a:srgbClr val="333333"/>
+                </a:solidFill>
+                <a:latin typeface="Arial"/>
+              </a:rPr>
+              <a:t>590 of 1,335 buyers new to Salomon</a:t>
+            </a:r>
+          </a:p>
+        </p:txBody>
+      </p:sp>
+      <p:sp>
+        <p:nvSpPr>
+          <p:cNvPr id="13" name="TextBox 12"/>
+          <p:cNvSpPr txBox="1"/>
+          <p:nvPr/>
+        </p:nvSpPr>
+        <p:spPr>
+          <a:xfrm>
+            <a:off x="3547872" y="3712463"/>
+            <a:ext cx="2331720" cy="274320"/>
+          </a:xfrm>
+          <a:prstGeom prst="rect">
+            <a:avLst/>
+          </a:prstGeom>
+          <a:noFill/>
+        </p:spPr>
+        <p:txBody>
+          <a:bodyPr wrap="square" lIns="0" tIns="0" rIns="0" bIns="0" anchor="t">
+            <a:spAutoFit/>
+          </a:bodyPr>
+          <a:lstStyle/>
+          <a:p>
+            <a:pPr algn="l"/>
+            <a:r>
+              <a:rPr sz="1050" b="0" i="0">
+                <a:solidFill>
+                  <a:srgbClr val="757575"/>
+                </a:solidFill>
+                <a:latin typeface="Arial"/>
+              </a:rPr>
+              <a:t>Target ≥ 25%  ·  </a:t>
+            </a:r>
+            <a:r>
+              <a:rPr sz="1050" b="1" i="0">
+                <a:solidFill>
+                  <a:srgbClr val="1F7A4D"/>
+                </a:solidFill>
+                <a:latin typeface="Arial"/>
+              </a:rPr>
+              <a:t>PASS</a:t>
+            </a:r>
+          </a:p>
+        </p:txBody>
+      </p:sp>
+      <p:sp>
+        <p:nvSpPr>
+          <p:cNvPr id="14" name="Rectangle 13"/>
+          <p:cNvSpPr/>
+          <p:nvPr/>
+        </p:nvSpPr>
+        <p:spPr>
+          <a:xfrm>
+            <a:off x="6190488" y="1481328"/>
+            <a:ext cx="2706624" cy="2606040"/>
+          </a:xfrm>
+          <a:prstGeom prst="rect">
+            <a:avLst/>
+          </a:prstGeom>
+          <a:ln/>
+        </p:spPr>
+        <p:style>
+          <a:lnRef idx="2">
+            <a:schemeClr val="accent1"/>
+          </a:lnRef>
+          <a:fillRef idx="1">
+            <a:schemeClr val="lt1"/>
+          </a:fillRef>
+          <a:effectRef idx="0">
+            <a:schemeClr val="accent1"/>
+          </a:effectRef>
+          <a:fontRef idx="minor">
+            <a:schemeClr val="dk1"/>
+          </a:fontRef>
+        </p:style>
+        <p:txBody>
+          <a:bodyPr rtlCol="0" anchor="ctr"/>
+          <a:lstStyle/>
+          <a:p>
+            <a:pPr algn="ctr"/>
+            <a:endParaRPr/>
+          </a:p>
+        </p:txBody>
+      </p:sp>
+      <p:sp>
+        <p:nvSpPr>
+          <p:cNvPr id="15" name="TextBox 14"/>
+          <p:cNvSpPr txBox="1"/>
+          <p:nvPr/>
+        </p:nvSpPr>
+        <p:spPr>
+          <a:xfrm>
+            <a:off x="6391655" y="1700784"/>
+            <a:ext cx="2331720" cy="594360"/>
+          </a:xfrm>
+          <a:prstGeom prst="rect">
+            <a:avLst/>
+          </a:prstGeom>
+          <a:noFill/>
+        </p:spPr>
+        <p:txBody>
+          <a:bodyPr wrap="square" lIns="0" tIns="0" rIns="0" bIns="0" anchor="t">
+            <a:spAutoFit/>
+          </a:bodyPr>
+          <a:lstStyle/>
+          <a:p>
+            <a:pPr algn="l"/>
+            <a:r>
+              <a:rPr sz="1000" b="1" i="0" dirty="0">
+                <a:solidFill>
+                  <a:srgbClr val="757575"/>
+                </a:solidFill>
+                <a:latin typeface="Arial"/>
+              </a:rPr>
+              <a:t>FRANCHISE CANNIBALIZATION, EST.</a:t>
+            </a:r>
+          </a:p>
+        </p:txBody>
+      </p:sp>
+      <p:sp>
+        <p:nvSpPr>
+          <p:cNvPr id="16" name="TextBox 15"/>
+          <p:cNvSpPr txBox="1"/>
+          <p:nvPr/>
+        </p:nvSpPr>
+        <p:spPr>
+          <a:xfrm>
+            <a:off x="6391655" y="2286000"/>
+            <a:ext cx="2331720" cy="777240"/>
+          </a:xfrm>
+          <a:prstGeom prst="rect">
+            <a:avLst/>
+          </a:prstGeom>
+          <a:noFill/>
+        </p:spPr>
+        <p:txBody>
+          <a:bodyPr wrap="square" lIns="0" tIns="0" rIns="0" bIns="0" anchor="t">
+            <a:spAutoFit/>
+          </a:bodyPr>
+          <a:lstStyle/>
+          <a:p>
+            <a:pPr algn="l"/>
+            <a:r>
+              <a:rPr sz="4000" b="1" i="0">
+                <a:solidFill>
+                  <a:srgbClr val="0057B8"/>
+                </a:solidFill>
+                <a:latin typeface="Arial"/>
+              </a:rPr>
+              <a:t>22–30%</a:t>
+            </a:r>
+          </a:p>
+        </p:txBody>
+      </p:sp>
+      <p:sp>
+        <p:nvSpPr>
+          <p:cNvPr id="17" name="TextBox 16"/>
+          <p:cNvSpPr txBox="1"/>
+          <p:nvPr/>
+        </p:nvSpPr>
+        <p:spPr>
+          <a:xfrm>
+            <a:off x="6391655" y="3127248"/>
+            <a:ext cx="2331720" cy="548640"/>
+          </a:xfrm>
+          <a:prstGeom prst="rect">
+            <a:avLst/>
+          </a:prstGeom>
+          <a:noFill/>
+        </p:spPr>
+        <p:txBody>
+          <a:bodyPr wrap="square" lIns="0" tIns="0" rIns="0" bIns="0" anchor="t">
+            <a:spAutoFit/>
+          </a:bodyPr>
+          <a:lstStyle/>
+          <a:p>
+            <a:pPr algn="l">
+              <a:lnSpc>
+                <a:spcPct val="105000"/>
+              </a:lnSpc>
+            </a:pPr>
+            <a:r>
+              <a:rPr sz="1050" b="0" i="0">
+                <a:solidFill>
+                  <a:srgbClr val="333333"/>
+                </a:solidFill>
+                <a:latin typeface="Arial"/>
+              </a:rPr>
+              <a:t>17–42% across baseline models</a:t>
+            </a:r>
+          </a:p>
+        </p:txBody>
+      </p:sp>
+      <p:sp>
+        <p:nvSpPr>
+          <p:cNvPr id="18" name="TextBox 17"/>
+          <p:cNvSpPr txBox="1"/>
+          <p:nvPr/>
+        </p:nvSpPr>
+        <p:spPr>
+          <a:xfrm>
+            <a:off x="6391655" y="3712463"/>
+            <a:ext cx="2331720" cy="161583"/>
+          </a:xfrm>
+          <a:prstGeom prst="rect">
+            <a:avLst/>
+          </a:prstGeom>
+          <a:noFill/>
+        </p:spPr>
+        <p:txBody>
+          <a:bodyPr wrap="square" lIns="0" tIns="0" rIns="0" bIns="0" anchor="t">
+            <a:spAutoFit/>
+          </a:bodyPr>
+          <a:lstStyle/>
+          <a:p>
+            <a:pPr algn="l"/>
+            <a:r>
+              <a:rPr sz="1050" b="0" i="0" dirty="0">
+                <a:solidFill>
+                  <a:srgbClr val="757575"/>
+                </a:solidFill>
+                <a:latin typeface="Arial"/>
+              </a:rPr>
+              <a:t>Guardrail &lt; </a:t>
+            </a:r>
+            <a:r>
+              <a:rPr lang="en-US" sz="1050" b="0" i="0" dirty="0">
+                <a:solidFill>
+                  <a:srgbClr val="757575"/>
+                </a:solidFill>
+                <a:latin typeface="Arial"/>
+              </a:rPr>
+              <a:t>10</a:t>
+            </a:r>
+            <a:r>
+              <a:rPr sz="1050" b="0" i="0" dirty="0">
+                <a:solidFill>
+                  <a:srgbClr val="757575"/>
+                </a:solidFill>
+                <a:latin typeface="Arial"/>
+              </a:rPr>
+              <a:t>%  ·  </a:t>
+            </a:r>
+            <a:r>
+              <a:rPr lang="en-US" sz="1050" b="1" i="0" dirty="0">
+                <a:solidFill>
+                  <a:schemeClr val="accent6">
+                    <a:lumMod val="75000"/>
+                  </a:schemeClr>
+                </a:solidFill>
+                <a:latin typeface="Arial"/>
+              </a:rPr>
+              <a:t>FLAG &amp; MONITOR</a:t>
+            </a:r>
+            <a:endParaRPr sz="1050" b="1" i="0" dirty="0">
+              <a:solidFill>
+                <a:schemeClr val="accent6">
+                  <a:lumMod val="75000"/>
+                </a:schemeClr>
+              </a:solidFill>
+              <a:latin typeface="Arial"/>
+            </a:endParaRPr>
+          </a:p>
+        </p:txBody>
+      </p:sp>
+      <p:sp>
+        <p:nvSpPr>
+          <p:cNvPr id="19" name="Rectangle 18"/>
+          <p:cNvSpPr/>
+          <p:nvPr/>
+        </p:nvSpPr>
+        <p:spPr>
+          <a:xfrm>
+            <a:off x="9034272" y="1481328"/>
+            <a:ext cx="2706624" cy="2606040"/>
+          </a:xfrm>
+          <a:prstGeom prst="rect">
+            <a:avLst/>
+          </a:prstGeom>
+          <a:ln/>
+        </p:spPr>
+        <p:style>
+          <a:lnRef idx="2">
+            <a:schemeClr val="accent3"/>
+          </a:lnRef>
+          <a:fillRef idx="1">
+            <a:schemeClr val="lt1"/>
+          </a:fillRef>
+          <a:effectRef idx="0">
+            <a:schemeClr val="accent3"/>
+          </a:effectRef>
+          <a:fontRef idx="minor">
+            <a:schemeClr val="dk1"/>
+          </a:fontRef>
+        </p:style>
+        <p:txBody>
+          <a:bodyPr rtlCol="0" anchor="ctr"/>
+          <a:lstStyle/>
+          <a:p>
+            <a:pPr algn="ctr"/>
+            <a:endParaRPr/>
+          </a:p>
+        </p:txBody>
+      </p:sp>
+      <p:sp>
+        <p:nvSpPr>
+          <p:cNvPr id="20" name="TextBox 19"/>
+          <p:cNvSpPr txBox="1"/>
+          <p:nvPr/>
+        </p:nvSpPr>
+        <p:spPr>
+          <a:xfrm>
+            <a:off x="9235440" y="1700784"/>
+            <a:ext cx="2331720" cy="594360"/>
+          </a:xfrm>
+          <a:prstGeom prst="rect">
+            <a:avLst/>
+          </a:prstGeom>
+          <a:noFill/>
+        </p:spPr>
+        <p:txBody>
+          <a:bodyPr wrap="square" lIns="0" tIns="0" rIns="0" bIns="0" anchor="t">
+            <a:spAutoFit/>
+          </a:bodyPr>
+          <a:lstStyle/>
+          <a:p>
+            <a:pPr algn="l"/>
+            <a:r>
+              <a:rPr sz="1000" b="1" i="0">
+                <a:solidFill>
+                  <a:srgbClr val="757575"/>
+                </a:solidFill>
+                <a:latin typeface="Arial"/>
+              </a:rPr>
+              <a:t>ADJACENT-CATEGORY HALO</a:t>
+            </a:r>
+          </a:p>
+        </p:txBody>
+      </p:sp>
+      <p:sp>
+        <p:nvSpPr>
+          <p:cNvPr id="21" name="TextBox 20"/>
+          <p:cNvSpPr txBox="1"/>
+          <p:nvPr/>
+        </p:nvSpPr>
+        <p:spPr>
+          <a:xfrm>
+            <a:off x="9235440" y="2286000"/>
+            <a:ext cx="2331720" cy="777240"/>
+          </a:xfrm>
+          <a:prstGeom prst="rect">
+            <a:avLst/>
+          </a:prstGeom>
+          <a:noFill/>
+        </p:spPr>
+        <p:txBody>
+          <a:bodyPr wrap="square" lIns="0" tIns="0" rIns="0" bIns="0" anchor="t">
+            <a:spAutoFit/>
+          </a:bodyPr>
+          <a:lstStyle/>
+          <a:p>
+            <a:pPr algn="l"/>
+            <a:r>
+              <a:rPr sz="4000" b="1" i="0" dirty="0">
+                <a:solidFill>
+                  <a:srgbClr val="0057B8"/>
+                </a:solidFill>
+                <a:latin typeface="Arial"/>
+              </a:rPr>
+              <a:t>+9%</a:t>
+            </a:r>
+          </a:p>
+        </p:txBody>
+      </p:sp>
+      <p:sp>
+        <p:nvSpPr>
+          <p:cNvPr id="22" name="TextBox 21"/>
+          <p:cNvSpPr txBox="1"/>
+          <p:nvPr/>
+        </p:nvSpPr>
+        <p:spPr>
+          <a:xfrm>
+            <a:off x="9235440" y="3127248"/>
+            <a:ext cx="2331720" cy="548640"/>
+          </a:xfrm>
+          <a:prstGeom prst="rect">
+            <a:avLst/>
+          </a:prstGeom>
+          <a:noFill/>
+        </p:spPr>
+        <p:txBody>
+          <a:bodyPr wrap="square" lIns="0" tIns="0" rIns="0" bIns="0" anchor="t">
+            <a:spAutoFit/>
+          </a:bodyPr>
+          <a:lstStyle/>
+          <a:p>
+            <a:pPr algn="l">
+              <a:lnSpc>
+                <a:spcPct val="105000"/>
+              </a:lnSpc>
+            </a:pPr>
+            <a:r>
+              <a:rPr sz="1050" b="0" i="0" dirty="0">
+                <a:solidFill>
+                  <a:srgbClr val="333333"/>
+                </a:solidFill>
+                <a:latin typeface="Arial"/>
+              </a:rPr>
+              <a:t>95% CI +3% to +15% vs baseline</a:t>
+            </a:r>
+          </a:p>
+        </p:txBody>
+      </p:sp>
+      <p:sp>
+        <p:nvSpPr>
+          <p:cNvPr id="23" name="TextBox 22"/>
+          <p:cNvSpPr txBox="1"/>
+          <p:nvPr/>
+        </p:nvSpPr>
+        <p:spPr>
+          <a:xfrm>
+            <a:off x="9235440" y="3712463"/>
+            <a:ext cx="2331720" cy="274320"/>
+          </a:xfrm>
+          <a:prstGeom prst="rect">
+            <a:avLst/>
+          </a:prstGeom>
+          <a:noFill/>
+        </p:spPr>
+        <p:txBody>
+          <a:bodyPr wrap="square" lIns="0" tIns="0" rIns="0" bIns="0" anchor="t">
+            <a:spAutoFit/>
+          </a:bodyPr>
+          <a:lstStyle/>
+          <a:p>
+            <a:pPr algn="l"/>
+            <a:r>
+              <a:rPr sz="1050" b="0" i="0">
+                <a:solidFill>
+                  <a:srgbClr val="757575"/>
+                </a:solidFill>
+                <a:latin typeface="Arial"/>
+              </a:rPr>
+              <a:t>Target ≥ +5%  ·  </a:t>
+            </a:r>
+            <a:r>
+              <a:rPr sz="1050" b="1" i="0">
+                <a:solidFill>
+                  <a:srgbClr val="1F7A4D"/>
+                </a:solidFill>
+                <a:latin typeface="Arial"/>
+              </a:rPr>
+              <a:t>PASS</a:t>
+            </a:r>
+          </a:p>
+        </p:txBody>
+      </p:sp>
+      <p:sp>
+        <p:nvSpPr>
+          <p:cNvPr id="24" name="Rectangle 23"/>
+          <p:cNvSpPr/>
+          <p:nvPr/>
+        </p:nvSpPr>
+        <p:spPr>
+          <a:xfrm>
+            <a:off x="502920" y="4434840"/>
+            <a:ext cx="11183112" cy="1783080"/>
+          </a:xfrm>
+          <a:prstGeom prst="rect">
+            <a:avLst/>
+          </a:prstGeom>
+          <a:solidFill>
+            <a:srgbClr val="000000"/>
+          </a:solidFill>
+          <a:ln>
+            <a:noFill/>
           </a:ln>
           <a:effectLst/>
         </p:spPr>
@@ -10598,826 +10479,6 @@
       </p:sp>
       <p:sp>
         <p:nvSpPr>
-          <p:cNvPr id="5" name="TextBox 4"/>
-          <p:cNvSpPr txBox="1"/>
-          <p:nvPr/>
-        </p:nvSpPr>
-        <p:spPr>
-          <a:xfrm>
-            <a:off x="704088" y="1700784"/>
-            <a:ext cx="2331720" cy="594360"/>
-          </a:xfrm>
-          <a:prstGeom prst="rect">
-            <a:avLst/>
-          </a:prstGeom>
-          <a:noFill/>
-        </p:spPr>
-        <p:txBody>
-          <a:bodyPr wrap="square" lIns="0" tIns="0" rIns="0" bIns="0" anchor="t">
-            <a:spAutoFit/>
-          </a:bodyPr>
-          <a:lstStyle/>
-          <a:p>
-            <a:pPr algn="l"/>
-            <a:r>
-              <a:rPr sz="1000" b="1" i="0" dirty="0">
-                <a:solidFill>
-                  <a:srgbClr val="757575"/>
-                </a:solidFill>
-                <a:latin typeface="Arial"/>
-              </a:rPr>
-              <a:t>INCREMENTAL FOOTWEAR REVENUE</a:t>
-            </a:r>
-          </a:p>
-        </p:txBody>
-      </p:sp>
-      <p:sp>
-        <p:nvSpPr>
-          <p:cNvPr id="6" name="TextBox 5"/>
-          <p:cNvSpPr txBox="1"/>
-          <p:nvPr/>
-        </p:nvSpPr>
-        <p:spPr>
-          <a:xfrm>
-            <a:off x="704088" y="2286000"/>
-            <a:ext cx="2331720" cy="777240"/>
-          </a:xfrm>
-          <a:prstGeom prst="rect">
-            <a:avLst/>
-          </a:prstGeom>
-          <a:noFill/>
-        </p:spPr>
-        <p:txBody>
-          <a:bodyPr wrap="square" lIns="0" tIns="0" rIns="0" bIns="0" anchor="t">
-            <a:spAutoFit/>
-          </a:bodyPr>
-          <a:lstStyle/>
-          <a:p>
-            <a:pPr algn="l"/>
-            <a:r>
-              <a:rPr sz="4000" b="1" i="0" dirty="0">
-                <a:solidFill>
-                  <a:srgbClr val="0057B8"/>
-                </a:solidFill>
-                <a:latin typeface="Arial"/>
-              </a:rPr>
-              <a:t>+33%</a:t>
-            </a:r>
-          </a:p>
-        </p:txBody>
-      </p:sp>
-      <p:sp>
-        <p:nvSpPr>
-          <p:cNvPr id="7" name="TextBox 6"/>
-          <p:cNvSpPr txBox="1"/>
-          <p:nvPr/>
-        </p:nvSpPr>
-        <p:spPr>
-          <a:xfrm>
-            <a:off x="704088" y="3127248"/>
-            <a:ext cx="2331720" cy="548640"/>
-          </a:xfrm>
-          <a:prstGeom prst="rect">
-            <a:avLst/>
-          </a:prstGeom>
-          <a:noFill/>
-        </p:spPr>
-        <p:txBody>
-          <a:bodyPr wrap="square" lIns="0" tIns="0" rIns="0" bIns="0" anchor="t">
-            <a:spAutoFit/>
-          </a:bodyPr>
-          <a:lstStyle/>
-          <a:p>
-            <a:pPr algn="l">
-              <a:lnSpc>
-                <a:spcPct val="105000"/>
-              </a:lnSpc>
-            </a:pPr>
-            <a:r>
-              <a:rPr sz="1050" b="0" i="0" dirty="0">
-                <a:solidFill>
-                  <a:srgbClr val="333333"/>
-                </a:solidFill>
-                <a:latin typeface="Arial"/>
-              </a:rPr>
-              <a:t>+$134.6K vs modeled no-campaign baseline</a:t>
-            </a:r>
-          </a:p>
-        </p:txBody>
-      </p:sp>
-      <p:sp>
-        <p:nvSpPr>
-          <p:cNvPr id="8" name="TextBox 7"/>
-          <p:cNvSpPr txBox="1"/>
-          <p:nvPr/>
-        </p:nvSpPr>
-        <p:spPr>
-          <a:xfrm>
-            <a:off x="704088" y="3712463"/>
-            <a:ext cx="2331720" cy="274320"/>
-          </a:xfrm>
-          <a:prstGeom prst="rect">
-            <a:avLst/>
-          </a:prstGeom>
-          <a:noFill/>
-        </p:spPr>
-        <p:txBody>
-          <a:bodyPr wrap="square" lIns="0" tIns="0" rIns="0" bIns="0" anchor="t">
-            <a:spAutoFit/>
-          </a:bodyPr>
-          <a:lstStyle/>
-          <a:p>
-            <a:pPr algn="l"/>
-            <a:r>
-              <a:rPr sz="1050" b="0" i="0">
-                <a:solidFill>
-                  <a:srgbClr val="757575"/>
-                </a:solidFill>
-                <a:latin typeface="Arial"/>
-              </a:rPr>
-              <a:t>Target ≥ +10%  ·  </a:t>
-            </a:r>
-            <a:r>
-              <a:rPr sz="1050" b="1" i="0">
-                <a:solidFill>
-                  <a:srgbClr val="1F7A4D"/>
-                </a:solidFill>
-                <a:latin typeface="Arial"/>
-              </a:rPr>
-              <a:t>PASS</a:t>
-            </a:r>
-          </a:p>
-        </p:txBody>
-      </p:sp>
-      <p:sp>
-        <p:nvSpPr>
-          <p:cNvPr id="9" name="Rectangle 8"/>
-          <p:cNvSpPr/>
-          <p:nvPr/>
-        </p:nvSpPr>
-        <p:spPr>
-          <a:xfrm>
-            <a:off x="3346704" y="1481328"/>
-            <a:ext cx="2706624" cy="2606040"/>
-          </a:xfrm>
-          <a:prstGeom prst="rect">
-            <a:avLst/>
-          </a:prstGeom>
-          <a:noFill/>
-          <a:ln w="9525">
-            <a:solidFill>
-              <a:srgbClr val="D9D9D9"/>
-            </a:solidFill>
-          </a:ln>
-          <a:effectLst/>
-        </p:spPr>
-        <p:style>
-          <a:lnRef idx="1">
-            <a:schemeClr val="accent1"/>
-          </a:lnRef>
-          <a:fillRef idx="3">
-            <a:schemeClr val="accent1"/>
-          </a:fillRef>
-          <a:effectRef idx="2">
-            <a:schemeClr val="accent1"/>
-          </a:effectRef>
-          <a:fontRef idx="minor">
-            <a:schemeClr val="lt1"/>
-          </a:fontRef>
-        </p:style>
-        <p:txBody>
-          <a:bodyPr rtlCol="0" anchor="ctr"/>
-          <a:lstStyle/>
-          <a:p>
-            <a:pPr algn="ctr"/>
-            <a:endParaRPr/>
-          </a:p>
-        </p:txBody>
-      </p:sp>
-      <p:sp>
-        <p:nvSpPr>
-          <p:cNvPr id="10" name="TextBox 9"/>
-          <p:cNvSpPr txBox="1"/>
-          <p:nvPr/>
-        </p:nvSpPr>
-        <p:spPr>
-          <a:xfrm>
-            <a:off x="3547872" y="1700784"/>
-            <a:ext cx="2331720" cy="594360"/>
-          </a:xfrm>
-          <a:prstGeom prst="rect">
-            <a:avLst/>
-          </a:prstGeom>
-          <a:noFill/>
-        </p:spPr>
-        <p:txBody>
-          <a:bodyPr wrap="square" lIns="0" tIns="0" rIns="0" bIns="0" anchor="t">
-            <a:spAutoFit/>
-          </a:bodyPr>
-          <a:lstStyle/>
-          <a:p>
-            <a:pPr algn="l"/>
-            <a:r>
-              <a:rPr sz="1000" b="1" i="0" dirty="0">
-                <a:solidFill>
-                  <a:srgbClr val="757575"/>
-                </a:solidFill>
-                <a:latin typeface="Arial"/>
-              </a:rPr>
-              <a:t>NEW-CUSTOMER SHARE, VESTAL PRO BUYERS</a:t>
-            </a:r>
-          </a:p>
-        </p:txBody>
-      </p:sp>
-      <p:sp>
-        <p:nvSpPr>
-          <p:cNvPr id="11" name="TextBox 10"/>
-          <p:cNvSpPr txBox="1"/>
-          <p:nvPr/>
-        </p:nvSpPr>
-        <p:spPr>
-          <a:xfrm>
-            <a:off x="3547872" y="2286000"/>
-            <a:ext cx="2331720" cy="777240"/>
-          </a:xfrm>
-          <a:prstGeom prst="rect">
-            <a:avLst/>
-          </a:prstGeom>
-          <a:noFill/>
-        </p:spPr>
-        <p:txBody>
-          <a:bodyPr wrap="square" lIns="0" tIns="0" rIns="0" bIns="0" anchor="t">
-            <a:spAutoFit/>
-          </a:bodyPr>
-          <a:lstStyle/>
-          <a:p>
-            <a:pPr algn="l"/>
-            <a:r>
-              <a:rPr sz="4000" b="1" i="0">
-                <a:solidFill>
-                  <a:srgbClr val="0057B8"/>
-                </a:solidFill>
-                <a:latin typeface="Arial"/>
-              </a:rPr>
-              <a:t>44%</a:t>
-            </a:r>
-          </a:p>
-        </p:txBody>
-      </p:sp>
-      <p:sp>
-        <p:nvSpPr>
-          <p:cNvPr id="12" name="TextBox 11"/>
-          <p:cNvSpPr txBox="1"/>
-          <p:nvPr/>
-        </p:nvSpPr>
-        <p:spPr>
-          <a:xfrm>
-            <a:off x="3547872" y="3127248"/>
-            <a:ext cx="2331720" cy="548640"/>
-          </a:xfrm>
-          <a:prstGeom prst="rect">
-            <a:avLst/>
-          </a:prstGeom>
-          <a:noFill/>
-        </p:spPr>
-        <p:txBody>
-          <a:bodyPr wrap="square" lIns="0" tIns="0" rIns="0" bIns="0" anchor="t">
-            <a:spAutoFit/>
-          </a:bodyPr>
-          <a:lstStyle/>
-          <a:p>
-            <a:pPr algn="l">
-              <a:lnSpc>
-                <a:spcPct val="105000"/>
-              </a:lnSpc>
-            </a:pPr>
-            <a:r>
-              <a:rPr sz="1050" b="0" i="0" dirty="0">
-                <a:solidFill>
-                  <a:srgbClr val="333333"/>
-                </a:solidFill>
-                <a:latin typeface="Arial"/>
-              </a:rPr>
-              <a:t>590 of 1,335 buyers new to Salomon</a:t>
-            </a:r>
-          </a:p>
-        </p:txBody>
-      </p:sp>
-      <p:sp>
-        <p:nvSpPr>
-          <p:cNvPr id="13" name="TextBox 12"/>
-          <p:cNvSpPr txBox="1"/>
-          <p:nvPr/>
-        </p:nvSpPr>
-        <p:spPr>
-          <a:xfrm>
-            <a:off x="3547872" y="3712463"/>
-            <a:ext cx="2331720" cy="274320"/>
-          </a:xfrm>
-          <a:prstGeom prst="rect">
-            <a:avLst/>
-          </a:prstGeom>
-          <a:noFill/>
-        </p:spPr>
-        <p:txBody>
-          <a:bodyPr wrap="square" lIns="0" tIns="0" rIns="0" bIns="0" anchor="t">
-            <a:spAutoFit/>
-          </a:bodyPr>
-          <a:lstStyle/>
-          <a:p>
-            <a:pPr algn="l"/>
-            <a:r>
-              <a:rPr sz="1050" b="0" i="0">
-                <a:solidFill>
-                  <a:srgbClr val="757575"/>
-                </a:solidFill>
-                <a:latin typeface="Arial"/>
-              </a:rPr>
-              <a:t>Target ≥ 25%  ·  </a:t>
-            </a:r>
-            <a:r>
-              <a:rPr sz="1050" b="1" i="0">
-                <a:solidFill>
-                  <a:srgbClr val="1F7A4D"/>
-                </a:solidFill>
-                <a:latin typeface="Arial"/>
-              </a:rPr>
-              <a:t>PASS</a:t>
-            </a:r>
-          </a:p>
-        </p:txBody>
-      </p:sp>
-      <p:sp>
-        <p:nvSpPr>
-          <p:cNvPr id="14" name="Rectangle 13"/>
-          <p:cNvSpPr/>
-          <p:nvPr/>
-        </p:nvSpPr>
-        <p:spPr>
-          <a:xfrm>
-            <a:off x="6190488" y="1481328"/>
-            <a:ext cx="2706624" cy="2606040"/>
-          </a:xfrm>
-          <a:prstGeom prst="rect">
-            <a:avLst/>
-          </a:prstGeom>
-          <a:noFill/>
-          <a:ln w="9525">
-            <a:solidFill>
-              <a:srgbClr val="D9D9D9"/>
-            </a:solidFill>
-          </a:ln>
-          <a:effectLst/>
-        </p:spPr>
-        <p:style>
-          <a:lnRef idx="1">
-            <a:schemeClr val="accent1"/>
-          </a:lnRef>
-          <a:fillRef idx="3">
-            <a:schemeClr val="accent1"/>
-          </a:fillRef>
-          <a:effectRef idx="2">
-            <a:schemeClr val="accent1"/>
-          </a:effectRef>
-          <a:fontRef idx="minor">
-            <a:schemeClr val="lt1"/>
-          </a:fontRef>
-        </p:style>
-        <p:txBody>
-          <a:bodyPr rtlCol="0" anchor="ctr"/>
-          <a:lstStyle/>
-          <a:p>
-            <a:pPr algn="ctr"/>
-            <a:endParaRPr/>
-          </a:p>
-        </p:txBody>
-      </p:sp>
-      <p:sp>
-        <p:nvSpPr>
-          <p:cNvPr id="15" name="TextBox 14"/>
-          <p:cNvSpPr txBox="1"/>
-          <p:nvPr/>
-        </p:nvSpPr>
-        <p:spPr>
-          <a:xfrm>
-            <a:off x="6391655" y="1700784"/>
-            <a:ext cx="2331720" cy="594360"/>
-          </a:xfrm>
-          <a:prstGeom prst="rect">
-            <a:avLst/>
-          </a:prstGeom>
-          <a:noFill/>
-        </p:spPr>
-        <p:txBody>
-          <a:bodyPr wrap="square" lIns="0" tIns="0" rIns="0" bIns="0" anchor="t">
-            <a:spAutoFit/>
-          </a:bodyPr>
-          <a:lstStyle/>
-          <a:p>
-            <a:pPr algn="l"/>
-            <a:r>
-              <a:rPr sz="1000" b="1" i="0" dirty="0">
-                <a:solidFill>
-                  <a:srgbClr val="757575"/>
-                </a:solidFill>
-                <a:latin typeface="Arial"/>
-              </a:rPr>
-              <a:t>FRANCHISE CANNIBALIZATION, EST.</a:t>
-            </a:r>
-          </a:p>
-        </p:txBody>
-      </p:sp>
-      <p:sp>
-        <p:nvSpPr>
-          <p:cNvPr id="16" name="TextBox 15"/>
-          <p:cNvSpPr txBox="1"/>
-          <p:nvPr/>
-        </p:nvSpPr>
-        <p:spPr>
-          <a:xfrm>
-            <a:off x="6391655" y="2286000"/>
-            <a:ext cx="2331720" cy="777240"/>
-          </a:xfrm>
-          <a:prstGeom prst="rect">
-            <a:avLst/>
-          </a:prstGeom>
-          <a:noFill/>
-        </p:spPr>
-        <p:txBody>
-          <a:bodyPr wrap="square" lIns="0" tIns="0" rIns="0" bIns="0" anchor="t">
-            <a:spAutoFit/>
-          </a:bodyPr>
-          <a:lstStyle/>
-          <a:p>
-            <a:pPr algn="l"/>
-            <a:r>
-              <a:rPr sz="4000" b="1" i="0">
-                <a:solidFill>
-                  <a:srgbClr val="0057B8"/>
-                </a:solidFill>
-                <a:latin typeface="Arial"/>
-              </a:rPr>
-              <a:t>22–30%</a:t>
-            </a:r>
-          </a:p>
-        </p:txBody>
-      </p:sp>
-      <p:sp>
-        <p:nvSpPr>
-          <p:cNvPr id="17" name="TextBox 16"/>
-          <p:cNvSpPr txBox="1"/>
-          <p:nvPr/>
-        </p:nvSpPr>
-        <p:spPr>
-          <a:xfrm>
-            <a:off x="6391655" y="3127248"/>
-            <a:ext cx="2331720" cy="548640"/>
-          </a:xfrm>
-          <a:prstGeom prst="rect">
-            <a:avLst/>
-          </a:prstGeom>
-          <a:noFill/>
-        </p:spPr>
-        <p:txBody>
-          <a:bodyPr wrap="square" lIns="0" tIns="0" rIns="0" bIns="0" anchor="t">
-            <a:spAutoFit/>
-          </a:bodyPr>
-          <a:lstStyle/>
-          <a:p>
-            <a:pPr algn="l">
-              <a:lnSpc>
-                <a:spcPct val="105000"/>
-              </a:lnSpc>
-            </a:pPr>
-            <a:r>
-              <a:rPr sz="1050" b="0" i="0">
-                <a:solidFill>
-                  <a:srgbClr val="333333"/>
-                </a:solidFill>
-                <a:latin typeface="Arial"/>
-              </a:rPr>
-              <a:t>17–42% across baseline models</a:t>
-            </a:r>
-          </a:p>
-        </p:txBody>
-      </p:sp>
-      <p:sp>
-        <p:nvSpPr>
-          <p:cNvPr id="18" name="TextBox 17"/>
-          <p:cNvSpPr txBox="1"/>
-          <p:nvPr/>
-        </p:nvSpPr>
-        <p:spPr>
-          <a:xfrm>
-            <a:off x="6391655" y="3712463"/>
-            <a:ext cx="2331720" cy="161583"/>
-          </a:xfrm>
-          <a:prstGeom prst="rect">
-            <a:avLst/>
-          </a:prstGeom>
-          <a:noFill/>
-        </p:spPr>
-        <p:txBody>
-          <a:bodyPr wrap="square" lIns="0" tIns="0" rIns="0" bIns="0" anchor="t">
-            <a:spAutoFit/>
-          </a:bodyPr>
-          <a:lstStyle/>
-          <a:p>
-            <a:pPr algn="l"/>
-            <a:r>
-              <a:rPr sz="1050" b="0" i="0" dirty="0">
-                <a:solidFill>
-                  <a:srgbClr val="757575"/>
-                </a:solidFill>
-                <a:latin typeface="Arial"/>
-              </a:rPr>
-              <a:t>Guardrail &lt; </a:t>
-            </a:r>
-            <a:r>
-              <a:rPr lang="en-US" sz="1050" b="0" i="0" dirty="0">
-                <a:solidFill>
-                  <a:srgbClr val="757575"/>
-                </a:solidFill>
-                <a:latin typeface="Arial"/>
-              </a:rPr>
-              <a:t>10</a:t>
-            </a:r>
-            <a:r>
-              <a:rPr sz="1050" b="0" i="0" dirty="0">
-                <a:solidFill>
-                  <a:srgbClr val="757575"/>
-                </a:solidFill>
-                <a:latin typeface="Arial"/>
-              </a:rPr>
-              <a:t>%  ·  </a:t>
-            </a:r>
-            <a:r>
-              <a:rPr lang="en-US" sz="1050" b="1" i="0" dirty="0">
-                <a:solidFill>
-                  <a:schemeClr val="accent6">
-                    <a:lumMod val="75000"/>
-                  </a:schemeClr>
-                </a:solidFill>
-                <a:latin typeface="Arial"/>
-              </a:rPr>
-              <a:t>FLAG &amp; MONITOR</a:t>
-            </a:r>
-            <a:endParaRPr sz="1050" b="1" i="0" dirty="0">
-              <a:solidFill>
-                <a:schemeClr val="accent6">
-                  <a:lumMod val="75000"/>
-                </a:schemeClr>
-              </a:solidFill>
-              <a:latin typeface="Arial"/>
-            </a:endParaRPr>
-          </a:p>
-        </p:txBody>
-      </p:sp>
-      <p:sp>
-        <p:nvSpPr>
-          <p:cNvPr id="19" name="Rectangle 18"/>
-          <p:cNvSpPr/>
-          <p:nvPr/>
-        </p:nvSpPr>
-        <p:spPr>
-          <a:xfrm>
-            <a:off x="9034272" y="1481328"/>
-            <a:ext cx="2706624" cy="2606040"/>
-          </a:xfrm>
-          <a:prstGeom prst="rect">
-            <a:avLst/>
-          </a:prstGeom>
-          <a:noFill/>
-          <a:ln w="9525">
-            <a:solidFill>
-              <a:srgbClr val="D9D9D9"/>
-            </a:solidFill>
-          </a:ln>
-          <a:effectLst/>
-        </p:spPr>
-        <p:style>
-          <a:lnRef idx="1">
-            <a:schemeClr val="accent1"/>
-          </a:lnRef>
-          <a:fillRef idx="3">
-            <a:schemeClr val="accent1"/>
-          </a:fillRef>
-          <a:effectRef idx="2">
-            <a:schemeClr val="accent1"/>
-          </a:effectRef>
-          <a:fontRef idx="minor">
-            <a:schemeClr val="lt1"/>
-          </a:fontRef>
-        </p:style>
-        <p:txBody>
-          <a:bodyPr rtlCol="0" anchor="ctr"/>
-          <a:lstStyle/>
-          <a:p>
-            <a:pPr algn="ctr"/>
-            <a:endParaRPr/>
-          </a:p>
-        </p:txBody>
-      </p:sp>
-      <p:sp>
-        <p:nvSpPr>
-          <p:cNvPr id="20" name="TextBox 19"/>
-          <p:cNvSpPr txBox="1"/>
-          <p:nvPr/>
-        </p:nvSpPr>
-        <p:spPr>
-          <a:xfrm>
-            <a:off x="9235440" y="1700784"/>
-            <a:ext cx="2331720" cy="594360"/>
-          </a:xfrm>
-          <a:prstGeom prst="rect">
-            <a:avLst/>
-          </a:prstGeom>
-          <a:noFill/>
-        </p:spPr>
-        <p:txBody>
-          <a:bodyPr wrap="square" lIns="0" tIns="0" rIns="0" bIns="0" anchor="t">
-            <a:spAutoFit/>
-          </a:bodyPr>
-          <a:lstStyle/>
-          <a:p>
-            <a:pPr algn="l"/>
-            <a:r>
-              <a:rPr sz="1000" b="1" i="0">
-                <a:solidFill>
-                  <a:srgbClr val="757575"/>
-                </a:solidFill>
-                <a:latin typeface="Arial"/>
-              </a:rPr>
-              <a:t>ADJACENT-CATEGORY HALO</a:t>
-            </a:r>
-          </a:p>
-        </p:txBody>
-      </p:sp>
-      <p:sp>
-        <p:nvSpPr>
-          <p:cNvPr id="21" name="TextBox 20"/>
-          <p:cNvSpPr txBox="1"/>
-          <p:nvPr/>
-        </p:nvSpPr>
-        <p:spPr>
-          <a:xfrm>
-            <a:off x="9235440" y="2286000"/>
-            <a:ext cx="2331720" cy="777240"/>
-          </a:xfrm>
-          <a:prstGeom prst="rect">
-            <a:avLst/>
-          </a:prstGeom>
-          <a:noFill/>
-        </p:spPr>
-        <p:txBody>
-          <a:bodyPr wrap="square" lIns="0" tIns="0" rIns="0" bIns="0" anchor="t">
-            <a:spAutoFit/>
-          </a:bodyPr>
-          <a:lstStyle/>
-          <a:p>
-            <a:pPr algn="l"/>
-            <a:r>
-              <a:rPr sz="4000" b="1" i="0" dirty="0">
-                <a:solidFill>
-                  <a:srgbClr val="0057B8"/>
-                </a:solidFill>
-                <a:latin typeface="Arial"/>
-              </a:rPr>
-              <a:t>+9%</a:t>
-            </a:r>
-          </a:p>
-        </p:txBody>
-      </p:sp>
-      <p:sp>
-        <p:nvSpPr>
-          <p:cNvPr id="22" name="TextBox 21"/>
-          <p:cNvSpPr txBox="1"/>
-          <p:nvPr/>
-        </p:nvSpPr>
-        <p:spPr>
-          <a:xfrm>
-            <a:off x="9235440" y="3127248"/>
-            <a:ext cx="2331720" cy="548640"/>
-          </a:xfrm>
-          <a:prstGeom prst="rect">
-            <a:avLst/>
-          </a:prstGeom>
-          <a:noFill/>
-        </p:spPr>
-        <p:txBody>
-          <a:bodyPr wrap="square" lIns="0" tIns="0" rIns="0" bIns="0" anchor="t">
-            <a:spAutoFit/>
-          </a:bodyPr>
-          <a:lstStyle/>
-          <a:p>
-            <a:pPr algn="l">
-              <a:lnSpc>
-                <a:spcPct val="105000"/>
-              </a:lnSpc>
-            </a:pPr>
-            <a:r>
-              <a:rPr sz="1050" b="0" i="0" dirty="0">
-                <a:solidFill>
-                  <a:srgbClr val="333333"/>
-                </a:solidFill>
-                <a:latin typeface="Arial"/>
-              </a:rPr>
-              <a:t>95% CI +3% to +15% vs baseline</a:t>
-            </a:r>
-          </a:p>
-        </p:txBody>
-      </p:sp>
-      <p:sp>
-        <p:nvSpPr>
-          <p:cNvPr id="23" name="TextBox 22"/>
-          <p:cNvSpPr txBox="1"/>
-          <p:nvPr/>
-        </p:nvSpPr>
-        <p:spPr>
-          <a:xfrm>
-            <a:off x="9235440" y="3712463"/>
-            <a:ext cx="2331720" cy="274320"/>
-          </a:xfrm>
-          <a:prstGeom prst="rect">
-            <a:avLst/>
-          </a:prstGeom>
-          <a:noFill/>
-        </p:spPr>
-        <p:txBody>
-          <a:bodyPr wrap="square" lIns="0" tIns="0" rIns="0" bIns="0" anchor="t">
-            <a:spAutoFit/>
-          </a:bodyPr>
-          <a:lstStyle/>
-          <a:p>
-            <a:pPr algn="l"/>
-            <a:r>
-              <a:rPr sz="1050" b="0" i="0">
-                <a:solidFill>
-                  <a:srgbClr val="757575"/>
-                </a:solidFill>
-                <a:latin typeface="Arial"/>
-              </a:rPr>
-              <a:t>Target ≥ +5%  ·  </a:t>
-            </a:r>
-            <a:r>
-              <a:rPr sz="1050" b="1" i="0">
-                <a:solidFill>
-                  <a:srgbClr val="1F7A4D"/>
-                </a:solidFill>
-                <a:latin typeface="Arial"/>
-              </a:rPr>
-              <a:t>PASS</a:t>
-            </a:r>
-          </a:p>
-        </p:txBody>
-      </p:sp>
-      <p:sp>
-        <p:nvSpPr>
-          <p:cNvPr id="24" name="Rectangle 23"/>
-          <p:cNvSpPr/>
-          <p:nvPr/>
-        </p:nvSpPr>
-        <p:spPr>
-          <a:xfrm>
-            <a:off x="502920" y="4434840"/>
-            <a:ext cx="11183112" cy="1783080"/>
-          </a:xfrm>
-          <a:prstGeom prst="rect">
-            <a:avLst/>
-          </a:prstGeom>
-          <a:solidFill>
-            <a:srgbClr val="000000"/>
-          </a:solidFill>
-          <a:ln>
-            <a:noFill/>
-          </a:ln>
-          <a:effectLst/>
-        </p:spPr>
-        <p:style>
-          <a:lnRef idx="1">
-            <a:schemeClr val="accent1"/>
-          </a:lnRef>
-          <a:fillRef idx="3">
-            <a:schemeClr val="accent1"/>
-          </a:fillRef>
-          <a:effectRef idx="2">
-            <a:schemeClr val="accent1"/>
-          </a:effectRef>
-          <a:fontRef idx="minor">
-            <a:schemeClr val="lt1"/>
-          </a:fontRef>
-        </p:style>
-        <p:txBody>
-          <a:bodyPr rtlCol="0" anchor="ctr"/>
-          <a:lstStyle/>
-          <a:p>
-            <a:pPr algn="ctr"/>
-            <a:endParaRPr/>
-          </a:p>
-        </p:txBody>
-      </p:sp>
-      <p:sp>
-        <p:nvSpPr>
           <p:cNvPr id="25" name="TextBox 24"/>
           <p:cNvSpPr txBox="1"/>
           <p:nvPr/>
@@ -11687,7 +10748,7 @@
           <p:nvPr/>
         </p:nvPicPr>
         <p:blipFill>
-          <a:blip r:embed="rId2"/>
+          <a:blip r:embed="rId3"/>
           <a:stretch>
             <a:fillRect/>
           </a:stretch>
@@ -11707,6 +10768,11 @@
   <p:clrMapOvr>
     <a:masterClrMapping/>
   </p:clrMapOvr>
+  <p:extLst>
+    <p:ext uri="{6950BFC3-D8DA-4A85-94F7-54DA5524770B}">
+      <p188:commentRel xmlns:p188="http://schemas.microsoft.com/office/powerpoint/2018/8/main" r:id="rId2"/>
+    </p:ext>
+  </p:extLst>
 </p:sld>
 </file>
 
@@ -11830,34 +10896,236 @@
           </a:p>
         </p:txBody>
       </p:sp>
-      <p:graphicFrame>
-        <p:nvGraphicFramePr>
-          <p:cNvPr id="4" name="Chart 3"/>
-          <p:cNvGraphicFramePr>
-            <a:graphicFrameLocks noGrp="1"/>
-          </p:cNvGraphicFramePr>
-          <p:nvPr/>
-        </p:nvGraphicFramePr>
-        <p:xfrm>
-          <a:off x="365760" y="1600200"/>
-          <a:ext cx="8001000" cy="4480560"/>
-        </p:xfrm>
-        <a:graphic>
-          <a:graphicData uri="http://schemas.openxmlformats.org/drawingml/2006/chart">
-            <c:chart xmlns:c="http://schemas.openxmlformats.org/drawingml/2006/chart" xmlns:r="http://schemas.openxmlformats.org/officeDocument/2006/relationships" r:id="rId2"/>
-          </a:graphicData>
-        </a:graphic>
-      </p:graphicFrame>
+      <p:sp>
+        <p:nvSpPr>
+          <p:cNvPr id="8" name="TextBox 7"/>
+          <p:cNvSpPr txBox="1"/>
+          <p:nvPr/>
+        </p:nvSpPr>
+        <p:spPr>
+          <a:xfrm>
+            <a:off x="502920" y="6510528"/>
+            <a:ext cx="10515600" cy="123111"/>
+          </a:xfrm>
+          <a:prstGeom prst="rect">
+            <a:avLst/>
+          </a:prstGeom>
+          <a:noFill/>
+        </p:spPr>
+        <p:txBody>
+          <a:bodyPr wrap="square" lIns="0" tIns="0" rIns="0" bIns="0" anchor="t">
+            <a:spAutoFit/>
+          </a:bodyPr>
+          <a:lstStyle/>
+          <a:p>
+            <a:r>
+              <a:rPr sz="800" b="0" i="0" dirty="0">
+                <a:solidFill>
+                  <a:srgbClr val="757575"/>
+                </a:solidFill>
+                <a:latin typeface="Arial"/>
+              </a:rPr>
+              <a:t>Salomon NA eCommerce · Vestal Pro launch readout · Baseline: pre-period trend + weekly seasonality; </a:t>
+            </a:r>
+            <a:r>
+              <a:rPr sz="800" b="0" i="0" dirty="0" err="1">
+                <a:solidFill>
+                  <a:srgbClr val="757575"/>
+                </a:solidFill>
+                <a:latin typeface="Arial"/>
+              </a:rPr>
+              <a:t>backtest</a:t>
+            </a:r>
+            <a:r>
+              <a:rPr sz="800" b="0" i="0" dirty="0">
+                <a:solidFill>
+                  <a:srgbClr val="757575"/>
+                </a:solidFill>
+                <a:latin typeface="Arial"/>
+              </a:rPr>
+              <a:t> MAPE 10.1%</a:t>
+            </a:r>
+            <a:r>
+              <a:rPr lang="en-US" sz="800" dirty="0">
+                <a:solidFill>
+                  <a:srgbClr val="757575"/>
+                </a:solidFill>
+                <a:latin typeface="Arial"/>
+              </a:rPr>
+              <a:t> · FOOTWEAR ONLY</a:t>
+            </a:r>
+            <a:endParaRPr sz="800" b="0" i="0" dirty="0">
+              <a:solidFill>
+                <a:srgbClr val="757575"/>
+              </a:solidFill>
+              <a:latin typeface="Arial"/>
+            </a:endParaRPr>
+          </a:p>
+        </p:txBody>
+      </p:sp>
+      <p:sp>
+        <p:nvSpPr>
+          <p:cNvPr id="9" name="TextBox 8"/>
+          <p:cNvSpPr txBox="1"/>
+          <p:nvPr/>
+        </p:nvSpPr>
+        <p:spPr>
+          <a:xfrm>
+            <a:off x="11292840" y="6510528"/>
+            <a:ext cx="411480" cy="274320"/>
+          </a:xfrm>
+          <a:prstGeom prst="rect">
+            <a:avLst/>
+          </a:prstGeom>
+          <a:noFill/>
+        </p:spPr>
+        <p:txBody>
+          <a:bodyPr wrap="square" lIns="0" tIns="0" rIns="0" bIns="0" anchor="t">
+            <a:spAutoFit/>
+          </a:bodyPr>
+          <a:lstStyle/>
+          <a:p>
+            <a:pPr algn="r"/>
+            <a:r>
+              <a:rPr sz="800" b="0" i="0">
+                <a:solidFill>
+                  <a:srgbClr val="757575"/>
+                </a:solidFill>
+                <a:latin typeface="Arial"/>
+              </a:rPr>
+              <a:t>5</a:t>
+            </a:r>
+          </a:p>
+        </p:txBody>
+      </p:sp>
+      <p:pic>
+        <p:nvPicPr>
+          <p:cNvPr id="10" name="Picture 9" descr="salomon_wordmark_black.png"/>
+          <p:cNvPicPr>
+            <a:picLocks noChangeAspect="1"/>
+          </p:cNvPicPr>
+          <p:nvPr/>
+        </p:nvPicPr>
+        <p:blipFill>
+          <a:blip r:embed="rId2"/>
+          <a:stretch>
+            <a:fillRect/>
+          </a:stretch>
+        </p:blipFill>
+        <p:spPr>
+          <a:xfrm>
+            <a:off x="10698480" y="292608"/>
+            <a:ext cx="960120" cy="110013"/>
+          </a:xfrm>
+          <a:prstGeom prst="rect">
+            <a:avLst/>
+          </a:prstGeom>
+        </p:spPr>
+      </p:pic>
+      <p:pic>
+        <p:nvPicPr>
+          <p:cNvPr id="27" name="Picture 26" descr="The diagram illustrates a comparison of actual footwear revenue against a modeled baseline without campaigns, showing fluctuations over a period from April to July 2026.&#10;&#10;AI-generated content may be incorrect.">
+            <a:extLst>
+              <a:ext uri="{FF2B5EF4-FFF2-40B4-BE49-F238E27FC236}">
+                <a16:creationId xmlns:a16="http://schemas.microsoft.com/office/drawing/2014/main" id="{64434D0D-7640-3878-BE81-3F62CC1E3F2E}"/>
+              </a:ext>
+            </a:extLst>
+          </p:cNvPr>
+          <p:cNvPicPr>
+            <a:picLocks noChangeAspect="1"/>
+          </p:cNvPicPr>
+          <p:nvPr/>
+        </p:nvPicPr>
+        <p:blipFill>
+          <a:blip r:embed="rId3"/>
+          <a:stretch>
+            <a:fillRect/>
+          </a:stretch>
+        </p:blipFill>
+        <p:spPr>
+          <a:xfrm>
+            <a:off x="502919" y="1347909"/>
+            <a:ext cx="8178093" cy="4639209"/>
+          </a:xfrm>
+          <a:prstGeom prst="rect">
+            <a:avLst/>
+          </a:prstGeom>
+        </p:spPr>
+      </p:pic>
+      <p:sp>
+        <p:nvSpPr>
+          <p:cNvPr id="29" name="TextBox 28">
+            <a:extLst>
+              <a:ext uri="{FF2B5EF4-FFF2-40B4-BE49-F238E27FC236}">
+                <a16:creationId xmlns:a16="http://schemas.microsoft.com/office/drawing/2014/main" id="{8E82E62F-FA01-E7F7-6EF9-0FEF33029B3C}"/>
+              </a:ext>
+            </a:extLst>
+          </p:cNvPr>
+          <p:cNvSpPr txBox="1"/>
+          <p:nvPr/>
+        </p:nvSpPr>
+        <p:spPr>
+          <a:xfrm>
+            <a:off x="3951484" y="1693790"/>
+            <a:ext cx="1394238" cy="146194"/>
+          </a:xfrm>
+          <a:prstGeom prst="rect">
+            <a:avLst/>
+          </a:prstGeom>
+          <a:noFill/>
+        </p:spPr>
+        <p:txBody>
+          <a:bodyPr wrap="square" lIns="0" tIns="0" rIns="0" bIns="0" anchor="t">
+            <a:spAutoFit/>
+          </a:bodyPr>
+          <a:lstStyle/>
+          <a:p>
+            <a:pPr algn="l"/>
+            <a:r>
+              <a:rPr sz="950" b="1" i="0" dirty="0">
+                <a:solidFill>
+                  <a:srgbClr val="000000"/>
+                </a:solidFill>
+                <a:latin typeface="Arial"/>
+              </a:rPr>
+              <a:t>Campaign start · </a:t>
+            </a:r>
+            <a:r>
+              <a:rPr lang="en-US" sz="950" b="1" dirty="0">
+                <a:solidFill>
+                  <a:srgbClr val="000000"/>
+                </a:solidFill>
+                <a:latin typeface="Arial"/>
+              </a:rPr>
+              <a:t>June 1</a:t>
+            </a:r>
+            <a:endParaRPr sz="950" b="1" i="0" dirty="0">
+              <a:solidFill>
+                <a:srgbClr val="000000"/>
+              </a:solidFill>
+              <a:latin typeface="Arial"/>
+            </a:endParaRPr>
+          </a:p>
+        </p:txBody>
+      </p:sp>
       <p:cxnSp>
         <p:nvCxnSpPr>
-          <p:cNvPr id="5" name="Connector 4"/>
-          <p:cNvCxnSpPr/>
+          <p:cNvPr id="30" name="Connector 4">
+            <a:extLst>
+              <a:ext uri="{FF2B5EF4-FFF2-40B4-BE49-F238E27FC236}">
+                <a16:creationId xmlns:a16="http://schemas.microsoft.com/office/drawing/2014/main" id="{2182B22E-D2F7-9B21-00D8-2C74D8A23957}"/>
+              </a:ext>
+            </a:extLst>
+          </p:cNvPr>
+          <p:cNvCxnSpPr>
+            <a:cxnSpLocks/>
+          </p:cNvCxnSpPr>
           <p:nvPr/>
         </p:nvCxnSpPr>
         <p:spPr>
           <a:xfrm>
-            <a:off x="5532120" y="1783080"/>
-            <a:ext cx="0" cy="3794760"/>
+            <a:off x="4607553" y="1870947"/>
+            <a:ext cx="0" cy="3760267"/>
           </a:xfrm>
           <a:prstGeom prst="line">
             <a:avLst/>
@@ -11884,16 +11152,69 @@
           </a:fontRef>
         </p:style>
       </p:cxnSp>
-      <p:sp>
-        <p:nvSpPr>
-          <p:cNvPr id="6" name="TextBox 5"/>
+      <p:cxnSp>
+        <p:nvCxnSpPr>
+          <p:cNvPr id="50" name="Straight Arrow Connector 49">
+            <a:extLst>
+              <a:ext uri="{FF2B5EF4-FFF2-40B4-BE49-F238E27FC236}">
+                <a16:creationId xmlns:a16="http://schemas.microsoft.com/office/drawing/2014/main" id="{42DB04F6-878A-7650-2CA9-516870587838}"/>
+              </a:ext>
+            </a:extLst>
+          </p:cNvPr>
+          <p:cNvCxnSpPr>
+            <a:cxnSpLocks/>
+          </p:cNvCxnSpPr>
+          <p:nvPr/>
+        </p:nvCxnSpPr>
+        <p:spPr>
+          <a:xfrm>
+            <a:off x="6011870" y="1907414"/>
+            <a:ext cx="0" cy="1063352"/>
+          </a:xfrm>
+          <a:prstGeom prst="straightConnector1">
+            <a:avLst/>
+          </a:prstGeom>
+          <a:ln>
+            <a:solidFill>
+              <a:schemeClr val="tx2">
+                <a:lumMod val="50000"/>
+                <a:lumOff val="50000"/>
+              </a:schemeClr>
+            </a:solidFill>
+            <a:tailEnd type="triangle"/>
+          </a:ln>
+        </p:spPr>
+        <p:style>
+          <a:lnRef idx="2">
+            <a:schemeClr val="dk1"/>
+          </a:lnRef>
+          <a:fillRef idx="0">
+            <a:schemeClr val="dk1"/>
+          </a:fillRef>
+          <a:effectRef idx="1">
+            <a:schemeClr val="dk1"/>
+          </a:effectRef>
+          <a:fontRef idx="minor">
+            <a:schemeClr val="tx1"/>
+          </a:fontRef>
+        </p:style>
+      </p:cxnSp>
+      <p:sp>
+        <p:nvSpPr>
+          <p:cNvPr id="54" name="TextBox 53">
+            <a:extLst>
+              <a:ext uri="{FF2B5EF4-FFF2-40B4-BE49-F238E27FC236}">
+                <a16:creationId xmlns:a16="http://schemas.microsoft.com/office/drawing/2014/main" id="{9D4C3E16-9C64-DE44-353F-A9C88D8B0E76}"/>
+              </a:ext>
+            </a:extLst>
+          </p:cNvPr>
           <p:cNvSpPr txBox="1"/>
           <p:nvPr/>
         </p:nvSpPr>
         <p:spPr>
           <a:xfrm>
-            <a:off x="5623560" y="1783080"/>
-            <a:ext cx="2011680" cy="274320"/>
+            <a:off x="5619129" y="1735937"/>
+            <a:ext cx="802357" cy="146194"/>
           </a:xfrm>
           <a:prstGeom prst="rect">
             <a:avLst/>
@@ -11908,27 +11229,39 @@
           <a:p>
             <a:pPr algn="l"/>
             <a:r>
-              <a:rPr sz="950" b="1" i="0">
+              <a:rPr lang="en-US" sz="950" b="1" i="0" dirty="0">
                 <a:solidFill>
                   <a:srgbClr val="000000"/>
                 </a:solidFill>
                 <a:latin typeface="Arial"/>
               </a:rPr>
-              <a:t>Campaign start · Mar 2</a:t>
-            </a:r>
-          </a:p>
-        </p:txBody>
-      </p:sp>
-      <p:sp>
-        <p:nvSpPr>
-          <p:cNvPr id="7" name="TextBox 6"/>
+              <a:t>Final comms</a:t>
+            </a:r>
+            <a:endParaRPr sz="950" b="1" i="0" dirty="0">
+              <a:solidFill>
+                <a:srgbClr val="000000"/>
+              </a:solidFill>
+              <a:latin typeface="Arial"/>
+            </a:endParaRPr>
+          </a:p>
+        </p:txBody>
+      </p:sp>
+      <p:sp>
+        <p:nvSpPr>
+          <p:cNvPr id="56" name="TextBox 55">
+            <a:extLst>
+              <a:ext uri="{FF2B5EF4-FFF2-40B4-BE49-F238E27FC236}">
+                <a16:creationId xmlns:a16="http://schemas.microsoft.com/office/drawing/2014/main" id="{194D8EF9-9D81-0106-B82E-21450F2E84FB}"/>
+              </a:ext>
+            </a:extLst>
+          </p:cNvPr>
           <p:cNvSpPr txBox="1"/>
           <p:nvPr/>
         </p:nvSpPr>
         <p:spPr>
           <a:xfrm>
-            <a:off x="8641080" y="1737360"/>
-            <a:ext cx="3108960" cy="4206240"/>
+            <a:off x="8745156" y="1989167"/>
+            <a:ext cx="3108960" cy="2717219"/>
           </a:xfrm>
           <a:prstGeom prst="rect">
             <a:avLst/>
@@ -11956,7 +11289,25 @@
                 </a:solidFill>
                 <a:latin typeface="Arial"/>
               </a:rPr>
-              <a:t>ACTIVE CAMPAIGN, 6 WEEKS</a:t>
+              <a:t>ACTIVE CAMPAIGN, </a:t>
+            </a:r>
+            <a:r>
+              <a:rPr lang="en-US" sz="1000" b="1" i="0" dirty="0">
+                <a:solidFill>
+                  <a:srgbClr val="757575"/>
+                </a:solidFill>
+                <a:latin typeface="Arial"/>
+              </a:rPr>
+              <a:t>~3 </a:t>
+            </a:r>
+            <a:r>
+              <a:rPr sz="1000" b="1" i="0" dirty="0">
+                <a:solidFill>
+                  <a:srgbClr val="757575"/>
+                </a:solidFill>
+                <a:latin typeface="Arial"/>
+              </a:rPr>
+              <a:t>WEEKS</a:t>
             </a:r>
           </a:p>
           <a:p>
@@ -11994,7 +11345,25 @@
                 </a:solidFill>
                 <a:latin typeface="Arial"/>
               </a:rPr>
-              <a:t>$542.9K</a:t>
+              <a:t>$</a:t>
+            </a:r>
+            <a:r>
+              <a:rPr lang="en-US" sz="2200" b="1" dirty="0">
+                <a:solidFill>
+                  <a:srgbClr val="333333"/>
+                </a:solidFill>
+                <a:latin typeface="Arial"/>
+              </a:rPr>
+              <a:t>262.8</a:t>
+            </a:r>
+            <a:r>
+              <a:rPr sz="2200" b="1" i="0" dirty="0">
+                <a:solidFill>
+                  <a:srgbClr val="333333"/>
+                </a:solidFill>
+                <a:latin typeface="Arial"/>
+              </a:rPr>
+              <a:t>K</a:t>
             </a:r>
           </a:p>
           <a:p>
@@ -12026,13 +11395,22 @@
               </a:spcAft>
             </a:pPr>
             <a:r>
+              <a:rPr lang="en-US" sz="2200" b="1" i="0" dirty="0">
+                <a:solidFill>
+                  <a:srgbClr val="757575"/>
+                </a:solidFill>
+                <a:latin typeface="Arial"/>
+              </a:rPr>
+              <a:t>$193.5</a:t>
+            </a:r>
+            <a:r>
               <a:rPr sz="2200" b="1" i="0" dirty="0">
                 <a:solidFill>
                   <a:srgbClr val="757575"/>
                 </a:solidFill>
                 <a:latin typeface="Arial"/>
               </a:rPr>
-              <a:t>$408.3K</a:t>
+              <a:t>K</a:t>
             </a:r>
           </a:p>
           <a:p>
@@ -12070,7 +11448,43 @@
                 </a:solidFill>
                 <a:latin typeface="Arial"/>
               </a:rPr>
-              <a:t>+$134.6K  (+33%)</a:t>
+              <a:t>+$</a:t>
+            </a:r>
+            <a:r>
+              <a:rPr lang="en-US" sz="2200" b="1" dirty="0">
+                <a:solidFill>
+                  <a:srgbClr val="0057B8"/>
+                </a:solidFill>
+                <a:latin typeface="Arial"/>
+              </a:rPr>
+              <a:t>69.3</a:t>
+            </a:r>
+            <a:r>
+              <a:rPr sz="2200" b="1" i="0" dirty="0">
+                <a:solidFill>
+                  <a:srgbClr val="0057B8"/>
+                </a:solidFill>
+                <a:latin typeface="Arial"/>
+              </a:rPr>
+              <a:t>K  (+</a:t>
+            </a:r>
+            <a:r>
+              <a:rPr lang="en-US" sz="2200" b="1" i="0" dirty="0">
+                <a:solidFill>
+                  <a:srgbClr val="0057B8"/>
+                </a:solidFill>
+                <a:latin typeface="Arial"/>
+              </a:rPr>
+              <a:t>35.8</a:t>
+            </a:r>
+            <a:r>
+              <a:rPr sz="2200" b="1" i="0" dirty="0">
+                <a:solidFill>
+                  <a:srgbClr val="0057B8"/>
+                </a:solidFill>
+                <a:latin typeface="Arial"/>
+              </a:rPr>
+              <a:t>%)</a:t>
             </a:r>
           </a:p>
           <a:p>
@@ -12089,21 +11503,87 @@
                 </a:solidFill>
                 <a:latin typeface="Arial"/>
               </a:rPr>
-              <a:t>95% CI +30% to +36% · every campaign week ran above baseline · peak gap +$30K in launch week</a:t>
-            </a:r>
-          </a:p>
-        </p:txBody>
-      </p:sp>
-      <p:sp>
-        <p:nvSpPr>
-          <p:cNvPr id="8" name="TextBox 7"/>
+              <a:t>95% CI +3</a:t>
+            </a:r>
+            <a:r>
+              <a:rPr lang="en-US" sz="1050" b="0" i="0" dirty="0">
+                <a:solidFill>
+                  <a:srgbClr val="333333"/>
+                </a:solidFill>
+                <a:latin typeface="Arial"/>
+              </a:rPr>
+              <a:t>2</a:t>
+            </a:r>
+            <a:r>
+              <a:rPr sz="1050" b="0" i="0" dirty="0">
+                <a:solidFill>
+                  <a:srgbClr val="333333"/>
+                </a:solidFill>
+                <a:latin typeface="Arial"/>
+              </a:rPr>
+              <a:t>% to +</a:t>
+            </a:r>
+            <a:r>
+              <a:rPr lang="en-US" sz="1050" dirty="0">
+                <a:solidFill>
+                  <a:srgbClr val="333333"/>
+                </a:solidFill>
+                <a:latin typeface="Arial"/>
+              </a:rPr>
+              <a:t>40</a:t>
+            </a:r>
+            <a:r>
+              <a:rPr sz="1050" b="0" i="0" dirty="0">
+                <a:solidFill>
+                  <a:srgbClr val="333333"/>
+                </a:solidFill>
+                <a:latin typeface="Arial"/>
+              </a:rPr>
+              <a:t>% · every campaign week ran above baseline · peak gap +$</a:t>
+            </a:r>
+            <a:r>
+              <a:rPr lang="en-US" sz="1050" dirty="0">
+                <a:solidFill>
+                  <a:srgbClr val="333333"/>
+                </a:solidFill>
+                <a:latin typeface="Arial"/>
+              </a:rPr>
+              <a:t>29</a:t>
+            </a:r>
+            <a:r>
+              <a:rPr sz="1050" b="0" i="0" dirty="0">
+                <a:solidFill>
+                  <a:srgbClr val="333333"/>
+                </a:solidFill>
+                <a:latin typeface="Arial"/>
+              </a:rPr>
+              <a:t>K in launch week</a:t>
+            </a:r>
+            <a:endParaRPr lang="en-US" sz="1050" b="0" i="0" dirty="0">
+              <a:solidFill>
+                <a:srgbClr val="333333"/>
+              </a:solidFill>
+              <a:latin typeface="Arial"/>
+            </a:endParaRPr>
+          </a:p>
+        </p:txBody>
+      </p:sp>
+      <p:sp>
+        <p:nvSpPr>
+          <p:cNvPr id="58" name="TextBox 57">
+            <a:extLst>
+              <a:ext uri="{FF2B5EF4-FFF2-40B4-BE49-F238E27FC236}">
+                <a16:creationId xmlns:a16="http://schemas.microsoft.com/office/drawing/2014/main" id="{EB421296-6D36-5BA2-0BBB-85ACABA9BD75}"/>
+              </a:ext>
+            </a:extLst>
+          </p:cNvPr>
           <p:cNvSpPr txBox="1"/>
           <p:nvPr/>
         </p:nvSpPr>
         <p:spPr>
           <a:xfrm>
-            <a:off x="502920" y="6510528"/>
-            <a:ext cx="10515600" cy="123111"/>
+            <a:off x="6655432" y="1870947"/>
+            <a:ext cx="1591173" cy="146194"/>
           </a:xfrm>
           <a:prstGeom prst="rect">
             <a:avLst/>
@@ -12116,96 +11596,123 @@
           </a:bodyPr>
           <a:lstStyle/>
           <a:p>
-            <a:pPr algn="l"/>
-            <a:r>
-              <a:rPr sz="800" b="0" i="0" dirty="0">
-                <a:solidFill>
-                  <a:srgbClr val="757575"/>
-                </a:solidFill>
-                <a:latin typeface="Arial"/>
-              </a:rPr>
-              <a:t>Salomon NA eCommerce · Vestal Pro launch readout · Baseline: pre-period trend + weekly seasonality; </a:t>
-            </a:r>
-            <a:r>
-              <a:rPr sz="800" b="0" i="0" dirty="0" err="1">
-                <a:solidFill>
-                  <a:srgbClr val="757575"/>
-                </a:solidFill>
-                <a:latin typeface="Arial"/>
-              </a:rPr>
-              <a:t>backtest</a:t>
-            </a:r>
-            <a:r>
-              <a:rPr sz="800" b="0" i="0" dirty="0">
-                <a:solidFill>
-                  <a:srgbClr val="757575"/>
-                </a:solidFill>
-                <a:latin typeface="Arial"/>
-              </a:rPr>
-              <a:t> MAPE 10.1%</a:t>
-            </a:r>
-          </a:p>
-        </p:txBody>
-      </p:sp>
-      <p:sp>
-        <p:nvSpPr>
-          <p:cNvPr id="9" name="TextBox 8"/>
-          <p:cNvSpPr txBox="1"/>
-          <p:nvPr/>
-        </p:nvSpPr>
-        <p:spPr>
-          <a:xfrm>
-            <a:off x="11292840" y="6510528"/>
-            <a:ext cx="411480" cy="274320"/>
-          </a:xfrm>
-          <a:prstGeom prst="rect">
-            <a:avLst/>
-          </a:prstGeom>
-          <a:noFill/>
-        </p:spPr>
-        <p:txBody>
-          <a:bodyPr wrap="square" lIns="0" tIns="0" rIns="0" bIns="0" anchor="t">
-            <a:spAutoFit/>
-          </a:bodyPr>
-          <a:lstStyle/>
-          <a:p>
-            <a:pPr algn="r"/>
-            <a:r>
-              <a:rPr sz="800" b="0" i="0">
-                <a:solidFill>
-                  <a:srgbClr val="757575"/>
-                </a:solidFill>
-                <a:latin typeface="Arial"/>
-              </a:rPr>
-              <a:t>5</a:t>
-            </a:r>
-          </a:p>
-        </p:txBody>
-      </p:sp>
-      <p:pic>
-        <p:nvPicPr>
-          <p:cNvPr id="10" name="Picture 9" descr="salomon_wordmark_black.png"/>
-          <p:cNvPicPr>
-            <a:picLocks noChangeAspect="1"/>
-          </p:cNvPicPr>
-          <p:nvPr/>
-        </p:nvPicPr>
-        <p:blipFill>
-          <a:blip r:embed="rId3"/>
-          <a:stretch>
-            <a:fillRect/>
-          </a:stretch>
-        </p:blipFill>
-        <p:spPr>
-          <a:xfrm>
-            <a:off x="10698480" y="292608"/>
-            <a:ext cx="960120" cy="110013"/>
-          </a:xfrm>
-          <a:prstGeom prst="rect">
-            <a:avLst/>
-          </a:prstGeom>
-        </p:spPr>
-      </p:pic>
+            <a:pPr algn="ctr"/>
+            <a:r>
+              <a:rPr lang="en-US" sz="950" b="1" dirty="0">
+                <a:solidFill>
+                  <a:srgbClr val="000000"/>
+                </a:solidFill>
+                <a:latin typeface="Arial"/>
+              </a:rPr>
+              <a:t>Incrementality Persists</a:t>
+            </a:r>
+            <a:endParaRPr sz="950" b="1" i="0" dirty="0">
+              <a:solidFill>
+                <a:srgbClr val="000000"/>
+              </a:solidFill>
+              <a:latin typeface="Arial"/>
+            </a:endParaRPr>
+          </a:p>
+        </p:txBody>
+      </p:sp>
+      <p:sp>
+        <p:nvSpPr>
+          <p:cNvPr id="61" name="Left Brace 60">
+            <a:extLst>
+              <a:ext uri="{FF2B5EF4-FFF2-40B4-BE49-F238E27FC236}">
+                <a16:creationId xmlns:a16="http://schemas.microsoft.com/office/drawing/2014/main" id="{6B8B920B-D082-C7E8-9CD9-051B8E07D7AA}"/>
+              </a:ext>
+            </a:extLst>
+          </p:cNvPr>
+          <p:cNvSpPr/>
+          <p:nvPr/>
+        </p:nvSpPr>
+        <p:spPr>
+          <a:xfrm rot="5400000">
+            <a:off x="7157421" y="2512903"/>
+            <a:ext cx="292388" cy="1539807"/>
+          </a:xfrm>
+          <a:prstGeom prst="leftBrace">
+            <a:avLst/>
+          </a:prstGeom>
+          <a:ln>
+            <a:solidFill>
+              <a:schemeClr val="tx2">
+                <a:lumMod val="50000"/>
+                <a:lumOff val="50000"/>
+              </a:schemeClr>
+            </a:solidFill>
+          </a:ln>
+        </p:spPr>
+        <p:style>
+          <a:lnRef idx="2">
+            <a:schemeClr val="dk1"/>
+          </a:lnRef>
+          <a:fillRef idx="0">
+            <a:schemeClr val="dk1"/>
+          </a:fillRef>
+          <a:effectRef idx="1">
+            <a:schemeClr val="dk1"/>
+          </a:effectRef>
+          <a:fontRef idx="minor">
+            <a:schemeClr val="tx1"/>
+          </a:fontRef>
+        </p:style>
+        <p:txBody>
+          <a:bodyPr rtlCol="0" anchor="ctr"/>
+          <a:lstStyle/>
+          <a:p>
+            <a:pPr algn="ctr"/>
+            <a:endParaRPr lang="en-US"/>
+          </a:p>
+        </p:txBody>
+      </p:sp>
+      <p:cxnSp>
+        <p:nvCxnSpPr>
+          <p:cNvPr id="63" name="Straight Arrow Connector 62">
+            <a:extLst>
+              <a:ext uri="{FF2B5EF4-FFF2-40B4-BE49-F238E27FC236}">
+                <a16:creationId xmlns:a16="http://schemas.microsoft.com/office/drawing/2014/main" id="{8188AC56-9AB6-D5E4-79F2-FDD7D90EF49B}"/>
+              </a:ext>
+            </a:extLst>
+          </p:cNvPr>
+          <p:cNvCxnSpPr>
+            <a:cxnSpLocks/>
+          </p:cNvCxnSpPr>
+          <p:nvPr/>
+        </p:nvCxnSpPr>
+        <p:spPr>
+          <a:xfrm flipH="1">
+            <a:off x="7306008" y="2040342"/>
+            <a:ext cx="145011" cy="1096270"/>
+          </a:xfrm>
+          <a:prstGeom prst="straightConnector1">
+            <a:avLst/>
+          </a:prstGeom>
+          <a:ln>
+            <a:solidFill>
+              <a:schemeClr val="tx2">
+                <a:lumMod val="50000"/>
+                <a:lumOff val="50000"/>
+              </a:schemeClr>
+            </a:solidFill>
+          </a:ln>
+        </p:spPr>
+        <p:style>
+          <a:lnRef idx="2">
+            <a:schemeClr val="accent1"/>
+          </a:lnRef>
+          <a:fillRef idx="0">
+            <a:schemeClr val="accent1"/>
+          </a:fillRef>
+          <a:effectRef idx="1">
+            <a:schemeClr val="accent1"/>
+          </a:effectRef>
+          <a:fontRef idx="minor">
+            <a:schemeClr val="tx1"/>
+          </a:fontRef>
+        </p:style>
+      </p:cxnSp>
     </p:spTree>
   </p:cSld>
   <p:clrMapOvr>
@@ -12219,7 +11726,13 @@
   <p:cSld>
     <p:spTree>
       <p:nvGrpSpPr>
-        <p:cNvPr id="1" name=""/>
+        <p:cNvPr id="1" name="">
+          <a:extLst>
+            <a:ext uri="{FF2B5EF4-FFF2-40B4-BE49-F238E27FC236}">
+              <a16:creationId xmlns:a16="http://schemas.microsoft.com/office/drawing/2014/main" id="{832C0DEA-41C2-4717-7BB7-2E2510AAE4A9}"/>
+            </a:ext>
+          </a:extLst>
+        </p:cNvPr>
         <p:cNvGrpSpPr/>
         <p:nvPr/>
       </p:nvGrpSpPr>
@@ -12233,14 +11746,20 @@
       </p:grpSpPr>
       <p:sp>
         <p:nvSpPr>
-          <p:cNvPr id="2" name="TextBox 1"/>
+          <p:cNvPr id="2" name="TextBox 1">
+            <a:extLst>
+              <a:ext uri="{FF2B5EF4-FFF2-40B4-BE49-F238E27FC236}">
+                <a16:creationId xmlns:a16="http://schemas.microsoft.com/office/drawing/2014/main" id="{D79270C0-0E14-AE60-2BDE-B604056B919A}"/>
+              </a:ext>
+            </a:extLst>
+          </p:cNvPr>
           <p:cNvSpPr txBox="1"/>
           <p:nvPr/>
         </p:nvSpPr>
         <p:spPr>
           <a:xfrm>
             <a:off x="502920" y="292608"/>
-            <a:ext cx="11155680" cy="274320"/>
+            <a:ext cx="11155680" cy="161583"/>
           </a:xfrm>
           <a:prstGeom prst="rect">
             <a:avLst/>
@@ -12255,27 +11774,39 @@
           <a:p>
             <a:pPr algn="l"/>
             <a:r>
-              <a:rPr sz="1050" b="1" i="0">
+              <a:rPr lang="en-US" sz="1050" b="1" i="0" dirty="0">
                 <a:solidFill>
                   <a:srgbClr val="757575"/>
                 </a:solidFill>
                 <a:latin typeface="Arial"/>
               </a:rPr>
-              <a:t>REVENUE DECOMPOSITION</a:t>
-            </a:r>
-          </a:p>
-        </p:txBody>
-      </p:sp>
-      <p:sp>
-        <p:nvSpPr>
-          <p:cNvPr id="3" name="TextBox 2"/>
+              <a:t>SALES DECOMPOSITION</a:t>
+            </a:r>
+            <a:endParaRPr sz="1050" b="1" i="0" dirty="0">
+              <a:solidFill>
+                <a:srgbClr val="757575"/>
+              </a:solidFill>
+              <a:latin typeface="Arial"/>
+            </a:endParaRPr>
+          </a:p>
+        </p:txBody>
+      </p:sp>
+      <p:sp>
+        <p:nvSpPr>
+          <p:cNvPr id="3" name="TextBox 2">
+            <a:extLst>
+              <a:ext uri="{FF2B5EF4-FFF2-40B4-BE49-F238E27FC236}">
+                <a16:creationId xmlns:a16="http://schemas.microsoft.com/office/drawing/2014/main" id="{31DC6D62-E787-BDC4-A8A4-88F4F066067B}"/>
+              </a:ext>
+            </a:extLst>
+          </p:cNvPr>
           <p:cNvSpPr txBox="1"/>
           <p:nvPr/>
         </p:nvSpPr>
         <p:spPr>
           <a:xfrm>
             <a:off x="502920" y="566928"/>
-            <a:ext cx="11201400" cy="777240"/>
+            <a:ext cx="11201400" cy="353943"/>
           </a:xfrm>
           <a:prstGeom prst="rect">
             <a:avLst/>
@@ -12290,45 +11821,48 @@
           <a:p>
             <a:pPr algn="l"/>
             <a:r>
-              <a:rPr sz="2300" b="0" i="0">
+              <a:rPr lang="en-US" sz="2300" b="0" i="0" dirty="0">
                 <a:solidFill>
                   <a:srgbClr val="000000"/>
                 </a:solidFill>
                 <a:latin typeface="Georgia"/>
               </a:rPr>
-              <a:t>After sales shifted from existing shoes and media cost, the launch added ≈$34.5K</a:t>
-            </a:r>
-          </a:p>
-        </p:txBody>
-      </p:sp>
-      <p:graphicFrame>
-        <p:nvGraphicFramePr>
-          <p:cNvPr id="4" name="Chart 3"/>
-          <p:cNvGraphicFramePr>
-            <a:graphicFrameLocks noGrp="1"/>
-          </p:cNvGraphicFramePr>
-          <p:nvPr/>
-        </p:nvGraphicFramePr>
-        <p:xfrm>
-          <a:off x="274320" y="1554480"/>
-          <a:ext cx="7223760" cy="4526280"/>
-        </p:xfrm>
-        <a:graphic>
-          <a:graphicData uri="http://schemas.openxmlformats.org/drawingml/2006/chart">
-            <c:chart xmlns:c="http://schemas.openxmlformats.org/drawingml/2006/chart" xmlns:r="http://schemas.openxmlformats.org/officeDocument/2006/relationships" r:id="rId2"/>
-          </a:graphicData>
-        </a:graphic>
-      </p:graphicFrame>
-      <p:sp>
-        <p:nvSpPr>
-          <p:cNvPr id="5" name="TextBox 4"/>
+              <a:t>Contribution Margin of ~4</a:t>
+            </a:r>
+            <a:r>
+              <a:rPr lang="en-US" sz="2300" dirty="0">
+                <a:solidFill>
+                  <a:srgbClr val="000000"/>
+                </a:solidFill>
+                <a:latin typeface="Georgia"/>
+              </a:rPr>
+              <a:t>K limited by Franchise Shift</a:t>
+            </a:r>
+            <a:endParaRPr sz="2300" b="0" i="0" dirty="0">
+              <a:solidFill>
+                <a:srgbClr val="000000"/>
+              </a:solidFill>
+              <a:latin typeface="Georgia"/>
+            </a:endParaRPr>
+          </a:p>
+        </p:txBody>
+      </p:sp>
+      <p:sp>
+        <p:nvSpPr>
+          <p:cNvPr id="6" name="TextBox 5">
+            <a:extLst>
+              <a:ext uri="{FF2B5EF4-FFF2-40B4-BE49-F238E27FC236}">
+                <a16:creationId xmlns:a16="http://schemas.microsoft.com/office/drawing/2014/main" id="{AC2C852A-0947-CC31-24EA-21558B7529F1}"/>
+              </a:ext>
+            </a:extLst>
+          </p:cNvPr>
           <p:cNvSpPr txBox="1"/>
           <p:nvPr/>
         </p:nvSpPr>
         <p:spPr>
           <a:xfrm>
-            <a:off x="7772400" y="1691640"/>
-            <a:ext cx="3931920" cy="4297680"/>
+            <a:off x="502920" y="6510528"/>
+            <a:ext cx="10515600" cy="123111"/>
           </a:xfrm>
           <a:prstGeom prst="rect">
             <a:avLst/>
@@ -12341,7 +11875,149 @@
           </a:bodyPr>
           <a:lstStyle/>
           <a:p>
-            <a:pPr algn="l">
+            <a:pPr algn="l"/>
+            <a:r>
+              <a:rPr sz="800" b="0" i="0" dirty="0">
+                <a:solidFill>
+                  <a:srgbClr val="757575"/>
+                </a:solidFill>
+                <a:latin typeface="Arial"/>
+              </a:rPr>
+              <a:t>Salomon NA eCommerce · Vestal Pro launch readout</a:t>
+            </a:r>
+          </a:p>
+        </p:txBody>
+      </p:sp>
+      <p:sp>
+        <p:nvSpPr>
+          <p:cNvPr id="7" name="TextBox 6">
+            <a:extLst>
+              <a:ext uri="{FF2B5EF4-FFF2-40B4-BE49-F238E27FC236}">
+                <a16:creationId xmlns:a16="http://schemas.microsoft.com/office/drawing/2014/main" id="{5D4D592D-5118-0F52-8A16-F0154A8C5542}"/>
+              </a:ext>
+            </a:extLst>
+          </p:cNvPr>
+          <p:cNvSpPr txBox="1"/>
+          <p:nvPr/>
+        </p:nvSpPr>
+        <p:spPr>
+          <a:xfrm>
+            <a:off x="11292840" y="6510528"/>
+            <a:ext cx="411480" cy="274320"/>
+          </a:xfrm>
+          <a:prstGeom prst="rect">
+            <a:avLst/>
+          </a:prstGeom>
+          <a:noFill/>
+        </p:spPr>
+        <p:txBody>
+          <a:bodyPr wrap="square" lIns="0" tIns="0" rIns="0" bIns="0" anchor="t">
+            <a:spAutoFit/>
+          </a:bodyPr>
+          <a:lstStyle/>
+          <a:p>
+            <a:pPr algn="r"/>
+            <a:r>
+              <a:rPr sz="800" b="0" i="0">
+                <a:solidFill>
+                  <a:srgbClr val="757575"/>
+                </a:solidFill>
+                <a:latin typeface="Arial"/>
+              </a:rPr>
+              <a:t>6</a:t>
+            </a:r>
+          </a:p>
+        </p:txBody>
+      </p:sp>
+      <p:pic>
+        <p:nvPicPr>
+          <p:cNvPr id="8" name="Picture 7" descr="salomon_wordmark_black.png">
+            <a:extLst>
+              <a:ext uri="{FF2B5EF4-FFF2-40B4-BE49-F238E27FC236}">
+                <a16:creationId xmlns:a16="http://schemas.microsoft.com/office/drawing/2014/main" id="{5EE0F2A8-B8E1-20F0-A76D-D19F00756A80}"/>
+              </a:ext>
+            </a:extLst>
+          </p:cNvPr>
+          <p:cNvPicPr>
+            <a:picLocks noChangeAspect="1"/>
+          </p:cNvPicPr>
+          <p:nvPr/>
+        </p:nvPicPr>
+        <p:blipFill>
+          <a:blip r:embed="rId2"/>
+          <a:stretch>
+            <a:fillRect/>
+          </a:stretch>
+        </p:blipFill>
+        <p:spPr>
+          <a:xfrm>
+            <a:off x="10698480" y="292608"/>
+            <a:ext cx="960120" cy="110013"/>
+          </a:xfrm>
+          <a:prstGeom prst="rect">
+            <a:avLst/>
+          </a:prstGeom>
+        </p:spPr>
+      </p:pic>
+      <p:pic>
+        <p:nvPicPr>
+          <p:cNvPr id="10" name="Picture 9" descr="The diagram illustrates the net campaign value of $35K, after accounting for direct marketing spend ($43K), COGS ($31K), and resulting in a contribution margin of $4K.&#10;&#10;AI-generated content may be incorrect.">
+            <a:extLst>
+              <a:ext uri="{FF2B5EF4-FFF2-40B4-BE49-F238E27FC236}">
+                <a16:creationId xmlns:a16="http://schemas.microsoft.com/office/drawing/2014/main" id="{7565D719-965D-D210-8AFA-EC5825F04B5B}"/>
+              </a:ext>
+            </a:extLst>
+          </p:cNvPr>
+          <p:cNvPicPr>
+            <a:picLocks noChangeAspect="1"/>
+          </p:cNvPicPr>
+          <p:nvPr/>
+        </p:nvPicPr>
+        <p:blipFill>
+          <a:blip r:embed="rId3"/>
+          <a:stretch>
+            <a:fillRect/>
+          </a:stretch>
+        </p:blipFill>
+        <p:spPr>
+          <a:xfrm>
+            <a:off x="182262" y="1172764"/>
+            <a:ext cx="7817207" cy="4565249"/>
+          </a:xfrm>
+          <a:prstGeom prst="rect">
+            <a:avLst/>
+          </a:prstGeom>
+        </p:spPr>
+      </p:pic>
+      <p:sp>
+        <p:nvSpPr>
+          <p:cNvPr id="12" name="TextBox 11">
+            <a:extLst>
+              <a:ext uri="{FF2B5EF4-FFF2-40B4-BE49-F238E27FC236}">
+                <a16:creationId xmlns:a16="http://schemas.microsoft.com/office/drawing/2014/main" id="{2217997E-14A7-467E-4AF8-2DFB786A3FE8}"/>
+              </a:ext>
+            </a:extLst>
+          </p:cNvPr>
+          <p:cNvSpPr txBox="1"/>
+          <p:nvPr/>
+        </p:nvSpPr>
+        <p:spPr>
+          <a:xfrm>
+            <a:off x="7774445" y="1880650"/>
+            <a:ext cx="4272519" cy="2935227"/>
+          </a:xfrm>
+          <a:prstGeom prst="rect">
+            <a:avLst/>
+          </a:prstGeom>
+          <a:noFill/>
+        </p:spPr>
+        <p:txBody>
+          <a:bodyPr wrap="square" lIns="0" tIns="0" rIns="0" bIns="0" anchor="t">
+            <a:spAutoFit/>
+          </a:bodyPr>
+          <a:lstStyle/>
+          <a:p>
+            <a:pPr algn="ctr">
               <a:lnSpc>
                 <a:spcPct val="112000"/>
               </a:lnSpc>
@@ -12350,17 +12026,23 @@
               </a:spcAft>
             </a:pPr>
             <a:r>
-              <a:rPr sz="1000" b="1" i="0">
+              <a:rPr lang="en-US" sz="1000" b="1" i="0" u="sng" dirty="0">
                 <a:solidFill>
                   <a:srgbClr val="757575"/>
                 </a:solidFill>
                 <a:latin typeface="Arial"/>
               </a:rPr>
-              <a:t>HOW TO READ THIS</a:t>
-            </a:r>
-          </a:p>
-          <a:p>
-            <a:pPr algn="l">
+              <a:t>INCREMENTALITY BREAKDOWN</a:t>
+            </a:r>
+            <a:endParaRPr lang="en-US" sz="1100" b="0" i="0" u="sng" dirty="0">
+              <a:solidFill>
+                <a:srgbClr val="333333"/>
+              </a:solidFill>
+              <a:latin typeface="Arial"/>
+            </a:endParaRPr>
+          </a:p>
+          <a:p>
+            <a:pPr>
               <a:lnSpc>
                 <a:spcPct val="112000"/>
               </a:lnSpc>
@@ -12369,17 +12051,26 @@
               </a:spcAft>
             </a:pPr>
             <a:r>
-              <a:rPr sz="1100" b="0" i="0">
+              <a:rPr lang="en-US" sz="1100" b="1" dirty="0">
                 <a:solidFill>
                   <a:srgbClr val="333333"/>
                 </a:solidFill>
                 <a:latin typeface="Arial"/>
               </a:rPr>
-              <a:t>Baseline business of $234.0K would have occurred without the campaign and is excluded — only movement vs baseline is counted.</a:t>
-            </a:r>
-          </a:p>
-          <a:p>
-            <a:pPr algn="l">
+              <a:t>Baseline</a:t>
+            </a:r>
+            <a:r>
+              <a:rPr lang="en-US" sz="1100" dirty="0">
+                <a:solidFill>
+                  <a:srgbClr val="333333"/>
+                </a:solidFill>
+                <a:latin typeface="Arial"/>
+              </a:rPr>
+              <a:t>: $234.0K of business would have occurred without the campaign and is excluded. Only movement vs. baseline is counted.</a:t>
+            </a:r>
+          </a:p>
+          <a:p>
+            <a:pPr>
               <a:lnSpc>
                 <a:spcPct val="112000"/>
               </a:lnSpc>
@@ -12388,17 +12079,44 @@
               </a:spcAft>
             </a:pPr>
             <a:r>
-              <a:rPr sz="1100" b="0" i="0">
+              <a:rPr lang="en-US" sz="1100" b="1" dirty="0">
                 <a:solidFill>
                   <a:srgbClr val="333333"/>
                 </a:solidFill>
                 <a:latin typeface="Arial"/>
               </a:rPr>
-              <a:t>Sales shift: $30.5K of Vestal Pro revenue displaced Ultra Glide and Sense Ride sales, net of Speedcross gains.</a:t>
-            </a:r>
-          </a:p>
-          <a:p>
-            <a:pPr algn="l">
+              <a:t>Sales Shift</a:t>
+            </a:r>
+            <a:r>
+              <a:rPr lang="en-US" sz="1100" dirty="0">
+                <a:solidFill>
+                  <a:srgbClr val="333333"/>
+                </a:solidFill>
+                <a:latin typeface="Arial"/>
+              </a:rPr>
+              <a:t>: $30.5K of Vestal Pro revenue displaced Ultra Glide and Sense Ride sales, net of </a:t>
+            </a:r>
+            <a:r>
+              <a:rPr lang="en-US" sz="1100" dirty="0" err="1">
+                <a:solidFill>
+                  <a:srgbClr val="333333"/>
+                </a:solidFill>
+                <a:latin typeface="Arial"/>
+              </a:rPr>
+              <a:t>Speedcross</a:t>
+            </a:r>
+            <a:r>
+              <a:rPr lang="en-US" sz="1100" dirty="0">
+                <a:solidFill>
+                  <a:srgbClr val="333333"/>
+                </a:solidFill>
+                <a:latin typeface="Arial"/>
+              </a:rPr>
+              <a:t> gains (19–32% of Vestal Pro units).</a:t>
+            </a:r>
+          </a:p>
+          <a:p>
+            <a:pPr>
               <a:lnSpc>
                 <a:spcPct val="112000"/>
               </a:lnSpc>
@@ -12407,17 +12125,26 @@
               </a:spcAft>
             </a:pPr>
             <a:r>
-              <a:rPr sz="1100" b="0" i="0">
+              <a:rPr lang="en-US" sz="1100" b="1" dirty="0">
                 <a:solidFill>
                   <a:srgbClr val="333333"/>
                 </a:solidFill>
                 <a:latin typeface="Arial"/>
               </a:rPr>
-              <a:t>Media basis: $74.6K campaign spend less the $31.6K normal 20-day run rate → $43.0K additional spend.</a:t>
-            </a:r>
-          </a:p>
-          <a:p>
-            <a:pPr algn="l">
+              <a:t>Marketing</a:t>
+            </a:r>
+            <a:r>
+              <a:rPr lang="en-US" sz="1100" dirty="0">
+                <a:solidFill>
+                  <a:srgbClr val="333333"/>
+                </a:solidFill>
+                <a:latin typeface="Arial"/>
+              </a:rPr>
+              <a:t>: $74.6K campaign spend less $31.6K baseline 20-day run rate → $43.0K additional spend.</a:t>
+            </a:r>
+          </a:p>
+          <a:p>
+            <a:pPr>
               <a:lnSpc>
                 <a:spcPct val="112000"/>
               </a:lnSpc>
@@ -12426,27 +12153,151 @@
               </a:spcAft>
             </a:pPr>
             <a:r>
-              <a:rPr sz="1100" b="0" i="0">
+              <a:rPr lang="en-US" sz="1100" dirty="0">
                 <a:solidFill>
                   <a:srgbClr val="333333"/>
                 </a:solidFill>
                 <a:latin typeface="Arial"/>
               </a:rPr>
-              <a:t>Return on additional media: $77.5K ÷ $43.0K = 1.80× on a revenue basis. A profit view requires COGS, which this dataset does not track.</a:t>
-            </a:r>
-          </a:p>
-        </p:txBody>
-      </p:sp>
-      <p:sp>
-        <p:nvSpPr>
-          <p:cNvPr id="6" name="TextBox 5"/>
+              <a:t>	</a:t>
+            </a:r>
+            <a:r>
+              <a:rPr lang="en-US" sz="1100" i="1" dirty="0">
+                <a:solidFill>
+                  <a:srgbClr val="333333"/>
+                </a:solidFill>
+                <a:latin typeface="Arial"/>
+              </a:rPr>
+              <a:t>** Paid investment is persistent (more on this…) **</a:t>
+            </a:r>
+          </a:p>
+          <a:p>
+            <a:pPr>
+              <a:lnSpc>
+                <a:spcPct val="112000"/>
+              </a:lnSpc>
+              <a:spcAft>
+                <a:spcPts val="900"/>
+              </a:spcAft>
+            </a:pPr>
+            <a:r>
+              <a:rPr lang="en-US" sz="1100" b="1" dirty="0">
+                <a:solidFill>
+                  <a:srgbClr val="333333"/>
+                </a:solidFill>
+                <a:latin typeface="Arial"/>
+              </a:rPr>
+              <a:t>Return on Marketing</a:t>
+            </a:r>
+            <a:r>
+              <a:rPr lang="en-US" sz="1100" dirty="0">
+                <a:solidFill>
+                  <a:srgbClr val="333333"/>
+                </a:solidFill>
+                <a:latin typeface="Arial"/>
+              </a:rPr>
+              <a:t>: $77.5K ÷ $43.0K = 1.80× on a revenue basis.</a:t>
+            </a:r>
+          </a:p>
+          <a:p>
+            <a:pPr>
+              <a:lnSpc>
+                <a:spcPct val="112000"/>
+              </a:lnSpc>
+              <a:spcAft>
+                <a:spcPts val="900"/>
+              </a:spcAft>
+            </a:pPr>
+            <a:r>
+              <a:rPr lang="en-US" sz="1100" b="1" dirty="0">
+                <a:solidFill>
+                  <a:srgbClr val="333333"/>
+                </a:solidFill>
+                <a:latin typeface="Arial"/>
+              </a:rPr>
+              <a:t>Contribution Margin (CM3)</a:t>
+            </a:r>
+            <a:r>
+              <a:rPr lang="en-US" sz="1100" dirty="0">
+                <a:solidFill>
+                  <a:srgbClr val="333333"/>
+                </a:solidFill>
+                <a:latin typeface="Arial"/>
+              </a:rPr>
+              <a:t>: After accounting for COGS and direct overhead, CM3 sit at $3.5K.</a:t>
+            </a:r>
+            <a:endParaRPr lang="en-US" sz="1100" b="0" i="0" dirty="0">
+              <a:solidFill>
+                <a:srgbClr val="333333"/>
+              </a:solidFill>
+              <a:latin typeface="Arial"/>
+            </a:endParaRPr>
+          </a:p>
+        </p:txBody>
+      </p:sp>
+      <p:cxnSp>
+        <p:nvCxnSpPr>
+          <p:cNvPr id="5" name="Straight Arrow Connector 4">
+            <a:extLst>
+              <a:ext uri="{FF2B5EF4-FFF2-40B4-BE49-F238E27FC236}">
+                <a16:creationId xmlns:a16="http://schemas.microsoft.com/office/drawing/2014/main" id="{3FDE4B2E-FBA8-C266-0E27-5E9BF89C30B6}"/>
+              </a:ext>
+            </a:extLst>
+          </p:cNvPr>
+          <p:cNvCxnSpPr>
+            <a:cxnSpLocks/>
+          </p:cNvCxnSpPr>
+          <p:nvPr/>
+        </p:nvCxnSpPr>
+        <p:spPr>
+          <a:xfrm flipH="1">
+            <a:off x="4168942" y="3778197"/>
+            <a:ext cx="661737" cy="0"/>
+          </a:xfrm>
+          <a:prstGeom prst="straightConnector1">
+            <a:avLst/>
+          </a:prstGeom>
+          <a:ln>
+            <a:solidFill>
+              <a:schemeClr val="tx2">
+                <a:lumMod val="50000"/>
+                <a:lumOff val="50000"/>
+              </a:schemeClr>
+            </a:solidFill>
+            <a:tailEnd type="triangle"/>
+          </a:ln>
+        </p:spPr>
+        <p:style>
+          <a:lnRef idx="2">
+            <a:schemeClr val="accent1"/>
+          </a:lnRef>
+          <a:fillRef idx="0">
+            <a:schemeClr val="accent1"/>
+          </a:fillRef>
+          <a:effectRef idx="1">
+            <a:schemeClr val="accent1"/>
+          </a:effectRef>
+          <a:fontRef idx="minor">
+            <a:schemeClr val="tx1"/>
+          </a:fontRef>
+        </p:style>
+      </p:cxnSp>
+      <p:sp>
+        <p:nvSpPr>
+          <p:cNvPr id="11" name="TextBox 10">
+            <a:extLst>
+              <a:ext uri="{FF2B5EF4-FFF2-40B4-BE49-F238E27FC236}">
+                <a16:creationId xmlns:a16="http://schemas.microsoft.com/office/drawing/2014/main" id="{FCB29B8B-707A-5ED5-BC88-D4D5FAC23634}"/>
+              </a:ext>
+            </a:extLst>
+          </p:cNvPr>
           <p:cNvSpPr txBox="1"/>
           <p:nvPr/>
         </p:nvSpPr>
         <p:spPr>
           <a:xfrm>
-            <a:off x="502920" y="6510528"/>
-            <a:ext cx="10515600" cy="274320"/>
+            <a:off x="4775970" y="3647392"/>
+            <a:ext cx="2078456" cy="261610"/>
           </a:xfrm>
           <a:prstGeom prst="rect">
             <a:avLst/>
@@ -12454,34 +12305,75 @@
           <a:noFill/>
         </p:spPr>
         <p:txBody>
-          <a:bodyPr wrap="square" lIns="0" tIns="0" rIns="0" bIns="0" anchor="t">
+          <a:bodyPr wrap="square" rtlCol="0">
             <a:spAutoFit/>
           </a:bodyPr>
           <a:lstStyle/>
           <a:p>
-            <a:pPr algn="l"/>
-            <a:r>
-              <a:rPr sz="800" b="0" i="0">
-                <a:solidFill>
-                  <a:srgbClr val="757575"/>
-                </a:solidFill>
-                <a:latin typeface="Arial"/>
-              </a:rPr>
-              <a:t>Salomon NA eCommerce · Vestal Pro launch readout · Illustrative synthetic case data</a:t>
-            </a:r>
-          </a:p>
-        </p:txBody>
-      </p:sp>
-      <p:sp>
-        <p:nvSpPr>
-          <p:cNvPr id="7" name="TextBox 6"/>
+            <a:r>
+              <a:rPr lang="en-US" sz="1100" dirty="0"/>
+              <a:t>Persistent effect</a:t>
+            </a:r>
+          </a:p>
+        </p:txBody>
+      </p:sp>
+      <p:cxnSp>
+        <p:nvCxnSpPr>
+          <p:cNvPr id="14" name="Straight Arrow Connector 13">
+            <a:extLst>
+              <a:ext uri="{FF2B5EF4-FFF2-40B4-BE49-F238E27FC236}">
+                <a16:creationId xmlns:a16="http://schemas.microsoft.com/office/drawing/2014/main" id="{DE362A5B-97B9-4102-9411-46125E1F3F7A}"/>
+              </a:ext>
+            </a:extLst>
+          </p:cNvPr>
+          <p:cNvCxnSpPr>
+            <a:cxnSpLocks/>
+          </p:cNvCxnSpPr>
+          <p:nvPr/>
+        </p:nvCxnSpPr>
+        <p:spPr>
+          <a:xfrm flipH="1">
+            <a:off x="4090865" y="2502569"/>
+            <a:ext cx="511342" cy="0"/>
+          </a:xfrm>
+          <a:prstGeom prst="straightConnector1">
+            <a:avLst/>
+          </a:prstGeom>
+          <a:ln>
+            <a:tailEnd type="triangle"/>
+          </a:ln>
+        </p:spPr>
+        <p:style>
+          <a:lnRef idx="2">
+            <a:schemeClr val="accent1"/>
+          </a:lnRef>
+          <a:fillRef idx="0">
+            <a:schemeClr val="accent1"/>
+          </a:fillRef>
+          <a:effectRef idx="1">
+            <a:schemeClr val="accent1"/>
+          </a:effectRef>
+          <a:fontRef idx="minor">
+            <a:schemeClr val="tx1"/>
+          </a:fontRef>
+        </p:style>
+      </p:cxnSp>
+      <p:sp>
+        <p:nvSpPr>
+          <p:cNvPr id="16" name="TextBox 15">
+            <a:extLst>
+              <a:ext uri="{FF2B5EF4-FFF2-40B4-BE49-F238E27FC236}">
+                <a16:creationId xmlns:a16="http://schemas.microsoft.com/office/drawing/2014/main" id="{3C213073-8F80-0566-7942-346C278D95C4}"/>
+              </a:ext>
+            </a:extLst>
+          </p:cNvPr>
           <p:cNvSpPr txBox="1"/>
           <p:nvPr/>
         </p:nvSpPr>
         <p:spPr>
           <a:xfrm>
-            <a:off x="11292840" y="6510528"/>
-            <a:ext cx="411480" cy="274320"/>
+            <a:off x="4602207" y="2361606"/>
+            <a:ext cx="1140056" cy="261610"/>
           </a:xfrm>
           <a:prstGeom prst="rect">
             <a:avLst/>
@@ -12489,49 +12381,24 @@
           <a:noFill/>
         </p:spPr>
         <p:txBody>
-          <a:bodyPr wrap="square" lIns="0" tIns="0" rIns="0" bIns="0" anchor="t">
+          <a:bodyPr wrap="none" rtlCol="0">
             <a:spAutoFit/>
           </a:bodyPr>
           <a:lstStyle/>
           <a:p>
-            <a:pPr algn="r"/>
-            <a:r>
-              <a:rPr sz="800" b="0" i="0">
-                <a:solidFill>
-                  <a:srgbClr val="757575"/>
-                </a:solidFill>
-                <a:latin typeface="Arial"/>
-              </a:rPr>
-              <a:t>6</a:t>
-            </a:r>
-          </a:p>
-        </p:txBody>
-      </p:sp>
-      <p:pic>
-        <p:nvPicPr>
-          <p:cNvPr id="8" name="Picture 7" descr="salomon_wordmark_black.png"/>
-          <p:cNvPicPr>
-            <a:picLocks noChangeAspect="1"/>
-          </p:cNvPicPr>
-          <p:nvPr/>
-        </p:nvPicPr>
-        <p:blipFill>
-          <a:blip r:embed="rId3"/>
-          <a:stretch>
-            <a:fillRect/>
-          </a:stretch>
-        </p:blipFill>
-        <p:spPr>
-          <a:xfrm>
-            <a:off x="10698480" y="292608"/>
-            <a:ext cx="960120" cy="110013"/>
-          </a:xfrm>
-          <a:prstGeom prst="rect">
-            <a:avLst/>
-          </a:prstGeom>
-        </p:spPr>
-      </p:pic>
+            <a:r>
+              <a:rPr lang="en-US" sz="1100" dirty="0"/>
+              <a:t>Primary Concern</a:t>
+            </a:r>
+          </a:p>
+        </p:txBody>
+      </p:sp>
     </p:spTree>
+    <p:extLst>
+      <p:ext uri="{BB962C8B-B14F-4D97-AF65-F5344CB8AC3E}">
+        <p14:creationId xmlns:p14="http://schemas.microsoft.com/office/powerpoint/2010/main" val="45494476"/>
+      </p:ext>
+    </p:extLst>
   </p:cSld>
   <p:clrMapOvr>
     <a:masterClrMapping/>
@@ -12565,7 +12432,7 @@
         <p:spPr>
           <a:xfrm>
             <a:off x="502920" y="292608"/>
-            <a:ext cx="11155680" cy="274320"/>
+            <a:ext cx="11155680" cy="161583"/>
           </a:xfrm>
           <a:prstGeom prst="rect">
             <a:avLst/>
@@ -12580,14 +12447,29 @@
           <a:p>
             <a:pPr algn="l"/>
             <a:r>
-              <a:rPr sz="1050" b="1" i="0">
+              <a:rPr sz="1050" b="1" i="0" dirty="0">
                 <a:solidFill>
                   <a:srgbClr val="757575"/>
                 </a:solidFill>
                 <a:latin typeface="Arial"/>
               </a:rPr>
-              <a:t>CUSTOMER ACQUISITION</a:t>
-            </a:r>
+              <a:t>CANNIBALIZATION</a:t>
+            </a:r>
+            <a:r>
+              <a:rPr lang="en-US" sz="1050" b="1" i="0" dirty="0">
+                <a:solidFill>
+                  <a:srgbClr val="757575"/>
+                </a:solidFill>
+                <a:latin typeface="Arial"/>
+              </a:rPr>
+              <a:t> BREAKDOWN</a:t>
+            </a:r>
+            <a:endParaRPr sz="1050" b="1" i="0" dirty="0">
+              <a:solidFill>
+                <a:srgbClr val="757575"/>
+              </a:solidFill>
+              <a:latin typeface="Arial"/>
+            </a:endParaRPr>
           </a:p>
         </p:txBody>
       </p:sp>
@@ -12600,7 +12482,7 @@
         <p:spPr>
           <a:xfrm>
             <a:off x="502920" y="566928"/>
-            <a:ext cx="11201400" cy="777240"/>
+            <a:ext cx="11201400" cy="353943"/>
           </a:xfrm>
           <a:prstGeom prst="rect">
             <a:avLst/>
@@ -12615,27 +12497,51 @@
           <a:p>
             <a:pPr algn="l"/>
             <a:r>
-              <a:rPr sz="2300" b="0" i="0">
+              <a:rPr sz="2300" b="0" i="0" dirty="0">
                 <a:solidFill>
                   <a:srgbClr val="000000"/>
                 </a:solidFill>
                 <a:latin typeface="Georgia"/>
               </a:rPr>
-              <a:t>44% of Vestal Pro buyers were new to Salomon, acquired at half their early value</a:t>
-            </a:r>
-          </a:p>
-        </p:txBody>
-      </p:sp>
-      <p:sp>
-        <p:nvSpPr>
-          <p:cNvPr id="4" name="TextBox 3"/>
+              <a:t>19–32% of Vestal Pro units shifted from existing shoes</a:t>
+            </a:r>
+            <a:r>
+              <a:rPr lang="en-US" sz="2300" b="0" i="0" dirty="0">
+                <a:solidFill>
+                  <a:srgbClr val="000000"/>
+                </a:solidFill>
+                <a:latin typeface="Georgia"/>
+              </a:rPr>
+              <a:t>; exceeding </a:t>
+            </a:r>
+            <a:r>
+              <a:rPr lang="en-US" sz="2300" dirty="0">
+                <a:solidFill>
+                  <a:srgbClr val="000000"/>
+                </a:solidFill>
+                <a:latin typeface="Georgia"/>
+              </a:rPr>
+              <a:t>10% threshold.</a:t>
+            </a:r>
+            <a:endParaRPr sz="2300" b="0" i="0" dirty="0">
+              <a:solidFill>
+                <a:srgbClr val="000000"/>
+              </a:solidFill>
+              <a:latin typeface="Georgia"/>
+            </a:endParaRPr>
+          </a:p>
+        </p:txBody>
+      </p:sp>
+      <p:sp>
+        <p:nvSpPr>
+          <p:cNvPr id="10" name="TextBox 9"/>
           <p:cNvSpPr txBox="1"/>
           <p:nvPr/>
         </p:nvSpPr>
         <p:spPr>
           <a:xfrm>
-            <a:off x="502920" y="1481328"/>
-            <a:ext cx="3383280" cy="274320"/>
+            <a:off x="502920" y="6510528"/>
+            <a:ext cx="10515600" cy="123111"/>
           </a:xfrm>
           <a:prstGeom prst="rect">
             <a:avLst/>
@@ -12650,45 +12556,42 @@
           <a:p>
             <a:pPr algn="l"/>
             <a:r>
-              <a:rPr sz="1000" b="1" i="0">
+              <a:rPr sz="800" b="0" i="0" dirty="0">
                 <a:solidFill>
                   <a:srgbClr val="757575"/>
                 </a:solidFill>
                 <a:latin typeface="Arial"/>
               </a:rPr>
-              <a:t>VESTAL PRO BUYER MIX (N = 1,335)</a:t>
-            </a:r>
-          </a:p>
-        </p:txBody>
-      </p:sp>
-      <p:graphicFrame>
-        <p:nvGraphicFramePr>
-          <p:cNvPr id="5" name="Chart 4"/>
-          <p:cNvGraphicFramePr>
-            <a:graphicFrameLocks noGrp="1"/>
-          </p:cNvGraphicFramePr>
-          <p:nvPr/>
-        </p:nvGraphicFramePr>
-        <p:xfrm>
-          <a:off x="502920" y="1828800"/>
-          <a:ext cx="3383280" cy="3383280"/>
-        </p:xfrm>
-        <a:graphic>
-          <a:graphicData uri="http://schemas.openxmlformats.org/drawingml/2006/chart">
-            <c:chart xmlns:c="http://schemas.openxmlformats.org/drawingml/2006/chart" xmlns:r="http://schemas.openxmlformats.org/officeDocument/2006/relationships" r:id="rId2"/>
-          </a:graphicData>
-        </a:graphic>
-      </p:graphicFrame>
-      <p:sp>
-        <p:nvSpPr>
-          <p:cNvPr id="6" name="TextBox 5"/>
+              <a:t>Salomon NA eCommerce · Vestal Pro launch readout · Unit baselines per franchise; range reflects </a:t>
+            </a:r>
+            <a:r>
+              <a:rPr lang="en-US" sz="800" b="0" i="0" dirty="0">
+                <a:solidFill>
+                  <a:srgbClr val="757575"/>
+                </a:solidFill>
+                <a:latin typeface="Arial"/>
+              </a:rPr>
+              <a:t>baseline forecast uncertainty</a:t>
+            </a:r>
+            <a:endParaRPr sz="800" b="0" i="0" dirty="0">
+              <a:solidFill>
+                <a:srgbClr val="757575"/>
+              </a:solidFill>
+              <a:latin typeface="Arial"/>
+            </a:endParaRPr>
+          </a:p>
+        </p:txBody>
+      </p:sp>
+      <p:sp>
+        <p:nvSpPr>
+          <p:cNvPr id="11" name="TextBox 10"/>
           <p:cNvSpPr txBox="1"/>
           <p:nvPr/>
         </p:nvSpPr>
         <p:spPr>
           <a:xfrm>
-            <a:off x="502920" y="3246120"/>
-            <a:ext cx="3383280" cy="640080"/>
+            <a:off x="11292840" y="6510528"/>
+            <a:ext cx="411480" cy="274320"/>
           </a:xfrm>
           <a:prstGeom prst="rect">
             <a:avLst/>
@@ -12701,660 +12604,29 @@
           </a:bodyPr>
           <a:lstStyle/>
           <a:p>
-            <a:pPr algn="ctr">
-              <a:lnSpc>
-                <a:spcPct val="95000"/>
-              </a:lnSpc>
-            </a:pPr>
-            <a:r>
-              <a:rPr sz="2600" b="1" i="0">
-                <a:solidFill>
-                  <a:srgbClr val="000000"/>
-                </a:solidFill>
-                <a:latin typeface="Arial"/>
-              </a:rPr>
-              <a:t>44%</a:t>
-            </a:r>
-          </a:p>
-          <a:p>
-            <a:pPr algn="ctr">
-              <a:lnSpc>
-                <a:spcPct val="95000"/>
-              </a:lnSpc>
-            </a:pPr>
-            <a:r>
-              <a:rPr sz="1200" b="0" i="0">
+            <a:pPr algn="r"/>
+            <a:r>
+              <a:rPr sz="800" b="0" i="0">
                 <a:solidFill>
                   <a:srgbClr val="757575"/>
                 </a:solidFill>
                 <a:latin typeface="Arial"/>
               </a:rPr>
-              <a:t>new</a:t>
-            </a:r>
-          </a:p>
-        </p:txBody>
-      </p:sp>
-      <p:sp>
-        <p:nvSpPr>
-          <p:cNvPr id="7" name="TextBox 6"/>
-          <p:cNvSpPr txBox="1"/>
-          <p:nvPr/>
-        </p:nvSpPr>
-        <p:spPr>
-          <a:xfrm>
-            <a:off x="502920" y="5303520"/>
-            <a:ext cx="3383280" cy="548640"/>
-          </a:xfrm>
-          <a:prstGeom prst="rect">
-            <a:avLst/>
-          </a:prstGeom>
-          <a:noFill/>
-        </p:spPr>
-        <p:txBody>
-          <a:bodyPr wrap="square" lIns="0" tIns="0" rIns="0" bIns="0" anchor="t">
-            <a:spAutoFit/>
-          </a:bodyPr>
-          <a:lstStyle/>
-          <a:p>
-            <a:pPr algn="ctr">
-              <a:spcAft>
-                <a:spcPts val="300"/>
-              </a:spcAft>
-            </a:pPr>
-            <a:r>
-              <a:rPr sz="1100" b="1" i="0">
-                <a:solidFill>
-                  <a:srgbClr val="0057B8"/>
-                </a:solidFill>
-                <a:latin typeface="Arial"/>
-              </a:rPr>
-              <a:t>New 590 · </a:t>
-            </a:r>
-            <a:r>
-              <a:rPr sz="1100" b="1" i="0">
-                <a:solidFill>
-                  <a:srgbClr val="757575"/>
-                </a:solidFill>
-                <a:latin typeface="Arial"/>
-              </a:rPr>
-              <a:t>Existing 745</a:t>
-            </a:r>
-          </a:p>
-          <a:p>
-            <a:pPr algn="ctr">
-              <a:spcAft>
-                <a:spcPts val="300"/>
-              </a:spcAft>
-            </a:pPr>
-            <a:r>
-              <a:rPr sz="1050" b="0" i="0">
-                <a:solidFill>
-                  <a:srgbClr val="757575"/>
-                </a:solidFill>
-                <a:latin typeface="Arial"/>
-              </a:rPr>
-              <a:t>Success criterion ≥ 25% · </a:t>
-            </a:r>
-            <a:r>
-              <a:rPr sz="1050" b="1" i="0">
-                <a:solidFill>
-                  <a:srgbClr val="1F7A4D"/>
-                </a:solidFill>
-                <a:latin typeface="Arial"/>
-              </a:rPr>
-              <a:t>PASS</a:t>
-            </a:r>
-          </a:p>
-        </p:txBody>
-      </p:sp>
-      <p:sp>
-        <p:nvSpPr>
-          <p:cNvPr id="8" name="TextBox 7"/>
-          <p:cNvSpPr txBox="1"/>
-          <p:nvPr/>
-        </p:nvSpPr>
-        <p:spPr>
-          <a:xfrm>
-            <a:off x="4343400" y="1481328"/>
-            <a:ext cx="3474720" cy="274320"/>
-          </a:xfrm>
-          <a:prstGeom prst="rect">
-            <a:avLst/>
-          </a:prstGeom>
-          <a:noFill/>
-        </p:spPr>
-        <p:txBody>
-          <a:bodyPr wrap="square" lIns="0" tIns="0" rIns="0" bIns="0" anchor="t">
-            <a:spAutoFit/>
-          </a:bodyPr>
-          <a:lstStyle/>
-          <a:p>
-            <a:pPr algn="l"/>
-            <a:r>
-              <a:rPr sz="1000" b="1" i="0">
-                <a:solidFill>
-                  <a:srgbClr val="757575"/>
-                </a:solidFill>
-                <a:latin typeface="Arial"/>
-              </a:rPr>
-              <a:t>ACQUISITION ECONOMICS</a:t>
-            </a:r>
-          </a:p>
-        </p:txBody>
-      </p:sp>
-      <p:sp>
-        <p:nvSpPr>
-          <p:cNvPr id="9" name="TextBox 8"/>
-          <p:cNvSpPr txBox="1"/>
-          <p:nvPr/>
-        </p:nvSpPr>
-        <p:spPr>
-          <a:xfrm>
-            <a:off x="4343400" y="1847088"/>
-            <a:ext cx="3474720" cy="914400"/>
-          </a:xfrm>
-          <a:prstGeom prst="rect">
-            <a:avLst/>
-          </a:prstGeom>
-          <a:noFill/>
-        </p:spPr>
-        <p:txBody>
-          <a:bodyPr wrap="square" lIns="0" tIns="0" rIns="0" bIns="0" anchor="t">
-            <a:spAutoFit/>
-          </a:bodyPr>
-          <a:lstStyle/>
-          <a:p>
-            <a:pPr algn="l">
-              <a:lnSpc>
-                <a:spcPct val="100000"/>
-              </a:lnSpc>
-              <a:spcAft>
-                <a:spcPts val="200"/>
-              </a:spcAft>
-            </a:pPr>
-            <a:r>
-              <a:rPr sz="2100" b="1" i="0">
-                <a:solidFill>
-                  <a:srgbClr val="333333"/>
-                </a:solidFill>
-                <a:latin typeface="Arial"/>
-              </a:rPr>
-              <a:t>$104   </a:t>
-            </a:r>
-            <a:r>
-              <a:rPr sz="1200" b="1" i="0">
-                <a:solidFill>
-                  <a:srgbClr val="333333"/>
-                </a:solidFill>
-                <a:latin typeface="Arial"/>
-              </a:rPr>
-              <a:t>Blended CAC</a:t>
-            </a:r>
-          </a:p>
-          <a:p>
-            <a:pPr algn="l">
-              <a:lnSpc>
-                <a:spcPct val="100000"/>
-              </a:lnSpc>
-              <a:spcAft>
-                <a:spcPts val="200"/>
-              </a:spcAft>
-            </a:pPr>
-            <a:r>
-              <a:rPr sz="1050" b="0" i="0">
-                <a:solidFill>
-                  <a:srgbClr val="757575"/>
-                </a:solidFill>
-                <a:latin typeface="Arial"/>
-              </a:rPr>
-              <a:t>$155.8K spend ÷ 1,499 new customers</a:t>
-            </a:r>
-          </a:p>
-        </p:txBody>
-      </p:sp>
-      <p:sp>
-        <p:nvSpPr>
-          <p:cNvPr id="10" name="TextBox 9"/>
-          <p:cNvSpPr txBox="1"/>
-          <p:nvPr/>
-        </p:nvSpPr>
-        <p:spPr>
-          <a:xfrm>
-            <a:off x="4343400" y="2834640"/>
-            <a:ext cx="3474720" cy="914400"/>
-          </a:xfrm>
-          <a:prstGeom prst="rect">
-            <a:avLst/>
-          </a:prstGeom>
-          <a:noFill/>
-        </p:spPr>
-        <p:txBody>
-          <a:bodyPr wrap="square" lIns="0" tIns="0" rIns="0" bIns="0" anchor="t">
-            <a:spAutoFit/>
-          </a:bodyPr>
-          <a:lstStyle/>
-          <a:p>
-            <a:pPr algn="l">
-              <a:lnSpc>
-                <a:spcPct val="100000"/>
-              </a:lnSpc>
-              <a:spcAft>
-                <a:spcPts val="200"/>
-              </a:spcAft>
-            </a:pPr>
-            <a:r>
-              <a:rPr sz="2100" b="1" i="0">
-                <a:solidFill>
-                  <a:srgbClr val="333333"/>
-                </a:solidFill>
-                <a:latin typeface="Arial"/>
-              </a:rPr>
-              <a:t>$130   </a:t>
-            </a:r>
-            <a:r>
-              <a:rPr sz="1200" b="1" i="0">
-                <a:solidFill>
-                  <a:srgbClr val="333333"/>
-                </a:solidFill>
-                <a:latin typeface="Arial"/>
-              </a:rPr>
-              <a:t>First-order value</a:t>
-            </a:r>
-          </a:p>
-          <a:p>
-            <a:pPr algn="l">
-              <a:lnSpc>
-                <a:spcPct val="100000"/>
-              </a:lnSpc>
-              <a:spcAft>
-                <a:spcPts val="200"/>
-              </a:spcAft>
-            </a:pPr>
-            <a:r>
-              <a:rPr sz="1050" b="0" i="0">
-                <a:solidFill>
-                  <a:srgbClr val="757575"/>
-                </a:solidFill>
-                <a:latin typeface="Arial"/>
-              </a:rPr>
-              <a:t>average first basket, new customers</a:t>
-            </a:r>
-          </a:p>
-        </p:txBody>
-      </p:sp>
-      <p:sp>
-        <p:nvSpPr>
-          <p:cNvPr id="11" name="TextBox 10"/>
-          <p:cNvSpPr txBox="1"/>
-          <p:nvPr/>
-        </p:nvSpPr>
-        <p:spPr>
-          <a:xfrm>
-            <a:off x="4343400" y="3822191"/>
-            <a:ext cx="3474720" cy="914400"/>
-          </a:xfrm>
-          <a:prstGeom prst="rect">
-            <a:avLst/>
-          </a:prstGeom>
-          <a:noFill/>
-        </p:spPr>
-        <p:txBody>
-          <a:bodyPr wrap="square" lIns="0" tIns="0" rIns="0" bIns="0" anchor="t">
-            <a:spAutoFit/>
-          </a:bodyPr>
-          <a:lstStyle/>
-          <a:p>
-            <a:pPr algn="l">
-              <a:lnSpc>
-                <a:spcPct val="100000"/>
-              </a:lnSpc>
-              <a:spcAft>
-                <a:spcPts val="200"/>
-              </a:spcAft>
-            </a:pPr>
-            <a:r>
-              <a:rPr sz="2100" b="1" i="0">
-                <a:solidFill>
-                  <a:srgbClr val="0057B8"/>
-                </a:solidFill>
-                <a:latin typeface="Arial"/>
-              </a:rPr>
-              <a:t>$212   </a:t>
-            </a:r>
-            <a:r>
-              <a:rPr sz="1200" b="1" i="0">
-                <a:solidFill>
-                  <a:srgbClr val="333333"/>
-                </a:solidFill>
-                <a:latin typeface="Arial"/>
-              </a:rPr>
-              <a:t>Early customer value</a:t>
-            </a:r>
-          </a:p>
-          <a:p>
-            <a:pPr algn="l">
-              <a:lnSpc>
-                <a:spcPct val="100000"/>
-              </a:lnSpc>
-              <a:spcAft>
-                <a:spcPts val="200"/>
-              </a:spcAft>
-            </a:pPr>
-            <a:r>
-              <a:rPr sz="1050" b="0" i="0">
-                <a:solidFill>
-                  <a:srgbClr val="757575"/>
-                </a:solidFill>
-                <a:latin typeface="Arial"/>
-              </a:rPr>
-              <a:t>revenue through May 10 · 2.0× CAC</a:t>
-            </a:r>
-          </a:p>
-        </p:txBody>
-      </p:sp>
-      <p:sp>
-        <p:nvSpPr>
-          <p:cNvPr id="12" name="TextBox 11"/>
-          <p:cNvSpPr txBox="1"/>
-          <p:nvPr/>
-        </p:nvSpPr>
-        <p:spPr>
-          <a:xfrm>
-            <a:off x="4343400" y="4809744"/>
-            <a:ext cx="3474720" cy="914400"/>
-          </a:xfrm>
-          <a:prstGeom prst="rect">
-            <a:avLst/>
-          </a:prstGeom>
-          <a:noFill/>
-        </p:spPr>
-        <p:txBody>
-          <a:bodyPr wrap="square" lIns="0" tIns="0" rIns="0" bIns="0" anchor="t">
-            <a:spAutoFit/>
-          </a:bodyPr>
-          <a:lstStyle/>
-          <a:p>
-            <a:pPr algn="l">
-              <a:lnSpc>
-                <a:spcPct val="100000"/>
-              </a:lnSpc>
-              <a:spcAft>
-                <a:spcPts val="200"/>
-              </a:spcAft>
-            </a:pPr>
-            <a:r>
-              <a:rPr sz="2100" b="1" i="0">
-                <a:solidFill>
-                  <a:srgbClr val="333333"/>
-                </a:solidFill>
-                <a:latin typeface="Arial"/>
-              </a:rPr>
-              <a:t>27%   </a:t>
-            </a:r>
-            <a:r>
-              <a:rPr sz="1200" b="1" i="0">
-                <a:solidFill>
-                  <a:srgbClr val="333333"/>
-                </a:solidFill>
-                <a:latin typeface="Arial"/>
-              </a:rPr>
-              <a:t>Post-period repeat rate</a:t>
-            </a:r>
-          </a:p>
-          <a:p>
-            <a:pPr algn="l">
-              <a:lnSpc>
-                <a:spcPct val="100000"/>
-              </a:lnSpc>
-              <a:spcAft>
-                <a:spcPts val="200"/>
-              </a:spcAft>
-            </a:pPr>
-            <a:r>
-              <a:rPr sz="1050" b="0" i="0">
-                <a:solidFill>
-                  <a:srgbClr val="757575"/>
-                </a:solidFill>
-                <a:latin typeface="Arial"/>
-              </a:rPr>
-              <a:t>repurchased within 4 weeks of flight end</a:t>
-            </a:r>
-          </a:p>
-        </p:txBody>
-      </p:sp>
-      <p:sp>
-        <p:nvSpPr>
-          <p:cNvPr id="13" name="TextBox 12"/>
-          <p:cNvSpPr txBox="1"/>
-          <p:nvPr/>
-        </p:nvSpPr>
-        <p:spPr>
-          <a:xfrm>
-            <a:off x="4343400" y="5760720"/>
-            <a:ext cx="3474720" cy="457200"/>
-          </a:xfrm>
-          <a:prstGeom prst="rect">
-            <a:avLst/>
-          </a:prstGeom>
-          <a:noFill/>
-        </p:spPr>
-        <p:txBody>
-          <a:bodyPr wrap="square" lIns="0" tIns="0" rIns="0" bIns="0" anchor="t">
-            <a:spAutoFit/>
-          </a:bodyPr>
-          <a:lstStyle/>
-          <a:p>
-            <a:pPr algn="l">
-              <a:lnSpc>
-                <a:spcPct val="105000"/>
-              </a:lnSpc>
-            </a:pPr>
-            <a:r>
-              <a:rPr sz="1000" b="0" i="1">
-                <a:solidFill>
-                  <a:srgbClr val="757575"/>
-                </a:solidFill>
-                <a:latin typeface="Arial"/>
-              </a:rPr>
-              <a:t>Full LTV needs cohort history beyond this window; early value already covers CAC twice over.</a:t>
-            </a:r>
-          </a:p>
-        </p:txBody>
-      </p:sp>
-      <p:sp>
-        <p:nvSpPr>
-          <p:cNvPr id="14" name="TextBox 13"/>
-          <p:cNvSpPr txBox="1"/>
-          <p:nvPr/>
-        </p:nvSpPr>
-        <p:spPr>
-          <a:xfrm>
-            <a:off x="8183879" y="1481328"/>
-            <a:ext cx="3520440" cy="274320"/>
-          </a:xfrm>
-          <a:prstGeom prst="rect">
-            <a:avLst/>
-          </a:prstGeom>
-          <a:noFill/>
-        </p:spPr>
-        <p:txBody>
-          <a:bodyPr wrap="square" lIns="0" tIns="0" rIns="0" bIns="0" anchor="t">
-            <a:spAutoFit/>
-          </a:bodyPr>
-          <a:lstStyle/>
-          <a:p>
-            <a:pPr algn="l"/>
-            <a:r>
-              <a:rPr sz="1000" b="1" i="0">
-                <a:solidFill>
-                  <a:srgbClr val="757575"/>
-                </a:solidFill>
-                <a:latin typeface="Arial"/>
-              </a:rPr>
-              <a:t>DATABASE ADDS PER DAY</a:t>
-            </a:r>
-          </a:p>
-        </p:txBody>
-      </p:sp>
-      <p:graphicFrame>
-        <p:nvGraphicFramePr>
-          <p:cNvPr id="15" name="Chart 14"/>
-          <p:cNvGraphicFramePr>
-            <a:graphicFrameLocks noGrp="1"/>
-          </p:cNvGraphicFramePr>
-          <p:nvPr/>
-        </p:nvGraphicFramePr>
-        <p:xfrm>
-          <a:off x="8046719" y="1828800"/>
-          <a:ext cx="3657600" cy="3108960"/>
-        </p:xfrm>
-        <a:graphic>
-          <a:graphicData uri="http://schemas.openxmlformats.org/drawingml/2006/chart">
-            <c:chart xmlns:c="http://schemas.openxmlformats.org/drawingml/2006/chart" xmlns:r="http://schemas.openxmlformats.org/officeDocument/2006/relationships" r:id="rId3"/>
-          </a:graphicData>
-        </a:graphic>
-      </p:graphicFrame>
-      <p:sp>
-        <p:nvSpPr>
-          <p:cNvPr id="16" name="TextBox 15"/>
-          <p:cNvSpPr txBox="1"/>
-          <p:nvPr/>
-        </p:nvSpPr>
-        <p:spPr>
-          <a:xfrm>
-            <a:off x="8183879" y="5074920"/>
-            <a:ext cx="3520440" cy="1188720"/>
-          </a:xfrm>
-          <a:prstGeom prst="rect">
-            <a:avLst/>
-          </a:prstGeom>
-          <a:noFill/>
-        </p:spPr>
-        <p:txBody>
-          <a:bodyPr wrap="square" lIns="0" tIns="0" rIns="0" bIns="0" anchor="t">
-            <a:spAutoFit/>
-          </a:bodyPr>
-          <a:lstStyle/>
-          <a:p>
-            <a:pPr algn="l">
-              <a:lnSpc>
-                <a:spcPct val="108000"/>
-              </a:lnSpc>
-              <a:spcAft>
-                <a:spcPts val="500"/>
-              </a:spcAft>
-            </a:pPr>
-            <a:r>
-              <a:rPr sz="1050" b="0" i="0">
-                <a:solidFill>
-                  <a:srgbClr val="333333"/>
-                </a:solidFill>
-                <a:latin typeface="Arial"/>
-              </a:rPr>
-              <a:t>Email +34% · SMS +40% vs pre-period run-rate → 2,776 email and 1,447 SMS adds in six weeks.</a:t>
-            </a:r>
-          </a:p>
-          <a:p>
-            <a:pPr algn="l">
-              <a:lnSpc>
-                <a:spcPct val="108000"/>
-              </a:lnSpc>
-              <a:spcAft>
-                <a:spcPts val="500"/>
-              </a:spcAft>
-            </a:pPr>
-            <a:r>
-              <a:rPr sz="1050" b="0" i="0">
-                <a:solidFill>
-                  <a:srgbClr val="333333"/>
-                </a:solidFill>
-                <a:latin typeface="Arial"/>
-              </a:rPr>
-              <a:t>New Vestal Pro buyers opt in at 77% email / 47% SMS vs a 56% / 28% site average.</a:t>
-            </a:r>
-          </a:p>
-        </p:txBody>
-      </p:sp>
-      <p:sp>
-        <p:nvSpPr>
-          <p:cNvPr id="17" name="TextBox 16"/>
-          <p:cNvSpPr txBox="1"/>
-          <p:nvPr/>
-        </p:nvSpPr>
-        <p:spPr>
-          <a:xfrm>
-            <a:off x="502920" y="6510528"/>
-            <a:ext cx="10515600" cy="274320"/>
-          </a:xfrm>
-          <a:prstGeom prst="rect">
-            <a:avLst/>
-          </a:prstGeom>
-          <a:noFill/>
-        </p:spPr>
-        <p:txBody>
-          <a:bodyPr wrap="square" lIns="0" tIns="0" rIns="0" bIns="0" anchor="t">
-            <a:spAutoFit/>
-          </a:bodyPr>
-          <a:lstStyle/>
-          <a:p>
-            <a:pPr algn="l"/>
-            <a:r>
-              <a:rPr sz="800" b="0" i="0">
-                <a:solidFill>
-                  <a:srgbClr val="757575"/>
-                </a:solidFill>
-                <a:latin typeface="Arial"/>
-              </a:rPr>
-              <a:t>Salomon NA eCommerce · Vestal Pro launch readout · Illustrative synthetic case data · No numeric CAC or database targets were set pre-launch — set them next flight</a:t>
-            </a:r>
-          </a:p>
-        </p:txBody>
-      </p:sp>
-      <p:sp>
-        <p:nvSpPr>
-          <p:cNvPr id="18" name="TextBox 17"/>
-          <p:cNvSpPr txBox="1"/>
-          <p:nvPr/>
-        </p:nvSpPr>
-        <p:spPr>
-          <a:xfrm>
-            <a:off x="11292840" y="6510528"/>
-            <a:ext cx="411480" cy="274320"/>
-          </a:xfrm>
-          <a:prstGeom prst="rect">
-            <a:avLst/>
-          </a:prstGeom>
-          <a:noFill/>
-        </p:spPr>
-        <p:txBody>
-          <a:bodyPr wrap="square" lIns="0" tIns="0" rIns="0" bIns="0" anchor="t">
-            <a:spAutoFit/>
-          </a:bodyPr>
-          <a:lstStyle/>
-          <a:p>
-            <a:pPr algn="r"/>
-            <a:r>
-              <a:rPr sz="800" b="0" i="0">
-                <a:solidFill>
-                  <a:srgbClr val="757575"/>
-                </a:solidFill>
-                <a:latin typeface="Arial"/>
-              </a:rPr>
-              <a:t>7</a:t>
+              <a:t>8</a:t>
             </a:r>
           </a:p>
         </p:txBody>
       </p:sp>
       <p:pic>
         <p:nvPicPr>
-          <p:cNvPr id="19" name="Picture 18" descr="salomon_wordmark_black.png"/>
+          <p:cNvPr id="12" name="Picture 11" descr="salomon_wordmark_black.png"/>
           <p:cNvPicPr>
             <a:picLocks noChangeAspect="1"/>
           </p:cNvPicPr>
           <p:nvPr/>
         </p:nvPicPr>
         <p:blipFill>
-          <a:blip r:embed="rId4"/>
+          <a:blip r:embed="rId2"/>
           <a:stretch>
             <a:fillRect/>
           </a:stretch>
@@ -13369,6 +12641,505 @@
           </a:prstGeom>
         </p:spPr>
       </p:pic>
+      <p:pic>
+        <p:nvPicPr>
+          <p:cNvPr id="16" name="Picture 15" descr="The image displays a chart comparing campaign-period unit changes to an expected baseline, showing a +2% increase, -15% decrease, and -26% decrease, with categories labeled as Ultra Glide, Sense Ride, and Speedcross.&#10;&#10;AI-generated content may be incorrect.">
+            <a:extLst>
+              <a:ext uri="{FF2B5EF4-FFF2-40B4-BE49-F238E27FC236}">
+                <a16:creationId xmlns:a16="http://schemas.microsoft.com/office/drawing/2014/main" id="{BE3DF061-0D4F-724D-5B57-0E4889E12ECC}"/>
+              </a:ext>
+            </a:extLst>
+          </p:cNvPr>
+          <p:cNvPicPr>
+            <a:picLocks noChangeAspect="1"/>
+          </p:cNvPicPr>
+          <p:nvPr/>
+        </p:nvPicPr>
+        <p:blipFill>
+          <a:blip r:embed="rId3"/>
+          <a:stretch>
+            <a:fillRect/>
+          </a:stretch>
+        </p:blipFill>
+        <p:spPr>
+          <a:xfrm>
+            <a:off x="0" y="1388609"/>
+            <a:ext cx="7214614" cy="4280671"/>
+          </a:xfrm>
+          <a:prstGeom prst="rect">
+            <a:avLst/>
+          </a:prstGeom>
+        </p:spPr>
+      </p:pic>
+      <p:sp>
+        <p:nvSpPr>
+          <p:cNvPr id="18" name="TextBox 17">
+            <a:extLst>
+              <a:ext uri="{FF2B5EF4-FFF2-40B4-BE49-F238E27FC236}">
+                <a16:creationId xmlns:a16="http://schemas.microsoft.com/office/drawing/2014/main" id="{DA3AA3B7-4504-7461-E05E-7A04EC99A85D}"/>
+              </a:ext>
+            </a:extLst>
+          </p:cNvPr>
+          <p:cNvSpPr txBox="1"/>
+          <p:nvPr/>
+        </p:nvSpPr>
+        <p:spPr>
+          <a:xfrm>
+            <a:off x="7086600" y="1372249"/>
+            <a:ext cx="4572000" cy="274320"/>
+          </a:xfrm>
+          <a:prstGeom prst="rect">
+            <a:avLst/>
+          </a:prstGeom>
+          <a:noFill/>
+        </p:spPr>
+        <p:txBody>
+          <a:bodyPr wrap="square" lIns="0" tIns="0" rIns="0" bIns="0" anchor="t">
+            <a:spAutoFit/>
+          </a:bodyPr>
+          <a:lstStyle/>
+          <a:p>
+            <a:pPr algn="l"/>
+            <a:r>
+              <a:rPr sz="1000" b="1" i="0" dirty="0">
+                <a:solidFill>
+                  <a:srgbClr val="757575"/>
+                </a:solidFill>
+                <a:latin typeface="Arial"/>
+              </a:rPr>
+              <a:t>OVERALL CANNIBALIZATION ESTIMATE</a:t>
+            </a:r>
+          </a:p>
+        </p:txBody>
+      </p:sp>
+      <p:sp>
+        <p:nvSpPr>
+          <p:cNvPr id="20" name="TextBox 19">
+            <a:extLst>
+              <a:ext uri="{FF2B5EF4-FFF2-40B4-BE49-F238E27FC236}">
+                <a16:creationId xmlns:a16="http://schemas.microsoft.com/office/drawing/2014/main" id="{873EC008-E86B-BB1E-B68A-E0227EE13781}"/>
+              </a:ext>
+            </a:extLst>
+          </p:cNvPr>
+          <p:cNvSpPr txBox="1"/>
+          <p:nvPr/>
+        </p:nvSpPr>
+        <p:spPr>
+          <a:xfrm>
+            <a:off x="7086600" y="1840512"/>
+            <a:ext cx="4572000" cy="751488"/>
+          </a:xfrm>
+          <a:prstGeom prst="rect">
+            <a:avLst/>
+          </a:prstGeom>
+          <a:noFill/>
+        </p:spPr>
+        <p:txBody>
+          <a:bodyPr wrap="square" lIns="0" tIns="0" rIns="0" bIns="0" anchor="t">
+            <a:spAutoFit/>
+          </a:bodyPr>
+          <a:lstStyle/>
+          <a:p>
+            <a:pPr algn="l">
+              <a:spcAft>
+                <a:spcPts val="400"/>
+              </a:spcAft>
+            </a:pPr>
+            <a:r>
+              <a:rPr sz="3400" b="1" i="0" dirty="0">
+                <a:solidFill>
+                  <a:srgbClr val="DA291C"/>
+                </a:solidFill>
+                <a:latin typeface="Arial"/>
+              </a:rPr>
+              <a:t>19–32%</a:t>
+            </a:r>
+            <a:endParaRPr sz="1300" b="0" i="0" dirty="0">
+              <a:solidFill>
+                <a:srgbClr val="333333"/>
+              </a:solidFill>
+              <a:latin typeface="Arial"/>
+            </a:endParaRPr>
+          </a:p>
+          <a:p>
+            <a:pPr algn="l">
+              <a:spcAft>
+                <a:spcPts val="400"/>
+              </a:spcAft>
+            </a:pPr>
+            <a:r>
+              <a:rPr sz="1150" b="0" i="0" dirty="0">
+                <a:solidFill>
+                  <a:srgbClr val="757575"/>
+                </a:solidFill>
+                <a:latin typeface="Arial"/>
+              </a:rPr>
+              <a:t>Goal &lt; </a:t>
+            </a:r>
+            <a:r>
+              <a:rPr lang="en-US" sz="1150" b="0" i="0" dirty="0">
+                <a:solidFill>
+                  <a:srgbClr val="757575"/>
+                </a:solidFill>
+                <a:latin typeface="Arial"/>
+              </a:rPr>
+              <a:t>10</a:t>
+            </a:r>
+            <a:r>
+              <a:rPr sz="1150" b="0" i="0" dirty="0">
+                <a:solidFill>
+                  <a:srgbClr val="757575"/>
+                </a:solidFill>
+                <a:latin typeface="Arial"/>
+              </a:rPr>
+              <a:t>% · </a:t>
+            </a:r>
+            <a:r>
+              <a:rPr sz="1150" b="1" i="0" dirty="0">
+                <a:solidFill>
+                  <a:schemeClr val="accent1"/>
+                </a:solidFill>
+                <a:latin typeface="Arial"/>
+              </a:rPr>
+              <a:t>WATCH</a:t>
+            </a:r>
+            <a:endParaRPr sz="1150" b="0" i="0" dirty="0">
+              <a:solidFill>
+                <a:srgbClr val="757575"/>
+              </a:solidFill>
+              <a:latin typeface="Arial"/>
+            </a:endParaRPr>
+          </a:p>
+        </p:txBody>
+      </p:sp>
+      <p:sp>
+        <p:nvSpPr>
+          <p:cNvPr id="21" name="TextBox 20">
+            <a:extLst>
+              <a:ext uri="{FF2B5EF4-FFF2-40B4-BE49-F238E27FC236}">
+                <a16:creationId xmlns:a16="http://schemas.microsoft.com/office/drawing/2014/main" id="{819A2D8F-D114-4311-F64E-C1212D5B5A9F}"/>
+              </a:ext>
+            </a:extLst>
+          </p:cNvPr>
+          <p:cNvSpPr txBox="1"/>
+          <p:nvPr/>
+        </p:nvSpPr>
+        <p:spPr>
+          <a:xfrm>
+            <a:off x="8737707" y="1930997"/>
+            <a:ext cx="2280813" cy="430887"/>
+          </a:xfrm>
+          <a:prstGeom prst="rect">
+            <a:avLst/>
+          </a:prstGeom>
+          <a:noFill/>
+        </p:spPr>
+        <p:txBody>
+          <a:bodyPr wrap="square" rtlCol="0">
+            <a:spAutoFit/>
+          </a:bodyPr>
+          <a:lstStyle/>
+          <a:p>
+            <a:r>
+              <a:rPr lang="en-US" sz="1100" dirty="0">
+                <a:solidFill>
+                  <a:srgbClr val="333333"/>
+                </a:solidFill>
+                <a:latin typeface="Arial"/>
+              </a:rPr>
+              <a:t>of Vestal Pro units cannibalized existing portfolio</a:t>
+            </a:r>
+            <a:endParaRPr lang="en-US" sz="1100" dirty="0"/>
+          </a:p>
+        </p:txBody>
+      </p:sp>
+      <p:sp>
+        <p:nvSpPr>
+          <p:cNvPr id="23" name="TextBox 22">
+            <a:extLst>
+              <a:ext uri="{FF2B5EF4-FFF2-40B4-BE49-F238E27FC236}">
+                <a16:creationId xmlns:a16="http://schemas.microsoft.com/office/drawing/2014/main" id="{DC1642DC-B5C0-3D18-ECD9-49E05A17835B}"/>
+              </a:ext>
+            </a:extLst>
+          </p:cNvPr>
+          <p:cNvSpPr txBox="1"/>
+          <p:nvPr/>
+        </p:nvSpPr>
+        <p:spPr>
+          <a:xfrm>
+            <a:off x="7086600" y="2863959"/>
+            <a:ext cx="4572000" cy="1979966"/>
+          </a:xfrm>
+          <a:prstGeom prst="rect">
+            <a:avLst/>
+          </a:prstGeom>
+          <a:noFill/>
+        </p:spPr>
+        <p:txBody>
+          <a:bodyPr wrap="square" lIns="0" tIns="0" rIns="0" bIns="0" anchor="t">
+            <a:spAutoFit/>
+          </a:bodyPr>
+          <a:lstStyle/>
+          <a:p>
+            <a:pPr algn="l">
+              <a:lnSpc>
+                <a:spcPct val="112000"/>
+              </a:lnSpc>
+              <a:spcAft>
+                <a:spcPts val="800"/>
+              </a:spcAft>
+            </a:pPr>
+            <a:r>
+              <a:rPr sz="1150" b="0" i="0" dirty="0">
+                <a:solidFill>
+                  <a:srgbClr val="333333"/>
+                </a:solidFill>
+                <a:latin typeface="Arial"/>
+              </a:rPr>
+              <a:t>•  The three baseline estimates are 19%, 28%, and 32%, with a median of 28%.</a:t>
+            </a:r>
+          </a:p>
+          <a:p>
+            <a:pPr algn="l">
+              <a:lnSpc>
+                <a:spcPct val="112000"/>
+              </a:lnSpc>
+              <a:spcAft>
+                <a:spcPts val="800"/>
+              </a:spcAft>
+            </a:pPr>
+            <a:r>
+              <a:rPr sz="1150" b="0" i="0" dirty="0">
+                <a:solidFill>
+                  <a:srgbClr val="333333"/>
+                </a:solidFill>
+                <a:latin typeface="Arial"/>
+              </a:rPr>
+              <a:t>•  </a:t>
+            </a:r>
+            <a:r>
+              <a:rPr sz="1150" b="1" i="0" dirty="0">
+                <a:solidFill>
+                  <a:srgbClr val="333333"/>
+                </a:solidFill>
+                <a:latin typeface="Arial"/>
+              </a:rPr>
+              <a:t>$30.5K</a:t>
+            </a:r>
+            <a:r>
+              <a:rPr sz="1150" b="0" i="0" dirty="0">
+                <a:solidFill>
+                  <a:srgbClr val="333333"/>
+                </a:solidFill>
+                <a:latin typeface="Arial"/>
+              </a:rPr>
+              <a:t> of existing-shoe revenue was displaced </a:t>
+            </a:r>
+            <a:r>
+              <a:rPr lang="en-US" sz="1150" dirty="0">
+                <a:solidFill>
+                  <a:srgbClr val="333333"/>
+                </a:solidFill>
+                <a:latin typeface="Arial"/>
+              </a:rPr>
+              <a:t>by </a:t>
+            </a:r>
+            <a:r>
+              <a:rPr sz="1150" b="0" i="0" dirty="0">
+                <a:solidFill>
+                  <a:srgbClr val="333333"/>
+                </a:solidFill>
+                <a:latin typeface="Arial"/>
+              </a:rPr>
+              <a:t>about </a:t>
+            </a:r>
+            <a:r>
+              <a:rPr sz="1150" b="1" i="0" dirty="0">
+                <a:solidFill>
+                  <a:srgbClr val="333333"/>
+                </a:solidFill>
+                <a:latin typeface="Arial"/>
+              </a:rPr>
+              <a:t>31% </a:t>
+            </a:r>
+            <a:r>
+              <a:rPr sz="1150" b="0" i="0" dirty="0">
+                <a:solidFill>
+                  <a:srgbClr val="333333"/>
+                </a:solidFill>
+                <a:latin typeface="Arial"/>
+              </a:rPr>
+              <a:t>of Vestal Pro's $99.8K direct revenue.</a:t>
+            </a:r>
+          </a:p>
+          <a:p>
+            <a:pPr algn="l">
+              <a:lnSpc>
+                <a:spcPct val="112000"/>
+              </a:lnSpc>
+              <a:spcAft>
+                <a:spcPts val="800"/>
+              </a:spcAft>
+            </a:pPr>
+            <a:r>
+              <a:rPr sz="1150" b="0" i="0" dirty="0">
+                <a:solidFill>
+                  <a:srgbClr val="333333"/>
+                </a:solidFill>
+                <a:latin typeface="Arial"/>
+              </a:rPr>
+              <a:t>•  </a:t>
+            </a:r>
+            <a:r>
+              <a:rPr lang="en-US" sz="1150" b="0" i="0" dirty="0">
+                <a:solidFill>
+                  <a:srgbClr val="333333"/>
+                </a:solidFill>
+                <a:latin typeface="Arial"/>
+              </a:rPr>
+              <a:t>Sales shift is concentrated where product </a:t>
+            </a:r>
+            <a:r>
+              <a:rPr sz="1150" b="0" i="0" dirty="0">
+                <a:solidFill>
+                  <a:srgbClr val="333333"/>
+                </a:solidFill>
+                <a:latin typeface="Arial"/>
+              </a:rPr>
+              <a:t>positioning overlaps</a:t>
+            </a:r>
+            <a:r>
+              <a:rPr lang="en-US" sz="1150" dirty="0">
+                <a:solidFill>
+                  <a:srgbClr val="333333"/>
+                </a:solidFill>
+                <a:latin typeface="Arial"/>
+              </a:rPr>
+              <a:t>. </a:t>
+            </a:r>
+            <a:endParaRPr lang="en-US" sz="1150" b="0" i="0" dirty="0">
+              <a:solidFill>
+                <a:srgbClr val="333333"/>
+              </a:solidFill>
+              <a:latin typeface="Arial"/>
+            </a:endParaRPr>
+          </a:p>
+          <a:p>
+            <a:pPr algn="l">
+              <a:lnSpc>
+                <a:spcPct val="112000"/>
+              </a:lnSpc>
+              <a:spcAft>
+                <a:spcPts val="800"/>
+              </a:spcAft>
+            </a:pPr>
+            <a:r>
+              <a:rPr lang="en-US" sz="1150" b="0" i="0" dirty="0">
+                <a:solidFill>
+                  <a:srgbClr val="333333"/>
+                </a:solidFill>
+                <a:latin typeface="Arial"/>
+              </a:rPr>
+              <a:t>•  The launch remains net positive: +$69.3K in additional footwear revenue after the shift.</a:t>
+            </a:r>
+          </a:p>
+          <a:p>
+            <a:pPr>
+              <a:lnSpc>
+                <a:spcPct val="112000"/>
+              </a:lnSpc>
+              <a:spcAft>
+                <a:spcPts val="800"/>
+              </a:spcAft>
+            </a:pPr>
+            <a:r>
+              <a:rPr lang="en-US" sz="1150" dirty="0">
+                <a:solidFill>
+                  <a:srgbClr val="333333"/>
+                </a:solidFill>
+                <a:latin typeface="Arial"/>
+              </a:rPr>
+              <a:t>• </a:t>
+            </a:r>
+            <a:r>
+              <a:rPr lang="en-US" sz="1150" dirty="0" err="1">
+                <a:solidFill>
+                  <a:srgbClr val="333333"/>
+                </a:solidFill>
+                <a:latin typeface="Arial"/>
+              </a:rPr>
+              <a:t>Speedcross</a:t>
+            </a:r>
+            <a:r>
+              <a:rPr lang="en-US" sz="1150" dirty="0">
+                <a:solidFill>
+                  <a:srgbClr val="333333"/>
+                </a:solidFill>
+                <a:latin typeface="Arial"/>
+              </a:rPr>
+              <a:t> displacement is insignificant.</a:t>
+            </a:r>
+          </a:p>
+        </p:txBody>
+      </p:sp>
+      <p:sp>
+        <p:nvSpPr>
+          <p:cNvPr id="25" name="TextBox 24">
+            <a:extLst>
+              <a:ext uri="{FF2B5EF4-FFF2-40B4-BE49-F238E27FC236}">
+                <a16:creationId xmlns:a16="http://schemas.microsoft.com/office/drawing/2014/main" id="{7FE3D2DA-5796-3584-EDB3-ED2796F107D6}"/>
+              </a:ext>
+            </a:extLst>
+          </p:cNvPr>
+          <p:cNvSpPr txBox="1"/>
+          <p:nvPr/>
+        </p:nvSpPr>
+        <p:spPr>
+          <a:xfrm>
+            <a:off x="7086600" y="5293372"/>
+            <a:ext cx="4572000" cy="338554"/>
+          </a:xfrm>
+          <a:prstGeom prst="rect">
+            <a:avLst/>
+          </a:prstGeom>
+          <a:noFill/>
+        </p:spPr>
+        <p:txBody>
+          <a:bodyPr wrap="square" lIns="0" tIns="0" rIns="0" bIns="0" anchor="t">
+            <a:spAutoFit/>
+          </a:bodyPr>
+          <a:lstStyle/>
+          <a:p>
+            <a:pPr algn="l"/>
+            <a:r>
+              <a:rPr lang="en-US" sz="1100" b="1" i="1" dirty="0">
+                <a:solidFill>
+                  <a:schemeClr val="accent6">
+                    <a:lumMod val="75000"/>
+                  </a:schemeClr>
+                </a:solidFill>
+                <a:latin typeface="Arial"/>
+              </a:rPr>
+              <a:t>MANAGE</a:t>
+            </a:r>
+            <a:r>
+              <a:rPr lang="en-US" sz="1100" b="1" i="1" dirty="0">
+                <a:latin typeface="Arial"/>
+              </a:rPr>
+              <a:t> </a:t>
+            </a:r>
+            <a:r>
+              <a:rPr lang="en-US" sz="1100" i="1" dirty="0">
+                <a:latin typeface="Arial"/>
+              </a:rPr>
+              <a:t>franchise shift with merchandising that reduces head-to-head substitution. </a:t>
+            </a:r>
+            <a:endParaRPr sz="1100" i="1" dirty="0">
+              <a:latin typeface="Arial"/>
+            </a:endParaRPr>
+          </a:p>
+        </p:txBody>
+      </p:sp>
     </p:spTree>
   </p:cSld>
   <p:clrMapOvr>
@@ -13403,7 +13174,7 @@
         <p:spPr>
           <a:xfrm>
             <a:off x="502920" y="292608"/>
-            <a:ext cx="11155680" cy="274320"/>
+            <a:ext cx="11155680" cy="161583"/>
           </a:xfrm>
           <a:prstGeom prst="rect">
             <a:avLst/>
@@ -13418,14 +13189,29 @@
           <a:p>
             <a:pPr algn="l"/>
             <a:r>
-              <a:rPr sz="1050" b="1" i="0">
+              <a:rPr sz="1050" b="1" i="0" dirty="0">
                 <a:solidFill>
                   <a:srgbClr val="757575"/>
                 </a:solidFill>
                 <a:latin typeface="Arial"/>
               </a:rPr>
-              <a:t>CANNIBALIZATION</a:t>
-            </a:r>
+              <a:t>CUSTOMER ACQUISITION</a:t>
+            </a:r>
+            <a:r>
+              <a:rPr lang="en-US" sz="1050" b="1" i="0" dirty="0">
+                <a:solidFill>
+                  <a:srgbClr val="757575"/>
+                </a:solidFill>
+                <a:latin typeface="Arial"/>
+              </a:rPr>
+              <a:t> AND LTV</a:t>
+            </a:r>
+            <a:endParaRPr sz="1050" b="1" i="0" dirty="0">
+              <a:solidFill>
+                <a:srgbClr val="757575"/>
+              </a:solidFill>
+              <a:latin typeface="Arial"/>
+            </a:endParaRPr>
           </a:p>
         </p:txBody>
       </p:sp>
@@ -13459,7 +13245,7 @@
                 </a:solidFill>
                 <a:latin typeface="Georgia"/>
               </a:rPr>
-              <a:t>An estimated 19–32% of Vestal Pro units shifted from existing shoes — near or above the 25% goal</a:t>
+              <a:t>44% of Vestal Pro buyers were new to Salomon, acquired at half their early value</a:t>
             </a:r>
           </a:p>
         </p:txBody>
@@ -13473,7 +13259,7 @@
         <p:spPr>
           <a:xfrm>
             <a:off x="502920" y="1481328"/>
-            <a:ext cx="6035040" cy="274320"/>
+            <a:ext cx="3383280" cy="274320"/>
           </a:xfrm>
           <a:prstGeom prst="rect">
             <a:avLst/>
@@ -13494,7 +13280,7 @@
                 </a:solidFill>
                 <a:latin typeface="Arial"/>
               </a:rPr>
-              <a:t>EXISTING-SHOE UNITS VS EXPECTED BASELINE, CAMPAIGN</a:t>
+              <a:t>VESTAL PRO BUYER MIX (N = 1,335)</a:t>
             </a:r>
           </a:p>
         </p:txBody>
@@ -13508,8 +13294,8 @@
           <p:nvPr/>
         </p:nvGraphicFramePr>
         <p:xfrm>
-          <a:off x="365760" y="1828800"/>
-          <a:ext cx="6309360" cy="4023360"/>
+          <a:off x="502920" y="1828800"/>
+          <a:ext cx="3383280" cy="3383280"/>
         </p:xfrm>
         <a:graphic>
           <a:graphicData uri="http://schemas.openxmlformats.org/drawingml/2006/chart">
@@ -13525,8 +13311,8 @@
         </p:nvSpPr>
         <p:spPr>
           <a:xfrm>
-            <a:off x="640080" y="5806440"/>
-            <a:ext cx="5852160" cy="320040"/>
+            <a:off x="502920" y="3246120"/>
+            <a:ext cx="3383280" cy="640080"/>
           </a:xfrm>
           <a:prstGeom prst="rect">
             <a:avLst/>
@@ -13539,15 +13325,35 @@
           </a:bodyPr>
           <a:lstStyle/>
           <a:p>
-            <a:pPr algn="l"/>
-            <a:r>
-              <a:rPr sz="1000" b="0" i="1">
+            <a:pPr algn="ctr">
+              <a:lnSpc>
+                <a:spcPct val="95000"/>
+              </a:lnSpc>
+            </a:pPr>
+            <a:r>
+              <a:rPr sz="2600" b="1" i="0">
+                <a:solidFill>
+                  <a:srgbClr val="000000"/>
+                </a:solidFill>
+                <a:latin typeface="Arial"/>
+              </a:rPr>
+              <a:t>44%</a:t>
+            </a:r>
+          </a:p>
+          <a:p>
+            <a:pPr algn="ctr">
+              <a:lnSpc>
+                <a:spcPct val="95000"/>
+              </a:lnSpc>
+            </a:pPr>
+            <a:r>
+              <a:rPr sz="1200" b="0" i="0">
                 <a:solidFill>
                   <a:srgbClr val="757575"/>
                 </a:solidFill>
                 <a:latin typeface="Arial"/>
               </a:rPr>
-              <a:t>Speedcross gained — substitution capture when Vestal Pro core sizes stocked out.</a:t>
+              <a:t>new</a:t>
             </a:r>
           </a:p>
         </p:txBody>
@@ -13560,8 +13366,8 @@
         </p:nvSpPr>
         <p:spPr>
           <a:xfrm>
-            <a:off x="7086600" y="1481328"/>
-            <a:ext cx="4572000" cy="274320"/>
+            <a:off x="502920" y="5303520"/>
+            <a:ext cx="3383280" cy="548640"/>
           </a:xfrm>
           <a:prstGeom prst="rect">
             <a:avLst/>
@@ -13574,15 +13380,53 @@
           </a:bodyPr>
           <a:lstStyle/>
           <a:p>
-            <a:pPr algn="l"/>
-            <a:r>
-              <a:rPr sz="1000" b="1" i="0">
+            <a:pPr algn="ctr">
+              <a:spcAft>
+                <a:spcPts val="300"/>
+              </a:spcAft>
+            </a:pPr>
+            <a:r>
+              <a:rPr sz="1100" b="1" i="0">
+                <a:solidFill>
+                  <a:srgbClr val="0057B8"/>
+                </a:solidFill>
+                <a:latin typeface="Arial"/>
+              </a:rPr>
+              <a:t>New 590 · </a:t>
+            </a:r>
+            <a:r>
+              <a:rPr sz="1100" b="1" i="0">
                 <a:solidFill>
                   <a:srgbClr val="757575"/>
                 </a:solidFill>
                 <a:latin typeface="Arial"/>
               </a:rPr>
-              <a:t>OVERALL CANNIBALIZATION ESTIMATE</a:t>
+              <a:t>Existing 745</a:t>
+            </a:r>
+          </a:p>
+          <a:p>
+            <a:pPr algn="ctr">
+              <a:spcAft>
+                <a:spcPts val="300"/>
+              </a:spcAft>
+            </a:pPr>
+            <a:r>
+              <a:rPr sz="1050" b="0" i="0">
+                <a:solidFill>
+                  <a:srgbClr val="757575"/>
+                </a:solidFill>
+                <a:latin typeface="Arial"/>
+              </a:rPr>
+              <a:t>Success criterion ≥ 25% · </a:t>
+            </a:r>
+            <a:r>
+              <a:rPr sz="1050" b="1" i="0">
+                <a:solidFill>
+                  <a:srgbClr val="1F7A4D"/>
+                </a:solidFill>
+                <a:latin typeface="Arial"/>
+              </a:rPr>
+              <a:t>PASS</a:t>
             </a:r>
           </a:p>
         </p:txBody>
@@ -13595,8 +13439,8 @@
         </p:nvSpPr>
         <p:spPr>
           <a:xfrm>
-            <a:off x="7086600" y="1828800"/>
-            <a:ext cx="4572000" cy="914400"/>
+            <a:off x="4343400" y="1481328"/>
+            <a:ext cx="3474720" cy="274320"/>
           </a:xfrm>
           <a:prstGeom prst="rect">
             <a:avLst/>
@@ -13609,62 +13453,15 @@
           </a:bodyPr>
           <a:lstStyle/>
           <a:p>
-            <a:pPr algn="l">
-              <a:spcAft>
-                <a:spcPts val="400"/>
-              </a:spcAft>
-            </a:pPr>
-            <a:r>
-              <a:rPr sz="3400" b="1" i="0">
-                <a:solidFill>
-                  <a:srgbClr val="DA291C"/>
-                </a:solidFill>
-                <a:latin typeface="Arial"/>
-              </a:rPr>
-              <a:t>19–32%</a:t>
-            </a:r>
-            <a:r>
-              <a:rPr sz="1300" b="0" i="0">
-                <a:solidFill>
-                  <a:srgbClr val="333333"/>
-                </a:solidFill>
-                <a:latin typeface="Arial"/>
-              </a:rPr>
-              <a:t>   of Vestal Pro units</a:t>
-            </a:r>
-          </a:p>
-          <a:p>
-            <a:pPr algn="l">
-              <a:spcAft>
-                <a:spcPts val="400"/>
-              </a:spcAft>
-            </a:pPr>
-            <a:r>
-              <a:rPr sz="1150" b="0" i="0">
+            <a:pPr algn="l"/>
+            <a:r>
+              <a:rPr sz="1000" b="1" i="0">
                 <a:solidFill>
                   <a:srgbClr val="757575"/>
                 </a:solidFill>
                 <a:latin typeface="Arial"/>
               </a:rPr>
-              <a:t>Goal &lt; 25% · </a:t>
-            </a:r>
-            <a:r>
-              <a:rPr sz="1150" b="1" i="0">
-                <a:solidFill>
-                  <a:srgbClr val="757575"/>
-                </a:solidFill>
-                <a:latin typeface="Arial"/>
-              </a:rPr>
-              <a:t>WATCH</a:t>
-            </a:r>
-            <a:r>
-              <a:rPr sz="1150" b="0" i="0">
-                <a:solidFill>
-                  <a:srgbClr val="757575"/>
-                </a:solidFill>
-                <a:latin typeface="Arial"/>
-              </a:rPr>
-              <a:t> — two of three estimates are above it</a:t>
+              <a:t>ACQUISITION ECONOMICS</a:t>
             </a:r>
           </a:p>
         </p:txBody>
@@ -13677,8 +13474,8 @@
         </p:nvSpPr>
         <p:spPr>
           <a:xfrm>
-            <a:off x="7086600" y="3017520"/>
-            <a:ext cx="4572000" cy="3017520"/>
+            <a:off x="4343400" y="1847088"/>
+            <a:ext cx="3474720" cy="914400"/>
           </a:xfrm>
           <a:prstGeom prst="rect">
             <a:avLst/>
@@ -13693,77 +13490,48 @@
           <a:p>
             <a:pPr algn="l">
               <a:lnSpc>
-                <a:spcPct val="112000"/>
+                <a:spcPct val="100000"/>
               </a:lnSpc>
               <a:spcAft>
-                <a:spcPts val="800"/>
+                <a:spcPts val="200"/>
               </a:spcAft>
             </a:pPr>
             <a:r>
-              <a:rPr sz="1150" b="0" i="0">
+              <a:rPr sz="2100" b="1" i="0">
                 <a:solidFill>
                   <a:srgbClr val="333333"/>
                 </a:solidFill>
                 <a:latin typeface="Arial"/>
               </a:rPr>
-              <a:t>•  The three baseline estimates are 19%, 28%, and 32%, with a median of 28%.</a:t>
+              <a:t>$104   </a:t>
+            </a:r>
+            <a:r>
+              <a:rPr sz="1200" b="1" i="0">
+                <a:solidFill>
+                  <a:srgbClr val="333333"/>
+                </a:solidFill>
+                <a:latin typeface="Arial"/>
+              </a:rPr>
+              <a:t>Blended CAC</a:t>
             </a:r>
           </a:p>
           <a:p>
             <a:pPr algn="l">
               <a:lnSpc>
-                <a:spcPct val="112000"/>
+                <a:spcPct val="100000"/>
               </a:lnSpc>
               <a:spcAft>
-                <a:spcPts val="800"/>
+                <a:spcPts val="200"/>
               </a:spcAft>
             </a:pPr>
             <a:r>
-              <a:rPr sz="1150" b="0" i="0">
-                <a:solidFill>
-                  <a:srgbClr val="333333"/>
-                </a:solidFill>
-                <a:latin typeface="Arial"/>
-              </a:rPr>
-              <a:t>•  $30.5K of existing-shoe revenue was displaced — about 31% of Vestal Pro's $99.8K direct revenue.</a:t>
-            </a:r>
-          </a:p>
-          <a:p>
-            <a:pPr algn="l">
-              <a:lnSpc>
-                <a:spcPct val="112000"/>
-              </a:lnSpc>
-              <a:spcAft>
-                <a:spcPts val="800"/>
-              </a:spcAft>
-            </a:pPr>
-            <a:r>
-              <a:rPr sz="1150" b="0" i="0">
-                <a:solidFill>
-                  <a:srgbClr val="333333"/>
-                </a:solidFill>
-                <a:latin typeface="Arial"/>
-              </a:rPr>
-              <a:t>•  Shift concentrated where positioning overlaps: Ultra Glide (−26%) and Sense Ride (−15%), both high-cushion trail franchises.</a:t>
-            </a:r>
-          </a:p>
-          <a:p>
-            <a:pPr algn="l">
-              <a:lnSpc>
-                <a:spcPct val="112000"/>
-              </a:lnSpc>
-              <a:spcAft>
-                <a:spcPts val="800"/>
-              </a:spcAft>
-            </a:pPr>
-            <a:r>
-              <a:rPr sz="1150" b="0" i="0">
-                <a:solidFill>
-                  <a:srgbClr val="333333"/>
-                </a:solidFill>
-                <a:latin typeface="Arial"/>
-              </a:rPr>
-              <a:t>•  The launch remains net positive: +$69.3K in additional footwear revenue after the shift.</a:t>
+              <a:rPr sz="1050" b="0" i="0">
+                <a:solidFill>
+                  <a:srgbClr val="757575"/>
+                </a:solidFill>
+                <a:latin typeface="Arial"/>
+              </a:rPr>
+              <a:t>$155.8K spend ÷ 1,499 new customers</a:t>
             </a:r>
           </a:p>
         </p:txBody>
@@ -13776,8 +13544,8 @@
         </p:nvSpPr>
         <p:spPr>
           <a:xfrm>
-            <a:off x="502920" y="6510528"/>
-            <a:ext cx="10515600" cy="274320"/>
+            <a:off x="4343400" y="2834640"/>
+            <a:ext cx="3474720" cy="914400"/>
           </a:xfrm>
           <a:prstGeom prst="rect">
             <a:avLst/>
@@ -13790,15 +13558,50 @@
           </a:bodyPr>
           <a:lstStyle/>
           <a:p>
-            <a:pPr algn="l"/>
-            <a:r>
-              <a:rPr sz="800" b="0" i="0">
+            <a:pPr algn="l">
+              <a:lnSpc>
+                <a:spcPct val="100000"/>
+              </a:lnSpc>
+              <a:spcAft>
+                <a:spcPts val="200"/>
+              </a:spcAft>
+            </a:pPr>
+            <a:r>
+              <a:rPr sz="2100" b="1" i="0">
+                <a:solidFill>
+                  <a:srgbClr val="333333"/>
+                </a:solidFill>
+                <a:latin typeface="Arial"/>
+              </a:rPr>
+              <a:t>$130   </a:t>
+            </a:r>
+            <a:r>
+              <a:rPr sz="1200" b="1" i="0">
+                <a:solidFill>
+                  <a:srgbClr val="333333"/>
+                </a:solidFill>
+                <a:latin typeface="Arial"/>
+              </a:rPr>
+              <a:t>First-order value</a:t>
+            </a:r>
+          </a:p>
+          <a:p>
+            <a:pPr algn="l">
+              <a:lnSpc>
+                <a:spcPct val="100000"/>
+              </a:lnSpc>
+              <a:spcAft>
+                <a:spcPts val="200"/>
+              </a:spcAft>
+            </a:pPr>
+            <a:r>
+              <a:rPr sz="1050" b="0" i="0">
                 <a:solidFill>
                   <a:srgbClr val="757575"/>
                 </a:solidFill>
                 <a:latin typeface="Arial"/>
               </a:rPr>
-              <a:t>Salomon NA eCommerce · Vestal Pro launch readout · Illustrative synthetic case data · Unit baselines per franchise; range reflects three baseline specifications</a:t>
+              <a:t>average first basket, new customers</a:t>
             </a:r>
           </a:p>
         </p:txBody>
@@ -13811,8 +13614,8 @@
         </p:nvSpPr>
         <p:spPr>
           <a:xfrm>
-            <a:off x="11292840" y="6510528"/>
-            <a:ext cx="411480" cy="274320"/>
+            <a:off x="4343400" y="3822191"/>
+            <a:ext cx="3474720" cy="914400"/>
           </a:xfrm>
           <a:prstGeom prst="rect">
             <a:avLst/>
@@ -13825,6 +13628,334 @@
           </a:bodyPr>
           <a:lstStyle/>
           <a:p>
+            <a:pPr algn="l">
+              <a:lnSpc>
+                <a:spcPct val="100000"/>
+              </a:lnSpc>
+              <a:spcAft>
+                <a:spcPts val="200"/>
+              </a:spcAft>
+            </a:pPr>
+            <a:r>
+              <a:rPr sz="2100" b="1" i="0">
+                <a:solidFill>
+                  <a:srgbClr val="0057B8"/>
+                </a:solidFill>
+                <a:latin typeface="Arial"/>
+              </a:rPr>
+              <a:t>$212   </a:t>
+            </a:r>
+            <a:r>
+              <a:rPr sz="1200" b="1" i="0">
+                <a:solidFill>
+                  <a:srgbClr val="333333"/>
+                </a:solidFill>
+                <a:latin typeface="Arial"/>
+              </a:rPr>
+              <a:t>Early customer value</a:t>
+            </a:r>
+          </a:p>
+          <a:p>
+            <a:pPr algn="l">
+              <a:lnSpc>
+                <a:spcPct val="100000"/>
+              </a:lnSpc>
+              <a:spcAft>
+                <a:spcPts val="200"/>
+              </a:spcAft>
+            </a:pPr>
+            <a:r>
+              <a:rPr sz="1050" b="0" i="0">
+                <a:solidFill>
+                  <a:srgbClr val="757575"/>
+                </a:solidFill>
+                <a:latin typeface="Arial"/>
+              </a:rPr>
+              <a:t>revenue through May 10 · 2.0× CAC</a:t>
+            </a:r>
+          </a:p>
+        </p:txBody>
+      </p:sp>
+      <p:sp>
+        <p:nvSpPr>
+          <p:cNvPr id="12" name="TextBox 11"/>
+          <p:cNvSpPr txBox="1"/>
+          <p:nvPr/>
+        </p:nvSpPr>
+        <p:spPr>
+          <a:xfrm>
+            <a:off x="4343400" y="4809744"/>
+            <a:ext cx="3474720" cy="914400"/>
+          </a:xfrm>
+          <a:prstGeom prst="rect">
+            <a:avLst/>
+          </a:prstGeom>
+          <a:noFill/>
+        </p:spPr>
+        <p:txBody>
+          <a:bodyPr wrap="square" lIns="0" tIns="0" rIns="0" bIns="0" anchor="t">
+            <a:spAutoFit/>
+          </a:bodyPr>
+          <a:lstStyle/>
+          <a:p>
+            <a:pPr algn="l">
+              <a:lnSpc>
+                <a:spcPct val="100000"/>
+              </a:lnSpc>
+              <a:spcAft>
+                <a:spcPts val="200"/>
+              </a:spcAft>
+            </a:pPr>
+            <a:r>
+              <a:rPr sz="2100" b="1" i="0">
+                <a:solidFill>
+                  <a:srgbClr val="333333"/>
+                </a:solidFill>
+                <a:latin typeface="Arial"/>
+              </a:rPr>
+              <a:t>27%   </a:t>
+            </a:r>
+            <a:r>
+              <a:rPr sz="1200" b="1" i="0">
+                <a:solidFill>
+                  <a:srgbClr val="333333"/>
+                </a:solidFill>
+                <a:latin typeface="Arial"/>
+              </a:rPr>
+              <a:t>Post-period repeat rate</a:t>
+            </a:r>
+          </a:p>
+          <a:p>
+            <a:pPr algn="l">
+              <a:lnSpc>
+                <a:spcPct val="100000"/>
+              </a:lnSpc>
+              <a:spcAft>
+                <a:spcPts val="200"/>
+              </a:spcAft>
+            </a:pPr>
+            <a:r>
+              <a:rPr sz="1050" b="0" i="0">
+                <a:solidFill>
+                  <a:srgbClr val="757575"/>
+                </a:solidFill>
+                <a:latin typeface="Arial"/>
+              </a:rPr>
+              <a:t>repurchased within 4 weeks of flight end</a:t>
+            </a:r>
+          </a:p>
+        </p:txBody>
+      </p:sp>
+      <p:sp>
+        <p:nvSpPr>
+          <p:cNvPr id="13" name="TextBox 12"/>
+          <p:cNvSpPr txBox="1"/>
+          <p:nvPr/>
+        </p:nvSpPr>
+        <p:spPr>
+          <a:xfrm>
+            <a:off x="4343400" y="5760720"/>
+            <a:ext cx="3474720" cy="457200"/>
+          </a:xfrm>
+          <a:prstGeom prst="rect">
+            <a:avLst/>
+          </a:prstGeom>
+          <a:noFill/>
+        </p:spPr>
+        <p:txBody>
+          <a:bodyPr wrap="square" lIns="0" tIns="0" rIns="0" bIns="0" anchor="t">
+            <a:spAutoFit/>
+          </a:bodyPr>
+          <a:lstStyle/>
+          <a:p>
+            <a:pPr algn="l">
+              <a:lnSpc>
+                <a:spcPct val="105000"/>
+              </a:lnSpc>
+            </a:pPr>
+            <a:r>
+              <a:rPr sz="1000" b="0" i="1">
+                <a:solidFill>
+                  <a:srgbClr val="757575"/>
+                </a:solidFill>
+                <a:latin typeface="Arial"/>
+              </a:rPr>
+              <a:t>Full LTV needs cohort history beyond this window; early value already covers CAC twice over.</a:t>
+            </a:r>
+          </a:p>
+        </p:txBody>
+      </p:sp>
+      <p:sp>
+        <p:nvSpPr>
+          <p:cNvPr id="14" name="TextBox 13"/>
+          <p:cNvSpPr txBox="1"/>
+          <p:nvPr/>
+        </p:nvSpPr>
+        <p:spPr>
+          <a:xfrm>
+            <a:off x="8183879" y="1481328"/>
+            <a:ext cx="3520440" cy="274320"/>
+          </a:xfrm>
+          <a:prstGeom prst="rect">
+            <a:avLst/>
+          </a:prstGeom>
+          <a:noFill/>
+        </p:spPr>
+        <p:txBody>
+          <a:bodyPr wrap="square" lIns="0" tIns="0" rIns="0" bIns="0" anchor="t">
+            <a:spAutoFit/>
+          </a:bodyPr>
+          <a:lstStyle/>
+          <a:p>
+            <a:pPr algn="l"/>
+            <a:r>
+              <a:rPr sz="1000" b="1" i="0">
+                <a:solidFill>
+                  <a:srgbClr val="757575"/>
+                </a:solidFill>
+                <a:latin typeface="Arial"/>
+              </a:rPr>
+              <a:t>DATABASE ADDS PER DAY</a:t>
+            </a:r>
+          </a:p>
+        </p:txBody>
+      </p:sp>
+      <p:graphicFrame>
+        <p:nvGraphicFramePr>
+          <p:cNvPr id="15" name="Chart 14"/>
+          <p:cNvGraphicFramePr>
+            <a:graphicFrameLocks noGrp="1"/>
+          </p:cNvGraphicFramePr>
+          <p:nvPr/>
+        </p:nvGraphicFramePr>
+        <p:xfrm>
+          <a:off x="8046719" y="1828800"/>
+          <a:ext cx="3657600" cy="3108960"/>
+        </p:xfrm>
+        <a:graphic>
+          <a:graphicData uri="http://schemas.openxmlformats.org/drawingml/2006/chart">
+            <c:chart xmlns:c="http://schemas.openxmlformats.org/drawingml/2006/chart" xmlns:r="http://schemas.openxmlformats.org/officeDocument/2006/relationships" r:id="rId3"/>
+          </a:graphicData>
+        </a:graphic>
+      </p:graphicFrame>
+      <p:sp>
+        <p:nvSpPr>
+          <p:cNvPr id="16" name="TextBox 15"/>
+          <p:cNvSpPr txBox="1"/>
+          <p:nvPr/>
+        </p:nvSpPr>
+        <p:spPr>
+          <a:xfrm>
+            <a:off x="8183879" y="5074920"/>
+            <a:ext cx="3520440" cy="1188720"/>
+          </a:xfrm>
+          <a:prstGeom prst="rect">
+            <a:avLst/>
+          </a:prstGeom>
+          <a:noFill/>
+        </p:spPr>
+        <p:txBody>
+          <a:bodyPr wrap="square" lIns="0" tIns="0" rIns="0" bIns="0" anchor="t">
+            <a:spAutoFit/>
+          </a:bodyPr>
+          <a:lstStyle/>
+          <a:p>
+            <a:pPr algn="l">
+              <a:lnSpc>
+                <a:spcPct val="108000"/>
+              </a:lnSpc>
+              <a:spcAft>
+                <a:spcPts val="500"/>
+              </a:spcAft>
+            </a:pPr>
+            <a:r>
+              <a:rPr sz="1050" b="0" i="0">
+                <a:solidFill>
+                  <a:srgbClr val="333333"/>
+                </a:solidFill>
+                <a:latin typeface="Arial"/>
+              </a:rPr>
+              <a:t>Email +34% · SMS +40% vs pre-period run-rate → 2,776 email and 1,447 SMS adds in six weeks.</a:t>
+            </a:r>
+          </a:p>
+          <a:p>
+            <a:pPr algn="l">
+              <a:lnSpc>
+                <a:spcPct val="108000"/>
+              </a:lnSpc>
+              <a:spcAft>
+                <a:spcPts val="500"/>
+              </a:spcAft>
+            </a:pPr>
+            <a:r>
+              <a:rPr sz="1050" b="0" i="0">
+                <a:solidFill>
+                  <a:srgbClr val="333333"/>
+                </a:solidFill>
+                <a:latin typeface="Arial"/>
+              </a:rPr>
+              <a:t>New Vestal Pro buyers opt in at 77% email / 47% SMS vs a 56% / 28% site average.</a:t>
+            </a:r>
+          </a:p>
+        </p:txBody>
+      </p:sp>
+      <p:sp>
+        <p:nvSpPr>
+          <p:cNvPr id="17" name="TextBox 16"/>
+          <p:cNvSpPr txBox="1"/>
+          <p:nvPr/>
+        </p:nvSpPr>
+        <p:spPr>
+          <a:xfrm>
+            <a:off x="502920" y="6510528"/>
+            <a:ext cx="10515600" cy="274320"/>
+          </a:xfrm>
+          <a:prstGeom prst="rect">
+            <a:avLst/>
+          </a:prstGeom>
+          <a:noFill/>
+        </p:spPr>
+        <p:txBody>
+          <a:bodyPr wrap="square" lIns="0" tIns="0" rIns="0" bIns="0" anchor="t">
+            <a:spAutoFit/>
+          </a:bodyPr>
+          <a:lstStyle/>
+          <a:p>
+            <a:pPr algn="l"/>
+            <a:r>
+              <a:rPr sz="800" b="0" i="0">
+                <a:solidFill>
+                  <a:srgbClr val="757575"/>
+                </a:solidFill>
+                <a:latin typeface="Arial"/>
+              </a:rPr>
+              <a:t>Salomon NA eCommerce · Vestal Pro launch readout · Illustrative synthetic case data · No numeric CAC or database targets were set pre-launch — set them next flight</a:t>
+            </a:r>
+          </a:p>
+        </p:txBody>
+      </p:sp>
+      <p:sp>
+        <p:nvSpPr>
+          <p:cNvPr id="18" name="TextBox 17"/>
+          <p:cNvSpPr txBox="1"/>
+          <p:nvPr/>
+        </p:nvSpPr>
+        <p:spPr>
+          <a:xfrm>
+            <a:off x="11292840" y="6510528"/>
+            <a:ext cx="411480" cy="274320"/>
+          </a:xfrm>
+          <a:prstGeom prst="rect">
+            <a:avLst/>
+          </a:prstGeom>
+          <a:noFill/>
+        </p:spPr>
+        <p:txBody>
+          <a:bodyPr wrap="square" lIns="0" tIns="0" rIns="0" bIns="0" anchor="t">
+            <a:spAutoFit/>
+          </a:bodyPr>
+          <a:lstStyle/>
+          <a:p>
             <a:pPr algn="r"/>
             <a:r>
               <a:rPr sz="800" b="0" i="0">
@@ -13833,21 +13964,21 @@
                 </a:solidFill>
                 <a:latin typeface="Arial"/>
               </a:rPr>
-              <a:t>8</a:t>
+              <a:t>7</a:t>
             </a:r>
           </a:p>
         </p:txBody>
       </p:sp>
       <p:pic>
         <p:nvPicPr>
-          <p:cNvPr id="12" name="Picture 11" descr="salomon_wordmark_black.png"/>
+          <p:cNvPr id="19" name="Picture 18" descr="salomon_wordmark_black.png"/>
           <p:cNvPicPr>
             <a:picLocks noChangeAspect="1"/>
           </p:cNvPicPr>
           <p:nvPr/>
         </p:nvPicPr>
         <p:blipFill>
-          <a:blip r:embed="rId3"/>
+          <a:blip r:embed="rId4"/>
           <a:stretch>
             <a:fillRect/>
           </a:stretch>

--- a/deliverables/VestalPro_Campaign_Readout.pptx
+++ b/deliverables/VestalPro_Campaign_Readout.pptx
@@ -12,13 +12,15 @@
     <p:sldId id="270" r:id="rId6"/>
     <p:sldId id="263" r:id="rId7"/>
     <p:sldId id="262" r:id="rId8"/>
-    <p:sldId id="264" r:id="rId9"/>
-    <p:sldId id="265" r:id="rId10"/>
-    <p:sldId id="266" r:id="rId11"/>
-    <p:sldId id="267" r:id="rId12"/>
-    <p:sldId id="268" r:id="rId13"/>
-    <p:sldId id="269" r:id="rId14"/>
-    <p:sldId id="259" r:id="rId15"/>
+    <p:sldId id="273" r:id="rId9"/>
+    <p:sldId id="264" r:id="rId10"/>
+    <p:sldId id="265" r:id="rId11"/>
+    <p:sldId id="266" r:id="rId12"/>
+    <p:sldId id="267" r:id="rId13"/>
+    <p:sldId id="268" r:id="rId14"/>
+    <p:sldId id="272" r:id="rId15"/>
+    <p:sldId id="269" r:id="rId16"/>
+    <p:sldId id="259" r:id="rId17"/>
   </p:sldIdLst>
   <p:sldSz cx="12192000" cy="6858000"/>
   <p:notesSz cx="6858000" cy="9144000"/>
@@ -143,469 +145,6 @@
 </file>
 
 <file path=ppt/charts/chart1.xml><?xml version="1.0" encoding="utf-8"?>
-<c:chartSpace xmlns:c="http://schemas.openxmlformats.org/drawingml/2006/chart" xmlns:a="http://schemas.openxmlformats.org/drawingml/2006/main" xmlns:r="http://schemas.openxmlformats.org/officeDocument/2006/relationships" xmlns:c16r2="http://schemas.microsoft.com/office/drawing/2015/06/chart">
-  <c:date1904 val="0"/>
-  <c:lang val="en-US"/>
-  <c:roundedCorners val="0"/>
-  <c:style val="2"/>
-  <c:chart>
-    <c:autoTitleDeleted val="1"/>
-    <c:plotArea>
-      <c:layout/>
-      <c:doughnutChart>
-        <c:varyColors val="1"/>
-        <c:ser>
-          <c:idx val="0"/>
-          <c:order val="0"/>
-          <c:tx>
-            <c:strRef>
-              <c:f>Sheet1!$B$1</c:f>
-              <c:strCache>
-                <c:ptCount val="1"/>
-                <c:pt idx="0">
-                  <c:v>Buyers</c:v>
-                </c:pt>
-              </c:strCache>
-            </c:strRef>
-          </c:tx>
-          <c:dPt>
-            <c:idx val="0"/>
-            <c:bubble3D val="0"/>
-            <c:spPr>
-              <a:solidFill>
-                <a:srgbClr val="0057B8"/>
-              </a:solidFill>
-              <a:ln w="25400">
-                <a:solidFill>
-                  <a:srgbClr val="FFFFFF"/>
-                </a:solidFill>
-              </a:ln>
-            </c:spPr>
-            <c:extLst>
-              <c:ext xmlns:c16="http://schemas.microsoft.com/office/drawing/2014/chart" uri="{C3380CC4-5D6E-409C-BE32-E72D297353CC}">
-                <c16:uniqueId val="{00000001-A1A6-4492-8A77-9F8FCAD9DDED}"/>
-              </c:ext>
-            </c:extLst>
-          </c:dPt>
-          <c:dPt>
-            <c:idx val="1"/>
-            <c:bubble3D val="0"/>
-            <c:spPr>
-              <a:solidFill>
-                <a:srgbClr val="D9D9D9"/>
-              </a:solidFill>
-              <a:ln w="25400">
-                <a:solidFill>
-                  <a:srgbClr val="FFFFFF"/>
-                </a:solidFill>
-              </a:ln>
-            </c:spPr>
-            <c:extLst>
-              <c:ext xmlns:c16="http://schemas.microsoft.com/office/drawing/2014/chart" uri="{C3380CC4-5D6E-409C-BE32-E72D297353CC}">
-                <c16:uniqueId val="{00000003-A1A6-4492-8A77-9F8FCAD9DDED}"/>
-              </c:ext>
-            </c:extLst>
-          </c:dPt>
-          <c:cat>
-            <c:strRef>
-              <c:f>Sheet1!$A$2:$A$3</c:f>
-              <c:strCache>
-                <c:ptCount val="2"/>
-                <c:pt idx="0">
-                  <c:v>New to Salomon</c:v>
-                </c:pt>
-                <c:pt idx="1">
-                  <c:v>Existing customers</c:v>
-                </c:pt>
-              </c:strCache>
-            </c:strRef>
-          </c:cat>
-          <c:val>
-            <c:numRef>
-              <c:f>Sheet1!$B$2:$B$3</c:f>
-              <c:numCache>
-                <c:formatCode>General</c:formatCode>
-                <c:ptCount val="2"/>
-                <c:pt idx="0">
-                  <c:v>590</c:v>
-                </c:pt>
-                <c:pt idx="1">
-                  <c:v>745</c:v>
-                </c:pt>
-              </c:numCache>
-            </c:numRef>
-          </c:val>
-          <c:extLst>
-            <c:ext xmlns:c16="http://schemas.microsoft.com/office/drawing/2014/chart" uri="{C3380CC4-5D6E-409C-BE32-E72D297353CC}">
-              <c16:uniqueId val="{00000004-A1A6-4492-8A77-9F8FCAD9DDED}"/>
-            </c:ext>
-          </c:extLst>
-        </c:ser>
-        <c:dLbls>
-          <c:showLegendKey val="0"/>
-          <c:showVal val="0"/>
-          <c:showCatName val="0"/>
-          <c:showSerName val="0"/>
-          <c:showPercent val="0"/>
-          <c:showBubbleSize val="0"/>
-          <c:showLeaderLines val="1"/>
-        </c:dLbls>
-        <c:firstSliceAng val="0"/>
-        <c:holeSize val="50"/>
-      </c:doughnutChart>
-    </c:plotArea>
-    <c:plotVisOnly val="1"/>
-    <c:dispBlanksAs val="gap"/>
-    <c:showDLblsOverMax val="0"/>
-  </c:chart>
-  <c:txPr>
-    <a:bodyPr/>
-    <a:lstStyle/>
-    <a:p>
-      <a:pPr>
-        <a:defRPr sz="1800"/>
-      </a:pPr>
-      <a:endParaRPr lang="en-US"/>
-    </a:p>
-  </c:txPr>
-  <c:externalData r:id="rId1">
-    <c:autoUpdate val="0"/>
-  </c:externalData>
-</c:chartSpace>
-</file>
-
-<file path=ppt/charts/chart2.xml><?xml version="1.0" encoding="utf-8"?>
-<c:chartSpace xmlns:c="http://schemas.openxmlformats.org/drawingml/2006/chart" xmlns:a="http://schemas.openxmlformats.org/drawingml/2006/main" xmlns:r="http://schemas.openxmlformats.org/officeDocument/2006/relationships" xmlns:c16r2="http://schemas.microsoft.com/office/drawing/2015/06/chart">
-  <c:date1904 val="0"/>
-  <c:lang val="en-US"/>
-  <c:roundedCorners val="1"/>
-  <c:style val="2"/>
-  <c:chart>
-    <c:autoTitleDeleted val="1"/>
-    <c:plotArea>
-      <c:layout/>
-      <c:barChart>
-        <c:barDir val="col"/>
-        <c:grouping val="clustered"/>
-        <c:varyColors val="1"/>
-        <c:ser>
-          <c:idx val="0"/>
-          <c:order val="0"/>
-          <c:tx>
-            <c:strRef>
-              <c:f>Sheet1!$B$1</c:f>
-              <c:strCache>
-                <c:ptCount val="1"/>
-                <c:pt idx="0">
-                  <c:v>Pre-period</c:v>
-                </c:pt>
-              </c:strCache>
-            </c:strRef>
-          </c:tx>
-          <c:spPr>
-            <a:solidFill>
-              <a:srgbClr val="D9D9D9"/>
-            </a:solidFill>
-          </c:spPr>
-          <c:invertIfNegative val="1"/>
-          <c:dLbls>
-            <c:numFmt formatCode="0.0" sourceLinked="0"/>
-            <c:spPr>
-              <a:noFill/>
-              <a:ln>
-                <a:noFill/>
-              </a:ln>
-              <a:effectLst/>
-            </c:spPr>
-            <c:txPr>
-              <a:bodyPr/>
-              <a:lstStyle/>
-              <a:p>
-                <a:pPr>
-                  <a:defRPr sz="1000">
-                    <a:solidFill>
-                      <a:srgbClr val="333333"/>
-                    </a:solidFill>
-                    <a:latin typeface="Arial"/>
-                  </a:defRPr>
-                </a:pPr>
-                <a:endParaRPr lang="en-US"/>
-              </a:p>
-            </c:txPr>
-            <c:dLblPos val="outEnd"/>
-            <c:showLegendKey val="0"/>
-            <c:showVal val="1"/>
-            <c:showCatName val="0"/>
-            <c:showSerName val="0"/>
-            <c:showPercent val="0"/>
-            <c:showBubbleSize val="0"/>
-            <c:showLeaderLines val="0"/>
-            <c:extLst>
-              <c:ext xmlns:c15="http://schemas.microsoft.com/office/drawing/2012/chart" uri="{CE6537A1-D6FC-4f65-9D91-7224C49458BB}">
-                <c15:showLeaderLines val="0"/>
-              </c:ext>
-            </c:extLst>
-          </c:dLbls>
-          <c:cat>
-            <c:strRef>
-              <c:f>Sheet1!$A$2:$A$3</c:f>
-              <c:strCache>
-                <c:ptCount val="2"/>
-                <c:pt idx="0">
-                  <c:v>Email</c:v>
-                </c:pt>
-                <c:pt idx="1">
-                  <c:v>SMS</c:v>
-                </c:pt>
-              </c:strCache>
-            </c:strRef>
-          </c:cat>
-          <c:val>
-            <c:numRef>
-              <c:f>Sheet1!$B$2:$B$3</c:f>
-              <c:numCache>
-                <c:formatCode>General</c:formatCode>
-                <c:ptCount val="2"/>
-                <c:pt idx="0">
-                  <c:v>49.25</c:v>
-                </c:pt>
-                <c:pt idx="1">
-                  <c:v>24.571428571428573</c:v>
-                </c:pt>
-              </c:numCache>
-            </c:numRef>
-          </c:val>
-          <c:extLst>
-            <c:ext xmlns:c14="http://schemas.microsoft.com/office/drawing/2007/8/2/chart" uri="{6F2FDCE9-48DA-4B69-8628-5D25D57E5C99}">
-              <c14:invertSolidFillFmt>
-                <c14:spPr xmlns:c14="http://schemas.microsoft.com/office/drawing/2007/8/2/chart">
-                  <a:solidFill>
-                    <a:srgbClr val="FFFFFF"/>
-                  </a:solidFill>
-                </c14:spPr>
-              </c14:invertSolidFillFmt>
-            </c:ext>
-            <c:ext xmlns:c16="http://schemas.microsoft.com/office/drawing/2014/chart" uri="{C3380CC4-5D6E-409C-BE32-E72D297353CC}">
-              <c16:uniqueId val="{00000000-F789-42CA-81C2-54DC5FF3B502}"/>
-            </c:ext>
-          </c:extLst>
-        </c:ser>
-        <c:ser>
-          <c:idx val="1"/>
-          <c:order val="1"/>
-          <c:tx>
-            <c:strRef>
-              <c:f>Sheet1!$C$1</c:f>
-              <c:strCache>
-                <c:ptCount val="1"/>
-                <c:pt idx="0">
-                  <c:v>Active campaign</c:v>
-                </c:pt>
-              </c:strCache>
-            </c:strRef>
-          </c:tx>
-          <c:spPr>
-            <a:solidFill>
-              <a:srgbClr val="0057B8"/>
-            </a:solidFill>
-          </c:spPr>
-          <c:invertIfNegative val="1"/>
-          <c:dLbls>
-            <c:numFmt formatCode="0.0" sourceLinked="0"/>
-            <c:spPr>
-              <a:noFill/>
-              <a:ln>
-                <a:noFill/>
-              </a:ln>
-              <a:effectLst/>
-            </c:spPr>
-            <c:txPr>
-              <a:bodyPr/>
-              <a:lstStyle/>
-              <a:p>
-                <a:pPr>
-                  <a:defRPr sz="1000">
-                    <a:solidFill>
-                      <a:srgbClr val="333333"/>
-                    </a:solidFill>
-                    <a:latin typeface="Arial"/>
-                  </a:defRPr>
-                </a:pPr>
-                <a:endParaRPr lang="en-US"/>
-              </a:p>
-            </c:txPr>
-            <c:dLblPos val="outEnd"/>
-            <c:showLegendKey val="0"/>
-            <c:showVal val="1"/>
-            <c:showCatName val="0"/>
-            <c:showSerName val="0"/>
-            <c:showPercent val="0"/>
-            <c:showBubbleSize val="0"/>
-            <c:showLeaderLines val="0"/>
-            <c:extLst>
-              <c:ext xmlns:c15="http://schemas.microsoft.com/office/drawing/2012/chart" uri="{CE6537A1-D6FC-4f65-9D91-7224C49458BB}">
-                <c15:showLeaderLines val="0"/>
-              </c:ext>
-            </c:extLst>
-          </c:dLbls>
-          <c:cat>
-            <c:strRef>
-              <c:f>Sheet1!$A$2:$A$3</c:f>
-              <c:strCache>
-                <c:ptCount val="2"/>
-                <c:pt idx="0">
-                  <c:v>Email</c:v>
-                </c:pt>
-                <c:pt idx="1">
-                  <c:v>SMS</c:v>
-                </c:pt>
-              </c:strCache>
-            </c:strRef>
-          </c:cat>
-          <c:val>
-            <c:numRef>
-              <c:f>Sheet1!$C$2:$C$3</c:f>
-              <c:numCache>
-                <c:formatCode>General</c:formatCode>
-                <c:ptCount val="2"/>
-                <c:pt idx="0">
-                  <c:v>66.095238095238102</c:v>
-                </c:pt>
-                <c:pt idx="1">
-                  <c:v>34.452380952380949</c:v>
-                </c:pt>
-              </c:numCache>
-            </c:numRef>
-          </c:val>
-          <c:extLst>
-            <c:ext xmlns:c14="http://schemas.microsoft.com/office/drawing/2007/8/2/chart" uri="{6F2FDCE9-48DA-4B69-8628-5D25D57E5C99}">
-              <c14:invertSolidFillFmt>
-                <c14:spPr xmlns:c14="http://schemas.microsoft.com/office/drawing/2007/8/2/chart">
-                  <a:solidFill>
-                    <a:srgbClr val="FFFFFF"/>
-                  </a:solidFill>
-                </c14:spPr>
-              </c14:invertSolidFillFmt>
-            </c:ext>
-            <c:ext xmlns:c16="http://schemas.microsoft.com/office/drawing/2014/chart" uri="{C3380CC4-5D6E-409C-BE32-E72D297353CC}">
-              <c16:uniqueId val="{00000001-F789-42CA-81C2-54DC5FF3B502}"/>
-            </c:ext>
-          </c:extLst>
-        </c:ser>
-        <c:dLbls>
-          <c:dLblPos val="outEnd"/>
-          <c:showLegendKey val="0"/>
-          <c:showVal val="1"/>
-          <c:showCatName val="0"/>
-          <c:showSerName val="0"/>
-          <c:showPercent val="0"/>
-          <c:showBubbleSize val="0"/>
-        </c:dLbls>
-        <c:gapWidth val="110"/>
-        <c:overlap val="-20"/>
-        <c:axId val="-2068027336"/>
-        <c:axId val="-2113994440"/>
-      </c:barChart>
-      <c:catAx>
-        <c:axId val="-2068027336"/>
-        <c:scaling>
-          <c:orientation val="minMax"/>
-        </c:scaling>
-        <c:delete val="0"/>
-        <c:axPos val="b"/>
-        <c:numFmt formatCode="General" sourceLinked="0"/>
-        <c:majorTickMark val="out"/>
-        <c:minorTickMark val="none"/>
-        <c:tickLblPos val="nextTo"/>
-        <c:spPr>
-          <a:ln>
-            <a:solidFill>
-              <a:srgbClr val="D9D9D9"/>
-            </a:solidFill>
-          </a:ln>
-        </c:spPr>
-        <c:txPr>
-          <a:bodyPr/>
-          <a:lstStyle/>
-          <a:p>
-            <a:pPr>
-              <a:defRPr sz="1000">
-                <a:solidFill>
-                  <a:srgbClr val="757575"/>
-                </a:solidFill>
-                <a:latin typeface="Arial"/>
-              </a:defRPr>
-            </a:pPr>
-            <a:endParaRPr lang="en-US"/>
-          </a:p>
-        </c:txPr>
-        <c:crossAx val="-2113994440"/>
-        <c:crosses val="autoZero"/>
-        <c:auto val="1"/>
-        <c:lblAlgn val="ctr"/>
-        <c:lblOffset val="100"/>
-        <c:noMultiLvlLbl val="0"/>
-      </c:catAx>
-      <c:valAx>
-        <c:axId val="-2113994440"/>
-        <c:scaling>
-          <c:orientation val="minMax"/>
-        </c:scaling>
-        <c:delete val="0"/>
-        <c:axPos val="l"/>
-        <c:numFmt formatCode=";;;" sourceLinked="0"/>
-        <c:majorTickMark val="out"/>
-        <c:minorTickMark val="none"/>
-        <c:tickLblPos val="nextTo"/>
-        <c:spPr>
-          <a:ln>
-            <a:noFill/>
-          </a:ln>
-        </c:spPr>
-        <c:crossAx val="-2068027336"/>
-        <c:crosses val="autoZero"/>
-        <c:crossBetween val="between"/>
-      </c:valAx>
-    </c:plotArea>
-    <c:legend>
-      <c:legendPos val="b"/>
-      <c:overlay val="0"/>
-      <c:txPr>
-        <a:bodyPr/>
-        <a:lstStyle/>
-        <a:p>
-          <a:pPr>
-            <a:defRPr sz="950">
-              <a:solidFill>
-                <a:srgbClr val="333333"/>
-              </a:solidFill>
-            </a:defRPr>
-          </a:pPr>
-          <a:endParaRPr lang="en-US"/>
-        </a:p>
-      </c:txPr>
-    </c:legend>
-    <c:plotVisOnly val="1"/>
-    <c:dispBlanksAs val="gap"/>
-    <c:showDLblsOverMax val="1"/>
-  </c:chart>
-  <c:txPr>
-    <a:bodyPr/>
-    <a:lstStyle/>
-    <a:p>
-      <a:pPr>
-        <a:defRPr sz="1800"/>
-      </a:pPr>
-      <a:endParaRPr lang="en-US"/>
-    </a:p>
-  </c:txPr>
-  <c:externalData r:id="rId1">
-    <c:autoUpdate val="0"/>
-  </c:externalData>
-</c:chartSpace>
-</file>
-
-<file path=ppt/charts/chart3.xml><?xml version="1.0" encoding="utf-8"?>
 <c:chartSpace xmlns:c="http://schemas.openxmlformats.org/drawingml/2006/chart" xmlns:a="http://schemas.openxmlformats.org/drawingml/2006/main" xmlns:r="http://schemas.openxmlformats.org/officeDocument/2006/relationships" xmlns:c16r2="http://schemas.microsoft.com/office/drawing/2015/06/chart">
   <c:date1904 val="0"/>
   <c:lang val="en-US"/>
@@ -852,7 +391,7 @@
 </c:chartSpace>
 </file>
 
-<file path=ppt/charts/chart4.xml><?xml version="1.0" encoding="utf-8"?>
+<file path=ppt/charts/chart2.xml><?xml version="1.0" encoding="utf-8"?>
 <c:chartSpace xmlns:c="http://schemas.openxmlformats.org/drawingml/2006/chart" xmlns:a="http://schemas.openxmlformats.org/drawingml/2006/main" xmlns:r="http://schemas.openxmlformats.org/officeDocument/2006/relationships" xmlns:c16r2="http://schemas.microsoft.com/office/drawing/2015/06/chart">
   <c:date1904 val="0"/>
   <c:lang val="en-US"/>
@@ -1141,7 +680,7 @@
 </c:chartSpace>
 </file>
 
-<file path=ppt/charts/chart5.xml><?xml version="1.0" encoding="utf-8"?>
+<file path=ppt/charts/chart3.xml><?xml version="1.0" encoding="utf-8"?>
 <c:chartSpace xmlns:c="http://schemas.openxmlformats.org/drawingml/2006/chart" xmlns:a="http://schemas.openxmlformats.org/drawingml/2006/main" xmlns:r="http://schemas.openxmlformats.org/officeDocument/2006/relationships" xmlns:c16r2="http://schemas.microsoft.com/office/drawing/2015/06/chart">
   <c:date1904 val="0"/>
   <c:lang val="en-US"/>
@@ -1511,6 +1050,27 @@
         <a:r>
           <a:rPr lang="en-US"/>
           <a:t>Mention brand awareness on this slide?? </a:t>
+        </a:r>
+      </a:p>
+    </p188:txBody>
+  </p188:cm>
+</p188:cmLst>
+</file>
+
+<file path=ppt/comments/modernComment_111_F9A21C54.xml><?xml version="1.0" encoding="utf-8"?>
+<p188:cmLst xmlns:a="http://schemas.openxmlformats.org/drawingml/2006/main" xmlns:r="http://schemas.openxmlformats.org/officeDocument/2006/relationships" xmlns:p188="http://schemas.microsoft.com/office/powerpoint/2018/8/main">
+  <p188:cm id="{B01D2F72-3A38-41AD-A3F8-C7F5E69541D1}" authorId="{F7CB7528-0317-1151-A7B7-34D5B6A94F6F}" created="2026-07-17T19:32:02.408">
+    <pc:sldMkLst xmlns:pc="http://schemas.microsoft.com/office/powerpoint/2013/main/command">
+      <pc:docMk/>
+      <pc:sldMk cId="4188150868" sldId="273"/>
+    </pc:sldMkLst>
+    <p188:txBody>
+      <a:bodyPr/>
+      <a:lstStyle/>
+      <a:p>
+        <a:r>
+          <a:rPr lang="en-US"/>
+          <a:t>SLIDE NEEDS WORK</a:t>
         </a:r>
       </a:p>
     </p188:txBody>
@@ -4872,6 +4432,383 @@
 </file>
 
 <file path=ppt/slides/slide10.xml><?xml version="1.0" encoding="utf-8"?>
+<p:sld xmlns:a="http://schemas.openxmlformats.org/drawingml/2006/main" xmlns:r="http://schemas.openxmlformats.org/officeDocument/2006/relationships" xmlns:p="http://schemas.openxmlformats.org/presentationml/2006/main">
+  <p:cSld>
+    <p:spTree>
+      <p:nvGrpSpPr>
+        <p:cNvPr id="1" name=""/>
+        <p:cNvGrpSpPr/>
+        <p:nvPr/>
+      </p:nvGrpSpPr>
+      <p:grpSpPr>
+        <a:xfrm>
+          <a:off x="0" y="0"/>
+          <a:ext cx="0" cy="0"/>
+          <a:chOff x="0" y="0"/>
+          <a:chExt cx="0" cy="0"/>
+        </a:xfrm>
+      </p:grpSpPr>
+      <p:sp>
+        <p:nvSpPr>
+          <p:cNvPr id="2" name="TextBox 1"/>
+          <p:cNvSpPr txBox="1"/>
+          <p:nvPr/>
+        </p:nvSpPr>
+        <p:spPr>
+          <a:xfrm>
+            <a:off x="502920" y="292608"/>
+            <a:ext cx="11155680" cy="274320"/>
+          </a:xfrm>
+          <a:prstGeom prst="rect">
+            <a:avLst/>
+          </a:prstGeom>
+          <a:noFill/>
+        </p:spPr>
+        <p:txBody>
+          <a:bodyPr wrap="square" lIns="0" tIns="0" rIns="0" bIns="0" anchor="t">
+            <a:spAutoFit/>
+          </a:bodyPr>
+          <a:lstStyle/>
+          <a:p>
+            <a:pPr algn="l"/>
+            <a:r>
+              <a:rPr sz="1050" b="1" i="0">
+                <a:solidFill>
+                  <a:srgbClr val="757575"/>
+                </a:solidFill>
+                <a:latin typeface="Arial"/>
+              </a:rPr>
+              <a:t>CHANNEL PERFORMANCE</a:t>
+            </a:r>
+          </a:p>
+        </p:txBody>
+      </p:sp>
+      <p:sp>
+        <p:nvSpPr>
+          <p:cNvPr id="3" name="TextBox 2"/>
+          <p:cNvSpPr txBox="1"/>
+          <p:nvPr/>
+        </p:nvSpPr>
+        <p:spPr>
+          <a:xfrm>
+            <a:off x="502920" y="566928"/>
+            <a:ext cx="11201400" cy="777240"/>
+          </a:xfrm>
+          <a:prstGeom prst="rect">
+            <a:avLst/>
+          </a:prstGeom>
+          <a:noFill/>
+        </p:spPr>
+        <p:txBody>
+          <a:bodyPr wrap="square" lIns="0" tIns="0" rIns="0" bIns="0" anchor="t">
+            <a:spAutoFit/>
+          </a:bodyPr>
+          <a:lstStyle/>
+          <a:p>
+            <a:pPr algn="l"/>
+            <a:r>
+              <a:rPr sz="2300" b="0" i="0">
+                <a:solidFill>
+                  <a:srgbClr val="000000"/>
+                </a:solidFill>
+                <a:latin typeface="Georgia"/>
+              </a:rPr>
+              <a:t>CRM and affiliate cleared breakeven on incremental ROAS; paid media did not</a:t>
+            </a:r>
+          </a:p>
+        </p:txBody>
+      </p:sp>
+      <p:sp>
+        <p:nvSpPr>
+          <p:cNvPr id="4" name="TextBox 3"/>
+          <p:cNvSpPr txBox="1"/>
+          <p:nvPr/>
+        </p:nvSpPr>
+        <p:spPr>
+          <a:xfrm>
+            <a:off x="502920" y="1481328"/>
+            <a:ext cx="6035040" cy="274320"/>
+          </a:xfrm>
+          <a:prstGeom prst="rect">
+            <a:avLst/>
+          </a:prstGeom>
+          <a:noFill/>
+        </p:spPr>
+        <p:txBody>
+          <a:bodyPr wrap="square" lIns="0" tIns="0" rIns="0" bIns="0" anchor="t">
+            <a:spAutoFit/>
+          </a:bodyPr>
+          <a:lstStyle/>
+          <a:p>
+            <a:pPr algn="l"/>
+            <a:r>
+              <a:rPr sz="1000" b="1" i="0">
+                <a:solidFill>
+                  <a:srgbClr val="757575"/>
+                </a:solidFill>
+                <a:latin typeface="Arial"/>
+              </a:rPr>
+              <a:t>INCREMENTAL ROAS BY CHANNEL (BREAKEVEN = 1.0×)</a:t>
+            </a:r>
+          </a:p>
+        </p:txBody>
+      </p:sp>
+      <p:graphicFrame>
+        <p:nvGraphicFramePr>
+          <p:cNvPr id="5" name="Chart 4"/>
+          <p:cNvGraphicFramePr>
+            <a:graphicFrameLocks noGrp="1"/>
+          </p:cNvGraphicFramePr>
+          <p:nvPr/>
+        </p:nvGraphicFramePr>
+        <p:xfrm>
+          <a:off x="365760" y="1828800"/>
+          <a:ext cx="6309360" cy="4114800"/>
+        </p:xfrm>
+        <a:graphic>
+          <a:graphicData uri="http://schemas.openxmlformats.org/drawingml/2006/chart">
+            <c:chart xmlns:c="http://schemas.openxmlformats.org/drawingml/2006/chart" xmlns:r="http://schemas.openxmlformats.org/officeDocument/2006/relationships" r:id="rId2"/>
+          </a:graphicData>
+        </a:graphic>
+      </p:graphicFrame>
+      <p:sp>
+        <p:nvSpPr>
+          <p:cNvPr id="6" name="TextBox 5"/>
+          <p:cNvSpPr txBox="1"/>
+          <p:nvPr/>
+        </p:nvSpPr>
+        <p:spPr>
+          <a:xfrm>
+            <a:off x="7086600" y="1600200"/>
+            <a:ext cx="4572000" cy="4480560"/>
+          </a:xfrm>
+          <a:prstGeom prst="rect">
+            <a:avLst/>
+          </a:prstGeom>
+          <a:noFill/>
+        </p:spPr>
+        <p:txBody>
+          <a:bodyPr wrap="square" lIns="0" tIns="0" rIns="0" bIns="0" anchor="t">
+            <a:spAutoFit/>
+          </a:bodyPr>
+          <a:lstStyle/>
+          <a:p>
+            <a:pPr algn="l">
+              <a:lnSpc>
+                <a:spcPct val="112000"/>
+              </a:lnSpc>
+              <a:spcAft>
+                <a:spcPts val="1000"/>
+              </a:spcAft>
+            </a:pPr>
+            <a:r>
+              <a:rPr sz="1150" b="1" i="0">
+                <a:solidFill>
+                  <a:srgbClr val="333333"/>
+                </a:solidFill>
+                <a:latin typeface="Arial"/>
+              </a:rPr>
+              <a:t>•  CRM: </a:t>
+            </a:r>
+            <a:r>
+              <a:rPr sz="1150" b="0" i="0">
+                <a:solidFill>
+                  <a:srgbClr val="333333"/>
+                </a:solidFill>
+                <a:latin typeface="Arial"/>
+              </a:rPr>
+              <a:t>8% of spend, 44% of attributed revenue. Efficient activation of existing buyers — though without a holdout, high-intent audiences inflate its read.</a:t>
+            </a:r>
+          </a:p>
+          <a:p>
+            <a:pPr algn="l">
+              <a:lnSpc>
+                <a:spcPct val="112000"/>
+              </a:lnSpc>
+              <a:spcAft>
+                <a:spcPts val="1000"/>
+              </a:spcAft>
+            </a:pPr>
+            <a:r>
+              <a:rPr sz="1150" b="1" i="0">
+                <a:solidFill>
+                  <a:srgbClr val="333333"/>
+                </a:solidFill>
+                <a:latin typeface="Arial"/>
+              </a:rPr>
+              <a:t>•  Paid social: </a:t>
+            </a:r>
+            <a:r>
+              <a:rPr sz="1150" b="0" i="0">
+                <a:solidFill>
+                  <a:srgbClr val="333333"/>
+                </a:solidFill>
+                <a:latin typeface="Arial"/>
+              </a:rPr>
+              <a:t>59% of spend at 0.3× iROAS — but it acquired 629 of 1,499 new customers (42%) at $147 CAC vs $212 early value. It pays back as acquisition, not immediate revenue; judge it on CAC and LTV.</a:t>
+            </a:r>
+          </a:p>
+          <a:p>
+            <a:pPr algn="l">
+              <a:lnSpc>
+                <a:spcPct val="112000"/>
+              </a:lnSpc>
+              <a:spcAft>
+                <a:spcPts val="1000"/>
+              </a:spcAft>
+            </a:pPr>
+            <a:r>
+              <a:rPr sz="1150" b="1" i="0">
+                <a:solidFill>
+                  <a:srgbClr val="333333"/>
+                </a:solidFill>
+                <a:latin typeface="Arial"/>
+              </a:rPr>
+              <a:t>•  Paid search: </a:t>
+            </a:r>
+            <a:r>
+              <a:rPr sz="1150" b="0" i="0">
+                <a:solidFill>
+                  <a:srgbClr val="333333"/>
+                </a:solidFill>
+                <a:latin typeface="Arial"/>
+              </a:rPr>
+              <a:t>0.9× — strong early flight, efficiency fell as core sizes stocked out while spend kept running.</a:t>
+            </a:r>
+          </a:p>
+          <a:p>
+            <a:pPr algn="l">
+              <a:lnSpc>
+                <a:spcPct val="112000"/>
+              </a:lnSpc>
+              <a:spcAft>
+                <a:spcPts val="1000"/>
+              </a:spcAft>
+            </a:pPr>
+            <a:r>
+              <a:rPr sz="1150" b="1" i="0">
+                <a:solidFill>
+                  <a:srgbClr val="757575"/>
+                </a:solidFill>
+                <a:latin typeface="Arial"/>
+              </a:rPr>
+              <a:t>•  Method: </a:t>
+            </a:r>
+            <a:r>
+              <a:rPr sz="1150" b="0" i="0">
+                <a:solidFill>
+                  <a:srgbClr val="757575"/>
+                </a:solidFill>
+                <a:latin typeface="Arial"/>
+              </a:rPr>
+              <a:t>iROAS = attributed ROAS × 0.31 site-level incrementality factor, applied uniformly (no holdout or geo split this flight). Attributed ROAS: Email 23.2×, SMS 8.3×, Affiliate 4.2×, Search 3.0×, Social 1.0×.</a:t>
+            </a:r>
+          </a:p>
+        </p:txBody>
+      </p:sp>
+      <p:sp>
+        <p:nvSpPr>
+          <p:cNvPr id="7" name="TextBox 6"/>
+          <p:cNvSpPr txBox="1"/>
+          <p:nvPr/>
+        </p:nvSpPr>
+        <p:spPr>
+          <a:xfrm>
+            <a:off x="502920" y="6510528"/>
+            <a:ext cx="10515600" cy="274320"/>
+          </a:xfrm>
+          <a:prstGeom prst="rect">
+            <a:avLst/>
+          </a:prstGeom>
+          <a:noFill/>
+        </p:spPr>
+        <p:txBody>
+          <a:bodyPr wrap="square" lIns="0" tIns="0" rIns="0" bIns="0" anchor="t">
+            <a:spAutoFit/>
+          </a:bodyPr>
+          <a:lstStyle/>
+          <a:p>
+            <a:pPr algn="l"/>
+            <a:r>
+              <a:rPr sz="800" b="0" i="0">
+                <a:solidFill>
+                  <a:srgbClr val="757575"/>
+                </a:solidFill>
+                <a:latin typeface="Arial"/>
+              </a:rPr>
+              <a:t>Salomon NA eCommerce · Vestal Pro launch readout · Illustrative synthetic case data</a:t>
+            </a:r>
+          </a:p>
+        </p:txBody>
+      </p:sp>
+      <p:sp>
+        <p:nvSpPr>
+          <p:cNvPr id="8" name="TextBox 7"/>
+          <p:cNvSpPr txBox="1"/>
+          <p:nvPr/>
+        </p:nvSpPr>
+        <p:spPr>
+          <a:xfrm>
+            <a:off x="11292840" y="6510528"/>
+            <a:ext cx="411480" cy="274320"/>
+          </a:xfrm>
+          <a:prstGeom prst="rect">
+            <a:avLst/>
+          </a:prstGeom>
+          <a:noFill/>
+        </p:spPr>
+        <p:txBody>
+          <a:bodyPr wrap="square" lIns="0" tIns="0" rIns="0" bIns="0" anchor="t">
+            <a:spAutoFit/>
+          </a:bodyPr>
+          <a:lstStyle/>
+          <a:p>
+            <a:pPr algn="r"/>
+            <a:r>
+              <a:rPr sz="800" b="0" i="0">
+                <a:solidFill>
+                  <a:srgbClr val="757575"/>
+                </a:solidFill>
+                <a:latin typeface="Arial"/>
+              </a:rPr>
+              <a:t>10</a:t>
+            </a:r>
+          </a:p>
+        </p:txBody>
+      </p:sp>
+      <p:pic>
+        <p:nvPicPr>
+          <p:cNvPr id="9" name="Picture 8" descr="salomon_wordmark_black.png"/>
+          <p:cNvPicPr>
+            <a:picLocks noChangeAspect="1"/>
+          </p:cNvPicPr>
+          <p:nvPr/>
+        </p:nvPicPr>
+        <p:blipFill>
+          <a:blip r:embed="rId3"/>
+          <a:stretch>
+            <a:fillRect/>
+          </a:stretch>
+        </p:blipFill>
+        <p:spPr>
+          <a:xfrm>
+            <a:off x="10698480" y="292608"/>
+            <a:ext cx="960120" cy="110013"/>
+          </a:xfrm>
+          <a:prstGeom prst="rect">
+            <a:avLst/>
+          </a:prstGeom>
+        </p:spPr>
+      </p:pic>
+    </p:spTree>
+  </p:cSld>
+  <p:clrMapOvr>
+    <a:masterClrMapping/>
+  </p:clrMapOvr>
+</p:sld>
+</file>
+
+<file path=ppt/slides/slide11.xml><?xml version="1.0" encoding="utf-8"?>
 <p:sld xmlns:a="http://schemas.openxmlformats.org/drawingml/2006/main" xmlns:r="http://schemas.openxmlformats.org/officeDocument/2006/relationships" xmlns:p="http://schemas.openxmlformats.org/presentationml/2006/main">
   <p:cSld>
     <p:spTree>
@@ -6289,375 +6226,6 @@
 </p:sld>
 </file>
 
-<file path=ppt/slides/slide11.xml><?xml version="1.0" encoding="utf-8"?>
-<p:sld xmlns:a="http://schemas.openxmlformats.org/drawingml/2006/main" xmlns:r="http://schemas.openxmlformats.org/officeDocument/2006/relationships" xmlns:p="http://schemas.openxmlformats.org/presentationml/2006/main">
-  <p:cSld>
-    <p:spTree>
-      <p:nvGrpSpPr>
-        <p:cNvPr id="1" name=""/>
-        <p:cNvGrpSpPr/>
-        <p:nvPr/>
-      </p:nvGrpSpPr>
-      <p:grpSpPr>
-        <a:xfrm>
-          <a:off x="0" y="0"/>
-          <a:ext cx="0" cy="0"/>
-          <a:chOff x="0" y="0"/>
-          <a:chExt cx="0" cy="0"/>
-        </a:xfrm>
-      </p:grpSpPr>
-      <p:sp>
-        <p:nvSpPr>
-          <p:cNvPr id="2" name="TextBox 1"/>
-          <p:cNvSpPr txBox="1"/>
-          <p:nvPr/>
-        </p:nvSpPr>
-        <p:spPr>
-          <a:xfrm>
-            <a:off x="502920" y="292608"/>
-            <a:ext cx="11155680" cy="274320"/>
-          </a:xfrm>
-          <a:prstGeom prst="rect">
-            <a:avLst/>
-          </a:prstGeom>
-          <a:noFill/>
-        </p:spPr>
-        <p:txBody>
-          <a:bodyPr wrap="square" lIns="0" tIns="0" rIns="0" bIns="0" anchor="t">
-            <a:spAutoFit/>
-          </a:bodyPr>
-          <a:lstStyle/>
-          <a:p>
-            <a:pPr algn="l"/>
-            <a:r>
-              <a:rPr sz="1050" b="1" i="0">
-                <a:solidFill>
-                  <a:srgbClr val="757575"/>
-                </a:solidFill>
-                <a:latin typeface="Arial"/>
-              </a:rPr>
-              <a:t>INVENTORY</a:t>
-            </a:r>
-          </a:p>
-        </p:txBody>
-      </p:sp>
-      <p:sp>
-        <p:nvSpPr>
-          <p:cNvPr id="3" name="TextBox 2"/>
-          <p:cNvSpPr txBox="1"/>
-          <p:nvPr/>
-        </p:nvSpPr>
-        <p:spPr>
-          <a:xfrm>
-            <a:off x="502920" y="566928"/>
-            <a:ext cx="11201400" cy="777240"/>
-          </a:xfrm>
-          <a:prstGeom prst="rect">
-            <a:avLst/>
-          </a:prstGeom>
-          <a:noFill/>
-        </p:spPr>
-        <p:txBody>
-          <a:bodyPr wrap="square" lIns="0" tIns="0" rIns="0" bIns="0" anchor="t">
-            <a:spAutoFit/>
-          </a:bodyPr>
-          <a:lstStyle/>
-          <a:p>
-            <a:pPr algn="l"/>
-            <a:r>
-              <a:rPr sz="2300" b="0" i="0">
-                <a:solidFill>
-                  <a:srgbClr val="000000"/>
-                </a:solidFill>
-                <a:latin typeface="Georgia"/>
-              </a:rPr>
-              <a:t>Core sizes were 44% unavailable by week 6, costing an estimated $20K in demand</a:t>
-            </a:r>
-          </a:p>
-        </p:txBody>
-      </p:sp>
-      <p:sp>
-        <p:nvSpPr>
-          <p:cNvPr id="4" name="TextBox 3"/>
-          <p:cNvSpPr txBox="1"/>
-          <p:nvPr/>
-        </p:nvSpPr>
-        <p:spPr>
-          <a:xfrm>
-            <a:off x="502920" y="1481328"/>
-            <a:ext cx="6035040" cy="274320"/>
-          </a:xfrm>
-          <a:prstGeom prst="rect">
-            <a:avLst/>
-          </a:prstGeom>
-          <a:noFill/>
-        </p:spPr>
-        <p:txBody>
-          <a:bodyPr wrap="square" lIns="0" tIns="0" rIns="0" bIns="0" anchor="t">
-            <a:spAutoFit/>
-          </a:bodyPr>
-          <a:lstStyle/>
-          <a:p>
-            <a:pPr algn="l"/>
-            <a:r>
-              <a:rPr sz="1000" b="1" i="0">
-                <a:solidFill>
-                  <a:srgbClr val="757575"/>
-                </a:solidFill>
-                <a:latin typeface="Arial"/>
-              </a:rPr>
-              <a:t>VESTAL PRO AVAILABILITY BY CAMPAIGN WEEK</a:t>
-            </a:r>
-          </a:p>
-        </p:txBody>
-      </p:sp>
-      <p:graphicFrame>
-        <p:nvGraphicFramePr>
-          <p:cNvPr id="5" name="Chart 4"/>
-          <p:cNvGraphicFramePr>
-            <a:graphicFrameLocks noGrp="1"/>
-          </p:cNvGraphicFramePr>
-          <p:nvPr/>
-        </p:nvGraphicFramePr>
-        <p:xfrm>
-          <a:off x="365760" y="1828800"/>
-          <a:ext cx="6309360" cy="3977639"/>
-        </p:xfrm>
-        <a:graphic>
-          <a:graphicData uri="http://schemas.openxmlformats.org/drawingml/2006/chart">
-            <c:chart xmlns:c="http://schemas.openxmlformats.org/drawingml/2006/chart" xmlns:r="http://schemas.openxmlformats.org/officeDocument/2006/relationships" r:id="rId2"/>
-          </a:graphicData>
-        </a:graphic>
-      </p:graphicFrame>
-      <p:sp>
-        <p:nvSpPr>
-          <p:cNvPr id="6" name="TextBox 5"/>
-          <p:cNvSpPr txBox="1"/>
-          <p:nvPr/>
-        </p:nvSpPr>
-        <p:spPr>
-          <a:xfrm>
-            <a:off x="7086600" y="1600200"/>
-            <a:ext cx="4572000" cy="4480560"/>
-          </a:xfrm>
-          <a:prstGeom prst="rect">
-            <a:avLst/>
-          </a:prstGeom>
-          <a:noFill/>
-        </p:spPr>
-        <p:txBody>
-          <a:bodyPr wrap="square" lIns="0" tIns="0" rIns="0" bIns="0" anchor="t">
-            <a:spAutoFit/>
-          </a:bodyPr>
-          <a:lstStyle/>
-          <a:p>
-            <a:pPr algn="l">
-              <a:lnSpc>
-                <a:spcPct val="112000"/>
-              </a:lnSpc>
-              <a:spcAft>
-                <a:spcPts val="1000"/>
-              </a:spcAft>
-            </a:pPr>
-            <a:r>
-              <a:rPr sz="1150" b="1" i="0">
-                <a:solidFill>
-                  <a:srgbClr val="333333"/>
-                </a:solidFill>
-                <a:latin typeface="Arial"/>
-              </a:rPr>
-              <a:t>•  Depletion, not demand, ended the flight: </a:t>
-            </a:r>
-            <a:r>
-              <a:rPr sz="1150" b="0" i="0">
-                <a:solidFill>
-                  <a:srgbClr val="333333"/>
-                </a:solidFill>
-                <a:latin typeface="Arial"/>
-              </a:rPr>
-              <a:t>core sizes (M9–11, W7–9) fell below 90% in week 3 and hit 56% by week 6.</a:t>
-            </a:r>
-          </a:p>
-          <a:p>
-            <a:pPr algn="l">
-              <a:lnSpc>
-                <a:spcPct val="112000"/>
-              </a:lnSpc>
-              <a:spcAft>
-                <a:spcPts val="1000"/>
-              </a:spcAft>
-            </a:pPr>
-            <a:r>
-              <a:rPr sz="1150" b="0" i="0">
-                <a:solidFill>
-                  <a:srgbClr val="333333"/>
-                </a:solidFill>
-                <a:latin typeface="Arial"/>
-              </a:rPr>
-              <a:t>•  Vestal Pro sell-through conversion fell 35% (5.2% weeks 1–3 → 3.4% week 6) while paid media kept sending traffic.</a:t>
-            </a:r>
-          </a:p>
-          <a:p>
-            <a:pPr algn="l">
-              <a:lnSpc>
-                <a:spcPct val="112000"/>
-              </a:lnSpc>
-              <a:spcAft>
-                <a:spcPts val="1000"/>
-              </a:spcAft>
-            </a:pPr>
-            <a:r>
-              <a:rPr sz="1150" b="0" i="0">
-                <a:solidFill>
-                  <a:srgbClr val="333333"/>
-                </a:solidFill>
-                <a:latin typeface="Arial"/>
-              </a:rPr>
-              <a:t>•  Modeled unmet demand: ≈140 units, ≈$20.4K, from applying early-flight conversion to weeks 4–6 traffic.</a:t>
-            </a:r>
-          </a:p>
-          <a:p>
-            <a:pPr algn="l">
-              <a:lnSpc>
-                <a:spcPct val="112000"/>
-              </a:lnSpc>
-              <a:spcAft>
-                <a:spcPts val="1000"/>
-              </a:spcAft>
-            </a:pPr>
-            <a:r>
-              <a:rPr sz="1150" b="0" i="0">
-                <a:solidFill>
-                  <a:srgbClr val="333333"/>
-                </a:solidFill>
-                <a:latin typeface="Arial"/>
-              </a:rPr>
-              <a:t>•  Site conversion followed: 2.52% week 1 → 2.23% week 6, below the 2.33% pre-period average.</a:t>
-            </a:r>
-          </a:p>
-          <a:p>
-            <a:pPr algn="l">
-              <a:lnSpc>
-                <a:spcPct val="112000"/>
-              </a:lnSpc>
-              <a:spcAft>
-                <a:spcPts val="1000"/>
-              </a:spcAft>
-            </a:pPr>
-            <a:r>
-              <a:rPr sz="1150" b="0" i="0">
-                <a:solidFill>
-                  <a:srgbClr val="333333"/>
-                </a:solidFill>
-                <a:latin typeface="Arial"/>
-              </a:rPr>
-              <a:t>•  Speedcross picked up +14% units as shoppers substituted — a partial, lower-price offset.</a:t>
-            </a:r>
-          </a:p>
-        </p:txBody>
-      </p:sp>
-      <p:sp>
-        <p:nvSpPr>
-          <p:cNvPr id="7" name="TextBox 6"/>
-          <p:cNvSpPr txBox="1"/>
-          <p:nvPr/>
-        </p:nvSpPr>
-        <p:spPr>
-          <a:xfrm>
-            <a:off x="502920" y="6510528"/>
-            <a:ext cx="10515600" cy="274320"/>
-          </a:xfrm>
-          <a:prstGeom prst="rect">
-            <a:avLst/>
-          </a:prstGeom>
-          <a:noFill/>
-        </p:spPr>
-        <p:txBody>
-          <a:bodyPr wrap="square" lIns="0" tIns="0" rIns="0" bIns="0" anchor="t">
-            <a:spAutoFit/>
-          </a:bodyPr>
-          <a:lstStyle/>
-          <a:p>
-            <a:pPr algn="l"/>
-            <a:r>
-              <a:rPr sz="800" b="0" i="0">
-                <a:solidFill>
-                  <a:srgbClr val="757575"/>
-                </a:solidFill>
-                <a:latin typeface="Arial"/>
-              </a:rPr>
-              <a:t>Salomon NA eCommerce · Vestal Pro launch readout · Illustrative synthetic case data</a:t>
-            </a:r>
-          </a:p>
-        </p:txBody>
-      </p:sp>
-      <p:sp>
-        <p:nvSpPr>
-          <p:cNvPr id="8" name="TextBox 7"/>
-          <p:cNvSpPr txBox="1"/>
-          <p:nvPr/>
-        </p:nvSpPr>
-        <p:spPr>
-          <a:xfrm>
-            <a:off x="11292840" y="6510528"/>
-            <a:ext cx="411480" cy="274320"/>
-          </a:xfrm>
-          <a:prstGeom prst="rect">
-            <a:avLst/>
-          </a:prstGeom>
-          <a:noFill/>
-        </p:spPr>
-        <p:txBody>
-          <a:bodyPr wrap="square" lIns="0" tIns="0" rIns="0" bIns="0" anchor="t">
-            <a:spAutoFit/>
-          </a:bodyPr>
-          <a:lstStyle/>
-          <a:p>
-            <a:pPr algn="r"/>
-            <a:r>
-              <a:rPr sz="800" b="0" i="0">
-                <a:solidFill>
-                  <a:srgbClr val="757575"/>
-                </a:solidFill>
-                <a:latin typeface="Arial"/>
-              </a:rPr>
-              <a:t>12</a:t>
-            </a:r>
-          </a:p>
-        </p:txBody>
-      </p:sp>
-      <p:pic>
-        <p:nvPicPr>
-          <p:cNvPr id="9" name="Picture 8" descr="salomon_wordmark_black.png"/>
-          <p:cNvPicPr>
-            <a:picLocks noChangeAspect="1"/>
-          </p:cNvPicPr>
-          <p:nvPr/>
-        </p:nvPicPr>
-        <p:blipFill>
-          <a:blip r:embed="rId3"/>
-          <a:stretch>
-            <a:fillRect/>
-          </a:stretch>
-        </p:blipFill>
-        <p:spPr>
-          <a:xfrm>
-            <a:off x="10698480" y="292608"/>
-            <a:ext cx="960120" cy="110013"/>
-          </a:xfrm>
-          <a:prstGeom prst="rect">
-            <a:avLst/>
-          </a:prstGeom>
-        </p:spPr>
-      </p:pic>
-    </p:spTree>
-  </p:cSld>
-  <p:clrMapOvr>
-    <a:masterClrMapping/>
-  </p:clrMapOvr>
-</p:sld>
-</file>
-
 <file path=ppt/slides/slide12.xml><?xml version="1.0" encoding="utf-8"?>
 <p:sld xmlns:a="http://schemas.openxmlformats.org/drawingml/2006/main" xmlns:r="http://schemas.openxmlformats.org/officeDocument/2006/relationships" xmlns:p="http://schemas.openxmlformats.org/presentationml/2006/main">
   <p:cSld>
@@ -6677,6 +6245,375 @@
       </p:grpSpPr>
       <p:sp>
         <p:nvSpPr>
+          <p:cNvPr id="2" name="TextBox 1"/>
+          <p:cNvSpPr txBox="1"/>
+          <p:nvPr/>
+        </p:nvSpPr>
+        <p:spPr>
+          <a:xfrm>
+            <a:off x="502920" y="292608"/>
+            <a:ext cx="11155680" cy="274320"/>
+          </a:xfrm>
+          <a:prstGeom prst="rect">
+            <a:avLst/>
+          </a:prstGeom>
+          <a:noFill/>
+        </p:spPr>
+        <p:txBody>
+          <a:bodyPr wrap="square" lIns="0" tIns="0" rIns="0" bIns="0" anchor="t">
+            <a:spAutoFit/>
+          </a:bodyPr>
+          <a:lstStyle/>
+          <a:p>
+            <a:pPr algn="l"/>
+            <a:r>
+              <a:rPr sz="1050" b="1" i="0">
+                <a:solidFill>
+                  <a:srgbClr val="757575"/>
+                </a:solidFill>
+                <a:latin typeface="Arial"/>
+              </a:rPr>
+              <a:t>INVENTORY</a:t>
+            </a:r>
+          </a:p>
+        </p:txBody>
+      </p:sp>
+      <p:sp>
+        <p:nvSpPr>
+          <p:cNvPr id="3" name="TextBox 2"/>
+          <p:cNvSpPr txBox="1"/>
+          <p:nvPr/>
+        </p:nvSpPr>
+        <p:spPr>
+          <a:xfrm>
+            <a:off x="502920" y="566928"/>
+            <a:ext cx="11201400" cy="777240"/>
+          </a:xfrm>
+          <a:prstGeom prst="rect">
+            <a:avLst/>
+          </a:prstGeom>
+          <a:noFill/>
+        </p:spPr>
+        <p:txBody>
+          <a:bodyPr wrap="square" lIns="0" tIns="0" rIns="0" bIns="0" anchor="t">
+            <a:spAutoFit/>
+          </a:bodyPr>
+          <a:lstStyle/>
+          <a:p>
+            <a:pPr algn="l"/>
+            <a:r>
+              <a:rPr sz="2300" b="0" i="0">
+                <a:solidFill>
+                  <a:srgbClr val="000000"/>
+                </a:solidFill>
+                <a:latin typeface="Georgia"/>
+              </a:rPr>
+              <a:t>Core sizes were 44% unavailable by week 6, costing an estimated $20K in demand</a:t>
+            </a:r>
+          </a:p>
+        </p:txBody>
+      </p:sp>
+      <p:sp>
+        <p:nvSpPr>
+          <p:cNvPr id="4" name="TextBox 3"/>
+          <p:cNvSpPr txBox="1"/>
+          <p:nvPr/>
+        </p:nvSpPr>
+        <p:spPr>
+          <a:xfrm>
+            <a:off x="502920" y="1481328"/>
+            <a:ext cx="6035040" cy="274320"/>
+          </a:xfrm>
+          <a:prstGeom prst="rect">
+            <a:avLst/>
+          </a:prstGeom>
+          <a:noFill/>
+        </p:spPr>
+        <p:txBody>
+          <a:bodyPr wrap="square" lIns="0" tIns="0" rIns="0" bIns="0" anchor="t">
+            <a:spAutoFit/>
+          </a:bodyPr>
+          <a:lstStyle/>
+          <a:p>
+            <a:pPr algn="l"/>
+            <a:r>
+              <a:rPr sz="1000" b="1" i="0">
+                <a:solidFill>
+                  <a:srgbClr val="757575"/>
+                </a:solidFill>
+                <a:latin typeface="Arial"/>
+              </a:rPr>
+              <a:t>VESTAL PRO AVAILABILITY BY CAMPAIGN WEEK</a:t>
+            </a:r>
+          </a:p>
+        </p:txBody>
+      </p:sp>
+      <p:graphicFrame>
+        <p:nvGraphicFramePr>
+          <p:cNvPr id="5" name="Chart 4"/>
+          <p:cNvGraphicFramePr>
+            <a:graphicFrameLocks noGrp="1"/>
+          </p:cNvGraphicFramePr>
+          <p:nvPr/>
+        </p:nvGraphicFramePr>
+        <p:xfrm>
+          <a:off x="365760" y="1828800"/>
+          <a:ext cx="6309360" cy="3977639"/>
+        </p:xfrm>
+        <a:graphic>
+          <a:graphicData uri="http://schemas.openxmlformats.org/drawingml/2006/chart">
+            <c:chart xmlns:c="http://schemas.openxmlformats.org/drawingml/2006/chart" xmlns:r="http://schemas.openxmlformats.org/officeDocument/2006/relationships" r:id="rId2"/>
+          </a:graphicData>
+        </a:graphic>
+      </p:graphicFrame>
+      <p:sp>
+        <p:nvSpPr>
+          <p:cNvPr id="6" name="TextBox 5"/>
+          <p:cNvSpPr txBox="1"/>
+          <p:nvPr/>
+        </p:nvSpPr>
+        <p:spPr>
+          <a:xfrm>
+            <a:off x="7086600" y="1600200"/>
+            <a:ext cx="4572000" cy="4480560"/>
+          </a:xfrm>
+          <a:prstGeom prst="rect">
+            <a:avLst/>
+          </a:prstGeom>
+          <a:noFill/>
+        </p:spPr>
+        <p:txBody>
+          <a:bodyPr wrap="square" lIns="0" tIns="0" rIns="0" bIns="0" anchor="t">
+            <a:spAutoFit/>
+          </a:bodyPr>
+          <a:lstStyle/>
+          <a:p>
+            <a:pPr algn="l">
+              <a:lnSpc>
+                <a:spcPct val="112000"/>
+              </a:lnSpc>
+              <a:spcAft>
+                <a:spcPts val="1000"/>
+              </a:spcAft>
+            </a:pPr>
+            <a:r>
+              <a:rPr sz="1150" b="1" i="0">
+                <a:solidFill>
+                  <a:srgbClr val="333333"/>
+                </a:solidFill>
+                <a:latin typeface="Arial"/>
+              </a:rPr>
+              <a:t>•  Depletion, not demand, ended the flight: </a:t>
+            </a:r>
+            <a:r>
+              <a:rPr sz="1150" b="0" i="0">
+                <a:solidFill>
+                  <a:srgbClr val="333333"/>
+                </a:solidFill>
+                <a:latin typeface="Arial"/>
+              </a:rPr>
+              <a:t>core sizes (M9–11, W7–9) fell below 90% in week 3 and hit 56% by week 6.</a:t>
+            </a:r>
+          </a:p>
+          <a:p>
+            <a:pPr algn="l">
+              <a:lnSpc>
+                <a:spcPct val="112000"/>
+              </a:lnSpc>
+              <a:spcAft>
+                <a:spcPts val="1000"/>
+              </a:spcAft>
+            </a:pPr>
+            <a:r>
+              <a:rPr sz="1150" b="0" i="0">
+                <a:solidFill>
+                  <a:srgbClr val="333333"/>
+                </a:solidFill>
+                <a:latin typeface="Arial"/>
+              </a:rPr>
+              <a:t>•  Vestal Pro sell-through conversion fell 35% (5.2% weeks 1–3 → 3.4% week 6) while paid media kept sending traffic.</a:t>
+            </a:r>
+          </a:p>
+          <a:p>
+            <a:pPr algn="l">
+              <a:lnSpc>
+                <a:spcPct val="112000"/>
+              </a:lnSpc>
+              <a:spcAft>
+                <a:spcPts val="1000"/>
+              </a:spcAft>
+            </a:pPr>
+            <a:r>
+              <a:rPr sz="1150" b="0" i="0">
+                <a:solidFill>
+                  <a:srgbClr val="333333"/>
+                </a:solidFill>
+                <a:latin typeface="Arial"/>
+              </a:rPr>
+              <a:t>•  Modeled unmet demand: ≈140 units, ≈$20.4K, from applying early-flight conversion to weeks 4–6 traffic.</a:t>
+            </a:r>
+          </a:p>
+          <a:p>
+            <a:pPr algn="l">
+              <a:lnSpc>
+                <a:spcPct val="112000"/>
+              </a:lnSpc>
+              <a:spcAft>
+                <a:spcPts val="1000"/>
+              </a:spcAft>
+            </a:pPr>
+            <a:r>
+              <a:rPr sz="1150" b="0" i="0">
+                <a:solidFill>
+                  <a:srgbClr val="333333"/>
+                </a:solidFill>
+                <a:latin typeface="Arial"/>
+              </a:rPr>
+              <a:t>•  Site conversion followed: 2.52% week 1 → 2.23% week 6, below the 2.33% pre-period average.</a:t>
+            </a:r>
+          </a:p>
+          <a:p>
+            <a:pPr algn="l">
+              <a:lnSpc>
+                <a:spcPct val="112000"/>
+              </a:lnSpc>
+              <a:spcAft>
+                <a:spcPts val="1000"/>
+              </a:spcAft>
+            </a:pPr>
+            <a:r>
+              <a:rPr sz="1150" b="0" i="0">
+                <a:solidFill>
+                  <a:srgbClr val="333333"/>
+                </a:solidFill>
+                <a:latin typeface="Arial"/>
+              </a:rPr>
+              <a:t>•  Speedcross picked up +14% units as shoppers substituted — a partial, lower-price offset.</a:t>
+            </a:r>
+          </a:p>
+        </p:txBody>
+      </p:sp>
+      <p:sp>
+        <p:nvSpPr>
+          <p:cNvPr id="7" name="TextBox 6"/>
+          <p:cNvSpPr txBox="1"/>
+          <p:nvPr/>
+        </p:nvSpPr>
+        <p:spPr>
+          <a:xfrm>
+            <a:off x="502920" y="6510528"/>
+            <a:ext cx="10515600" cy="274320"/>
+          </a:xfrm>
+          <a:prstGeom prst="rect">
+            <a:avLst/>
+          </a:prstGeom>
+          <a:noFill/>
+        </p:spPr>
+        <p:txBody>
+          <a:bodyPr wrap="square" lIns="0" tIns="0" rIns="0" bIns="0" anchor="t">
+            <a:spAutoFit/>
+          </a:bodyPr>
+          <a:lstStyle/>
+          <a:p>
+            <a:pPr algn="l"/>
+            <a:r>
+              <a:rPr sz="800" b="0" i="0">
+                <a:solidFill>
+                  <a:srgbClr val="757575"/>
+                </a:solidFill>
+                <a:latin typeface="Arial"/>
+              </a:rPr>
+              <a:t>Salomon NA eCommerce · Vestal Pro launch readout · Illustrative synthetic case data</a:t>
+            </a:r>
+          </a:p>
+        </p:txBody>
+      </p:sp>
+      <p:sp>
+        <p:nvSpPr>
+          <p:cNvPr id="8" name="TextBox 7"/>
+          <p:cNvSpPr txBox="1"/>
+          <p:nvPr/>
+        </p:nvSpPr>
+        <p:spPr>
+          <a:xfrm>
+            <a:off x="11292840" y="6510528"/>
+            <a:ext cx="411480" cy="274320"/>
+          </a:xfrm>
+          <a:prstGeom prst="rect">
+            <a:avLst/>
+          </a:prstGeom>
+          <a:noFill/>
+        </p:spPr>
+        <p:txBody>
+          <a:bodyPr wrap="square" lIns="0" tIns="0" rIns="0" bIns="0" anchor="t">
+            <a:spAutoFit/>
+          </a:bodyPr>
+          <a:lstStyle/>
+          <a:p>
+            <a:pPr algn="r"/>
+            <a:r>
+              <a:rPr sz="800" b="0" i="0">
+                <a:solidFill>
+                  <a:srgbClr val="757575"/>
+                </a:solidFill>
+                <a:latin typeface="Arial"/>
+              </a:rPr>
+              <a:t>12</a:t>
+            </a:r>
+          </a:p>
+        </p:txBody>
+      </p:sp>
+      <p:pic>
+        <p:nvPicPr>
+          <p:cNvPr id="9" name="Picture 8" descr="salomon_wordmark_black.png"/>
+          <p:cNvPicPr>
+            <a:picLocks noChangeAspect="1"/>
+          </p:cNvPicPr>
+          <p:nvPr/>
+        </p:nvPicPr>
+        <p:blipFill>
+          <a:blip r:embed="rId3"/>
+          <a:stretch>
+            <a:fillRect/>
+          </a:stretch>
+        </p:blipFill>
+        <p:spPr>
+          <a:xfrm>
+            <a:off x="10698480" y="292608"/>
+            <a:ext cx="960120" cy="110013"/>
+          </a:xfrm>
+          <a:prstGeom prst="rect">
+            <a:avLst/>
+          </a:prstGeom>
+        </p:spPr>
+      </p:pic>
+    </p:spTree>
+  </p:cSld>
+  <p:clrMapOvr>
+    <a:masterClrMapping/>
+  </p:clrMapOvr>
+</p:sld>
+</file>
+
+<file path=ppt/slides/slide13.xml><?xml version="1.0" encoding="utf-8"?>
+<p:sld xmlns:a="http://schemas.openxmlformats.org/drawingml/2006/main" xmlns:r="http://schemas.openxmlformats.org/officeDocument/2006/relationships" xmlns:p="http://schemas.openxmlformats.org/presentationml/2006/main">
+  <p:cSld>
+    <p:spTree>
+      <p:nvGrpSpPr>
+        <p:cNvPr id="1" name=""/>
+        <p:cNvGrpSpPr/>
+        <p:nvPr/>
+      </p:nvGrpSpPr>
+      <p:grpSpPr>
+        <a:xfrm>
+          <a:off x="0" y="0"/>
+          <a:ext cx="0" cy="0"/>
+          <a:chOff x="0" y="0"/>
+          <a:chExt cx="0" cy="0"/>
+        </a:xfrm>
+      </p:grpSpPr>
+      <p:sp>
+        <p:nvSpPr>
           <p:cNvPr id="2" name="Rectangle 1"/>
           <p:cNvSpPr/>
           <p:nvPr/>
@@ -7355,7 +7292,267 @@
 </p:sld>
 </file>
 
-<file path=ppt/slides/slide13.xml><?xml version="1.0" encoding="utf-8"?>
+<file path=ppt/slides/slide14.xml><?xml version="1.0" encoding="utf-8"?>
+<p:sld xmlns:a="http://schemas.openxmlformats.org/drawingml/2006/main" xmlns:r="http://schemas.openxmlformats.org/officeDocument/2006/relationships" xmlns:p="http://schemas.openxmlformats.org/presentationml/2006/main">
+  <p:cSld>
+    <p:spTree>
+      <p:nvGrpSpPr>
+        <p:cNvPr id="1" name="">
+          <a:extLst>
+            <a:ext uri="{FF2B5EF4-FFF2-40B4-BE49-F238E27FC236}">
+              <a16:creationId xmlns:a16="http://schemas.microsoft.com/office/drawing/2014/main" id="{3A7BD774-5215-56D0-5E2D-5BEB935C20F4}"/>
+            </a:ext>
+          </a:extLst>
+        </p:cNvPr>
+        <p:cNvGrpSpPr/>
+        <p:nvPr/>
+      </p:nvGrpSpPr>
+      <p:grpSpPr>
+        <a:xfrm>
+          <a:off x="0" y="0"/>
+          <a:ext cx="0" cy="0"/>
+          <a:chOff x="0" y="0"/>
+          <a:chExt cx="0" cy="0"/>
+        </a:xfrm>
+      </p:grpSpPr>
+      <p:sp>
+        <p:nvSpPr>
+          <p:cNvPr id="2" name="Rectangle 1">
+            <a:extLst>
+              <a:ext uri="{FF2B5EF4-FFF2-40B4-BE49-F238E27FC236}">
+                <a16:creationId xmlns:a16="http://schemas.microsoft.com/office/drawing/2014/main" id="{2F2B0E74-D5E6-28E0-4424-F20FC2FD1565}"/>
+              </a:ext>
+            </a:extLst>
+          </p:cNvPr>
+          <p:cNvSpPr/>
+          <p:nvPr/>
+        </p:nvSpPr>
+        <p:spPr>
+          <a:xfrm>
+            <a:off x="0" y="0"/>
+            <a:ext cx="12191695" cy="6858000"/>
+          </a:xfrm>
+          <a:prstGeom prst="rect">
+            <a:avLst/>
+          </a:prstGeom>
+          <a:solidFill>
+            <a:srgbClr val="000000"/>
+          </a:solidFill>
+          <a:ln>
+            <a:noFill/>
+          </a:ln>
+          <a:effectLst/>
+        </p:spPr>
+        <p:style>
+          <a:lnRef idx="1">
+            <a:schemeClr val="accent1"/>
+          </a:lnRef>
+          <a:fillRef idx="3">
+            <a:schemeClr val="accent1"/>
+          </a:fillRef>
+          <a:effectRef idx="2">
+            <a:schemeClr val="accent1"/>
+          </a:effectRef>
+          <a:fontRef idx="minor">
+            <a:schemeClr val="lt1"/>
+          </a:fontRef>
+        </p:style>
+        <p:txBody>
+          <a:bodyPr rtlCol="0" anchor="ctr"/>
+          <a:lstStyle/>
+          <a:p>
+            <a:pPr algn="ctr"/>
+            <a:endParaRPr/>
+          </a:p>
+        </p:txBody>
+      </p:sp>
+      <p:sp>
+        <p:nvSpPr>
+          <p:cNvPr id="3" name="TextBox 2">
+            <a:extLst>
+              <a:ext uri="{FF2B5EF4-FFF2-40B4-BE49-F238E27FC236}">
+                <a16:creationId xmlns:a16="http://schemas.microsoft.com/office/drawing/2014/main" id="{02588DE6-B55D-C61B-F685-4F509F0716EE}"/>
+              </a:ext>
+            </a:extLst>
+          </p:cNvPr>
+          <p:cNvSpPr txBox="1"/>
+          <p:nvPr/>
+        </p:nvSpPr>
+        <p:spPr>
+          <a:xfrm>
+            <a:off x="822960" y="1965960"/>
+            <a:ext cx="10515600" cy="1354217"/>
+          </a:xfrm>
+          <a:prstGeom prst="rect">
+            <a:avLst/>
+          </a:prstGeom>
+          <a:noFill/>
+        </p:spPr>
+        <p:txBody>
+          <a:bodyPr wrap="square" lIns="0" tIns="0" rIns="0" bIns="0" anchor="t">
+            <a:spAutoFit/>
+          </a:bodyPr>
+          <a:lstStyle/>
+          <a:p>
+            <a:pPr algn="l"/>
+            <a:r>
+              <a:rPr lang="en-US" sz="4400" dirty="0">
+                <a:solidFill>
+                  <a:srgbClr val="FFFFFF"/>
+                </a:solidFill>
+                <a:latin typeface="Georgia"/>
+              </a:rPr>
+              <a:t>THANK YOU</a:t>
+            </a:r>
+          </a:p>
+          <a:p>
+            <a:pPr algn="l"/>
+            <a:r>
+              <a:rPr lang="en-US" sz="4400" b="0" i="0" dirty="0">
+                <a:solidFill>
+                  <a:srgbClr val="FFFFFF"/>
+                </a:solidFill>
+                <a:latin typeface="Georgia"/>
+              </a:rPr>
+              <a:t>MERCI</a:t>
+            </a:r>
+            <a:endParaRPr sz="4400" b="0" i="0" dirty="0">
+              <a:solidFill>
+                <a:srgbClr val="FFFFFF"/>
+              </a:solidFill>
+              <a:latin typeface="Georgia"/>
+            </a:endParaRPr>
+          </a:p>
+        </p:txBody>
+      </p:sp>
+      <p:sp>
+        <p:nvSpPr>
+          <p:cNvPr id="6" name="TextBox 5">
+            <a:extLst>
+              <a:ext uri="{FF2B5EF4-FFF2-40B4-BE49-F238E27FC236}">
+                <a16:creationId xmlns:a16="http://schemas.microsoft.com/office/drawing/2014/main" id="{AF312117-B385-77DE-78A5-DC270890AC11}"/>
+              </a:ext>
+            </a:extLst>
+          </p:cNvPr>
+          <p:cNvSpPr txBox="1"/>
+          <p:nvPr/>
+        </p:nvSpPr>
+        <p:spPr>
+          <a:xfrm>
+            <a:off x="822960" y="6080760"/>
+            <a:ext cx="10515600" cy="153888"/>
+          </a:xfrm>
+          <a:prstGeom prst="rect">
+            <a:avLst/>
+          </a:prstGeom>
+          <a:noFill/>
+        </p:spPr>
+        <p:txBody>
+          <a:bodyPr wrap="square" lIns="0" tIns="0" rIns="0" bIns="0" anchor="t">
+            <a:spAutoFit/>
+          </a:bodyPr>
+          <a:lstStyle/>
+          <a:p>
+            <a:pPr algn="l"/>
+            <a:r>
+              <a:rPr sz="1000" b="0" i="0" dirty="0">
+                <a:solidFill>
+                  <a:srgbClr val="757575"/>
+                </a:solidFill>
+                <a:latin typeface="Arial"/>
+              </a:rPr>
+              <a:t>Marketing Insights &amp; Analytics</a:t>
+            </a:r>
+          </a:p>
+        </p:txBody>
+      </p:sp>
+      <p:pic>
+        <p:nvPicPr>
+          <p:cNvPr id="7" name="Picture 6" descr="salomon_wordmark_white.png">
+            <a:extLst>
+              <a:ext uri="{FF2B5EF4-FFF2-40B4-BE49-F238E27FC236}">
+                <a16:creationId xmlns:a16="http://schemas.microsoft.com/office/drawing/2014/main" id="{4137F25F-3223-1AA1-5222-9B0CA75E764B}"/>
+              </a:ext>
+            </a:extLst>
+          </p:cNvPr>
+          <p:cNvPicPr>
+            <a:picLocks noChangeAspect="1"/>
+          </p:cNvPicPr>
+          <p:nvPr/>
+        </p:nvPicPr>
+        <p:blipFill>
+          <a:blip r:embed="rId2"/>
+          <a:stretch>
+            <a:fillRect/>
+          </a:stretch>
+        </p:blipFill>
+        <p:spPr>
+          <a:xfrm>
+            <a:off x="822960" y="900000"/>
+            <a:ext cx="2560320" cy="293370"/>
+          </a:xfrm>
+          <a:prstGeom prst="rect">
+            <a:avLst/>
+          </a:prstGeom>
+        </p:spPr>
+      </p:pic>
+      <p:pic>
+        <p:nvPicPr>
+          <p:cNvPr id="5" name="Picture 4" descr="The image shows a steep, rocky mountain side under a cloudy sky.&#10;&#10;AI-generated content may be incorrect.">
+            <a:extLst>
+              <a:ext uri="{FF2B5EF4-FFF2-40B4-BE49-F238E27FC236}">
+                <a16:creationId xmlns:a16="http://schemas.microsoft.com/office/drawing/2014/main" id="{5D256C6D-8464-4352-96C6-EE210AA6C53C}"/>
+              </a:ext>
+            </a:extLst>
+          </p:cNvPr>
+          <p:cNvPicPr>
+            <a:picLocks noChangeAspect="1"/>
+          </p:cNvPicPr>
+          <p:nvPr/>
+        </p:nvPicPr>
+        <p:blipFill>
+          <a:blip r:embed="rId3">
+            <a:alphaModFix amt="50000"/>
+            <a:extLst>
+              <a:ext uri="{BEBA8EAE-BF5A-486C-A8C5-ECC9F3942E4B}">
+                <a14:imgProps xmlns:a14="http://schemas.microsoft.com/office/drawing/2010/main">
+                  <a14:imgLayer r:embed="rId4">
+                    <a14:imgEffect>
+                      <a14:saturation sat="0"/>
+                    </a14:imgEffect>
+                  </a14:imgLayer>
+                </a14:imgProps>
+              </a:ext>
+            </a:extLst>
+          </a:blip>
+          <a:stretch>
+            <a:fillRect/>
+          </a:stretch>
+        </p:blipFill>
+        <p:spPr>
+          <a:xfrm>
+            <a:off x="-64851" y="0"/>
+            <a:ext cx="13452826" cy="7953983"/>
+          </a:xfrm>
+          <a:prstGeom prst="rect">
+            <a:avLst/>
+          </a:prstGeom>
+        </p:spPr>
+      </p:pic>
+    </p:spTree>
+    <p:extLst>
+      <p:ext uri="{BB962C8B-B14F-4D97-AF65-F5344CB8AC3E}">
+        <p14:creationId xmlns:p14="http://schemas.microsoft.com/office/powerpoint/2010/main" val="1247451091"/>
+      </p:ext>
+    </p:extLst>
+  </p:cSld>
+  <p:clrMapOvr>
+    <a:masterClrMapping/>
+  </p:clrMapOvr>
+</p:sld>
+</file>
+
+<file path=ppt/slides/slide15.xml><?xml version="1.0" encoding="utf-8"?>
 <p:sld xmlns:a="http://schemas.openxmlformats.org/drawingml/2006/main" xmlns:r="http://schemas.openxmlformats.org/officeDocument/2006/relationships" xmlns:p="http://schemas.openxmlformats.org/presentationml/2006/main">
   <p:cSld>
     <p:spTree>
@@ -7560,7 +7757,7 @@
 </p:sld>
 </file>
 
-<file path=ppt/slides/slide14.xml><?xml version="1.0" encoding="utf-8"?>
+<file path=ppt/slides/slide16.xml><?xml version="1.0" encoding="utf-8"?>
 <p:sld xmlns:a="http://schemas.openxmlformats.org/drawingml/2006/main" xmlns:r="http://schemas.openxmlformats.org/officeDocument/2006/relationships" xmlns:p="http://schemas.openxmlformats.org/presentationml/2006/main">
   <p:cSld>
     <p:spTree>
@@ -13224,7 +13421,7 @@
         <p:spPr>
           <a:xfrm>
             <a:off x="502920" y="566928"/>
-            <a:ext cx="11201400" cy="777240"/>
+            <a:ext cx="11201400" cy="353943"/>
           </a:xfrm>
           <a:prstGeom prst="rect">
             <a:avLst/>
@@ -13239,27 +13436,81 @@
           <a:p>
             <a:pPr algn="l"/>
             <a:r>
-              <a:rPr sz="2300" b="0" i="0">
+              <a:rPr sz="2300" b="0" i="0" dirty="0">
                 <a:solidFill>
                   <a:srgbClr val="000000"/>
                 </a:solidFill>
                 <a:latin typeface="Georgia"/>
               </a:rPr>
-              <a:t>44% of Vestal Pro buyers were new to Salomon, acquired at half their early value</a:t>
-            </a:r>
-          </a:p>
-        </p:txBody>
-      </p:sp>
-      <p:sp>
-        <p:nvSpPr>
-          <p:cNvPr id="4" name="TextBox 3"/>
+              <a:t>4</a:t>
+            </a:r>
+            <a:r>
+              <a:rPr lang="en-US" sz="2300" b="0" i="0" dirty="0">
+                <a:solidFill>
+                  <a:srgbClr val="000000"/>
+                </a:solidFill>
+                <a:latin typeface="Georgia"/>
+              </a:rPr>
+              <a:t>0</a:t>
+            </a:r>
+            <a:r>
+              <a:rPr sz="2300" b="0" i="0" dirty="0">
+                <a:solidFill>
+                  <a:srgbClr val="000000"/>
+                </a:solidFill>
+                <a:latin typeface="Georgia"/>
+              </a:rPr>
+              <a:t>% of Vestal Pro </a:t>
+            </a:r>
+            <a:r>
+              <a:rPr lang="en-US" sz="2300" b="0" i="0" dirty="0">
+                <a:solidFill>
+                  <a:srgbClr val="000000"/>
+                </a:solidFill>
+                <a:latin typeface="Georgia"/>
+              </a:rPr>
+              <a:t>buyers</a:t>
+            </a:r>
+            <a:r>
+              <a:rPr sz="2300" b="0" i="0" dirty="0">
+                <a:solidFill>
+                  <a:srgbClr val="000000"/>
+                </a:solidFill>
+                <a:latin typeface="Georgia"/>
+              </a:rPr>
+              <a:t> were new to Salomon</a:t>
+            </a:r>
+            <a:r>
+              <a:rPr lang="en-US" sz="2300" dirty="0">
+                <a:solidFill>
+                  <a:srgbClr val="000000"/>
+                </a:solidFill>
+                <a:latin typeface="Georgia"/>
+              </a:rPr>
+              <a:t>. A</a:t>
+            </a:r>
+            <a:r>
+              <a:rPr sz="2300" b="0" i="0" dirty="0">
+                <a:solidFill>
+                  <a:srgbClr val="000000"/>
+                </a:solidFill>
+                <a:latin typeface="Georgia"/>
+              </a:rPr>
+              <a:t>cquired at half early value</a:t>
+            </a:r>
+          </a:p>
+        </p:txBody>
+      </p:sp>
+      <p:sp>
+        <p:nvSpPr>
+          <p:cNvPr id="8" name="TextBox 7"/>
           <p:cNvSpPr txBox="1"/>
           <p:nvPr/>
         </p:nvSpPr>
         <p:spPr>
           <a:xfrm>
-            <a:off x="502920" y="1481328"/>
-            <a:ext cx="3383280" cy="274320"/>
+            <a:off x="4343400" y="1481328"/>
+            <a:ext cx="3474720" cy="153888"/>
           </a:xfrm>
           <a:prstGeom prst="rect">
             <a:avLst/>
@@ -13274,195 +13525,29 @@
           <a:p>
             <a:pPr algn="l"/>
             <a:r>
-              <a:rPr sz="1000" b="1" i="0">
+              <a:rPr sz="1000" b="1" i="0" dirty="0">
                 <a:solidFill>
                   <a:srgbClr val="757575"/>
                 </a:solidFill>
                 <a:latin typeface="Arial"/>
               </a:rPr>
-              <a:t>VESTAL PRO BUYER MIX (N = 1,335)</a:t>
-            </a:r>
-          </a:p>
-        </p:txBody>
-      </p:sp>
-      <p:graphicFrame>
-        <p:nvGraphicFramePr>
-          <p:cNvPr id="5" name="Chart 4"/>
-          <p:cNvGraphicFramePr>
-            <a:graphicFrameLocks noGrp="1"/>
-          </p:cNvGraphicFramePr>
-          <p:nvPr/>
-        </p:nvGraphicFramePr>
-        <p:xfrm>
-          <a:off x="502920" y="1828800"/>
-          <a:ext cx="3383280" cy="3383280"/>
-        </p:xfrm>
-        <a:graphic>
-          <a:graphicData uri="http://schemas.openxmlformats.org/drawingml/2006/chart">
-            <c:chart xmlns:c="http://schemas.openxmlformats.org/drawingml/2006/chart" xmlns:r="http://schemas.openxmlformats.org/officeDocument/2006/relationships" r:id="rId2"/>
-          </a:graphicData>
-        </a:graphic>
-      </p:graphicFrame>
-      <p:sp>
-        <p:nvSpPr>
-          <p:cNvPr id="6" name="TextBox 5"/>
-          <p:cNvSpPr txBox="1"/>
-          <p:nvPr/>
-        </p:nvSpPr>
-        <p:spPr>
-          <a:xfrm>
-            <a:off x="502920" y="3246120"/>
-            <a:ext cx="3383280" cy="640080"/>
-          </a:xfrm>
-          <a:prstGeom prst="rect">
-            <a:avLst/>
-          </a:prstGeom>
-          <a:noFill/>
-        </p:spPr>
-        <p:txBody>
-          <a:bodyPr wrap="square" lIns="0" tIns="0" rIns="0" bIns="0" anchor="t">
-            <a:spAutoFit/>
-          </a:bodyPr>
-          <a:lstStyle/>
-          <a:p>
-            <a:pPr algn="ctr">
-              <a:lnSpc>
-                <a:spcPct val="95000"/>
-              </a:lnSpc>
-            </a:pPr>
-            <a:r>
-              <a:rPr sz="2600" b="1" i="0">
-                <a:solidFill>
-                  <a:srgbClr val="000000"/>
-                </a:solidFill>
-                <a:latin typeface="Arial"/>
-              </a:rPr>
-              <a:t>44%</a:t>
-            </a:r>
-          </a:p>
-          <a:p>
-            <a:pPr algn="ctr">
-              <a:lnSpc>
-                <a:spcPct val="95000"/>
-              </a:lnSpc>
-            </a:pPr>
-            <a:r>
-              <a:rPr sz="1200" b="0" i="0">
+              <a:t>ACQUISITION</a:t>
+            </a:r>
+            <a:r>
+              <a:rPr lang="en-US" sz="1000" b="1" i="0" dirty="0">
                 <a:solidFill>
                   <a:srgbClr val="757575"/>
                 </a:solidFill>
                 <a:latin typeface="Arial"/>
               </a:rPr>
-              <a:t>new</a:t>
-            </a:r>
-          </a:p>
-        </p:txBody>
-      </p:sp>
-      <p:sp>
-        <p:nvSpPr>
-          <p:cNvPr id="7" name="TextBox 6"/>
-          <p:cNvSpPr txBox="1"/>
-          <p:nvPr/>
-        </p:nvSpPr>
-        <p:spPr>
-          <a:xfrm>
-            <a:off x="502920" y="5303520"/>
-            <a:ext cx="3383280" cy="548640"/>
-          </a:xfrm>
-          <a:prstGeom prst="rect">
-            <a:avLst/>
-          </a:prstGeom>
-          <a:noFill/>
-        </p:spPr>
-        <p:txBody>
-          <a:bodyPr wrap="square" lIns="0" tIns="0" rIns="0" bIns="0" anchor="t">
-            <a:spAutoFit/>
-          </a:bodyPr>
-          <a:lstStyle/>
-          <a:p>
-            <a:pPr algn="ctr">
-              <a:spcAft>
-                <a:spcPts val="300"/>
-              </a:spcAft>
-            </a:pPr>
-            <a:r>
-              <a:rPr sz="1100" b="1" i="0">
-                <a:solidFill>
-                  <a:srgbClr val="0057B8"/>
-                </a:solidFill>
-                <a:latin typeface="Arial"/>
-              </a:rPr>
-              <a:t>New 590 · </a:t>
-            </a:r>
-            <a:r>
-              <a:rPr sz="1100" b="1" i="0">
-                <a:solidFill>
-                  <a:srgbClr val="757575"/>
-                </a:solidFill>
-                <a:latin typeface="Arial"/>
-              </a:rPr>
-              <a:t>Existing 745</a:t>
-            </a:r>
-          </a:p>
-          <a:p>
-            <a:pPr algn="ctr">
-              <a:spcAft>
-                <a:spcPts val="300"/>
-              </a:spcAft>
-            </a:pPr>
-            <a:r>
-              <a:rPr sz="1050" b="0" i="0">
-                <a:solidFill>
-                  <a:srgbClr val="757575"/>
-                </a:solidFill>
-                <a:latin typeface="Arial"/>
-              </a:rPr>
-              <a:t>Success criterion ≥ 25% · </a:t>
-            </a:r>
-            <a:r>
-              <a:rPr sz="1050" b="1" i="0">
-                <a:solidFill>
-                  <a:srgbClr val="1F7A4D"/>
-                </a:solidFill>
-                <a:latin typeface="Arial"/>
-              </a:rPr>
-              <a:t>PASS</a:t>
-            </a:r>
-          </a:p>
-        </p:txBody>
-      </p:sp>
-      <p:sp>
-        <p:nvSpPr>
-          <p:cNvPr id="8" name="TextBox 7"/>
-          <p:cNvSpPr txBox="1"/>
-          <p:nvPr/>
-        </p:nvSpPr>
-        <p:spPr>
-          <a:xfrm>
-            <a:off x="4343400" y="1481328"/>
-            <a:ext cx="3474720" cy="274320"/>
-          </a:xfrm>
-          <a:prstGeom prst="rect">
-            <a:avLst/>
-          </a:prstGeom>
-          <a:noFill/>
-        </p:spPr>
-        <p:txBody>
-          <a:bodyPr wrap="square" lIns="0" tIns="0" rIns="0" bIns="0" anchor="t">
-            <a:spAutoFit/>
-          </a:bodyPr>
-          <a:lstStyle/>
-          <a:p>
-            <a:pPr algn="l"/>
-            <a:r>
-              <a:rPr sz="1000" b="1" i="0">
-                <a:solidFill>
-                  <a:srgbClr val="757575"/>
-                </a:solidFill>
-                <a:latin typeface="Arial"/>
-              </a:rPr>
-              <a:t>ACQUISITION ECONOMICS</a:t>
-            </a:r>
+              <a:t> METRICS</a:t>
+            </a:r>
+            <a:endParaRPr sz="1000" b="1" i="0" dirty="0">
+              <a:solidFill>
+                <a:srgbClr val="757575"/>
+              </a:solidFill>
+              <a:latin typeface="Arial"/>
+            </a:endParaRPr>
           </a:p>
         </p:txBody>
       </p:sp>
@@ -13475,7 +13560,7 @@
         <p:spPr>
           <a:xfrm>
             <a:off x="4343400" y="1847088"/>
-            <a:ext cx="3474720" cy="914400"/>
+            <a:ext cx="3474720" cy="510396"/>
           </a:xfrm>
           <a:prstGeom prst="rect">
             <a:avLst/>
@@ -13497,16 +13582,34 @@
               </a:spcAft>
             </a:pPr>
             <a:r>
-              <a:rPr sz="2100" b="1" i="0">
+              <a:rPr sz="2100" b="1" i="0" dirty="0">
                 <a:solidFill>
                   <a:srgbClr val="333333"/>
                 </a:solidFill>
                 <a:latin typeface="Arial"/>
               </a:rPr>
-              <a:t>$104   </a:t>
-            </a:r>
-            <a:r>
-              <a:rPr sz="1200" b="1" i="0">
+              <a:t>$10</a:t>
+            </a:r>
+            <a:r>
+              <a:rPr lang="en-US" sz="2100" b="1" i="0" dirty="0">
+                <a:solidFill>
+                  <a:srgbClr val="333333"/>
+                </a:solidFill>
+                <a:latin typeface="Arial"/>
+              </a:rPr>
+              <a:t>2</a:t>
+            </a:r>
+            <a:r>
+              <a:rPr sz="2100" b="1" i="0" dirty="0">
+                <a:solidFill>
+                  <a:srgbClr val="333333"/>
+                </a:solidFill>
+                <a:latin typeface="Arial"/>
+              </a:rPr>
+              <a:t>   </a:t>
+            </a:r>
+            <a:r>
+              <a:rPr sz="1200" b="1" i="0" dirty="0">
                 <a:solidFill>
                   <a:srgbClr val="333333"/>
                 </a:solidFill>
@@ -13525,13 +13628,31 @@
               </a:spcAft>
             </a:pPr>
             <a:r>
-              <a:rPr sz="1050" b="0" i="0">
+              <a:rPr sz="1050" b="0" i="0" dirty="0">
                 <a:solidFill>
                   <a:srgbClr val="757575"/>
                 </a:solidFill>
                 <a:latin typeface="Arial"/>
               </a:rPr>
-              <a:t>$155.8K spend ÷ 1,499 new customers</a:t>
+              <a:t>$155.8K spend ÷ </a:t>
+            </a:r>
+            <a:r>
+              <a:rPr lang="en-US" sz="1050" b="0" i="0" dirty="0">
+                <a:solidFill>
+                  <a:srgbClr val="757575"/>
+                </a:solidFill>
+                <a:latin typeface="Arial"/>
+              </a:rPr>
+              <a:t>730 </a:t>
+            </a:r>
+            <a:r>
+              <a:rPr sz="1050" b="0" i="0" dirty="0">
+                <a:solidFill>
+                  <a:srgbClr val="757575"/>
+                </a:solidFill>
+                <a:latin typeface="Arial"/>
+              </a:rPr>
+              <a:t>new customers</a:t>
             </a:r>
           </a:p>
         </p:txBody>
@@ -13545,7 +13666,7 @@
         <p:spPr>
           <a:xfrm>
             <a:off x="4343400" y="2834640"/>
-            <a:ext cx="3474720" cy="914400"/>
+            <a:ext cx="3474720" cy="510396"/>
           </a:xfrm>
           <a:prstGeom prst="rect">
             <a:avLst/>
@@ -13567,16 +13688,34 @@
               </a:spcAft>
             </a:pPr>
             <a:r>
-              <a:rPr sz="2100" b="1" i="0">
+              <a:rPr sz="2100" b="1" i="0" dirty="0">
                 <a:solidFill>
                   <a:srgbClr val="333333"/>
                 </a:solidFill>
                 <a:latin typeface="Arial"/>
               </a:rPr>
-              <a:t>$130   </a:t>
-            </a:r>
-            <a:r>
-              <a:rPr sz="1200" b="1" i="0">
+              <a:t>$1</a:t>
+            </a:r>
+            <a:r>
+              <a:rPr lang="en-US" sz="2100" b="1" i="0" dirty="0">
+                <a:solidFill>
+                  <a:srgbClr val="333333"/>
+                </a:solidFill>
+                <a:latin typeface="Arial"/>
+              </a:rPr>
+              <a:t>29</a:t>
+            </a:r>
+            <a:r>
+              <a:rPr sz="2100" b="1" i="0" dirty="0">
+                <a:solidFill>
+                  <a:srgbClr val="333333"/>
+                </a:solidFill>
+                <a:latin typeface="Arial"/>
+              </a:rPr>
+              <a:t>   </a:t>
+            </a:r>
+            <a:r>
+              <a:rPr sz="1200" b="1" i="0" dirty="0">
                 <a:solidFill>
                   <a:srgbClr val="333333"/>
                 </a:solidFill>
@@ -13595,7 +13734,7 @@
               </a:spcAft>
             </a:pPr>
             <a:r>
-              <a:rPr sz="1050" b="0" i="0">
+              <a:rPr sz="1050" b="0" i="0" dirty="0">
                 <a:solidFill>
                   <a:srgbClr val="757575"/>
                 </a:solidFill>
@@ -13615,7 +13754,7 @@
         <p:spPr>
           <a:xfrm>
             <a:off x="4343400" y="3822191"/>
-            <a:ext cx="3474720" cy="914400"/>
+            <a:ext cx="3474720" cy="510396"/>
           </a:xfrm>
           <a:prstGeom prst="rect">
             <a:avLst/>
@@ -13637,16 +13776,34 @@
               </a:spcAft>
             </a:pPr>
             <a:r>
-              <a:rPr sz="2100" b="1" i="0">
+              <a:rPr sz="2100" b="1" i="0" dirty="0">
                 <a:solidFill>
                   <a:srgbClr val="0057B8"/>
                 </a:solidFill>
                 <a:latin typeface="Arial"/>
               </a:rPr>
-              <a:t>$212   </a:t>
-            </a:r>
-            <a:r>
-              <a:rPr sz="1200" b="1" i="0">
+              <a:t>$</a:t>
+            </a:r>
+            <a:r>
+              <a:rPr lang="en-US" sz="2100" b="1" i="0" dirty="0">
+                <a:solidFill>
+                  <a:srgbClr val="0057B8"/>
+                </a:solidFill>
+                <a:latin typeface="Arial"/>
+              </a:rPr>
+              <a:t>188</a:t>
+            </a:r>
+            <a:r>
+              <a:rPr sz="2100" b="1" i="0" dirty="0">
+                <a:solidFill>
+                  <a:srgbClr val="0057B8"/>
+                </a:solidFill>
+                <a:latin typeface="Arial"/>
+              </a:rPr>
+              <a:t>   </a:t>
+            </a:r>
+            <a:r>
+              <a:rPr sz="1200" b="1" i="0" dirty="0">
                 <a:solidFill>
                   <a:srgbClr val="333333"/>
                 </a:solidFill>
@@ -13665,13 +13822,49 @@
               </a:spcAft>
             </a:pPr>
             <a:r>
-              <a:rPr sz="1050" b="0" i="0">
+              <a:rPr sz="1050" b="0" i="0" dirty="0">
                 <a:solidFill>
                   <a:srgbClr val="757575"/>
                 </a:solidFill>
                 <a:latin typeface="Arial"/>
               </a:rPr>
-              <a:t>revenue through May 10 · 2.0× CAC</a:t>
+              <a:t>revenue through </a:t>
+            </a:r>
+            <a:r>
+              <a:rPr lang="en-US" sz="1050" b="0" i="0" dirty="0">
+                <a:solidFill>
+                  <a:srgbClr val="757575"/>
+                </a:solidFill>
+                <a:latin typeface="Arial"/>
+              </a:rPr>
+              <a:t>June 20</a:t>
+            </a:r>
+            <a:r>
+              <a:rPr sz="1050" b="0" i="0" dirty="0">
+                <a:solidFill>
+                  <a:srgbClr val="757575"/>
+                </a:solidFill>
+                <a:latin typeface="Arial"/>
+              </a:rPr>
+              <a:t> · </a:t>
+            </a:r>
+            <a:r>
+              <a:rPr lang="en-US" sz="1050" b="0" i="0" dirty="0">
+                <a:solidFill>
+                  <a:srgbClr val="757575"/>
+                </a:solidFill>
+                <a:latin typeface="Arial"/>
+              </a:rPr>
+              <a:t>1.8</a:t>
+            </a:r>
+            <a:r>
+              <a:rPr sz="1050" b="0" i="0" dirty="0">
+                <a:solidFill>
+                  <a:srgbClr val="757575"/>
+                </a:solidFill>
+                <a:latin typeface="Arial"/>
+              </a:rPr>
+              <a:t>× CAC</a:t>
             </a:r>
           </a:p>
         </p:txBody>
@@ -13685,7 +13878,7 @@
         <p:spPr>
           <a:xfrm>
             <a:off x="4343400" y="4809744"/>
-            <a:ext cx="3474720" cy="914400"/>
+            <a:ext cx="3474720" cy="510396"/>
           </a:xfrm>
           <a:prstGeom prst="rect">
             <a:avLst/>
@@ -13707,16 +13900,25 @@
               </a:spcAft>
             </a:pPr>
             <a:r>
-              <a:rPr sz="2100" b="1" i="0">
+              <a:rPr lang="en-US" sz="2100" b="1" dirty="0">
                 <a:solidFill>
                   <a:srgbClr val="333333"/>
                 </a:solidFill>
                 <a:latin typeface="Arial"/>
               </a:rPr>
-              <a:t>27%   </a:t>
-            </a:r>
-            <a:r>
-              <a:rPr sz="1200" b="1" i="0">
+              <a:t>28.1</a:t>
+            </a:r>
+            <a:r>
+              <a:rPr sz="2100" b="1" i="0" dirty="0">
+                <a:solidFill>
+                  <a:srgbClr val="333333"/>
+                </a:solidFill>
+                <a:latin typeface="Arial"/>
+              </a:rPr>
+              <a:t>%   </a:t>
+            </a:r>
+            <a:r>
+              <a:rPr sz="1200" b="1" i="0" dirty="0">
                 <a:solidFill>
                   <a:srgbClr val="333333"/>
                 </a:solidFill>
@@ -13735,27 +13937,42 @@
               </a:spcAft>
             </a:pPr>
             <a:r>
-              <a:rPr sz="1050" b="0" i="0">
+              <a:rPr sz="1050" b="0" i="0" dirty="0">
                 <a:solidFill>
                   <a:srgbClr val="757575"/>
                 </a:solidFill>
                 <a:latin typeface="Arial"/>
               </a:rPr>
-              <a:t>repurchased within 4 weeks of flight end</a:t>
-            </a:r>
-          </a:p>
-        </p:txBody>
-      </p:sp>
-      <p:sp>
-        <p:nvSpPr>
-          <p:cNvPr id="13" name="TextBox 12"/>
+              <a:t>repurchased within 4 weeks of </a:t>
+            </a:r>
+            <a:r>
+              <a:rPr lang="en-US" sz="1050" b="0" i="0" dirty="0">
+                <a:solidFill>
+                  <a:srgbClr val="757575"/>
+                </a:solidFill>
+                <a:latin typeface="Arial"/>
+              </a:rPr>
+              <a:t>initial purchase</a:t>
+            </a:r>
+            <a:endParaRPr sz="1050" b="0" i="0" dirty="0">
+              <a:solidFill>
+                <a:srgbClr val="757575"/>
+              </a:solidFill>
+              <a:latin typeface="Arial"/>
+            </a:endParaRPr>
+          </a:p>
+        </p:txBody>
+      </p:sp>
+      <p:sp>
+        <p:nvSpPr>
+          <p:cNvPr id="16" name="TextBox 15"/>
           <p:cNvSpPr txBox="1"/>
           <p:nvPr/>
         </p:nvSpPr>
         <p:spPr>
           <a:xfrm>
-            <a:off x="4343400" y="5760720"/>
-            <a:ext cx="3474720" cy="457200"/>
+            <a:off x="8183879" y="5074920"/>
+            <a:ext cx="3520440" cy="749308"/>
           </a:xfrm>
           <a:prstGeom prst="rect">
             <a:avLst/>
@@ -13768,97 +13985,36 @@
           </a:bodyPr>
           <a:lstStyle/>
           <a:p>
-            <a:pPr algn="l">
+            <a:pPr>
               <a:lnSpc>
-                <a:spcPct val="105000"/>
+                <a:spcPct val="108000"/>
               </a:lnSpc>
+              <a:spcAft>
+                <a:spcPts val="500"/>
+              </a:spcAft>
             </a:pPr>
             <a:r>
-              <a:rPr sz="1000" b="0" i="1">
-                <a:solidFill>
-                  <a:srgbClr val="757575"/>
-                </a:solidFill>
-                <a:latin typeface="Arial"/>
-              </a:rPr>
-              <a:t>Full LTV needs cohort history beyond this window; early value already covers CAC twice over.</a:t>
-            </a:r>
-          </a:p>
-        </p:txBody>
-      </p:sp>
-      <p:sp>
-        <p:nvSpPr>
-          <p:cNvPr id="14" name="TextBox 13"/>
-          <p:cNvSpPr txBox="1"/>
-          <p:nvPr/>
-        </p:nvSpPr>
-        <p:spPr>
-          <a:xfrm>
-            <a:off x="8183879" y="1481328"/>
-            <a:ext cx="3520440" cy="274320"/>
-          </a:xfrm>
-          <a:prstGeom prst="rect">
-            <a:avLst/>
-          </a:prstGeom>
-          <a:noFill/>
-        </p:spPr>
-        <p:txBody>
-          <a:bodyPr wrap="square" lIns="0" tIns="0" rIns="0" bIns="0" anchor="t">
-            <a:spAutoFit/>
-          </a:bodyPr>
-          <a:lstStyle/>
-          <a:p>
-            <a:pPr algn="l"/>
-            <a:r>
-              <a:rPr sz="1000" b="1" i="0">
-                <a:solidFill>
-                  <a:srgbClr val="757575"/>
-                </a:solidFill>
-                <a:latin typeface="Arial"/>
-              </a:rPr>
-              <a:t>DATABASE ADDS PER DAY</a:t>
-            </a:r>
-          </a:p>
-        </p:txBody>
-      </p:sp>
-      <p:graphicFrame>
-        <p:nvGraphicFramePr>
-          <p:cNvPr id="15" name="Chart 14"/>
-          <p:cNvGraphicFramePr>
-            <a:graphicFrameLocks noGrp="1"/>
-          </p:cNvGraphicFramePr>
-          <p:nvPr/>
-        </p:nvGraphicFramePr>
-        <p:xfrm>
-          <a:off x="8046719" y="1828800"/>
-          <a:ext cx="3657600" cy="3108960"/>
-        </p:xfrm>
-        <a:graphic>
-          <a:graphicData uri="http://schemas.openxmlformats.org/drawingml/2006/chart">
-            <c:chart xmlns:c="http://schemas.openxmlformats.org/drawingml/2006/chart" xmlns:r="http://schemas.openxmlformats.org/officeDocument/2006/relationships" r:id="rId3"/>
-          </a:graphicData>
-        </a:graphic>
-      </p:graphicFrame>
-      <p:sp>
-        <p:nvSpPr>
-          <p:cNvPr id="16" name="TextBox 15"/>
-          <p:cNvSpPr txBox="1"/>
-          <p:nvPr/>
-        </p:nvSpPr>
-        <p:spPr>
-          <a:xfrm>
-            <a:off x="8183879" y="5074920"/>
-            <a:ext cx="3520440" cy="1188720"/>
-          </a:xfrm>
-          <a:prstGeom prst="rect">
-            <a:avLst/>
-          </a:prstGeom>
-          <a:noFill/>
-        </p:spPr>
-        <p:txBody>
-          <a:bodyPr wrap="square" lIns="0" tIns="0" rIns="0" bIns="0" anchor="t">
-            <a:spAutoFit/>
-          </a:bodyPr>
-          <a:lstStyle/>
+              <a:rPr lang="en-US" sz="1050" dirty="0">
+                <a:solidFill>
+                  <a:schemeClr val="tx2">
+                    <a:lumMod val="50000"/>
+                    <a:lumOff val="50000"/>
+                  </a:schemeClr>
+                </a:solidFill>
+                <a:latin typeface="Arial"/>
+              </a:rPr>
+              <a:t>1,361 email and 678 SMS adds during the 20-day campaign.</a:t>
+            </a:r>
+            <a:endParaRPr sz="1050" b="0" i="0" dirty="0">
+              <a:solidFill>
+                <a:schemeClr val="tx2">
+                  <a:lumMod val="50000"/>
+                  <a:lumOff val="50000"/>
+                </a:schemeClr>
+              </a:solidFill>
+              <a:latin typeface="Arial"/>
+            </a:endParaRPr>
+          </a:p>
           <a:p>
             <a:pPr algn="l">
               <a:lnSpc>
@@ -13869,33 +14025,26 @@
               </a:spcAft>
             </a:pPr>
             <a:r>
-              <a:rPr sz="1050" b="0" i="0">
-                <a:solidFill>
-                  <a:srgbClr val="333333"/>
-                </a:solidFill>
-                <a:latin typeface="Arial"/>
-              </a:rPr>
-              <a:t>Email +34% · SMS +40% vs pre-period run-rate → 2,776 email and 1,447 SMS adds in six weeks.</a:t>
-            </a:r>
-          </a:p>
-          <a:p>
-            <a:pPr algn="l">
-              <a:lnSpc>
-                <a:spcPct val="108000"/>
-              </a:lnSpc>
-              <a:spcAft>
-                <a:spcPts val="500"/>
-              </a:spcAft>
-            </a:pPr>
-            <a:r>
-              <a:rPr sz="1050" b="0" i="0">
-                <a:solidFill>
-                  <a:srgbClr val="333333"/>
-                </a:solidFill>
-                <a:latin typeface="Arial"/>
-              </a:rPr>
-              <a:t>New Vestal Pro buyers opt in at 77% email / 47% SMS vs a 56% / 28% site average.</a:t>
-            </a:r>
+              <a:rPr lang="en-US" sz="1050" dirty="0">
+                <a:solidFill>
+                  <a:schemeClr val="tx2">
+                    <a:lumMod val="50000"/>
+                    <a:lumOff val="50000"/>
+                  </a:schemeClr>
+                </a:solidFill>
+                <a:latin typeface="Arial"/>
+              </a:rPr>
+              <a:t>New Vestal Pro buyers opt in at 72% email / 40% SMS, vs 51% / 24% for existing buyers.</a:t>
+            </a:r>
+            <a:endParaRPr sz="1050" b="0" i="0" dirty="0">
+              <a:solidFill>
+                <a:schemeClr val="tx2">
+                  <a:lumMod val="50000"/>
+                  <a:lumOff val="50000"/>
+                </a:schemeClr>
+              </a:solidFill>
+              <a:latin typeface="Arial"/>
+            </a:endParaRPr>
           </a:p>
         </p:txBody>
       </p:sp>
@@ -13908,7 +14057,7 @@
         <p:spPr>
           <a:xfrm>
             <a:off x="502920" y="6510528"/>
-            <a:ext cx="10515600" cy="274320"/>
+            <a:ext cx="10515600" cy="123111"/>
           </a:xfrm>
           <a:prstGeom prst="rect">
             <a:avLst/>
@@ -13923,13 +14072,13 @@
           <a:p>
             <a:pPr algn="l"/>
             <a:r>
-              <a:rPr sz="800" b="0" i="0">
+              <a:rPr sz="800" b="0" i="0" dirty="0">
                 <a:solidFill>
                   <a:srgbClr val="757575"/>
                 </a:solidFill>
                 <a:latin typeface="Arial"/>
               </a:rPr>
-              <a:t>Salomon NA eCommerce · Vestal Pro launch readout · Illustrative synthetic case data · No numeric CAC or database targets were set pre-launch — set them next flight</a:t>
+              <a:t>Salomon NA eCommerce · Vestal Pro launch readout</a:t>
             </a:r>
           </a:p>
         </p:txBody>
@@ -13972,6 +14121,66 @@
       <p:pic>
         <p:nvPicPr>
           <p:cNvPr id="19" name="Picture 18" descr="salomon_wordmark_black.png"/>
+          <p:cNvPicPr>
+            <a:picLocks noChangeAspect="1"/>
+          </p:cNvPicPr>
+          <p:nvPr/>
+        </p:nvPicPr>
+        <p:blipFill>
+          <a:blip r:embed="rId2"/>
+          <a:stretch>
+            <a:fillRect/>
+          </a:stretch>
+        </p:blipFill>
+        <p:spPr>
+          <a:xfrm>
+            <a:off x="10698480" y="292608"/>
+            <a:ext cx="960120" cy="110013"/>
+          </a:xfrm>
+          <a:prstGeom prst="rect">
+            <a:avLst/>
+          </a:prstGeom>
+        </p:spPr>
+      </p:pic>
+      <p:pic>
+        <p:nvPicPr>
+          <p:cNvPr id="21" name="Picture 20" descr="The image displays a pie chart indicating that 25% of Vestal Pro buyers choose to pass, with new Salomon products being more popular at 268 and existing products at 399.&#10;&#10;AI-generated content may be incorrect.">
+            <a:extLst>
+              <a:ext uri="{FF2B5EF4-FFF2-40B4-BE49-F238E27FC236}">
+                <a16:creationId xmlns:a16="http://schemas.microsoft.com/office/drawing/2014/main" id="{EDD06685-1F8D-CD67-638F-B32B434A1A09}"/>
+              </a:ext>
+            </a:extLst>
+          </p:cNvPr>
+          <p:cNvPicPr>
+            <a:picLocks noChangeAspect="1"/>
+          </p:cNvPicPr>
+          <p:nvPr/>
+        </p:nvPicPr>
+        <p:blipFill>
+          <a:blip r:embed="rId3"/>
+          <a:stretch>
+            <a:fillRect/>
+          </a:stretch>
+        </p:blipFill>
+        <p:spPr>
+          <a:xfrm>
+            <a:off x="-1" y="1408656"/>
+            <a:ext cx="4313947" cy="3805518"/>
+          </a:xfrm>
+          <a:prstGeom prst="rect">
+            <a:avLst/>
+          </a:prstGeom>
+        </p:spPr>
+      </p:pic>
+      <p:pic>
+        <p:nvPicPr>
+          <p:cNvPr id="23" name="Picture 22" descr="The diagram illustrates an increasing trend in daily database additions, with percentages rising from +35% to +37% and a significant increase in email activity, contrasted with a smaller growth in SMS engagement.&#10;&#10;AI-generated content may be incorrect.">
+            <a:extLst>
+              <a:ext uri="{FF2B5EF4-FFF2-40B4-BE49-F238E27FC236}">
+                <a16:creationId xmlns:a16="http://schemas.microsoft.com/office/drawing/2014/main" id="{8A7433B0-14CE-40AB-7678-59C5DDFC7F44}"/>
+              </a:ext>
+            </a:extLst>
+          </p:cNvPr>
           <p:cNvPicPr>
             <a:picLocks noChangeAspect="1"/>
           </p:cNvPicPr>
@@ -13985,8 +14194,8 @@
         </p:blipFill>
         <p:spPr>
           <a:xfrm>
-            <a:off x="10698480" y="292608"/>
-            <a:ext cx="960120" cy="110013"/>
+            <a:off x="7384277" y="1481327"/>
+            <a:ext cx="4530844" cy="3497245"/>
           </a:xfrm>
           <a:prstGeom prst="rect">
             <a:avLst/>
@@ -14006,7 +14215,13 @@
   <p:cSld>
     <p:spTree>
       <p:nvGrpSpPr>
-        <p:cNvPr id="1" name=""/>
+        <p:cNvPr id="1" name="">
+          <a:extLst>
+            <a:ext uri="{FF2B5EF4-FFF2-40B4-BE49-F238E27FC236}">
+              <a16:creationId xmlns:a16="http://schemas.microsoft.com/office/drawing/2014/main" id="{8729F1A2-49D4-AE4A-1D0A-23C7A225436B}"/>
+            </a:ext>
+          </a:extLst>
+        </p:cNvPr>
         <p:cNvGrpSpPr/>
         <p:nvPr/>
       </p:nvGrpSpPr>
@@ -14020,14 +14235,20 @@
       </p:grpSpPr>
       <p:sp>
         <p:nvSpPr>
-          <p:cNvPr id="2" name="TextBox 1"/>
+          <p:cNvPr id="2" name="TextBox 1">
+            <a:extLst>
+              <a:ext uri="{FF2B5EF4-FFF2-40B4-BE49-F238E27FC236}">
+                <a16:creationId xmlns:a16="http://schemas.microsoft.com/office/drawing/2014/main" id="{D1AF255B-BC9F-3F24-461F-7B00C6BE6B54}"/>
+              </a:ext>
+            </a:extLst>
+          </p:cNvPr>
           <p:cNvSpPr txBox="1"/>
           <p:nvPr/>
         </p:nvSpPr>
         <p:spPr>
           <a:xfrm>
             <a:off x="502920" y="292608"/>
-            <a:ext cx="11155680" cy="274320"/>
+            <a:ext cx="11155680" cy="161583"/>
           </a:xfrm>
           <a:prstGeom prst="rect">
             <a:avLst/>
@@ -14042,27 +14263,48 @@
           <a:p>
             <a:pPr algn="l"/>
             <a:r>
-              <a:rPr sz="1050" b="1" i="0">
+              <a:rPr sz="1050" b="1" i="0" dirty="0">
                 <a:solidFill>
                   <a:srgbClr val="757575"/>
                 </a:solidFill>
                 <a:latin typeface="Arial"/>
               </a:rPr>
-              <a:t>HALO EFFECT</a:t>
-            </a:r>
-          </a:p>
-        </p:txBody>
-      </p:sp>
-      <p:sp>
-        <p:nvSpPr>
-          <p:cNvPr id="3" name="TextBox 2"/>
+              <a:t>CUSTOMER ACQUISITION</a:t>
+            </a:r>
+            <a:r>
+              <a:rPr lang="en-US" sz="1050" b="1" i="0" dirty="0">
+                <a:solidFill>
+                  <a:srgbClr val="757575"/>
+                </a:solidFill>
+                <a:latin typeface="Arial"/>
+              </a:rPr>
+              <a:t> AND LTV</a:t>
+            </a:r>
+            <a:endParaRPr sz="1050" b="1" i="0" dirty="0">
+              <a:solidFill>
+                <a:srgbClr val="757575"/>
+              </a:solidFill>
+              <a:latin typeface="Arial"/>
+            </a:endParaRPr>
+          </a:p>
+        </p:txBody>
+      </p:sp>
+      <p:sp>
+        <p:nvSpPr>
+          <p:cNvPr id="3" name="TextBox 2">
+            <a:extLst>
+              <a:ext uri="{FF2B5EF4-FFF2-40B4-BE49-F238E27FC236}">
+                <a16:creationId xmlns:a16="http://schemas.microsoft.com/office/drawing/2014/main" id="{D53D5D81-D5F6-4AAE-1E2A-8080FB2F4082}"/>
+              </a:ext>
+            </a:extLst>
+          </p:cNvPr>
           <p:cNvSpPr txBox="1"/>
           <p:nvPr/>
         </p:nvSpPr>
         <p:spPr>
           <a:xfrm>
             <a:off x="502920" y="566928"/>
-            <a:ext cx="11201400" cy="777240"/>
+            <a:ext cx="11201400" cy="353943"/>
           </a:xfrm>
           <a:prstGeom prst="rect">
             <a:avLst/>
@@ -14077,27 +14319,39 @@
           <a:p>
             <a:pPr algn="l"/>
             <a:r>
-              <a:rPr sz="2300" b="0" i="0">
+              <a:rPr lang="en-US" sz="2300" b="0" i="0" dirty="0">
                 <a:solidFill>
                   <a:srgbClr val="000000"/>
                 </a:solidFill>
                 <a:latin typeface="Georgia"/>
               </a:rPr>
-              <a:t>Adjacent categories lifted +9%, but as standalone purchases, not bigger baskets</a:t>
-            </a:r>
-          </a:p>
-        </p:txBody>
-      </p:sp>
-      <p:sp>
-        <p:nvSpPr>
-          <p:cNvPr id="4" name="TextBox 3"/>
+              <a:t>Projected 24-month value of ~$387 per new customer; 3.8× acquisition cost</a:t>
+            </a:r>
+            <a:endParaRPr sz="2300" b="0" i="0" dirty="0">
+              <a:solidFill>
+                <a:srgbClr val="000000"/>
+              </a:solidFill>
+              <a:latin typeface="Georgia"/>
+            </a:endParaRPr>
+          </a:p>
+        </p:txBody>
+      </p:sp>
+      <p:sp>
+        <p:nvSpPr>
+          <p:cNvPr id="17" name="TextBox 16">
+            <a:extLst>
+              <a:ext uri="{FF2B5EF4-FFF2-40B4-BE49-F238E27FC236}">
+                <a16:creationId xmlns:a16="http://schemas.microsoft.com/office/drawing/2014/main" id="{3A7D67C6-323C-82EF-4AC6-94AA08868144}"/>
+              </a:ext>
+            </a:extLst>
+          </p:cNvPr>
           <p:cNvSpPr txBox="1"/>
           <p:nvPr/>
         </p:nvSpPr>
         <p:spPr>
           <a:xfrm>
-            <a:off x="502920" y="1481328"/>
-            <a:ext cx="6035040" cy="274320"/>
+            <a:off x="502920" y="6510528"/>
+            <a:ext cx="10515600" cy="123111"/>
           </a:xfrm>
           <a:prstGeom prst="rect">
             <a:avLst/>
@@ -14112,45 +14366,33 @@
           <a:p>
             <a:pPr algn="l"/>
             <a:r>
-              <a:rPr sz="1000" b="1" i="0">
+              <a:rPr sz="800" b="0" i="0" dirty="0">
                 <a:solidFill>
                   <a:srgbClr val="757575"/>
                 </a:solidFill>
                 <a:latin typeface="Arial"/>
               </a:rPr>
-              <a:t>ADJACENT-CATEGORY REVENUE VS EXPECTED BASELINE, ACTIVE FLIGHT</a:t>
-            </a:r>
-          </a:p>
-        </p:txBody>
-      </p:sp>
-      <p:graphicFrame>
-        <p:nvGraphicFramePr>
-          <p:cNvPr id="5" name="Chart 4"/>
-          <p:cNvGraphicFramePr>
-            <a:graphicFrameLocks noGrp="1"/>
-          </p:cNvGraphicFramePr>
-          <p:nvPr/>
-        </p:nvGraphicFramePr>
-        <p:xfrm>
-          <a:off x="365760" y="1828800"/>
-          <a:ext cx="6309360" cy="4023360"/>
-        </p:xfrm>
-        <a:graphic>
-          <a:graphicData uri="http://schemas.openxmlformats.org/drawingml/2006/chart">
-            <c:chart xmlns:c="http://schemas.openxmlformats.org/drawingml/2006/chart" xmlns:r="http://schemas.openxmlformats.org/officeDocument/2006/relationships" r:id="rId2"/>
-          </a:graphicData>
-        </a:graphic>
-      </p:graphicFrame>
-      <p:sp>
-        <p:nvSpPr>
-          <p:cNvPr id="6" name="TextBox 5"/>
+              <a:t>Salomon NA eCommerce · Vestal Pro launch readout</a:t>
+            </a:r>
+          </a:p>
+        </p:txBody>
+      </p:sp>
+      <p:sp>
+        <p:nvSpPr>
+          <p:cNvPr id="18" name="TextBox 17">
+            <a:extLst>
+              <a:ext uri="{FF2B5EF4-FFF2-40B4-BE49-F238E27FC236}">
+                <a16:creationId xmlns:a16="http://schemas.microsoft.com/office/drawing/2014/main" id="{063D1226-9BE7-41CB-399A-C53415DF9AB7}"/>
+              </a:ext>
+            </a:extLst>
+          </p:cNvPr>
           <p:cNvSpPr txBox="1"/>
           <p:nvPr/>
         </p:nvSpPr>
         <p:spPr>
           <a:xfrm>
-            <a:off x="640080" y="5806440"/>
-            <a:ext cx="5852160" cy="320040"/>
+            <a:off x="11292840" y="6510528"/>
+            <a:ext cx="411480" cy="274320"/>
           </a:xfrm>
           <a:prstGeom prst="rect">
             <a:avLst/>
@@ -14163,269 +14405,28 @@
           </a:bodyPr>
           <a:lstStyle/>
           <a:p>
-            <a:pPr algn="l"/>
-            <a:r>
-              <a:rPr sz="1000" b="0" i="0">
+            <a:pPr algn="r"/>
+            <a:r>
+              <a:rPr sz="800" b="0" i="0">
                 <a:solidFill>
                   <a:srgbClr val="757575"/>
                 </a:solidFill>
                 <a:latin typeface="Arial"/>
               </a:rPr>
-              <a:t>Success criterion ≥ +5%: </a:t>
-            </a:r>
-            <a:r>
-              <a:rPr sz="1000" b="1" i="0">
-                <a:solidFill>
-                  <a:srgbClr val="1F7A4D"/>
-                </a:solidFill>
-                <a:latin typeface="Arial"/>
-              </a:rPr>
-              <a:t>PASS</a:t>
-            </a:r>
-            <a:r>
-              <a:rPr sz="1000" b="0" i="0">
-                <a:solidFill>
-                  <a:srgbClr val="757575"/>
-                </a:solidFill>
-                <a:latin typeface="Arial"/>
-              </a:rPr>
-              <a:t>  (+9.2%, 95% CI +3.0% to +15.4% · +$7.9K)</a:t>
-            </a:r>
-          </a:p>
-        </p:txBody>
-      </p:sp>
-      <p:sp>
-        <p:nvSpPr>
-          <p:cNvPr id="7" name="TextBox 6"/>
-          <p:cNvSpPr txBox="1"/>
-          <p:nvPr/>
-        </p:nvSpPr>
-        <p:spPr>
-          <a:xfrm>
-            <a:off x="7086600" y="1481328"/>
-            <a:ext cx="4572000" cy="274320"/>
-          </a:xfrm>
-          <a:prstGeom prst="rect">
-            <a:avLst/>
-          </a:prstGeom>
-          <a:noFill/>
-        </p:spPr>
-        <p:txBody>
-          <a:bodyPr wrap="square" lIns="0" tIns="0" rIns="0" bIns="0" anchor="t">
-            <a:spAutoFit/>
-          </a:bodyPr>
-          <a:lstStyle/>
-          <a:p>
-            <a:pPr algn="l"/>
-            <a:r>
-              <a:rPr sz="1000" b="1" i="0">
-                <a:solidFill>
-                  <a:srgbClr val="757575"/>
-                </a:solidFill>
-                <a:latin typeface="Arial"/>
-              </a:rPr>
-              <a:t>ATTACH RATE TO VESTAL PRO ORDERS</a:t>
-            </a:r>
-          </a:p>
-        </p:txBody>
-      </p:sp>
-      <p:sp>
-        <p:nvSpPr>
-          <p:cNvPr id="8" name="TextBox 7"/>
-          <p:cNvSpPr txBox="1"/>
-          <p:nvPr/>
-        </p:nvSpPr>
-        <p:spPr>
-          <a:xfrm>
-            <a:off x="7086600" y="1828800"/>
-            <a:ext cx="4572000" cy="868680"/>
-          </a:xfrm>
-          <a:prstGeom prst="rect">
-            <a:avLst/>
-          </a:prstGeom>
-          <a:noFill/>
-        </p:spPr>
-        <p:txBody>
-          <a:bodyPr wrap="square" lIns="0" tIns="0" rIns="0" bIns="0" anchor="t">
-            <a:spAutoFit/>
-          </a:bodyPr>
-          <a:lstStyle/>
-          <a:p>
-            <a:pPr algn="l"/>
-            <a:r>
-              <a:rPr sz="3400" b="1" i="0">
-                <a:solidFill>
-                  <a:srgbClr val="333333"/>
-                </a:solidFill>
-                <a:latin typeface="Arial"/>
-              </a:rPr>
-              <a:t>17.8%</a:t>
-            </a:r>
-            <a:r>
-              <a:rPr sz="1300" b="0" i="0">
-                <a:solidFill>
-                  <a:srgbClr val="757575"/>
-                </a:solidFill>
-                <a:latin typeface="Arial"/>
-              </a:rPr>
-              <a:t>   flat vs 18.0% pre-period</a:t>
-            </a:r>
-          </a:p>
-        </p:txBody>
-      </p:sp>
-      <p:sp>
-        <p:nvSpPr>
-          <p:cNvPr id="9" name="TextBox 8"/>
-          <p:cNvSpPr txBox="1"/>
-          <p:nvPr/>
-        </p:nvSpPr>
-        <p:spPr>
-          <a:xfrm>
-            <a:off x="7086600" y="2834640"/>
-            <a:ext cx="4572000" cy="3200400"/>
-          </a:xfrm>
-          <a:prstGeom prst="rect">
-            <a:avLst/>
-          </a:prstGeom>
-          <a:noFill/>
-        </p:spPr>
-        <p:txBody>
-          <a:bodyPr wrap="square" lIns="0" tIns="0" rIns="0" bIns="0" anchor="t">
-            <a:spAutoFit/>
-          </a:bodyPr>
-          <a:lstStyle/>
-          <a:p>
-            <a:pPr algn="l">
-              <a:lnSpc>
-                <a:spcPct val="112000"/>
-              </a:lnSpc>
-              <a:spcAft>
-                <a:spcPts val="800"/>
-              </a:spcAft>
-            </a:pPr>
-            <a:r>
-              <a:rPr sz="1150" b="0" i="0">
-                <a:solidFill>
-                  <a:srgbClr val="333333"/>
-                </a:solidFill>
-                <a:latin typeface="Arial"/>
-              </a:rPr>
-              <a:t>•  The halo arrived as standalone adjacent purchases driven by campaign traffic and awareness — not as bigger Vestal Pro baskets.</a:t>
-            </a:r>
-          </a:p>
-          <a:p>
-            <a:pPr algn="l">
-              <a:lnSpc>
-                <a:spcPct val="112000"/>
-              </a:lnSpc>
-              <a:spcAft>
-                <a:spcPts val="800"/>
-              </a:spcAft>
-            </a:pPr>
-            <a:r>
-              <a:rPr sz="1150" b="0" i="0">
-                <a:solidFill>
-                  <a:srgbClr val="333333"/>
-                </a:solidFill>
-                <a:latin typeface="Arial"/>
-              </a:rPr>
-              <a:t>•  Accessories led (+16.9%); apparel followed (+5.4%). Other footwear orders attached at the same 18% rate.</a:t>
-            </a:r>
-          </a:p>
-          <a:p>
-            <a:pPr algn="l">
-              <a:lnSpc>
-                <a:spcPct val="112000"/>
-              </a:lnSpc>
-              <a:spcAft>
-                <a:spcPts val="800"/>
-              </a:spcAft>
-            </a:pPr>
-            <a:r>
-              <a:rPr sz="1150" b="0" i="0">
-                <a:solidFill>
-                  <a:srgbClr val="333333"/>
-                </a:solidFill>
-                <a:latin typeface="Arial"/>
-              </a:rPr>
-              <a:t>•  Opportunity: PDP bundles (socks, gaiters, hydration) and CRM cross-sell journeys to convert awareness halo into basket halo.</a:t>
-            </a:r>
-          </a:p>
-        </p:txBody>
-      </p:sp>
-      <p:sp>
-        <p:nvSpPr>
-          <p:cNvPr id="10" name="TextBox 9"/>
-          <p:cNvSpPr txBox="1"/>
-          <p:nvPr/>
-        </p:nvSpPr>
-        <p:spPr>
-          <a:xfrm>
-            <a:off x="502920" y="6510528"/>
-            <a:ext cx="10515600" cy="274320"/>
-          </a:xfrm>
-          <a:prstGeom prst="rect">
-            <a:avLst/>
-          </a:prstGeom>
-          <a:noFill/>
-        </p:spPr>
-        <p:txBody>
-          <a:bodyPr wrap="square" lIns="0" tIns="0" rIns="0" bIns="0" anchor="t">
-            <a:spAutoFit/>
-          </a:bodyPr>
-          <a:lstStyle/>
-          <a:p>
-            <a:pPr algn="l"/>
-            <a:r>
-              <a:rPr sz="800" b="0" i="0">
-                <a:solidFill>
-                  <a:srgbClr val="757575"/>
-                </a:solidFill>
-                <a:latin typeface="Arial"/>
-              </a:rPr>
-              <a:t>Salomon NA eCommerce · Vestal Pro launch readout · Illustrative synthetic case data · Baseline: pre-period trend + weekly seasonality per category</a:t>
-            </a:r>
-          </a:p>
-        </p:txBody>
-      </p:sp>
-      <p:sp>
-        <p:nvSpPr>
-          <p:cNvPr id="11" name="TextBox 10"/>
-          <p:cNvSpPr txBox="1"/>
-          <p:nvPr/>
-        </p:nvSpPr>
-        <p:spPr>
-          <a:xfrm>
-            <a:off x="11292840" y="6510528"/>
-            <a:ext cx="411480" cy="274320"/>
-          </a:xfrm>
-          <a:prstGeom prst="rect">
-            <a:avLst/>
-          </a:prstGeom>
-          <a:noFill/>
-        </p:spPr>
-        <p:txBody>
-          <a:bodyPr wrap="square" lIns="0" tIns="0" rIns="0" bIns="0" anchor="t">
-            <a:spAutoFit/>
-          </a:bodyPr>
-          <a:lstStyle/>
-          <a:p>
-            <a:pPr algn="r"/>
-            <a:r>
-              <a:rPr sz="800" b="0" i="0">
-                <a:solidFill>
-                  <a:srgbClr val="757575"/>
-                </a:solidFill>
-                <a:latin typeface="Arial"/>
-              </a:rPr>
-              <a:t>9</a:t>
+              <a:t>7</a:t>
             </a:r>
           </a:p>
         </p:txBody>
       </p:sp>
       <p:pic>
         <p:nvPicPr>
-          <p:cNvPr id="12" name="Picture 11" descr="salomon_wordmark_black.png"/>
+          <p:cNvPr id="19" name="Picture 18" descr="salomon_wordmark_black.png">
+            <a:extLst>
+              <a:ext uri="{FF2B5EF4-FFF2-40B4-BE49-F238E27FC236}">
+                <a16:creationId xmlns:a16="http://schemas.microsoft.com/office/drawing/2014/main" id="{C54FDC2E-F88A-4793-C382-698F26484CEB}"/>
+              </a:ext>
+            </a:extLst>
+          </p:cNvPr>
           <p:cNvPicPr>
             <a:picLocks noChangeAspect="1"/>
           </p:cNvPicPr>
@@ -14447,11 +14448,376 @@
           </a:prstGeom>
         </p:spPr>
       </p:pic>
+      <p:pic>
+        <p:nvPicPr>
+          <p:cNvPr id="5" name="Picture 4" descr="The diagram illustrates the projected and actual customer lifetime values, including the first order, blended customer acquisition cost (CAC), and the cumulative value per customer over time.&#10;&#10;AI-generated content may be incorrect.">
+            <a:extLst>
+              <a:ext uri="{FF2B5EF4-FFF2-40B4-BE49-F238E27FC236}">
+                <a16:creationId xmlns:a16="http://schemas.microsoft.com/office/drawing/2014/main" id="{4BADB25B-6C91-F75F-9BCD-A697A8C85905}"/>
+              </a:ext>
+            </a:extLst>
+          </p:cNvPr>
+          <p:cNvPicPr>
+            <a:picLocks noChangeAspect="1"/>
+          </p:cNvPicPr>
+          <p:nvPr/>
+        </p:nvPicPr>
+        <p:blipFill>
+          <a:blip r:embed="rId4"/>
+          <a:stretch>
+            <a:fillRect/>
+          </a:stretch>
+        </p:blipFill>
+        <p:spPr>
+          <a:xfrm>
+            <a:off x="502919" y="1834765"/>
+            <a:ext cx="6484213" cy="4023537"/>
+          </a:xfrm>
+          <a:prstGeom prst="rect">
+            <a:avLst/>
+          </a:prstGeom>
+        </p:spPr>
+      </p:pic>
+      <p:cxnSp>
+        <p:nvCxnSpPr>
+          <p:cNvPr id="7" name="Straight Arrow Connector 6">
+            <a:extLst>
+              <a:ext uri="{FF2B5EF4-FFF2-40B4-BE49-F238E27FC236}">
+                <a16:creationId xmlns:a16="http://schemas.microsoft.com/office/drawing/2014/main" id="{B79F3486-0308-AEA3-B6CD-45160B32CA97}"/>
+              </a:ext>
+            </a:extLst>
+          </p:cNvPr>
+          <p:cNvCxnSpPr/>
+          <p:nvPr/>
+        </p:nvCxnSpPr>
+        <p:spPr>
+          <a:xfrm>
+            <a:off x="5877289" y="2135926"/>
+            <a:ext cx="0" cy="425789"/>
+          </a:xfrm>
+          <a:prstGeom prst="straightConnector1">
+            <a:avLst/>
+          </a:prstGeom>
+          <a:ln>
+            <a:solidFill>
+              <a:schemeClr val="tx2">
+                <a:lumMod val="50000"/>
+                <a:lumOff val="50000"/>
+              </a:schemeClr>
+            </a:solidFill>
+            <a:tailEnd type="triangle"/>
+          </a:ln>
+        </p:spPr>
+        <p:style>
+          <a:lnRef idx="2">
+            <a:schemeClr val="dk1"/>
+          </a:lnRef>
+          <a:fillRef idx="0">
+            <a:schemeClr val="dk1"/>
+          </a:fillRef>
+          <a:effectRef idx="1">
+            <a:schemeClr val="dk1"/>
+          </a:effectRef>
+          <a:fontRef idx="minor">
+            <a:schemeClr val="tx1"/>
+          </a:fontRef>
+        </p:style>
+      </p:cxnSp>
+      <p:sp>
+        <p:nvSpPr>
+          <p:cNvPr id="13" name="TextBox 12">
+            <a:extLst>
+              <a:ext uri="{FF2B5EF4-FFF2-40B4-BE49-F238E27FC236}">
+                <a16:creationId xmlns:a16="http://schemas.microsoft.com/office/drawing/2014/main" id="{9AED6645-9556-3AB4-7674-3147830657AB}"/>
+              </a:ext>
+            </a:extLst>
+          </p:cNvPr>
+          <p:cNvSpPr txBox="1"/>
+          <p:nvPr/>
+        </p:nvSpPr>
+        <p:spPr>
+          <a:xfrm>
+            <a:off x="5065149" y="1916665"/>
+            <a:ext cx="1779937" cy="261610"/>
+          </a:xfrm>
+          <a:prstGeom prst="rect">
+            <a:avLst/>
+          </a:prstGeom>
+          <a:noFill/>
+        </p:spPr>
+        <p:txBody>
+          <a:bodyPr wrap="square" rtlCol="0">
+            <a:spAutoFit/>
+          </a:bodyPr>
+          <a:lstStyle/>
+          <a:p>
+            <a:r>
+              <a:rPr lang="en-US" sz="1100" dirty="0">
+                <a:solidFill>
+                  <a:schemeClr val="tx2">
+                    <a:lumMod val="50000"/>
+                    <a:lumOff val="50000"/>
+                  </a:schemeClr>
+                </a:solidFill>
+                <a:latin typeface="Arial" panose="020B0604020202020204" pitchFamily="34" charset="0"/>
+                <a:cs typeface="Arial" panose="020B0604020202020204" pitchFamily="34" charset="0"/>
+              </a:rPr>
+              <a:t>Prior CLV cohort analysis</a:t>
+            </a:r>
+          </a:p>
+        </p:txBody>
+      </p:sp>
+      <p:sp>
+        <p:nvSpPr>
+          <p:cNvPr id="20" name="TextBox 19">
+            <a:extLst>
+              <a:ext uri="{FF2B5EF4-FFF2-40B4-BE49-F238E27FC236}">
+                <a16:creationId xmlns:a16="http://schemas.microsoft.com/office/drawing/2014/main" id="{2BAA0C35-1420-E2C8-050C-10BB01FA0712}"/>
+              </a:ext>
+            </a:extLst>
+          </p:cNvPr>
+          <p:cNvSpPr txBox="1"/>
+          <p:nvPr/>
+        </p:nvSpPr>
+        <p:spPr>
+          <a:xfrm>
+            <a:off x="7817805" y="1915228"/>
+            <a:ext cx="3589511" cy="2292038"/>
+          </a:xfrm>
+          <a:prstGeom prst="rect">
+            <a:avLst/>
+          </a:prstGeom>
+          <a:noFill/>
+        </p:spPr>
+        <p:txBody>
+          <a:bodyPr wrap="square" lIns="0" tIns="0" rIns="0" bIns="0" anchor="t">
+            <a:spAutoFit/>
+          </a:bodyPr>
+          <a:lstStyle/>
+          <a:p>
+            <a:pPr algn="ctr">
+              <a:lnSpc>
+                <a:spcPct val="112000"/>
+              </a:lnSpc>
+              <a:spcAft>
+                <a:spcPts val="900"/>
+              </a:spcAft>
+            </a:pPr>
+            <a:r>
+              <a:rPr lang="en-US" sz="1200" b="1" dirty="0">
+                <a:solidFill>
+                  <a:schemeClr val="tx2">
+                    <a:lumMod val="50000"/>
+                    <a:lumOff val="50000"/>
+                  </a:schemeClr>
+                </a:solidFill>
+                <a:latin typeface="Arial"/>
+              </a:rPr>
+              <a:t>LIFETIME VALUE</a:t>
+            </a:r>
+            <a:r>
+              <a:rPr lang="en-US" sz="1200" b="1" i="0" dirty="0">
+                <a:solidFill>
+                  <a:schemeClr val="tx2">
+                    <a:lumMod val="50000"/>
+                    <a:lumOff val="50000"/>
+                  </a:schemeClr>
+                </a:solidFill>
+                <a:latin typeface="Arial"/>
+              </a:rPr>
+              <a:t> BREAKDOWN</a:t>
+            </a:r>
+            <a:endParaRPr lang="en-US" sz="1200" b="1" dirty="0">
+              <a:solidFill>
+                <a:schemeClr val="tx2">
+                  <a:lumMod val="50000"/>
+                  <a:lumOff val="50000"/>
+                </a:schemeClr>
+              </a:solidFill>
+              <a:latin typeface="Arial"/>
+            </a:endParaRPr>
+          </a:p>
+          <a:p>
+            <a:pPr>
+              <a:spcAft>
+                <a:spcPts val="600"/>
+              </a:spcAft>
+            </a:pPr>
+            <a:r>
+              <a:rPr lang="en-US" sz="1200" dirty="0">
+                <a:solidFill>
+                  <a:schemeClr val="tx2">
+                    <a:lumMod val="75000"/>
+                    <a:lumOff val="25000"/>
+                  </a:schemeClr>
+                </a:solidFill>
+                <a:latin typeface="Arial"/>
+              </a:rPr>
+              <a:t>•  </a:t>
+            </a:r>
+            <a:r>
+              <a:rPr lang="en-US" sz="1200" b="1" dirty="0">
+                <a:solidFill>
+                  <a:schemeClr val="tx2">
+                    <a:lumMod val="75000"/>
+                    <a:lumOff val="25000"/>
+                  </a:schemeClr>
+                </a:solidFill>
+                <a:latin typeface="Arial"/>
+              </a:rPr>
+              <a:t>LTV Forecast of $387/customer </a:t>
+            </a:r>
+            <a:r>
+              <a:rPr lang="en-US" sz="1200" dirty="0">
+                <a:solidFill>
+                  <a:schemeClr val="tx2">
+                    <a:lumMod val="75000"/>
+                    <a:lumOff val="25000"/>
+                  </a:schemeClr>
+                </a:solidFill>
+                <a:latin typeface="Arial"/>
+              </a:rPr>
+              <a:t>at 24 months (3.8x CAC) based on prior CLV cohort analysis.</a:t>
+            </a:r>
+          </a:p>
+          <a:p>
+            <a:pPr>
+              <a:spcAft>
+                <a:spcPts val="600"/>
+              </a:spcAft>
+            </a:pPr>
+            <a:endParaRPr lang="en-US" sz="1200" dirty="0">
+              <a:solidFill>
+                <a:schemeClr val="tx2">
+                  <a:lumMod val="75000"/>
+                  <a:lumOff val="25000"/>
+                </a:schemeClr>
+              </a:solidFill>
+              <a:latin typeface="Arial"/>
+            </a:endParaRPr>
+          </a:p>
+          <a:p>
+            <a:pPr>
+              <a:spcAft>
+                <a:spcPts val="600"/>
+              </a:spcAft>
+            </a:pPr>
+            <a:r>
+              <a:rPr lang="en-US" sz="1200" dirty="0">
+                <a:solidFill>
+                  <a:schemeClr val="tx2">
+                    <a:lumMod val="75000"/>
+                    <a:lumOff val="25000"/>
+                  </a:schemeClr>
+                </a:solidFill>
+                <a:latin typeface="Arial"/>
+              </a:rPr>
+              <a:t>• </a:t>
+            </a:r>
+            <a:r>
+              <a:rPr lang="en-US" sz="1200" b="1" dirty="0">
+                <a:solidFill>
+                  <a:schemeClr val="tx2">
+                    <a:lumMod val="75000"/>
+                    <a:lumOff val="25000"/>
+                  </a:schemeClr>
+                </a:solidFill>
+                <a:latin typeface="Arial"/>
+              </a:rPr>
+              <a:t>Value is front-loaded: </a:t>
+            </a:r>
+            <a:r>
+              <a:rPr lang="en-US" sz="1200" dirty="0">
+                <a:solidFill>
+                  <a:schemeClr val="tx2">
+                    <a:lumMod val="75000"/>
+                    <a:lumOff val="25000"/>
+                  </a:schemeClr>
+                </a:solidFill>
+                <a:latin typeface="Arial"/>
+              </a:rPr>
+              <a:t>We will see most of the LTV within the first 12 months (Roughly 86% accrues within the first year).</a:t>
+            </a:r>
+          </a:p>
+          <a:p>
+            <a:pPr>
+              <a:spcAft>
+                <a:spcPts val="600"/>
+              </a:spcAft>
+            </a:pPr>
+            <a:endParaRPr lang="en-US" sz="1200" dirty="0">
+              <a:solidFill>
+                <a:schemeClr val="tx2">
+                  <a:lumMod val="75000"/>
+                  <a:lumOff val="25000"/>
+                </a:schemeClr>
+              </a:solidFill>
+              <a:latin typeface="Arial"/>
+            </a:endParaRPr>
+          </a:p>
+          <a:p>
+            <a:pPr>
+              <a:spcAft>
+                <a:spcPts val="600"/>
+              </a:spcAft>
+            </a:pPr>
+            <a:r>
+              <a:rPr lang="en-US" sz="1200" dirty="0">
+                <a:solidFill>
+                  <a:schemeClr val="tx2">
+                    <a:lumMod val="75000"/>
+                    <a:lumOff val="25000"/>
+                  </a:schemeClr>
+                </a:solidFill>
+                <a:latin typeface="Arial"/>
+              </a:rPr>
+              <a:t>• Currently </a:t>
+            </a:r>
+            <a:r>
+              <a:rPr lang="en-US" sz="1200" b="1" dirty="0">
+                <a:solidFill>
+                  <a:schemeClr val="tx2">
+                    <a:lumMod val="75000"/>
+                    <a:lumOff val="25000"/>
+                  </a:schemeClr>
+                </a:solidFill>
+                <a:latin typeface="Arial"/>
+              </a:rPr>
+              <a:t>outperforming </a:t>
+            </a:r>
+            <a:r>
+              <a:rPr lang="en-US" sz="1200" dirty="0">
+                <a:solidFill>
+                  <a:schemeClr val="tx2">
+                    <a:lumMod val="75000"/>
+                    <a:lumOff val="25000"/>
+                  </a:schemeClr>
+                </a:solidFill>
+                <a:latin typeface="Arial"/>
+              </a:rPr>
+              <a:t>LTV forecast at $188 after 4 weeks (1.8x CAC)</a:t>
+            </a:r>
+            <a:endParaRPr lang="en-US" sz="1200" dirty="0">
+              <a:latin typeface="Arial"/>
+            </a:endParaRPr>
+          </a:p>
+        </p:txBody>
+      </p:sp>
     </p:spTree>
+    <p:extLst>
+      <p:ext uri="{BB962C8B-B14F-4D97-AF65-F5344CB8AC3E}">
+        <p14:creationId xmlns:p14="http://schemas.microsoft.com/office/powerpoint/2010/main" val="4188150868"/>
+      </p:ext>
+    </p:extLst>
   </p:cSld>
   <p:clrMapOvr>
     <a:masterClrMapping/>
   </p:clrMapOvr>
+  <p:extLst>
+    <p:ext uri="{6950BFC3-D8DA-4A85-94F7-54DA5524770B}">
+      <p188:commentRel xmlns:p188="http://schemas.microsoft.com/office/powerpoint/2018/8/main" r:id="rId2"/>
+    </p:ext>
+  </p:extLst>
 </p:sld>
 </file>
 
@@ -14502,7 +14868,7 @@
                 </a:solidFill>
                 <a:latin typeface="Arial"/>
               </a:rPr>
-              <a:t>CHANNEL PERFORMANCE</a:t>
+              <a:t>HALO EFFECT</a:t>
             </a:r>
           </a:p>
         </p:txBody>
@@ -14516,7 +14882,7 @@
         <p:spPr>
           <a:xfrm>
             <a:off x="502920" y="566928"/>
-            <a:ext cx="11201400" cy="777240"/>
+            <a:ext cx="11201400" cy="353943"/>
           </a:xfrm>
           <a:prstGeom prst="rect">
             <a:avLst/>
@@ -14531,14 +14897,29 @@
           <a:p>
             <a:pPr algn="l"/>
             <a:r>
-              <a:rPr sz="2300" b="0" i="0">
+              <a:rPr sz="2300" b="0" i="0" dirty="0">
                 <a:solidFill>
                   <a:srgbClr val="000000"/>
                 </a:solidFill>
                 <a:latin typeface="Georgia"/>
               </a:rPr>
-              <a:t>CRM and affiliate cleared breakeven on incremental ROAS; paid media did not</a:t>
-            </a:r>
+              <a:t>Adjacent categories lifted +9%, but as standalone purchases, </a:t>
+            </a:r>
+            <a:r>
+              <a:rPr lang="en-US" sz="2300" b="0" i="0" dirty="0">
+                <a:solidFill>
+                  <a:srgbClr val="000000"/>
+                </a:solidFill>
+                <a:latin typeface="Georgia"/>
+              </a:rPr>
+              <a:t>bigger carts.</a:t>
+            </a:r>
+            <a:endParaRPr sz="2300" b="0" i="0" dirty="0">
+              <a:solidFill>
+                <a:srgbClr val="000000"/>
+              </a:solidFill>
+              <a:latin typeface="Georgia"/>
+            </a:endParaRPr>
           </a:p>
         </p:txBody>
       </p:sp>
@@ -14566,13 +14947,13 @@
           <a:p>
             <a:pPr algn="l"/>
             <a:r>
-              <a:rPr sz="1000" b="1" i="0">
+              <a:rPr sz="1000" b="1" i="0" dirty="0">
                 <a:solidFill>
                   <a:srgbClr val="757575"/>
                 </a:solidFill>
                 <a:latin typeface="Arial"/>
               </a:rPr>
-              <a:t>INCREMENTAL ROAS BY CHANNEL (BREAKEVEN = 1.0×)</a:t>
+              <a:t>ADJACENT-CATEGORY REVENUE VS EXPECTED BASELINE, ACTIVE FLIGHT</a:t>
             </a:r>
           </a:p>
         </p:txBody>
@@ -14587,7 +14968,7 @@
         </p:nvGraphicFramePr>
         <p:xfrm>
           <a:off x="365760" y="1828800"/>
-          <a:ext cx="6309360" cy="4114800"/>
+          <a:ext cx="6309360" cy="4023360"/>
         </p:xfrm>
         <a:graphic>
           <a:graphicData uri="http://schemas.openxmlformats.org/drawingml/2006/chart">
@@ -14603,8 +14984,155 @@
         </p:nvSpPr>
         <p:spPr>
           <a:xfrm>
-            <a:off x="7086600" y="1600200"/>
-            <a:ext cx="4572000" cy="4480560"/>
+            <a:off x="640080" y="5806440"/>
+            <a:ext cx="5852160" cy="320040"/>
+          </a:xfrm>
+          <a:prstGeom prst="rect">
+            <a:avLst/>
+          </a:prstGeom>
+          <a:noFill/>
+        </p:spPr>
+        <p:txBody>
+          <a:bodyPr wrap="square" lIns="0" tIns="0" rIns="0" bIns="0" anchor="t">
+            <a:spAutoFit/>
+          </a:bodyPr>
+          <a:lstStyle/>
+          <a:p>
+            <a:pPr algn="l"/>
+            <a:r>
+              <a:rPr sz="1000" b="0" i="0">
+                <a:solidFill>
+                  <a:srgbClr val="757575"/>
+                </a:solidFill>
+                <a:latin typeface="Arial"/>
+              </a:rPr>
+              <a:t>Success criterion ≥ +5%: </a:t>
+            </a:r>
+            <a:r>
+              <a:rPr sz="1000" b="1" i="0">
+                <a:solidFill>
+                  <a:srgbClr val="1F7A4D"/>
+                </a:solidFill>
+                <a:latin typeface="Arial"/>
+              </a:rPr>
+              <a:t>PASS</a:t>
+            </a:r>
+            <a:r>
+              <a:rPr sz="1000" b="0" i="0">
+                <a:solidFill>
+                  <a:srgbClr val="757575"/>
+                </a:solidFill>
+                <a:latin typeface="Arial"/>
+              </a:rPr>
+              <a:t>  (+9.2%, 95% CI +3.0% to +15.4% · +$7.9K)</a:t>
+            </a:r>
+          </a:p>
+        </p:txBody>
+      </p:sp>
+      <p:sp>
+        <p:nvSpPr>
+          <p:cNvPr id="7" name="TextBox 6"/>
+          <p:cNvSpPr txBox="1"/>
+          <p:nvPr/>
+        </p:nvSpPr>
+        <p:spPr>
+          <a:xfrm>
+            <a:off x="7086600" y="1481328"/>
+            <a:ext cx="4572000" cy="274320"/>
+          </a:xfrm>
+          <a:prstGeom prst="rect">
+            <a:avLst/>
+          </a:prstGeom>
+          <a:noFill/>
+        </p:spPr>
+        <p:txBody>
+          <a:bodyPr wrap="square" lIns="0" tIns="0" rIns="0" bIns="0" anchor="t">
+            <a:spAutoFit/>
+          </a:bodyPr>
+          <a:lstStyle/>
+          <a:p>
+            <a:pPr algn="l"/>
+            <a:r>
+              <a:rPr sz="1000" b="1" i="0">
+                <a:solidFill>
+                  <a:srgbClr val="757575"/>
+                </a:solidFill>
+                <a:latin typeface="Arial"/>
+              </a:rPr>
+              <a:t>ATTACH RATE TO VESTAL PRO ORDERS</a:t>
+            </a:r>
+          </a:p>
+        </p:txBody>
+      </p:sp>
+      <p:sp>
+        <p:nvSpPr>
+          <p:cNvPr id="8" name="TextBox 7"/>
+          <p:cNvSpPr txBox="1"/>
+          <p:nvPr/>
+        </p:nvSpPr>
+        <p:spPr>
+          <a:xfrm>
+            <a:off x="7086600" y="1828800"/>
+            <a:ext cx="4572000" cy="523220"/>
+          </a:xfrm>
+          <a:prstGeom prst="rect">
+            <a:avLst/>
+          </a:prstGeom>
+          <a:noFill/>
+        </p:spPr>
+        <p:txBody>
+          <a:bodyPr wrap="square" lIns="0" tIns="0" rIns="0" bIns="0" anchor="t">
+            <a:spAutoFit/>
+          </a:bodyPr>
+          <a:lstStyle/>
+          <a:p>
+            <a:pPr algn="l"/>
+            <a:r>
+              <a:rPr sz="3400" b="1" i="0" dirty="0">
+                <a:solidFill>
+                  <a:srgbClr val="333333"/>
+                </a:solidFill>
+                <a:latin typeface="Arial"/>
+              </a:rPr>
+              <a:t>17.8%</a:t>
+            </a:r>
+            <a:r>
+              <a:rPr sz="1300" b="0" i="0" dirty="0">
+                <a:solidFill>
+                  <a:srgbClr val="757575"/>
+                </a:solidFill>
+                <a:latin typeface="Arial"/>
+              </a:rPr>
+              <a:t>   flat vs 18.0% </a:t>
+            </a:r>
+            <a:r>
+              <a:rPr lang="en-US" sz="1300" b="0" i="0" dirty="0">
+                <a:solidFill>
+                  <a:srgbClr val="757575"/>
+                </a:solidFill>
+                <a:latin typeface="Arial"/>
+              </a:rPr>
+              <a:t>historical average</a:t>
+            </a:r>
+            <a:endParaRPr sz="1300" b="0" i="0" dirty="0">
+              <a:solidFill>
+                <a:srgbClr val="757575"/>
+              </a:solidFill>
+              <a:latin typeface="Arial"/>
+            </a:endParaRPr>
+          </a:p>
+        </p:txBody>
+      </p:sp>
+      <p:sp>
+        <p:nvSpPr>
+          <p:cNvPr id="9" name="TextBox 8"/>
+          <p:cNvSpPr txBox="1"/>
+          <p:nvPr/>
+        </p:nvSpPr>
+        <p:spPr>
+          <a:xfrm>
+            <a:off x="7086600" y="2834640"/>
+            <a:ext cx="4572000" cy="1378391"/>
           </a:xfrm>
           <a:prstGeom prst="rect">
             <a:avLst/>
@@ -14622,27 +15150,114 @@
                 <a:spcPct val="112000"/>
               </a:lnSpc>
               <a:spcAft>
-                <a:spcPts val="1000"/>
+                <a:spcPts val="800"/>
               </a:spcAft>
             </a:pPr>
             <a:r>
-              <a:rPr sz="1150" b="1" i="0">
+              <a:rPr sz="1150" b="0" i="0" dirty="0">
                 <a:solidFill>
                   <a:srgbClr val="333333"/>
                 </a:solidFill>
                 <a:latin typeface="Arial"/>
               </a:rPr>
-              <a:t>•  CRM: </a:t>
-            </a:r>
-            <a:r>
-              <a:rPr sz="1150" b="0" i="0">
+              <a:t>•  </a:t>
+            </a:r>
+            <a:r>
+              <a:rPr lang="en-US" sz="1150" b="0" i="0" dirty="0">
                 <a:solidFill>
                   <a:srgbClr val="333333"/>
                 </a:solidFill>
                 <a:latin typeface="Arial"/>
               </a:rPr>
-              <a:t>8% of spend, 44% of attributed revenue. Efficient activation of existing buyers — though without a holdout, high-intent audiences inflate its read.</a:t>
-            </a:r>
+              <a:t>Halo effect </a:t>
+            </a:r>
+            <a:r>
+              <a:rPr lang="en-US" sz="1150" dirty="0">
+                <a:solidFill>
+                  <a:srgbClr val="333333"/>
+                </a:solidFill>
+                <a:latin typeface="Arial"/>
+              </a:rPr>
+              <a:t>realized through increased </a:t>
+            </a:r>
+            <a:r>
+              <a:rPr lang="en-US" sz="1150" b="1" dirty="0">
+                <a:solidFill>
+                  <a:srgbClr val="333333"/>
+                </a:solidFill>
+                <a:latin typeface="Arial"/>
+              </a:rPr>
+              <a:t>standalone accessory purchases</a:t>
+            </a:r>
+            <a:r>
+              <a:rPr lang="en-US" sz="1150" dirty="0">
+                <a:solidFill>
+                  <a:srgbClr val="333333"/>
+                </a:solidFill>
+                <a:latin typeface="Arial"/>
+              </a:rPr>
+              <a:t>, driven by </a:t>
+            </a:r>
+            <a:r>
+              <a:rPr sz="1150" b="0" i="0" dirty="0">
+                <a:solidFill>
+                  <a:srgbClr val="333333"/>
+                </a:solidFill>
+                <a:latin typeface="Arial"/>
+              </a:rPr>
+              <a:t>campaign </a:t>
+            </a:r>
+            <a:r>
+              <a:rPr sz="1150" b="1" i="0" dirty="0">
+                <a:solidFill>
+                  <a:srgbClr val="333333"/>
+                </a:solidFill>
+                <a:latin typeface="Arial"/>
+              </a:rPr>
+              <a:t>traffic </a:t>
+            </a:r>
+            <a:r>
+              <a:rPr sz="1150" b="0" i="0" dirty="0">
+                <a:solidFill>
+                  <a:srgbClr val="333333"/>
+                </a:solidFill>
+                <a:latin typeface="Arial"/>
+              </a:rPr>
+              <a:t>and </a:t>
+            </a:r>
+            <a:r>
+              <a:rPr lang="en-US" sz="1150" b="0" i="0" dirty="0">
+                <a:solidFill>
+                  <a:srgbClr val="333333"/>
+                </a:solidFill>
+                <a:latin typeface="Arial"/>
+              </a:rPr>
+              <a:t>brand </a:t>
+            </a:r>
+            <a:r>
+              <a:rPr sz="1150" b="1" i="0" dirty="0">
+                <a:solidFill>
+                  <a:srgbClr val="333333"/>
+                </a:solidFill>
+                <a:latin typeface="Arial"/>
+              </a:rPr>
+              <a:t>awareness</a:t>
+            </a:r>
+            <a:r>
+              <a:rPr lang="en-US" sz="1150" b="0" i="0" dirty="0">
+                <a:solidFill>
+                  <a:srgbClr val="333333"/>
+                </a:solidFill>
+                <a:latin typeface="Arial"/>
+              </a:rPr>
+              <a:t>.</a:t>
+            </a:r>
+            <a:endParaRPr sz="1150" b="0" i="0" dirty="0">
+              <a:solidFill>
+                <a:srgbClr val="333333"/>
+              </a:solidFill>
+              <a:latin typeface="Arial"/>
+            </a:endParaRPr>
           </a:p>
           <a:p>
             <a:pPr algn="l">
@@ -14650,26 +15265,17 @@
                 <a:spcPct val="112000"/>
               </a:lnSpc>
               <a:spcAft>
-                <a:spcPts val="1000"/>
+                <a:spcPts val="800"/>
               </a:spcAft>
             </a:pPr>
             <a:r>
-              <a:rPr sz="1150" b="1" i="0">
+              <a:rPr sz="1150" b="0" i="0" dirty="0">
                 <a:solidFill>
                   <a:srgbClr val="333333"/>
                 </a:solidFill>
                 <a:latin typeface="Arial"/>
               </a:rPr>
-              <a:t>•  Paid social: </a:t>
-            </a:r>
-            <a:r>
-              <a:rPr sz="1150" b="0" i="0">
-                <a:solidFill>
-                  <a:srgbClr val="333333"/>
-                </a:solidFill>
-                <a:latin typeface="Arial"/>
-              </a:rPr>
-              <a:t>59% of spend at 0.3× iROAS — but it acquired 629 of 1,499 new customers (42%) at $147 CAC vs $212 early value. It pays back as acquisition, not immediate revenue; judge it on CAC and LTV.</a:t>
+              <a:t>•  Accessories led (+16.9%); apparel followed (+5.4%). Other footwear orders attached at the same 18% rate.</a:t>
             </a:r>
           </a:p>
           <a:p>
@@ -14678,61 +15284,75 @@
                 <a:spcPct val="112000"/>
               </a:lnSpc>
               <a:spcAft>
-                <a:spcPts val="1000"/>
+                <a:spcPts val="800"/>
               </a:spcAft>
             </a:pPr>
             <a:r>
-              <a:rPr sz="1150" b="1" i="0">
+              <a:rPr sz="1150" b="0" i="0" dirty="0">
                 <a:solidFill>
                   <a:srgbClr val="333333"/>
                 </a:solidFill>
                 <a:latin typeface="Arial"/>
               </a:rPr>
-              <a:t>•  Paid search: </a:t>
-            </a:r>
-            <a:r>
-              <a:rPr sz="1150" b="0" i="0">
+              <a:t>•  </a:t>
+            </a:r>
+            <a:r>
+              <a:rPr sz="1150" b="1" i="0" dirty="0">
                 <a:solidFill>
                   <a:srgbClr val="333333"/>
                 </a:solidFill>
                 <a:latin typeface="Arial"/>
               </a:rPr>
-              <a:t>0.9× — strong early flight, efficiency fell as core sizes stocked out while spend kept running.</a:t>
-            </a:r>
-          </a:p>
-          <a:p>
-            <a:pPr algn="l">
-              <a:lnSpc>
-                <a:spcPct val="112000"/>
-              </a:lnSpc>
-              <a:spcAft>
-                <a:spcPts val="1000"/>
-              </a:spcAft>
-            </a:pPr>
-            <a:r>
-              <a:rPr sz="1150" b="1" i="0">
-                <a:solidFill>
-                  <a:srgbClr val="757575"/>
-                </a:solidFill>
-                <a:latin typeface="Arial"/>
-              </a:rPr>
-              <a:t>•  Method: </a:t>
-            </a:r>
-            <a:r>
-              <a:rPr sz="1150" b="0" i="0">
-                <a:solidFill>
-                  <a:srgbClr val="757575"/>
-                </a:solidFill>
-                <a:latin typeface="Arial"/>
-              </a:rPr>
-              <a:t>iROAS = attributed ROAS × 0.31 site-level incrementality factor, applied uniformly (no holdout or geo split this flight). Attributed ROAS: Email 23.2×, SMS 8.3×, Affiliate 4.2×, Search 3.0×, Social 1.0×.</a:t>
-            </a:r>
-          </a:p>
-        </p:txBody>
-      </p:sp>
-      <p:sp>
-        <p:nvSpPr>
-          <p:cNvPr id="7" name="TextBox 6"/>
+              <a:t>Opportunity</a:t>
+            </a:r>
+            <a:r>
+              <a:rPr sz="1150" b="0" i="0" dirty="0">
+                <a:solidFill>
+                  <a:srgbClr val="333333"/>
+                </a:solidFill>
+                <a:latin typeface="Arial"/>
+              </a:rPr>
+              <a:t>: PDP bundles (socks, gaiters, hydration) and </a:t>
+            </a:r>
+            <a:r>
+              <a:rPr lang="en-US" sz="1150" b="0" i="0" dirty="0">
+                <a:solidFill>
+                  <a:srgbClr val="333333"/>
+                </a:solidFill>
+                <a:latin typeface="Arial"/>
+              </a:rPr>
+              <a:t>enhanced item-item recommendation</a:t>
+            </a:r>
+            <a:r>
+              <a:rPr lang="en-US" sz="1150" dirty="0">
+                <a:solidFill>
+                  <a:srgbClr val="333333"/>
+                </a:solidFill>
+                <a:latin typeface="Arial"/>
+              </a:rPr>
+              <a:t> systems </a:t>
+            </a:r>
+            <a:r>
+              <a:rPr lang="en-US" sz="1150" b="0" i="0">
+                <a:solidFill>
+                  <a:srgbClr val="333333"/>
+                </a:solidFill>
+                <a:latin typeface="Arial"/>
+              </a:rPr>
+              <a:t>to push bigger baskets.</a:t>
+            </a:r>
+            <a:endParaRPr sz="1150" b="0" i="0" dirty="0">
+              <a:solidFill>
+                <a:srgbClr val="333333"/>
+              </a:solidFill>
+              <a:latin typeface="Arial"/>
+            </a:endParaRPr>
+          </a:p>
+        </p:txBody>
+      </p:sp>
+      <p:sp>
+        <p:nvSpPr>
+          <p:cNvPr id="10" name="TextBox 9"/>
           <p:cNvSpPr txBox="1"/>
           <p:nvPr/>
         </p:nvSpPr>
@@ -14760,14 +15380,14 @@
                 </a:solidFill>
                 <a:latin typeface="Arial"/>
               </a:rPr>
-              <a:t>Salomon NA eCommerce · Vestal Pro launch readout · Illustrative synthetic case data</a:t>
-            </a:r>
-          </a:p>
-        </p:txBody>
-      </p:sp>
-      <p:sp>
-        <p:nvSpPr>
-          <p:cNvPr id="8" name="TextBox 7"/>
+              <a:t>Salomon NA eCommerce · Vestal Pro launch readout · Illustrative synthetic case data · Baseline: pre-period trend + weekly seasonality per category</a:t>
+            </a:r>
+          </a:p>
+        </p:txBody>
+      </p:sp>
+      <p:sp>
+        <p:nvSpPr>
+          <p:cNvPr id="11" name="TextBox 10"/>
           <p:cNvSpPr txBox="1"/>
           <p:nvPr/>
         </p:nvSpPr>
@@ -14795,14 +15415,14 @@
                 </a:solidFill>
                 <a:latin typeface="Arial"/>
               </a:rPr>
-              <a:t>10</a:t>
+              <a:t>9</a:t>
             </a:r>
           </a:p>
         </p:txBody>
       </p:sp>
       <p:pic>
         <p:nvPicPr>
-          <p:cNvPr id="9" name="Picture 8" descr="salomon_wordmark_black.png"/>
+          <p:cNvPr id="12" name="Picture 11" descr="salomon_wordmark_black.png"/>
           <p:cNvPicPr>
             <a:picLocks noChangeAspect="1"/>
           </p:cNvPicPr>

--- a/deliverables/VestalPro_Campaign_Readout.pptx
+++ b/deliverables/VestalPro_Campaign_Readout.pptx
@@ -15132,7 +15132,7 @@
         <p:spPr>
           <a:xfrm>
             <a:off x="7086600" y="2834640"/>
-            <a:ext cx="4572000" cy="1378391"/>
+            <a:ext cx="4572000" cy="1576585"/>
           </a:xfrm>
           <a:prstGeom prst="rect">
             <a:avLst/>
@@ -15312,7 +15312,7 @@
                 </a:solidFill>
                 <a:latin typeface="Arial"/>
               </a:rPr>
-              <a:t>: PDP bundles (socks, gaiters, hydration) and </a:t>
+              <a:t>: PDP bundles (socks, </a:t>
             </a:r>
             <a:r>
               <a:rPr lang="en-US" sz="1150" b="0" i="0" dirty="0">
@@ -15321,6 +15321,24 @@
                 </a:solidFill>
                 <a:latin typeface="Arial"/>
               </a:rPr>
+              <a:t>jerseys</a:t>
+            </a:r>
+            <a:r>
+              <a:rPr sz="1150" b="0" i="0" dirty="0">
+                <a:solidFill>
+                  <a:srgbClr val="333333"/>
+                </a:solidFill>
+                <a:latin typeface="Arial"/>
+              </a:rPr>
+              <a:t>, hydration) and </a:t>
+            </a:r>
+            <a:r>
+              <a:rPr lang="en-US" sz="1150" b="0" i="0" dirty="0">
+                <a:solidFill>
+                  <a:srgbClr val="333333"/>
+                </a:solidFill>
+                <a:latin typeface="Arial"/>
+              </a:rPr>
               <a:t>enhanced item-item recommendation</a:t>
             </a:r>
             <a:r>
@@ -15333,13 +15351,13 @@
               <a:t> systems </a:t>
             </a:r>
             <a:r>
-              <a:rPr lang="en-US" sz="1150" b="0" i="0">
+              <a:rPr lang="en-US" sz="1150" b="0" i="0" dirty="0">
                 <a:solidFill>
                   <a:srgbClr val="333333"/>
                 </a:solidFill>
                 <a:latin typeface="Arial"/>
               </a:rPr>
-              <a:t>to push bigger baskets.</a:t>
+              <a:t>to support ancillary products.</a:t>
             </a:r>
             <a:endParaRPr sz="1150" b="0" i="0" dirty="0">
               <a:solidFill>
@@ -15359,7 +15377,7 @@
         <p:spPr>
           <a:xfrm>
             <a:off x="502920" y="6510528"/>
-            <a:ext cx="10515600" cy="274320"/>
+            <a:ext cx="10515600" cy="123111"/>
           </a:xfrm>
           <a:prstGeom prst="rect">
             <a:avLst/>
@@ -15374,13 +15392,13 @@
           <a:p>
             <a:pPr algn="l"/>
             <a:r>
-              <a:rPr sz="800" b="0" i="0">
+              <a:rPr sz="800" b="0" i="0" dirty="0">
                 <a:solidFill>
                   <a:srgbClr val="757575"/>
                 </a:solidFill>
                 <a:latin typeface="Arial"/>
               </a:rPr>
-              <a:t>Salomon NA eCommerce · Vestal Pro launch readout · Illustrative synthetic case data · Baseline: pre-period trend + weekly seasonality per category</a:t>
+              <a:t>Salomon NA eCommerce · Vestal Pro launch readout · Baseline: pre-period trend + weekly seasonality per category</a:t>
             </a:r>
           </a:p>
         </p:txBody>

--- a/deliverables/VestalPro_Campaign_Readout.pptx
+++ b/deliverables/VestalPro_Campaign_Readout.pptx
@@ -4,6 +4,9 @@
   <p:sldMasterIdLst>
     <p:sldMasterId id="2147483648" r:id="rId1"/>
   </p:sldMasterIdLst>
+  <p:notesMasterIdLst>
+    <p:notesMasterId r:id="rId18"/>
+  </p:notesMasterIdLst>
   <p:sldIdLst>
     <p:sldId id="256" r:id="rId2"/>
     <p:sldId id="258" r:id="rId3"/>
@@ -15,12 +18,12 @@
     <p:sldId id="273" r:id="rId9"/>
     <p:sldId id="264" r:id="rId10"/>
     <p:sldId id="265" r:id="rId11"/>
-    <p:sldId id="266" r:id="rId12"/>
+    <p:sldId id="274" r:id="rId12"/>
     <p:sldId id="267" r:id="rId13"/>
     <p:sldId id="268" r:id="rId14"/>
     <p:sldId id="272" r:id="rId15"/>
     <p:sldId id="269" r:id="rId16"/>
-    <p:sldId id="259" r:id="rId17"/>
+    <p:sldId id="266" r:id="rId17"/>
   </p:sldIdLst>
   <p:sldSz cx="12192000" cy="6858000"/>
   <p:notesSz cx="6858000" cy="9144000"/>
@@ -144,898 +147,6 @@
 </p188:authorLst>
 </file>
 
-<file path=ppt/charts/chart1.xml><?xml version="1.0" encoding="utf-8"?>
-<c:chartSpace xmlns:c="http://schemas.openxmlformats.org/drawingml/2006/chart" xmlns:a="http://schemas.openxmlformats.org/drawingml/2006/main" xmlns:r="http://schemas.openxmlformats.org/officeDocument/2006/relationships" xmlns:c16r2="http://schemas.microsoft.com/office/drawing/2015/06/chart">
-  <c:date1904 val="0"/>
-  <c:lang val="en-US"/>
-  <c:roundedCorners val="1"/>
-  <c:style val="2"/>
-  <c:chart>
-    <c:autoTitleDeleted val="1"/>
-    <c:plotArea>
-      <c:layout/>
-      <c:barChart>
-        <c:barDir val="col"/>
-        <c:grouping val="clustered"/>
-        <c:varyColors val="1"/>
-        <c:ser>
-          <c:idx val="0"/>
-          <c:order val="0"/>
-          <c:tx>
-            <c:strRef>
-              <c:f>Sheet1!$B$1</c:f>
-              <c:strCache>
-                <c:ptCount val="1"/>
-                <c:pt idx="0">
-                  <c:v>Lift</c:v>
-                </c:pt>
-              </c:strCache>
-            </c:strRef>
-          </c:tx>
-          <c:invertIfNegative val="1"/>
-          <c:dPt>
-            <c:idx val="0"/>
-            <c:invertIfNegative val="1"/>
-            <c:bubble3D val="0"/>
-            <c:spPr>
-              <a:solidFill>
-                <a:srgbClr val="0057B8"/>
-              </a:solidFill>
-            </c:spPr>
-            <c:extLst>
-              <c:ext xmlns:c16="http://schemas.microsoft.com/office/drawing/2014/chart" uri="{C3380CC4-5D6E-409C-BE32-E72D297353CC}">
-                <c16:uniqueId val="{00000001-C87C-4166-A2F8-084CFC726EE5}"/>
-              </c:ext>
-            </c:extLst>
-          </c:dPt>
-          <c:dPt>
-            <c:idx val="1"/>
-            <c:invertIfNegative val="1"/>
-            <c:bubble3D val="0"/>
-            <c:spPr>
-              <a:solidFill>
-                <a:srgbClr val="0057B8"/>
-              </a:solidFill>
-            </c:spPr>
-            <c:extLst>
-              <c:ext xmlns:c16="http://schemas.microsoft.com/office/drawing/2014/chart" uri="{C3380CC4-5D6E-409C-BE32-E72D297353CC}">
-                <c16:uniqueId val="{00000003-C87C-4166-A2F8-084CFC726EE5}"/>
-              </c:ext>
-            </c:extLst>
-          </c:dPt>
-          <c:dPt>
-            <c:idx val="2"/>
-            <c:invertIfNegative val="1"/>
-            <c:bubble3D val="0"/>
-            <c:spPr>
-              <a:solidFill>
-                <a:srgbClr val="000000"/>
-              </a:solidFill>
-            </c:spPr>
-            <c:extLst>
-              <c:ext xmlns:c16="http://schemas.microsoft.com/office/drawing/2014/chart" uri="{C3380CC4-5D6E-409C-BE32-E72D297353CC}">
-                <c16:uniqueId val="{00000005-C87C-4166-A2F8-084CFC726EE5}"/>
-              </c:ext>
-            </c:extLst>
-          </c:dPt>
-          <c:dLbls>
-            <c:numFmt formatCode="\+0.0%;\-0.0%" sourceLinked="0"/>
-            <c:spPr>
-              <a:noFill/>
-              <a:ln>
-                <a:noFill/>
-              </a:ln>
-              <a:effectLst/>
-            </c:spPr>
-            <c:txPr>
-              <a:bodyPr/>
-              <a:lstStyle/>
-              <a:p>
-                <a:pPr>
-                  <a:defRPr sz="1200" b="1">
-                    <a:solidFill>
-                      <a:srgbClr val="333333"/>
-                    </a:solidFill>
-                    <a:latin typeface="Arial"/>
-                  </a:defRPr>
-                </a:pPr>
-                <a:endParaRPr lang="en-US"/>
-              </a:p>
-            </c:txPr>
-            <c:dLblPos val="outEnd"/>
-            <c:showLegendKey val="0"/>
-            <c:showVal val="1"/>
-            <c:showCatName val="0"/>
-            <c:showSerName val="0"/>
-            <c:showPercent val="0"/>
-            <c:showBubbleSize val="0"/>
-            <c:showLeaderLines val="0"/>
-            <c:extLst>
-              <c:ext xmlns:c15="http://schemas.microsoft.com/office/drawing/2012/chart" uri="{CE6537A1-D6FC-4f65-9D91-7224C49458BB}">
-                <c15:showLeaderLines val="0"/>
-              </c:ext>
-            </c:extLst>
-          </c:dLbls>
-          <c:cat>
-            <c:strRef>
-              <c:f>Sheet1!$A$2:$A$4</c:f>
-              <c:strCache>
-                <c:ptCount val="3"/>
-                <c:pt idx="0">
-                  <c:v>Trail Apparel</c:v>
-                </c:pt>
-                <c:pt idx="1">
-                  <c:v>Trail Accessories</c:v>
-                </c:pt>
-                <c:pt idx="2">
-                  <c:v>All adjacent</c:v>
-                </c:pt>
-              </c:strCache>
-            </c:strRef>
-          </c:cat>
-          <c:val>
-            <c:numRef>
-              <c:f>Sheet1!$B$2:$B$4</c:f>
-              <c:numCache>
-                <c:formatCode>General</c:formatCode>
-                <c:ptCount val="3"/>
-                <c:pt idx="0">
-                  <c:v>5.4031981084650842E-2</c:v>
-                </c:pt>
-                <c:pt idx="1">
-                  <c:v>0.16948559269683569</c:v>
-                </c:pt>
-                <c:pt idx="2">
-                  <c:v>9.1772154004968576E-2</c:v>
-                </c:pt>
-              </c:numCache>
-            </c:numRef>
-          </c:val>
-          <c:extLst>
-            <c:ext xmlns:c16="http://schemas.microsoft.com/office/drawing/2014/chart" uri="{C3380CC4-5D6E-409C-BE32-E72D297353CC}">
-              <c16:uniqueId val="{00000006-C87C-4166-A2F8-084CFC726EE5}"/>
-            </c:ext>
-          </c:extLst>
-        </c:ser>
-        <c:dLbls>
-          <c:dLblPos val="outEnd"/>
-          <c:showLegendKey val="0"/>
-          <c:showVal val="1"/>
-          <c:showCatName val="0"/>
-          <c:showSerName val="0"/>
-          <c:showPercent val="0"/>
-          <c:showBubbleSize val="0"/>
-        </c:dLbls>
-        <c:gapWidth val="140"/>
-        <c:axId val="-2068027336"/>
-        <c:axId val="-2113994440"/>
-      </c:barChart>
-      <c:catAx>
-        <c:axId val="-2068027336"/>
-        <c:scaling>
-          <c:orientation val="minMax"/>
-        </c:scaling>
-        <c:delete val="0"/>
-        <c:axPos val="b"/>
-        <c:numFmt formatCode="General" sourceLinked="0"/>
-        <c:majorTickMark val="out"/>
-        <c:minorTickMark val="none"/>
-        <c:tickLblPos val="nextTo"/>
-        <c:spPr>
-          <a:ln>
-            <a:solidFill>
-              <a:srgbClr val="D9D9D9"/>
-            </a:solidFill>
-          </a:ln>
-        </c:spPr>
-        <c:txPr>
-          <a:bodyPr/>
-          <a:lstStyle/>
-          <a:p>
-            <a:pPr>
-              <a:defRPr sz="1100">
-                <a:solidFill>
-                  <a:srgbClr val="757575"/>
-                </a:solidFill>
-                <a:latin typeface="Arial"/>
-              </a:defRPr>
-            </a:pPr>
-            <a:endParaRPr lang="en-US"/>
-          </a:p>
-        </c:txPr>
-        <c:crossAx val="-2113994440"/>
-        <c:crosses val="autoZero"/>
-        <c:auto val="1"/>
-        <c:lblAlgn val="ctr"/>
-        <c:lblOffset val="100"/>
-        <c:noMultiLvlLbl val="0"/>
-      </c:catAx>
-      <c:valAx>
-        <c:axId val="-2113994440"/>
-        <c:scaling>
-          <c:orientation val="minMax"/>
-        </c:scaling>
-        <c:delete val="0"/>
-        <c:axPos val="l"/>
-        <c:numFmt formatCode=";;;" sourceLinked="0"/>
-        <c:majorTickMark val="out"/>
-        <c:minorTickMark val="none"/>
-        <c:tickLblPos val="nextTo"/>
-        <c:spPr>
-          <a:ln>
-            <a:noFill/>
-          </a:ln>
-        </c:spPr>
-        <c:crossAx val="-2068027336"/>
-        <c:crosses val="autoZero"/>
-        <c:crossBetween val="between"/>
-      </c:valAx>
-    </c:plotArea>
-    <c:plotVisOnly val="1"/>
-    <c:dispBlanksAs val="gap"/>
-    <c:showDLblsOverMax val="1"/>
-  </c:chart>
-  <c:txPr>
-    <a:bodyPr/>
-    <a:lstStyle/>
-    <a:p>
-      <a:pPr>
-        <a:defRPr sz="1800"/>
-      </a:pPr>
-      <a:endParaRPr lang="en-US"/>
-    </a:p>
-  </c:txPr>
-  <c:externalData r:id="rId1">
-    <c:autoUpdate val="0"/>
-  </c:externalData>
-</c:chartSpace>
-</file>
-
-<file path=ppt/charts/chart2.xml><?xml version="1.0" encoding="utf-8"?>
-<c:chartSpace xmlns:c="http://schemas.openxmlformats.org/drawingml/2006/chart" xmlns:a="http://schemas.openxmlformats.org/drawingml/2006/main" xmlns:r="http://schemas.openxmlformats.org/officeDocument/2006/relationships" xmlns:c16r2="http://schemas.microsoft.com/office/drawing/2015/06/chart">
-  <c:date1904 val="0"/>
-  <c:lang val="en-US"/>
-  <c:roundedCorners val="1"/>
-  <c:style val="2"/>
-  <c:chart>
-    <c:autoTitleDeleted val="1"/>
-    <c:plotArea>
-      <c:layout/>
-      <c:barChart>
-        <c:barDir val="bar"/>
-        <c:grouping val="clustered"/>
-        <c:varyColors val="1"/>
-        <c:ser>
-          <c:idx val="0"/>
-          <c:order val="0"/>
-          <c:tx>
-            <c:strRef>
-              <c:f>Sheet1!$B$1</c:f>
-              <c:strCache>
-                <c:ptCount val="1"/>
-                <c:pt idx="0">
-                  <c:v>iROAS</c:v>
-                </c:pt>
-              </c:strCache>
-            </c:strRef>
-          </c:tx>
-          <c:invertIfNegative val="1"/>
-          <c:dPt>
-            <c:idx val="0"/>
-            <c:invertIfNegative val="1"/>
-            <c:bubble3D val="0"/>
-            <c:spPr>
-              <a:solidFill>
-                <a:srgbClr val="757575"/>
-              </a:solidFill>
-            </c:spPr>
-            <c:extLst>
-              <c:ext xmlns:c16="http://schemas.microsoft.com/office/drawing/2014/chart" uri="{C3380CC4-5D6E-409C-BE32-E72D297353CC}">
-                <c16:uniqueId val="{00000001-2A71-41A5-99A8-CE6639E760EB}"/>
-              </c:ext>
-            </c:extLst>
-          </c:dPt>
-          <c:dPt>
-            <c:idx val="1"/>
-            <c:invertIfNegative val="1"/>
-            <c:bubble3D val="0"/>
-            <c:spPr>
-              <a:solidFill>
-                <a:srgbClr val="757575"/>
-              </a:solidFill>
-            </c:spPr>
-            <c:extLst>
-              <c:ext xmlns:c16="http://schemas.microsoft.com/office/drawing/2014/chart" uri="{C3380CC4-5D6E-409C-BE32-E72D297353CC}">
-                <c16:uniqueId val="{00000003-2A71-41A5-99A8-CE6639E760EB}"/>
-              </c:ext>
-            </c:extLst>
-          </c:dPt>
-          <c:dPt>
-            <c:idx val="2"/>
-            <c:invertIfNegative val="1"/>
-            <c:bubble3D val="0"/>
-            <c:spPr>
-              <a:solidFill>
-                <a:srgbClr val="0057B8"/>
-              </a:solidFill>
-            </c:spPr>
-            <c:extLst>
-              <c:ext xmlns:c16="http://schemas.microsoft.com/office/drawing/2014/chart" uri="{C3380CC4-5D6E-409C-BE32-E72D297353CC}">
-                <c16:uniqueId val="{00000005-2A71-41A5-99A8-CE6639E760EB}"/>
-              </c:ext>
-            </c:extLst>
-          </c:dPt>
-          <c:dPt>
-            <c:idx val="3"/>
-            <c:invertIfNegative val="1"/>
-            <c:bubble3D val="0"/>
-            <c:spPr>
-              <a:solidFill>
-                <a:srgbClr val="0057B8"/>
-              </a:solidFill>
-            </c:spPr>
-            <c:extLst>
-              <c:ext xmlns:c16="http://schemas.microsoft.com/office/drawing/2014/chart" uri="{C3380CC4-5D6E-409C-BE32-E72D297353CC}">
-                <c16:uniqueId val="{00000007-2A71-41A5-99A8-CE6639E760EB}"/>
-              </c:ext>
-            </c:extLst>
-          </c:dPt>
-          <c:dPt>
-            <c:idx val="4"/>
-            <c:invertIfNegative val="1"/>
-            <c:bubble3D val="0"/>
-            <c:spPr>
-              <a:solidFill>
-                <a:srgbClr val="0057B8"/>
-              </a:solidFill>
-            </c:spPr>
-            <c:extLst>
-              <c:ext xmlns:c16="http://schemas.microsoft.com/office/drawing/2014/chart" uri="{C3380CC4-5D6E-409C-BE32-E72D297353CC}">
-                <c16:uniqueId val="{00000009-2A71-41A5-99A8-CE6639E760EB}"/>
-              </c:ext>
-            </c:extLst>
-          </c:dPt>
-          <c:dLbls>
-            <c:numFmt formatCode="0.0&quot;×&quot;" sourceLinked="0"/>
-            <c:spPr>
-              <a:noFill/>
-              <a:ln>
-                <a:noFill/>
-              </a:ln>
-              <a:effectLst/>
-            </c:spPr>
-            <c:txPr>
-              <a:bodyPr/>
-              <a:lstStyle/>
-              <a:p>
-                <a:pPr>
-                  <a:defRPr sz="1200" b="1">
-                    <a:solidFill>
-                      <a:srgbClr val="333333"/>
-                    </a:solidFill>
-                    <a:latin typeface="Arial"/>
-                  </a:defRPr>
-                </a:pPr>
-                <a:endParaRPr lang="en-US"/>
-              </a:p>
-            </c:txPr>
-            <c:dLblPos val="outEnd"/>
-            <c:showLegendKey val="0"/>
-            <c:showVal val="1"/>
-            <c:showCatName val="0"/>
-            <c:showSerName val="0"/>
-            <c:showPercent val="0"/>
-            <c:showBubbleSize val="0"/>
-            <c:showLeaderLines val="0"/>
-            <c:extLst>
-              <c:ext xmlns:c15="http://schemas.microsoft.com/office/drawing/2012/chart" uri="{CE6537A1-D6FC-4f65-9D91-7224C49458BB}">
-                <c15:showLeaderLines val="0"/>
-              </c:ext>
-            </c:extLst>
-          </c:dLbls>
-          <c:cat>
-            <c:strRef>
-              <c:f>Sheet1!$A$2:$A$6</c:f>
-              <c:strCache>
-                <c:ptCount val="5"/>
-                <c:pt idx="0">
-                  <c:v>Paid Social</c:v>
-                </c:pt>
-                <c:pt idx="1">
-                  <c:v>Paid Search</c:v>
-                </c:pt>
-                <c:pt idx="2">
-                  <c:v>Affiliate</c:v>
-                </c:pt>
-                <c:pt idx="3">
-                  <c:v>SMS</c:v>
-                </c:pt>
-                <c:pt idx="4">
-                  <c:v>Email</c:v>
-                </c:pt>
-              </c:strCache>
-            </c:strRef>
-          </c:cat>
-          <c:val>
-            <c:numRef>
-              <c:f>Sheet1!$B$2:$B$6</c:f>
-              <c:numCache>
-                <c:formatCode>General</c:formatCode>
-                <c:ptCount val="5"/>
-                <c:pt idx="0">
-                  <c:v>0.30263626208104794</c:v>
-                </c:pt>
-                <c:pt idx="1">
-                  <c:v>0.9270704798942021</c:v>
-                </c:pt>
-                <c:pt idx="2">
-                  <c:v>1.2788902238995834</c:v>
-                </c:pt>
-                <c:pt idx="3">
-                  <c:v>2.530420436382097</c:v>
-                </c:pt>
-                <c:pt idx="4">
-                  <c:v>7.1116192565169118</c:v>
-                </c:pt>
-              </c:numCache>
-            </c:numRef>
-          </c:val>
-          <c:extLst>
-            <c:ext xmlns:c16="http://schemas.microsoft.com/office/drawing/2014/chart" uri="{C3380CC4-5D6E-409C-BE32-E72D297353CC}">
-              <c16:uniqueId val="{0000000A-2A71-41A5-99A8-CE6639E760EB}"/>
-            </c:ext>
-          </c:extLst>
-        </c:ser>
-        <c:dLbls>
-          <c:dLblPos val="outEnd"/>
-          <c:showLegendKey val="0"/>
-          <c:showVal val="1"/>
-          <c:showCatName val="0"/>
-          <c:showSerName val="0"/>
-          <c:showPercent val="0"/>
-          <c:showBubbleSize val="0"/>
-        </c:dLbls>
-        <c:gapWidth val="90"/>
-        <c:axId val="-2068027336"/>
-        <c:axId val="-2113994440"/>
-      </c:barChart>
-      <c:catAx>
-        <c:axId val="-2068027336"/>
-        <c:scaling>
-          <c:orientation val="minMax"/>
-        </c:scaling>
-        <c:delete val="0"/>
-        <c:axPos val="l"/>
-        <c:numFmt formatCode="General" sourceLinked="0"/>
-        <c:majorTickMark val="out"/>
-        <c:minorTickMark val="none"/>
-        <c:tickLblPos val="nextTo"/>
-        <c:spPr>
-          <a:ln>
-            <a:solidFill>
-              <a:srgbClr val="D9D9D9"/>
-            </a:solidFill>
-          </a:ln>
-        </c:spPr>
-        <c:txPr>
-          <a:bodyPr/>
-          <a:lstStyle/>
-          <a:p>
-            <a:pPr>
-              <a:defRPr sz="1100">
-                <a:solidFill>
-                  <a:srgbClr val="757575"/>
-                </a:solidFill>
-                <a:latin typeface="Arial"/>
-              </a:defRPr>
-            </a:pPr>
-            <a:endParaRPr lang="en-US"/>
-          </a:p>
-        </c:txPr>
-        <c:crossAx val="-2113994440"/>
-        <c:crosses val="autoZero"/>
-        <c:auto val="1"/>
-        <c:lblAlgn val="ctr"/>
-        <c:lblOffset val="100"/>
-        <c:noMultiLvlLbl val="0"/>
-      </c:catAx>
-      <c:valAx>
-        <c:axId val="-2113994440"/>
-        <c:scaling>
-          <c:orientation val="minMax"/>
-        </c:scaling>
-        <c:delete val="0"/>
-        <c:axPos val="b"/>
-        <c:numFmt formatCode=";;;" sourceLinked="0"/>
-        <c:majorTickMark val="out"/>
-        <c:minorTickMark val="none"/>
-        <c:tickLblPos val="nextTo"/>
-        <c:spPr>
-          <a:ln>
-            <a:noFill/>
-          </a:ln>
-        </c:spPr>
-        <c:crossAx val="-2068027336"/>
-        <c:crosses val="autoZero"/>
-        <c:crossBetween val="between"/>
-      </c:valAx>
-    </c:plotArea>
-    <c:plotVisOnly val="1"/>
-    <c:dispBlanksAs val="gap"/>
-    <c:showDLblsOverMax val="1"/>
-  </c:chart>
-  <c:txPr>
-    <a:bodyPr/>
-    <a:lstStyle/>
-    <a:p>
-      <a:pPr>
-        <a:defRPr sz="1800"/>
-      </a:pPr>
-      <a:endParaRPr lang="en-US"/>
-    </a:p>
-  </c:txPr>
-  <c:externalData r:id="rId1">
-    <c:autoUpdate val="0"/>
-  </c:externalData>
-</c:chartSpace>
-</file>
-
-<file path=ppt/charts/chart3.xml><?xml version="1.0" encoding="utf-8"?>
-<c:chartSpace xmlns:c="http://schemas.openxmlformats.org/drawingml/2006/chart" xmlns:a="http://schemas.openxmlformats.org/drawingml/2006/main" xmlns:r="http://schemas.openxmlformats.org/officeDocument/2006/relationships" xmlns:c16r2="http://schemas.microsoft.com/office/drawing/2015/06/chart">
-  <c:date1904 val="0"/>
-  <c:lang val="en-US"/>
-  <c:roundedCorners val="1"/>
-  <c:style val="2"/>
-  <c:chart>
-    <c:autoTitleDeleted val="1"/>
-    <c:plotArea>
-      <c:layout/>
-      <c:lineChart>
-        <c:grouping val="standard"/>
-        <c:varyColors val="0"/>
-        <c:ser>
-          <c:idx val="0"/>
-          <c:order val="0"/>
-          <c:tx>
-            <c:strRef>
-              <c:f>Sheet1!$B$1</c:f>
-              <c:strCache>
-                <c:ptCount val="1"/>
-                <c:pt idx="0">
-                  <c:v>Core-size availability</c:v>
-                </c:pt>
-              </c:strCache>
-            </c:strRef>
-          </c:tx>
-          <c:spPr>
-            <a:ln w="34925">
-              <a:solidFill>
-                <a:srgbClr val="0057B8"/>
-              </a:solidFill>
-            </a:ln>
-          </c:spPr>
-          <c:marker>
-            <c:symbol val="none"/>
-          </c:marker>
-          <c:dLbls>
-            <c:numFmt formatCode="0%" sourceLinked="0"/>
-            <c:spPr>
-              <a:noFill/>
-              <a:ln>
-                <a:noFill/>
-              </a:ln>
-              <a:effectLst/>
-            </c:spPr>
-            <c:txPr>
-              <a:bodyPr/>
-              <a:lstStyle/>
-              <a:p>
-                <a:pPr>
-                  <a:defRPr sz="1000" b="0">
-                    <a:solidFill>
-                      <a:srgbClr val="0057B8"/>
-                    </a:solidFill>
-                  </a:defRPr>
-                </a:pPr>
-                <a:endParaRPr lang="en-US"/>
-              </a:p>
-            </c:txPr>
-            <c:dLblPos val="b"/>
-            <c:showLegendKey val="0"/>
-            <c:showVal val="1"/>
-            <c:showCatName val="0"/>
-            <c:showSerName val="0"/>
-            <c:showPercent val="0"/>
-            <c:showBubbleSize val="0"/>
-            <c:showLeaderLines val="0"/>
-            <c:extLst>
-              <c:ext xmlns:c15="http://schemas.microsoft.com/office/drawing/2012/chart" uri="{CE6537A1-D6FC-4f65-9D91-7224C49458BB}">
-                <c15:showLeaderLines val="0"/>
-              </c:ext>
-            </c:extLst>
-          </c:dLbls>
-          <c:cat>
-            <c:strRef>
-              <c:f>Sheet1!$A$2:$A$7</c:f>
-              <c:strCache>
-                <c:ptCount val="6"/>
-                <c:pt idx="0">
-                  <c:v>Wk 1</c:v>
-                </c:pt>
-                <c:pt idx="1">
-                  <c:v>Wk 2</c:v>
-                </c:pt>
-                <c:pt idx="2">
-                  <c:v>Wk 3</c:v>
-                </c:pt>
-                <c:pt idx="3">
-                  <c:v>Wk 4</c:v>
-                </c:pt>
-                <c:pt idx="4">
-                  <c:v>Wk 5</c:v>
-                </c:pt>
-                <c:pt idx="5">
-                  <c:v>Wk 6</c:v>
-                </c:pt>
-              </c:strCache>
-            </c:strRef>
-          </c:cat>
-          <c:val>
-            <c:numRef>
-              <c:f>Sheet1!$B$2:$B$7</c:f>
-              <c:numCache>
-                <c:formatCode>General</c:formatCode>
-                <c:ptCount val="6"/>
-                <c:pt idx="0">
-                  <c:v>0.97268571428571426</c:v>
-                </c:pt>
-                <c:pt idx="1">
-                  <c:v>0.97517142857142858</c:v>
-                </c:pt>
-                <c:pt idx="2">
-                  <c:v>0.90817142857142852</c:v>
-                </c:pt>
-                <c:pt idx="3">
-                  <c:v>0.81554285714285712</c:v>
-                </c:pt>
-                <c:pt idx="4">
-                  <c:v>0.73749999999999993</c:v>
-                </c:pt>
-                <c:pt idx="5">
-                  <c:v>0.5618428571428572</c:v>
-                </c:pt>
-              </c:numCache>
-            </c:numRef>
-          </c:val>
-          <c:smooth val="0"/>
-          <c:extLst>
-            <c:ext xmlns:c16="http://schemas.microsoft.com/office/drawing/2014/chart" uri="{C3380CC4-5D6E-409C-BE32-E72D297353CC}">
-              <c16:uniqueId val="{00000000-D05C-49B1-883E-0F806009983A}"/>
-            </c:ext>
-          </c:extLst>
-        </c:ser>
-        <c:ser>
-          <c:idx val="1"/>
-          <c:order val="1"/>
-          <c:tx>
-            <c:strRef>
-              <c:f>Sheet1!$C$1</c:f>
-              <c:strCache>
-                <c:ptCount val="1"/>
-                <c:pt idx="0">
-                  <c:v>Overall in-stock rate</c:v>
-                </c:pt>
-              </c:strCache>
-            </c:strRef>
-          </c:tx>
-          <c:spPr>
-            <a:ln w="25400">
-              <a:solidFill>
-                <a:srgbClr val="757575"/>
-              </a:solidFill>
-            </a:ln>
-          </c:spPr>
-          <c:marker>
-            <c:symbol val="none"/>
-          </c:marker>
-          <c:cat>
-            <c:strRef>
-              <c:f>Sheet1!$A$2:$A$7</c:f>
-              <c:strCache>
-                <c:ptCount val="6"/>
-                <c:pt idx="0">
-                  <c:v>Wk 1</c:v>
-                </c:pt>
-                <c:pt idx="1">
-                  <c:v>Wk 2</c:v>
-                </c:pt>
-                <c:pt idx="2">
-                  <c:v>Wk 3</c:v>
-                </c:pt>
-                <c:pt idx="3">
-                  <c:v>Wk 4</c:v>
-                </c:pt>
-                <c:pt idx="4">
-                  <c:v>Wk 5</c:v>
-                </c:pt>
-                <c:pt idx="5">
-                  <c:v>Wk 6</c:v>
-                </c:pt>
-              </c:strCache>
-            </c:strRef>
-          </c:cat>
-          <c:val>
-            <c:numRef>
-              <c:f>Sheet1!$C$2:$C$7</c:f>
-              <c:numCache>
-                <c:formatCode>General</c:formatCode>
-                <c:ptCount val="6"/>
-                <c:pt idx="0">
-                  <c:v>0.98772857142857151</c:v>
-                </c:pt>
-                <c:pt idx="1">
-                  <c:v>0.98921428571428571</c:v>
-                </c:pt>
-                <c:pt idx="2">
-                  <c:v>0.95195714285714295</c:v>
-                </c:pt>
-                <c:pt idx="3">
-                  <c:v>0.89985714285714291</c:v>
-                </c:pt>
-                <c:pt idx="4">
-                  <c:v>0.8777571428571429</c:v>
-                </c:pt>
-                <c:pt idx="5">
-                  <c:v>0.77852857142857146</c:v>
-                </c:pt>
-              </c:numCache>
-            </c:numRef>
-          </c:val>
-          <c:smooth val="0"/>
-          <c:extLst>
-            <c:ext xmlns:c16="http://schemas.microsoft.com/office/drawing/2014/chart" uri="{C3380CC4-5D6E-409C-BE32-E72D297353CC}">
-              <c16:uniqueId val="{00000001-D05C-49B1-883E-0F806009983A}"/>
-            </c:ext>
-          </c:extLst>
-        </c:ser>
-        <c:dLbls>
-          <c:showLegendKey val="0"/>
-          <c:showVal val="0"/>
-          <c:showCatName val="0"/>
-          <c:showSerName val="0"/>
-          <c:showPercent val="0"/>
-          <c:showBubbleSize val="0"/>
-        </c:dLbls>
-        <c:smooth val="0"/>
-        <c:axId val="2118791784"/>
-        <c:axId val="2140495176"/>
-      </c:lineChart>
-      <c:catAx>
-        <c:axId val="2118791784"/>
-        <c:scaling>
-          <c:orientation val="minMax"/>
-        </c:scaling>
-        <c:delete val="0"/>
-        <c:axPos val="b"/>
-        <c:numFmt formatCode="General" sourceLinked="0"/>
-        <c:majorTickMark val="out"/>
-        <c:minorTickMark val="none"/>
-        <c:tickLblPos val="nextTo"/>
-        <c:spPr>
-          <a:ln>
-            <a:solidFill>
-              <a:srgbClr val="D9D9D9"/>
-            </a:solidFill>
-          </a:ln>
-        </c:spPr>
-        <c:txPr>
-          <a:bodyPr/>
-          <a:lstStyle/>
-          <a:p>
-            <a:pPr>
-              <a:defRPr sz="1000">
-                <a:solidFill>
-                  <a:srgbClr val="757575"/>
-                </a:solidFill>
-                <a:latin typeface="Arial"/>
-              </a:defRPr>
-            </a:pPr>
-            <a:endParaRPr lang="en-US"/>
-          </a:p>
-        </c:txPr>
-        <c:crossAx val="2140495176"/>
-        <c:crosses val="autoZero"/>
-        <c:auto val="1"/>
-        <c:lblAlgn val="ctr"/>
-        <c:lblOffset val="100"/>
-        <c:noMultiLvlLbl val="0"/>
-      </c:catAx>
-      <c:valAx>
-        <c:axId val="2140495176"/>
-        <c:scaling>
-          <c:orientation val="minMax"/>
-          <c:max val="1"/>
-          <c:min val="0.4"/>
-        </c:scaling>
-        <c:delete val="0"/>
-        <c:axPos val="l"/>
-        <c:majorGridlines>
-          <c:spPr>
-            <a:ln w="6350">
-              <a:solidFill>
-                <a:srgbClr val="ECECEC"/>
-              </a:solidFill>
-            </a:ln>
-          </c:spPr>
-        </c:majorGridlines>
-        <c:numFmt formatCode="0%" sourceLinked="0"/>
-        <c:majorTickMark val="out"/>
-        <c:minorTickMark val="none"/>
-        <c:tickLblPos val="nextTo"/>
-        <c:spPr>
-          <a:ln>
-            <a:noFill/>
-          </a:ln>
-        </c:spPr>
-        <c:txPr>
-          <a:bodyPr/>
-          <a:lstStyle/>
-          <a:p>
-            <a:pPr>
-              <a:defRPr sz="900">
-                <a:solidFill>
-                  <a:srgbClr val="757575"/>
-                </a:solidFill>
-                <a:latin typeface="Arial"/>
-              </a:defRPr>
-            </a:pPr>
-            <a:endParaRPr lang="en-US"/>
-          </a:p>
-        </c:txPr>
-        <c:crossAx val="2118791784"/>
-        <c:crosses val="autoZero"/>
-        <c:crossBetween val="between"/>
-        <c:majorUnit val="0.2"/>
-      </c:valAx>
-    </c:plotArea>
-    <c:legend>
-      <c:legendPos val="b"/>
-      <c:overlay val="0"/>
-      <c:txPr>
-        <a:bodyPr/>
-        <a:lstStyle/>
-        <a:p>
-          <a:pPr>
-            <a:defRPr sz="1000">
-              <a:solidFill>
-                <a:srgbClr val="333333"/>
-              </a:solidFill>
-            </a:defRPr>
-          </a:pPr>
-          <a:endParaRPr lang="en-US"/>
-        </a:p>
-      </c:txPr>
-    </c:legend>
-    <c:plotVisOnly val="1"/>
-    <c:dispBlanksAs val="gap"/>
-    <c:showDLblsOverMax val="0"/>
-  </c:chart>
-  <c:txPr>
-    <a:bodyPr/>
-    <a:lstStyle/>
-    <a:p>
-      <a:pPr>
-        <a:defRPr sz="1800"/>
-      </a:pPr>
-      <a:endParaRPr lang="en-US"/>
-    </a:p>
-  </c:txPr>
-  <c:externalData r:id="rId1">
-    <c:autoUpdate val="0"/>
-  </c:externalData>
-</c:chartSpace>
-</file>
-
 <file path=ppt/comments/modernComment_101_0.xml><?xml version="1.0" encoding="utf-8"?>
 <p188:cmLst xmlns:a="http://schemas.openxmlformats.org/drawingml/2006/main" xmlns:r="http://schemas.openxmlformats.org/officeDocument/2006/relationships" xmlns:p188="http://schemas.microsoft.com/office/powerpoint/2018/8/main">
   <p188:cm id="{9D37015C-7D34-49FA-BAA9-B6942D33995A}" authorId="{F7CB7528-0317-1151-A7B7-34D5B6A94F6F}" created="2026-07-17T16:24:44.055">
@@ -1078,6 +189,442 @@
 </p188:cmLst>
 </file>
 
+<file path=ppt/notesMasters/notesMaster1.xml><?xml version="1.0" encoding="utf-8"?>
+<p:notesMaster xmlns:a="http://schemas.openxmlformats.org/drawingml/2006/main" xmlns:r="http://schemas.openxmlformats.org/officeDocument/2006/relationships" xmlns:p="http://schemas.openxmlformats.org/presentationml/2006/main">
+  <p:cSld>
+    <p:bg>
+      <p:bgRef idx="1001">
+        <a:schemeClr val="bg1"/>
+      </p:bgRef>
+    </p:bg>
+    <p:spTree>
+      <p:nvGrpSpPr>
+        <p:cNvPr id="1" name=""/>
+        <p:cNvGrpSpPr/>
+        <p:nvPr/>
+      </p:nvGrpSpPr>
+      <p:grpSpPr>
+        <a:xfrm>
+          <a:off x="0" y="0"/>
+          <a:ext cx="0" cy="0"/>
+          <a:chOff x="0" y="0"/>
+          <a:chExt cx="0" cy="0"/>
+        </a:xfrm>
+      </p:grpSpPr>
+      <p:sp>
+        <p:nvSpPr>
+          <p:cNvPr id="2" name="Header Placeholder 1"/>
+          <p:cNvSpPr>
+            <a:spLocks noGrp="1"/>
+          </p:cNvSpPr>
+          <p:nvPr>
+            <p:ph type="hdr" sz="quarter"/>
+          </p:nvPr>
+        </p:nvSpPr>
+        <p:spPr>
+          <a:xfrm>
+            <a:off x="0" y="0"/>
+            <a:ext cx="2971800" cy="458788"/>
+          </a:xfrm>
+          <a:prstGeom prst="rect">
+            <a:avLst/>
+          </a:prstGeom>
+        </p:spPr>
+        <p:txBody>
+          <a:bodyPr vert="horz" lIns="91440" tIns="45720" rIns="91440" bIns="45720" rtlCol="0"/>
+          <a:lstStyle>
+            <a:lvl1pPr algn="l">
+              <a:defRPr sz="1200"/>
+            </a:lvl1pPr>
+          </a:lstStyle>
+          <a:p>
+            <a:endParaRPr lang="en-US"/>
+          </a:p>
+        </p:txBody>
+      </p:sp>
+      <p:sp>
+        <p:nvSpPr>
+          <p:cNvPr id="3" name="Date Placeholder 2"/>
+          <p:cNvSpPr>
+            <a:spLocks noGrp="1"/>
+          </p:cNvSpPr>
+          <p:nvPr>
+            <p:ph type="dt" idx="1"/>
+          </p:nvPr>
+        </p:nvSpPr>
+        <p:spPr>
+          <a:xfrm>
+            <a:off x="3884613" y="0"/>
+            <a:ext cx="2971800" cy="458788"/>
+          </a:xfrm>
+          <a:prstGeom prst="rect">
+            <a:avLst/>
+          </a:prstGeom>
+        </p:spPr>
+        <p:txBody>
+          <a:bodyPr vert="horz" lIns="91440" tIns="45720" rIns="91440" bIns="45720" rtlCol="0"/>
+          <a:lstStyle>
+            <a:lvl1pPr algn="r">
+              <a:defRPr sz="1200"/>
+            </a:lvl1pPr>
+          </a:lstStyle>
+          <a:p>
+            <a:fld id="{7DC25129-58E4-4099-B0F9-A79165BFBD32}" type="datetimeFigureOut">
+              <a:rPr lang="en-US" smtClean="0"/>
+              <a:t>7/18/2026</a:t>
+            </a:fld>
+            <a:endParaRPr lang="en-US"/>
+          </a:p>
+        </p:txBody>
+      </p:sp>
+      <p:sp>
+        <p:nvSpPr>
+          <p:cNvPr id="4" name="Slide Image Placeholder 3"/>
+          <p:cNvSpPr>
+            <a:spLocks noGrp="1" noRot="1" noChangeAspect="1"/>
+          </p:cNvSpPr>
+          <p:nvPr>
+            <p:ph type="sldImg" idx="2"/>
+          </p:nvPr>
+        </p:nvSpPr>
+        <p:spPr>
+          <a:xfrm>
+            <a:off x="685800" y="1143000"/>
+            <a:ext cx="5486400" cy="3086100"/>
+          </a:xfrm>
+          <a:prstGeom prst="rect">
+            <a:avLst/>
+          </a:prstGeom>
+          <a:noFill/>
+          <a:ln w="12700">
+            <a:solidFill>
+              <a:prstClr val="black"/>
+            </a:solidFill>
+          </a:ln>
+        </p:spPr>
+        <p:txBody>
+          <a:bodyPr vert="horz" lIns="91440" tIns="45720" rIns="91440" bIns="45720" rtlCol="0" anchor="ctr"/>
+          <a:lstStyle/>
+          <a:p>
+            <a:endParaRPr lang="en-US"/>
+          </a:p>
+        </p:txBody>
+      </p:sp>
+      <p:sp>
+        <p:nvSpPr>
+          <p:cNvPr id="5" name="Notes Placeholder 4"/>
+          <p:cNvSpPr>
+            <a:spLocks noGrp="1"/>
+          </p:cNvSpPr>
+          <p:nvPr>
+            <p:ph type="body" sz="quarter" idx="3"/>
+          </p:nvPr>
+        </p:nvSpPr>
+        <p:spPr>
+          <a:xfrm>
+            <a:off x="685800" y="4400550"/>
+            <a:ext cx="5486400" cy="3600450"/>
+          </a:xfrm>
+          <a:prstGeom prst="rect">
+            <a:avLst/>
+          </a:prstGeom>
+        </p:spPr>
+        <p:txBody>
+          <a:bodyPr vert="horz" lIns="91440" tIns="45720" rIns="91440" bIns="45720" rtlCol="0"/>
+          <a:lstStyle/>
+          <a:p>
+            <a:pPr lvl="0"/>
+            <a:r>
+              <a:rPr lang="en-US"/>
+              <a:t>Click to edit Master text styles</a:t>
+            </a:r>
+          </a:p>
+          <a:p>
+            <a:pPr lvl="1"/>
+            <a:r>
+              <a:rPr lang="en-US"/>
+              <a:t>Second level</a:t>
+            </a:r>
+          </a:p>
+          <a:p>
+            <a:pPr lvl="2"/>
+            <a:r>
+              <a:rPr lang="en-US"/>
+              <a:t>Third level</a:t>
+            </a:r>
+          </a:p>
+          <a:p>
+            <a:pPr lvl="3"/>
+            <a:r>
+              <a:rPr lang="en-US"/>
+              <a:t>Fourth level</a:t>
+            </a:r>
+          </a:p>
+          <a:p>
+            <a:pPr lvl="4"/>
+            <a:r>
+              <a:rPr lang="en-US"/>
+              <a:t>Fifth level</a:t>
+            </a:r>
+          </a:p>
+        </p:txBody>
+      </p:sp>
+      <p:sp>
+        <p:nvSpPr>
+          <p:cNvPr id="6" name="Footer Placeholder 5"/>
+          <p:cNvSpPr>
+            <a:spLocks noGrp="1"/>
+          </p:cNvSpPr>
+          <p:nvPr>
+            <p:ph type="ftr" sz="quarter" idx="4"/>
+          </p:nvPr>
+        </p:nvSpPr>
+        <p:spPr>
+          <a:xfrm>
+            <a:off x="0" y="8685213"/>
+            <a:ext cx="2971800" cy="458787"/>
+          </a:xfrm>
+          <a:prstGeom prst="rect">
+            <a:avLst/>
+          </a:prstGeom>
+        </p:spPr>
+        <p:txBody>
+          <a:bodyPr vert="horz" lIns="91440" tIns="45720" rIns="91440" bIns="45720" rtlCol="0" anchor="b"/>
+          <a:lstStyle>
+            <a:lvl1pPr algn="l">
+              <a:defRPr sz="1200"/>
+            </a:lvl1pPr>
+          </a:lstStyle>
+          <a:p>
+            <a:endParaRPr lang="en-US"/>
+          </a:p>
+        </p:txBody>
+      </p:sp>
+      <p:sp>
+        <p:nvSpPr>
+          <p:cNvPr id="7" name="Slide Number Placeholder 6"/>
+          <p:cNvSpPr>
+            <a:spLocks noGrp="1"/>
+          </p:cNvSpPr>
+          <p:nvPr>
+            <p:ph type="sldNum" sz="quarter" idx="5"/>
+          </p:nvPr>
+        </p:nvSpPr>
+        <p:spPr>
+          <a:xfrm>
+            <a:off x="3884613" y="8685213"/>
+            <a:ext cx="2971800" cy="458787"/>
+          </a:xfrm>
+          <a:prstGeom prst="rect">
+            <a:avLst/>
+          </a:prstGeom>
+        </p:spPr>
+        <p:txBody>
+          <a:bodyPr vert="horz" lIns="91440" tIns="45720" rIns="91440" bIns="45720" rtlCol="0" anchor="b"/>
+          <a:lstStyle>
+            <a:lvl1pPr algn="r">
+              <a:defRPr sz="1200"/>
+            </a:lvl1pPr>
+          </a:lstStyle>
+          <a:p>
+            <a:fld id="{52C4B57B-4552-441A-AA75-72A3C605ADE9}" type="slidenum">
+              <a:rPr lang="en-US" smtClean="0"/>
+              <a:t>‹#›</a:t>
+            </a:fld>
+            <a:endParaRPr lang="en-US"/>
+          </a:p>
+        </p:txBody>
+      </p:sp>
+    </p:spTree>
+    <p:extLst>
+      <p:ext uri="{BB962C8B-B14F-4D97-AF65-F5344CB8AC3E}">
+        <p14:creationId xmlns:p14="http://schemas.microsoft.com/office/powerpoint/2010/main" val="4061541000"/>
+      </p:ext>
+    </p:extLst>
+  </p:cSld>
+  <p:clrMap bg1="lt1" tx1="dk1" bg2="lt2" tx2="dk2" accent1="accent1" accent2="accent2" accent3="accent3" accent4="accent4" accent5="accent5" accent6="accent6" hlink="hlink" folHlink="folHlink"/>
+  <p:notesStyle>
+    <a:lvl1pPr marL="0" algn="l" defTabSz="914400" rtl="0" eaLnBrk="1" latinLnBrk="0" hangingPunct="1">
+      <a:defRPr sz="1200" kern="1200">
+        <a:solidFill>
+          <a:schemeClr val="tx1"/>
+        </a:solidFill>
+        <a:latin typeface="+mn-lt"/>
+        <a:ea typeface="+mn-ea"/>
+        <a:cs typeface="+mn-cs"/>
+      </a:defRPr>
+    </a:lvl1pPr>
+    <a:lvl2pPr marL="457200" algn="l" defTabSz="914400" rtl="0" eaLnBrk="1" latinLnBrk="0" hangingPunct="1">
+      <a:defRPr sz="1200" kern="1200">
+        <a:solidFill>
+          <a:schemeClr val="tx1"/>
+        </a:solidFill>
+        <a:latin typeface="+mn-lt"/>
+        <a:ea typeface="+mn-ea"/>
+        <a:cs typeface="+mn-cs"/>
+      </a:defRPr>
+    </a:lvl2pPr>
+    <a:lvl3pPr marL="914400" algn="l" defTabSz="914400" rtl="0" eaLnBrk="1" latinLnBrk="0" hangingPunct="1">
+      <a:defRPr sz="1200" kern="1200">
+        <a:solidFill>
+          <a:schemeClr val="tx1"/>
+        </a:solidFill>
+        <a:latin typeface="+mn-lt"/>
+        <a:ea typeface="+mn-ea"/>
+        <a:cs typeface="+mn-cs"/>
+      </a:defRPr>
+    </a:lvl3pPr>
+    <a:lvl4pPr marL="1371600" algn="l" defTabSz="914400" rtl="0" eaLnBrk="1" latinLnBrk="0" hangingPunct="1">
+      <a:defRPr sz="1200" kern="1200">
+        <a:solidFill>
+          <a:schemeClr val="tx1"/>
+        </a:solidFill>
+        <a:latin typeface="+mn-lt"/>
+        <a:ea typeface="+mn-ea"/>
+        <a:cs typeface="+mn-cs"/>
+      </a:defRPr>
+    </a:lvl4pPr>
+    <a:lvl5pPr marL="1828800" algn="l" defTabSz="914400" rtl="0" eaLnBrk="1" latinLnBrk="0" hangingPunct="1">
+      <a:defRPr sz="1200" kern="1200">
+        <a:solidFill>
+          <a:schemeClr val="tx1"/>
+        </a:solidFill>
+        <a:latin typeface="+mn-lt"/>
+        <a:ea typeface="+mn-ea"/>
+        <a:cs typeface="+mn-cs"/>
+      </a:defRPr>
+    </a:lvl5pPr>
+    <a:lvl6pPr marL="2286000" algn="l" defTabSz="914400" rtl="0" eaLnBrk="1" latinLnBrk="0" hangingPunct="1">
+      <a:defRPr sz="1200" kern="1200">
+        <a:solidFill>
+          <a:schemeClr val="tx1"/>
+        </a:solidFill>
+        <a:latin typeface="+mn-lt"/>
+        <a:ea typeface="+mn-ea"/>
+        <a:cs typeface="+mn-cs"/>
+      </a:defRPr>
+    </a:lvl6pPr>
+    <a:lvl7pPr marL="2743200" algn="l" defTabSz="914400" rtl="0" eaLnBrk="1" latinLnBrk="0" hangingPunct="1">
+      <a:defRPr sz="1200" kern="1200">
+        <a:solidFill>
+          <a:schemeClr val="tx1"/>
+        </a:solidFill>
+        <a:latin typeface="+mn-lt"/>
+        <a:ea typeface="+mn-ea"/>
+        <a:cs typeface="+mn-cs"/>
+      </a:defRPr>
+    </a:lvl7pPr>
+    <a:lvl8pPr marL="3200400" algn="l" defTabSz="914400" rtl="0" eaLnBrk="1" latinLnBrk="0" hangingPunct="1">
+      <a:defRPr sz="1200" kern="1200">
+        <a:solidFill>
+          <a:schemeClr val="tx1"/>
+        </a:solidFill>
+        <a:latin typeface="+mn-lt"/>
+        <a:ea typeface="+mn-ea"/>
+        <a:cs typeface="+mn-cs"/>
+      </a:defRPr>
+    </a:lvl8pPr>
+    <a:lvl9pPr marL="3657600" algn="l" defTabSz="914400" rtl="0" eaLnBrk="1" latinLnBrk="0" hangingPunct="1">
+      <a:defRPr sz="1200" kern="1200">
+        <a:solidFill>
+          <a:schemeClr val="tx1"/>
+        </a:solidFill>
+        <a:latin typeface="+mn-lt"/>
+        <a:ea typeface="+mn-ea"/>
+        <a:cs typeface="+mn-cs"/>
+      </a:defRPr>
+    </a:lvl9pPr>
+  </p:notesStyle>
+</p:notesMaster>
+</file>
+
+<file path=ppt/notesSlides/notesSlide1.xml><?xml version="1.0" encoding="utf-8"?>
+<p:notes xmlns:a="http://schemas.openxmlformats.org/drawingml/2006/main" xmlns:r="http://schemas.openxmlformats.org/officeDocument/2006/relationships" xmlns:p="http://schemas.openxmlformats.org/presentationml/2006/main">
+  <p:cSld>
+    <p:spTree>
+      <p:nvGrpSpPr>
+        <p:cNvPr id="1" name=""/>
+        <p:cNvGrpSpPr/>
+        <p:nvPr/>
+      </p:nvGrpSpPr>
+      <p:grpSpPr>
+        <a:xfrm>
+          <a:off x="0" y="0"/>
+          <a:ext cx="0" cy="0"/>
+          <a:chOff x="0" y="0"/>
+          <a:chExt cx="0" cy="0"/>
+        </a:xfrm>
+      </p:grpSpPr>
+      <p:sp>
+        <p:nvSpPr>
+          <p:cNvPr id="2" name="Slide Image Placeholder 1"/>
+          <p:cNvSpPr>
+            <a:spLocks noGrp="1" noRot="1" noChangeAspect="1"/>
+          </p:cNvSpPr>
+          <p:nvPr>
+            <p:ph type="sldImg"/>
+          </p:nvPr>
+        </p:nvSpPr>
+        <p:spPr/>
+      </p:sp>
+      <p:sp>
+        <p:nvSpPr>
+          <p:cNvPr id="3" name="Notes Placeholder 2"/>
+          <p:cNvSpPr>
+            <a:spLocks noGrp="1"/>
+          </p:cNvSpPr>
+          <p:nvPr>
+            <p:ph type="body" idx="1"/>
+          </p:nvPr>
+        </p:nvSpPr>
+        <p:spPr/>
+        <p:txBody>
+          <a:bodyPr/>
+          <a:lstStyle/>
+          <a:p>
+            <a:r>
+              <a:rPr lang="en-US" dirty="0"/>
+              <a:t>In reality, we would want a more nuanced, geo and channel based estimate of incremental ROAS instead of a uniform application. </a:t>
+            </a:r>
+          </a:p>
+        </p:txBody>
+      </p:sp>
+      <p:sp>
+        <p:nvSpPr>
+          <p:cNvPr id="4" name="Slide Number Placeholder 3"/>
+          <p:cNvSpPr>
+            <a:spLocks noGrp="1"/>
+          </p:cNvSpPr>
+          <p:nvPr>
+            <p:ph type="sldNum" sz="quarter" idx="5"/>
+          </p:nvPr>
+        </p:nvSpPr>
+        <p:spPr/>
+        <p:txBody>
+          <a:bodyPr/>
+          <a:lstStyle/>
+          <a:p>
+            <a:fld id="{52C4B57B-4552-441A-AA75-72A3C605ADE9}" type="slidenum">
+              <a:rPr lang="en-US" smtClean="0"/>
+              <a:t>10</a:t>
+            </a:fld>
+            <a:endParaRPr lang="en-US"/>
+          </a:p>
+        </p:txBody>
+      </p:sp>
+    </p:spTree>
+    <p:extLst>
+      <p:ext uri="{BB962C8B-B14F-4D97-AF65-F5344CB8AC3E}">
+        <p14:creationId xmlns:p14="http://schemas.microsoft.com/office/powerpoint/2010/main" val="3239551481"/>
+      </p:ext>
+    </p:extLst>
+  </p:cSld>
+  <p:clrMapOvr>
+    <a:masterClrMapping/>
+  </p:clrMapOvr>
+</p:notes>
+</file>
+
 <file path=ppt/slideLayouts/slideLayout1.xml><?xml version="1.0" encoding="utf-8"?>
 <p:sldLayout xmlns:a="http://schemas.openxmlformats.org/drawingml/2006/main" xmlns:r="http://schemas.openxmlformats.org/officeDocument/2006/relationships" xmlns:p="http://schemas.openxmlformats.org/presentationml/2006/main" type="title" preserve="1">
   <p:cSld name="Title Slide">
@@ -1257,7 +804,7 @@
           <a:p>
             <a:fld id="{5BCAD085-E8A6-8845-BD4E-CB4CCA059FC4}" type="datetimeFigureOut">
               <a:rPr lang="en-US" smtClean="0"/>
-              <a:t>7/17/2026</a:t>
+              <a:t>7/18/2026</a:t>
             </a:fld>
             <a:endParaRPr lang="en-US"/>
           </a:p>
@@ -1425,7 +972,7 @@
           <a:p>
             <a:fld id="{5BCAD085-E8A6-8845-BD4E-CB4CCA059FC4}" type="datetimeFigureOut">
               <a:rPr lang="en-US" smtClean="0"/>
-              <a:t>7/17/2026</a:t>
+              <a:t>7/18/2026</a:t>
             </a:fld>
             <a:endParaRPr lang="en-US"/>
           </a:p>
@@ -1603,7 +1150,7 @@
           <a:p>
             <a:fld id="{5BCAD085-E8A6-8845-BD4E-CB4CCA059FC4}" type="datetimeFigureOut">
               <a:rPr lang="en-US" smtClean="0"/>
-              <a:t>7/17/2026</a:t>
+              <a:t>7/18/2026</a:t>
             </a:fld>
             <a:endParaRPr lang="en-US"/>
           </a:p>
@@ -1771,7 +1318,7 @@
           <a:p>
             <a:fld id="{5BCAD085-E8A6-8845-BD4E-CB4CCA059FC4}" type="datetimeFigureOut">
               <a:rPr lang="en-US" smtClean="0"/>
-              <a:t>7/17/2026</a:t>
+              <a:t>7/18/2026</a:t>
             </a:fld>
             <a:endParaRPr lang="en-US"/>
           </a:p>
@@ -2016,7 +1563,7 @@
           <a:p>
             <a:fld id="{5BCAD085-E8A6-8845-BD4E-CB4CCA059FC4}" type="datetimeFigureOut">
               <a:rPr lang="en-US" smtClean="0"/>
-              <a:t>7/17/2026</a:t>
+              <a:t>7/18/2026</a:t>
             </a:fld>
             <a:endParaRPr lang="en-US"/>
           </a:p>
@@ -2301,7 +1848,7 @@
           <a:p>
             <a:fld id="{5BCAD085-E8A6-8845-BD4E-CB4CCA059FC4}" type="datetimeFigureOut">
               <a:rPr lang="en-US" smtClean="0"/>
-              <a:t>7/17/2026</a:t>
+              <a:t>7/18/2026</a:t>
             </a:fld>
             <a:endParaRPr lang="en-US"/>
           </a:p>
@@ -2720,7 +2267,7 @@
           <a:p>
             <a:fld id="{5BCAD085-E8A6-8845-BD4E-CB4CCA059FC4}" type="datetimeFigureOut">
               <a:rPr lang="en-US" smtClean="0"/>
-              <a:t>7/17/2026</a:t>
+              <a:t>7/18/2026</a:t>
             </a:fld>
             <a:endParaRPr lang="en-US"/>
           </a:p>
@@ -2837,7 +2384,7 @@
           <a:p>
             <a:fld id="{5BCAD085-E8A6-8845-BD4E-CB4CCA059FC4}" type="datetimeFigureOut">
               <a:rPr lang="en-US" smtClean="0"/>
-              <a:t>7/17/2026</a:t>
+              <a:t>7/18/2026</a:t>
             </a:fld>
             <a:endParaRPr lang="en-US"/>
           </a:p>
@@ -2932,7 +2479,7 @@
           <a:p>
             <a:fld id="{5BCAD085-E8A6-8845-BD4E-CB4CCA059FC4}" type="datetimeFigureOut">
               <a:rPr lang="en-US" smtClean="0"/>
-              <a:t>7/17/2026</a:t>
+              <a:t>7/18/2026</a:t>
             </a:fld>
             <a:endParaRPr lang="en-US"/>
           </a:p>
@@ -3207,7 +2754,7 @@
           <a:p>
             <a:fld id="{5BCAD085-E8A6-8845-BD4E-CB4CCA059FC4}" type="datetimeFigureOut">
               <a:rPr lang="en-US" smtClean="0"/>
-              <a:t>7/17/2026</a:t>
+              <a:t>7/18/2026</a:t>
             </a:fld>
             <a:endParaRPr lang="en-US"/>
           </a:p>
@@ -3459,7 +3006,7 @@
           <a:p>
             <a:fld id="{5BCAD085-E8A6-8845-BD4E-CB4CCA059FC4}" type="datetimeFigureOut">
               <a:rPr lang="en-US" smtClean="0"/>
-              <a:t>7/17/2026</a:t>
+              <a:t>7/18/2026</a:t>
             </a:fld>
             <a:endParaRPr lang="en-US"/>
           </a:p>
@@ -3670,7 +3217,7 @@
           <a:p>
             <a:fld id="{5BCAD085-E8A6-8845-BD4E-CB4CCA059FC4}" type="datetimeFigureOut">
               <a:rPr lang="en-US" smtClean="0"/>
-              <a:t>7/17/2026</a:t>
+              <a:t>7/18/2026</a:t>
             </a:fld>
             <a:endParaRPr lang="en-US"/>
           </a:p>
@@ -4448,6 +3995,36 @@
           <a:chExt cx="0" cy="0"/>
         </a:xfrm>
       </p:grpSpPr>
+      <p:pic>
+        <p:nvPicPr>
+          <p:cNvPr id="13" name="Picture 12" descr="The image displays a bar chart comparing the incremental Return on Advertising Spend (ROAS) across different marketing channels, with Email being the most effective at 8.7x ROAS and SMS at 3.2x ROAS.&#10;&#10;AI-generated content may be incorrect.">
+            <a:extLst>
+              <a:ext uri="{FF2B5EF4-FFF2-40B4-BE49-F238E27FC236}">
+                <a16:creationId xmlns:a16="http://schemas.microsoft.com/office/drawing/2014/main" id="{B3697564-00AE-4773-C959-74D5978E1528}"/>
+              </a:ext>
+            </a:extLst>
+          </p:cNvPr>
+          <p:cNvPicPr>
+            <a:picLocks noChangeAspect="1"/>
+          </p:cNvPicPr>
+          <p:nvPr/>
+        </p:nvPicPr>
+        <p:blipFill>
+          <a:blip r:embed="rId3"/>
+          <a:stretch>
+            <a:fillRect/>
+          </a:stretch>
+        </p:blipFill>
+        <p:spPr>
+          <a:xfrm>
+            <a:off x="172139" y="1456092"/>
+            <a:ext cx="6712610" cy="3855849"/>
+          </a:xfrm>
+          <a:prstGeom prst="rect">
+            <a:avLst/>
+          </a:prstGeom>
+        </p:spPr>
+      </p:pic>
       <p:sp>
         <p:nvSpPr>
           <p:cNvPr id="2" name="TextBox 1"/>
@@ -4491,8 +4068,8 @@
         </p:nvSpPr>
         <p:spPr>
           <a:xfrm>
-            <a:off x="502920" y="566928"/>
-            <a:ext cx="11201400" cy="777240"/>
+            <a:off x="502920" y="572944"/>
+            <a:ext cx="11201400" cy="353943"/>
           </a:xfrm>
           <a:prstGeom prst="rect">
             <a:avLst/>
@@ -4507,70 +4084,23 @@
           <a:p>
             <a:pPr algn="l"/>
             <a:r>
-              <a:rPr sz="2300" b="0" i="0">
+              <a:rPr lang="en-US" sz="2300" b="0" i="0" dirty="0">
                 <a:solidFill>
                   <a:srgbClr val="000000"/>
                 </a:solidFill>
                 <a:latin typeface="Georgia"/>
               </a:rPr>
-              <a:t>CRM and affiliate cleared breakeven on incremental ROAS; paid media did not</a:t>
-            </a:r>
-          </a:p>
-        </p:txBody>
-      </p:sp>
-      <p:sp>
-        <p:nvSpPr>
-          <p:cNvPr id="4" name="TextBox 3"/>
-          <p:cNvSpPr txBox="1"/>
-          <p:nvPr/>
-        </p:nvSpPr>
-        <p:spPr>
-          <a:xfrm>
-            <a:off x="502920" y="1481328"/>
-            <a:ext cx="6035040" cy="274320"/>
-          </a:xfrm>
-          <a:prstGeom prst="rect">
-            <a:avLst/>
-          </a:prstGeom>
-          <a:noFill/>
-        </p:spPr>
-        <p:txBody>
-          <a:bodyPr wrap="square" lIns="0" tIns="0" rIns="0" bIns="0" anchor="t">
-            <a:spAutoFit/>
-          </a:bodyPr>
-          <a:lstStyle/>
-          <a:p>
-            <a:pPr algn="l"/>
-            <a:r>
-              <a:rPr sz="1000" b="1" i="0">
-                <a:solidFill>
-                  <a:srgbClr val="757575"/>
-                </a:solidFill>
-                <a:latin typeface="Arial"/>
-              </a:rPr>
-              <a:t>INCREMENTAL ROAS BY CHANNEL (BREAKEVEN = 1.0×)</a:t>
-            </a:r>
-          </a:p>
-        </p:txBody>
-      </p:sp>
-      <p:graphicFrame>
-        <p:nvGraphicFramePr>
-          <p:cNvPr id="5" name="Chart 4"/>
-          <p:cNvGraphicFramePr>
-            <a:graphicFrameLocks noGrp="1"/>
-          </p:cNvGraphicFramePr>
-          <p:nvPr/>
-        </p:nvGraphicFramePr>
-        <p:xfrm>
-          <a:off x="365760" y="1828800"/>
-          <a:ext cx="6309360" cy="4114800"/>
-        </p:xfrm>
-        <a:graphic>
-          <a:graphicData uri="http://schemas.openxmlformats.org/drawingml/2006/chart">
-            <c:chart xmlns:c="http://schemas.openxmlformats.org/drawingml/2006/chart" xmlns:r="http://schemas.openxmlformats.org/officeDocument/2006/relationships" r:id="rId2"/>
-          </a:graphicData>
-        </a:graphic>
-      </p:graphicFrame>
+              <a:t>All channels cleared breakeven except for paid social</a:t>
+            </a:r>
+            <a:endParaRPr sz="2300" b="0" i="0" dirty="0">
+              <a:solidFill>
+                <a:srgbClr val="000000"/>
+              </a:solidFill>
+              <a:latin typeface="Georgia"/>
+            </a:endParaRPr>
+          </a:p>
+        </p:txBody>
+      </p:sp>
       <p:sp>
         <p:nvSpPr>
           <p:cNvPr id="6" name="TextBox 5"/>
@@ -4579,8 +4109,8 @@
         </p:nvSpPr>
         <p:spPr>
           <a:xfrm>
-            <a:off x="7086600" y="1600200"/>
-            <a:ext cx="4572000" cy="4480560"/>
+            <a:off x="366963" y="5119841"/>
+            <a:ext cx="11337357" cy="1161536"/>
           </a:xfrm>
           <a:prstGeom prst="rect">
             <a:avLst/>
@@ -4602,7 +4132,7 @@
               </a:spcAft>
             </a:pPr>
             <a:r>
-              <a:rPr sz="1150" b="1" i="0">
+              <a:rPr sz="1150" b="1" i="0" dirty="0">
                 <a:solidFill>
                   <a:srgbClr val="333333"/>
                 </a:solidFill>
@@ -4611,14 +4141,47 @@
               <a:t>•  CRM: </a:t>
             </a:r>
             <a:r>
-              <a:rPr sz="1150" b="0" i="0">
+              <a:rPr sz="1150" b="0" i="0" dirty="0">
                 <a:solidFill>
                   <a:srgbClr val="333333"/>
                 </a:solidFill>
                 <a:latin typeface="Arial"/>
               </a:rPr>
-              <a:t>8% of spend, 44% of attributed revenue. Efficient activation of existing buyers — though without a holdout, high-intent audiences inflate its read.</a:t>
-            </a:r>
+              <a:t>8% of spend, 4</a:t>
+            </a:r>
+            <a:r>
+              <a:rPr lang="en-US" sz="1150" b="0" i="0" dirty="0">
+                <a:solidFill>
+                  <a:srgbClr val="333333"/>
+                </a:solidFill>
+                <a:latin typeface="Arial"/>
+              </a:rPr>
+              <a:t>7</a:t>
+            </a:r>
+            <a:r>
+              <a:rPr sz="1150" b="0" i="0" dirty="0">
+                <a:solidFill>
+                  <a:srgbClr val="333333"/>
+                </a:solidFill>
+                <a:latin typeface="Arial"/>
+              </a:rPr>
+              <a:t>% of attributed revenue. </a:t>
+            </a:r>
+            <a:r>
+              <a:rPr lang="en-US" sz="1150" b="0" i="0" dirty="0">
+                <a:solidFill>
+                  <a:srgbClr val="333333"/>
+                </a:solidFill>
+                <a:latin typeface="Arial"/>
+              </a:rPr>
+              <a:t>Efficient activation of an existing low-funnel audience. High-intent buyers inflate the metric.</a:t>
+            </a:r>
+            <a:endParaRPr sz="1150" b="0" i="0" dirty="0">
+              <a:solidFill>
+                <a:srgbClr val="333333"/>
+              </a:solidFill>
+              <a:latin typeface="Arial"/>
+            </a:endParaRPr>
           </a:p>
           <a:p>
             <a:pPr algn="l">
@@ -4630,7 +4193,7 @@
               </a:spcAft>
             </a:pPr>
             <a:r>
-              <a:rPr sz="1150" b="1" i="0">
+              <a:rPr sz="1150" b="1" i="0" dirty="0">
                 <a:solidFill>
                   <a:srgbClr val="333333"/>
                 </a:solidFill>
@@ -4639,17 +4202,194 @@
               <a:t>•  Paid social: </a:t>
             </a:r>
             <a:r>
-              <a:rPr sz="1150" b="0" i="0">
+              <a:rPr lang="en-US" sz="1150" dirty="0">
                 <a:solidFill>
                   <a:srgbClr val="333333"/>
                 </a:solidFill>
                 <a:latin typeface="Arial"/>
               </a:rPr>
-              <a:t>59% of spend at 0.3× iROAS — but it acquired 629 of 1,499 new customers (42%) at $147 CAC vs $212 early value. It pays back as acquisition, not immediate revenue; judge it on CAC and LTV.</a:t>
-            </a:r>
-          </a:p>
-          <a:p>
-            <a:pPr algn="l">
+              <a:t>60</a:t>
+            </a:r>
+            <a:r>
+              <a:rPr sz="1150" b="0" i="0" dirty="0">
+                <a:solidFill>
+                  <a:srgbClr val="333333"/>
+                </a:solidFill>
+                <a:latin typeface="Arial"/>
+              </a:rPr>
+              <a:t>% of spend at </a:t>
+            </a:r>
+            <a:r>
+              <a:rPr lang="en-US" sz="1150" b="0" i="0" dirty="0">
+                <a:solidFill>
+                  <a:srgbClr val="333333"/>
+                </a:solidFill>
+                <a:latin typeface="Arial"/>
+              </a:rPr>
+              <a:t>only </a:t>
+            </a:r>
+            <a:r>
+              <a:rPr sz="1150" b="0" i="0" dirty="0">
+                <a:solidFill>
+                  <a:srgbClr val="333333"/>
+                </a:solidFill>
+                <a:latin typeface="Arial"/>
+              </a:rPr>
+              <a:t>0.3× </a:t>
+            </a:r>
+            <a:r>
+              <a:rPr sz="1150" b="0" i="0" dirty="0" err="1">
+                <a:solidFill>
+                  <a:srgbClr val="333333"/>
+                </a:solidFill>
+                <a:latin typeface="Arial"/>
+              </a:rPr>
+              <a:t>iROAS</a:t>
+            </a:r>
+            <a:r>
+              <a:rPr lang="en-US" sz="1150" dirty="0">
+                <a:solidFill>
+                  <a:srgbClr val="333333"/>
+                </a:solidFill>
+                <a:latin typeface="Arial"/>
+              </a:rPr>
+              <a:t>. </a:t>
+            </a:r>
+            <a:r>
+              <a:rPr lang="en-US" sz="1150" i="1" dirty="0">
+                <a:solidFill>
+                  <a:srgbClr val="333333"/>
+                </a:solidFill>
+                <a:latin typeface="Arial"/>
+              </a:rPr>
+              <a:t>However, </a:t>
+            </a:r>
+            <a:r>
+              <a:rPr lang="en-US" sz="1150" dirty="0">
+                <a:solidFill>
+                  <a:srgbClr val="333333"/>
+                </a:solidFill>
+                <a:latin typeface="Arial"/>
+              </a:rPr>
+              <a:t>PS </a:t>
+            </a:r>
+            <a:r>
+              <a:rPr sz="1150" b="0" i="0" dirty="0">
+                <a:solidFill>
+                  <a:srgbClr val="333333"/>
+                </a:solidFill>
+                <a:latin typeface="Arial"/>
+              </a:rPr>
+              <a:t>acquired </a:t>
+            </a:r>
+            <a:r>
+              <a:rPr lang="en-US" sz="1150" b="0" i="0" dirty="0">
+                <a:solidFill>
+                  <a:srgbClr val="333333"/>
+                </a:solidFill>
+                <a:latin typeface="Arial"/>
+              </a:rPr>
+              <a:t>297</a:t>
+            </a:r>
+            <a:r>
+              <a:rPr sz="1150" b="0" i="0" dirty="0">
+                <a:solidFill>
+                  <a:srgbClr val="333333"/>
+                </a:solidFill>
+                <a:latin typeface="Arial"/>
+              </a:rPr>
+              <a:t> of </a:t>
+            </a:r>
+            <a:r>
+              <a:rPr lang="en-US" sz="1150" dirty="0">
+                <a:solidFill>
+                  <a:srgbClr val="333333"/>
+                </a:solidFill>
+                <a:latin typeface="Arial"/>
+              </a:rPr>
+              <a:t>730 </a:t>
+            </a:r>
+            <a:r>
+              <a:rPr sz="1150" b="0" i="0" dirty="0">
+                <a:solidFill>
+                  <a:srgbClr val="333333"/>
+                </a:solidFill>
+                <a:latin typeface="Arial"/>
+              </a:rPr>
+              <a:t>new customers (4</a:t>
+            </a:r>
+            <a:r>
+              <a:rPr lang="en-US" sz="1150" b="0" i="0" dirty="0">
+                <a:solidFill>
+                  <a:srgbClr val="333333"/>
+                </a:solidFill>
+                <a:latin typeface="Arial"/>
+              </a:rPr>
+              <a:t>1</a:t>
+            </a:r>
+            <a:r>
+              <a:rPr sz="1150" b="0" i="0" dirty="0">
+                <a:solidFill>
+                  <a:srgbClr val="333333"/>
+                </a:solidFill>
+                <a:latin typeface="Arial"/>
+              </a:rPr>
+              <a:t>%) at $</a:t>
+            </a:r>
+            <a:r>
+              <a:rPr lang="en-US" sz="1150" b="0" i="0" dirty="0">
+                <a:solidFill>
+                  <a:srgbClr val="333333"/>
+                </a:solidFill>
+                <a:latin typeface="Arial"/>
+              </a:rPr>
+              <a:t>151</a:t>
+            </a:r>
+            <a:r>
+              <a:rPr sz="1150" b="0" i="0" dirty="0">
+                <a:solidFill>
+                  <a:srgbClr val="333333"/>
+                </a:solidFill>
+                <a:latin typeface="Arial"/>
+              </a:rPr>
+              <a:t> CAC vs $</a:t>
+            </a:r>
+            <a:r>
+              <a:rPr lang="en-US" sz="1150" b="0" i="0" dirty="0">
+                <a:solidFill>
+                  <a:srgbClr val="333333"/>
+                </a:solidFill>
+                <a:latin typeface="Arial"/>
+              </a:rPr>
+              <a:t>188 </a:t>
+            </a:r>
+            <a:r>
+              <a:rPr sz="1150" b="0" i="0" dirty="0">
+                <a:solidFill>
+                  <a:srgbClr val="333333"/>
+                </a:solidFill>
+                <a:latin typeface="Arial"/>
+              </a:rPr>
+              <a:t>early value. </a:t>
+            </a:r>
+            <a:r>
+              <a:rPr lang="en-US" sz="1150" dirty="0">
+                <a:solidFill>
+                  <a:srgbClr val="333333"/>
+                </a:solidFill>
+                <a:latin typeface="Arial"/>
+              </a:rPr>
+              <a:t>Acquisition will pay back via LTV. </a:t>
+            </a:r>
+            <a:endParaRPr lang="en-US" sz="1150" b="0" i="0" dirty="0">
+              <a:solidFill>
+                <a:srgbClr val="333333"/>
+              </a:solidFill>
+              <a:latin typeface="Arial"/>
+            </a:endParaRPr>
+          </a:p>
+          <a:p>
+            <a:pPr>
               <a:lnSpc>
                 <a:spcPct val="112000"/>
               </a:lnSpc>
@@ -4658,7 +4398,7 @@
               </a:spcAft>
             </a:pPr>
             <a:r>
-              <a:rPr sz="1150" b="1" i="0">
+              <a:rPr sz="1150" b="1" i="0" dirty="0">
                 <a:solidFill>
                   <a:srgbClr val="333333"/>
                 </a:solidFill>
@@ -4667,17 +4407,62 @@
               <a:t>•  Paid search: </a:t>
             </a:r>
             <a:r>
-              <a:rPr sz="1150" b="0" i="0">
+              <a:rPr lang="en-US" sz="1150" i="0" dirty="0">
                 <a:solidFill>
                   <a:srgbClr val="333333"/>
                 </a:solidFill>
                 <a:latin typeface="Arial"/>
               </a:rPr>
-              <a:t>0.9× — strong early flight, efficiency fell as core sizes stocked out while spend kept running.</a:t>
-            </a:r>
-          </a:p>
-          <a:p>
-            <a:pPr algn="l">
+              <a:t>25% of spend at 1</a:t>
+            </a:r>
+            <a:r>
+              <a:rPr lang="en-US" sz="1150" dirty="0">
+                <a:solidFill>
+                  <a:srgbClr val="333333"/>
+                </a:solidFill>
+                <a:latin typeface="Arial"/>
+              </a:rPr>
+              <a:t>× </a:t>
+            </a:r>
+            <a:r>
+              <a:rPr lang="en-US" sz="1150" i="0" dirty="0" err="1">
+                <a:solidFill>
+                  <a:srgbClr val="333333"/>
+                </a:solidFill>
+                <a:latin typeface="Arial"/>
+              </a:rPr>
+              <a:t>iROAS</a:t>
+            </a:r>
+            <a:r>
+              <a:rPr lang="en-US" sz="1150" i="0" dirty="0">
+                <a:solidFill>
+                  <a:srgbClr val="333333"/>
+                </a:solidFill>
+                <a:latin typeface="Arial"/>
+              </a:rPr>
+              <a:t>. </a:t>
+            </a:r>
+            <a:r>
+              <a:rPr lang="en-US" sz="1150" dirty="0">
+                <a:solidFill>
+                  <a:srgbClr val="333333"/>
+                </a:solidFill>
+                <a:latin typeface="Arial"/>
+              </a:rPr>
+              <a:t>Second largest acquisition source (175 new customers at $108 CAC).</a:t>
+            </a:r>
+            <a:r>
+              <a:rPr lang="en-US" sz="1150" i="0" dirty="0">
+                <a:solidFill>
+                  <a:srgbClr val="333333"/>
+                </a:solidFill>
+                <a:latin typeface="Arial"/>
+              </a:rPr>
+              <a:t> Efficiency dropped through campaign as size curves broke. </a:t>
+            </a:r>
+          </a:p>
+          <a:p>
+            <a:pPr>
               <a:lnSpc>
                 <a:spcPct val="112000"/>
               </a:lnSpc>
@@ -4686,23 +4471,56 @@
               </a:spcAft>
             </a:pPr>
             <a:r>
-              <a:rPr sz="1150" b="1" i="0">
-                <a:solidFill>
-                  <a:srgbClr val="757575"/>
-                </a:solidFill>
-                <a:latin typeface="Arial"/>
-              </a:rPr>
-              <a:t>•  Method: </a:t>
-            </a:r>
-            <a:r>
-              <a:rPr sz="1150" b="0" i="0">
-                <a:solidFill>
-                  <a:srgbClr val="757575"/>
-                </a:solidFill>
-                <a:latin typeface="Arial"/>
-              </a:rPr>
-              <a:t>iROAS = attributed ROAS × 0.31 site-level incrementality factor, applied uniformly (no holdout or geo split this flight). Attributed ROAS: Email 23.2×, SMS 8.3×, Affiliate 4.2×, Search 3.0×, Social 1.0×.</a:t>
-            </a:r>
+              <a:rPr lang="en-US" sz="1150" b="1" dirty="0">
+                <a:solidFill>
+                  <a:srgbClr val="333333"/>
+                </a:solidFill>
+                <a:latin typeface="Arial"/>
+              </a:rPr>
+              <a:t>•  Affiliate: </a:t>
+            </a:r>
+            <a:r>
+              <a:rPr lang="en-US" sz="1150" dirty="0">
+                <a:solidFill>
+                  <a:srgbClr val="333333"/>
+                </a:solidFill>
+                <a:latin typeface="Arial"/>
+              </a:rPr>
+              <a:t>7% of spend at 1.4× </a:t>
+            </a:r>
+            <a:r>
+              <a:rPr lang="en-US" sz="1150" dirty="0" err="1">
+                <a:solidFill>
+                  <a:srgbClr val="333333"/>
+                </a:solidFill>
+                <a:latin typeface="Arial"/>
+              </a:rPr>
+              <a:t>iROAS</a:t>
+            </a:r>
+            <a:r>
+              <a:rPr lang="en-US" sz="1150" dirty="0">
+                <a:solidFill>
+                  <a:srgbClr val="333333"/>
+                </a:solidFill>
+                <a:latin typeface="Arial"/>
+              </a:rPr>
+              <a:t> and lowest CAC at $82. Small share but positive. </a:t>
+            </a:r>
+            <a:r>
+              <a:rPr lang="en-US" sz="1150" b="1" dirty="0">
+                <a:solidFill>
+                  <a:srgbClr val="333333"/>
+                </a:solidFill>
+                <a:latin typeface="Arial"/>
+              </a:rPr>
+              <a:t>TEST SCALING</a:t>
+            </a:r>
+            <a:endParaRPr lang="en-US" sz="1150" i="0" dirty="0">
+              <a:solidFill>
+                <a:srgbClr val="333333"/>
+              </a:solidFill>
+              <a:latin typeface="Arial"/>
+            </a:endParaRPr>
           </a:p>
         </p:txBody>
       </p:sp>
@@ -4715,7 +4533,7 @@
         <p:spPr>
           <a:xfrm>
             <a:off x="502920" y="6510528"/>
-            <a:ext cx="10515600" cy="274320"/>
+            <a:ext cx="10515600" cy="123111"/>
           </a:xfrm>
           <a:prstGeom prst="rect">
             <a:avLst/>
@@ -4730,13 +4548,13 @@
           <a:p>
             <a:pPr algn="l"/>
             <a:r>
-              <a:rPr sz="800" b="0" i="0">
+              <a:rPr sz="800" b="0" i="0" dirty="0">
                 <a:solidFill>
                   <a:srgbClr val="757575"/>
                 </a:solidFill>
                 <a:latin typeface="Arial"/>
               </a:rPr>
-              <a:t>Salomon NA eCommerce · Vestal Pro launch readout · Illustrative synthetic case data</a:t>
+              <a:t>Salomon NA eCommerce · Vestal Pro launch readout</a:t>
             </a:r>
           </a:p>
         </p:txBody>
@@ -4785,7 +4603,7 @@
           <p:nvPr/>
         </p:nvPicPr>
         <p:blipFill>
-          <a:blip r:embed="rId3"/>
+          <a:blip r:embed="rId4"/>
           <a:stretch>
             <a:fillRect/>
           </a:stretch>
@@ -4800,6 +4618,192 @@
           </a:prstGeom>
         </p:spPr>
       </p:pic>
+      <p:graphicFrame>
+        <p:nvGraphicFramePr>
+          <p:cNvPr id="20" name="Object 19">
+            <a:extLst>
+              <a:ext uri="{FF2B5EF4-FFF2-40B4-BE49-F238E27FC236}">
+                <a16:creationId xmlns:a16="http://schemas.microsoft.com/office/drawing/2014/main" id="{89065526-7F01-A908-165C-B694638D5687}"/>
+              </a:ext>
+            </a:extLst>
+          </p:cNvPr>
+          <p:cNvGraphicFramePr>
+            <a:graphicFrameLocks noChangeAspect="1"/>
+          </p:cNvGraphicFramePr>
+          <p:nvPr>
+            <p:extLst>
+              <p:ext uri="{D42A27DB-BD31-4B8C-83A1-F6EECF244321}">
+                <p14:modId xmlns:p14="http://schemas.microsoft.com/office/powerpoint/2010/main" val="2492819983"/>
+              </p:ext>
+            </p:extLst>
+          </p:nvPr>
+        </p:nvGraphicFramePr>
+        <p:xfrm>
+          <a:off x="6497065" y="2244422"/>
+          <a:ext cx="5347368" cy="1693800"/>
+        </p:xfrm>
+        <a:graphic>
+          <a:graphicData uri="http://schemas.openxmlformats.org/presentationml/2006/ole">
+            <mc:AlternateContent xmlns:mc="http://schemas.openxmlformats.org/markup-compatibility/2006">
+              <mc:Choice xmlns:v="urn:schemas-microsoft-com:vml" Requires="v">
+                <p:oleObj name="Worksheet" r:id="rId5" imgW="4851378" imgH="1536885" progId="Excel.Sheet.12">
+                  <p:embed/>
+                </p:oleObj>
+              </mc:Choice>
+              <mc:Fallback>
+                <p:oleObj name="Worksheet" r:id="rId5" imgW="4851378" imgH="1536885" progId="Excel.Sheet.12">
+                  <p:embed/>
+                  <p:pic>
+                    <p:nvPicPr>
+                      <p:cNvPr id="0" name=""/>
+                      <p:cNvPicPr/>
+                      <p:nvPr/>
+                    </p:nvPicPr>
+                    <p:blipFill>
+                      <a:blip r:embed="rId6"/>
+                      <a:stretch>
+                        <a:fillRect/>
+                      </a:stretch>
+                    </p:blipFill>
+                    <p:spPr>
+                      <a:xfrm>
+                        <a:off x="6497065" y="2244422"/>
+                        <a:ext cx="5347368" cy="1693800"/>
+                      </a:xfrm>
+                      <a:prstGeom prst="rect">
+                        <a:avLst/>
+                      </a:prstGeom>
+                    </p:spPr>
+                  </p:pic>
+                </p:oleObj>
+              </mc:Fallback>
+            </mc:AlternateContent>
+          </a:graphicData>
+        </a:graphic>
+      </p:graphicFrame>
+      <p:cxnSp>
+        <p:nvCxnSpPr>
+          <p:cNvPr id="21" name="Straight Arrow Connector 20">
+            <a:extLst>
+              <a:ext uri="{FF2B5EF4-FFF2-40B4-BE49-F238E27FC236}">
+                <a16:creationId xmlns:a16="http://schemas.microsoft.com/office/drawing/2014/main" id="{14396B63-8D83-1FC9-12AE-69A01233EF33}"/>
+              </a:ext>
+            </a:extLst>
+          </p:cNvPr>
+          <p:cNvCxnSpPr>
+            <a:cxnSpLocks/>
+          </p:cNvCxnSpPr>
+          <p:nvPr/>
+        </p:nvCxnSpPr>
+        <p:spPr>
+          <a:xfrm>
+            <a:off x="10698480" y="1804737"/>
+            <a:ext cx="674370" cy="408303"/>
+          </a:xfrm>
+          <a:prstGeom prst="straightConnector1">
+            <a:avLst/>
+          </a:prstGeom>
+          <a:ln>
+            <a:solidFill>
+              <a:schemeClr val="tx2">
+                <a:lumMod val="75000"/>
+                <a:lumOff val="25000"/>
+              </a:schemeClr>
+            </a:solidFill>
+            <a:tailEnd type="triangle"/>
+          </a:ln>
+        </p:spPr>
+        <p:style>
+          <a:lnRef idx="2">
+            <a:schemeClr val="accent1"/>
+          </a:lnRef>
+          <a:fillRef idx="0">
+            <a:schemeClr val="accent1"/>
+          </a:fillRef>
+          <a:effectRef idx="1">
+            <a:schemeClr val="accent1"/>
+          </a:effectRef>
+          <a:fontRef idx="minor">
+            <a:schemeClr val="tx1"/>
+          </a:fontRef>
+        </p:style>
+      </p:cxnSp>
+      <p:sp>
+        <p:nvSpPr>
+          <p:cNvPr id="23" name="TextBox 22">
+            <a:extLst>
+              <a:ext uri="{FF2B5EF4-FFF2-40B4-BE49-F238E27FC236}">
+                <a16:creationId xmlns:a16="http://schemas.microsoft.com/office/drawing/2014/main" id="{DA8A9F11-6579-2EB6-9AFC-5779DC3CD209}"/>
+              </a:ext>
+            </a:extLst>
+          </p:cNvPr>
+          <p:cNvSpPr txBox="1"/>
+          <p:nvPr/>
+        </p:nvSpPr>
+        <p:spPr>
+          <a:xfrm>
+            <a:off x="9745579" y="1418247"/>
+            <a:ext cx="1503948" cy="415498"/>
+          </a:xfrm>
+          <a:prstGeom prst="rect">
+            <a:avLst/>
+          </a:prstGeom>
+        </p:spPr>
+        <p:style>
+          <a:lnRef idx="1">
+            <a:schemeClr val="dk1"/>
+          </a:lnRef>
+          <a:fillRef idx="2">
+            <a:schemeClr val="dk1"/>
+          </a:fillRef>
+          <a:effectRef idx="1">
+            <a:schemeClr val="dk1"/>
+          </a:effectRef>
+          <a:fontRef idx="minor">
+            <a:schemeClr val="dk1"/>
+          </a:fontRef>
+        </p:style>
+        <p:txBody>
+          <a:bodyPr wrap="square" rtlCol="0">
+            <a:spAutoFit/>
+          </a:bodyPr>
+          <a:lstStyle/>
+          <a:p>
+            <a:pPr algn="ctr"/>
+            <a:r>
+              <a:rPr lang="en-US" sz="1050" dirty="0">
+                <a:solidFill>
+                  <a:schemeClr val="tx2">
+                    <a:lumMod val="50000"/>
+                    <a:lumOff val="50000"/>
+                  </a:schemeClr>
+                </a:solidFill>
+              </a:rPr>
+              <a:t>ROAS </a:t>
+            </a:r>
+            <a:r>
+              <a:rPr lang="en-US" sz="1050" dirty="0">
+                <a:solidFill>
+                  <a:schemeClr val="tx2">
+                    <a:lumMod val="50000"/>
+                    <a:lumOff val="50000"/>
+                  </a:schemeClr>
+                </a:solidFill>
+                <a:latin typeface="Arial"/>
+              </a:rPr>
+              <a:t>× Incremental Revenue Factor of .34</a:t>
+            </a:r>
+            <a:endParaRPr lang="en-US" sz="1050" dirty="0">
+              <a:solidFill>
+                <a:schemeClr val="tx2">
+                  <a:lumMod val="50000"/>
+                  <a:lumOff val="50000"/>
+                </a:schemeClr>
+              </a:solidFill>
+            </a:endParaRPr>
+          </a:p>
+        </p:txBody>
+      </p:sp>
     </p:spTree>
   </p:cSld>
   <p:clrMapOvr>
@@ -4809,6 +4813,2750 @@
 </file>
 
 <file path=ppt/slides/slide11.xml><?xml version="1.0" encoding="utf-8"?>
+<p:sld xmlns:a="http://schemas.openxmlformats.org/drawingml/2006/main" xmlns:r="http://schemas.openxmlformats.org/officeDocument/2006/relationships" xmlns:p="http://schemas.openxmlformats.org/presentationml/2006/main">
+  <p:cSld>
+    <p:spTree>
+      <p:nvGrpSpPr>
+        <p:cNvPr id="1" name="">
+          <a:extLst>
+            <a:ext uri="{FF2B5EF4-FFF2-40B4-BE49-F238E27FC236}">
+              <a16:creationId xmlns:a16="http://schemas.microsoft.com/office/drawing/2014/main" id="{3AA1883E-C3D1-82A4-6748-8190617FA3BB}"/>
+            </a:ext>
+          </a:extLst>
+        </p:cNvPr>
+        <p:cNvGrpSpPr/>
+        <p:nvPr/>
+      </p:nvGrpSpPr>
+      <p:grpSpPr>
+        <a:xfrm>
+          <a:off x="0" y="0"/>
+          <a:ext cx="0" cy="0"/>
+          <a:chOff x="0" y="0"/>
+          <a:chExt cx="0" cy="0"/>
+        </a:xfrm>
+      </p:grpSpPr>
+      <p:sp>
+        <p:nvSpPr>
+          <p:cNvPr id="2" name="TextBox 1">
+            <a:extLst>
+              <a:ext uri="{FF2B5EF4-FFF2-40B4-BE49-F238E27FC236}">
+                <a16:creationId xmlns:a16="http://schemas.microsoft.com/office/drawing/2014/main" id="{9A6C0539-FE04-BD54-83A9-73B9941D3325}"/>
+              </a:ext>
+            </a:extLst>
+          </p:cNvPr>
+          <p:cNvSpPr txBox="1"/>
+          <p:nvPr/>
+        </p:nvSpPr>
+        <p:spPr>
+          <a:xfrm>
+            <a:off x="502920" y="292608"/>
+            <a:ext cx="11155680" cy="161583"/>
+          </a:xfrm>
+          <a:prstGeom prst="rect">
+            <a:avLst/>
+          </a:prstGeom>
+          <a:noFill/>
+        </p:spPr>
+        <p:txBody>
+          <a:bodyPr wrap="square" lIns="0" tIns="0" rIns="0" bIns="0" anchor="t">
+            <a:spAutoFit/>
+          </a:bodyPr>
+          <a:lstStyle/>
+          <a:p>
+            <a:pPr algn="l"/>
+            <a:r>
+              <a:rPr lang="en-US" sz="1050" b="1" i="0" dirty="0">
+                <a:solidFill>
+                  <a:srgbClr val="757575"/>
+                </a:solidFill>
+                <a:latin typeface="Arial"/>
+              </a:rPr>
+              <a:t>BRAND AWARENESS</a:t>
+            </a:r>
+            <a:endParaRPr sz="1050" b="1" i="0" dirty="0">
+              <a:solidFill>
+                <a:srgbClr val="757575"/>
+              </a:solidFill>
+              <a:latin typeface="Arial"/>
+            </a:endParaRPr>
+          </a:p>
+        </p:txBody>
+      </p:sp>
+      <p:sp>
+        <p:nvSpPr>
+          <p:cNvPr id="3" name="TextBox 2">
+            <a:extLst>
+              <a:ext uri="{FF2B5EF4-FFF2-40B4-BE49-F238E27FC236}">
+                <a16:creationId xmlns:a16="http://schemas.microsoft.com/office/drawing/2014/main" id="{C19A3802-CC4F-64E2-DDC7-6AD865C43E5A}"/>
+              </a:ext>
+            </a:extLst>
+          </p:cNvPr>
+          <p:cNvSpPr txBox="1"/>
+          <p:nvPr/>
+        </p:nvSpPr>
+        <p:spPr>
+          <a:xfrm>
+            <a:off x="502920" y="560683"/>
+            <a:ext cx="11201400" cy="353943"/>
+          </a:xfrm>
+          <a:prstGeom prst="rect">
+            <a:avLst/>
+          </a:prstGeom>
+          <a:noFill/>
+        </p:spPr>
+        <p:txBody>
+          <a:bodyPr wrap="square" lIns="0" tIns="0" rIns="0" bIns="0" anchor="t">
+            <a:spAutoFit/>
+          </a:bodyPr>
+          <a:lstStyle/>
+          <a:p>
+            <a:pPr algn="l"/>
+            <a:r>
+              <a:rPr lang="en-US" sz="2300" b="0" i="0" dirty="0">
+                <a:solidFill>
+                  <a:srgbClr val="000000"/>
+                </a:solidFill>
+                <a:latin typeface="Georgia"/>
+              </a:rPr>
+              <a:t>Campaign investment supports persisten</a:t>
+            </a:r>
+            <a:r>
+              <a:rPr lang="en-US" sz="2300" dirty="0">
+                <a:solidFill>
+                  <a:srgbClr val="000000"/>
+                </a:solidFill>
+                <a:latin typeface="Georgia"/>
+              </a:rPr>
+              <a:t>t brand awareness and recognition</a:t>
+            </a:r>
+            <a:endParaRPr sz="2300" b="0" i="0" dirty="0">
+              <a:solidFill>
+                <a:srgbClr val="000000"/>
+              </a:solidFill>
+              <a:latin typeface="Georgia"/>
+            </a:endParaRPr>
+          </a:p>
+        </p:txBody>
+      </p:sp>
+      <p:sp>
+        <p:nvSpPr>
+          <p:cNvPr id="6" name="TextBox 5">
+            <a:extLst>
+              <a:ext uri="{FF2B5EF4-FFF2-40B4-BE49-F238E27FC236}">
+                <a16:creationId xmlns:a16="http://schemas.microsoft.com/office/drawing/2014/main" id="{66A793E5-4D4D-7FB2-01C7-AD5D000CF3F1}"/>
+              </a:ext>
+            </a:extLst>
+          </p:cNvPr>
+          <p:cNvSpPr txBox="1"/>
+          <p:nvPr/>
+        </p:nvSpPr>
+        <p:spPr>
+          <a:xfrm>
+            <a:off x="3474719" y="4905912"/>
+            <a:ext cx="7871059" cy="1557927"/>
+          </a:xfrm>
+          <a:prstGeom prst="rect">
+            <a:avLst/>
+          </a:prstGeom>
+          <a:noFill/>
+        </p:spPr>
+        <p:txBody>
+          <a:bodyPr wrap="square" lIns="0" tIns="0" rIns="0" bIns="0" anchor="t">
+            <a:spAutoFit/>
+          </a:bodyPr>
+          <a:lstStyle/>
+          <a:p>
+            <a:pPr>
+              <a:lnSpc>
+                <a:spcPct val="112000"/>
+              </a:lnSpc>
+              <a:spcAft>
+                <a:spcPts val="1000"/>
+              </a:spcAft>
+            </a:pPr>
+            <a:r>
+              <a:rPr lang="en-US" sz="1150" b="1" dirty="0">
+                <a:solidFill>
+                  <a:srgbClr val="333333"/>
+                </a:solidFill>
+                <a:latin typeface="Arial"/>
+              </a:rPr>
+              <a:t>• Paid Media </a:t>
+            </a:r>
+            <a:r>
+              <a:rPr lang="en-US" sz="1150" dirty="0">
+                <a:solidFill>
+                  <a:srgbClr val="333333"/>
+                </a:solidFill>
+                <a:latin typeface="Arial"/>
+              </a:rPr>
+              <a:t>investment during campaign supports lasting brand awareness impact. </a:t>
+            </a:r>
+            <a:endParaRPr lang="en-US" sz="1150" b="1" dirty="0">
+              <a:solidFill>
+                <a:srgbClr val="333333"/>
+              </a:solidFill>
+              <a:latin typeface="Arial"/>
+            </a:endParaRPr>
+          </a:p>
+          <a:p>
+            <a:pPr>
+              <a:lnSpc>
+                <a:spcPct val="112000"/>
+              </a:lnSpc>
+              <a:spcAft>
+                <a:spcPts val="1000"/>
+              </a:spcAft>
+            </a:pPr>
+            <a:r>
+              <a:rPr lang="en-US" sz="1150" b="1" dirty="0">
+                <a:solidFill>
+                  <a:srgbClr val="333333"/>
+                </a:solidFill>
+                <a:latin typeface="Arial"/>
+              </a:rPr>
+              <a:t>• Brand impressions and clicks </a:t>
+            </a:r>
+            <a:r>
+              <a:rPr lang="en-US" sz="1150" dirty="0">
+                <a:solidFill>
+                  <a:srgbClr val="333333"/>
+                </a:solidFill>
+                <a:latin typeface="Arial"/>
+              </a:rPr>
+              <a:t>+20% during campaign and persist at +22% above pre-campaign levels in the final two weeks (Jul 7–20). Brand awareness did not decay with media spend.</a:t>
+            </a:r>
+          </a:p>
+          <a:p>
+            <a:pPr>
+              <a:lnSpc>
+                <a:spcPct val="112000"/>
+              </a:lnSpc>
+              <a:spcAft>
+                <a:spcPts val="1000"/>
+              </a:spcAft>
+            </a:pPr>
+            <a:r>
+              <a:rPr lang="en-US" sz="1150" b="1" dirty="0">
+                <a:solidFill>
+                  <a:srgbClr val="333333"/>
+                </a:solidFill>
+                <a:latin typeface="Arial"/>
+              </a:rPr>
+              <a:t>• Non-brand search</a:t>
+            </a:r>
+            <a:r>
+              <a:rPr lang="en-US" sz="1150" dirty="0">
+                <a:solidFill>
+                  <a:srgbClr val="333333"/>
+                </a:solidFill>
+                <a:latin typeface="Arial"/>
+              </a:rPr>
+              <a:t> rose slightly (+8%) and reverted toward baseline (+5%) after campaign. The win is in brand awareness, not ultra-running market or seasonality.</a:t>
+            </a:r>
+          </a:p>
+          <a:p>
+            <a:pPr>
+              <a:lnSpc>
+                <a:spcPct val="112000"/>
+              </a:lnSpc>
+              <a:spcAft>
+                <a:spcPts val="1000"/>
+              </a:spcAft>
+            </a:pPr>
+            <a:r>
+              <a:rPr lang="en-US" sz="1150" b="1" dirty="0">
+                <a:solidFill>
+                  <a:srgbClr val="333333"/>
+                </a:solidFill>
+                <a:latin typeface="Arial"/>
+              </a:rPr>
+              <a:t>• Brand Clicks </a:t>
+            </a:r>
+            <a:r>
+              <a:rPr lang="en-US" sz="1150" dirty="0">
+                <a:solidFill>
+                  <a:srgbClr val="333333"/>
+                </a:solidFill>
+                <a:latin typeface="Arial"/>
+              </a:rPr>
+              <a:t>lifted in-line with impressions. Impression quality did not deteriorate. </a:t>
+            </a:r>
+          </a:p>
+        </p:txBody>
+      </p:sp>
+      <p:sp>
+        <p:nvSpPr>
+          <p:cNvPr id="7" name="TextBox 6">
+            <a:extLst>
+              <a:ext uri="{FF2B5EF4-FFF2-40B4-BE49-F238E27FC236}">
+                <a16:creationId xmlns:a16="http://schemas.microsoft.com/office/drawing/2014/main" id="{40B7106E-FBC3-0F31-6161-E3F76BB43CAB}"/>
+              </a:ext>
+            </a:extLst>
+          </p:cNvPr>
+          <p:cNvSpPr txBox="1"/>
+          <p:nvPr/>
+        </p:nvSpPr>
+        <p:spPr>
+          <a:xfrm>
+            <a:off x="502920" y="6510528"/>
+            <a:ext cx="10515600" cy="123111"/>
+          </a:xfrm>
+          <a:prstGeom prst="rect">
+            <a:avLst/>
+          </a:prstGeom>
+          <a:noFill/>
+        </p:spPr>
+        <p:txBody>
+          <a:bodyPr wrap="square" lIns="0" tIns="0" rIns="0" bIns="0" anchor="t">
+            <a:spAutoFit/>
+          </a:bodyPr>
+          <a:lstStyle/>
+          <a:p>
+            <a:pPr algn="l"/>
+            <a:r>
+              <a:rPr sz="800" b="0" i="0" dirty="0">
+                <a:solidFill>
+                  <a:srgbClr val="757575"/>
+                </a:solidFill>
+                <a:latin typeface="Arial"/>
+              </a:rPr>
+              <a:t>Salomon NA eCommerce · Vestal Pro launch readou</a:t>
+            </a:r>
+            <a:r>
+              <a:rPr lang="en-US" sz="800" b="0" i="0" dirty="0">
+                <a:solidFill>
+                  <a:srgbClr val="757575"/>
+                </a:solidFill>
+                <a:latin typeface="Arial"/>
+              </a:rPr>
+              <a:t>t</a:t>
+            </a:r>
+            <a:endParaRPr sz="800" b="0" i="0" dirty="0">
+              <a:solidFill>
+                <a:srgbClr val="757575"/>
+              </a:solidFill>
+              <a:latin typeface="Arial"/>
+            </a:endParaRPr>
+          </a:p>
+        </p:txBody>
+      </p:sp>
+      <p:sp>
+        <p:nvSpPr>
+          <p:cNvPr id="8" name="TextBox 7">
+            <a:extLst>
+              <a:ext uri="{FF2B5EF4-FFF2-40B4-BE49-F238E27FC236}">
+                <a16:creationId xmlns:a16="http://schemas.microsoft.com/office/drawing/2014/main" id="{18659157-4A39-1346-F89C-119B20A43B7F}"/>
+              </a:ext>
+            </a:extLst>
+          </p:cNvPr>
+          <p:cNvSpPr txBox="1"/>
+          <p:nvPr/>
+        </p:nvSpPr>
+        <p:spPr>
+          <a:xfrm>
+            <a:off x="11292840" y="6510528"/>
+            <a:ext cx="411480" cy="274320"/>
+          </a:xfrm>
+          <a:prstGeom prst="rect">
+            <a:avLst/>
+          </a:prstGeom>
+          <a:noFill/>
+        </p:spPr>
+        <p:txBody>
+          <a:bodyPr wrap="square" lIns="0" tIns="0" rIns="0" bIns="0" anchor="t">
+            <a:spAutoFit/>
+          </a:bodyPr>
+          <a:lstStyle/>
+          <a:p>
+            <a:pPr algn="r"/>
+            <a:r>
+              <a:rPr sz="800" b="0" i="0">
+                <a:solidFill>
+                  <a:srgbClr val="757575"/>
+                </a:solidFill>
+                <a:latin typeface="Arial"/>
+              </a:rPr>
+              <a:t>10</a:t>
+            </a:r>
+          </a:p>
+        </p:txBody>
+      </p:sp>
+      <p:pic>
+        <p:nvPicPr>
+          <p:cNvPr id="9" name="Picture 8" descr="salomon_wordmark_black.png">
+            <a:extLst>
+              <a:ext uri="{FF2B5EF4-FFF2-40B4-BE49-F238E27FC236}">
+                <a16:creationId xmlns:a16="http://schemas.microsoft.com/office/drawing/2014/main" id="{E4B2EC17-CFD8-6BE3-B4B2-7FD57DA01DC9}"/>
+              </a:ext>
+            </a:extLst>
+          </p:cNvPr>
+          <p:cNvPicPr>
+            <a:picLocks noChangeAspect="1"/>
+          </p:cNvPicPr>
+          <p:nvPr/>
+        </p:nvPicPr>
+        <p:blipFill>
+          <a:blip r:embed="rId2"/>
+          <a:stretch>
+            <a:fillRect/>
+          </a:stretch>
+        </p:blipFill>
+        <p:spPr>
+          <a:xfrm>
+            <a:off x="10698480" y="292608"/>
+            <a:ext cx="960120" cy="110013"/>
+          </a:xfrm>
+          <a:prstGeom prst="rect">
+            <a:avLst/>
+          </a:prstGeom>
+        </p:spPr>
+      </p:pic>
+      <p:sp>
+        <p:nvSpPr>
+          <p:cNvPr id="11" name="TextBox 10">
+            <a:extLst>
+              <a:ext uri="{FF2B5EF4-FFF2-40B4-BE49-F238E27FC236}">
+                <a16:creationId xmlns:a16="http://schemas.microsoft.com/office/drawing/2014/main" id="{67D7BB72-875B-5150-097E-F03B45B74A8C}"/>
+              </a:ext>
+            </a:extLst>
+          </p:cNvPr>
+          <p:cNvSpPr txBox="1"/>
+          <p:nvPr/>
+        </p:nvSpPr>
+        <p:spPr>
+          <a:xfrm>
+            <a:off x="608197" y="4875135"/>
+            <a:ext cx="964932" cy="523220"/>
+          </a:xfrm>
+          <a:prstGeom prst="rect">
+            <a:avLst/>
+          </a:prstGeom>
+          <a:noFill/>
+        </p:spPr>
+        <p:txBody>
+          <a:bodyPr wrap="square" lIns="0" tIns="0" rIns="0" bIns="0" anchor="t">
+            <a:spAutoFit/>
+          </a:bodyPr>
+          <a:lstStyle/>
+          <a:p>
+            <a:pPr algn="l"/>
+            <a:r>
+              <a:rPr lang="en-US" sz="3400" b="1" dirty="0">
+                <a:solidFill>
+                  <a:srgbClr val="333333"/>
+                </a:solidFill>
+                <a:latin typeface="Arial"/>
+              </a:rPr>
+              <a:t>22</a:t>
+            </a:r>
+            <a:r>
+              <a:rPr sz="3400" b="1" i="0" dirty="0">
+                <a:solidFill>
+                  <a:srgbClr val="333333"/>
+                </a:solidFill>
+                <a:latin typeface="Arial"/>
+              </a:rPr>
+              <a:t>%</a:t>
+            </a:r>
+            <a:endParaRPr lang="en-US" sz="1300" b="0" i="0" dirty="0">
+              <a:solidFill>
+                <a:srgbClr val="757575"/>
+              </a:solidFill>
+              <a:latin typeface="Arial"/>
+            </a:endParaRPr>
+          </a:p>
+        </p:txBody>
+      </p:sp>
+      <p:pic>
+        <p:nvPicPr>
+          <p:cNvPr id="17" name="Picture 16" descr="The image displays a comparison of branded and non-brand search impressions over a period of time, showing that branded searches have a higher click-through rate (CTR) than non-branded searches.&#10;&#10;AI-generated content may be incorrect.">
+            <a:extLst>
+              <a:ext uri="{FF2B5EF4-FFF2-40B4-BE49-F238E27FC236}">
+                <a16:creationId xmlns:a16="http://schemas.microsoft.com/office/drawing/2014/main" id="{6EBDC609-DBD8-4127-A393-DDD8CB46A027}"/>
+              </a:ext>
+            </a:extLst>
+          </p:cNvPr>
+          <p:cNvPicPr>
+            <a:picLocks noChangeAspect="1"/>
+          </p:cNvPicPr>
+          <p:nvPr/>
+        </p:nvPicPr>
+        <p:blipFill>
+          <a:blip r:embed="rId3"/>
+          <a:stretch>
+            <a:fillRect/>
+          </a:stretch>
+        </p:blipFill>
+        <p:spPr>
+          <a:xfrm>
+            <a:off x="502920" y="1080479"/>
+            <a:ext cx="10385659" cy="3764941"/>
+          </a:xfrm>
+          <a:prstGeom prst="rect">
+            <a:avLst/>
+          </a:prstGeom>
+        </p:spPr>
+      </p:pic>
+      <p:sp>
+        <p:nvSpPr>
+          <p:cNvPr id="18" name="TextBox 17">
+            <a:extLst>
+              <a:ext uri="{FF2B5EF4-FFF2-40B4-BE49-F238E27FC236}">
+                <a16:creationId xmlns:a16="http://schemas.microsoft.com/office/drawing/2014/main" id="{ACA05D9D-6860-46A0-EEA3-78A2F31AB904}"/>
+              </a:ext>
+            </a:extLst>
+          </p:cNvPr>
+          <p:cNvSpPr txBox="1"/>
+          <p:nvPr/>
+        </p:nvSpPr>
+        <p:spPr>
+          <a:xfrm>
+            <a:off x="1413710" y="4905912"/>
+            <a:ext cx="1548822" cy="461665"/>
+          </a:xfrm>
+          <a:prstGeom prst="rect">
+            <a:avLst/>
+          </a:prstGeom>
+          <a:noFill/>
+        </p:spPr>
+        <p:txBody>
+          <a:bodyPr wrap="none" rtlCol="0">
+            <a:spAutoFit/>
+          </a:bodyPr>
+          <a:lstStyle/>
+          <a:p>
+            <a:r>
+              <a:rPr lang="en-US" sz="1200" dirty="0">
+                <a:solidFill>
+                  <a:schemeClr val="tx2">
+                    <a:lumMod val="50000"/>
+                    <a:lumOff val="50000"/>
+                  </a:schemeClr>
+                </a:solidFill>
+                <a:latin typeface="Arial"/>
+              </a:rPr>
+              <a:t>lift in branded </a:t>
+            </a:r>
+          </a:p>
+          <a:p>
+            <a:r>
+              <a:rPr lang="en-US" sz="1200" dirty="0">
+                <a:solidFill>
+                  <a:schemeClr val="tx2">
+                    <a:lumMod val="50000"/>
+                    <a:lumOff val="50000"/>
+                  </a:schemeClr>
+                </a:solidFill>
+                <a:latin typeface="Arial"/>
+              </a:rPr>
+              <a:t>search impressions.</a:t>
+            </a:r>
+            <a:endParaRPr lang="en-US" sz="1200" dirty="0">
+              <a:solidFill>
+                <a:schemeClr val="tx2">
+                  <a:lumMod val="50000"/>
+                  <a:lumOff val="50000"/>
+                </a:schemeClr>
+              </a:solidFill>
+            </a:endParaRPr>
+          </a:p>
+        </p:txBody>
+      </p:sp>
+      <p:sp>
+        <p:nvSpPr>
+          <p:cNvPr id="22" name="TextBox 21">
+            <a:extLst>
+              <a:ext uri="{FF2B5EF4-FFF2-40B4-BE49-F238E27FC236}">
+                <a16:creationId xmlns:a16="http://schemas.microsoft.com/office/drawing/2014/main" id="{0A57B17A-567A-60A7-A566-96F6DA4B6736}"/>
+              </a:ext>
+            </a:extLst>
+          </p:cNvPr>
+          <p:cNvSpPr txBox="1"/>
+          <p:nvPr/>
+        </p:nvSpPr>
+        <p:spPr>
+          <a:xfrm>
+            <a:off x="1413710" y="5495928"/>
+            <a:ext cx="1368836" cy="461665"/>
+          </a:xfrm>
+          <a:prstGeom prst="rect">
+            <a:avLst/>
+          </a:prstGeom>
+          <a:noFill/>
+        </p:spPr>
+        <p:txBody>
+          <a:bodyPr wrap="none" rtlCol="0">
+            <a:spAutoFit/>
+          </a:bodyPr>
+          <a:lstStyle/>
+          <a:p>
+            <a:r>
+              <a:rPr lang="en-US" sz="1200" dirty="0">
+                <a:solidFill>
+                  <a:schemeClr val="tx2">
+                    <a:lumMod val="50000"/>
+                    <a:lumOff val="50000"/>
+                  </a:schemeClr>
+                </a:solidFill>
+              </a:rPr>
+              <a:t>Impression quality </a:t>
+            </a:r>
+          </a:p>
+          <a:p>
+            <a:r>
+              <a:rPr lang="en-US" sz="1200" dirty="0">
+                <a:solidFill>
+                  <a:schemeClr val="tx2">
+                    <a:lumMod val="50000"/>
+                    <a:lumOff val="50000"/>
+                  </a:schemeClr>
+                </a:solidFill>
+              </a:rPr>
+              <a:t>measured by CTR</a:t>
+            </a:r>
+          </a:p>
+        </p:txBody>
+      </p:sp>
+      <p:cxnSp>
+        <p:nvCxnSpPr>
+          <p:cNvPr id="24" name="Straight Arrow Connector 23">
+            <a:extLst>
+              <a:ext uri="{FF2B5EF4-FFF2-40B4-BE49-F238E27FC236}">
+                <a16:creationId xmlns:a16="http://schemas.microsoft.com/office/drawing/2014/main" id="{414413CB-B074-936F-6595-A65F2885C110}"/>
+              </a:ext>
+            </a:extLst>
+          </p:cNvPr>
+          <p:cNvCxnSpPr>
+            <a:cxnSpLocks/>
+          </p:cNvCxnSpPr>
+          <p:nvPr/>
+        </p:nvCxnSpPr>
+        <p:spPr>
+          <a:xfrm>
+            <a:off x="7259853" y="1697695"/>
+            <a:ext cx="97458" cy="425879"/>
+          </a:xfrm>
+          <a:prstGeom prst="straightConnector1">
+            <a:avLst/>
+          </a:prstGeom>
+          <a:ln>
+            <a:solidFill>
+              <a:schemeClr val="tx2">
+                <a:lumMod val="50000"/>
+                <a:lumOff val="50000"/>
+              </a:schemeClr>
+            </a:solidFill>
+            <a:tailEnd type="triangle"/>
+          </a:ln>
+        </p:spPr>
+        <p:style>
+          <a:lnRef idx="2">
+            <a:schemeClr val="accent1"/>
+          </a:lnRef>
+          <a:fillRef idx="0">
+            <a:schemeClr val="accent1"/>
+          </a:fillRef>
+          <a:effectRef idx="1">
+            <a:schemeClr val="accent1"/>
+          </a:effectRef>
+          <a:fontRef idx="minor">
+            <a:schemeClr val="tx1"/>
+          </a:fontRef>
+        </p:style>
+      </p:cxnSp>
+      <p:sp>
+        <p:nvSpPr>
+          <p:cNvPr id="28" name="TextBox 27">
+            <a:extLst>
+              <a:ext uri="{FF2B5EF4-FFF2-40B4-BE49-F238E27FC236}">
+                <a16:creationId xmlns:a16="http://schemas.microsoft.com/office/drawing/2014/main" id="{DCACB880-3B4F-3980-D19D-9C40D7F13F85}"/>
+              </a:ext>
+            </a:extLst>
+          </p:cNvPr>
+          <p:cNvSpPr txBox="1"/>
+          <p:nvPr/>
+        </p:nvSpPr>
+        <p:spPr>
+          <a:xfrm>
+            <a:off x="7080584" y="1395728"/>
+            <a:ext cx="1233235" cy="338554"/>
+          </a:xfrm>
+          <a:prstGeom prst="rect">
+            <a:avLst/>
+          </a:prstGeom>
+        </p:spPr>
+        <p:style>
+          <a:lnRef idx="1">
+            <a:schemeClr val="dk1"/>
+          </a:lnRef>
+          <a:fillRef idx="2">
+            <a:schemeClr val="dk1"/>
+          </a:fillRef>
+          <a:effectRef idx="1">
+            <a:schemeClr val="dk1"/>
+          </a:effectRef>
+          <a:fontRef idx="minor">
+            <a:schemeClr val="dk1"/>
+          </a:fontRef>
+        </p:style>
+        <p:txBody>
+          <a:bodyPr wrap="square" rtlCol="0">
+            <a:spAutoFit/>
+          </a:bodyPr>
+          <a:lstStyle/>
+          <a:p>
+            <a:pPr algn="ctr"/>
+            <a:r>
+              <a:rPr lang="en-US" sz="800" dirty="0">
+                <a:solidFill>
+                  <a:schemeClr val="tx2">
+                    <a:lumMod val="50000"/>
+                    <a:lumOff val="50000"/>
+                  </a:schemeClr>
+                </a:solidFill>
+              </a:rPr>
+              <a:t>Lag due to 7day MA and paid media ramp</a:t>
+            </a:r>
+          </a:p>
+        </p:txBody>
+      </p:sp>
+      <p:cxnSp>
+        <p:nvCxnSpPr>
+          <p:cNvPr id="30" name="Straight Arrow Connector 29">
+            <a:extLst>
+              <a:ext uri="{FF2B5EF4-FFF2-40B4-BE49-F238E27FC236}">
+                <a16:creationId xmlns:a16="http://schemas.microsoft.com/office/drawing/2014/main" id="{3FD77B82-D9B1-335A-A848-BE1B3463E6D5}"/>
+              </a:ext>
+            </a:extLst>
+          </p:cNvPr>
+          <p:cNvCxnSpPr>
+            <a:cxnSpLocks/>
+          </p:cNvCxnSpPr>
+          <p:nvPr/>
+        </p:nvCxnSpPr>
+        <p:spPr>
+          <a:xfrm flipH="1">
+            <a:off x="8840802" y="1597142"/>
+            <a:ext cx="291166" cy="328305"/>
+          </a:xfrm>
+          <a:prstGeom prst="straightConnector1">
+            <a:avLst/>
+          </a:prstGeom>
+          <a:ln>
+            <a:solidFill>
+              <a:schemeClr val="tx2">
+                <a:lumMod val="50000"/>
+                <a:lumOff val="50000"/>
+              </a:schemeClr>
+            </a:solidFill>
+            <a:tailEnd type="triangle"/>
+          </a:ln>
+        </p:spPr>
+        <p:style>
+          <a:lnRef idx="2">
+            <a:schemeClr val="accent1"/>
+          </a:lnRef>
+          <a:fillRef idx="0">
+            <a:schemeClr val="accent1"/>
+          </a:fillRef>
+          <a:effectRef idx="1">
+            <a:schemeClr val="accent1"/>
+          </a:effectRef>
+          <a:fontRef idx="minor">
+            <a:schemeClr val="tx1"/>
+          </a:fontRef>
+        </p:style>
+      </p:cxnSp>
+      <p:sp>
+        <p:nvSpPr>
+          <p:cNvPr id="33" name="TextBox 32">
+            <a:extLst>
+              <a:ext uri="{FF2B5EF4-FFF2-40B4-BE49-F238E27FC236}">
+                <a16:creationId xmlns:a16="http://schemas.microsoft.com/office/drawing/2014/main" id="{ACC043C5-101E-A406-D606-9B0508017A6C}"/>
+              </a:ext>
+            </a:extLst>
+          </p:cNvPr>
+          <p:cNvSpPr txBox="1"/>
+          <p:nvPr/>
+        </p:nvSpPr>
+        <p:spPr>
+          <a:xfrm>
+            <a:off x="8672762" y="1367373"/>
+            <a:ext cx="918411" cy="338554"/>
+          </a:xfrm>
+          <a:prstGeom prst="rect">
+            <a:avLst/>
+          </a:prstGeom>
+        </p:spPr>
+        <p:style>
+          <a:lnRef idx="1">
+            <a:schemeClr val="dk1"/>
+          </a:lnRef>
+          <a:fillRef idx="2">
+            <a:schemeClr val="dk1"/>
+          </a:fillRef>
+          <a:effectRef idx="1">
+            <a:schemeClr val="dk1"/>
+          </a:effectRef>
+          <a:fontRef idx="minor">
+            <a:schemeClr val="dk1"/>
+          </a:fontRef>
+        </p:style>
+        <p:txBody>
+          <a:bodyPr wrap="square" rtlCol="0">
+            <a:spAutoFit/>
+          </a:bodyPr>
+          <a:lstStyle/>
+          <a:p>
+            <a:pPr algn="ctr"/>
+            <a:r>
+              <a:rPr lang="en-US" sz="800" dirty="0">
+                <a:solidFill>
+                  <a:schemeClr val="tx2">
+                    <a:lumMod val="50000"/>
+                    <a:lumOff val="50000"/>
+                  </a:schemeClr>
+                </a:solidFill>
+              </a:rPr>
+              <a:t>Persistence brand lift</a:t>
+            </a:r>
+          </a:p>
+        </p:txBody>
+      </p:sp>
+      <p:sp>
+        <p:nvSpPr>
+          <p:cNvPr id="35" name="TextBox 34">
+            <a:extLst>
+              <a:ext uri="{FF2B5EF4-FFF2-40B4-BE49-F238E27FC236}">
+                <a16:creationId xmlns:a16="http://schemas.microsoft.com/office/drawing/2014/main" id="{D91035CF-A420-4BB4-D1AA-20BC3C317100}"/>
+              </a:ext>
+            </a:extLst>
+          </p:cNvPr>
+          <p:cNvSpPr txBox="1"/>
+          <p:nvPr/>
+        </p:nvSpPr>
+        <p:spPr>
+          <a:xfrm>
+            <a:off x="608197" y="5588260"/>
+            <a:ext cx="964932" cy="261610"/>
+          </a:xfrm>
+          <a:prstGeom prst="rect">
+            <a:avLst/>
+          </a:prstGeom>
+          <a:noFill/>
+        </p:spPr>
+        <p:txBody>
+          <a:bodyPr wrap="square" lIns="0" tIns="0" rIns="0" bIns="0" anchor="t">
+            <a:spAutoFit/>
+          </a:bodyPr>
+          <a:lstStyle/>
+          <a:p>
+            <a:pPr algn="l"/>
+            <a:r>
+              <a:rPr lang="en-US" sz="1700" b="1" dirty="0">
+                <a:solidFill>
+                  <a:srgbClr val="333333"/>
+                </a:solidFill>
+                <a:latin typeface="Arial"/>
+              </a:rPr>
+              <a:t>STABLE</a:t>
+            </a:r>
+            <a:endParaRPr lang="en-US" sz="1700" b="0" i="0" dirty="0">
+              <a:solidFill>
+                <a:srgbClr val="757575"/>
+              </a:solidFill>
+              <a:latin typeface="Arial"/>
+            </a:endParaRPr>
+          </a:p>
+        </p:txBody>
+      </p:sp>
+    </p:spTree>
+    <p:extLst>
+      <p:ext uri="{BB962C8B-B14F-4D97-AF65-F5344CB8AC3E}">
+        <p14:creationId xmlns:p14="http://schemas.microsoft.com/office/powerpoint/2010/main" val="348931621"/>
+      </p:ext>
+    </p:extLst>
+  </p:cSld>
+  <p:clrMapOvr>
+    <a:masterClrMapping/>
+  </p:clrMapOvr>
+</p:sld>
+</file>
+
+<file path=ppt/slides/slide12.xml><?xml version="1.0" encoding="utf-8"?>
+<p:sld xmlns:a="http://schemas.openxmlformats.org/drawingml/2006/main" xmlns:r="http://schemas.openxmlformats.org/officeDocument/2006/relationships" xmlns:p="http://schemas.openxmlformats.org/presentationml/2006/main">
+  <p:cSld>
+    <p:spTree>
+      <p:nvGrpSpPr>
+        <p:cNvPr id="1" name=""/>
+        <p:cNvGrpSpPr/>
+        <p:nvPr/>
+      </p:nvGrpSpPr>
+      <p:grpSpPr>
+        <a:xfrm>
+          <a:off x="0" y="0"/>
+          <a:ext cx="0" cy="0"/>
+          <a:chOff x="0" y="0"/>
+          <a:chExt cx="0" cy="0"/>
+        </a:xfrm>
+      </p:grpSpPr>
+      <p:pic>
+        <p:nvPicPr>
+          <p:cNvPr id="22" name="Picture 21" descr="The image displays a line graph illustrating the trend in conversion rates for a campaign ending on June 20, with a notable gap in conversion after the third week, and the number of views per day.&#10;&#10;AI-generated content may be incorrect.">
+            <a:extLst>
+              <a:ext uri="{FF2B5EF4-FFF2-40B4-BE49-F238E27FC236}">
+                <a16:creationId xmlns:a16="http://schemas.microsoft.com/office/drawing/2014/main" id="{DC93BDA9-5446-2A02-4BE2-13A38A31BD00}"/>
+              </a:ext>
+            </a:extLst>
+          </p:cNvPr>
+          <p:cNvPicPr>
+            <a:picLocks noChangeAspect="1"/>
+          </p:cNvPicPr>
+          <p:nvPr/>
+        </p:nvPicPr>
+        <p:blipFill>
+          <a:blip r:embed="rId2"/>
+          <a:stretch>
+            <a:fillRect/>
+          </a:stretch>
+        </p:blipFill>
+        <p:spPr>
+          <a:xfrm>
+            <a:off x="208646" y="1335506"/>
+            <a:ext cx="6765620" cy="4073868"/>
+          </a:xfrm>
+          <a:prstGeom prst="rect">
+            <a:avLst/>
+          </a:prstGeom>
+        </p:spPr>
+      </p:pic>
+      <p:sp>
+        <p:nvSpPr>
+          <p:cNvPr id="2" name="TextBox 1"/>
+          <p:cNvSpPr txBox="1"/>
+          <p:nvPr/>
+        </p:nvSpPr>
+        <p:spPr>
+          <a:xfrm>
+            <a:off x="502920" y="292608"/>
+            <a:ext cx="11155680" cy="161583"/>
+          </a:xfrm>
+          <a:prstGeom prst="rect">
+            <a:avLst/>
+          </a:prstGeom>
+          <a:noFill/>
+        </p:spPr>
+        <p:txBody>
+          <a:bodyPr wrap="square" lIns="0" tIns="0" rIns="0" bIns="0" anchor="t">
+            <a:spAutoFit/>
+          </a:bodyPr>
+          <a:lstStyle/>
+          <a:p>
+            <a:pPr algn="l"/>
+            <a:r>
+              <a:rPr sz="1050" b="1" i="0" dirty="0">
+                <a:solidFill>
+                  <a:srgbClr val="757575"/>
+                </a:solidFill>
+                <a:latin typeface="Arial"/>
+              </a:rPr>
+              <a:t>INVENTORY</a:t>
+            </a:r>
+            <a:r>
+              <a:rPr lang="en-US" sz="1050" b="1" i="0" dirty="0">
+                <a:solidFill>
+                  <a:srgbClr val="757575"/>
+                </a:solidFill>
+                <a:latin typeface="Arial"/>
+              </a:rPr>
+              <a:t> AND SALES PLANNING</a:t>
+            </a:r>
+            <a:endParaRPr sz="1050" b="1" i="0" dirty="0">
+              <a:solidFill>
+                <a:srgbClr val="757575"/>
+              </a:solidFill>
+              <a:latin typeface="Arial"/>
+            </a:endParaRPr>
+          </a:p>
+        </p:txBody>
+      </p:sp>
+      <p:sp>
+        <p:nvSpPr>
+          <p:cNvPr id="3" name="TextBox 2"/>
+          <p:cNvSpPr txBox="1"/>
+          <p:nvPr/>
+        </p:nvSpPr>
+        <p:spPr>
+          <a:xfrm>
+            <a:off x="502920" y="566928"/>
+            <a:ext cx="11201400" cy="353943"/>
+          </a:xfrm>
+          <a:prstGeom prst="rect">
+            <a:avLst/>
+          </a:prstGeom>
+          <a:noFill/>
+        </p:spPr>
+        <p:txBody>
+          <a:bodyPr wrap="square" lIns="0" tIns="0" rIns="0" bIns="0" anchor="t">
+            <a:spAutoFit/>
+          </a:bodyPr>
+          <a:lstStyle/>
+          <a:p>
+            <a:pPr algn="l"/>
+            <a:r>
+              <a:rPr lang="en-US" sz="2300" b="0" i="0" dirty="0">
+                <a:solidFill>
+                  <a:srgbClr val="000000"/>
+                </a:solidFill>
+                <a:latin typeface="Georgia"/>
+              </a:rPr>
+              <a:t>Broken size curves after 6 weeks cost an estimated $16.2K in demand</a:t>
+            </a:r>
+            <a:endParaRPr sz="2300" b="0" i="0" dirty="0">
+              <a:solidFill>
+                <a:srgbClr val="000000"/>
+              </a:solidFill>
+              <a:latin typeface="Georgia"/>
+            </a:endParaRPr>
+          </a:p>
+        </p:txBody>
+      </p:sp>
+      <p:sp>
+        <p:nvSpPr>
+          <p:cNvPr id="6" name="TextBox 5"/>
+          <p:cNvSpPr txBox="1"/>
+          <p:nvPr/>
+        </p:nvSpPr>
+        <p:spPr>
+          <a:xfrm>
+            <a:off x="7084194" y="1600774"/>
+            <a:ext cx="4572000" cy="3528210"/>
+          </a:xfrm>
+          <a:prstGeom prst="rect">
+            <a:avLst/>
+          </a:prstGeom>
+          <a:noFill/>
+        </p:spPr>
+        <p:txBody>
+          <a:bodyPr wrap="square" lIns="0" tIns="0" rIns="0" bIns="0" anchor="t">
+            <a:spAutoFit/>
+          </a:bodyPr>
+          <a:lstStyle/>
+          <a:p>
+            <a:pPr algn="l">
+              <a:lnSpc>
+                <a:spcPct val="112000"/>
+              </a:lnSpc>
+              <a:spcAft>
+                <a:spcPts val="1000"/>
+              </a:spcAft>
+            </a:pPr>
+            <a:r>
+              <a:rPr sz="1150" b="1" i="0" dirty="0">
+                <a:solidFill>
+                  <a:srgbClr val="333333"/>
+                </a:solidFill>
+                <a:latin typeface="Arial"/>
+              </a:rPr>
+              <a:t>•  </a:t>
+            </a:r>
+            <a:r>
+              <a:rPr lang="en-US" sz="1150" b="1" i="0" dirty="0">
+                <a:solidFill>
+                  <a:srgbClr val="333333"/>
+                </a:solidFill>
+                <a:latin typeface="Arial"/>
+              </a:rPr>
+              <a:t>Inventory constraints (not demand)</a:t>
+            </a:r>
+            <a:r>
+              <a:rPr lang="en-US" sz="1150" i="0" dirty="0">
+                <a:solidFill>
+                  <a:srgbClr val="333333"/>
+                </a:solidFill>
+                <a:latin typeface="Arial"/>
+              </a:rPr>
+              <a:t> resulted in less demand capture. </a:t>
+            </a:r>
+            <a:r>
+              <a:rPr lang="en-US" sz="1150" dirty="0">
+                <a:solidFill>
+                  <a:srgbClr val="333333"/>
+                </a:solidFill>
+                <a:latin typeface="Arial"/>
+              </a:rPr>
+              <a:t>Core sizes fell below 90% threshold by week 3 of the campaign. </a:t>
+            </a:r>
+          </a:p>
+          <a:p>
+            <a:pPr>
+              <a:lnSpc>
+                <a:spcPct val="112000"/>
+              </a:lnSpc>
+              <a:spcAft>
+                <a:spcPts val="1000"/>
+              </a:spcAft>
+            </a:pPr>
+            <a:r>
+              <a:rPr lang="en-US" sz="1150" b="1" dirty="0">
+                <a:solidFill>
+                  <a:srgbClr val="333333"/>
+                </a:solidFill>
+                <a:latin typeface="Arial"/>
+              </a:rPr>
+              <a:t>• Unmet Demand: </a:t>
+            </a:r>
+            <a:endParaRPr lang="en-US" sz="1150" i="0" dirty="0">
+              <a:solidFill>
+                <a:srgbClr val="333333"/>
+              </a:solidFill>
+              <a:latin typeface="Arial"/>
+            </a:endParaRPr>
+          </a:p>
+          <a:p>
+            <a:pPr>
+              <a:lnSpc>
+                <a:spcPct val="112000"/>
+              </a:lnSpc>
+              <a:spcAft>
+                <a:spcPts val="1000"/>
+              </a:spcAft>
+            </a:pPr>
+            <a:r>
+              <a:rPr lang="en-US" sz="1150" b="1" dirty="0">
+                <a:solidFill>
+                  <a:srgbClr val="333333"/>
+                </a:solidFill>
+                <a:latin typeface="Arial"/>
+              </a:rPr>
+              <a:t>• Opportunity: </a:t>
+            </a:r>
+            <a:r>
+              <a:rPr lang="en-US" sz="1150" dirty="0">
+                <a:solidFill>
+                  <a:srgbClr val="333333"/>
+                </a:solidFill>
+                <a:latin typeface="Arial"/>
+              </a:rPr>
+              <a:t>Increase WOS purchasing plan on core sizes to create inventory buffer. </a:t>
+            </a:r>
+            <a:endParaRPr lang="en-US" sz="1150" i="0" dirty="0">
+              <a:solidFill>
+                <a:srgbClr val="333333"/>
+              </a:solidFill>
+              <a:latin typeface="Arial"/>
+            </a:endParaRPr>
+          </a:p>
+          <a:p>
+            <a:pPr algn="l">
+              <a:lnSpc>
+                <a:spcPct val="112000"/>
+              </a:lnSpc>
+              <a:spcAft>
+                <a:spcPts val="1000"/>
+              </a:spcAft>
+            </a:pPr>
+            <a:r>
+              <a:rPr sz="1150" b="0" i="0" dirty="0">
+                <a:solidFill>
+                  <a:srgbClr val="333333"/>
+                </a:solidFill>
+                <a:latin typeface="Arial"/>
+              </a:rPr>
+              <a:t>•  Vestal Pro sell-through conversion fell 35% (5.2% weeks 1–3 → 3.4% week 6) while paid media kept sending traffic.</a:t>
+            </a:r>
+          </a:p>
+          <a:p>
+            <a:pPr algn="l">
+              <a:lnSpc>
+                <a:spcPct val="112000"/>
+              </a:lnSpc>
+              <a:spcAft>
+                <a:spcPts val="1000"/>
+              </a:spcAft>
+            </a:pPr>
+            <a:r>
+              <a:rPr sz="1150" b="0" i="0" dirty="0">
+                <a:solidFill>
+                  <a:srgbClr val="333333"/>
+                </a:solidFill>
+                <a:latin typeface="Arial"/>
+              </a:rPr>
+              <a:t>•  Modeled unmet demand: ≈140 units, ≈$20.4K, from applying early-flight conversion to weeks 4–6 traffic.</a:t>
+            </a:r>
+          </a:p>
+          <a:p>
+            <a:pPr algn="l">
+              <a:lnSpc>
+                <a:spcPct val="112000"/>
+              </a:lnSpc>
+              <a:spcAft>
+                <a:spcPts val="1000"/>
+              </a:spcAft>
+            </a:pPr>
+            <a:r>
+              <a:rPr sz="1150" b="0" i="0" dirty="0">
+                <a:solidFill>
+                  <a:srgbClr val="333333"/>
+                </a:solidFill>
+                <a:latin typeface="Arial"/>
+              </a:rPr>
+              <a:t>•  Site conversion followed: 2.52% week 1 → 2.23% week 6, below the 2.33% pre-period average.</a:t>
+            </a:r>
+          </a:p>
+          <a:p>
+            <a:pPr algn="l">
+              <a:lnSpc>
+                <a:spcPct val="112000"/>
+              </a:lnSpc>
+              <a:spcAft>
+                <a:spcPts val="1000"/>
+              </a:spcAft>
+            </a:pPr>
+            <a:r>
+              <a:rPr sz="1150" b="0" i="0" dirty="0">
+                <a:solidFill>
+                  <a:srgbClr val="333333"/>
+                </a:solidFill>
+                <a:latin typeface="Arial"/>
+              </a:rPr>
+              <a:t>•  </a:t>
+            </a:r>
+            <a:r>
+              <a:rPr sz="1150" b="0" i="0" dirty="0" err="1">
+                <a:solidFill>
+                  <a:srgbClr val="333333"/>
+                </a:solidFill>
+                <a:latin typeface="Arial"/>
+              </a:rPr>
+              <a:t>Speedcross</a:t>
+            </a:r>
+            <a:r>
+              <a:rPr sz="1150" b="0" i="0" dirty="0">
+                <a:solidFill>
+                  <a:srgbClr val="333333"/>
+                </a:solidFill>
+                <a:latin typeface="Arial"/>
+              </a:rPr>
+              <a:t> picked up +14% units as shoppers substituted — a partial, lower-price offset.</a:t>
+            </a:r>
+          </a:p>
+        </p:txBody>
+      </p:sp>
+      <p:sp>
+        <p:nvSpPr>
+          <p:cNvPr id="7" name="TextBox 6"/>
+          <p:cNvSpPr txBox="1"/>
+          <p:nvPr/>
+        </p:nvSpPr>
+        <p:spPr>
+          <a:xfrm>
+            <a:off x="502920" y="6510528"/>
+            <a:ext cx="10515600" cy="123111"/>
+          </a:xfrm>
+          <a:prstGeom prst="rect">
+            <a:avLst/>
+          </a:prstGeom>
+          <a:noFill/>
+        </p:spPr>
+        <p:txBody>
+          <a:bodyPr wrap="square" lIns="0" tIns="0" rIns="0" bIns="0" anchor="t">
+            <a:spAutoFit/>
+          </a:bodyPr>
+          <a:lstStyle/>
+          <a:p>
+            <a:pPr algn="l"/>
+            <a:r>
+              <a:rPr sz="800" b="0" i="0" dirty="0">
+                <a:solidFill>
+                  <a:srgbClr val="757575"/>
+                </a:solidFill>
+                <a:latin typeface="Arial"/>
+              </a:rPr>
+              <a:t>Salomon NA eCommerce · Vestal Pro launch readout</a:t>
+            </a:r>
+          </a:p>
+        </p:txBody>
+      </p:sp>
+      <p:sp>
+        <p:nvSpPr>
+          <p:cNvPr id="8" name="TextBox 7"/>
+          <p:cNvSpPr txBox="1"/>
+          <p:nvPr/>
+        </p:nvSpPr>
+        <p:spPr>
+          <a:xfrm>
+            <a:off x="11292840" y="6510528"/>
+            <a:ext cx="411480" cy="274320"/>
+          </a:xfrm>
+          <a:prstGeom prst="rect">
+            <a:avLst/>
+          </a:prstGeom>
+          <a:noFill/>
+        </p:spPr>
+        <p:txBody>
+          <a:bodyPr wrap="square" lIns="0" tIns="0" rIns="0" bIns="0" anchor="t">
+            <a:spAutoFit/>
+          </a:bodyPr>
+          <a:lstStyle/>
+          <a:p>
+            <a:pPr algn="r"/>
+            <a:r>
+              <a:rPr sz="800" b="0" i="0">
+                <a:solidFill>
+                  <a:srgbClr val="757575"/>
+                </a:solidFill>
+                <a:latin typeface="Arial"/>
+              </a:rPr>
+              <a:t>12</a:t>
+            </a:r>
+          </a:p>
+        </p:txBody>
+      </p:sp>
+      <p:pic>
+        <p:nvPicPr>
+          <p:cNvPr id="9" name="Picture 8" descr="salomon_wordmark_black.png"/>
+          <p:cNvPicPr>
+            <a:picLocks noChangeAspect="1"/>
+          </p:cNvPicPr>
+          <p:nvPr/>
+        </p:nvPicPr>
+        <p:blipFill>
+          <a:blip r:embed="rId3"/>
+          <a:stretch>
+            <a:fillRect/>
+          </a:stretch>
+        </p:blipFill>
+        <p:spPr>
+          <a:xfrm>
+            <a:off x="10698480" y="292608"/>
+            <a:ext cx="960120" cy="110013"/>
+          </a:xfrm>
+          <a:prstGeom prst="rect">
+            <a:avLst/>
+          </a:prstGeom>
+        </p:spPr>
+      </p:pic>
+      <p:cxnSp>
+        <p:nvCxnSpPr>
+          <p:cNvPr id="18" name="Straight Arrow Connector 17">
+            <a:extLst>
+              <a:ext uri="{FF2B5EF4-FFF2-40B4-BE49-F238E27FC236}">
+                <a16:creationId xmlns:a16="http://schemas.microsoft.com/office/drawing/2014/main" id="{663A123F-D889-5543-5F4E-48B42A7D09F3}"/>
+              </a:ext>
+            </a:extLst>
+          </p:cNvPr>
+          <p:cNvCxnSpPr>
+            <a:cxnSpLocks/>
+          </p:cNvCxnSpPr>
+          <p:nvPr/>
+        </p:nvCxnSpPr>
+        <p:spPr>
+          <a:xfrm flipH="1" flipV="1">
+            <a:off x="2314873" y="5322824"/>
+            <a:ext cx="362153" cy="437341"/>
+          </a:xfrm>
+          <a:prstGeom prst="straightConnector1">
+            <a:avLst/>
+          </a:prstGeom>
+          <a:ln>
+            <a:solidFill>
+              <a:schemeClr val="tx2">
+                <a:lumMod val="50000"/>
+                <a:lumOff val="50000"/>
+              </a:schemeClr>
+            </a:solidFill>
+            <a:tailEnd type="triangle"/>
+          </a:ln>
+        </p:spPr>
+        <p:style>
+          <a:lnRef idx="2">
+            <a:schemeClr val="accent1"/>
+          </a:lnRef>
+          <a:fillRef idx="0">
+            <a:schemeClr val="accent1"/>
+          </a:fillRef>
+          <a:effectRef idx="1">
+            <a:schemeClr val="accent1"/>
+          </a:effectRef>
+          <a:fontRef idx="minor">
+            <a:schemeClr val="tx1"/>
+          </a:fontRef>
+        </p:style>
+      </p:cxnSp>
+      <p:sp>
+        <p:nvSpPr>
+          <p:cNvPr id="17" name="TextBox 16">
+            <a:extLst>
+              <a:ext uri="{FF2B5EF4-FFF2-40B4-BE49-F238E27FC236}">
+                <a16:creationId xmlns:a16="http://schemas.microsoft.com/office/drawing/2014/main" id="{30306BD2-80C3-9950-1643-9CBA5E2AA22F}"/>
+              </a:ext>
+            </a:extLst>
+          </p:cNvPr>
+          <p:cNvSpPr txBox="1"/>
+          <p:nvPr/>
+        </p:nvSpPr>
+        <p:spPr>
+          <a:xfrm>
+            <a:off x="2352173" y="5635846"/>
+            <a:ext cx="854243" cy="338554"/>
+          </a:xfrm>
+          <a:prstGeom prst="rect">
+            <a:avLst/>
+          </a:prstGeom>
+        </p:spPr>
+        <p:style>
+          <a:lnRef idx="1">
+            <a:schemeClr val="dk1"/>
+          </a:lnRef>
+          <a:fillRef idx="2">
+            <a:schemeClr val="dk1"/>
+          </a:fillRef>
+          <a:effectRef idx="1">
+            <a:schemeClr val="dk1"/>
+          </a:effectRef>
+          <a:fontRef idx="minor">
+            <a:schemeClr val="dk1"/>
+          </a:fontRef>
+        </p:style>
+        <p:txBody>
+          <a:bodyPr wrap="square" rtlCol="0">
+            <a:spAutoFit/>
+          </a:bodyPr>
+          <a:lstStyle/>
+          <a:p>
+            <a:pPr algn="ctr"/>
+            <a:r>
+              <a:rPr lang="en-US" sz="800" dirty="0">
+                <a:solidFill>
+                  <a:schemeClr val="tx2">
+                    <a:lumMod val="50000"/>
+                    <a:lumOff val="50000"/>
+                  </a:schemeClr>
+                </a:solidFill>
+              </a:rPr>
+              <a:t>Core Sizes = M9-11 &amp; W7-9</a:t>
+            </a:r>
+          </a:p>
+        </p:txBody>
+      </p:sp>
+      <p:cxnSp>
+        <p:nvCxnSpPr>
+          <p:cNvPr id="23" name="Straight Arrow Connector 22">
+            <a:extLst>
+              <a:ext uri="{FF2B5EF4-FFF2-40B4-BE49-F238E27FC236}">
+                <a16:creationId xmlns:a16="http://schemas.microsoft.com/office/drawing/2014/main" id="{6A4249D8-A3FE-DFB2-A52A-7BEFDDE3427B}"/>
+              </a:ext>
+            </a:extLst>
+          </p:cNvPr>
+          <p:cNvCxnSpPr>
+            <a:cxnSpLocks/>
+          </p:cNvCxnSpPr>
+          <p:nvPr/>
+        </p:nvCxnSpPr>
+        <p:spPr>
+          <a:xfrm flipV="1">
+            <a:off x="669757" y="4932947"/>
+            <a:ext cx="0" cy="657941"/>
+          </a:xfrm>
+          <a:prstGeom prst="straightConnector1">
+            <a:avLst/>
+          </a:prstGeom>
+          <a:ln>
+            <a:solidFill>
+              <a:schemeClr val="tx2">
+                <a:lumMod val="50000"/>
+                <a:lumOff val="50000"/>
+              </a:schemeClr>
+            </a:solidFill>
+            <a:tailEnd type="triangle"/>
+          </a:ln>
+        </p:spPr>
+        <p:style>
+          <a:lnRef idx="2">
+            <a:schemeClr val="accent1"/>
+          </a:lnRef>
+          <a:fillRef idx="0">
+            <a:schemeClr val="accent1"/>
+          </a:fillRef>
+          <a:effectRef idx="1">
+            <a:schemeClr val="accent1"/>
+          </a:effectRef>
+          <a:fontRef idx="minor">
+            <a:schemeClr val="tx1"/>
+          </a:fontRef>
+        </p:style>
+      </p:cxnSp>
+      <p:sp>
+        <p:nvSpPr>
+          <p:cNvPr id="24" name="TextBox 23">
+            <a:extLst>
+              <a:ext uri="{FF2B5EF4-FFF2-40B4-BE49-F238E27FC236}">
+                <a16:creationId xmlns:a16="http://schemas.microsoft.com/office/drawing/2014/main" id="{CF5D0070-7EAD-3B01-D4D0-FA685B2A2A3A}"/>
+              </a:ext>
+            </a:extLst>
+          </p:cNvPr>
+          <p:cNvSpPr txBox="1"/>
+          <p:nvPr/>
+        </p:nvSpPr>
+        <p:spPr>
+          <a:xfrm>
+            <a:off x="344904" y="5466569"/>
+            <a:ext cx="854243" cy="338554"/>
+          </a:xfrm>
+          <a:prstGeom prst="rect">
+            <a:avLst/>
+          </a:prstGeom>
+        </p:spPr>
+        <p:style>
+          <a:lnRef idx="1">
+            <a:schemeClr val="dk1"/>
+          </a:lnRef>
+          <a:fillRef idx="2">
+            <a:schemeClr val="dk1"/>
+          </a:fillRef>
+          <a:effectRef idx="1">
+            <a:schemeClr val="dk1"/>
+          </a:effectRef>
+          <a:fontRef idx="minor">
+            <a:schemeClr val="dk1"/>
+          </a:fontRef>
+        </p:style>
+        <p:txBody>
+          <a:bodyPr wrap="square" rtlCol="0">
+            <a:spAutoFit/>
+          </a:bodyPr>
+          <a:lstStyle/>
+          <a:p>
+            <a:pPr algn="ctr"/>
+            <a:r>
+              <a:rPr lang="en-US" sz="800" dirty="0">
+                <a:solidFill>
+                  <a:schemeClr val="tx2">
+                    <a:lumMod val="50000"/>
+                    <a:lumOff val="50000"/>
+                  </a:schemeClr>
+                </a:solidFill>
+              </a:rPr>
+              <a:t>June 1  Campaign Start</a:t>
+            </a:r>
+          </a:p>
+        </p:txBody>
+      </p:sp>
+    </p:spTree>
+  </p:cSld>
+  <p:clrMapOvr>
+    <a:masterClrMapping/>
+  </p:clrMapOvr>
+</p:sld>
+</file>
+
+<file path=ppt/slides/slide13.xml><?xml version="1.0" encoding="utf-8"?>
+<p:sld xmlns:a="http://schemas.openxmlformats.org/drawingml/2006/main" xmlns:r="http://schemas.openxmlformats.org/officeDocument/2006/relationships" xmlns:p="http://schemas.openxmlformats.org/presentationml/2006/main">
+  <p:cSld>
+    <p:spTree>
+      <p:nvGrpSpPr>
+        <p:cNvPr id="1" name=""/>
+        <p:cNvGrpSpPr/>
+        <p:nvPr/>
+      </p:nvGrpSpPr>
+      <p:grpSpPr>
+        <a:xfrm>
+          <a:off x="0" y="0"/>
+          <a:ext cx="0" cy="0"/>
+          <a:chOff x="0" y="0"/>
+          <a:chExt cx="0" cy="0"/>
+        </a:xfrm>
+      </p:grpSpPr>
+      <p:sp>
+        <p:nvSpPr>
+          <p:cNvPr id="2" name="Rectangle 1"/>
+          <p:cNvSpPr/>
+          <p:nvPr/>
+        </p:nvSpPr>
+        <p:spPr>
+          <a:xfrm>
+            <a:off x="0" y="-6016"/>
+            <a:ext cx="12191695" cy="6858000"/>
+          </a:xfrm>
+          <a:prstGeom prst="rect">
+            <a:avLst/>
+          </a:prstGeom>
+          <a:solidFill>
+            <a:srgbClr val="000000"/>
+          </a:solidFill>
+          <a:ln>
+            <a:noFill/>
+          </a:ln>
+          <a:effectLst/>
+        </p:spPr>
+        <p:style>
+          <a:lnRef idx="1">
+            <a:schemeClr val="accent1"/>
+          </a:lnRef>
+          <a:fillRef idx="3">
+            <a:schemeClr val="accent1"/>
+          </a:fillRef>
+          <a:effectRef idx="2">
+            <a:schemeClr val="accent1"/>
+          </a:effectRef>
+          <a:fontRef idx="minor">
+            <a:schemeClr val="lt1"/>
+          </a:fontRef>
+        </p:style>
+        <p:txBody>
+          <a:bodyPr rtlCol="0" anchor="ctr"/>
+          <a:lstStyle/>
+          <a:p>
+            <a:pPr algn="ctr"/>
+            <a:endParaRPr/>
+          </a:p>
+        </p:txBody>
+      </p:sp>
+      <p:sp>
+        <p:nvSpPr>
+          <p:cNvPr id="3" name="TextBox 2"/>
+          <p:cNvSpPr txBox="1"/>
+          <p:nvPr/>
+        </p:nvSpPr>
+        <p:spPr>
+          <a:xfrm>
+            <a:off x="822960" y="457200"/>
+            <a:ext cx="10515600" cy="320040"/>
+          </a:xfrm>
+          <a:prstGeom prst="rect">
+            <a:avLst/>
+          </a:prstGeom>
+          <a:noFill/>
+        </p:spPr>
+        <p:txBody>
+          <a:bodyPr wrap="square" lIns="0" tIns="0" rIns="0" bIns="0" anchor="t">
+            <a:spAutoFit/>
+          </a:bodyPr>
+          <a:lstStyle/>
+          <a:p>
+            <a:pPr algn="l"/>
+            <a:r>
+              <a:rPr sz="1100" b="1" i="0" dirty="0">
+                <a:solidFill>
+                  <a:srgbClr val="0057B8"/>
+                </a:solidFill>
+                <a:latin typeface="Arial"/>
+              </a:rPr>
+              <a:t>RECOMMENDATIONS</a:t>
+            </a:r>
+          </a:p>
+        </p:txBody>
+      </p:sp>
+      <p:sp>
+        <p:nvSpPr>
+          <p:cNvPr id="4" name="TextBox 3"/>
+          <p:cNvSpPr txBox="1"/>
+          <p:nvPr/>
+        </p:nvSpPr>
+        <p:spPr>
+          <a:xfrm>
+            <a:off x="822960" y="777240"/>
+            <a:ext cx="10515600" cy="430887"/>
+          </a:xfrm>
+          <a:prstGeom prst="rect">
+            <a:avLst/>
+          </a:prstGeom>
+          <a:noFill/>
+        </p:spPr>
+        <p:txBody>
+          <a:bodyPr wrap="square" lIns="0" tIns="0" rIns="0" bIns="0" anchor="t">
+            <a:spAutoFit/>
+          </a:bodyPr>
+          <a:lstStyle/>
+          <a:p>
+            <a:pPr algn="l"/>
+            <a:r>
+              <a:rPr lang="en-US" sz="2800" b="0" i="0" dirty="0">
+                <a:solidFill>
+                  <a:srgbClr val="FFFFFF"/>
+                </a:solidFill>
+                <a:latin typeface="Georgia"/>
+              </a:rPr>
+              <a:t>Changes for next launch</a:t>
+            </a:r>
+            <a:endParaRPr sz="2800" b="0" i="0" dirty="0">
+              <a:solidFill>
+                <a:srgbClr val="FFFFFF"/>
+              </a:solidFill>
+              <a:latin typeface="Georgia"/>
+            </a:endParaRPr>
+          </a:p>
+        </p:txBody>
+      </p:sp>
+      <p:sp>
+        <p:nvSpPr>
+          <p:cNvPr id="5" name="TextBox 4"/>
+          <p:cNvSpPr txBox="1"/>
+          <p:nvPr/>
+        </p:nvSpPr>
+        <p:spPr>
+          <a:xfrm>
+            <a:off x="822960" y="1600200"/>
+            <a:ext cx="502920" cy="731520"/>
+          </a:xfrm>
+          <a:prstGeom prst="rect">
+            <a:avLst/>
+          </a:prstGeom>
+          <a:noFill/>
+        </p:spPr>
+        <p:txBody>
+          <a:bodyPr wrap="square" lIns="0" tIns="0" rIns="0" bIns="0" anchor="t">
+            <a:spAutoFit/>
+          </a:bodyPr>
+          <a:lstStyle/>
+          <a:p>
+            <a:pPr algn="l"/>
+            <a:r>
+              <a:rPr sz="2000" b="1" i="0">
+                <a:solidFill>
+                  <a:srgbClr val="0057B8"/>
+                </a:solidFill>
+                <a:latin typeface="Arial"/>
+              </a:rPr>
+              <a:t>1</a:t>
+            </a:r>
+          </a:p>
+        </p:txBody>
+      </p:sp>
+      <p:sp>
+        <p:nvSpPr>
+          <p:cNvPr id="6" name="TextBox 5"/>
+          <p:cNvSpPr txBox="1"/>
+          <p:nvPr/>
+        </p:nvSpPr>
+        <p:spPr>
+          <a:xfrm>
+            <a:off x="1417320" y="1618488"/>
+            <a:ext cx="9966960" cy="384657"/>
+          </a:xfrm>
+          <a:prstGeom prst="rect">
+            <a:avLst/>
+          </a:prstGeom>
+          <a:noFill/>
+        </p:spPr>
+        <p:txBody>
+          <a:bodyPr wrap="square" lIns="0" tIns="0" rIns="0" bIns="0" anchor="t">
+            <a:spAutoFit/>
+          </a:bodyPr>
+          <a:lstStyle/>
+          <a:p>
+            <a:pPr algn="l">
+              <a:lnSpc>
+                <a:spcPct val="108000"/>
+              </a:lnSpc>
+            </a:pPr>
+            <a:r>
+              <a:rPr sz="1250" b="1" i="0" dirty="0">
+                <a:solidFill>
+                  <a:srgbClr val="FFFFFF"/>
+                </a:solidFill>
+                <a:latin typeface="Arial"/>
+              </a:rPr>
+              <a:t>Buy deeper on core sizes.  </a:t>
+            </a:r>
+            <a:r>
+              <a:rPr sz="1150" b="0" i="0" dirty="0">
+                <a:solidFill>
+                  <a:srgbClr val="BFD5ED"/>
+                </a:solidFill>
+                <a:latin typeface="Arial"/>
+              </a:rPr>
+              <a:t>Week-3 depletion of M9–11 / W7–9 cost ≈140 units (≈$20K) and dragged site conversion below baseline by week 6.</a:t>
+            </a:r>
+            <a:r>
+              <a:rPr lang="en-US" sz="1150" b="0" i="0" dirty="0">
+                <a:solidFill>
+                  <a:srgbClr val="BFD5ED"/>
+                </a:solidFill>
+                <a:latin typeface="Arial"/>
+              </a:rPr>
+              <a:t> Increasing WOS purchasing plan on core sizes will support additional demand. </a:t>
+            </a:r>
+            <a:endParaRPr sz="1150" b="0" i="0" dirty="0">
+              <a:solidFill>
+                <a:srgbClr val="BFD5ED"/>
+              </a:solidFill>
+              <a:latin typeface="Arial"/>
+            </a:endParaRPr>
+          </a:p>
+        </p:txBody>
+      </p:sp>
+      <p:sp>
+        <p:nvSpPr>
+          <p:cNvPr id="7" name="TextBox 6"/>
+          <p:cNvSpPr txBox="1"/>
+          <p:nvPr/>
+        </p:nvSpPr>
+        <p:spPr>
+          <a:xfrm>
+            <a:off x="822960" y="2386584"/>
+            <a:ext cx="502920" cy="731520"/>
+          </a:xfrm>
+          <a:prstGeom prst="rect">
+            <a:avLst/>
+          </a:prstGeom>
+          <a:noFill/>
+        </p:spPr>
+        <p:txBody>
+          <a:bodyPr wrap="square" lIns="0" tIns="0" rIns="0" bIns="0" anchor="t">
+            <a:spAutoFit/>
+          </a:bodyPr>
+          <a:lstStyle/>
+          <a:p>
+            <a:pPr algn="l"/>
+            <a:r>
+              <a:rPr sz="2000" b="1" i="0">
+                <a:solidFill>
+                  <a:srgbClr val="0057B8"/>
+                </a:solidFill>
+                <a:latin typeface="Arial"/>
+              </a:rPr>
+              <a:t>2</a:t>
+            </a:r>
+          </a:p>
+        </p:txBody>
+      </p:sp>
+      <p:sp>
+        <p:nvSpPr>
+          <p:cNvPr id="8" name="TextBox 7"/>
+          <p:cNvSpPr txBox="1"/>
+          <p:nvPr/>
+        </p:nvSpPr>
+        <p:spPr>
+          <a:xfrm>
+            <a:off x="1417320" y="2404872"/>
+            <a:ext cx="9966960" cy="749808"/>
+          </a:xfrm>
+          <a:prstGeom prst="rect">
+            <a:avLst/>
+          </a:prstGeom>
+          <a:noFill/>
+        </p:spPr>
+        <p:txBody>
+          <a:bodyPr wrap="square" lIns="0" tIns="0" rIns="0" bIns="0" anchor="t">
+            <a:spAutoFit/>
+          </a:bodyPr>
+          <a:lstStyle/>
+          <a:p>
+            <a:pPr algn="l">
+              <a:lnSpc>
+                <a:spcPct val="108000"/>
+              </a:lnSpc>
+            </a:pPr>
+            <a:r>
+              <a:rPr sz="1250" b="1" i="0" dirty="0">
+                <a:solidFill>
+                  <a:srgbClr val="FFFFFF"/>
+                </a:solidFill>
+                <a:latin typeface="Arial"/>
+              </a:rPr>
+              <a:t>Tie paid media to inventory signals.  </a:t>
+            </a:r>
+            <a:r>
+              <a:rPr sz="1150" b="0" i="0" dirty="0">
+                <a:solidFill>
+                  <a:srgbClr val="BFD5ED"/>
+                </a:solidFill>
+                <a:latin typeface="Arial"/>
+              </a:rPr>
+              <a:t>Throttle prospecting when core-size availability drops below 80%. Paid social ran 59% of budget at 0.3× </a:t>
+            </a:r>
+            <a:r>
+              <a:rPr sz="1150" b="0" i="0" dirty="0" err="1">
+                <a:solidFill>
+                  <a:srgbClr val="BFD5ED"/>
+                </a:solidFill>
+                <a:latin typeface="Arial"/>
+              </a:rPr>
+              <a:t>iROAS</a:t>
+            </a:r>
+            <a:r>
+              <a:rPr sz="1150" b="0" i="0" dirty="0">
+                <a:solidFill>
+                  <a:srgbClr val="BFD5ED"/>
+                </a:solidFill>
+                <a:latin typeface="Arial"/>
+              </a:rPr>
+              <a:t> into a constrained assortment; reallocate mid-flight to CRM and search.</a:t>
+            </a:r>
+          </a:p>
+        </p:txBody>
+      </p:sp>
+      <p:sp>
+        <p:nvSpPr>
+          <p:cNvPr id="9" name="TextBox 8"/>
+          <p:cNvSpPr txBox="1"/>
+          <p:nvPr/>
+        </p:nvSpPr>
+        <p:spPr>
+          <a:xfrm>
+            <a:off x="822960" y="3172968"/>
+            <a:ext cx="502920" cy="731520"/>
+          </a:xfrm>
+          <a:prstGeom prst="rect">
+            <a:avLst/>
+          </a:prstGeom>
+          <a:noFill/>
+        </p:spPr>
+        <p:txBody>
+          <a:bodyPr wrap="square" lIns="0" tIns="0" rIns="0" bIns="0" anchor="t">
+            <a:spAutoFit/>
+          </a:bodyPr>
+          <a:lstStyle/>
+          <a:p>
+            <a:pPr algn="l"/>
+            <a:r>
+              <a:rPr sz="2000" b="1" i="0">
+                <a:solidFill>
+                  <a:srgbClr val="0057B8"/>
+                </a:solidFill>
+                <a:latin typeface="Arial"/>
+              </a:rPr>
+              <a:t>3</a:t>
+            </a:r>
+          </a:p>
+        </p:txBody>
+      </p:sp>
+      <p:sp>
+        <p:nvSpPr>
+          <p:cNvPr id="10" name="TextBox 9"/>
+          <p:cNvSpPr txBox="1"/>
+          <p:nvPr/>
+        </p:nvSpPr>
+        <p:spPr>
+          <a:xfrm>
+            <a:off x="1417320" y="3191256"/>
+            <a:ext cx="9966960" cy="749808"/>
+          </a:xfrm>
+          <a:prstGeom prst="rect">
+            <a:avLst/>
+          </a:prstGeom>
+          <a:noFill/>
+        </p:spPr>
+        <p:txBody>
+          <a:bodyPr wrap="square" lIns="0" tIns="0" rIns="0" bIns="0" anchor="t">
+            <a:spAutoFit/>
+          </a:bodyPr>
+          <a:lstStyle/>
+          <a:p>
+            <a:pPr algn="l">
+              <a:lnSpc>
+                <a:spcPct val="108000"/>
+              </a:lnSpc>
+            </a:pPr>
+            <a:r>
+              <a:rPr sz="1250" b="1" i="0" dirty="0">
+                <a:solidFill>
+                  <a:srgbClr val="FFFFFF"/>
+                </a:solidFill>
+                <a:latin typeface="Arial"/>
+              </a:rPr>
+              <a:t>Judge paid social on acquisition economics, not last-click revenue.  </a:t>
+            </a:r>
+            <a:r>
+              <a:rPr sz="1150" b="0" i="0" dirty="0">
+                <a:solidFill>
+                  <a:srgbClr val="BFD5ED"/>
+                </a:solidFill>
+                <a:latin typeface="Arial"/>
+              </a:rPr>
+              <a:t>It delivered 42% of new customers at $147 CAC against $212 early customer value. Set a CAC target pre-launch and add a day-90 LTV readout.</a:t>
+            </a:r>
+          </a:p>
+        </p:txBody>
+      </p:sp>
+      <p:sp>
+        <p:nvSpPr>
+          <p:cNvPr id="11" name="TextBox 10"/>
+          <p:cNvSpPr txBox="1"/>
+          <p:nvPr/>
+        </p:nvSpPr>
+        <p:spPr>
+          <a:xfrm>
+            <a:off x="822960" y="3959352"/>
+            <a:ext cx="502920" cy="731520"/>
+          </a:xfrm>
+          <a:prstGeom prst="rect">
+            <a:avLst/>
+          </a:prstGeom>
+          <a:noFill/>
+        </p:spPr>
+        <p:txBody>
+          <a:bodyPr wrap="square" lIns="0" tIns="0" rIns="0" bIns="0" anchor="t">
+            <a:spAutoFit/>
+          </a:bodyPr>
+          <a:lstStyle/>
+          <a:p>
+            <a:pPr algn="l"/>
+            <a:r>
+              <a:rPr sz="2000" b="1" i="0">
+                <a:solidFill>
+                  <a:srgbClr val="0057B8"/>
+                </a:solidFill>
+                <a:latin typeface="Arial"/>
+              </a:rPr>
+              <a:t>4</a:t>
+            </a:r>
+          </a:p>
+        </p:txBody>
+      </p:sp>
+      <p:sp>
+        <p:nvSpPr>
+          <p:cNvPr id="13" name="TextBox 12"/>
+          <p:cNvSpPr txBox="1"/>
+          <p:nvPr/>
+        </p:nvSpPr>
+        <p:spPr>
+          <a:xfrm>
+            <a:off x="822960" y="4745736"/>
+            <a:ext cx="502920" cy="731520"/>
+          </a:xfrm>
+          <a:prstGeom prst="rect">
+            <a:avLst/>
+          </a:prstGeom>
+          <a:noFill/>
+        </p:spPr>
+        <p:txBody>
+          <a:bodyPr wrap="square" lIns="0" tIns="0" rIns="0" bIns="0" anchor="t">
+            <a:spAutoFit/>
+          </a:bodyPr>
+          <a:lstStyle/>
+          <a:p>
+            <a:pPr algn="l"/>
+            <a:r>
+              <a:rPr sz="2000" b="1" i="0">
+                <a:solidFill>
+                  <a:srgbClr val="0057B8"/>
+                </a:solidFill>
+                <a:latin typeface="Arial"/>
+              </a:rPr>
+              <a:t>5</a:t>
+            </a:r>
+          </a:p>
+        </p:txBody>
+      </p:sp>
+      <p:sp>
+        <p:nvSpPr>
+          <p:cNvPr id="14" name="TextBox 13"/>
+          <p:cNvSpPr txBox="1"/>
+          <p:nvPr/>
+        </p:nvSpPr>
+        <p:spPr>
+          <a:xfrm>
+            <a:off x="1417320" y="3959352"/>
+            <a:ext cx="9966960" cy="749808"/>
+          </a:xfrm>
+          <a:prstGeom prst="rect">
+            <a:avLst/>
+          </a:prstGeom>
+          <a:noFill/>
+        </p:spPr>
+        <p:txBody>
+          <a:bodyPr wrap="square" lIns="0" tIns="0" rIns="0" bIns="0" anchor="t">
+            <a:spAutoFit/>
+          </a:bodyPr>
+          <a:lstStyle/>
+          <a:p>
+            <a:pPr algn="l">
+              <a:lnSpc>
+                <a:spcPct val="108000"/>
+              </a:lnSpc>
+            </a:pPr>
+            <a:r>
+              <a:rPr sz="1250" b="1" i="0" dirty="0">
+                <a:solidFill>
+                  <a:srgbClr val="FFFFFF"/>
+                </a:solidFill>
+                <a:latin typeface="Arial"/>
+              </a:rPr>
+              <a:t>Convert the halo into baskets.  </a:t>
+            </a:r>
+            <a:r>
+              <a:rPr sz="1150" b="0" i="0" dirty="0">
+                <a:solidFill>
+                  <a:srgbClr val="BFD5ED"/>
+                </a:solidFill>
+                <a:latin typeface="Arial"/>
+              </a:rPr>
+              <a:t>Adjacent demand lifted +9% but attach to Vestal Pro orders stayed flat at 18%. Bundle socks and accessories at PDP and activate the 2,776 email / 1,447 SMS adds on cross-category journeys.</a:t>
+            </a:r>
+          </a:p>
+        </p:txBody>
+      </p:sp>
+      <p:sp>
+        <p:nvSpPr>
+          <p:cNvPr id="15" name="TextBox 14"/>
+          <p:cNvSpPr txBox="1"/>
+          <p:nvPr/>
+        </p:nvSpPr>
+        <p:spPr>
+          <a:xfrm>
+            <a:off x="822960" y="5532120"/>
+            <a:ext cx="502920" cy="731520"/>
+          </a:xfrm>
+          <a:prstGeom prst="rect">
+            <a:avLst/>
+          </a:prstGeom>
+          <a:noFill/>
+        </p:spPr>
+        <p:txBody>
+          <a:bodyPr wrap="square" lIns="0" tIns="0" rIns="0" bIns="0" anchor="t">
+            <a:spAutoFit/>
+          </a:bodyPr>
+          <a:lstStyle/>
+          <a:p>
+            <a:pPr algn="l"/>
+            <a:r>
+              <a:rPr sz="2000" b="1" i="0">
+                <a:solidFill>
+                  <a:srgbClr val="0057B8"/>
+                </a:solidFill>
+                <a:latin typeface="Arial"/>
+              </a:rPr>
+              <a:t>6</a:t>
+            </a:r>
+          </a:p>
+        </p:txBody>
+      </p:sp>
+      <p:sp>
+        <p:nvSpPr>
+          <p:cNvPr id="16" name="TextBox 15"/>
+          <p:cNvSpPr txBox="1"/>
+          <p:nvPr/>
+        </p:nvSpPr>
+        <p:spPr>
+          <a:xfrm>
+            <a:off x="1417320" y="4713009"/>
+            <a:ext cx="9966960" cy="749808"/>
+          </a:xfrm>
+          <a:prstGeom prst="rect">
+            <a:avLst/>
+          </a:prstGeom>
+          <a:noFill/>
+        </p:spPr>
+        <p:txBody>
+          <a:bodyPr wrap="square" lIns="0" tIns="0" rIns="0" bIns="0" anchor="t">
+            <a:spAutoFit/>
+          </a:bodyPr>
+          <a:lstStyle/>
+          <a:p>
+            <a:pPr algn="l">
+              <a:lnSpc>
+                <a:spcPct val="108000"/>
+              </a:lnSpc>
+            </a:pPr>
+            <a:r>
+              <a:rPr sz="1250" b="1" i="0" dirty="0">
+                <a:solidFill>
+                  <a:srgbClr val="FFFFFF"/>
+                </a:solidFill>
+                <a:latin typeface="Arial"/>
+              </a:rPr>
+              <a:t>Instrument incrementality before launch day.  </a:t>
+            </a:r>
+            <a:r>
+              <a:rPr sz="1150" b="0" i="0" dirty="0">
+                <a:solidFill>
+                  <a:srgbClr val="BFD5ED"/>
+                </a:solidFill>
+                <a:latin typeface="Arial"/>
+              </a:rPr>
+              <a:t>Field a CRM holdout and a geo split, set numeric revenue / CAC / database targets, and track COGS and unsubscribes so the next readout measures margin, not proxies.</a:t>
+            </a:r>
+          </a:p>
+        </p:txBody>
+      </p:sp>
+      <p:sp>
+        <p:nvSpPr>
+          <p:cNvPr id="17" name="TextBox 16"/>
+          <p:cNvSpPr txBox="1"/>
+          <p:nvPr/>
+        </p:nvSpPr>
+        <p:spPr>
+          <a:xfrm>
+            <a:off x="822960" y="6510528"/>
+            <a:ext cx="10515600" cy="274320"/>
+          </a:xfrm>
+          <a:prstGeom prst="rect">
+            <a:avLst/>
+          </a:prstGeom>
+          <a:noFill/>
+        </p:spPr>
+        <p:txBody>
+          <a:bodyPr wrap="square" lIns="0" tIns="0" rIns="0" bIns="0" anchor="t">
+            <a:spAutoFit/>
+          </a:bodyPr>
+          <a:lstStyle/>
+          <a:p>
+            <a:pPr algn="l"/>
+            <a:r>
+              <a:rPr sz="800" b="0" i="0">
+                <a:solidFill>
+                  <a:srgbClr val="757575"/>
+                </a:solidFill>
+                <a:latin typeface="Arial"/>
+              </a:rPr>
+              <a:t>Salomon NA eCommerce · Vestal Pro launch readout · Illustrative synthetic case data</a:t>
+            </a:r>
+          </a:p>
+        </p:txBody>
+      </p:sp>
+      <p:pic>
+        <p:nvPicPr>
+          <p:cNvPr id="18" name="Picture 17" descr="salomon_wordmark_black.png"/>
+          <p:cNvPicPr>
+            <a:picLocks noChangeAspect="1"/>
+          </p:cNvPicPr>
+          <p:nvPr/>
+        </p:nvPicPr>
+        <p:blipFill>
+          <a:blip r:embed="rId2"/>
+          <a:stretch>
+            <a:fillRect/>
+          </a:stretch>
+        </p:blipFill>
+        <p:spPr>
+          <a:xfrm>
+            <a:off x="10698480" y="292608"/>
+            <a:ext cx="960120" cy="110013"/>
+          </a:xfrm>
+          <a:prstGeom prst="rect">
+            <a:avLst/>
+          </a:prstGeom>
+        </p:spPr>
+      </p:pic>
+      <p:sp>
+        <p:nvSpPr>
+          <p:cNvPr id="20" name="TextBox 19">
+            <a:extLst>
+              <a:ext uri="{FF2B5EF4-FFF2-40B4-BE49-F238E27FC236}">
+                <a16:creationId xmlns:a16="http://schemas.microsoft.com/office/drawing/2014/main" id="{EF101A08-7E0C-FE45-00DE-CFBC781E078C}"/>
+              </a:ext>
+            </a:extLst>
+          </p:cNvPr>
+          <p:cNvSpPr txBox="1"/>
+          <p:nvPr/>
+        </p:nvSpPr>
+        <p:spPr>
+          <a:xfrm>
+            <a:off x="1417320" y="5513832"/>
+            <a:ext cx="9966960" cy="192297"/>
+          </a:xfrm>
+          <a:prstGeom prst="rect">
+            <a:avLst/>
+          </a:prstGeom>
+          <a:noFill/>
+        </p:spPr>
+        <p:txBody>
+          <a:bodyPr wrap="square" lIns="0" tIns="0" rIns="0" bIns="0" anchor="t">
+            <a:spAutoFit/>
+          </a:bodyPr>
+          <a:lstStyle/>
+          <a:p>
+            <a:pPr algn="l">
+              <a:lnSpc>
+                <a:spcPct val="108000"/>
+              </a:lnSpc>
+            </a:pPr>
+            <a:r>
+              <a:rPr lang="en-US" sz="1250" b="1" i="0" dirty="0">
+                <a:solidFill>
+                  <a:srgbClr val="FFFFFF"/>
+                </a:solidFill>
+                <a:latin typeface="Arial"/>
+              </a:rPr>
+              <a:t>CANNIBALIZATION??????????</a:t>
+            </a:r>
+            <a:endParaRPr sz="1150" b="0" i="0" dirty="0">
+              <a:solidFill>
+                <a:srgbClr val="BFD5ED"/>
+              </a:solidFill>
+              <a:latin typeface="Arial"/>
+            </a:endParaRPr>
+          </a:p>
+        </p:txBody>
+      </p:sp>
+    </p:spTree>
+  </p:cSld>
+  <p:clrMapOvr>
+    <a:masterClrMapping/>
+  </p:clrMapOvr>
+</p:sld>
+</file>
+
+<file path=ppt/slides/slide14.xml><?xml version="1.0" encoding="utf-8"?>
+<p:sld xmlns:a="http://schemas.openxmlformats.org/drawingml/2006/main" xmlns:r="http://schemas.openxmlformats.org/officeDocument/2006/relationships" xmlns:p="http://schemas.openxmlformats.org/presentationml/2006/main">
+  <p:cSld>
+    <p:spTree>
+      <p:nvGrpSpPr>
+        <p:cNvPr id="1" name="">
+          <a:extLst>
+            <a:ext uri="{FF2B5EF4-FFF2-40B4-BE49-F238E27FC236}">
+              <a16:creationId xmlns:a16="http://schemas.microsoft.com/office/drawing/2014/main" id="{3A7BD774-5215-56D0-5E2D-5BEB935C20F4}"/>
+            </a:ext>
+          </a:extLst>
+        </p:cNvPr>
+        <p:cNvGrpSpPr/>
+        <p:nvPr/>
+      </p:nvGrpSpPr>
+      <p:grpSpPr>
+        <a:xfrm>
+          <a:off x="0" y="0"/>
+          <a:ext cx="0" cy="0"/>
+          <a:chOff x="0" y="0"/>
+          <a:chExt cx="0" cy="0"/>
+        </a:xfrm>
+      </p:grpSpPr>
+      <p:sp>
+        <p:nvSpPr>
+          <p:cNvPr id="2" name="Rectangle 1">
+            <a:extLst>
+              <a:ext uri="{FF2B5EF4-FFF2-40B4-BE49-F238E27FC236}">
+                <a16:creationId xmlns:a16="http://schemas.microsoft.com/office/drawing/2014/main" id="{2F2B0E74-D5E6-28E0-4424-F20FC2FD1565}"/>
+              </a:ext>
+            </a:extLst>
+          </p:cNvPr>
+          <p:cNvSpPr/>
+          <p:nvPr/>
+        </p:nvSpPr>
+        <p:spPr>
+          <a:xfrm>
+            <a:off x="0" y="0"/>
+            <a:ext cx="12191695" cy="6858000"/>
+          </a:xfrm>
+          <a:prstGeom prst="rect">
+            <a:avLst/>
+          </a:prstGeom>
+          <a:solidFill>
+            <a:srgbClr val="000000"/>
+          </a:solidFill>
+          <a:ln>
+            <a:noFill/>
+          </a:ln>
+          <a:effectLst/>
+        </p:spPr>
+        <p:style>
+          <a:lnRef idx="1">
+            <a:schemeClr val="accent1"/>
+          </a:lnRef>
+          <a:fillRef idx="3">
+            <a:schemeClr val="accent1"/>
+          </a:fillRef>
+          <a:effectRef idx="2">
+            <a:schemeClr val="accent1"/>
+          </a:effectRef>
+          <a:fontRef idx="minor">
+            <a:schemeClr val="lt1"/>
+          </a:fontRef>
+        </p:style>
+        <p:txBody>
+          <a:bodyPr rtlCol="0" anchor="ctr"/>
+          <a:lstStyle/>
+          <a:p>
+            <a:pPr algn="ctr"/>
+            <a:endParaRPr/>
+          </a:p>
+        </p:txBody>
+      </p:sp>
+      <p:sp>
+        <p:nvSpPr>
+          <p:cNvPr id="3" name="TextBox 2">
+            <a:extLst>
+              <a:ext uri="{FF2B5EF4-FFF2-40B4-BE49-F238E27FC236}">
+                <a16:creationId xmlns:a16="http://schemas.microsoft.com/office/drawing/2014/main" id="{02588DE6-B55D-C61B-F685-4F509F0716EE}"/>
+              </a:ext>
+            </a:extLst>
+          </p:cNvPr>
+          <p:cNvSpPr txBox="1"/>
+          <p:nvPr/>
+        </p:nvSpPr>
+        <p:spPr>
+          <a:xfrm>
+            <a:off x="822960" y="1965960"/>
+            <a:ext cx="10515600" cy="1354217"/>
+          </a:xfrm>
+          <a:prstGeom prst="rect">
+            <a:avLst/>
+          </a:prstGeom>
+          <a:noFill/>
+        </p:spPr>
+        <p:txBody>
+          <a:bodyPr wrap="square" lIns="0" tIns="0" rIns="0" bIns="0" anchor="t">
+            <a:spAutoFit/>
+          </a:bodyPr>
+          <a:lstStyle/>
+          <a:p>
+            <a:pPr algn="l"/>
+            <a:r>
+              <a:rPr lang="en-US" sz="4400" dirty="0">
+                <a:solidFill>
+                  <a:srgbClr val="FFFFFF"/>
+                </a:solidFill>
+                <a:latin typeface="Georgia"/>
+              </a:rPr>
+              <a:t>THANK YOU</a:t>
+            </a:r>
+          </a:p>
+          <a:p>
+            <a:pPr algn="l"/>
+            <a:r>
+              <a:rPr lang="en-US" sz="4400" b="0" i="0" dirty="0">
+                <a:solidFill>
+                  <a:srgbClr val="FFFFFF"/>
+                </a:solidFill>
+                <a:latin typeface="Georgia"/>
+              </a:rPr>
+              <a:t>MERCI</a:t>
+            </a:r>
+            <a:endParaRPr sz="4400" b="0" i="0" dirty="0">
+              <a:solidFill>
+                <a:srgbClr val="FFFFFF"/>
+              </a:solidFill>
+              <a:latin typeface="Georgia"/>
+            </a:endParaRPr>
+          </a:p>
+        </p:txBody>
+      </p:sp>
+      <p:sp>
+        <p:nvSpPr>
+          <p:cNvPr id="6" name="TextBox 5">
+            <a:extLst>
+              <a:ext uri="{FF2B5EF4-FFF2-40B4-BE49-F238E27FC236}">
+                <a16:creationId xmlns:a16="http://schemas.microsoft.com/office/drawing/2014/main" id="{AF312117-B385-77DE-78A5-DC270890AC11}"/>
+              </a:ext>
+            </a:extLst>
+          </p:cNvPr>
+          <p:cNvSpPr txBox="1"/>
+          <p:nvPr/>
+        </p:nvSpPr>
+        <p:spPr>
+          <a:xfrm>
+            <a:off x="822960" y="6080760"/>
+            <a:ext cx="10515600" cy="153888"/>
+          </a:xfrm>
+          <a:prstGeom prst="rect">
+            <a:avLst/>
+          </a:prstGeom>
+          <a:noFill/>
+        </p:spPr>
+        <p:txBody>
+          <a:bodyPr wrap="square" lIns="0" tIns="0" rIns="0" bIns="0" anchor="t">
+            <a:spAutoFit/>
+          </a:bodyPr>
+          <a:lstStyle/>
+          <a:p>
+            <a:pPr algn="l"/>
+            <a:r>
+              <a:rPr sz="1000" b="0" i="0" dirty="0">
+                <a:solidFill>
+                  <a:srgbClr val="757575"/>
+                </a:solidFill>
+                <a:latin typeface="Arial"/>
+              </a:rPr>
+              <a:t>Marketing Insights &amp; Analytics</a:t>
+            </a:r>
+          </a:p>
+        </p:txBody>
+      </p:sp>
+      <p:pic>
+        <p:nvPicPr>
+          <p:cNvPr id="7" name="Picture 6" descr="salomon_wordmark_white.png">
+            <a:extLst>
+              <a:ext uri="{FF2B5EF4-FFF2-40B4-BE49-F238E27FC236}">
+                <a16:creationId xmlns:a16="http://schemas.microsoft.com/office/drawing/2014/main" id="{4137F25F-3223-1AA1-5222-9B0CA75E764B}"/>
+              </a:ext>
+            </a:extLst>
+          </p:cNvPr>
+          <p:cNvPicPr>
+            <a:picLocks noChangeAspect="1"/>
+          </p:cNvPicPr>
+          <p:nvPr/>
+        </p:nvPicPr>
+        <p:blipFill>
+          <a:blip r:embed="rId2"/>
+          <a:stretch>
+            <a:fillRect/>
+          </a:stretch>
+        </p:blipFill>
+        <p:spPr>
+          <a:xfrm>
+            <a:off x="822960" y="900000"/>
+            <a:ext cx="2560320" cy="293370"/>
+          </a:xfrm>
+          <a:prstGeom prst="rect">
+            <a:avLst/>
+          </a:prstGeom>
+        </p:spPr>
+      </p:pic>
+      <p:pic>
+        <p:nvPicPr>
+          <p:cNvPr id="5" name="Picture 4" descr="The image shows a steep, rocky mountain side under a cloudy sky.&#10;&#10;AI-generated content may be incorrect.">
+            <a:extLst>
+              <a:ext uri="{FF2B5EF4-FFF2-40B4-BE49-F238E27FC236}">
+                <a16:creationId xmlns:a16="http://schemas.microsoft.com/office/drawing/2014/main" id="{5D256C6D-8464-4352-96C6-EE210AA6C53C}"/>
+              </a:ext>
+            </a:extLst>
+          </p:cNvPr>
+          <p:cNvPicPr>
+            <a:picLocks noChangeAspect="1"/>
+          </p:cNvPicPr>
+          <p:nvPr/>
+        </p:nvPicPr>
+        <p:blipFill>
+          <a:blip r:embed="rId3">
+            <a:alphaModFix amt="50000"/>
+            <a:extLst>
+              <a:ext uri="{BEBA8EAE-BF5A-486C-A8C5-ECC9F3942E4B}">
+                <a14:imgProps xmlns:a14="http://schemas.microsoft.com/office/drawing/2010/main">
+                  <a14:imgLayer r:embed="rId4">
+                    <a14:imgEffect>
+                      <a14:saturation sat="0"/>
+                    </a14:imgEffect>
+                  </a14:imgLayer>
+                </a14:imgProps>
+              </a:ext>
+            </a:extLst>
+          </a:blip>
+          <a:stretch>
+            <a:fillRect/>
+          </a:stretch>
+        </p:blipFill>
+        <p:spPr>
+          <a:xfrm>
+            <a:off x="-64851" y="0"/>
+            <a:ext cx="13452826" cy="7953983"/>
+          </a:xfrm>
+          <a:prstGeom prst="rect">
+            <a:avLst/>
+          </a:prstGeom>
+        </p:spPr>
+      </p:pic>
+    </p:spTree>
+    <p:extLst>
+      <p:ext uri="{BB962C8B-B14F-4D97-AF65-F5344CB8AC3E}">
+        <p14:creationId xmlns:p14="http://schemas.microsoft.com/office/powerpoint/2010/main" val="1247451091"/>
+      </p:ext>
+    </p:extLst>
+  </p:cSld>
+  <p:clrMapOvr>
+    <a:masterClrMapping/>
+  </p:clrMapOvr>
+</p:sld>
+</file>
+
+<file path=ppt/slides/slide15.xml><?xml version="1.0" encoding="utf-8"?>
+<p:sld xmlns:a="http://schemas.openxmlformats.org/drawingml/2006/main" xmlns:r="http://schemas.openxmlformats.org/officeDocument/2006/relationships" xmlns:p="http://schemas.openxmlformats.org/presentationml/2006/main">
+  <p:cSld>
+    <p:spTree>
+      <p:nvGrpSpPr>
+        <p:cNvPr id="1" name="">
+          <a:extLst>
+            <a:ext uri="{FF2B5EF4-FFF2-40B4-BE49-F238E27FC236}">
+              <a16:creationId xmlns:a16="http://schemas.microsoft.com/office/drawing/2014/main" id="{EE4CA7C4-DD03-977A-26ED-597F07993278}"/>
+            </a:ext>
+          </a:extLst>
+        </p:cNvPr>
+        <p:cNvGrpSpPr/>
+        <p:nvPr/>
+      </p:nvGrpSpPr>
+      <p:grpSpPr>
+        <a:xfrm>
+          <a:off x="0" y="0"/>
+          <a:ext cx="0" cy="0"/>
+          <a:chOff x="0" y="0"/>
+          <a:chExt cx="0" cy="0"/>
+        </a:xfrm>
+      </p:grpSpPr>
+      <p:sp>
+        <p:nvSpPr>
+          <p:cNvPr id="2" name="Rectangle 1">
+            <a:extLst>
+              <a:ext uri="{FF2B5EF4-FFF2-40B4-BE49-F238E27FC236}">
+                <a16:creationId xmlns:a16="http://schemas.microsoft.com/office/drawing/2014/main" id="{6C9E9FC8-0A6C-639A-55CC-FF675D22BB17}"/>
+              </a:ext>
+            </a:extLst>
+          </p:cNvPr>
+          <p:cNvSpPr/>
+          <p:nvPr/>
+        </p:nvSpPr>
+        <p:spPr>
+          <a:xfrm>
+            <a:off x="0" y="0"/>
+            <a:ext cx="12191695" cy="6858000"/>
+          </a:xfrm>
+          <a:prstGeom prst="rect">
+            <a:avLst/>
+          </a:prstGeom>
+          <a:solidFill>
+            <a:srgbClr val="000000"/>
+          </a:solidFill>
+          <a:ln>
+            <a:noFill/>
+          </a:ln>
+          <a:effectLst/>
+        </p:spPr>
+        <p:style>
+          <a:lnRef idx="1">
+            <a:schemeClr val="accent1"/>
+          </a:lnRef>
+          <a:fillRef idx="3">
+            <a:schemeClr val="accent1"/>
+          </a:fillRef>
+          <a:effectRef idx="2">
+            <a:schemeClr val="accent1"/>
+          </a:effectRef>
+          <a:fontRef idx="minor">
+            <a:schemeClr val="lt1"/>
+          </a:fontRef>
+        </p:style>
+        <p:txBody>
+          <a:bodyPr rtlCol="0" anchor="ctr"/>
+          <a:lstStyle/>
+          <a:p>
+            <a:pPr algn="ctr"/>
+            <a:endParaRPr/>
+          </a:p>
+        </p:txBody>
+      </p:sp>
+      <p:sp>
+        <p:nvSpPr>
+          <p:cNvPr id="3" name="TextBox 2">
+            <a:extLst>
+              <a:ext uri="{FF2B5EF4-FFF2-40B4-BE49-F238E27FC236}">
+                <a16:creationId xmlns:a16="http://schemas.microsoft.com/office/drawing/2014/main" id="{5DA55F5F-4D4F-01B7-4269-502598763585}"/>
+              </a:ext>
+            </a:extLst>
+          </p:cNvPr>
+          <p:cNvSpPr txBox="1"/>
+          <p:nvPr/>
+        </p:nvSpPr>
+        <p:spPr>
+          <a:xfrm>
+            <a:off x="822960" y="1965960"/>
+            <a:ext cx="10515600" cy="677108"/>
+          </a:xfrm>
+          <a:prstGeom prst="rect">
+            <a:avLst/>
+          </a:prstGeom>
+          <a:noFill/>
+        </p:spPr>
+        <p:txBody>
+          <a:bodyPr wrap="square" lIns="0" tIns="0" rIns="0" bIns="0" anchor="t">
+            <a:spAutoFit/>
+          </a:bodyPr>
+          <a:lstStyle/>
+          <a:p>
+            <a:pPr algn="l"/>
+            <a:r>
+              <a:rPr lang="en-US" sz="4400" dirty="0">
+                <a:solidFill>
+                  <a:srgbClr val="FFFFFF"/>
+                </a:solidFill>
+                <a:latin typeface="Georgia"/>
+              </a:rPr>
+              <a:t>APPENDIX</a:t>
+            </a:r>
+            <a:endParaRPr sz="4400" b="0" i="0" dirty="0">
+              <a:solidFill>
+                <a:srgbClr val="FFFFFF"/>
+              </a:solidFill>
+              <a:latin typeface="Georgia"/>
+            </a:endParaRPr>
+          </a:p>
+        </p:txBody>
+      </p:sp>
+      <p:sp>
+        <p:nvSpPr>
+          <p:cNvPr id="6" name="TextBox 5">
+            <a:extLst>
+              <a:ext uri="{FF2B5EF4-FFF2-40B4-BE49-F238E27FC236}">
+                <a16:creationId xmlns:a16="http://schemas.microsoft.com/office/drawing/2014/main" id="{165042CB-5990-BF91-038A-7DA5859E0C0B}"/>
+              </a:ext>
+            </a:extLst>
+          </p:cNvPr>
+          <p:cNvSpPr txBox="1"/>
+          <p:nvPr/>
+        </p:nvSpPr>
+        <p:spPr>
+          <a:xfrm>
+            <a:off x="822960" y="6080760"/>
+            <a:ext cx="10515600" cy="153888"/>
+          </a:xfrm>
+          <a:prstGeom prst="rect">
+            <a:avLst/>
+          </a:prstGeom>
+          <a:noFill/>
+        </p:spPr>
+        <p:txBody>
+          <a:bodyPr wrap="square" lIns="0" tIns="0" rIns="0" bIns="0" anchor="t">
+            <a:spAutoFit/>
+          </a:bodyPr>
+          <a:lstStyle/>
+          <a:p>
+            <a:pPr algn="l"/>
+            <a:r>
+              <a:rPr sz="1000" b="0" i="0" dirty="0">
+                <a:solidFill>
+                  <a:srgbClr val="757575"/>
+                </a:solidFill>
+                <a:latin typeface="Arial"/>
+              </a:rPr>
+              <a:t>Marketing Insights &amp; Analytics</a:t>
+            </a:r>
+          </a:p>
+        </p:txBody>
+      </p:sp>
+      <p:pic>
+        <p:nvPicPr>
+          <p:cNvPr id="7" name="Picture 6" descr="salomon_wordmark_white.png">
+            <a:extLst>
+              <a:ext uri="{FF2B5EF4-FFF2-40B4-BE49-F238E27FC236}">
+                <a16:creationId xmlns:a16="http://schemas.microsoft.com/office/drawing/2014/main" id="{7E51FCA6-267E-8599-5BE8-75256019380E}"/>
+              </a:ext>
+            </a:extLst>
+          </p:cNvPr>
+          <p:cNvPicPr>
+            <a:picLocks noChangeAspect="1"/>
+          </p:cNvPicPr>
+          <p:nvPr/>
+        </p:nvPicPr>
+        <p:blipFill>
+          <a:blip r:embed="rId2"/>
+          <a:stretch>
+            <a:fillRect/>
+          </a:stretch>
+        </p:blipFill>
+        <p:spPr>
+          <a:xfrm>
+            <a:off x="822960" y="900000"/>
+            <a:ext cx="2560320" cy="293370"/>
+          </a:xfrm>
+          <a:prstGeom prst="rect">
+            <a:avLst/>
+          </a:prstGeom>
+        </p:spPr>
+      </p:pic>
+    </p:spTree>
+    <p:extLst>
+      <p:ext uri="{BB962C8B-B14F-4D97-AF65-F5344CB8AC3E}">
+        <p14:creationId xmlns:p14="http://schemas.microsoft.com/office/powerpoint/2010/main" val="3769470056"/>
+      </p:ext>
+    </p:extLst>
+  </p:cSld>
+  <p:clrMapOvr>
+    <a:masterClrMapping/>
+  </p:clrMapOvr>
+</p:sld>
+</file>
+
+<file path=ppt/slides/slide16.xml><?xml version="1.0" encoding="utf-8"?>
 <p:sld xmlns:a="http://schemas.openxmlformats.org/drawingml/2006/main" xmlns:r="http://schemas.openxmlformats.org/officeDocument/2006/relationships" xmlns:p="http://schemas.openxmlformats.org/presentationml/2006/main">
   <p:cSld>
     <p:spTree>
@@ -5074,7 +7822,7 @@
                     <a:lstStyle/>
                     <a:p>
                       <a:r>
-                        <a:rPr sz="1000" b="1">
+                        <a:rPr sz="1000" b="1" dirty="0">
                           <a:solidFill>
                             <a:srgbClr val="333333"/>
                           </a:solidFill>
@@ -5308,7 +8056,7 @@
                     <a:lstStyle/>
                     <a:p>
                       <a:r>
-                        <a:rPr sz="1000" b="1">
+                        <a:rPr sz="1000" b="1" dirty="0">
                           <a:solidFill>
                             <a:srgbClr val="333333"/>
                           </a:solidFill>
@@ -6098,7 +8846,7 @@
                     <a:lstStyle/>
                     <a:p>
                       <a:r>
-                        <a:rPr sz="950">
+                        <a:rPr sz="950" dirty="0">
                           <a:solidFill>
                             <a:srgbClr val="757575"/>
                           </a:solidFill>
@@ -6197,2256 +8945,6 @@
       <p:pic>
         <p:nvPicPr>
           <p:cNvPr id="7" name="Picture 6" descr="salomon_wordmark_black.png"/>
-          <p:cNvPicPr>
-            <a:picLocks noChangeAspect="1"/>
-          </p:cNvPicPr>
-          <p:nvPr/>
-        </p:nvPicPr>
-        <p:blipFill>
-          <a:blip r:embed="rId2"/>
-          <a:stretch>
-            <a:fillRect/>
-          </a:stretch>
-        </p:blipFill>
-        <p:spPr>
-          <a:xfrm>
-            <a:off x="10698480" y="292608"/>
-            <a:ext cx="960120" cy="110013"/>
-          </a:xfrm>
-          <a:prstGeom prst="rect">
-            <a:avLst/>
-          </a:prstGeom>
-        </p:spPr>
-      </p:pic>
-    </p:spTree>
-  </p:cSld>
-  <p:clrMapOvr>
-    <a:masterClrMapping/>
-  </p:clrMapOvr>
-</p:sld>
-</file>
-
-<file path=ppt/slides/slide12.xml><?xml version="1.0" encoding="utf-8"?>
-<p:sld xmlns:a="http://schemas.openxmlformats.org/drawingml/2006/main" xmlns:r="http://schemas.openxmlformats.org/officeDocument/2006/relationships" xmlns:p="http://schemas.openxmlformats.org/presentationml/2006/main">
-  <p:cSld>
-    <p:spTree>
-      <p:nvGrpSpPr>
-        <p:cNvPr id="1" name=""/>
-        <p:cNvGrpSpPr/>
-        <p:nvPr/>
-      </p:nvGrpSpPr>
-      <p:grpSpPr>
-        <a:xfrm>
-          <a:off x="0" y="0"/>
-          <a:ext cx="0" cy="0"/>
-          <a:chOff x="0" y="0"/>
-          <a:chExt cx="0" cy="0"/>
-        </a:xfrm>
-      </p:grpSpPr>
-      <p:sp>
-        <p:nvSpPr>
-          <p:cNvPr id="2" name="TextBox 1"/>
-          <p:cNvSpPr txBox="1"/>
-          <p:nvPr/>
-        </p:nvSpPr>
-        <p:spPr>
-          <a:xfrm>
-            <a:off x="502920" y="292608"/>
-            <a:ext cx="11155680" cy="274320"/>
-          </a:xfrm>
-          <a:prstGeom prst="rect">
-            <a:avLst/>
-          </a:prstGeom>
-          <a:noFill/>
-        </p:spPr>
-        <p:txBody>
-          <a:bodyPr wrap="square" lIns="0" tIns="0" rIns="0" bIns="0" anchor="t">
-            <a:spAutoFit/>
-          </a:bodyPr>
-          <a:lstStyle/>
-          <a:p>
-            <a:pPr algn="l"/>
-            <a:r>
-              <a:rPr sz="1050" b="1" i="0">
-                <a:solidFill>
-                  <a:srgbClr val="757575"/>
-                </a:solidFill>
-                <a:latin typeface="Arial"/>
-              </a:rPr>
-              <a:t>INVENTORY</a:t>
-            </a:r>
-          </a:p>
-        </p:txBody>
-      </p:sp>
-      <p:sp>
-        <p:nvSpPr>
-          <p:cNvPr id="3" name="TextBox 2"/>
-          <p:cNvSpPr txBox="1"/>
-          <p:nvPr/>
-        </p:nvSpPr>
-        <p:spPr>
-          <a:xfrm>
-            <a:off x="502920" y="566928"/>
-            <a:ext cx="11201400" cy="777240"/>
-          </a:xfrm>
-          <a:prstGeom prst="rect">
-            <a:avLst/>
-          </a:prstGeom>
-          <a:noFill/>
-        </p:spPr>
-        <p:txBody>
-          <a:bodyPr wrap="square" lIns="0" tIns="0" rIns="0" bIns="0" anchor="t">
-            <a:spAutoFit/>
-          </a:bodyPr>
-          <a:lstStyle/>
-          <a:p>
-            <a:pPr algn="l"/>
-            <a:r>
-              <a:rPr sz="2300" b="0" i="0">
-                <a:solidFill>
-                  <a:srgbClr val="000000"/>
-                </a:solidFill>
-                <a:latin typeface="Georgia"/>
-              </a:rPr>
-              <a:t>Core sizes were 44% unavailable by week 6, costing an estimated $20K in demand</a:t>
-            </a:r>
-          </a:p>
-        </p:txBody>
-      </p:sp>
-      <p:sp>
-        <p:nvSpPr>
-          <p:cNvPr id="4" name="TextBox 3"/>
-          <p:cNvSpPr txBox="1"/>
-          <p:nvPr/>
-        </p:nvSpPr>
-        <p:spPr>
-          <a:xfrm>
-            <a:off x="502920" y="1481328"/>
-            <a:ext cx="6035040" cy="274320"/>
-          </a:xfrm>
-          <a:prstGeom prst="rect">
-            <a:avLst/>
-          </a:prstGeom>
-          <a:noFill/>
-        </p:spPr>
-        <p:txBody>
-          <a:bodyPr wrap="square" lIns="0" tIns="0" rIns="0" bIns="0" anchor="t">
-            <a:spAutoFit/>
-          </a:bodyPr>
-          <a:lstStyle/>
-          <a:p>
-            <a:pPr algn="l"/>
-            <a:r>
-              <a:rPr sz="1000" b="1" i="0">
-                <a:solidFill>
-                  <a:srgbClr val="757575"/>
-                </a:solidFill>
-                <a:latin typeface="Arial"/>
-              </a:rPr>
-              <a:t>VESTAL PRO AVAILABILITY BY CAMPAIGN WEEK</a:t>
-            </a:r>
-          </a:p>
-        </p:txBody>
-      </p:sp>
-      <p:graphicFrame>
-        <p:nvGraphicFramePr>
-          <p:cNvPr id="5" name="Chart 4"/>
-          <p:cNvGraphicFramePr>
-            <a:graphicFrameLocks noGrp="1"/>
-          </p:cNvGraphicFramePr>
-          <p:nvPr/>
-        </p:nvGraphicFramePr>
-        <p:xfrm>
-          <a:off x="365760" y="1828800"/>
-          <a:ext cx="6309360" cy="3977639"/>
-        </p:xfrm>
-        <a:graphic>
-          <a:graphicData uri="http://schemas.openxmlformats.org/drawingml/2006/chart">
-            <c:chart xmlns:c="http://schemas.openxmlformats.org/drawingml/2006/chart" xmlns:r="http://schemas.openxmlformats.org/officeDocument/2006/relationships" r:id="rId2"/>
-          </a:graphicData>
-        </a:graphic>
-      </p:graphicFrame>
-      <p:sp>
-        <p:nvSpPr>
-          <p:cNvPr id="6" name="TextBox 5"/>
-          <p:cNvSpPr txBox="1"/>
-          <p:nvPr/>
-        </p:nvSpPr>
-        <p:spPr>
-          <a:xfrm>
-            <a:off x="7086600" y="1600200"/>
-            <a:ext cx="4572000" cy="4480560"/>
-          </a:xfrm>
-          <a:prstGeom prst="rect">
-            <a:avLst/>
-          </a:prstGeom>
-          <a:noFill/>
-        </p:spPr>
-        <p:txBody>
-          <a:bodyPr wrap="square" lIns="0" tIns="0" rIns="0" bIns="0" anchor="t">
-            <a:spAutoFit/>
-          </a:bodyPr>
-          <a:lstStyle/>
-          <a:p>
-            <a:pPr algn="l">
-              <a:lnSpc>
-                <a:spcPct val="112000"/>
-              </a:lnSpc>
-              <a:spcAft>
-                <a:spcPts val="1000"/>
-              </a:spcAft>
-            </a:pPr>
-            <a:r>
-              <a:rPr sz="1150" b="1" i="0">
-                <a:solidFill>
-                  <a:srgbClr val="333333"/>
-                </a:solidFill>
-                <a:latin typeface="Arial"/>
-              </a:rPr>
-              <a:t>•  Depletion, not demand, ended the flight: </a:t>
-            </a:r>
-            <a:r>
-              <a:rPr sz="1150" b="0" i="0">
-                <a:solidFill>
-                  <a:srgbClr val="333333"/>
-                </a:solidFill>
-                <a:latin typeface="Arial"/>
-              </a:rPr>
-              <a:t>core sizes (M9–11, W7–9) fell below 90% in week 3 and hit 56% by week 6.</a:t>
-            </a:r>
-          </a:p>
-          <a:p>
-            <a:pPr algn="l">
-              <a:lnSpc>
-                <a:spcPct val="112000"/>
-              </a:lnSpc>
-              <a:spcAft>
-                <a:spcPts val="1000"/>
-              </a:spcAft>
-            </a:pPr>
-            <a:r>
-              <a:rPr sz="1150" b="0" i="0">
-                <a:solidFill>
-                  <a:srgbClr val="333333"/>
-                </a:solidFill>
-                <a:latin typeface="Arial"/>
-              </a:rPr>
-              <a:t>•  Vestal Pro sell-through conversion fell 35% (5.2% weeks 1–3 → 3.4% week 6) while paid media kept sending traffic.</a:t>
-            </a:r>
-          </a:p>
-          <a:p>
-            <a:pPr algn="l">
-              <a:lnSpc>
-                <a:spcPct val="112000"/>
-              </a:lnSpc>
-              <a:spcAft>
-                <a:spcPts val="1000"/>
-              </a:spcAft>
-            </a:pPr>
-            <a:r>
-              <a:rPr sz="1150" b="0" i="0">
-                <a:solidFill>
-                  <a:srgbClr val="333333"/>
-                </a:solidFill>
-                <a:latin typeface="Arial"/>
-              </a:rPr>
-              <a:t>•  Modeled unmet demand: ≈140 units, ≈$20.4K, from applying early-flight conversion to weeks 4–6 traffic.</a:t>
-            </a:r>
-          </a:p>
-          <a:p>
-            <a:pPr algn="l">
-              <a:lnSpc>
-                <a:spcPct val="112000"/>
-              </a:lnSpc>
-              <a:spcAft>
-                <a:spcPts val="1000"/>
-              </a:spcAft>
-            </a:pPr>
-            <a:r>
-              <a:rPr sz="1150" b="0" i="0">
-                <a:solidFill>
-                  <a:srgbClr val="333333"/>
-                </a:solidFill>
-                <a:latin typeface="Arial"/>
-              </a:rPr>
-              <a:t>•  Site conversion followed: 2.52% week 1 → 2.23% week 6, below the 2.33% pre-period average.</a:t>
-            </a:r>
-          </a:p>
-          <a:p>
-            <a:pPr algn="l">
-              <a:lnSpc>
-                <a:spcPct val="112000"/>
-              </a:lnSpc>
-              <a:spcAft>
-                <a:spcPts val="1000"/>
-              </a:spcAft>
-            </a:pPr>
-            <a:r>
-              <a:rPr sz="1150" b="0" i="0">
-                <a:solidFill>
-                  <a:srgbClr val="333333"/>
-                </a:solidFill>
-                <a:latin typeface="Arial"/>
-              </a:rPr>
-              <a:t>•  Speedcross picked up +14% units as shoppers substituted — a partial, lower-price offset.</a:t>
-            </a:r>
-          </a:p>
-        </p:txBody>
-      </p:sp>
-      <p:sp>
-        <p:nvSpPr>
-          <p:cNvPr id="7" name="TextBox 6"/>
-          <p:cNvSpPr txBox="1"/>
-          <p:nvPr/>
-        </p:nvSpPr>
-        <p:spPr>
-          <a:xfrm>
-            <a:off x="502920" y="6510528"/>
-            <a:ext cx="10515600" cy="274320"/>
-          </a:xfrm>
-          <a:prstGeom prst="rect">
-            <a:avLst/>
-          </a:prstGeom>
-          <a:noFill/>
-        </p:spPr>
-        <p:txBody>
-          <a:bodyPr wrap="square" lIns="0" tIns="0" rIns="0" bIns="0" anchor="t">
-            <a:spAutoFit/>
-          </a:bodyPr>
-          <a:lstStyle/>
-          <a:p>
-            <a:pPr algn="l"/>
-            <a:r>
-              <a:rPr sz="800" b="0" i="0">
-                <a:solidFill>
-                  <a:srgbClr val="757575"/>
-                </a:solidFill>
-                <a:latin typeface="Arial"/>
-              </a:rPr>
-              <a:t>Salomon NA eCommerce · Vestal Pro launch readout · Illustrative synthetic case data</a:t>
-            </a:r>
-          </a:p>
-        </p:txBody>
-      </p:sp>
-      <p:sp>
-        <p:nvSpPr>
-          <p:cNvPr id="8" name="TextBox 7"/>
-          <p:cNvSpPr txBox="1"/>
-          <p:nvPr/>
-        </p:nvSpPr>
-        <p:spPr>
-          <a:xfrm>
-            <a:off x="11292840" y="6510528"/>
-            <a:ext cx="411480" cy="274320"/>
-          </a:xfrm>
-          <a:prstGeom prst="rect">
-            <a:avLst/>
-          </a:prstGeom>
-          <a:noFill/>
-        </p:spPr>
-        <p:txBody>
-          <a:bodyPr wrap="square" lIns="0" tIns="0" rIns="0" bIns="0" anchor="t">
-            <a:spAutoFit/>
-          </a:bodyPr>
-          <a:lstStyle/>
-          <a:p>
-            <a:pPr algn="r"/>
-            <a:r>
-              <a:rPr sz="800" b="0" i="0">
-                <a:solidFill>
-                  <a:srgbClr val="757575"/>
-                </a:solidFill>
-                <a:latin typeface="Arial"/>
-              </a:rPr>
-              <a:t>12</a:t>
-            </a:r>
-          </a:p>
-        </p:txBody>
-      </p:sp>
-      <p:pic>
-        <p:nvPicPr>
-          <p:cNvPr id="9" name="Picture 8" descr="salomon_wordmark_black.png"/>
-          <p:cNvPicPr>
-            <a:picLocks noChangeAspect="1"/>
-          </p:cNvPicPr>
-          <p:nvPr/>
-        </p:nvPicPr>
-        <p:blipFill>
-          <a:blip r:embed="rId3"/>
-          <a:stretch>
-            <a:fillRect/>
-          </a:stretch>
-        </p:blipFill>
-        <p:spPr>
-          <a:xfrm>
-            <a:off x="10698480" y="292608"/>
-            <a:ext cx="960120" cy="110013"/>
-          </a:xfrm>
-          <a:prstGeom prst="rect">
-            <a:avLst/>
-          </a:prstGeom>
-        </p:spPr>
-      </p:pic>
-    </p:spTree>
-  </p:cSld>
-  <p:clrMapOvr>
-    <a:masterClrMapping/>
-  </p:clrMapOvr>
-</p:sld>
-</file>
-
-<file path=ppt/slides/slide13.xml><?xml version="1.0" encoding="utf-8"?>
-<p:sld xmlns:a="http://schemas.openxmlformats.org/drawingml/2006/main" xmlns:r="http://schemas.openxmlformats.org/officeDocument/2006/relationships" xmlns:p="http://schemas.openxmlformats.org/presentationml/2006/main">
-  <p:cSld>
-    <p:spTree>
-      <p:nvGrpSpPr>
-        <p:cNvPr id="1" name=""/>
-        <p:cNvGrpSpPr/>
-        <p:nvPr/>
-      </p:nvGrpSpPr>
-      <p:grpSpPr>
-        <a:xfrm>
-          <a:off x="0" y="0"/>
-          <a:ext cx="0" cy="0"/>
-          <a:chOff x="0" y="0"/>
-          <a:chExt cx="0" cy="0"/>
-        </a:xfrm>
-      </p:grpSpPr>
-      <p:sp>
-        <p:nvSpPr>
-          <p:cNvPr id="2" name="Rectangle 1"/>
-          <p:cNvSpPr/>
-          <p:nvPr/>
-        </p:nvSpPr>
-        <p:spPr>
-          <a:xfrm>
-            <a:off x="0" y="0"/>
-            <a:ext cx="12191695" cy="6858000"/>
-          </a:xfrm>
-          <a:prstGeom prst="rect">
-            <a:avLst/>
-          </a:prstGeom>
-          <a:solidFill>
-            <a:srgbClr val="000000"/>
-          </a:solidFill>
-          <a:ln>
-            <a:noFill/>
-          </a:ln>
-          <a:effectLst/>
-        </p:spPr>
-        <p:style>
-          <a:lnRef idx="1">
-            <a:schemeClr val="accent1"/>
-          </a:lnRef>
-          <a:fillRef idx="3">
-            <a:schemeClr val="accent1"/>
-          </a:fillRef>
-          <a:effectRef idx="2">
-            <a:schemeClr val="accent1"/>
-          </a:effectRef>
-          <a:fontRef idx="minor">
-            <a:schemeClr val="lt1"/>
-          </a:fontRef>
-        </p:style>
-        <p:txBody>
-          <a:bodyPr rtlCol="0" anchor="ctr"/>
-          <a:lstStyle/>
-          <a:p>
-            <a:pPr algn="ctr"/>
-            <a:endParaRPr/>
-          </a:p>
-        </p:txBody>
-      </p:sp>
-      <p:sp>
-        <p:nvSpPr>
-          <p:cNvPr id="3" name="TextBox 2"/>
-          <p:cNvSpPr txBox="1"/>
-          <p:nvPr/>
-        </p:nvSpPr>
-        <p:spPr>
-          <a:xfrm>
-            <a:off x="822960" y="457200"/>
-            <a:ext cx="10515600" cy="320040"/>
-          </a:xfrm>
-          <a:prstGeom prst="rect">
-            <a:avLst/>
-          </a:prstGeom>
-          <a:noFill/>
-        </p:spPr>
-        <p:txBody>
-          <a:bodyPr wrap="square" lIns="0" tIns="0" rIns="0" bIns="0" anchor="t">
-            <a:spAutoFit/>
-          </a:bodyPr>
-          <a:lstStyle/>
-          <a:p>
-            <a:pPr algn="l"/>
-            <a:r>
-              <a:rPr sz="1100" b="1" i="0">
-                <a:solidFill>
-                  <a:srgbClr val="0057B8"/>
-                </a:solidFill>
-                <a:latin typeface="Arial"/>
-              </a:rPr>
-              <a:t>RECOMMENDATIONS</a:t>
-            </a:r>
-          </a:p>
-        </p:txBody>
-      </p:sp>
-      <p:sp>
-        <p:nvSpPr>
-          <p:cNvPr id="4" name="TextBox 3"/>
-          <p:cNvSpPr txBox="1"/>
-          <p:nvPr/>
-        </p:nvSpPr>
-        <p:spPr>
-          <a:xfrm>
-            <a:off x="822960" y="777240"/>
-            <a:ext cx="10515600" cy="640080"/>
-          </a:xfrm>
-          <a:prstGeom prst="rect">
-            <a:avLst/>
-          </a:prstGeom>
-          <a:noFill/>
-        </p:spPr>
-        <p:txBody>
-          <a:bodyPr wrap="square" lIns="0" tIns="0" rIns="0" bIns="0" anchor="t">
-            <a:spAutoFit/>
-          </a:bodyPr>
-          <a:lstStyle/>
-          <a:p>
-            <a:pPr algn="l"/>
-            <a:r>
-              <a:rPr sz="2800" b="0" i="0">
-                <a:solidFill>
-                  <a:srgbClr val="FFFFFF"/>
-                </a:solidFill>
-                <a:latin typeface="Georgia"/>
-              </a:rPr>
-              <a:t>Six changes for the next launch</a:t>
-            </a:r>
-          </a:p>
-        </p:txBody>
-      </p:sp>
-      <p:sp>
-        <p:nvSpPr>
-          <p:cNvPr id="5" name="TextBox 4"/>
-          <p:cNvSpPr txBox="1"/>
-          <p:nvPr/>
-        </p:nvSpPr>
-        <p:spPr>
-          <a:xfrm>
-            <a:off x="822960" y="1600200"/>
-            <a:ext cx="502920" cy="731520"/>
-          </a:xfrm>
-          <a:prstGeom prst="rect">
-            <a:avLst/>
-          </a:prstGeom>
-          <a:noFill/>
-        </p:spPr>
-        <p:txBody>
-          <a:bodyPr wrap="square" lIns="0" tIns="0" rIns="0" bIns="0" anchor="t">
-            <a:spAutoFit/>
-          </a:bodyPr>
-          <a:lstStyle/>
-          <a:p>
-            <a:pPr algn="l"/>
-            <a:r>
-              <a:rPr sz="2000" b="1" i="0">
-                <a:solidFill>
-                  <a:srgbClr val="0057B8"/>
-                </a:solidFill>
-                <a:latin typeface="Arial"/>
-              </a:rPr>
-              <a:t>1</a:t>
-            </a:r>
-          </a:p>
-        </p:txBody>
-      </p:sp>
-      <p:sp>
-        <p:nvSpPr>
-          <p:cNvPr id="6" name="TextBox 5"/>
-          <p:cNvSpPr txBox="1"/>
-          <p:nvPr/>
-        </p:nvSpPr>
-        <p:spPr>
-          <a:xfrm>
-            <a:off x="1417320" y="1618488"/>
-            <a:ext cx="9966960" cy="749808"/>
-          </a:xfrm>
-          <a:prstGeom prst="rect">
-            <a:avLst/>
-          </a:prstGeom>
-          <a:noFill/>
-        </p:spPr>
-        <p:txBody>
-          <a:bodyPr wrap="square" lIns="0" tIns="0" rIns="0" bIns="0" anchor="t">
-            <a:spAutoFit/>
-          </a:bodyPr>
-          <a:lstStyle/>
-          <a:p>
-            <a:pPr algn="l">
-              <a:lnSpc>
-                <a:spcPct val="108000"/>
-              </a:lnSpc>
-            </a:pPr>
-            <a:r>
-              <a:rPr sz="1250" b="1" i="0">
-                <a:solidFill>
-                  <a:srgbClr val="FFFFFF"/>
-                </a:solidFill>
-                <a:latin typeface="Arial"/>
-              </a:rPr>
-              <a:t>Buy deeper on core sizes.  </a:t>
-            </a:r>
-            <a:r>
-              <a:rPr sz="1150" b="0" i="0">
-                <a:solidFill>
-                  <a:srgbClr val="BFD5ED"/>
-                </a:solidFill>
-                <a:latin typeface="Arial"/>
-              </a:rPr>
-              <a:t>Week-3 depletion of M9–11 / W7–9 cost ≈140 units (≈$20K) and dragged site conversion below baseline by week 6. Size-curve depth should cover a full 6-week flight.</a:t>
-            </a:r>
-          </a:p>
-        </p:txBody>
-      </p:sp>
-      <p:sp>
-        <p:nvSpPr>
-          <p:cNvPr id="7" name="TextBox 6"/>
-          <p:cNvSpPr txBox="1"/>
-          <p:nvPr/>
-        </p:nvSpPr>
-        <p:spPr>
-          <a:xfrm>
-            <a:off x="822960" y="2386584"/>
-            <a:ext cx="502920" cy="731520"/>
-          </a:xfrm>
-          <a:prstGeom prst="rect">
-            <a:avLst/>
-          </a:prstGeom>
-          <a:noFill/>
-        </p:spPr>
-        <p:txBody>
-          <a:bodyPr wrap="square" lIns="0" tIns="0" rIns="0" bIns="0" anchor="t">
-            <a:spAutoFit/>
-          </a:bodyPr>
-          <a:lstStyle/>
-          <a:p>
-            <a:pPr algn="l"/>
-            <a:r>
-              <a:rPr sz="2000" b="1" i="0">
-                <a:solidFill>
-                  <a:srgbClr val="0057B8"/>
-                </a:solidFill>
-                <a:latin typeface="Arial"/>
-              </a:rPr>
-              <a:t>2</a:t>
-            </a:r>
-          </a:p>
-        </p:txBody>
-      </p:sp>
-      <p:sp>
-        <p:nvSpPr>
-          <p:cNvPr id="8" name="TextBox 7"/>
-          <p:cNvSpPr txBox="1"/>
-          <p:nvPr/>
-        </p:nvSpPr>
-        <p:spPr>
-          <a:xfrm>
-            <a:off x="1417320" y="2404872"/>
-            <a:ext cx="9966960" cy="749808"/>
-          </a:xfrm>
-          <a:prstGeom prst="rect">
-            <a:avLst/>
-          </a:prstGeom>
-          <a:noFill/>
-        </p:spPr>
-        <p:txBody>
-          <a:bodyPr wrap="square" lIns="0" tIns="0" rIns="0" bIns="0" anchor="t">
-            <a:spAutoFit/>
-          </a:bodyPr>
-          <a:lstStyle/>
-          <a:p>
-            <a:pPr algn="l">
-              <a:lnSpc>
-                <a:spcPct val="108000"/>
-              </a:lnSpc>
-            </a:pPr>
-            <a:r>
-              <a:rPr sz="1250" b="1" i="0">
-                <a:solidFill>
-                  <a:srgbClr val="FFFFFF"/>
-                </a:solidFill>
-                <a:latin typeface="Arial"/>
-              </a:rPr>
-              <a:t>Tie paid media to inventory signals.  </a:t>
-            </a:r>
-            <a:r>
-              <a:rPr sz="1150" b="0" i="0">
-                <a:solidFill>
-                  <a:srgbClr val="BFD5ED"/>
-                </a:solidFill>
-                <a:latin typeface="Arial"/>
-              </a:rPr>
-              <a:t>Throttle prospecting when core-size availability drops below 80%. Paid social ran 59% of budget at 0.3× iROAS into a constrained assortment; reallocate mid-flight to CRM and search.</a:t>
-            </a:r>
-          </a:p>
-        </p:txBody>
-      </p:sp>
-      <p:sp>
-        <p:nvSpPr>
-          <p:cNvPr id="9" name="TextBox 8"/>
-          <p:cNvSpPr txBox="1"/>
-          <p:nvPr/>
-        </p:nvSpPr>
-        <p:spPr>
-          <a:xfrm>
-            <a:off x="822960" y="3172968"/>
-            <a:ext cx="502920" cy="731520"/>
-          </a:xfrm>
-          <a:prstGeom prst="rect">
-            <a:avLst/>
-          </a:prstGeom>
-          <a:noFill/>
-        </p:spPr>
-        <p:txBody>
-          <a:bodyPr wrap="square" lIns="0" tIns="0" rIns="0" bIns="0" anchor="t">
-            <a:spAutoFit/>
-          </a:bodyPr>
-          <a:lstStyle/>
-          <a:p>
-            <a:pPr algn="l"/>
-            <a:r>
-              <a:rPr sz="2000" b="1" i="0">
-                <a:solidFill>
-                  <a:srgbClr val="0057B8"/>
-                </a:solidFill>
-                <a:latin typeface="Arial"/>
-              </a:rPr>
-              <a:t>3</a:t>
-            </a:r>
-          </a:p>
-        </p:txBody>
-      </p:sp>
-      <p:sp>
-        <p:nvSpPr>
-          <p:cNvPr id="10" name="TextBox 9"/>
-          <p:cNvSpPr txBox="1"/>
-          <p:nvPr/>
-        </p:nvSpPr>
-        <p:spPr>
-          <a:xfrm>
-            <a:off x="1417320" y="3191256"/>
-            <a:ext cx="9966960" cy="749808"/>
-          </a:xfrm>
-          <a:prstGeom prst="rect">
-            <a:avLst/>
-          </a:prstGeom>
-          <a:noFill/>
-        </p:spPr>
-        <p:txBody>
-          <a:bodyPr wrap="square" lIns="0" tIns="0" rIns="0" bIns="0" anchor="t">
-            <a:spAutoFit/>
-          </a:bodyPr>
-          <a:lstStyle/>
-          <a:p>
-            <a:pPr algn="l">
-              <a:lnSpc>
-                <a:spcPct val="108000"/>
-              </a:lnSpc>
-            </a:pPr>
-            <a:r>
-              <a:rPr sz="1250" b="1" i="0">
-                <a:solidFill>
-                  <a:srgbClr val="FFFFFF"/>
-                </a:solidFill>
-                <a:latin typeface="Arial"/>
-              </a:rPr>
-              <a:t>Judge paid social on acquisition economics, not last-click revenue.  </a:t>
-            </a:r>
-            <a:r>
-              <a:rPr sz="1150" b="0" i="0">
-                <a:solidFill>
-                  <a:srgbClr val="BFD5ED"/>
-                </a:solidFill>
-                <a:latin typeface="Arial"/>
-              </a:rPr>
-              <a:t>It delivered 42% of new customers at $147 CAC against $212 early customer value. Set a CAC target pre-launch and add a day-90 LTV readout.</a:t>
-            </a:r>
-          </a:p>
-        </p:txBody>
-      </p:sp>
-      <p:sp>
-        <p:nvSpPr>
-          <p:cNvPr id="11" name="TextBox 10"/>
-          <p:cNvSpPr txBox="1"/>
-          <p:nvPr/>
-        </p:nvSpPr>
-        <p:spPr>
-          <a:xfrm>
-            <a:off x="822960" y="3959352"/>
-            <a:ext cx="502920" cy="731520"/>
-          </a:xfrm>
-          <a:prstGeom prst="rect">
-            <a:avLst/>
-          </a:prstGeom>
-          <a:noFill/>
-        </p:spPr>
-        <p:txBody>
-          <a:bodyPr wrap="square" lIns="0" tIns="0" rIns="0" bIns="0" anchor="t">
-            <a:spAutoFit/>
-          </a:bodyPr>
-          <a:lstStyle/>
-          <a:p>
-            <a:pPr algn="l"/>
-            <a:r>
-              <a:rPr sz="2000" b="1" i="0">
-                <a:solidFill>
-                  <a:srgbClr val="0057B8"/>
-                </a:solidFill>
-                <a:latin typeface="Arial"/>
-              </a:rPr>
-              <a:t>4</a:t>
-            </a:r>
-          </a:p>
-        </p:txBody>
-      </p:sp>
-      <p:sp>
-        <p:nvSpPr>
-          <p:cNvPr id="12" name="TextBox 11"/>
-          <p:cNvSpPr txBox="1"/>
-          <p:nvPr/>
-        </p:nvSpPr>
-        <p:spPr>
-          <a:xfrm>
-            <a:off x="1417320" y="3977639"/>
-            <a:ext cx="9966960" cy="749808"/>
-          </a:xfrm>
-          <a:prstGeom prst="rect">
-            <a:avLst/>
-          </a:prstGeom>
-          <a:noFill/>
-        </p:spPr>
-        <p:txBody>
-          <a:bodyPr wrap="square" lIns="0" tIns="0" rIns="0" bIns="0" anchor="t">
-            <a:spAutoFit/>
-          </a:bodyPr>
-          <a:lstStyle/>
-          <a:p>
-            <a:pPr algn="l">
-              <a:lnSpc>
-                <a:spcPct val="108000"/>
-              </a:lnSpc>
-            </a:pPr>
-            <a:r>
-              <a:rPr sz="1250" b="1" i="0">
-                <a:solidFill>
-                  <a:srgbClr val="FFFFFF"/>
-                </a:solidFill>
-                <a:latin typeface="Arial"/>
-              </a:rPr>
-              <a:t>Fix sizing upstream of the return.  </a:t>
-            </a:r>
-            <a:r>
-              <a:rPr sz="1150" b="0" i="0">
-                <a:solidFill>
-                  <a:srgbClr val="BFD5ED"/>
-                </a:solidFill>
-                <a:latin typeface="Arial"/>
-              </a:rPr>
-              <a:t>Vestal Pro returns hit 14–20% (≈2× fleet) and sizing contacts tripled. Add fit guidance to the PDP, launch emails, and post-purchase flows.</a:t>
-            </a:r>
-          </a:p>
-        </p:txBody>
-      </p:sp>
-      <p:sp>
-        <p:nvSpPr>
-          <p:cNvPr id="13" name="TextBox 12"/>
-          <p:cNvSpPr txBox="1"/>
-          <p:nvPr/>
-        </p:nvSpPr>
-        <p:spPr>
-          <a:xfrm>
-            <a:off x="822960" y="4745736"/>
-            <a:ext cx="502920" cy="731520"/>
-          </a:xfrm>
-          <a:prstGeom prst="rect">
-            <a:avLst/>
-          </a:prstGeom>
-          <a:noFill/>
-        </p:spPr>
-        <p:txBody>
-          <a:bodyPr wrap="square" lIns="0" tIns="0" rIns="0" bIns="0" anchor="t">
-            <a:spAutoFit/>
-          </a:bodyPr>
-          <a:lstStyle/>
-          <a:p>
-            <a:pPr algn="l"/>
-            <a:r>
-              <a:rPr sz="2000" b="1" i="0">
-                <a:solidFill>
-                  <a:srgbClr val="0057B8"/>
-                </a:solidFill>
-                <a:latin typeface="Arial"/>
-              </a:rPr>
-              <a:t>5</a:t>
-            </a:r>
-          </a:p>
-        </p:txBody>
-      </p:sp>
-      <p:sp>
-        <p:nvSpPr>
-          <p:cNvPr id="14" name="TextBox 13"/>
-          <p:cNvSpPr txBox="1"/>
-          <p:nvPr/>
-        </p:nvSpPr>
-        <p:spPr>
-          <a:xfrm>
-            <a:off x="1417320" y="4764023"/>
-            <a:ext cx="9966960" cy="749808"/>
-          </a:xfrm>
-          <a:prstGeom prst="rect">
-            <a:avLst/>
-          </a:prstGeom>
-          <a:noFill/>
-        </p:spPr>
-        <p:txBody>
-          <a:bodyPr wrap="square" lIns="0" tIns="0" rIns="0" bIns="0" anchor="t">
-            <a:spAutoFit/>
-          </a:bodyPr>
-          <a:lstStyle/>
-          <a:p>
-            <a:pPr algn="l">
-              <a:lnSpc>
-                <a:spcPct val="108000"/>
-              </a:lnSpc>
-            </a:pPr>
-            <a:r>
-              <a:rPr sz="1250" b="1" i="0">
-                <a:solidFill>
-                  <a:srgbClr val="FFFFFF"/>
-                </a:solidFill>
-                <a:latin typeface="Arial"/>
-              </a:rPr>
-              <a:t>Convert the halo into baskets.  </a:t>
-            </a:r>
-            <a:r>
-              <a:rPr sz="1150" b="0" i="0">
-                <a:solidFill>
-                  <a:srgbClr val="BFD5ED"/>
-                </a:solidFill>
-                <a:latin typeface="Arial"/>
-              </a:rPr>
-              <a:t>Adjacent demand lifted +9% but attach to Vestal Pro orders stayed flat at 18%. Bundle socks and accessories at PDP and activate the 2,776 email / 1,447 SMS adds on cross-category journeys.</a:t>
-            </a:r>
-          </a:p>
-        </p:txBody>
-      </p:sp>
-      <p:sp>
-        <p:nvSpPr>
-          <p:cNvPr id="15" name="TextBox 14"/>
-          <p:cNvSpPr txBox="1"/>
-          <p:nvPr/>
-        </p:nvSpPr>
-        <p:spPr>
-          <a:xfrm>
-            <a:off x="822960" y="5532120"/>
-            <a:ext cx="502920" cy="731520"/>
-          </a:xfrm>
-          <a:prstGeom prst="rect">
-            <a:avLst/>
-          </a:prstGeom>
-          <a:noFill/>
-        </p:spPr>
-        <p:txBody>
-          <a:bodyPr wrap="square" lIns="0" tIns="0" rIns="0" bIns="0" anchor="t">
-            <a:spAutoFit/>
-          </a:bodyPr>
-          <a:lstStyle/>
-          <a:p>
-            <a:pPr algn="l"/>
-            <a:r>
-              <a:rPr sz="2000" b="1" i="0">
-                <a:solidFill>
-                  <a:srgbClr val="0057B8"/>
-                </a:solidFill>
-                <a:latin typeface="Arial"/>
-              </a:rPr>
-              <a:t>6</a:t>
-            </a:r>
-          </a:p>
-        </p:txBody>
-      </p:sp>
-      <p:sp>
-        <p:nvSpPr>
-          <p:cNvPr id="16" name="TextBox 15"/>
-          <p:cNvSpPr txBox="1"/>
-          <p:nvPr/>
-        </p:nvSpPr>
-        <p:spPr>
-          <a:xfrm>
-            <a:off x="1417320" y="5550407"/>
-            <a:ext cx="9966960" cy="749808"/>
-          </a:xfrm>
-          <a:prstGeom prst="rect">
-            <a:avLst/>
-          </a:prstGeom>
-          <a:noFill/>
-        </p:spPr>
-        <p:txBody>
-          <a:bodyPr wrap="square" lIns="0" tIns="0" rIns="0" bIns="0" anchor="t">
-            <a:spAutoFit/>
-          </a:bodyPr>
-          <a:lstStyle/>
-          <a:p>
-            <a:pPr algn="l">
-              <a:lnSpc>
-                <a:spcPct val="108000"/>
-              </a:lnSpc>
-            </a:pPr>
-            <a:r>
-              <a:rPr sz="1250" b="1" i="0">
-                <a:solidFill>
-                  <a:srgbClr val="FFFFFF"/>
-                </a:solidFill>
-                <a:latin typeface="Arial"/>
-              </a:rPr>
-              <a:t>Instrument incrementality before launch day.  </a:t>
-            </a:r>
-            <a:r>
-              <a:rPr sz="1150" b="0" i="0">
-                <a:solidFill>
-                  <a:srgbClr val="BFD5ED"/>
-                </a:solidFill>
-                <a:latin typeface="Arial"/>
-              </a:rPr>
-              <a:t>Field a CRM holdout and a geo split, set numeric revenue / CAC / database targets, and track COGS and unsubscribes so the next readout measures margin, not proxies.</a:t>
-            </a:r>
-          </a:p>
-        </p:txBody>
-      </p:sp>
-      <p:sp>
-        <p:nvSpPr>
-          <p:cNvPr id="17" name="TextBox 16"/>
-          <p:cNvSpPr txBox="1"/>
-          <p:nvPr/>
-        </p:nvSpPr>
-        <p:spPr>
-          <a:xfrm>
-            <a:off x="822960" y="6510528"/>
-            <a:ext cx="10515600" cy="274320"/>
-          </a:xfrm>
-          <a:prstGeom prst="rect">
-            <a:avLst/>
-          </a:prstGeom>
-          <a:noFill/>
-        </p:spPr>
-        <p:txBody>
-          <a:bodyPr wrap="square" lIns="0" tIns="0" rIns="0" bIns="0" anchor="t">
-            <a:spAutoFit/>
-          </a:bodyPr>
-          <a:lstStyle/>
-          <a:p>
-            <a:pPr algn="l"/>
-            <a:r>
-              <a:rPr sz="800" b="0" i="0">
-                <a:solidFill>
-                  <a:srgbClr val="757575"/>
-                </a:solidFill>
-                <a:latin typeface="Arial"/>
-              </a:rPr>
-              <a:t>Salomon NA eCommerce · Vestal Pro launch readout · Illustrative synthetic case data</a:t>
-            </a:r>
-          </a:p>
-        </p:txBody>
-      </p:sp>
-      <p:pic>
-        <p:nvPicPr>
-          <p:cNvPr id="18" name="Picture 17" descr="salomon_wordmark_black.png"/>
-          <p:cNvPicPr>
-            <a:picLocks noChangeAspect="1"/>
-          </p:cNvPicPr>
-          <p:nvPr/>
-        </p:nvPicPr>
-        <p:blipFill>
-          <a:blip r:embed="rId2"/>
-          <a:stretch>
-            <a:fillRect/>
-          </a:stretch>
-        </p:blipFill>
-        <p:spPr>
-          <a:xfrm>
-            <a:off x="10698480" y="292608"/>
-            <a:ext cx="960120" cy="110013"/>
-          </a:xfrm>
-          <a:prstGeom prst="rect">
-            <a:avLst/>
-          </a:prstGeom>
-        </p:spPr>
-      </p:pic>
-    </p:spTree>
-  </p:cSld>
-  <p:clrMapOvr>
-    <a:masterClrMapping/>
-  </p:clrMapOvr>
-</p:sld>
-</file>
-
-<file path=ppt/slides/slide14.xml><?xml version="1.0" encoding="utf-8"?>
-<p:sld xmlns:a="http://schemas.openxmlformats.org/drawingml/2006/main" xmlns:r="http://schemas.openxmlformats.org/officeDocument/2006/relationships" xmlns:p="http://schemas.openxmlformats.org/presentationml/2006/main">
-  <p:cSld>
-    <p:spTree>
-      <p:nvGrpSpPr>
-        <p:cNvPr id="1" name="">
-          <a:extLst>
-            <a:ext uri="{FF2B5EF4-FFF2-40B4-BE49-F238E27FC236}">
-              <a16:creationId xmlns:a16="http://schemas.microsoft.com/office/drawing/2014/main" id="{3A7BD774-5215-56D0-5E2D-5BEB935C20F4}"/>
-            </a:ext>
-          </a:extLst>
-        </p:cNvPr>
-        <p:cNvGrpSpPr/>
-        <p:nvPr/>
-      </p:nvGrpSpPr>
-      <p:grpSpPr>
-        <a:xfrm>
-          <a:off x="0" y="0"/>
-          <a:ext cx="0" cy="0"/>
-          <a:chOff x="0" y="0"/>
-          <a:chExt cx="0" cy="0"/>
-        </a:xfrm>
-      </p:grpSpPr>
-      <p:sp>
-        <p:nvSpPr>
-          <p:cNvPr id="2" name="Rectangle 1">
-            <a:extLst>
-              <a:ext uri="{FF2B5EF4-FFF2-40B4-BE49-F238E27FC236}">
-                <a16:creationId xmlns:a16="http://schemas.microsoft.com/office/drawing/2014/main" id="{2F2B0E74-D5E6-28E0-4424-F20FC2FD1565}"/>
-              </a:ext>
-            </a:extLst>
-          </p:cNvPr>
-          <p:cNvSpPr/>
-          <p:nvPr/>
-        </p:nvSpPr>
-        <p:spPr>
-          <a:xfrm>
-            <a:off x="0" y="0"/>
-            <a:ext cx="12191695" cy="6858000"/>
-          </a:xfrm>
-          <a:prstGeom prst="rect">
-            <a:avLst/>
-          </a:prstGeom>
-          <a:solidFill>
-            <a:srgbClr val="000000"/>
-          </a:solidFill>
-          <a:ln>
-            <a:noFill/>
-          </a:ln>
-          <a:effectLst/>
-        </p:spPr>
-        <p:style>
-          <a:lnRef idx="1">
-            <a:schemeClr val="accent1"/>
-          </a:lnRef>
-          <a:fillRef idx="3">
-            <a:schemeClr val="accent1"/>
-          </a:fillRef>
-          <a:effectRef idx="2">
-            <a:schemeClr val="accent1"/>
-          </a:effectRef>
-          <a:fontRef idx="minor">
-            <a:schemeClr val="lt1"/>
-          </a:fontRef>
-        </p:style>
-        <p:txBody>
-          <a:bodyPr rtlCol="0" anchor="ctr"/>
-          <a:lstStyle/>
-          <a:p>
-            <a:pPr algn="ctr"/>
-            <a:endParaRPr/>
-          </a:p>
-        </p:txBody>
-      </p:sp>
-      <p:sp>
-        <p:nvSpPr>
-          <p:cNvPr id="3" name="TextBox 2">
-            <a:extLst>
-              <a:ext uri="{FF2B5EF4-FFF2-40B4-BE49-F238E27FC236}">
-                <a16:creationId xmlns:a16="http://schemas.microsoft.com/office/drawing/2014/main" id="{02588DE6-B55D-C61B-F685-4F509F0716EE}"/>
-              </a:ext>
-            </a:extLst>
-          </p:cNvPr>
-          <p:cNvSpPr txBox="1"/>
-          <p:nvPr/>
-        </p:nvSpPr>
-        <p:spPr>
-          <a:xfrm>
-            <a:off x="822960" y="1965960"/>
-            <a:ext cx="10515600" cy="1354217"/>
-          </a:xfrm>
-          <a:prstGeom prst="rect">
-            <a:avLst/>
-          </a:prstGeom>
-          <a:noFill/>
-        </p:spPr>
-        <p:txBody>
-          <a:bodyPr wrap="square" lIns="0" tIns="0" rIns="0" bIns="0" anchor="t">
-            <a:spAutoFit/>
-          </a:bodyPr>
-          <a:lstStyle/>
-          <a:p>
-            <a:pPr algn="l"/>
-            <a:r>
-              <a:rPr lang="en-US" sz="4400" dirty="0">
-                <a:solidFill>
-                  <a:srgbClr val="FFFFFF"/>
-                </a:solidFill>
-                <a:latin typeface="Georgia"/>
-              </a:rPr>
-              <a:t>THANK YOU</a:t>
-            </a:r>
-          </a:p>
-          <a:p>
-            <a:pPr algn="l"/>
-            <a:r>
-              <a:rPr lang="en-US" sz="4400" b="0" i="0" dirty="0">
-                <a:solidFill>
-                  <a:srgbClr val="FFFFFF"/>
-                </a:solidFill>
-                <a:latin typeface="Georgia"/>
-              </a:rPr>
-              <a:t>MERCI</a:t>
-            </a:r>
-            <a:endParaRPr sz="4400" b="0" i="0" dirty="0">
-              <a:solidFill>
-                <a:srgbClr val="FFFFFF"/>
-              </a:solidFill>
-              <a:latin typeface="Georgia"/>
-            </a:endParaRPr>
-          </a:p>
-        </p:txBody>
-      </p:sp>
-      <p:sp>
-        <p:nvSpPr>
-          <p:cNvPr id="6" name="TextBox 5">
-            <a:extLst>
-              <a:ext uri="{FF2B5EF4-FFF2-40B4-BE49-F238E27FC236}">
-                <a16:creationId xmlns:a16="http://schemas.microsoft.com/office/drawing/2014/main" id="{AF312117-B385-77DE-78A5-DC270890AC11}"/>
-              </a:ext>
-            </a:extLst>
-          </p:cNvPr>
-          <p:cNvSpPr txBox="1"/>
-          <p:nvPr/>
-        </p:nvSpPr>
-        <p:spPr>
-          <a:xfrm>
-            <a:off x="822960" y="6080760"/>
-            <a:ext cx="10515600" cy="153888"/>
-          </a:xfrm>
-          <a:prstGeom prst="rect">
-            <a:avLst/>
-          </a:prstGeom>
-          <a:noFill/>
-        </p:spPr>
-        <p:txBody>
-          <a:bodyPr wrap="square" lIns="0" tIns="0" rIns="0" bIns="0" anchor="t">
-            <a:spAutoFit/>
-          </a:bodyPr>
-          <a:lstStyle/>
-          <a:p>
-            <a:pPr algn="l"/>
-            <a:r>
-              <a:rPr sz="1000" b="0" i="0" dirty="0">
-                <a:solidFill>
-                  <a:srgbClr val="757575"/>
-                </a:solidFill>
-                <a:latin typeface="Arial"/>
-              </a:rPr>
-              <a:t>Marketing Insights &amp; Analytics</a:t>
-            </a:r>
-          </a:p>
-        </p:txBody>
-      </p:sp>
-      <p:pic>
-        <p:nvPicPr>
-          <p:cNvPr id="7" name="Picture 6" descr="salomon_wordmark_white.png">
-            <a:extLst>
-              <a:ext uri="{FF2B5EF4-FFF2-40B4-BE49-F238E27FC236}">
-                <a16:creationId xmlns:a16="http://schemas.microsoft.com/office/drawing/2014/main" id="{4137F25F-3223-1AA1-5222-9B0CA75E764B}"/>
-              </a:ext>
-            </a:extLst>
-          </p:cNvPr>
-          <p:cNvPicPr>
-            <a:picLocks noChangeAspect="1"/>
-          </p:cNvPicPr>
-          <p:nvPr/>
-        </p:nvPicPr>
-        <p:blipFill>
-          <a:blip r:embed="rId2"/>
-          <a:stretch>
-            <a:fillRect/>
-          </a:stretch>
-        </p:blipFill>
-        <p:spPr>
-          <a:xfrm>
-            <a:off x="822960" y="900000"/>
-            <a:ext cx="2560320" cy="293370"/>
-          </a:xfrm>
-          <a:prstGeom prst="rect">
-            <a:avLst/>
-          </a:prstGeom>
-        </p:spPr>
-      </p:pic>
-      <p:pic>
-        <p:nvPicPr>
-          <p:cNvPr id="5" name="Picture 4" descr="The image shows a steep, rocky mountain side under a cloudy sky.&#10;&#10;AI-generated content may be incorrect.">
-            <a:extLst>
-              <a:ext uri="{FF2B5EF4-FFF2-40B4-BE49-F238E27FC236}">
-                <a16:creationId xmlns:a16="http://schemas.microsoft.com/office/drawing/2014/main" id="{5D256C6D-8464-4352-96C6-EE210AA6C53C}"/>
-              </a:ext>
-            </a:extLst>
-          </p:cNvPr>
-          <p:cNvPicPr>
-            <a:picLocks noChangeAspect="1"/>
-          </p:cNvPicPr>
-          <p:nvPr/>
-        </p:nvPicPr>
-        <p:blipFill>
-          <a:blip r:embed="rId3">
-            <a:alphaModFix amt="50000"/>
-            <a:extLst>
-              <a:ext uri="{BEBA8EAE-BF5A-486C-A8C5-ECC9F3942E4B}">
-                <a14:imgProps xmlns:a14="http://schemas.microsoft.com/office/drawing/2010/main">
-                  <a14:imgLayer r:embed="rId4">
-                    <a14:imgEffect>
-                      <a14:saturation sat="0"/>
-                    </a14:imgEffect>
-                  </a14:imgLayer>
-                </a14:imgProps>
-              </a:ext>
-            </a:extLst>
-          </a:blip>
-          <a:stretch>
-            <a:fillRect/>
-          </a:stretch>
-        </p:blipFill>
-        <p:spPr>
-          <a:xfrm>
-            <a:off x="-64851" y="0"/>
-            <a:ext cx="13452826" cy="7953983"/>
-          </a:xfrm>
-          <a:prstGeom prst="rect">
-            <a:avLst/>
-          </a:prstGeom>
-        </p:spPr>
-      </p:pic>
-    </p:spTree>
-    <p:extLst>
-      <p:ext uri="{BB962C8B-B14F-4D97-AF65-F5344CB8AC3E}">
-        <p14:creationId xmlns:p14="http://schemas.microsoft.com/office/powerpoint/2010/main" val="1247451091"/>
-      </p:ext>
-    </p:extLst>
-  </p:cSld>
-  <p:clrMapOvr>
-    <a:masterClrMapping/>
-  </p:clrMapOvr>
-</p:sld>
-</file>
-
-<file path=ppt/slides/slide15.xml><?xml version="1.0" encoding="utf-8"?>
-<p:sld xmlns:a="http://schemas.openxmlformats.org/drawingml/2006/main" xmlns:r="http://schemas.openxmlformats.org/officeDocument/2006/relationships" xmlns:p="http://schemas.openxmlformats.org/presentationml/2006/main">
-  <p:cSld>
-    <p:spTree>
-      <p:nvGrpSpPr>
-        <p:cNvPr id="1" name="">
-          <a:extLst>
-            <a:ext uri="{FF2B5EF4-FFF2-40B4-BE49-F238E27FC236}">
-              <a16:creationId xmlns:a16="http://schemas.microsoft.com/office/drawing/2014/main" id="{EE4CA7C4-DD03-977A-26ED-597F07993278}"/>
-            </a:ext>
-          </a:extLst>
-        </p:cNvPr>
-        <p:cNvGrpSpPr/>
-        <p:nvPr/>
-      </p:nvGrpSpPr>
-      <p:grpSpPr>
-        <a:xfrm>
-          <a:off x="0" y="0"/>
-          <a:ext cx="0" cy="0"/>
-          <a:chOff x="0" y="0"/>
-          <a:chExt cx="0" cy="0"/>
-        </a:xfrm>
-      </p:grpSpPr>
-      <p:sp>
-        <p:nvSpPr>
-          <p:cNvPr id="2" name="Rectangle 1">
-            <a:extLst>
-              <a:ext uri="{FF2B5EF4-FFF2-40B4-BE49-F238E27FC236}">
-                <a16:creationId xmlns:a16="http://schemas.microsoft.com/office/drawing/2014/main" id="{6C9E9FC8-0A6C-639A-55CC-FF675D22BB17}"/>
-              </a:ext>
-            </a:extLst>
-          </p:cNvPr>
-          <p:cNvSpPr/>
-          <p:nvPr/>
-        </p:nvSpPr>
-        <p:spPr>
-          <a:xfrm>
-            <a:off x="0" y="0"/>
-            <a:ext cx="12191695" cy="6858000"/>
-          </a:xfrm>
-          <a:prstGeom prst="rect">
-            <a:avLst/>
-          </a:prstGeom>
-          <a:solidFill>
-            <a:srgbClr val="000000"/>
-          </a:solidFill>
-          <a:ln>
-            <a:noFill/>
-          </a:ln>
-          <a:effectLst/>
-        </p:spPr>
-        <p:style>
-          <a:lnRef idx="1">
-            <a:schemeClr val="accent1"/>
-          </a:lnRef>
-          <a:fillRef idx="3">
-            <a:schemeClr val="accent1"/>
-          </a:fillRef>
-          <a:effectRef idx="2">
-            <a:schemeClr val="accent1"/>
-          </a:effectRef>
-          <a:fontRef idx="minor">
-            <a:schemeClr val="lt1"/>
-          </a:fontRef>
-        </p:style>
-        <p:txBody>
-          <a:bodyPr rtlCol="0" anchor="ctr"/>
-          <a:lstStyle/>
-          <a:p>
-            <a:pPr algn="ctr"/>
-            <a:endParaRPr/>
-          </a:p>
-        </p:txBody>
-      </p:sp>
-      <p:sp>
-        <p:nvSpPr>
-          <p:cNvPr id="3" name="TextBox 2">
-            <a:extLst>
-              <a:ext uri="{FF2B5EF4-FFF2-40B4-BE49-F238E27FC236}">
-                <a16:creationId xmlns:a16="http://schemas.microsoft.com/office/drawing/2014/main" id="{5DA55F5F-4D4F-01B7-4269-502598763585}"/>
-              </a:ext>
-            </a:extLst>
-          </p:cNvPr>
-          <p:cNvSpPr txBox="1"/>
-          <p:nvPr/>
-        </p:nvSpPr>
-        <p:spPr>
-          <a:xfrm>
-            <a:off x="822960" y="1965960"/>
-            <a:ext cx="10515600" cy="677108"/>
-          </a:xfrm>
-          <a:prstGeom prst="rect">
-            <a:avLst/>
-          </a:prstGeom>
-          <a:noFill/>
-        </p:spPr>
-        <p:txBody>
-          <a:bodyPr wrap="square" lIns="0" tIns="0" rIns="0" bIns="0" anchor="t">
-            <a:spAutoFit/>
-          </a:bodyPr>
-          <a:lstStyle/>
-          <a:p>
-            <a:pPr algn="l"/>
-            <a:r>
-              <a:rPr lang="en-US" sz="4400" dirty="0">
-                <a:solidFill>
-                  <a:srgbClr val="FFFFFF"/>
-                </a:solidFill>
-                <a:latin typeface="Georgia"/>
-              </a:rPr>
-              <a:t>APPENDIX</a:t>
-            </a:r>
-            <a:endParaRPr sz="4400" b="0" i="0" dirty="0">
-              <a:solidFill>
-                <a:srgbClr val="FFFFFF"/>
-              </a:solidFill>
-              <a:latin typeface="Georgia"/>
-            </a:endParaRPr>
-          </a:p>
-        </p:txBody>
-      </p:sp>
-      <p:sp>
-        <p:nvSpPr>
-          <p:cNvPr id="6" name="TextBox 5">
-            <a:extLst>
-              <a:ext uri="{FF2B5EF4-FFF2-40B4-BE49-F238E27FC236}">
-                <a16:creationId xmlns:a16="http://schemas.microsoft.com/office/drawing/2014/main" id="{165042CB-5990-BF91-038A-7DA5859E0C0B}"/>
-              </a:ext>
-            </a:extLst>
-          </p:cNvPr>
-          <p:cNvSpPr txBox="1"/>
-          <p:nvPr/>
-        </p:nvSpPr>
-        <p:spPr>
-          <a:xfrm>
-            <a:off x="822960" y="6080760"/>
-            <a:ext cx="10515600" cy="153888"/>
-          </a:xfrm>
-          <a:prstGeom prst="rect">
-            <a:avLst/>
-          </a:prstGeom>
-          <a:noFill/>
-        </p:spPr>
-        <p:txBody>
-          <a:bodyPr wrap="square" lIns="0" tIns="0" rIns="0" bIns="0" anchor="t">
-            <a:spAutoFit/>
-          </a:bodyPr>
-          <a:lstStyle/>
-          <a:p>
-            <a:pPr algn="l"/>
-            <a:r>
-              <a:rPr sz="1000" b="0" i="0" dirty="0">
-                <a:solidFill>
-                  <a:srgbClr val="757575"/>
-                </a:solidFill>
-                <a:latin typeface="Arial"/>
-              </a:rPr>
-              <a:t>Marketing Insights &amp; Analytics</a:t>
-            </a:r>
-          </a:p>
-        </p:txBody>
-      </p:sp>
-      <p:pic>
-        <p:nvPicPr>
-          <p:cNvPr id="7" name="Picture 6" descr="salomon_wordmark_white.png">
-            <a:extLst>
-              <a:ext uri="{FF2B5EF4-FFF2-40B4-BE49-F238E27FC236}">
-                <a16:creationId xmlns:a16="http://schemas.microsoft.com/office/drawing/2014/main" id="{7E51FCA6-267E-8599-5BE8-75256019380E}"/>
-              </a:ext>
-            </a:extLst>
-          </p:cNvPr>
-          <p:cNvPicPr>
-            <a:picLocks noChangeAspect="1"/>
-          </p:cNvPicPr>
-          <p:nvPr/>
-        </p:nvPicPr>
-        <p:blipFill>
-          <a:blip r:embed="rId2"/>
-          <a:stretch>
-            <a:fillRect/>
-          </a:stretch>
-        </p:blipFill>
-        <p:spPr>
-          <a:xfrm>
-            <a:off x="822960" y="900000"/>
-            <a:ext cx="2560320" cy="293370"/>
-          </a:xfrm>
-          <a:prstGeom prst="rect">
-            <a:avLst/>
-          </a:prstGeom>
-        </p:spPr>
-      </p:pic>
-    </p:spTree>
-    <p:extLst>
-      <p:ext uri="{BB962C8B-B14F-4D97-AF65-F5344CB8AC3E}">
-        <p14:creationId xmlns:p14="http://schemas.microsoft.com/office/powerpoint/2010/main" val="3769470056"/>
-      </p:ext>
-    </p:extLst>
-  </p:cSld>
-  <p:clrMapOvr>
-    <a:masterClrMapping/>
-  </p:clrMapOvr>
-</p:sld>
-</file>
-
-<file path=ppt/slides/slide16.xml><?xml version="1.0" encoding="utf-8"?>
-<p:sld xmlns:a="http://schemas.openxmlformats.org/drawingml/2006/main" xmlns:r="http://schemas.openxmlformats.org/officeDocument/2006/relationships" xmlns:p="http://schemas.openxmlformats.org/presentationml/2006/main">
-  <p:cSld>
-    <p:spTree>
-      <p:nvGrpSpPr>
-        <p:cNvPr id="1" name=""/>
-        <p:cNvGrpSpPr/>
-        <p:nvPr/>
-      </p:nvGrpSpPr>
-      <p:grpSpPr>
-        <a:xfrm>
-          <a:off x="0" y="0"/>
-          <a:ext cx="0" cy="0"/>
-          <a:chOff x="0" y="0"/>
-          <a:chExt cx="0" cy="0"/>
-        </a:xfrm>
-      </p:grpSpPr>
-      <p:sp>
-        <p:nvSpPr>
-          <p:cNvPr id="2" name="TextBox 1"/>
-          <p:cNvSpPr txBox="1"/>
-          <p:nvPr/>
-        </p:nvSpPr>
-        <p:spPr>
-          <a:xfrm>
-            <a:off x="502920" y="292608"/>
-            <a:ext cx="11155680" cy="274320"/>
-          </a:xfrm>
-          <a:prstGeom prst="rect">
-            <a:avLst/>
-          </a:prstGeom>
-          <a:noFill/>
-        </p:spPr>
-        <p:txBody>
-          <a:bodyPr wrap="square" lIns="0" tIns="0" rIns="0" bIns="0" anchor="t">
-            <a:spAutoFit/>
-          </a:bodyPr>
-          <a:lstStyle/>
-          <a:p>
-            <a:pPr algn="l"/>
-            <a:r>
-              <a:rPr sz="1050" b="1" i="0">
-                <a:solidFill>
-                  <a:srgbClr val="757575"/>
-                </a:solidFill>
-                <a:latin typeface="Arial"/>
-              </a:rPr>
-              <a:t>MEASUREMENT METHODOLOGY</a:t>
-            </a:r>
-          </a:p>
-        </p:txBody>
-      </p:sp>
-      <p:sp>
-        <p:nvSpPr>
-          <p:cNvPr id="3" name="TextBox 2"/>
-          <p:cNvSpPr txBox="1"/>
-          <p:nvPr/>
-        </p:nvSpPr>
-        <p:spPr>
-          <a:xfrm>
-            <a:off x="502920" y="566928"/>
-            <a:ext cx="11201400" cy="777240"/>
-          </a:xfrm>
-          <a:prstGeom prst="rect">
-            <a:avLst/>
-          </a:prstGeom>
-          <a:noFill/>
-        </p:spPr>
-        <p:txBody>
-          <a:bodyPr wrap="square" lIns="0" tIns="0" rIns="0" bIns="0" anchor="t">
-            <a:spAutoFit/>
-          </a:bodyPr>
-          <a:lstStyle/>
-          <a:p>
-            <a:pPr algn="l"/>
-            <a:r>
-              <a:rPr sz="2300" b="0" i="0" dirty="0">
-                <a:solidFill>
-                  <a:srgbClr val="000000"/>
-                </a:solidFill>
-                <a:latin typeface="Georgia"/>
-              </a:rPr>
-              <a:t>Impact is measured against a modeled no-campaign baseline, not channel attribution</a:t>
-            </a:r>
-          </a:p>
-        </p:txBody>
-      </p:sp>
-      <p:sp>
-        <p:nvSpPr>
-          <p:cNvPr id="4" name="Rectangle 3"/>
-          <p:cNvSpPr/>
-          <p:nvPr/>
-        </p:nvSpPr>
-        <p:spPr>
-          <a:xfrm>
-            <a:off x="502920" y="1554480"/>
-            <a:ext cx="5394960" cy="2011680"/>
-          </a:xfrm>
-          <a:prstGeom prst="rect">
-            <a:avLst/>
-          </a:prstGeom>
-          <a:noFill/>
-          <a:ln w="9525">
-            <a:solidFill>
-              <a:srgbClr val="D9D9D9"/>
-            </a:solidFill>
-          </a:ln>
-          <a:effectLst/>
-        </p:spPr>
-        <p:style>
-          <a:lnRef idx="1">
-            <a:schemeClr val="accent1"/>
-          </a:lnRef>
-          <a:fillRef idx="3">
-            <a:schemeClr val="accent1"/>
-          </a:fillRef>
-          <a:effectRef idx="2">
-            <a:schemeClr val="accent1"/>
-          </a:effectRef>
-          <a:fontRef idx="minor">
-            <a:schemeClr val="lt1"/>
-          </a:fontRef>
-        </p:style>
-        <p:txBody>
-          <a:bodyPr rtlCol="0" anchor="ctr"/>
-          <a:lstStyle/>
-          <a:p>
-            <a:pPr algn="ctr"/>
-            <a:endParaRPr/>
-          </a:p>
-        </p:txBody>
-      </p:sp>
-      <p:sp>
-        <p:nvSpPr>
-          <p:cNvPr id="5" name="TextBox 4"/>
-          <p:cNvSpPr txBox="1"/>
-          <p:nvPr/>
-        </p:nvSpPr>
-        <p:spPr>
-          <a:xfrm>
-            <a:off x="731520" y="1737360"/>
-            <a:ext cx="4937760" cy="274320"/>
-          </a:xfrm>
-          <a:prstGeom prst="rect">
-            <a:avLst/>
-          </a:prstGeom>
-          <a:noFill/>
-        </p:spPr>
-        <p:txBody>
-          <a:bodyPr wrap="square" lIns="0" tIns="0" rIns="0" bIns="0" anchor="t">
-            <a:spAutoFit/>
-          </a:bodyPr>
-          <a:lstStyle/>
-          <a:p>
-            <a:pPr algn="l"/>
-            <a:r>
-              <a:rPr sz="1150" b="1" i="0" dirty="0">
-                <a:solidFill>
-                  <a:srgbClr val="000000"/>
-                </a:solidFill>
-                <a:latin typeface="Arial"/>
-              </a:rPr>
-              <a:t>COUNTERFACTUAL BASELINE   </a:t>
-            </a:r>
-            <a:r>
-              <a:rPr sz="1000" b="1" i="0" dirty="0">
-                <a:solidFill>
-                  <a:srgbClr val="0057B8"/>
-                </a:solidFill>
-                <a:latin typeface="Arial"/>
-              </a:rPr>
-              <a:t>USED</a:t>
-            </a:r>
-          </a:p>
-        </p:txBody>
-      </p:sp>
-      <p:sp>
-        <p:nvSpPr>
-          <p:cNvPr id="6" name="TextBox 5"/>
-          <p:cNvSpPr txBox="1"/>
-          <p:nvPr/>
-        </p:nvSpPr>
-        <p:spPr>
-          <a:xfrm>
-            <a:off x="731520" y="2084831"/>
-            <a:ext cx="4937760" cy="743152"/>
-          </a:xfrm>
-          <a:prstGeom prst="rect">
-            <a:avLst/>
-          </a:prstGeom>
-          <a:noFill/>
-        </p:spPr>
-        <p:txBody>
-          <a:bodyPr wrap="square" lIns="0" tIns="0" rIns="0" bIns="0" anchor="t">
-            <a:spAutoFit/>
-          </a:bodyPr>
-          <a:lstStyle/>
-          <a:p>
-            <a:pPr algn="l">
-              <a:lnSpc>
-                <a:spcPct val="112000"/>
-              </a:lnSpc>
-            </a:pPr>
-            <a:r>
-              <a:rPr sz="1100" b="0" i="0" dirty="0">
-                <a:solidFill>
-                  <a:srgbClr val="333333"/>
-                </a:solidFill>
-                <a:latin typeface="Arial"/>
-              </a:rPr>
-              <a:t>Expected no-campaign revenue = linear trend + </a:t>
-            </a:r>
-            <a:r>
-              <a:rPr lang="en-US" sz="1100" b="0" i="0" dirty="0">
-                <a:solidFill>
-                  <a:srgbClr val="333333"/>
-                </a:solidFill>
-                <a:latin typeface="Arial"/>
-              </a:rPr>
-              <a:t>weekly </a:t>
-            </a:r>
-            <a:r>
-              <a:rPr sz="1100" b="0" i="0" dirty="0">
-                <a:solidFill>
-                  <a:srgbClr val="333333"/>
-                </a:solidFill>
-                <a:latin typeface="Arial"/>
-              </a:rPr>
-              <a:t>seasonality, fit to the 8-week pre-period and projected through the flight. Validated on a held-out final fortnight of the pre-period: 8.8–10.1% mean error. Lift is reported with 95% confidence intervals.</a:t>
-            </a:r>
-          </a:p>
-        </p:txBody>
-      </p:sp>
-      <p:sp>
-        <p:nvSpPr>
-          <p:cNvPr id="7" name="Rectangle 6"/>
-          <p:cNvSpPr/>
-          <p:nvPr/>
-        </p:nvSpPr>
-        <p:spPr>
-          <a:xfrm>
-            <a:off x="6291072" y="1554480"/>
-            <a:ext cx="5394960" cy="2011680"/>
-          </a:xfrm>
-          <a:prstGeom prst="rect">
-            <a:avLst/>
-          </a:prstGeom>
-          <a:noFill/>
-          <a:ln w="9525">
-            <a:solidFill>
-              <a:srgbClr val="D9D9D9"/>
-            </a:solidFill>
-          </a:ln>
-          <a:effectLst/>
-        </p:spPr>
-        <p:style>
-          <a:lnRef idx="1">
-            <a:schemeClr val="accent1"/>
-          </a:lnRef>
-          <a:fillRef idx="3">
-            <a:schemeClr val="accent1"/>
-          </a:fillRef>
-          <a:effectRef idx="2">
-            <a:schemeClr val="accent1"/>
-          </a:effectRef>
-          <a:fontRef idx="minor">
-            <a:schemeClr val="lt1"/>
-          </a:fontRef>
-        </p:style>
-        <p:txBody>
-          <a:bodyPr rtlCol="0" anchor="ctr"/>
-          <a:lstStyle/>
-          <a:p>
-            <a:pPr algn="ctr"/>
-            <a:endParaRPr/>
-          </a:p>
-        </p:txBody>
-      </p:sp>
-      <p:sp>
-        <p:nvSpPr>
-          <p:cNvPr id="8" name="TextBox 7"/>
-          <p:cNvSpPr txBox="1"/>
-          <p:nvPr/>
-        </p:nvSpPr>
-        <p:spPr>
-          <a:xfrm>
-            <a:off x="6519672" y="1737360"/>
-            <a:ext cx="4937760" cy="274320"/>
-          </a:xfrm>
-          <a:prstGeom prst="rect">
-            <a:avLst/>
-          </a:prstGeom>
-          <a:noFill/>
-        </p:spPr>
-        <p:txBody>
-          <a:bodyPr wrap="square" lIns="0" tIns="0" rIns="0" bIns="0" anchor="t">
-            <a:spAutoFit/>
-          </a:bodyPr>
-          <a:lstStyle/>
-          <a:p>
-            <a:pPr algn="l"/>
-            <a:r>
-              <a:rPr sz="1150" b="1" i="0">
-                <a:solidFill>
-                  <a:srgbClr val="000000"/>
-                </a:solidFill>
-                <a:latin typeface="Arial"/>
-              </a:rPr>
-              <a:t>IMPACT DECOMPOSITION   </a:t>
-            </a:r>
-            <a:r>
-              <a:rPr sz="1000" b="1" i="0">
-                <a:solidFill>
-                  <a:srgbClr val="0057B8"/>
-                </a:solidFill>
-                <a:latin typeface="Arial"/>
-              </a:rPr>
-              <a:t>USED</a:t>
-            </a:r>
-          </a:p>
-        </p:txBody>
-      </p:sp>
-      <p:sp>
-        <p:nvSpPr>
-          <p:cNvPr id="9" name="TextBox 8"/>
-          <p:cNvSpPr txBox="1"/>
-          <p:nvPr/>
-        </p:nvSpPr>
-        <p:spPr>
-          <a:xfrm>
-            <a:off x="6519672" y="2084831"/>
-            <a:ext cx="4937760" cy="1371600"/>
-          </a:xfrm>
-          <a:prstGeom prst="rect">
-            <a:avLst/>
-          </a:prstGeom>
-          <a:noFill/>
-        </p:spPr>
-        <p:txBody>
-          <a:bodyPr wrap="square" lIns="0" tIns="0" rIns="0" bIns="0" anchor="t">
-            <a:spAutoFit/>
-          </a:bodyPr>
-          <a:lstStyle/>
-          <a:p>
-            <a:pPr algn="l">
-              <a:lnSpc>
-                <a:spcPct val="112000"/>
-              </a:lnSpc>
-            </a:pPr>
-            <a:r>
-              <a:rPr sz="1100" b="0" i="0">
-                <a:solidFill>
-                  <a:srgbClr val="333333"/>
-                </a:solidFill>
-                <a:latin typeface="Arial"/>
-              </a:rPr>
-              <a:t>Net campaign value = direct Vestal Pro revenue − franchise shift (cannibalization) + adjacent-category halo − incremental media spend. Franchise shift is stress-tested across three baseline specifications and reported as a range, not a point.</a:t>
-            </a:r>
-          </a:p>
-        </p:txBody>
-      </p:sp>
-      <p:sp>
-        <p:nvSpPr>
-          <p:cNvPr id="10" name="Rectangle 9"/>
-          <p:cNvSpPr/>
-          <p:nvPr/>
-        </p:nvSpPr>
-        <p:spPr>
-          <a:xfrm>
-            <a:off x="502920" y="3794760"/>
-            <a:ext cx="5394960" cy="2011680"/>
-          </a:xfrm>
-          <a:prstGeom prst="rect">
-            <a:avLst/>
-          </a:prstGeom>
-          <a:noFill/>
-          <a:ln w="9525">
-            <a:solidFill>
-              <a:srgbClr val="D9D9D9"/>
-            </a:solidFill>
-          </a:ln>
-          <a:effectLst/>
-        </p:spPr>
-        <p:style>
-          <a:lnRef idx="1">
-            <a:schemeClr val="accent1"/>
-          </a:lnRef>
-          <a:fillRef idx="3">
-            <a:schemeClr val="accent1"/>
-          </a:fillRef>
-          <a:effectRef idx="2">
-            <a:schemeClr val="accent1"/>
-          </a:effectRef>
-          <a:fontRef idx="minor">
-            <a:schemeClr val="lt1"/>
-          </a:fontRef>
-        </p:style>
-        <p:txBody>
-          <a:bodyPr rtlCol="0" anchor="ctr"/>
-          <a:lstStyle/>
-          <a:p>
-            <a:pPr algn="ctr"/>
-            <a:endParaRPr/>
-          </a:p>
-        </p:txBody>
-      </p:sp>
-      <p:sp>
-        <p:nvSpPr>
-          <p:cNvPr id="11" name="TextBox 10"/>
-          <p:cNvSpPr txBox="1"/>
-          <p:nvPr/>
-        </p:nvSpPr>
-        <p:spPr>
-          <a:xfrm>
-            <a:off x="731520" y="3977640"/>
-            <a:ext cx="4937760" cy="274320"/>
-          </a:xfrm>
-          <a:prstGeom prst="rect">
-            <a:avLst/>
-          </a:prstGeom>
-          <a:noFill/>
-        </p:spPr>
-        <p:txBody>
-          <a:bodyPr wrap="square" lIns="0" tIns="0" rIns="0" bIns="0" anchor="t">
-            <a:spAutoFit/>
-          </a:bodyPr>
-          <a:lstStyle/>
-          <a:p>
-            <a:pPr algn="l"/>
-            <a:r>
-              <a:rPr sz="1150" b="1" i="0" dirty="0">
-                <a:solidFill>
-                  <a:srgbClr val="000000"/>
-                </a:solidFill>
-                <a:latin typeface="Arial"/>
-              </a:rPr>
-              <a:t>CRM HOLDOUT   </a:t>
-            </a:r>
-            <a:r>
-              <a:rPr sz="1000" b="1" i="0" dirty="0">
-                <a:solidFill>
-                  <a:srgbClr val="757575"/>
-                </a:solidFill>
-                <a:latin typeface="Arial"/>
-              </a:rPr>
-              <a:t>NOT FIELDED</a:t>
-            </a:r>
-          </a:p>
-        </p:txBody>
-      </p:sp>
-      <p:sp>
-        <p:nvSpPr>
-          <p:cNvPr id="12" name="TextBox 11"/>
-          <p:cNvSpPr txBox="1"/>
-          <p:nvPr/>
-        </p:nvSpPr>
-        <p:spPr>
-          <a:xfrm>
-            <a:off x="731520" y="4325112"/>
-            <a:ext cx="4937760" cy="1371600"/>
-          </a:xfrm>
-          <a:prstGeom prst="rect">
-            <a:avLst/>
-          </a:prstGeom>
-          <a:noFill/>
-        </p:spPr>
-        <p:txBody>
-          <a:bodyPr wrap="square" lIns="0" tIns="0" rIns="0" bIns="0" anchor="t">
-            <a:spAutoFit/>
-          </a:bodyPr>
-          <a:lstStyle/>
-          <a:p>
-            <a:pPr algn="l">
-              <a:lnSpc>
-                <a:spcPct val="112000"/>
-              </a:lnSpc>
-            </a:pPr>
-            <a:r>
-              <a:rPr sz="1100" b="0" i="0" dirty="0">
-                <a:solidFill>
-                  <a:srgbClr val="333333"/>
-                </a:solidFill>
-                <a:latin typeface="Arial"/>
-              </a:rPr>
-              <a:t>No held-out control group was reserved this flight, so channel-level incrementality is proxied: attributed revenue is scaled to the site-level incremental total (factor 0.31). Reserve a 10% CRM holdout next launch to measure it directly.</a:t>
-            </a:r>
-          </a:p>
-        </p:txBody>
-      </p:sp>
-      <p:sp>
-        <p:nvSpPr>
-          <p:cNvPr id="13" name="Rectangle 12"/>
-          <p:cNvSpPr/>
-          <p:nvPr/>
-        </p:nvSpPr>
-        <p:spPr>
-          <a:xfrm>
-            <a:off x="6291072" y="3794760"/>
-            <a:ext cx="5394960" cy="2011680"/>
-          </a:xfrm>
-          <a:prstGeom prst="rect">
-            <a:avLst/>
-          </a:prstGeom>
-          <a:noFill/>
-          <a:ln w="9525">
-            <a:solidFill>
-              <a:srgbClr val="D9D9D9"/>
-            </a:solidFill>
-          </a:ln>
-          <a:effectLst/>
-        </p:spPr>
-        <p:style>
-          <a:lnRef idx="1">
-            <a:schemeClr val="accent1"/>
-          </a:lnRef>
-          <a:fillRef idx="3">
-            <a:schemeClr val="accent1"/>
-          </a:fillRef>
-          <a:effectRef idx="2">
-            <a:schemeClr val="accent1"/>
-          </a:effectRef>
-          <a:fontRef idx="minor">
-            <a:schemeClr val="lt1"/>
-          </a:fontRef>
-        </p:style>
-        <p:txBody>
-          <a:bodyPr rtlCol="0" anchor="ctr"/>
-          <a:lstStyle/>
-          <a:p>
-            <a:pPr algn="ctr"/>
-            <a:endParaRPr/>
-          </a:p>
-        </p:txBody>
-      </p:sp>
-      <p:sp>
-        <p:nvSpPr>
-          <p:cNvPr id="14" name="TextBox 13"/>
-          <p:cNvSpPr txBox="1"/>
-          <p:nvPr/>
-        </p:nvSpPr>
-        <p:spPr>
-          <a:xfrm>
-            <a:off x="6519672" y="3977640"/>
-            <a:ext cx="4937760" cy="274320"/>
-          </a:xfrm>
-          <a:prstGeom prst="rect">
-            <a:avLst/>
-          </a:prstGeom>
-          <a:noFill/>
-        </p:spPr>
-        <p:txBody>
-          <a:bodyPr wrap="square" lIns="0" tIns="0" rIns="0" bIns="0" anchor="t">
-            <a:spAutoFit/>
-          </a:bodyPr>
-          <a:lstStyle/>
-          <a:p>
-            <a:pPr algn="l"/>
-            <a:r>
-              <a:rPr sz="1150" b="1" i="0">
-                <a:solidFill>
-                  <a:srgbClr val="000000"/>
-                </a:solidFill>
-                <a:latin typeface="Arial"/>
-              </a:rPr>
-              <a:t>GEO SPLIT   </a:t>
-            </a:r>
-            <a:r>
-              <a:rPr sz="1000" b="1" i="0">
-                <a:solidFill>
-                  <a:srgbClr val="757575"/>
-                </a:solidFill>
-                <a:latin typeface="Arial"/>
-              </a:rPr>
-              <a:t>NOT AVAILABLE</a:t>
-            </a:r>
-          </a:p>
-        </p:txBody>
-      </p:sp>
-      <p:sp>
-        <p:nvSpPr>
-          <p:cNvPr id="15" name="TextBox 14"/>
-          <p:cNvSpPr txBox="1"/>
-          <p:nvPr/>
-        </p:nvSpPr>
-        <p:spPr>
-          <a:xfrm>
-            <a:off x="6519672" y="4325112"/>
-            <a:ext cx="4937760" cy="1371600"/>
-          </a:xfrm>
-          <a:prstGeom prst="rect">
-            <a:avLst/>
-          </a:prstGeom>
-          <a:noFill/>
-        </p:spPr>
-        <p:txBody>
-          <a:bodyPr wrap="square" lIns="0" tIns="0" rIns="0" bIns="0" anchor="t">
-            <a:spAutoFit/>
-          </a:bodyPr>
-          <a:lstStyle/>
-          <a:p>
-            <a:pPr algn="l">
-              <a:lnSpc>
-                <a:spcPct val="112000"/>
-              </a:lnSpc>
-            </a:pPr>
-            <a:r>
-              <a:rPr sz="1100" b="0" i="0">
-                <a:solidFill>
-                  <a:srgbClr val="333333"/>
-                </a:solidFill>
-                <a:latin typeface="Arial"/>
-              </a:rPr>
-              <a:t>Campaign reporting carries no regional dimension, so no geo-matched test was possible. A matched-market design on the next launch would give a second, model-free read on incrementality.</a:t>
-            </a:r>
-          </a:p>
-        </p:txBody>
-      </p:sp>
-      <p:sp>
-        <p:nvSpPr>
-          <p:cNvPr id="16" name="TextBox 15"/>
-          <p:cNvSpPr txBox="1"/>
-          <p:nvPr/>
-        </p:nvSpPr>
-        <p:spPr>
-          <a:xfrm>
-            <a:off x="502920" y="6510528"/>
-            <a:ext cx="10515600" cy="274320"/>
-          </a:xfrm>
-          <a:prstGeom prst="rect">
-            <a:avLst/>
-          </a:prstGeom>
-          <a:noFill/>
-        </p:spPr>
-        <p:txBody>
-          <a:bodyPr wrap="square" lIns="0" tIns="0" rIns="0" bIns="0" anchor="t">
-            <a:spAutoFit/>
-          </a:bodyPr>
-          <a:lstStyle/>
-          <a:p>
-            <a:pPr algn="l"/>
-            <a:r>
-              <a:rPr sz="800" b="0" i="0">
-                <a:solidFill>
-                  <a:srgbClr val="757575"/>
-                </a:solidFill>
-                <a:latin typeface="Arial"/>
-              </a:rPr>
-              <a:t>Salomon NA eCommerce · Vestal Pro launch readout · Illustrative synthetic case data · All lift figures are modeled estimates vs a no-campaign baseline</a:t>
-            </a:r>
-          </a:p>
-        </p:txBody>
-      </p:sp>
-      <p:sp>
-        <p:nvSpPr>
-          <p:cNvPr id="17" name="TextBox 16"/>
-          <p:cNvSpPr txBox="1"/>
-          <p:nvPr/>
-        </p:nvSpPr>
-        <p:spPr>
-          <a:xfrm>
-            <a:off x="11292840" y="6510528"/>
-            <a:ext cx="411480" cy="274320"/>
-          </a:xfrm>
-          <a:prstGeom prst="rect">
-            <a:avLst/>
-          </a:prstGeom>
-          <a:noFill/>
-        </p:spPr>
-        <p:txBody>
-          <a:bodyPr wrap="square" lIns="0" tIns="0" rIns="0" bIns="0" anchor="t">
-            <a:spAutoFit/>
-          </a:bodyPr>
-          <a:lstStyle/>
-          <a:p>
-            <a:pPr algn="r"/>
-            <a:r>
-              <a:rPr sz="800" b="0" i="0">
-                <a:solidFill>
-                  <a:srgbClr val="757575"/>
-                </a:solidFill>
-                <a:latin typeface="Arial"/>
-              </a:rPr>
-              <a:t>4</a:t>
-            </a:r>
-          </a:p>
-        </p:txBody>
-      </p:sp>
-      <p:pic>
-        <p:nvPicPr>
-          <p:cNvPr id="18" name="Picture 17" descr="salomon_wordmark_black.png"/>
           <p:cNvPicPr>
             <a:picLocks noChangeAspect="1"/>
           </p:cNvPicPr>
@@ -8577,7 +9075,7 @@
         </p:nvSpPr>
         <p:spPr>
           <a:xfrm>
-            <a:off x="502920" y="1481328"/>
+            <a:off x="502920" y="1493360"/>
             <a:ext cx="5394960" cy="274320"/>
           </a:xfrm>
           <a:prstGeom prst="rect">
@@ -11241,7 +11739,7 @@
         </p:blipFill>
         <p:spPr>
           <a:xfrm>
-            <a:off x="502919" y="1347909"/>
+            <a:off x="502919" y="1371973"/>
             <a:ext cx="8178093" cy="4639209"/>
           </a:xfrm>
           <a:prstGeom prst="rect">
@@ -11269,36 +11767,58 @@
           <a:prstGeom prst="rect">
             <a:avLst/>
           </a:prstGeom>
-          <a:noFill/>
-        </p:spPr>
+        </p:spPr>
+        <p:style>
+          <a:lnRef idx="1">
+            <a:schemeClr val="dk1"/>
+          </a:lnRef>
+          <a:fillRef idx="2">
+            <a:schemeClr val="dk1"/>
+          </a:fillRef>
+          <a:effectRef idx="1">
+            <a:schemeClr val="dk1"/>
+          </a:effectRef>
+          <a:fontRef idx="minor">
+            <a:schemeClr val="dk1"/>
+          </a:fontRef>
+        </p:style>
         <p:txBody>
           <a:bodyPr wrap="square" lIns="0" tIns="0" rIns="0" bIns="0" anchor="t">
             <a:spAutoFit/>
           </a:bodyPr>
           <a:lstStyle/>
           <a:p>
-            <a:pPr algn="l"/>
-            <a:r>
-              <a:rPr sz="950" b="1" i="0" dirty="0">
-                <a:solidFill>
-                  <a:srgbClr val="000000"/>
+            <a:pPr algn="ctr"/>
+            <a:r>
+              <a:rPr sz="950" i="0" dirty="0">
+                <a:solidFill>
+                  <a:schemeClr val="tx2">
+                    <a:lumMod val="50000"/>
+                    <a:lumOff val="50000"/>
+                  </a:schemeClr>
                 </a:solidFill>
                 <a:latin typeface="Arial"/>
               </a:rPr>
               <a:t>Campaign start · </a:t>
             </a:r>
             <a:r>
-              <a:rPr lang="en-US" sz="950" b="1" dirty="0">
-                <a:solidFill>
-                  <a:srgbClr val="000000"/>
+              <a:rPr lang="en-US" sz="950" dirty="0">
+                <a:solidFill>
+                  <a:schemeClr val="tx2">
+                    <a:lumMod val="50000"/>
+                    <a:lumOff val="50000"/>
+                  </a:schemeClr>
                 </a:solidFill>
                 <a:latin typeface="Arial"/>
               </a:rPr>
               <a:t>June 1</a:t>
             </a:r>
-            <a:endParaRPr sz="950" b="1" i="0" dirty="0">
+            <a:endParaRPr sz="950" i="0" dirty="0">
               <a:solidFill>
-                <a:srgbClr val="000000"/>
+                <a:schemeClr val="tx2">
+                  <a:lumMod val="50000"/>
+                  <a:lumOff val="50000"/>
+                </a:schemeClr>
               </a:solidFill>
               <a:latin typeface="Arial"/>
             </a:endParaRPr>
@@ -11416,27 +11936,46 @@
           <a:prstGeom prst="rect">
             <a:avLst/>
           </a:prstGeom>
-          <a:noFill/>
-        </p:spPr>
+        </p:spPr>
+        <p:style>
+          <a:lnRef idx="1">
+            <a:schemeClr val="dk1"/>
+          </a:lnRef>
+          <a:fillRef idx="2">
+            <a:schemeClr val="dk1"/>
+          </a:fillRef>
+          <a:effectRef idx="1">
+            <a:schemeClr val="dk1"/>
+          </a:effectRef>
+          <a:fontRef idx="minor">
+            <a:schemeClr val="dk1"/>
+          </a:fontRef>
+        </p:style>
         <p:txBody>
           <a:bodyPr wrap="square" lIns="0" tIns="0" rIns="0" bIns="0" anchor="t">
             <a:spAutoFit/>
           </a:bodyPr>
           <a:lstStyle/>
           <a:p>
-            <a:pPr algn="l"/>
-            <a:r>
-              <a:rPr lang="en-US" sz="950" b="1" i="0" dirty="0">
-                <a:solidFill>
-                  <a:srgbClr val="000000"/>
+            <a:pPr algn="ctr"/>
+            <a:r>
+              <a:rPr lang="en-US" sz="950" i="0" dirty="0">
+                <a:solidFill>
+                  <a:schemeClr val="tx2">
+                    <a:lumMod val="50000"/>
+                    <a:lumOff val="50000"/>
+                  </a:schemeClr>
                 </a:solidFill>
                 <a:latin typeface="Arial"/>
               </a:rPr>
               <a:t>Final comms</a:t>
             </a:r>
-            <a:endParaRPr sz="950" b="1" i="0" dirty="0">
+            <a:endParaRPr sz="950" i="0" dirty="0">
               <a:solidFill>
-                <a:srgbClr val="000000"/>
+                <a:schemeClr val="tx2">
+                  <a:lumMod val="50000"/>
+                  <a:lumOff val="50000"/>
+                </a:schemeClr>
               </a:solidFill>
               <a:latin typeface="Arial"/>
             </a:endParaRPr>
@@ -11785,8 +12324,21 @@
           <a:prstGeom prst="rect">
             <a:avLst/>
           </a:prstGeom>
-          <a:noFill/>
-        </p:spPr>
+        </p:spPr>
+        <p:style>
+          <a:lnRef idx="1">
+            <a:schemeClr val="dk1"/>
+          </a:lnRef>
+          <a:fillRef idx="2">
+            <a:schemeClr val="dk1"/>
+          </a:fillRef>
+          <a:effectRef idx="1">
+            <a:schemeClr val="dk1"/>
+          </a:effectRef>
+          <a:fontRef idx="minor">
+            <a:schemeClr val="dk1"/>
+          </a:fontRef>
+        </p:style>
         <p:txBody>
           <a:bodyPr wrap="square" lIns="0" tIns="0" rIns="0" bIns="0" anchor="t">
             <a:spAutoFit/>
@@ -11795,17 +12347,23 @@
           <a:p>
             <a:pPr algn="ctr"/>
             <a:r>
-              <a:rPr lang="en-US" sz="950" b="1" dirty="0">
-                <a:solidFill>
-                  <a:srgbClr val="000000"/>
+              <a:rPr lang="en-US" sz="950" dirty="0">
+                <a:solidFill>
+                  <a:schemeClr val="tx2">
+                    <a:lumMod val="50000"/>
+                    <a:lumOff val="50000"/>
+                  </a:schemeClr>
                 </a:solidFill>
                 <a:latin typeface="Arial"/>
               </a:rPr>
               <a:t>Incrementality Persists</a:t>
             </a:r>
-            <a:endParaRPr sz="950" b="1" i="0" dirty="0">
+            <a:endParaRPr sz="950" i="0" dirty="0">
               <a:solidFill>
-                <a:srgbClr val="000000"/>
+                <a:schemeClr val="tx2">
+                  <a:lumMod val="50000"/>
+                  <a:lumOff val="50000"/>
+                </a:schemeClr>
               </a:solidFill>
               <a:latin typeface="Arial"/>
             </a:endParaRPr>
@@ -12200,8 +12758,8 @@
         </p:nvSpPr>
         <p:spPr>
           <a:xfrm>
-            <a:off x="7774445" y="1880650"/>
-            <a:ext cx="4272519" cy="2935227"/>
+            <a:off x="7774445" y="2233767"/>
+            <a:ext cx="4272519" cy="2647456"/>
           </a:xfrm>
           <a:prstGeom prst="rect">
             <a:avLst/>
@@ -12213,31 +12771,6 @@
             <a:spAutoFit/>
           </a:bodyPr>
           <a:lstStyle/>
-          <a:p>
-            <a:pPr algn="ctr">
-              <a:lnSpc>
-                <a:spcPct val="112000"/>
-              </a:lnSpc>
-              <a:spcAft>
-                <a:spcPts val="900"/>
-              </a:spcAft>
-            </a:pPr>
-            <a:r>
-              <a:rPr lang="en-US" sz="1000" b="1" i="0" u="sng" dirty="0">
-                <a:solidFill>
-                  <a:srgbClr val="757575"/>
-                </a:solidFill>
-                <a:latin typeface="Arial"/>
-              </a:rPr>
-              <a:t>INCREMENTALITY BREAKDOWN</a:t>
-            </a:r>
-            <a:endParaRPr lang="en-US" sz="1100" b="0" i="0" u="sng" dirty="0">
-              <a:solidFill>
-                <a:srgbClr val="333333"/>
-              </a:solidFill>
-              <a:latin typeface="Arial"/>
-            </a:endParaRPr>
-          </a:p>
           <a:p>
             <a:pPr>
               <a:lnSpc>
@@ -12587,6 +13120,53 @@
               <a:rPr lang="en-US" sz="1100" dirty="0"/>
               <a:t>Primary Concern</a:t>
             </a:r>
+          </a:p>
+        </p:txBody>
+      </p:sp>
+      <p:sp>
+        <p:nvSpPr>
+          <p:cNvPr id="9" name="TextBox 8">
+            <a:extLst>
+              <a:ext uri="{FF2B5EF4-FFF2-40B4-BE49-F238E27FC236}">
+                <a16:creationId xmlns:a16="http://schemas.microsoft.com/office/drawing/2014/main" id="{6E232138-DFC6-EF7A-370B-04972780E333}"/>
+              </a:ext>
+            </a:extLst>
+          </p:cNvPr>
+          <p:cNvSpPr txBox="1"/>
+          <p:nvPr/>
+        </p:nvSpPr>
+        <p:spPr>
+          <a:xfrm>
+            <a:off x="7774445" y="1911952"/>
+            <a:ext cx="5394960" cy="161583"/>
+          </a:xfrm>
+          <a:prstGeom prst="rect">
+            <a:avLst/>
+          </a:prstGeom>
+          <a:noFill/>
+        </p:spPr>
+        <p:txBody>
+          <a:bodyPr wrap="square" lIns="0" tIns="0" rIns="0" bIns="0" anchor="t">
+            <a:spAutoFit/>
+          </a:bodyPr>
+          <a:lstStyle/>
+          <a:p>
+            <a:pPr algn="l"/>
+            <a:r>
+              <a:rPr lang="en-US" sz="1050" b="1" dirty="0">
+                <a:solidFill>
+                  <a:srgbClr val="757575"/>
+                </a:solidFill>
+                <a:latin typeface="Arial"/>
+              </a:rPr>
+              <a:t>INCREMENTALITY BREAKDOWN</a:t>
+            </a:r>
+            <a:endParaRPr sz="1050" b="1" i="0" dirty="0">
+              <a:solidFill>
+                <a:srgbClr val="757575"/>
+              </a:solidFill>
+              <a:latin typeface="Arial"/>
+            </a:endParaRPr>
           </a:p>
         </p:txBody>
       </p:sp>
@@ -14581,8 +15161,8 @@
         </p:nvSpPr>
         <p:spPr>
           <a:xfrm>
-            <a:off x="7817805" y="1915228"/>
-            <a:ext cx="3589511" cy="2292038"/>
+            <a:off x="7909069" y="2444115"/>
+            <a:ext cx="3589511" cy="1969770"/>
           </a:xfrm>
           <a:prstGeom prst="rect">
             <a:avLst/>
@@ -14594,49 +15174,6 @@
             <a:spAutoFit/>
           </a:bodyPr>
           <a:lstStyle/>
-          <a:p>
-            <a:pPr algn="ctr">
-              <a:lnSpc>
-                <a:spcPct val="112000"/>
-              </a:lnSpc>
-              <a:spcAft>
-                <a:spcPts val="900"/>
-              </a:spcAft>
-            </a:pPr>
-            <a:r>
-              <a:rPr lang="en-US" sz="1200" b="1" dirty="0">
-                <a:solidFill>
-                  <a:schemeClr val="tx2">
-                    <a:lumMod val="50000"/>
-                    <a:lumOff val="50000"/>
-                  </a:schemeClr>
-                </a:solidFill>
-                <a:latin typeface="Arial"/>
-              </a:rPr>
-              <a:t>LIFETIME VALUE</a:t>
-            </a:r>
-            <a:r>
-              <a:rPr lang="en-US" sz="1200" b="1" i="0" dirty="0">
-                <a:solidFill>
-                  <a:schemeClr val="tx2">
-                    <a:lumMod val="50000"/>
-                    <a:lumOff val="50000"/>
-                  </a:schemeClr>
-                </a:solidFill>
-                <a:latin typeface="Arial"/>
-              </a:rPr>
-              <a:t> BREAKDOWN</a:t>
-            </a:r>
-            <a:endParaRPr lang="en-US" sz="1200" b="1" dirty="0">
-              <a:solidFill>
-                <a:schemeClr val="tx2">
-                  <a:lumMod val="50000"/>
-                  <a:lumOff val="50000"/>
-                </a:schemeClr>
-              </a:solidFill>
-              <a:latin typeface="Arial"/>
-            </a:endParaRPr>
-          </a:p>
           <a:p>
             <a:pPr>
               <a:spcAft>
@@ -14798,6 +15335,53 @@
               <a:t>LTV forecast at $188 after 4 weeks (1.8x CAC)</a:t>
             </a:r>
             <a:endParaRPr lang="en-US" sz="1200" dirty="0">
+              <a:latin typeface="Arial"/>
+            </a:endParaRPr>
+          </a:p>
+        </p:txBody>
+      </p:sp>
+      <p:sp>
+        <p:nvSpPr>
+          <p:cNvPr id="6" name="TextBox 5">
+            <a:extLst>
+              <a:ext uri="{FF2B5EF4-FFF2-40B4-BE49-F238E27FC236}">
+                <a16:creationId xmlns:a16="http://schemas.microsoft.com/office/drawing/2014/main" id="{BD64A273-82C4-4482-7C3F-54AA497D6B79}"/>
+              </a:ext>
+            </a:extLst>
+          </p:cNvPr>
+          <p:cNvSpPr txBox="1"/>
+          <p:nvPr/>
+        </p:nvSpPr>
+        <p:spPr>
+          <a:xfrm>
+            <a:off x="7909069" y="2016692"/>
+            <a:ext cx="5394960" cy="161583"/>
+          </a:xfrm>
+          <a:prstGeom prst="rect">
+            <a:avLst/>
+          </a:prstGeom>
+          <a:noFill/>
+        </p:spPr>
+        <p:txBody>
+          <a:bodyPr wrap="square" lIns="0" tIns="0" rIns="0" bIns="0" anchor="t">
+            <a:spAutoFit/>
+          </a:bodyPr>
+          <a:lstStyle/>
+          <a:p>
+            <a:pPr algn="l"/>
+            <a:r>
+              <a:rPr lang="en-US" sz="1050" b="1" i="0" dirty="0">
+                <a:solidFill>
+                  <a:srgbClr val="757575"/>
+                </a:solidFill>
+                <a:latin typeface="Arial"/>
+              </a:rPr>
+              <a:t>LIFETIME VALUE FORECAST</a:t>
+            </a:r>
+            <a:endParaRPr sz="1050" b="1" i="0" dirty="0">
+              <a:solidFill>
+                <a:srgbClr val="757575"/>
+              </a:solidFill>
               <a:latin typeface="Arial"/>
             </a:endParaRPr>
           </a:p>
@@ -14838,6 +15422,36 @@
           <a:chExt cx="0" cy="0"/>
         </a:xfrm>
       </p:grpSpPr>
+      <p:pic>
+        <p:nvPicPr>
+          <p:cNvPr id="14" name="Picture 13" descr="The image shows a bar chart comparing actual revenue growth for adjacent categories (Adjacent-category revenue vs. expected baseline) in an active flight segment, with Trail Apparel and Trail Accessories, where the success criterion of a minimum 5% growth has been met, indicating significant positive results.&#10;&#10;AI-generated content may be incorrect.">
+            <a:extLst>
+              <a:ext uri="{FF2B5EF4-FFF2-40B4-BE49-F238E27FC236}">
+                <a16:creationId xmlns:a16="http://schemas.microsoft.com/office/drawing/2014/main" id="{4A335441-E4DE-8121-4407-C74C03AA7598}"/>
+              </a:ext>
+            </a:extLst>
+          </p:cNvPr>
+          <p:cNvPicPr>
+            <a:picLocks noChangeAspect="1"/>
+          </p:cNvPicPr>
+          <p:nvPr/>
+        </p:nvPicPr>
+        <p:blipFill>
+          <a:blip r:embed="rId2"/>
+          <a:stretch>
+            <a:fillRect/>
+          </a:stretch>
+        </p:blipFill>
+        <p:spPr>
+          <a:xfrm>
+            <a:off x="-1" y="1308688"/>
+            <a:ext cx="6832397" cy="4081459"/>
+          </a:xfrm>
+          <a:prstGeom prst="rect">
+            <a:avLst/>
+          </a:prstGeom>
+        </p:spPr>
+      </p:pic>
       <p:sp>
         <p:nvSpPr>
           <p:cNvPr id="2" name="TextBox 1"/>
@@ -14903,7 +15517,7 @@
                 </a:solidFill>
                 <a:latin typeface="Georgia"/>
               </a:rPr>
-              <a:t>Adjacent categories lifted +9%, but as standalone purchases, </a:t>
+              <a:t>Adjacent categories lifted +</a:t>
             </a:r>
             <a:r>
               <a:rPr lang="en-US" sz="2300" b="0" i="0" dirty="0">
@@ -14912,7 +15526,25 @@
                 </a:solidFill>
                 <a:latin typeface="Georgia"/>
               </a:rPr>
-              <a:t>bigger carts.</a:t>
+              <a:t>20</a:t>
+            </a:r>
+            <a:r>
+              <a:rPr sz="2300" b="0" i="0" dirty="0">
+                <a:solidFill>
+                  <a:srgbClr val="000000"/>
+                </a:solidFill>
+                <a:latin typeface="Georgia"/>
+              </a:rPr>
+              <a:t>%</a:t>
+            </a:r>
+            <a:r>
+              <a:rPr lang="en-US" sz="2300" b="0" i="0" dirty="0">
+                <a:solidFill>
+                  <a:srgbClr val="000000"/>
+                </a:solidFill>
+                <a:latin typeface="Georgia"/>
+              </a:rPr>
+              <a:t> driven by larger Vestal Pro carts</a:t>
             </a:r>
             <a:endParaRPr sz="2300" b="0" i="0" dirty="0">
               <a:solidFill>
@@ -14925,14 +15557,14 @@
       </p:sp>
       <p:sp>
         <p:nvSpPr>
-          <p:cNvPr id="4" name="TextBox 3"/>
+          <p:cNvPr id="7" name="TextBox 6"/>
           <p:cNvSpPr txBox="1"/>
           <p:nvPr/>
         </p:nvSpPr>
         <p:spPr>
           <a:xfrm>
-            <a:off x="502920" y="1481328"/>
-            <a:ext cx="6035040" cy="274320"/>
+            <a:off x="7086600" y="1355603"/>
+            <a:ext cx="4572000" cy="274320"/>
           </a:xfrm>
           <a:prstGeom prst="rect">
             <a:avLst/>
@@ -14953,39 +15585,21 @@
                 </a:solidFill>
                 <a:latin typeface="Arial"/>
               </a:rPr>
-              <a:t>ADJACENT-CATEGORY REVENUE VS EXPECTED BASELINE, ACTIVE FLIGHT</a:t>
-            </a:r>
-          </a:p>
-        </p:txBody>
-      </p:sp>
-      <p:graphicFrame>
-        <p:nvGraphicFramePr>
-          <p:cNvPr id="5" name="Chart 4"/>
-          <p:cNvGraphicFramePr>
-            <a:graphicFrameLocks noGrp="1"/>
-          </p:cNvGraphicFramePr>
-          <p:nvPr/>
-        </p:nvGraphicFramePr>
-        <p:xfrm>
-          <a:off x="365760" y="1828800"/>
-          <a:ext cx="6309360" cy="4023360"/>
-        </p:xfrm>
-        <a:graphic>
-          <a:graphicData uri="http://schemas.openxmlformats.org/drawingml/2006/chart">
-            <c:chart xmlns:c="http://schemas.openxmlformats.org/drawingml/2006/chart" xmlns:r="http://schemas.openxmlformats.org/officeDocument/2006/relationships" r:id="rId2"/>
-          </a:graphicData>
-        </a:graphic>
-      </p:graphicFrame>
-      <p:sp>
-        <p:nvSpPr>
-          <p:cNvPr id="6" name="TextBox 5"/>
+              <a:t>ATTACH RATE TO VESTAL PRO ORDERS</a:t>
+            </a:r>
+          </a:p>
+        </p:txBody>
+      </p:sp>
+      <p:sp>
+        <p:nvSpPr>
+          <p:cNvPr id="8" name="TextBox 7"/>
           <p:cNvSpPr txBox="1"/>
           <p:nvPr/>
         </p:nvSpPr>
         <p:spPr>
           <a:xfrm>
-            <a:off x="640080" y="5806440"/>
-            <a:ext cx="5852160" cy="320040"/>
+            <a:off x="7086600" y="1752361"/>
+            <a:ext cx="4572000" cy="523220"/>
           </a:xfrm>
           <a:prstGeom prst="rect">
             <a:avLst/>
@@ -15000,101 +15614,76 @@
           <a:p>
             <a:pPr algn="l"/>
             <a:r>
-              <a:rPr sz="1000" b="0" i="0">
+              <a:rPr lang="en-US" sz="3400" b="1" dirty="0">
+                <a:solidFill>
+                  <a:srgbClr val="333333"/>
+                </a:solidFill>
+                <a:latin typeface="Arial"/>
+              </a:rPr>
+              <a:t>21</a:t>
+            </a:r>
+            <a:r>
+              <a:rPr sz="3400" b="1" i="0" dirty="0">
+                <a:solidFill>
+                  <a:srgbClr val="333333"/>
+                </a:solidFill>
+                <a:latin typeface="Arial"/>
+              </a:rPr>
+              <a:t>.</a:t>
+            </a:r>
+            <a:r>
+              <a:rPr lang="en-US" sz="3400" b="1" i="0" dirty="0">
+                <a:solidFill>
+                  <a:srgbClr val="333333"/>
+                </a:solidFill>
+                <a:latin typeface="Arial"/>
+              </a:rPr>
+              <a:t>6</a:t>
+            </a:r>
+            <a:r>
+              <a:rPr sz="3400" b="1" i="0" dirty="0">
+                <a:solidFill>
+                  <a:srgbClr val="333333"/>
+                </a:solidFill>
+                <a:latin typeface="Arial"/>
+              </a:rPr>
+              <a:t>%</a:t>
+            </a:r>
+            <a:r>
+              <a:rPr sz="1300" b="0" i="0" dirty="0">
                 <a:solidFill>
                   <a:srgbClr val="757575"/>
                 </a:solidFill>
                 <a:latin typeface="Arial"/>
               </a:rPr>
-              <a:t>Success criterion ≥ +5%: </a:t>
-            </a:r>
-            <a:r>
-              <a:rPr sz="1000" b="1" i="0">
-                <a:solidFill>
-                  <a:srgbClr val="1F7A4D"/>
-                </a:solidFill>
-                <a:latin typeface="Arial"/>
-              </a:rPr>
-              <a:t>PASS</a:t>
-            </a:r>
-            <a:r>
-              <a:rPr sz="1000" b="0" i="0">
+              <a:t>   </a:t>
+            </a:r>
+            <a:r>
+              <a:rPr lang="en-US" sz="1300" b="0" i="0" dirty="0">
                 <a:solidFill>
                   <a:srgbClr val="757575"/>
                 </a:solidFill>
                 <a:latin typeface="Arial"/>
               </a:rPr>
-              <a:t>  (+9.2%, 95% CI +3.0% to +15.4% · +$7.9K)</a:t>
-            </a:r>
-          </a:p>
-        </p:txBody>
-      </p:sp>
-      <p:sp>
-        <p:nvSpPr>
-          <p:cNvPr id="7" name="TextBox 6"/>
-          <p:cNvSpPr txBox="1"/>
-          <p:nvPr/>
-        </p:nvSpPr>
-        <p:spPr>
-          <a:xfrm>
-            <a:off x="7086600" y="1481328"/>
-            <a:ext cx="4572000" cy="274320"/>
-          </a:xfrm>
-          <a:prstGeom prst="rect">
-            <a:avLst/>
-          </a:prstGeom>
-          <a:noFill/>
-        </p:spPr>
-        <p:txBody>
-          <a:bodyPr wrap="square" lIns="0" tIns="0" rIns="0" bIns="0" anchor="t">
-            <a:spAutoFit/>
-          </a:bodyPr>
-          <a:lstStyle/>
-          <a:p>
-            <a:pPr algn="l"/>
-            <a:r>
-              <a:rPr sz="1000" b="1" i="0">
+              <a:t>+4.1ppts</a:t>
+            </a:r>
+            <a:r>
+              <a:rPr sz="1300" b="0" i="0" dirty="0">
                 <a:solidFill>
                   <a:srgbClr val="757575"/>
                 </a:solidFill>
                 <a:latin typeface="Arial"/>
               </a:rPr>
-              <a:t>ATTACH RATE TO VESTAL PRO ORDERS</a:t>
-            </a:r>
-          </a:p>
-        </p:txBody>
-      </p:sp>
-      <p:sp>
-        <p:nvSpPr>
-          <p:cNvPr id="8" name="TextBox 7"/>
-          <p:cNvSpPr txBox="1"/>
-          <p:nvPr/>
-        </p:nvSpPr>
-        <p:spPr>
-          <a:xfrm>
-            <a:off x="7086600" y="1828800"/>
-            <a:ext cx="4572000" cy="523220"/>
-          </a:xfrm>
-          <a:prstGeom prst="rect">
-            <a:avLst/>
-          </a:prstGeom>
-          <a:noFill/>
-        </p:spPr>
-        <p:txBody>
-          <a:bodyPr wrap="square" lIns="0" tIns="0" rIns="0" bIns="0" anchor="t">
-            <a:spAutoFit/>
-          </a:bodyPr>
-          <a:lstStyle/>
-          <a:p>
-            <a:pPr algn="l"/>
-            <a:r>
-              <a:rPr sz="3400" b="1" i="0" dirty="0">
-                <a:solidFill>
-                  <a:srgbClr val="333333"/>
-                </a:solidFill>
-                <a:latin typeface="Arial"/>
-              </a:rPr>
-              <a:t>17.8%</a:t>
+              <a:t> vs </a:t>
+            </a:r>
+            <a:r>
+              <a:rPr lang="en-US" sz="1300" b="0" i="0" dirty="0">
+                <a:solidFill>
+                  <a:srgbClr val="757575"/>
+                </a:solidFill>
+                <a:latin typeface="Arial"/>
+              </a:rPr>
+              <a:t>17.5</a:t>
             </a:r>
             <a:r>
               <a:rPr sz="1300" b="0" i="0" dirty="0">
@@ -15103,7 +15692,7 @@
                 </a:solidFill>
                 <a:latin typeface="Arial"/>
               </a:rPr>
-              <a:t>   flat vs 18.0% </a:t>
+              <a:t>% </a:t>
             </a:r>
             <a:r>
               <a:rPr lang="en-US" sz="1300" b="0" i="0" dirty="0">
@@ -15114,12 +15703,6 @@
               </a:rPr>
               <a:t>historical average</a:t>
             </a:r>
-            <a:endParaRPr sz="1300" b="0" i="0" dirty="0">
-              <a:solidFill>
-                <a:srgbClr val="757575"/>
-              </a:solidFill>
-              <a:latin typeface="Arial"/>
-            </a:endParaRPr>
           </a:p>
         </p:txBody>
       </p:sp>
@@ -15131,8 +15714,8 @@
         </p:nvSpPr>
         <p:spPr>
           <a:xfrm>
-            <a:off x="7086600" y="2834640"/>
-            <a:ext cx="4572000" cy="1576585"/>
+            <a:off x="7079873" y="3158502"/>
+            <a:ext cx="4572000" cy="1378391"/>
           </a:xfrm>
           <a:prstGeom prst="rect">
             <a:avLst/>
@@ -15169,88 +15752,7 @@
                 </a:solidFill>
                 <a:latin typeface="Arial"/>
               </a:rPr>
-              <a:t>Halo effect </a:t>
-            </a:r>
-            <a:r>
-              <a:rPr lang="en-US" sz="1150" dirty="0">
-                <a:solidFill>
-                  <a:srgbClr val="333333"/>
-                </a:solidFill>
-                <a:latin typeface="Arial"/>
-              </a:rPr>
-              <a:t>realized through increased </a:t>
-            </a:r>
-            <a:r>
-              <a:rPr lang="en-US" sz="1150" b="1" dirty="0">
-                <a:solidFill>
-                  <a:srgbClr val="333333"/>
-                </a:solidFill>
-                <a:latin typeface="Arial"/>
-              </a:rPr>
-              <a:t>standalone accessory purchases</a:t>
-            </a:r>
-            <a:r>
-              <a:rPr lang="en-US" sz="1150" dirty="0">
-                <a:solidFill>
-                  <a:srgbClr val="333333"/>
-                </a:solidFill>
-                <a:latin typeface="Arial"/>
-              </a:rPr>
-              <a:t>, driven by </a:t>
-            </a:r>
-            <a:r>
-              <a:rPr sz="1150" b="0" i="0" dirty="0">
-                <a:solidFill>
-                  <a:srgbClr val="333333"/>
-                </a:solidFill>
-                <a:latin typeface="Arial"/>
-              </a:rPr>
-              <a:t>campaign </a:t>
-            </a:r>
-            <a:r>
-              <a:rPr sz="1150" b="1" i="0" dirty="0">
-                <a:solidFill>
-                  <a:srgbClr val="333333"/>
-                </a:solidFill>
-                <a:latin typeface="Arial"/>
-              </a:rPr>
-              <a:t>traffic </a:t>
-            </a:r>
-            <a:r>
-              <a:rPr sz="1150" b="0" i="0" dirty="0">
-                <a:solidFill>
-                  <a:srgbClr val="333333"/>
-                </a:solidFill>
-                <a:latin typeface="Arial"/>
-              </a:rPr>
-              <a:t>and </a:t>
-            </a:r>
-            <a:r>
-              <a:rPr lang="en-US" sz="1150" b="0" i="0" dirty="0">
-                <a:solidFill>
-                  <a:srgbClr val="333333"/>
-                </a:solidFill>
-                <a:latin typeface="Arial"/>
-              </a:rPr>
-              <a:t>brand </a:t>
-            </a:r>
-            <a:r>
-              <a:rPr sz="1150" b="1" i="0" dirty="0">
-                <a:solidFill>
-                  <a:srgbClr val="333333"/>
-                </a:solidFill>
-                <a:latin typeface="Arial"/>
-              </a:rPr>
-              <a:t>awareness</a:t>
-            </a:r>
-            <a:r>
-              <a:rPr lang="en-US" sz="1150" b="0" i="0" dirty="0">
-                <a:solidFill>
-                  <a:srgbClr val="333333"/>
-                </a:solidFill>
-                <a:latin typeface="Arial"/>
-              </a:rPr>
-              <a:t>.</a:t>
+              <a:t>Halo effect realized mostly through larger Vestal Pro carts. New buyers attached accessories at a higher rate. Standalone adjacent demand up only 1%. </a:t>
             </a:r>
             <a:endParaRPr sz="1150" b="0" i="0" dirty="0">
               <a:solidFill>
@@ -15275,8 +15777,77 @@
                 </a:solidFill>
                 <a:latin typeface="Arial"/>
               </a:rPr>
-              <a:t>•  Accessories led (+16.9%); apparel followed (+5.4%). Other footwear orders attached at the same 18% rate.</a:t>
-            </a:r>
+              <a:t>•  Accessories led (+</a:t>
+            </a:r>
+            <a:r>
+              <a:rPr lang="en-US" sz="1150" b="0" i="0" dirty="0">
+                <a:solidFill>
+                  <a:srgbClr val="333333"/>
+                </a:solidFill>
+                <a:latin typeface="Arial"/>
+              </a:rPr>
+              <a:t>2</a:t>
+            </a:r>
+            <a:r>
+              <a:rPr sz="1150" b="0" i="0" dirty="0">
+                <a:solidFill>
+                  <a:srgbClr val="333333"/>
+                </a:solidFill>
+                <a:latin typeface="Arial"/>
+              </a:rPr>
+              <a:t>6.</a:t>
+            </a:r>
+            <a:r>
+              <a:rPr lang="en-US" sz="1150" dirty="0">
+                <a:solidFill>
+                  <a:srgbClr val="333333"/>
+                </a:solidFill>
+                <a:latin typeface="Arial"/>
+              </a:rPr>
+              <a:t>5</a:t>
+            </a:r>
+            <a:r>
+              <a:rPr sz="1150" b="0" i="0" dirty="0">
+                <a:solidFill>
+                  <a:srgbClr val="333333"/>
+                </a:solidFill>
+                <a:latin typeface="Arial"/>
+              </a:rPr>
+              <a:t>%); apparel followed (+</a:t>
+            </a:r>
+            <a:r>
+              <a:rPr lang="en-US" sz="1150" b="0" i="0" dirty="0">
+                <a:solidFill>
+                  <a:srgbClr val="333333"/>
+                </a:solidFill>
+                <a:latin typeface="Arial"/>
+              </a:rPr>
+              <a:t>17.4</a:t>
+            </a:r>
+            <a:r>
+              <a:rPr sz="1150" b="0" i="0" dirty="0">
+                <a:solidFill>
+                  <a:srgbClr val="333333"/>
+                </a:solidFill>
+                <a:latin typeface="Arial"/>
+              </a:rPr>
+              <a:t>%). Other </a:t>
+            </a:r>
+            <a:r>
+              <a:rPr lang="en-US" sz="1150" b="0" i="0" dirty="0">
+                <a:solidFill>
+                  <a:srgbClr val="333333"/>
+                </a:solidFill>
+                <a:latin typeface="Arial"/>
+              </a:rPr>
+              <a:t>adjacent categories lifted at 20.3%</a:t>
+            </a:r>
+            <a:endParaRPr sz="1150" b="0" i="0" dirty="0">
+              <a:solidFill>
+                <a:srgbClr val="333333"/>
+              </a:solidFill>
+              <a:latin typeface="Arial"/>
+            </a:endParaRPr>
           </a:p>
           <a:p>
             <a:pPr algn="l">
@@ -15312,54 +15883,9 @@
                 </a:solidFill>
                 <a:latin typeface="Arial"/>
               </a:rPr>
-              <a:t>: PDP bundles (socks, </a:t>
-            </a:r>
-            <a:r>
-              <a:rPr lang="en-US" sz="1150" b="0" i="0" dirty="0">
-                <a:solidFill>
-                  <a:srgbClr val="333333"/>
-                </a:solidFill>
-                <a:latin typeface="Arial"/>
-              </a:rPr>
-              <a:t>jerseys</a:t>
-            </a:r>
-            <a:r>
-              <a:rPr sz="1150" b="0" i="0" dirty="0">
-                <a:solidFill>
-                  <a:srgbClr val="333333"/>
-                </a:solidFill>
-                <a:latin typeface="Arial"/>
-              </a:rPr>
-              <a:t>, hydration) and </a:t>
-            </a:r>
-            <a:r>
-              <a:rPr lang="en-US" sz="1150" b="0" i="0" dirty="0">
-                <a:solidFill>
-                  <a:srgbClr val="333333"/>
-                </a:solidFill>
-                <a:latin typeface="Arial"/>
-              </a:rPr>
-              <a:t>enhanced item-item recommendation</a:t>
-            </a:r>
-            <a:r>
-              <a:rPr lang="en-US" sz="1150" dirty="0">
-                <a:solidFill>
-                  <a:srgbClr val="333333"/>
-                </a:solidFill>
-                <a:latin typeface="Arial"/>
-              </a:rPr>
-              <a:t> systems </a:t>
-            </a:r>
-            <a:r>
-              <a:rPr lang="en-US" sz="1150" b="0" i="0" dirty="0">
-                <a:solidFill>
-                  <a:srgbClr val="333333"/>
-                </a:solidFill>
-                <a:latin typeface="Arial"/>
-              </a:rPr>
-              <a:t>to support ancillary products.</a:t>
-            </a:r>
-            <a:endParaRPr sz="1150" b="0" i="0" dirty="0">
+              <a:t>: </a:t>
+            </a:r>
+            <a:endParaRPr lang="en-US" sz="1150" dirty="0">
               <a:solidFill>
                 <a:srgbClr val="333333"/>
               </a:solidFill>
@@ -15462,6 +15988,175 @@
           </a:prstGeom>
         </p:spPr>
       </p:pic>
+      <p:sp>
+        <p:nvSpPr>
+          <p:cNvPr id="15" name="TextBox 14">
+            <a:extLst>
+              <a:ext uri="{FF2B5EF4-FFF2-40B4-BE49-F238E27FC236}">
+                <a16:creationId xmlns:a16="http://schemas.microsoft.com/office/drawing/2014/main" id="{1F40CD73-0872-1A2D-8929-3A1EC9B9F84C}"/>
+              </a:ext>
+            </a:extLst>
+          </p:cNvPr>
+          <p:cNvSpPr txBox="1"/>
+          <p:nvPr/>
+        </p:nvSpPr>
+        <p:spPr>
+          <a:xfrm>
+            <a:off x="7380662" y="4615964"/>
+            <a:ext cx="4117918" cy="1470724"/>
+          </a:xfrm>
+          <a:prstGeom prst="rect">
+            <a:avLst/>
+          </a:prstGeom>
+          <a:noFill/>
+        </p:spPr>
+        <p:txBody>
+          <a:bodyPr wrap="square" rtlCol="0">
+            <a:spAutoFit/>
+          </a:bodyPr>
+          <a:lstStyle/>
+          <a:p>
+            <a:pPr>
+              <a:lnSpc>
+                <a:spcPct val="112000"/>
+              </a:lnSpc>
+              <a:spcAft>
+                <a:spcPts val="800"/>
+              </a:spcAft>
+            </a:pPr>
+            <a:r>
+              <a:rPr lang="en-US" sz="1150" b="1" dirty="0">
+                <a:solidFill>
+                  <a:srgbClr val="333333"/>
+                </a:solidFill>
+                <a:latin typeface="Arial"/>
+              </a:rPr>
+              <a:t>PDP bundles </a:t>
+            </a:r>
+            <a:r>
+              <a:rPr lang="en-US" sz="1150" dirty="0">
+                <a:solidFill>
+                  <a:srgbClr val="333333"/>
+                </a:solidFill>
+                <a:latin typeface="Arial"/>
+              </a:rPr>
+              <a:t>(socks, jerseys, hydration) and enhanced item-item recommendation systems to support ancillary products.</a:t>
+            </a:r>
+          </a:p>
+          <a:p>
+            <a:pPr>
+              <a:lnSpc>
+                <a:spcPct val="112000"/>
+              </a:lnSpc>
+              <a:spcAft>
+                <a:spcPts val="800"/>
+              </a:spcAft>
+            </a:pPr>
+            <a:r>
+              <a:rPr lang="en-US" sz="1150" b="1" dirty="0">
+                <a:solidFill>
+                  <a:srgbClr val="333333"/>
+                </a:solidFill>
+                <a:latin typeface="Arial"/>
+              </a:rPr>
+              <a:t>Email &amp; CRM </a:t>
+            </a:r>
+            <a:r>
+              <a:rPr lang="en-US" sz="1150" dirty="0">
+                <a:solidFill>
+                  <a:srgbClr val="333333"/>
+                </a:solidFill>
+                <a:latin typeface="Arial"/>
+              </a:rPr>
+              <a:t>messaging to Vestal Pro customers supporting frequent follow-up purchase products.</a:t>
+            </a:r>
+          </a:p>
+          <a:p>
+            <a:pPr>
+              <a:lnSpc>
+                <a:spcPct val="112000"/>
+              </a:lnSpc>
+              <a:spcAft>
+                <a:spcPts val="800"/>
+              </a:spcAft>
+            </a:pPr>
+            <a:r>
+              <a:rPr lang="en-US" sz="1150" dirty="0">
+                <a:solidFill>
+                  <a:srgbClr val="333333"/>
+                </a:solidFill>
+                <a:latin typeface="Arial"/>
+              </a:rPr>
+              <a:t> </a:t>
+            </a:r>
+          </a:p>
+        </p:txBody>
+      </p:sp>
+      <p:sp>
+        <p:nvSpPr>
+          <p:cNvPr id="17" name="TextBox 16">
+            <a:extLst>
+              <a:ext uri="{FF2B5EF4-FFF2-40B4-BE49-F238E27FC236}">
+                <a16:creationId xmlns:a16="http://schemas.microsoft.com/office/drawing/2014/main" id="{CFD3317A-960A-E670-34EC-7362A111778B}"/>
+              </a:ext>
+            </a:extLst>
+          </p:cNvPr>
+          <p:cNvSpPr txBox="1"/>
+          <p:nvPr/>
+        </p:nvSpPr>
+        <p:spPr>
+          <a:xfrm>
+            <a:off x="7079161" y="2346028"/>
+            <a:ext cx="4572000" cy="523220"/>
+          </a:xfrm>
+          <a:prstGeom prst="rect">
+            <a:avLst/>
+          </a:prstGeom>
+          <a:noFill/>
+        </p:spPr>
+        <p:txBody>
+          <a:bodyPr wrap="square" lIns="0" tIns="0" rIns="0" bIns="0" anchor="t">
+            <a:spAutoFit/>
+          </a:bodyPr>
+          <a:lstStyle/>
+          <a:p>
+            <a:pPr algn="l"/>
+            <a:r>
+              <a:rPr lang="en-US" sz="3400" b="1" dirty="0">
+                <a:solidFill>
+                  <a:srgbClr val="333333"/>
+                </a:solidFill>
+                <a:latin typeface="Arial"/>
+              </a:rPr>
+              <a:t>$8.2K</a:t>
+            </a:r>
+            <a:r>
+              <a:rPr sz="1300" b="0" i="0" dirty="0">
+                <a:solidFill>
+                  <a:srgbClr val="757575"/>
+                </a:solidFill>
+                <a:latin typeface="Arial"/>
+              </a:rPr>
+              <a:t>   </a:t>
+            </a:r>
+            <a:r>
+              <a:rPr lang="en-US" sz="1300" dirty="0">
+                <a:solidFill>
+                  <a:srgbClr val="757575"/>
+                </a:solidFill>
+                <a:latin typeface="Arial"/>
+              </a:rPr>
+              <a:t>of incremental halo revenue</a:t>
+            </a:r>
+            <a:endParaRPr lang="en-US" sz="1300" b="0" i="0" dirty="0">
+              <a:solidFill>
+                <a:srgbClr val="757575"/>
+              </a:solidFill>
+              <a:latin typeface="Arial"/>
+            </a:endParaRPr>
+          </a:p>
+        </p:txBody>
+      </p:sp>
     </p:spTree>
   </p:cSld>
   <p:clrMapOvr>
@@ -15788,4 +16483,319 @@
   </a:objectDefaults>
   <a:extraClrSchemeLst/>
 </a:theme>
+</file>
+
+<file path=ppt/theme/theme2.xml><?xml version="1.0" encoding="utf-8"?>
+<a:theme xmlns:a="http://schemas.openxmlformats.org/drawingml/2006/main" name="Office Theme">
+  <a:themeElements>
+    <a:clrScheme name="Office">
+      <a:dk1>
+        <a:sysClr val="windowText" lastClr="000000"/>
+      </a:dk1>
+      <a:lt1>
+        <a:sysClr val="window" lastClr="FFFFFF"/>
+      </a:lt1>
+      <a:dk2>
+        <a:srgbClr val="0E2841"/>
+      </a:dk2>
+      <a:lt2>
+        <a:srgbClr val="E8E8E8"/>
+      </a:lt2>
+      <a:accent1>
+        <a:srgbClr val="156082"/>
+      </a:accent1>
+      <a:accent2>
+        <a:srgbClr val="E97132"/>
+      </a:accent2>
+      <a:accent3>
+        <a:srgbClr val="196B24"/>
+      </a:accent3>
+      <a:accent4>
+        <a:srgbClr val="0F9ED5"/>
+      </a:accent4>
+      <a:accent5>
+        <a:srgbClr val="A02B93"/>
+      </a:accent5>
+      <a:accent6>
+        <a:srgbClr val="4EA72E"/>
+      </a:accent6>
+      <a:hlink>
+        <a:srgbClr val="467886"/>
+      </a:hlink>
+      <a:folHlink>
+        <a:srgbClr val="96607D"/>
+      </a:folHlink>
+    </a:clrScheme>
+    <a:fontScheme name="Office">
+      <a:majorFont>
+        <a:latin typeface="Aptos Display" panose="02110004020202020204"/>
+        <a:ea typeface=""/>
+        <a:cs typeface=""/>
+        <a:font script="Jpan" typeface="游ゴシック Light"/>
+        <a:font script="Hang" typeface="맑은 고딕"/>
+        <a:font script="Hans" typeface="等线 Light"/>
+        <a:font script="Hant" typeface="新細明體"/>
+        <a:font script="Arab" typeface="Times New Roman"/>
+        <a:font script="Hebr" typeface="Times New Roman"/>
+        <a:font script="Thai" typeface="Angsana New"/>
+        <a:font script="Ethi" typeface="Nyala"/>
+        <a:font script="Beng" typeface="Vrinda"/>
+        <a:font script="Gujr" typeface="Shruti"/>
+        <a:font script="Khmr" typeface="MoolBoran"/>
+        <a:font script="Knda" typeface="Tunga"/>
+        <a:font script="Guru" typeface="Raavi"/>
+        <a:font script="Cans" typeface="Euphemia"/>
+        <a:font script="Cher" typeface="Plantagenet Cherokee"/>
+        <a:font script="Yiii" typeface="Microsoft Yi Baiti"/>
+        <a:font script="Tibt" typeface="Microsoft Himalaya"/>
+        <a:font script="Thaa" typeface="MV Boli"/>
+        <a:font script="Deva" typeface="Mangal"/>
+        <a:font script="Telu" typeface="Gautami"/>
+        <a:font script="Taml" typeface="Latha"/>
+        <a:font script="Syrc" typeface="Estrangelo Edessa"/>
+        <a:font script="Orya" typeface="Kalinga"/>
+        <a:font script="Mlym" typeface="Kartika"/>
+        <a:font script="Laoo" typeface="DokChampa"/>
+        <a:font script="Sinh" typeface="Iskoola Pota"/>
+        <a:font script="Mong" typeface="Mongolian Baiti"/>
+        <a:font script="Viet" typeface="Times New Roman"/>
+        <a:font script="Uigh" typeface="Microsoft Uighur"/>
+        <a:font script="Geor" typeface="Sylfaen"/>
+        <a:font script="Armn" typeface="Arial"/>
+        <a:font script="Bugi" typeface="Leelawadee UI"/>
+        <a:font script="Bopo" typeface="Microsoft JhengHei"/>
+        <a:font script="Java" typeface="Javanese Text"/>
+        <a:font script="Lisu" typeface="Segoe UI"/>
+        <a:font script="Mymr" typeface="Myanmar Text"/>
+        <a:font script="Nkoo" typeface="Ebrima"/>
+        <a:font script="Olck" typeface="Nirmala UI"/>
+        <a:font script="Osma" typeface="Ebrima"/>
+        <a:font script="Phag" typeface="Phagspa"/>
+        <a:font script="Syrn" typeface="Estrangelo Edessa"/>
+        <a:font script="Syrj" typeface="Estrangelo Edessa"/>
+        <a:font script="Syre" typeface="Estrangelo Edessa"/>
+        <a:font script="Sora" typeface="Nirmala UI"/>
+        <a:font script="Tale" typeface="Microsoft Tai Le"/>
+        <a:font script="Talu" typeface="Microsoft New Tai Lue"/>
+        <a:font script="Tfng" typeface="Ebrima"/>
+      </a:majorFont>
+      <a:minorFont>
+        <a:latin typeface="Aptos" panose="02110004020202020204"/>
+        <a:ea typeface=""/>
+        <a:cs typeface=""/>
+        <a:font script="Jpan" typeface="游ゴシック"/>
+        <a:font script="Hang" typeface="맑은 고딕"/>
+        <a:font script="Hans" typeface="等线"/>
+        <a:font script="Hant" typeface="新細明體"/>
+        <a:font script="Arab" typeface="Arial"/>
+        <a:font script="Hebr" typeface="Arial"/>
+        <a:font script="Thai" typeface="Cordia New"/>
+        <a:font script="Ethi" typeface="Nyala"/>
+        <a:font script="Beng" typeface="Vrinda"/>
+        <a:font script="Gujr" typeface="Shruti"/>
+        <a:font script="Khmr" typeface="DaunPenh"/>
+        <a:font script="Knda" typeface="Tunga"/>
+        <a:font script="Guru" typeface="Raavi"/>
+        <a:font script="Cans" typeface="Euphemia"/>
+        <a:font script="Cher" typeface="Plantagenet Cherokee"/>
+        <a:font script="Yiii" typeface="Microsoft Yi Baiti"/>
+        <a:font script="Tibt" typeface="Microsoft Himalaya"/>
+        <a:font script="Thaa" typeface="MV Boli"/>
+        <a:font script="Deva" typeface="Mangal"/>
+        <a:font script="Telu" typeface="Gautami"/>
+        <a:font script="Taml" typeface="Latha"/>
+        <a:font script="Syrc" typeface="Estrangelo Edessa"/>
+        <a:font script="Orya" typeface="Kalinga"/>
+        <a:font script="Mlym" typeface="Kartika"/>
+        <a:font script="Laoo" typeface="DokChampa"/>
+        <a:font script="Sinh" typeface="Iskoola Pota"/>
+        <a:font script="Mong" typeface="Mongolian Baiti"/>
+        <a:font script="Viet" typeface="Arial"/>
+        <a:font script="Uigh" typeface="Microsoft Uighur"/>
+        <a:font script="Geor" typeface="Sylfaen"/>
+        <a:font script="Armn" typeface="Arial"/>
+        <a:font script="Bugi" typeface="Leelawadee UI"/>
+        <a:font script="Bopo" typeface="Microsoft JhengHei"/>
+        <a:font script="Java" typeface="Javanese Text"/>
+        <a:font script="Lisu" typeface="Segoe UI"/>
+        <a:font script="Mymr" typeface="Myanmar Text"/>
+        <a:font script="Nkoo" typeface="Ebrima"/>
+        <a:font script="Olck" typeface="Nirmala UI"/>
+        <a:font script="Osma" typeface="Ebrima"/>
+        <a:font script="Phag" typeface="Phagspa"/>
+        <a:font script="Syrn" typeface="Estrangelo Edessa"/>
+        <a:font script="Syrj" typeface="Estrangelo Edessa"/>
+        <a:font script="Syre" typeface="Estrangelo Edessa"/>
+        <a:font script="Sora" typeface="Nirmala UI"/>
+        <a:font script="Tale" typeface="Microsoft Tai Le"/>
+        <a:font script="Talu" typeface="Microsoft New Tai Lue"/>
+        <a:font script="Tfng" typeface="Ebrima"/>
+      </a:minorFont>
+    </a:fontScheme>
+    <a:fmtScheme name="Office">
+      <a:fillStyleLst>
+        <a:solidFill>
+          <a:schemeClr val="phClr"/>
+        </a:solidFill>
+        <a:gradFill rotWithShape="1">
+          <a:gsLst>
+            <a:gs pos="0">
+              <a:schemeClr val="phClr">
+                <a:lumMod val="110000"/>
+                <a:satMod val="105000"/>
+                <a:tint val="67000"/>
+              </a:schemeClr>
+            </a:gs>
+            <a:gs pos="50000">
+              <a:schemeClr val="phClr">
+                <a:lumMod val="105000"/>
+                <a:satMod val="103000"/>
+                <a:tint val="73000"/>
+              </a:schemeClr>
+            </a:gs>
+            <a:gs pos="100000">
+              <a:schemeClr val="phClr">
+                <a:lumMod val="105000"/>
+                <a:satMod val="109000"/>
+                <a:tint val="81000"/>
+              </a:schemeClr>
+            </a:gs>
+          </a:gsLst>
+          <a:lin ang="5400000" scaled="0"/>
+        </a:gradFill>
+        <a:gradFill rotWithShape="1">
+          <a:gsLst>
+            <a:gs pos="0">
+              <a:schemeClr val="phClr">
+                <a:satMod val="103000"/>
+                <a:lumMod val="102000"/>
+                <a:tint val="94000"/>
+              </a:schemeClr>
+            </a:gs>
+            <a:gs pos="50000">
+              <a:schemeClr val="phClr">
+                <a:satMod val="110000"/>
+                <a:lumMod val="100000"/>
+                <a:shade val="100000"/>
+              </a:schemeClr>
+            </a:gs>
+            <a:gs pos="100000">
+              <a:schemeClr val="phClr">
+                <a:lumMod val="99000"/>
+                <a:satMod val="120000"/>
+                <a:shade val="78000"/>
+              </a:schemeClr>
+            </a:gs>
+          </a:gsLst>
+          <a:lin ang="5400000" scaled="0"/>
+        </a:gradFill>
+      </a:fillStyleLst>
+      <a:lnStyleLst>
+        <a:ln w="12700" cap="flat" cmpd="sng" algn="ctr">
+          <a:solidFill>
+            <a:schemeClr val="phClr"/>
+          </a:solidFill>
+          <a:prstDash val="solid"/>
+          <a:miter lim="800000"/>
+        </a:ln>
+        <a:ln w="19050" cap="flat" cmpd="sng" algn="ctr">
+          <a:solidFill>
+            <a:schemeClr val="phClr"/>
+          </a:solidFill>
+          <a:prstDash val="solid"/>
+          <a:miter lim="800000"/>
+        </a:ln>
+        <a:ln w="25400" cap="flat" cmpd="sng" algn="ctr">
+          <a:solidFill>
+            <a:schemeClr val="phClr"/>
+          </a:solidFill>
+          <a:prstDash val="solid"/>
+          <a:miter lim="800000"/>
+        </a:ln>
+      </a:lnStyleLst>
+      <a:effectStyleLst>
+        <a:effectStyle>
+          <a:effectLst/>
+        </a:effectStyle>
+        <a:effectStyle>
+          <a:effectLst/>
+        </a:effectStyle>
+        <a:effectStyle>
+          <a:effectLst>
+            <a:outerShdw blurRad="57150" dist="19050" dir="5400000" algn="ctr" rotWithShape="0">
+              <a:srgbClr val="000000">
+                <a:alpha val="63000"/>
+              </a:srgbClr>
+            </a:outerShdw>
+          </a:effectLst>
+        </a:effectStyle>
+      </a:effectStyleLst>
+      <a:bgFillStyleLst>
+        <a:solidFill>
+          <a:schemeClr val="phClr"/>
+        </a:solidFill>
+        <a:solidFill>
+          <a:schemeClr val="phClr">
+            <a:tint val="95000"/>
+            <a:satMod val="170000"/>
+          </a:schemeClr>
+        </a:solidFill>
+        <a:gradFill rotWithShape="1">
+          <a:gsLst>
+            <a:gs pos="0">
+              <a:schemeClr val="phClr">
+                <a:tint val="93000"/>
+                <a:satMod val="150000"/>
+                <a:shade val="98000"/>
+                <a:lumMod val="102000"/>
+              </a:schemeClr>
+            </a:gs>
+            <a:gs pos="50000">
+              <a:schemeClr val="phClr">
+                <a:tint val="98000"/>
+                <a:satMod val="130000"/>
+                <a:shade val="90000"/>
+                <a:lumMod val="103000"/>
+              </a:schemeClr>
+            </a:gs>
+            <a:gs pos="100000">
+              <a:schemeClr val="phClr">
+                <a:shade val="63000"/>
+                <a:satMod val="120000"/>
+              </a:schemeClr>
+            </a:gs>
+          </a:gsLst>
+          <a:lin ang="5400000" scaled="0"/>
+        </a:gradFill>
+      </a:bgFillStyleLst>
+    </a:fmtScheme>
+  </a:themeElements>
+  <a:objectDefaults>
+    <a:lnDef>
+      <a:spPr/>
+      <a:bodyPr/>
+      <a:lstStyle/>
+      <a:style>
+        <a:lnRef idx="2">
+          <a:schemeClr val="accent1"/>
+        </a:lnRef>
+        <a:fillRef idx="0">
+          <a:schemeClr val="accent1"/>
+        </a:fillRef>
+        <a:effectRef idx="1">
+          <a:schemeClr val="accent1"/>
+        </a:effectRef>
+        <a:fontRef idx="minor">
+          <a:schemeClr val="tx1"/>
+        </a:fontRef>
+      </a:style>
+    </a:lnDef>
+  </a:objectDefaults>
+  <a:extraClrSchemeLst/>
+  <a:extLst>
+    <a:ext uri="{05A4C25C-085E-4340-85A3-A5531E510DB2}">
+      <thm15:themeFamily xmlns:thm15="http://schemas.microsoft.com/office/thememl/2012/main" name="Office Theme" id="{2E142A2C-CD16-42D6-873A-C26D2A0506FA}" vid="{1BDDFF52-6CD6-40A5-AB3C-68EB2F1E4D0A}"/>
+    </a:ext>
+  </a:extLst>
+</a:theme>
 </file>
--- a/deliverables/VestalPro_Campaign_Readout.pptx
+++ b/deliverables/VestalPro_Campaign_Readout.pptx
@@ -5,7 +5,7 @@
     <p:sldMasterId id="2147483648" r:id="rId1"/>
   </p:sldMasterIdLst>
   <p:notesMasterIdLst>
-    <p:notesMasterId r:id="rId18"/>
+    <p:notesMasterId r:id="rId17"/>
   </p:notesMasterIdLst>
   <p:sldIdLst>
     <p:sldId id="256" r:id="rId2"/>
@@ -23,7 +23,6 @@
     <p:sldId id="268" r:id="rId14"/>
     <p:sldId id="272" r:id="rId15"/>
     <p:sldId id="269" r:id="rId16"/>
-    <p:sldId id="266" r:id="rId17"/>
   </p:sldIdLst>
   <p:sldSz cx="12192000" cy="6858000"/>
   <p:notesSz cx="6858000" cy="9144000"/>
@@ -168,6 +167,27 @@
 </p188:cmLst>
 </file>
 
+<file path=ppt/comments/modernComment_102_0.xml><?xml version="1.0" encoding="utf-8"?>
+<p188:cmLst xmlns:a="http://schemas.openxmlformats.org/drawingml/2006/main" xmlns:r="http://schemas.openxmlformats.org/officeDocument/2006/relationships" xmlns:p188="http://schemas.microsoft.com/office/powerpoint/2018/8/main">
+  <p188:cm id="{2532E033-8FC5-4A17-8ABC-1855FDCC5737}" authorId="{F7CB7528-0317-1151-A7B7-34D5B6A94F6F}" created="2026-07-18T22:30:59.564">
+    <pc:sldMkLst xmlns:pc="http://schemas.microsoft.com/office/powerpoint/2013/main/command">
+      <pc:docMk/>
+      <pc:sldMk cId="0" sldId="258"/>
+    </pc:sldMkLst>
+    <p188:txBody>
+      <a:bodyPr/>
+      <a:lstStyle/>
+      <a:p>
+        <a:r>
+          <a:rPr lang="en-US"/>
+          <a:t>Maybe too many words on this slide??</a:t>
+        </a:r>
+      </a:p>
+    </p188:txBody>
+  </p188:cm>
+</p188:cmLst>
+</file>
+
 <file path=ppt/comments/modernComment_111_F9A21C54.xml><?xml version="1.0" encoding="utf-8"?>
 <p188:cmLst xmlns:a="http://schemas.openxmlformats.org/drawingml/2006/main" xmlns:r="http://schemas.openxmlformats.org/officeDocument/2006/relationships" xmlns:p188="http://schemas.microsoft.com/office/powerpoint/2018/8/main">
   <p188:cm id="{B01D2F72-3A38-41AD-A3F8-C7F5E69541D1}" authorId="{F7CB7528-0317-1151-A7B7-34D5B6A94F6F}" created="2026-07-17T19:32:02.408">
@@ -616,6 +636,93 @@
     <p:extLst>
       <p:ext uri="{BB962C8B-B14F-4D97-AF65-F5344CB8AC3E}">
         <p14:creationId xmlns:p14="http://schemas.microsoft.com/office/powerpoint/2010/main" val="3239551481"/>
+      </p:ext>
+    </p:extLst>
+  </p:cSld>
+  <p:clrMapOvr>
+    <a:masterClrMapping/>
+  </p:clrMapOvr>
+</p:notes>
+</file>
+
+<file path=ppt/notesSlides/notesSlide2.xml><?xml version="1.0" encoding="utf-8"?>
+<p:notes xmlns:a="http://schemas.openxmlformats.org/drawingml/2006/main" xmlns:r="http://schemas.openxmlformats.org/officeDocument/2006/relationships" xmlns:p="http://schemas.openxmlformats.org/presentationml/2006/main">
+  <p:cSld>
+    <p:spTree>
+      <p:nvGrpSpPr>
+        <p:cNvPr id="1" name=""/>
+        <p:cNvGrpSpPr/>
+        <p:nvPr/>
+      </p:nvGrpSpPr>
+      <p:grpSpPr>
+        <a:xfrm>
+          <a:off x="0" y="0"/>
+          <a:ext cx="0" cy="0"/>
+          <a:chOff x="0" y="0"/>
+          <a:chExt cx="0" cy="0"/>
+        </a:xfrm>
+      </p:grpSpPr>
+      <p:sp>
+        <p:nvSpPr>
+          <p:cNvPr id="2" name="Slide Image Placeholder 1"/>
+          <p:cNvSpPr>
+            <a:spLocks noGrp="1" noRot="1" noChangeAspect="1"/>
+          </p:cNvSpPr>
+          <p:nvPr>
+            <p:ph type="sldImg"/>
+          </p:nvPr>
+        </p:nvSpPr>
+        <p:spPr/>
+      </p:sp>
+      <p:sp>
+        <p:nvSpPr>
+          <p:cNvPr id="3" name="Notes Placeholder 2"/>
+          <p:cNvSpPr>
+            <a:spLocks noGrp="1"/>
+          </p:cNvSpPr>
+          <p:nvPr>
+            <p:ph type="body" idx="1"/>
+          </p:nvPr>
+        </p:nvSpPr>
+        <p:spPr/>
+        <p:txBody>
+          <a:bodyPr/>
+          <a:lstStyle/>
+          <a:p>
+            <a:r>
+              <a:rPr lang="en-US" dirty="0"/>
+              <a:t>Weeks run from the June 1 launch; weeks 4–7 are post-campaign (Jun 21–Jul 19). Core-size availability = share of core sizes (M9–11, W7–9) in stock, daily average. PDP conversion = Vestal Pro units ÷ PDP views, 7-day average. Unmet demand = campaign-period conversion (4.6%) applied to weeks 4–7 PDP traffic, less actual units, at the $145 average selling price. Illustrative synthetic case data.</a:t>
+            </a:r>
+          </a:p>
+        </p:txBody>
+      </p:sp>
+      <p:sp>
+        <p:nvSpPr>
+          <p:cNvPr id="4" name="Slide Number Placeholder 3"/>
+          <p:cNvSpPr>
+            <a:spLocks noGrp="1"/>
+          </p:cNvSpPr>
+          <p:nvPr>
+            <p:ph type="sldNum" sz="quarter" idx="5"/>
+          </p:nvPr>
+        </p:nvSpPr>
+        <p:spPr/>
+        <p:txBody>
+          <a:bodyPr/>
+          <a:lstStyle/>
+          <a:p>
+            <a:fld id="{52C4B57B-4552-441A-AA75-72A3C605ADE9}" type="slidenum">
+              <a:rPr lang="en-US" smtClean="0"/>
+              <a:t>12</a:t>
+            </a:fld>
+            <a:endParaRPr lang="en-US"/>
+          </a:p>
+        </p:txBody>
+      </p:sp>
+    </p:spTree>
+    <p:extLst>
+      <p:ext uri="{BB962C8B-B14F-4D97-AF65-F5344CB8AC3E}">
+        <p14:creationId xmlns:p14="http://schemas.microsoft.com/office/powerpoint/2010/main" val="274521647"/>
       </p:ext>
     </p:extLst>
   </p:cSld>
@@ -5716,7 +5823,7 @@
           <p:nvPr/>
         </p:nvPicPr>
         <p:blipFill>
-          <a:blip r:embed="rId2"/>
+          <a:blip r:embed="rId3"/>
           <a:stretch>
             <a:fillRect/>
           </a:stretch>
@@ -5789,7 +5896,7 @@
         </p:nvSpPr>
         <p:spPr>
           <a:xfrm>
-            <a:off x="502920" y="566928"/>
+            <a:off x="502920" y="562478"/>
             <a:ext cx="11201400" cy="353943"/>
           </a:xfrm>
           <a:prstGeom prst="rect">
@@ -5830,8 +5937,8 @@
         </p:nvSpPr>
         <p:spPr>
           <a:xfrm>
-            <a:off x="7084194" y="1600774"/>
-            <a:ext cx="4572000" cy="3528210"/>
+            <a:off x="7011566" y="2241529"/>
+            <a:ext cx="4692754" cy="3138103"/>
           </a:xfrm>
           <a:prstGeom prst="rect">
             <a:avLst/>
@@ -5868,7 +5975,7 @@
                 </a:solidFill>
                 <a:latin typeface="Arial"/>
               </a:rPr>
-              <a:t>Inventory constraints (not demand)</a:t>
+              <a:t>Inventory (not demand)</a:t>
             </a:r>
             <a:r>
               <a:rPr lang="en-US" sz="1150" i="0" dirty="0">
@@ -5877,7 +5984,7 @@
                 </a:solidFill>
                 <a:latin typeface="Arial"/>
               </a:rPr>
-              <a:t> resulted in less demand capture. </a:t>
+              <a:t> constrained the campaign and demand capture. </a:t>
             </a:r>
             <a:r>
               <a:rPr lang="en-US" sz="1150" dirty="0">
@@ -5886,7 +5993,7 @@
                 </a:solidFill>
                 <a:latin typeface="Arial"/>
               </a:rPr>
-              <a:t>Core sizes fell below 90% threshold by week 3 of the campaign. </a:t>
+              <a:t>Core sizes fell below 90% threshold by week 3.</a:t>
             </a:r>
           </a:p>
           <a:p>
@@ -5905,14 +6012,27 @@
                 </a:solidFill>
                 <a:latin typeface="Arial"/>
               </a:rPr>
-              <a:t>• Unmet Demand: </a:t>
-            </a:r>
-            <a:endParaRPr lang="en-US" sz="1150" i="0" dirty="0">
-              <a:solidFill>
-                <a:srgbClr val="333333"/>
-              </a:solidFill>
-              <a:latin typeface="Arial"/>
-            </a:endParaRPr>
+              <a:t>• Conversion rate </a:t>
+            </a:r>
+            <a:r>
+              <a:rPr lang="en-US" sz="1150" dirty="0">
+                <a:solidFill>
+                  <a:srgbClr val="333333"/>
+                </a:solidFill>
+                <a:latin typeface="Arial"/>
+              </a:rPr>
+              <a:t>depression depressed from 4.6% </a:t>
+            </a:r>
+            <a:r>
+              <a:rPr lang="en-US" sz="1150" dirty="0">
+                <a:solidFill>
+                  <a:srgbClr val="333333"/>
+                </a:solidFill>
+                <a:latin typeface="Arial"/>
+                <a:sym typeface="Wingdings" panose="05000000000000000000" pitchFamily="2" charset="2"/>
+              </a:rPr>
+              <a:t> 3% due to inventory constraints. </a:t>
+            </a:r>
           </a:p>
           <a:p>
             <a:pPr>
@@ -5930,7 +6050,7 @@
                 </a:solidFill>
                 <a:latin typeface="Arial"/>
               </a:rPr>
-              <a:t>• Opportunity: </a:t>
+              <a:t>• Unmet Demand: </a:t>
             </a:r>
             <a:r>
               <a:rPr lang="en-US" sz="1150" dirty="0">
@@ -5939,17 +6059,11 @@
                 </a:solidFill>
                 <a:latin typeface="Arial"/>
               </a:rPr>
-              <a:t>Increase WOS purchasing plan on core sizes to create inventory buffer. </a:t>
-            </a:r>
-            <a:endParaRPr lang="en-US" sz="1150" i="0" dirty="0">
-              <a:solidFill>
-                <a:srgbClr val="333333"/>
-              </a:solidFill>
-              <a:latin typeface="Arial"/>
-            </a:endParaRPr>
-          </a:p>
-          <a:p>
-            <a:pPr algn="l">
+              <a:t>112 units // ~16.2K value, modeled through conversion drop from baseline.</a:t>
+            </a:r>
+          </a:p>
+          <a:p>
+            <a:pPr>
               <a:lnSpc>
                 <a:spcPct val="112000"/>
               </a:lnSpc>
@@ -5958,17 +6072,32 @@
               </a:spcAft>
             </a:pPr>
             <a:r>
-              <a:rPr sz="1150" b="0" i="0" dirty="0">
-                <a:solidFill>
-                  <a:srgbClr val="333333"/>
-                </a:solidFill>
-                <a:latin typeface="Arial"/>
-              </a:rPr>
-              <a:t>•  Vestal Pro sell-through conversion fell 35% (5.2% weeks 1–3 → 3.4% week 6) while paid media kept sending traffic.</a:t>
-            </a:r>
-          </a:p>
-          <a:p>
-            <a:pPr algn="l">
+              <a:rPr lang="en-US" sz="1150" b="1" dirty="0">
+                <a:solidFill>
+                  <a:srgbClr val="333333"/>
+                </a:solidFill>
+                <a:latin typeface="Arial"/>
+              </a:rPr>
+              <a:t>• No substitution offset </a:t>
+            </a:r>
+            <a:r>
+              <a:rPr lang="en-US" sz="1150" dirty="0">
+                <a:solidFill>
+                  <a:srgbClr val="333333"/>
+                </a:solidFill>
+                <a:latin typeface="Arial"/>
+              </a:rPr>
+              <a:t>counteracted lost Vestral Pro sales. Adjacent shoe categories held flat.</a:t>
+            </a:r>
+            <a:endParaRPr lang="en-US" sz="1150" i="0" dirty="0">
+              <a:solidFill>
+                <a:srgbClr val="333333"/>
+              </a:solidFill>
+              <a:latin typeface="Arial"/>
+            </a:endParaRPr>
+          </a:p>
+          <a:p>
+            <a:pPr>
               <a:lnSpc>
                 <a:spcPct val="112000"/>
               </a:lnSpc>
@@ -5977,17 +6106,40 @@
               </a:spcAft>
             </a:pPr>
             <a:r>
-              <a:rPr sz="1150" b="0" i="0" dirty="0">
-                <a:solidFill>
-                  <a:srgbClr val="333333"/>
-                </a:solidFill>
-                <a:latin typeface="Arial"/>
-              </a:rPr>
-              <a:t>•  Modeled unmet demand: ≈140 units, ≈$20.4K, from applying early-flight conversion to weeks 4–6 traffic.</a:t>
-            </a:r>
-          </a:p>
-          <a:p>
-            <a:pPr algn="l">
+              <a:rPr lang="en-US" sz="1150" b="1" dirty="0">
+                <a:solidFill>
+                  <a:srgbClr val="333333"/>
+                </a:solidFill>
+                <a:latin typeface="Arial"/>
+              </a:rPr>
+              <a:t>• Opportunity:</a:t>
+            </a:r>
+          </a:p>
+          <a:p>
+            <a:r>
+              <a:rPr lang="en-US" sz="1150" dirty="0">
+                <a:solidFill>
+                  <a:srgbClr val="333333"/>
+                </a:solidFill>
+                <a:latin typeface="Arial"/>
+              </a:rPr>
+              <a:t>    • Increase WOS purchasing plan on core sizes to create sales buffer.</a:t>
+            </a:r>
+          </a:p>
+          <a:p>
+            <a:r>
+              <a:rPr lang="en-US" sz="1150" dirty="0">
+                <a:solidFill>
+                  <a:srgbClr val="333333"/>
+                </a:solidFill>
+                <a:latin typeface="Arial"/>
+              </a:rPr>
+              <a:t>    • Tie inventory indicators to purchasing and paid media actions including replenishment triggers and paid spend throttling. </a:t>
+            </a:r>
+            <a:endParaRPr lang="en-US" sz="1200" dirty="0"/>
+          </a:p>
+          <a:p>
+            <a:pPr>
               <a:lnSpc>
                 <a:spcPct val="112000"/>
               </a:lnSpc>
@@ -5995,52 +6147,12 @@
                 <a:spcPts val="1000"/>
               </a:spcAft>
             </a:pPr>
-            <a:r>
-              <a:rPr sz="1150" b="0" i="0" dirty="0">
-                <a:solidFill>
-                  <a:srgbClr val="333333"/>
-                </a:solidFill>
-                <a:latin typeface="Arial"/>
-              </a:rPr>
-              <a:t>•  Site conversion followed: 2.52% week 1 → 2.23% week 6, below the 2.33% pre-period average.</a:t>
-            </a:r>
-          </a:p>
-          <a:p>
-            <a:pPr algn="l">
-              <a:lnSpc>
-                <a:spcPct val="112000"/>
-              </a:lnSpc>
-              <a:spcAft>
-                <a:spcPts val="1000"/>
-              </a:spcAft>
-            </a:pPr>
-            <a:r>
-              <a:rPr sz="1150" b="0" i="0" dirty="0">
-                <a:solidFill>
-                  <a:srgbClr val="333333"/>
-                </a:solidFill>
-                <a:latin typeface="Arial"/>
-              </a:rPr>
-              <a:t>•  </a:t>
-            </a:r>
-            <a:r>
-              <a:rPr sz="1150" b="0" i="0" dirty="0" err="1">
-                <a:solidFill>
-                  <a:srgbClr val="333333"/>
-                </a:solidFill>
-                <a:latin typeface="Arial"/>
-              </a:rPr>
-              <a:t>Speedcross</a:t>
-            </a:r>
-            <a:r>
-              <a:rPr sz="1150" b="0" i="0" dirty="0">
-                <a:solidFill>
-                  <a:srgbClr val="333333"/>
-                </a:solidFill>
-                <a:latin typeface="Arial"/>
-              </a:rPr>
-              <a:t> picked up +14% units as shoppers substituted — a partial, lower-price offset.</a:t>
-            </a:r>
+            <a:endParaRPr sz="1150" b="0" i="0" dirty="0">
+              <a:solidFill>
+                <a:srgbClr val="333333"/>
+              </a:solidFill>
+              <a:latin typeface="Arial"/>
+            </a:endParaRPr>
           </a:p>
         </p:txBody>
       </p:sp>
@@ -6123,7 +6235,7 @@
           <p:nvPr/>
         </p:nvPicPr>
         <p:blipFill>
-          <a:blip r:embed="rId3"/>
+          <a:blip r:embed="rId4"/>
           <a:stretch>
             <a:fillRect/>
           </a:stretch>
@@ -6340,6 +6452,153 @@
                 </a:solidFill>
               </a:rPr>
               <a:t>June 1  Campaign Start</a:t>
+            </a:r>
+          </a:p>
+        </p:txBody>
+      </p:sp>
+      <p:sp>
+        <p:nvSpPr>
+          <p:cNvPr id="27" name="TextBox 26">
+            <a:extLst>
+              <a:ext uri="{FF2B5EF4-FFF2-40B4-BE49-F238E27FC236}">
+                <a16:creationId xmlns:a16="http://schemas.microsoft.com/office/drawing/2014/main" id="{533385BE-5ABE-2284-3C03-5F02C31A420F}"/>
+              </a:ext>
+            </a:extLst>
+          </p:cNvPr>
+          <p:cNvSpPr txBox="1"/>
+          <p:nvPr/>
+        </p:nvSpPr>
+        <p:spPr>
+          <a:xfrm>
+            <a:off x="6908093" y="1828845"/>
+            <a:ext cx="2324995" cy="276999"/>
+          </a:xfrm>
+          <a:prstGeom prst="rect">
+            <a:avLst/>
+          </a:prstGeom>
+          <a:noFill/>
+        </p:spPr>
+        <p:txBody>
+          <a:bodyPr wrap="none" rtlCol="0">
+            <a:spAutoFit/>
+          </a:bodyPr>
+          <a:lstStyle/>
+          <a:p>
+            <a:r>
+              <a:rPr lang="en-US" sz="1200" b="1" dirty="0">
+                <a:solidFill>
+                  <a:schemeClr val="tx2">
+                    <a:lumMod val="50000"/>
+                    <a:lumOff val="50000"/>
+                  </a:schemeClr>
+                </a:solidFill>
+                <a:latin typeface="Arial" panose="020B0604020202020204" pitchFamily="34" charset="0"/>
+                <a:cs typeface="Arial" panose="020B0604020202020204" pitchFamily="34" charset="0"/>
+              </a:rPr>
+              <a:t>DEMAND OUTLIVED SUPPLY</a:t>
+            </a:r>
+          </a:p>
+        </p:txBody>
+      </p:sp>
+      <p:cxnSp>
+        <p:nvCxnSpPr>
+          <p:cNvPr id="36" name="Straight Arrow Connector 35">
+            <a:extLst>
+              <a:ext uri="{FF2B5EF4-FFF2-40B4-BE49-F238E27FC236}">
+                <a16:creationId xmlns:a16="http://schemas.microsoft.com/office/drawing/2014/main" id="{0E54AC80-F1C8-395A-031B-55B86C63EB0E}"/>
+              </a:ext>
+            </a:extLst>
+          </p:cNvPr>
+          <p:cNvCxnSpPr>
+            <a:cxnSpLocks/>
+          </p:cNvCxnSpPr>
+          <p:nvPr/>
+        </p:nvCxnSpPr>
+        <p:spPr>
+          <a:xfrm flipH="1">
+            <a:off x="2958912" y="1882171"/>
+            <a:ext cx="722945" cy="399580"/>
+          </a:xfrm>
+          <a:prstGeom prst="straightConnector1">
+            <a:avLst/>
+          </a:prstGeom>
+          <a:ln>
+            <a:solidFill>
+              <a:schemeClr val="tx2">
+                <a:lumMod val="50000"/>
+                <a:lumOff val="50000"/>
+              </a:schemeClr>
+            </a:solidFill>
+            <a:tailEnd type="triangle"/>
+          </a:ln>
+        </p:spPr>
+        <p:style>
+          <a:lnRef idx="2">
+            <a:schemeClr val="accent1"/>
+          </a:lnRef>
+          <a:fillRef idx="0">
+            <a:schemeClr val="accent1"/>
+          </a:fillRef>
+          <a:effectRef idx="1">
+            <a:schemeClr val="accent1"/>
+          </a:effectRef>
+          <a:fontRef idx="minor">
+            <a:schemeClr val="tx1"/>
+          </a:fontRef>
+        </p:style>
+      </p:cxnSp>
+      <p:sp>
+        <p:nvSpPr>
+          <p:cNvPr id="35" name="TextBox 34">
+            <a:extLst>
+              <a:ext uri="{FF2B5EF4-FFF2-40B4-BE49-F238E27FC236}">
+                <a16:creationId xmlns:a16="http://schemas.microsoft.com/office/drawing/2014/main" id="{0418E6C6-1DF5-6D65-7AF1-E25B0CA107E5}"/>
+              </a:ext>
+            </a:extLst>
+          </p:cNvPr>
+          <p:cNvSpPr txBox="1"/>
+          <p:nvPr/>
+        </p:nvSpPr>
+        <p:spPr>
+          <a:xfrm>
+            <a:off x="3621535" y="1611291"/>
+            <a:ext cx="1136954" cy="338554"/>
+          </a:xfrm>
+          <a:prstGeom prst="rect">
+            <a:avLst/>
+          </a:prstGeom>
+        </p:spPr>
+        <p:style>
+          <a:lnRef idx="1">
+            <a:schemeClr val="dk1"/>
+          </a:lnRef>
+          <a:fillRef idx="2">
+            <a:schemeClr val="dk1"/>
+          </a:fillRef>
+          <a:effectRef idx="1">
+            <a:schemeClr val="dk1"/>
+          </a:effectRef>
+          <a:fontRef idx="minor">
+            <a:schemeClr val="dk1"/>
+          </a:fontRef>
+        </p:style>
+        <p:txBody>
+          <a:bodyPr wrap="square" rtlCol="0">
+            <a:spAutoFit/>
+          </a:bodyPr>
+          <a:lstStyle/>
+          <a:p>
+            <a:pPr algn="ctr"/>
+            <a:r>
+              <a:rPr lang="en-US" sz="800" dirty="0">
+                <a:solidFill>
+                  <a:schemeClr val="tx2">
+                    <a:lumMod val="50000"/>
+                    <a:lumOff val="50000"/>
+                  </a:schemeClr>
+                </a:solidFill>
+              </a:rPr>
+              <a:t>Traffic follows paid media divestment</a:t>
             </a:r>
           </a:p>
         </p:txBody>
@@ -6378,7 +6637,7 @@
         <p:spPr>
           <a:xfrm>
             <a:off x="0" y="-6016"/>
-            <a:ext cx="12191695" cy="6858000"/>
+            <a:ext cx="12191695" cy="6864016"/>
           </a:xfrm>
           <a:prstGeom prst="rect">
             <a:avLst/>
@@ -6533,7 +6792,7 @@
         </p:nvSpPr>
         <p:spPr>
           <a:xfrm>
-            <a:off x="1417320" y="1618488"/>
+            <a:off x="1405288" y="1618488"/>
             <a:ext cx="9966960" cy="384657"/>
           </a:xfrm>
           <a:prstGeom prst="rect">
@@ -6559,25 +6818,16 @@
                 </a:solidFill>
                 <a:latin typeface="Arial"/>
               </a:rPr>
-              <a:t>Buy deeper on core sizes.  </a:t>
-            </a:r>
-            <a:r>
-              <a:rPr sz="1150" b="0" i="0" dirty="0">
+              <a:t>Buy deeper on core sizes</a:t>
+            </a:r>
+            <a:r>
+              <a:rPr lang="en-US" sz="1150" dirty="0">
                 <a:solidFill>
                   <a:srgbClr val="BFD5ED"/>
                 </a:solidFill>
                 <a:latin typeface="Arial"/>
               </a:rPr>
-              <a:t>Week-3 depletion of M9–11 / W7–9 cost ≈140 units (≈$20K) and dragged site conversion below baseline by week 6.</a:t>
-            </a:r>
-            <a:r>
-              <a:rPr lang="en-US" sz="1150" b="0" i="0" dirty="0">
-                <a:solidFill>
-                  <a:srgbClr val="BFD5ED"/>
-                </a:solidFill>
-                <a:latin typeface="Arial"/>
-              </a:rPr>
-              <a:t> Increasing WOS purchasing plan on core sizes will support additional demand. </a:t>
+              <a:t> and replenish behind the launch. Core-size availability broke 90% in week 2 and bottomed near 43%, costing ≈112 units (≈$16.2K). Increase the WOS purchasing plan on core sizes and trigger replenishment order when ATS breaks threshold.</a:t>
             </a:r>
             <a:endParaRPr sz="1150" b="0" i="0" dirty="0">
               <a:solidFill>
@@ -6632,7 +6882,7 @@
         <p:spPr>
           <a:xfrm>
             <a:off x="1417320" y="2404872"/>
-            <a:ext cx="9966960" cy="749808"/>
+            <a:ext cx="9966960" cy="384657"/>
           </a:xfrm>
           <a:prstGeom prst="rect">
             <a:avLst/>
@@ -6651,41 +6901,29 @@
               </a:lnSpc>
             </a:pPr>
             <a:r>
-              <a:rPr sz="1250" b="1" i="0" dirty="0">
+              <a:rPr lang="en-US" sz="1250" b="1" i="0" dirty="0">
                 <a:solidFill>
                   <a:srgbClr val="FFFFFF"/>
                 </a:solidFill>
                 <a:latin typeface="Arial"/>
               </a:rPr>
-              <a:t>Tie paid media to inventory signals.  </a:t>
-            </a:r>
-            <a:r>
-              <a:rPr sz="1150" b="0" i="0" dirty="0">
+              <a:t>Gate and rebalance paid media.</a:t>
+            </a:r>
+            <a:r>
+              <a:rPr lang="en-US" sz="1150" dirty="0">
                 <a:solidFill>
                   <a:srgbClr val="BFD5ED"/>
                 </a:solidFill>
                 <a:latin typeface="Arial"/>
               </a:rPr>
-              <a:t>Throttle prospecting when core-size availability drops below 80%. Paid social ran 59% of budget at 0.3× </a:t>
-            </a:r>
-            <a:r>
-              <a:rPr sz="1150" b="0" i="0" dirty="0" err="1">
-                <a:solidFill>
-                  <a:srgbClr val="BFD5ED"/>
-                </a:solidFill>
-                <a:latin typeface="Arial"/>
-              </a:rPr>
-              <a:t>iROAS</a:t>
-            </a:r>
-            <a:r>
-              <a:rPr sz="1150" b="0" i="0" dirty="0">
-                <a:solidFill>
-                  <a:srgbClr val="BFD5ED"/>
-                </a:solidFill>
-                <a:latin typeface="Arial"/>
-              </a:rPr>
-              <a:t> into a constrained assortment; reallocate mid-flight to CRM and search.</a:t>
-            </a:r>
+              <a:t> Tie spend to inventory signals. Throttle when core availability breaks 90% rather than pushing traffic into a broken size curve. 41% of new customers at $151 CAC vs $188 early value; set the CAC target pre-launch and add a day-90 LTV readout.</a:t>
+            </a:r>
+            <a:endParaRPr sz="1150" b="0" i="0" dirty="0">
+              <a:solidFill>
+                <a:srgbClr val="BFD5ED"/>
+              </a:solidFill>
+              <a:latin typeface="Arial"/>
+            </a:endParaRPr>
           </a:p>
         </p:txBody>
       </p:sp>
@@ -6733,7 +6971,7 @@
         <p:spPr>
           <a:xfrm>
             <a:off x="1417320" y="3191256"/>
-            <a:ext cx="9966960" cy="749808"/>
+            <a:ext cx="9966960" cy="384657"/>
           </a:xfrm>
           <a:prstGeom prst="rect">
             <a:avLst/>
@@ -6758,17 +6996,23 @@
                 </a:solidFill>
                 <a:latin typeface="Arial"/>
               </a:rPr>
-              <a:t>Judge paid social on acquisition economics, not last-click revenue.  </a:t>
-            </a:r>
-            <a:r>
-              <a:rPr sz="1150" b="0" i="0" dirty="0">
+              <a:t>Judge paid social on acquisition economics, not last-click revenue. </a:t>
+            </a:r>
+            <a:r>
+              <a:rPr lang="en-US" sz="1150" dirty="0">
                 <a:solidFill>
                   <a:srgbClr val="BFD5ED"/>
                 </a:solidFill>
                 <a:latin typeface="Arial"/>
               </a:rPr>
-              <a:t>It delivered 42% of new customers at $147 CAC against $212 early customer value. Set a CAC target pre-launch and add a day-90 LTV readout.</a:t>
-            </a:r>
+              <a:t>41% of new customers at $151 CAC vs $188 early value; set the CAC target pre-launch and add a day-90 LTV forecast.</a:t>
+            </a:r>
+            <a:endParaRPr sz="1150" b="0" i="0" dirty="0">
+              <a:solidFill>
+                <a:srgbClr val="BFD5ED"/>
+              </a:solidFill>
+              <a:latin typeface="Arial"/>
+            </a:endParaRPr>
           </a:p>
         </p:txBody>
       </p:sp>
@@ -6844,14 +7088,14 @@
       </p:sp>
       <p:sp>
         <p:nvSpPr>
-          <p:cNvPr id="14" name="TextBox 13"/>
+          <p:cNvPr id="16" name="TextBox 15"/>
           <p:cNvSpPr txBox="1"/>
           <p:nvPr/>
         </p:nvSpPr>
         <p:spPr>
           <a:xfrm>
-            <a:off x="1417320" y="3959352"/>
-            <a:ext cx="9966960" cy="749808"/>
+            <a:off x="1417320" y="4713009"/>
+            <a:ext cx="9966960" cy="384657"/>
           </a:xfrm>
           <a:prstGeom prst="rect">
             <a:avLst/>
@@ -6864,42 +7108,48 @@
           </a:bodyPr>
           <a:lstStyle/>
           <a:p>
-            <a:pPr algn="l">
+            <a:pPr>
               <a:lnSpc>
                 <a:spcPct val="108000"/>
               </a:lnSpc>
             </a:pPr>
             <a:r>
-              <a:rPr sz="1250" b="1" i="0" dirty="0">
+              <a:rPr lang="en-US" sz="1250" b="1" dirty="0">
                 <a:solidFill>
                   <a:srgbClr val="FFFFFF"/>
                 </a:solidFill>
                 <a:latin typeface="Arial"/>
               </a:rPr>
-              <a:t>Convert the halo into baskets.  </a:t>
-            </a:r>
-            <a:r>
-              <a:rPr sz="1150" b="0" i="0" dirty="0">
+              <a:t>Support additional halo effects. </a:t>
+            </a:r>
+            <a:r>
+              <a:rPr lang="en-US" sz="1150" dirty="0">
                 <a:solidFill>
                   <a:srgbClr val="BFD5ED"/>
                 </a:solidFill>
                 <a:latin typeface="Arial"/>
               </a:rPr>
-              <a:t>Adjacent demand lifted +9% but attach to Vestal Pro orders stayed flat at 18%. Bundle socks and accessories at PDP and activate the 2,776 email / 1,447 SMS adds on cross-category journeys.</a:t>
-            </a:r>
-          </a:p>
-        </p:txBody>
-      </p:sp>
-      <p:sp>
-        <p:nvSpPr>
-          <p:cNvPr id="15" name="TextBox 14"/>
+              <a:t>Double down on PDP bundles and item-item recommendations. Message buyers to push cross selling-products and common follow-up purchases.</a:t>
+            </a:r>
+            <a:endParaRPr sz="1150" b="0" i="0" dirty="0">
+              <a:solidFill>
+                <a:srgbClr val="BFD5ED"/>
+              </a:solidFill>
+              <a:latin typeface="Arial"/>
+            </a:endParaRPr>
+          </a:p>
+        </p:txBody>
+      </p:sp>
+      <p:sp>
+        <p:nvSpPr>
+          <p:cNvPr id="17" name="TextBox 16"/>
           <p:cNvSpPr txBox="1"/>
           <p:nvPr/>
         </p:nvSpPr>
         <p:spPr>
           <a:xfrm>
-            <a:off x="822960" y="5532120"/>
-            <a:ext cx="502920" cy="731520"/>
+            <a:off x="822960" y="6510528"/>
+            <a:ext cx="10515600" cy="123111"/>
           </a:xfrm>
           <a:prstGeom prst="rect">
             <a:avLst/>
@@ -6914,96 +7164,13 @@
           <a:p>
             <a:pPr algn="l"/>
             <a:r>
-              <a:rPr sz="2000" b="1" i="0">
-                <a:solidFill>
-                  <a:srgbClr val="0057B8"/>
-                </a:solidFill>
-                <a:latin typeface="Arial"/>
-              </a:rPr>
-              <a:t>6</a:t>
-            </a:r>
-          </a:p>
-        </p:txBody>
-      </p:sp>
-      <p:sp>
-        <p:nvSpPr>
-          <p:cNvPr id="16" name="TextBox 15"/>
-          <p:cNvSpPr txBox="1"/>
-          <p:nvPr/>
-        </p:nvSpPr>
-        <p:spPr>
-          <a:xfrm>
-            <a:off x="1417320" y="4713009"/>
-            <a:ext cx="9966960" cy="749808"/>
-          </a:xfrm>
-          <a:prstGeom prst="rect">
-            <a:avLst/>
-          </a:prstGeom>
-          <a:noFill/>
-        </p:spPr>
-        <p:txBody>
-          <a:bodyPr wrap="square" lIns="0" tIns="0" rIns="0" bIns="0" anchor="t">
-            <a:spAutoFit/>
-          </a:bodyPr>
-          <a:lstStyle/>
-          <a:p>
-            <a:pPr algn="l">
-              <a:lnSpc>
-                <a:spcPct val="108000"/>
-              </a:lnSpc>
-            </a:pPr>
-            <a:r>
-              <a:rPr sz="1250" b="1" i="0" dirty="0">
-                <a:solidFill>
-                  <a:srgbClr val="FFFFFF"/>
-                </a:solidFill>
-                <a:latin typeface="Arial"/>
-              </a:rPr>
-              <a:t>Instrument incrementality before launch day.  </a:t>
-            </a:r>
-            <a:r>
-              <a:rPr sz="1150" b="0" i="0" dirty="0">
-                <a:solidFill>
-                  <a:srgbClr val="BFD5ED"/>
-                </a:solidFill>
-                <a:latin typeface="Arial"/>
-              </a:rPr>
-              <a:t>Field a CRM holdout and a geo split, set numeric revenue / CAC / database targets, and track COGS and unsubscribes so the next readout measures margin, not proxies.</a:t>
-            </a:r>
-          </a:p>
-        </p:txBody>
-      </p:sp>
-      <p:sp>
-        <p:nvSpPr>
-          <p:cNvPr id="17" name="TextBox 16"/>
-          <p:cNvSpPr txBox="1"/>
-          <p:nvPr/>
-        </p:nvSpPr>
-        <p:spPr>
-          <a:xfrm>
-            <a:off x="822960" y="6510528"/>
-            <a:ext cx="10515600" cy="274320"/>
-          </a:xfrm>
-          <a:prstGeom prst="rect">
-            <a:avLst/>
-          </a:prstGeom>
-          <a:noFill/>
-        </p:spPr>
-        <p:txBody>
-          <a:bodyPr wrap="square" lIns="0" tIns="0" rIns="0" bIns="0" anchor="t">
-            <a:spAutoFit/>
-          </a:bodyPr>
-          <a:lstStyle/>
-          <a:p>
-            <a:pPr algn="l"/>
-            <a:r>
-              <a:rPr sz="800" b="0" i="0">
+              <a:rPr sz="800" b="0" i="0" dirty="0">
                 <a:solidFill>
                   <a:srgbClr val="757575"/>
                 </a:solidFill>
                 <a:latin typeface="Arial"/>
               </a:rPr>
-              <a:t>Salomon NA eCommerce · Vestal Pro launch readout · Illustrative synthetic case data</a:t>
+              <a:t>Salomon NA eCommerce · Vestal Pro launch readout</a:t>
             </a:r>
           </a:p>
         </p:txBody>
@@ -7034,10 +7201,10 @@
       </p:pic>
       <p:sp>
         <p:nvSpPr>
-          <p:cNvPr id="20" name="TextBox 19">
+          <p:cNvPr id="22" name="TextBox 21">
             <a:extLst>
               <a:ext uri="{FF2B5EF4-FFF2-40B4-BE49-F238E27FC236}">
-                <a16:creationId xmlns:a16="http://schemas.microsoft.com/office/drawing/2014/main" id="{EF101A08-7E0C-FE45-00DE-CFBC781E078C}"/>
+                <a16:creationId xmlns:a16="http://schemas.microsoft.com/office/drawing/2014/main" id="{79E99627-A663-9D03-0D57-4198FBF9A0FD}"/>
               </a:ext>
             </a:extLst>
           </p:cNvPr>
@@ -7046,8 +7213,8 @@
         </p:nvSpPr>
         <p:spPr>
           <a:xfrm>
-            <a:off x="1417320" y="5513832"/>
-            <a:ext cx="9966960" cy="192297"/>
+            <a:off x="1411304" y="3959352"/>
+            <a:ext cx="9966960" cy="384657"/>
           </a:xfrm>
           <a:prstGeom prst="rect">
             <a:avLst/>
@@ -7060,7 +7227,7 @@
           </a:bodyPr>
           <a:lstStyle/>
           <a:p>
-            <a:pPr algn="l">
+            <a:pPr>
               <a:lnSpc>
                 <a:spcPct val="108000"/>
               </a:lnSpc>
@@ -7072,7 +7239,25 @@
                 </a:solidFill>
                 <a:latin typeface="Arial"/>
               </a:rPr>
-              <a:t>CANNIBALIZATION??????????</a:t>
+              <a:t>Cannibalization Management</a:t>
+            </a:r>
+            <a:r>
+              <a:rPr sz="1250" b="1" i="0" dirty="0">
+                <a:solidFill>
+                  <a:srgbClr val="FFFFFF"/>
+                </a:solidFill>
+                <a:latin typeface="Arial"/>
+              </a:rPr>
+              <a:t>. </a:t>
+            </a:r>
+            <a:r>
+              <a:rPr lang="en-US" sz="1150" dirty="0">
+                <a:solidFill>
+                  <a:srgbClr val="BFD5ED"/>
+                </a:solidFill>
+                <a:latin typeface="Arial"/>
+              </a:rPr>
+              <a:t>~28% of Vestal Pro units shifted from existing shoes displacing with $30.5K.  Next launch, improve product positioning, communication, and audience separation against overlapping models. Monitor cannibalization throughout campaign.</a:t>
             </a:r>
             <a:endParaRPr sz="1150" b="0" i="0" dirty="0">
               <a:solidFill>
@@ -7556,1424 +7741,6 @@
 </p:sld>
 </file>
 
-<file path=ppt/slides/slide16.xml><?xml version="1.0" encoding="utf-8"?>
-<p:sld xmlns:a="http://schemas.openxmlformats.org/drawingml/2006/main" xmlns:r="http://schemas.openxmlformats.org/officeDocument/2006/relationships" xmlns:p="http://schemas.openxmlformats.org/presentationml/2006/main">
-  <p:cSld>
-    <p:spTree>
-      <p:nvGrpSpPr>
-        <p:cNvPr id="1" name=""/>
-        <p:cNvGrpSpPr/>
-        <p:nvPr/>
-      </p:nvGrpSpPr>
-      <p:grpSpPr>
-        <a:xfrm>
-          <a:off x="0" y="0"/>
-          <a:ext cx="0" cy="0"/>
-          <a:chOff x="0" y="0"/>
-          <a:chExt cx="0" cy="0"/>
-        </a:xfrm>
-      </p:grpSpPr>
-      <p:sp>
-        <p:nvSpPr>
-          <p:cNvPr id="2" name="TextBox 1"/>
-          <p:cNvSpPr txBox="1"/>
-          <p:nvPr/>
-        </p:nvSpPr>
-        <p:spPr>
-          <a:xfrm>
-            <a:off x="502920" y="292608"/>
-            <a:ext cx="11155680" cy="274320"/>
-          </a:xfrm>
-          <a:prstGeom prst="rect">
-            <a:avLst/>
-          </a:prstGeom>
-          <a:noFill/>
-        </p:spPr>
-        <p:txBody>
-          <a:bodyPr wrap="square" lIns="0" tIns="0" rIns="0" bIns="0" anchor="t">
-            <a:spAutoFit/>
-          </a:bodyPr>
-          <a:lstStyle/>
-          <a:p>
-            <a:pPr algn="l"/>
-            <a:r>
-              <a:rPr sz="1050" b="1" i="0">
-                <a:solidFill>
-                  <a:srgbClr val="757575"/>
-                </a:solidFill>
-                <a:latin typeface="Arial"/>
-              </a:rPr>
-              <a:t>GUARDRAIL SCORECARD</a:t>
-            </a:r>
-          </a:p>
-        </p:txBody>
-      </p:sp>
-      <p:sp>
-        <p:nvSpPr>
-          <p:cNvPr id="3" name="TextBox 2"/>
-          <p:cNvSpPr txBox="1"/>
-          <p:nvPr/>
-        </p:nvSpPr>
-        <p:spPr>
-          <a:xfrm>
-            <a:off x="502920" y="566928"/>
-            <a:ext cx="11201400" cy="777240"/>
-          </a:xfrm>
-          <a:prstGeom prst="rect">
-            <a:avLst/>
-          </a:prstGeom>
-          <a:noFill/>
-        </p:spPr>
-        <p:txBody>
-          <a:bodyPr wrap="square" lIns="0" tIns="0" rIns="0" bIns="0" anchor="t">
-            <a:spAutoFit/>
-          </a:bodyPr>
-          <a:lstStyle/>
-          <a:p>
-            <a:pPr algn="l"/>
-            <a:r>
-              <a:rPr sz="2300" b="0" i="0">
-                <a:solidFill>
-                  <a:srgbClr val="000000"/>
-                </a:solidFill>
-                <a:latin typeface="Georgia"/>
-              </a:rPr>
-              <a:t>Pricing and basket guardrails held; returns, service load, and availability strained</a:t>
-            </a:r>
-          </a:p>
-        </p:txBody>
-      </p:sp>
-      <p:graphicFrame>
-        <p:nvGraphicFramePr>
-          <p:cNvPr id="4" name="Table 3"/>
-          <p:cNvGraphicFramePr>
-            <a:graphicFrameLocks noGrp="1"/>
-          </p:cNvGraphicFramePr>
-          <p:nvPr/>
-        </p:nvGraphicFramePr>
-        <p:xfrm>
-          <a:off x="502920" y="1554480"/>
-          <a:ext cx="11183112" cy="4256532"/>
-        </p:xfrm>
-        <a:graphic>
-          <a:graphicData uri="http://schemas.openxmlformats.org/drawingml/2006/table">
-            <a:tbl>
-              <a:tblPr>
-                <a:tableStyleId>{5C22544A-7EE6-4342-B048-85BDC9FD1C3A}</a:tableStyleId>
-              </a:tblPr>
-              <a:tblGrid>
-                <a:gridCol w="2743200">
-                  <a:extLst>
-                    <a:ext uri="{9D8B030D-6E8A-4147-A177-3AD203B41FA5}">
-                      <a16:colId xmlns:a16="http://schemas.microsoft.com/office/drawing/2014/main" val="20000"/>
-                    </a:ext>
-                  </a:extLst>
-                </a:gridCol>
-                <a:gridCol w="1143000">
-                  <a:extLst>
-                    <a:ext uri="{9D8B030D-6E8A-4147-A177-3AD203B41FA5}">
-                      <a16:colId xmlns:a16="http://schemas.microsoft.com/office/drawing/2014/main" val="20001"/>
-                    </a:ext>
-                  </a:extLst>
-                </a:gridCol>
-                <a:gridCol w="2148840">
-                  <a:extLst>
-                    <a:ext uri="{9D8B030D-6E8A-4147-A177-3AD203B41FA5}">
-                      <a16:colId xmlns:a16="http://schemas.microsoft.com/office/drawing/2014/main" val="20002"/>
-                    </a:ext>
-                  </a:extLst>
-                </a:gridCol>
-                <a:gridCol w="868680">
-                  <a:extLst>
-                    <a:ext uri="{9D8B030D-6E8A-4147-A177-3AD203B41FA5}">
-                      <a16:colId xmlns:a16="http://schemas.microsoft.com/office/drawing/2014/main" val="20003"/>
-                    </a:ext>
-                  </a:extLst>
-                </a:gridCol>
-                <a:gridCol w="4279392">
-                  <a:extLst>
-                    <a:ext uri="{9D8B030D-6E8A-4147-A177-3AD203B41FA5}">
-                      <a16:colId xmlns:a16="http://schemas.microsoft.com/office/drawing/2014/main" val="20004"/>
-                    </a:ext>
-                  </a:extLst>
-                </a:gridCol>
-              </a:tblGrid>
-              <a:tr h="347472">
-                <a:tc>
-                  <a:txBody>
-                    <a:bodyPr/>
-                    <a:lstStyle/>
-                    <a:p>
-                      <a:r>
-                        <a:rPr sz="1050" b="1">
-                          <a:solidFill>
-                            <a:srgbClr val="FFFFFF"/>
-                          </a:solidFill>
-                          <a:latin typeface="Arial"/>
-                        </a:rPr>
-                        <a:t>Guardrail</a:t>
-                      </a:r>
-                    </a:p>
-                  </a:txBody>
-                  <a:tcPr marL="73152" marR="36576" anchor="ctr">
-                    <a:solidFill>
-                      <a:srgbClr val="000000"/>
-                    </a:solidFill>
-                  </a:tcPr>
-                </a:tc>
-                <a:tc>
-                  <a:txBody>
-                    <a:bodyPr/>
-                    <a:lstStyle/>
-                    <a:p>
-                      <a:r>
-                        <a:rPr sz="1050" b="1">
-                          <a:solidFill>
-                            <a:srgbClr val="FFFFFF"/>
-                          </a:solidFill>
-                          <a:latin typeface="Arial"/>
-                        </a:rPr>
-                        <a:t>Pre</a:t>
-                      </a:r>
-                    </a:p>
-                  </a:txBody>
-                  <a:tcPr marL="73152" marR="36576" anchor="ctr">
-                    <a:solidFill>
-                      <a:srgbClr val="000000"/>
-                    </a:solidFill>
-                  </a:tcPr>
-                </a:tc>
-                <a:tc>
-                  <a:txBody>
-                    <a:bodyPr/>
-                    <a:lstStyle/>
-                    <a:p>
-                      <a:r>
-                        <a:rPr sz="1050" b="1">
-                          <a:solidFill>
-                            <a:srgbClr val="FFFFFF"/>
-                          </a:solidFill>
-                          <a:latin typeface="Arial"/>
-                        </a:rPr>
-                        <a:t>Active flight</a:t>
-                      </a:r>
-                    </a:p>
-                  </a:txBody>
-                  <a:tcPr marL="73152" marR="36576" anchor="ctr">
-                    <a:solidFill>
-                      <a:srgbClr val="000000"/>
-                    </a:solidFill>
-                  </a:tcPr>
-                </a:tc>
-                <a:tc>
-                  <a:txBody>
-                    <a:bodyPr/>
-                    <a:lstStyle/>
-                    <a:p>
-                      <a:r>
-                        <a:rPr sz="1050" b="1">
-                          <a:solidFill>
-                            <a:srgbClr val="FFFFFF"/>
-                          </a:solidFill>
-                          <a:latin typeface="Arial"/>
-                        </a:rPr>
-                        <a:t>Status</a:t>
-                      </a:r>
-                    </a:p>
-                  </a:txBody>
-                  <a:tcPr marL="73152" marR="36576" anchor="ctr">
-                    <a:solidFill>
-                      <a:srgbClr val="000000"/>
-                    </a:solidFill>
-                  </a:tcPr>
-                </a:tc>
-                <a:tc>
-                  <a:txBody>
-                    <a:bodyPr/>
-                    <a:lstStyle/>
-                    <a:p>
-                      <a:r>
-                        <a:rPr sz="1050" b="1">
-                          <a:solidFill>
-                            <a:srgbClr val="FFFFFF"/>
-                          </a:solidFill>
-                          <a:latin typeface="Arial"/>
-                        </a:rPr>
-                        <a:t>Note</a:t>
-                      </a:r>
-                    </a:p>
-                  </a:txBody>
-                  <a:tcPr marL="73152" marR="36576" anchor="ctr">
-                    <a:solidFill>
-                      <a:srgbClr val="000000"/>
-                    </a:solidFill>
-                  </a:tcPr>
-                </a:tc>
-                <a:extLst>
-                  <a:ext uri="{0D108BD9-81ED-4DB2-BD59-A6C34878D82A}">
-                    <a16:rowId xmlns:a16="http://schemas.microsoft.com/office/drawing/2014/main" val="10000"/>
-                  </a:ext>
-                </a:extLst>
-              </a:tr>
-              <a:tr h="434340">
-                <a:tc>
-                  <a:txBody>
-                    <a:bodyPr/>
-                    <a:lstStyle/>
-                    <a:p>
-                      <a:r>
-                        <a:rPr sz="1000" b="1" dirty="0">
-                          <a:solidFill>
-                            <a:srgbClr val="333333"/>
-                          </a:solidFill>
-                          <a:latin typeface="Arial"/>
-                        </a:rPr>
-                        <a:t>Average order value</a:t>
-                      </a:r>
-                    </a:p>
-                  </a:txBody>
-                  <a:tcPr marL="73152" marR="36576" anchor="ctr">
-                    <a:solidFill>
-                      <a:srgbClr val="FFFFFF"/>
-                    </a:solidFill>
-                  </a:tcPr>
-                </a:tc>
-                <a:tc>
-                  <a:txBody>
-                    <a:bodyPr/>
-                    <a:lstStyle/>
-                    <a:p>
-                      <a:r>
-                        <a:rPr sz="1000">
-                          <a:solidFill>
-                            <a:srgbClr val="333333"/>
-                          </a:solidFill>
-                          <a:latin typeface="Arial"/>
-                        </a:rPr>
-                        <a:t>$123</a:t>
-                      </a:r>
-                    </a:p>
-                  </a:txBody>
-                  <a:tcPr marL="73152" marR="36576" anchor="ctr">
-                    <a:solidFill>
-                      <a:srgbClr val="FFFFFF"/>
-                    </a:solidFill>
-                  </a:tcPr>
-                </a:tc>
-                <a:tc>
-                  <a:txBody>
-                    <a:bodyPr/>
-                    <a:lstStyle/>
-                    <a:p>
-                      <a:r>
-                        <a:rPr sz="1000">
-                          <a:solidFill>
-                            <a:srgbClr val="333333"/>
-                          </a:solidFill>
-                          <a:latin typeface="Arial"/>
-                        </a:rPr>
-                        <a:t>$132  (+7.1%)</a:t>
-                      </a:r>
-                    </a:p>
-                  </a:txBody>
-                  <a:tcPr marL="73152" marR="36576" anchor="ctr">
-                    <a:solidFill>
-                      <a:srgbClr val="FFFFFF"/>
-                    </a:solidFill>
-                  </a:tcPr>
-                </a:tc>
-                <a:tc>
-                  <a:txBody>
-                    <a:bodyPr/>
-                    <a:lstStyle/>
-                    <a:p>
-                      <a:r>
-                        <a:rPr sz="1000" b="1">
-                          <a:solidFill>
-                            <a:srgbClr val="1F7A4D"/>
-                          </a:solidFill>
-                          <a:latin typeface="Arial"/>
-                        </a:rPr>
-                        <a:t>PASS</a:t>
-                      </a:r>
-                    </a:p>
-                  </a:txBody>
-                  <a:tcPr marL="73152" marR="36576" anchor="ctr">
-                    <a:solidFill>
-                      <a:srgbClr val="FFFFFF"/>
-                    </a:solidFill>
-                  </a:tcPr>
-                </a:tc>
-                <a:tc>
-                  <a:txBody>
-                    <a:bodyPr/>
-                    <a:lstStyle/>
-                    <a:p>
-                      <a:r>
-                        <a:rPr sz="950">
-                          <a:solidFill>
-                            <a:srgbClr val="757575"/>
-                          </a:solidFill>
-                          <a:latin typeface="Arial"/>
-                        </a:rPr>
-                        <a:t>Footwear mix plus accessory attachment</a:t>
-                      </a:r>
-                    </a:p>
-                  </a:txBody>
-                  <a:tcPr marL="73152" marR="36576" anchor="ctr">
-                    <a:solidFill>
-                      <a:srgbClr val="FFFFFF"/>
-                    </a:solidFill>
-                  </a:tcPr>
-                </a:tc>
-                <a:extLst>
-                  <a:ext uri="{0D108BD9-81ED-4DB2-BD59-A6C34878D82A}">
-                    <a16:rowId xmlns:a16="http://schemas.microsoft.com/office/drawing/2014/main" val="10001"/>
-                  </a:ext>
-                </a:extLst>
-              </a:tr>
-              <a:tr h="434340">
-                <a:tc>
-                  <a:txBody>
-                    <a:bodyPr/>
-                    <a:lstStyle/>
-                    <a:p>
-                      <a:r>
-                        <a:rPr sz="1000" b="1">
-                          <a:solidFill>
-                            <a:srgbClr val="333333"/>
-                          </a:solidFill>
-                          <a:latin typeface="Arial"/>
-                        </a:rPr>
-                        <a:t>Discounting (ASP proxy)</a:t>
-                      </a:r>
-                    </a:p>
-                  </a:txBody>
-                  <a:tcPr marL="73152" marR="36576" anchor="ctr">
-                    <a:solidFill>
-                      <a:srgbClr val="F5F6F7"/>
-                    </a:solidFill>
-                  </a:tcPr>
-                </a:tc>
-                <a:tc>
-                  <a:txBody>
-                    <a:bodyPr/>
-                    <a:lstStyle/>
-                    <a:p>
-                      <a:r>
-                        <a:rPr sz="1000">
-                          <a:solidFill>
-                            <a:srgbClr val="333333"/>
-                          </a:solidFill>
-                          <a:latin typeface="Arial"/>
-                        </a:rPr>
-                        <a:t>—</a:t>
-                      </a:r>
-                    </a:p>
-                  </a:txBody>
-                  <a:tcPr marL="73152" marR="36576" anchor="ctr">
-                    <a:solidFill>
-                      <a:srgbClr val="F5F6F7"/>
-                    </a:solidFill>
-                  </a:tcPr>
-                </a:tc>
-                <a:tc>
-                  <a:txBody>
-                    <a:bodyPr/>
-                    <a:lstStyle/>
-                    <a:p>
-                      <a:r>
-                        <a:rPr sz="1000">
-                          <a:solidFill>
-                            <a:srgbClr val="333333"/>
-                          </a:solidFill>
-                          <a:latin typeface="Arial"/>
-                        </a:rPr>
-                        <a:t>Vestal Pro $145, full price</a:t>
-                      </a:r>
-                    </a:p>
-                  </a:txBody>
-                  <a:tcPr marL="73152" marR="36576" anchor="ctr">
-                    <a:solidFill>
-                      <a:srgbClr val="F5F6F7"/>
-                    </a:solidFill>
-                  </a:tcPr>
-                </a:tc>
-                <a:tc>
-                  <a:txBody>
-                    <a:bodyPr/>
-                    <a:lstStyle/>
-                    <a:p>
-                      <a:r>
-                        <a:rPr sz="1000" b="1">
-                          <a:solidFill>
-                            <a:srgbClr val="1F7A4D"/>
-                          </a:solidFill>
-                          <a:latin typeface="Arial"/>
-                        </a:rPr>
-                        <a:t>PASS</a:t>
-                      </a:r>
-                    </a:p>
-                  </a:txBody>
-                  <a:tcPr marL="73152" marR="36576" anchor="ctr">
-                    <a:solidFill>
-                      <a:srgbClr val="F5F6F7"/>
-                    </a:solidFill>
-                  </a:tcPr>
-                </a:tc>
-                <a:tc>
-                  <a:txBody>
-                    <a:bodyPr/>
-                    <a:lstStyle/>
-                    <a:p>
-                      <a:r>
-                        <a:rPr sz="950">
-                          <a:solidFill>
-                            <a:srgbClr val="757575"/>
-                          </a:solidFill>
-                          <a:latin typeface="Arial"/>
-                        </a:rPr>
-                        <a:t>No launch markdown; post-period ASP eased 7.7% to $134</a:t>
-                      </a:r>
-                    </a:p>
-                  </a:txBody>
-                  <a:tcPr marL="73152" marR="36576" anchor="ctr">
-                    <a:solidFill>
-                      <a:srgbClr val="F5F6F7"/>
-                    </a:solidFill>
-                  </a:tcPr>
-                </a:tc>
-                <a:extLst>
-                  <a:ext uri="{0D108BD9-81ED-4DB2-BD59-A6C34878D82A}">
-                    <a16:rowId xmlns:a16="http://schemas.microsoft.com/office/drawing/2014/main" val="10002"/>
-                  </a:ext>
-                </a:extLst>
-              </a:tr>
-              <a:tr h="434340">
-                <a:tc>
-                  <a:txBody>
-                    <a:bodyPr/>
-                    <a:lstStyle/>
-                    <a:p>
-                      <a:r>
-                        <a:rPr sz="1000" b="1" dirty="0">
-                          <a:solidFill>
-                            <a:srgbClr val="333333"/>
-                          </a:solidFill>
-                          <a:latin typeface="Arial"/>
-                        </a:rPr>
-                        <a:t>Site conversion rate</a:t>
-                      </a:r>
-                    </a:p>
-                  </a:txBody>
-                  <a:tcPr marL="73152" marR="36576" anchor="ctr">
-                    <a:solidFill>
-                      <a:srgbClr val="FFFFFF"/>
-                    </a:solidFill>
-                  </a:tcPr>
-                </a:tc>
-                <a:tc>
-                  <a:txBody>
-                    <a:bodyPr/>
-                    <a:lstStyle/>
-                    <a:p>
-                      <a:r>
-                        <a:rPr sz="1000">
-                          <a:solidFill>
-                            <a:srgbClr val="333333"/>
-                          </a:solidFill>
-                          <a:latin typeface="Arial"/>
-                        </a:rPr>
-                        <a:t>2.33%</a:t>
-                      </a:r>
-                    </a:p>
-                  </a:txBody>
-                  <a:tcPr marL="73152" marR="36576" anchor="ctr">
-                    <a:solidFill>
-                      <a:srgbClr val="FFFFFF"/>
-                    </a:solidFill>
-                  </a:tcPr>
-                </a:tc>
-                <a:tc>
-                  <a:txBody>
-                    <a:bodyPr/>
-                    <a:lstStyle/>
-                    <a:p>
-                      <a:r>
-                        <a:rPr sz="1000">
-                          <a:solidFill>
-                            <a:srgbClr val="333333"/>
-                          </a:solidFill>
-                          <a:latin typeface="Arial"/>
-                        </a:rPr>
-                        <a:t>2.42% avg · 2.23% wk 6</a:t>
-                      </a:r>
-                    </a:p>
-                  </a:txBody>
-                  <a:tcPr marL="73152" marR="36576" anchor="ctr">
-                    <a:solidFill>
-                      <a:srgbClr val="FFFFFF"/>
-                    </a:solidFill>
-                  </a:tcPr>
-                </a:tc>
-                <a:tc>
-                  <a:txBody>
-                    <a:bodyPr/>
-                    <a:lstStyle/>
-                    <a:p>
-                      <a:r>
-                        <a:rPr sz="1000" b="1">
-                          <a:solidFill>
-                            <a:srgbClr val="757575"/>
-                          </a:solidFill>
-                          <a:latin typeface="Arial"/>
-                        </a:rPr>
-                        <a:t>WATCH</a:t>
-                      </a:r>
-                    </a:p>
-                  </a:txBody>
-                  <a:tcPr marL="73152" marR="36576" anchor="ctr">
-                    <a:solidFill>
-                      <a:srgbClr val="FFFFFF"/>
-                    </a:solidFill>
-                  </a:tcPr>
-                </a:tc>
-                <a:tc>
-                  <a:txBody>
-                    <a:bodyPr/>
-                    <a:lstStyle/>
-                    <a:p>
-                      <a:r>
-                        <a:rPr sz="950">
-                          <a:solidFill>
-                            <a:srgbClr val="757575"/>
-                          </a:solidFill>
-                          <a:latin typeface="Arial"/>
-                        </a:rPr>
-                        <a:t>Improved early, then fell below pre-period as core sizes depleted</a:t>
-                      </a:r>
-                    </a:p>
-                  </a:txBody>
-                  <a:tcPr marL="73152" marR="36576" anchor="ctr">
-                    <a:solidFill>
-                      <a:srgbClr val="FFFFFF"/>
-                    </a:solidFill>
-                  </a:tcPr>
-                </a:tc>
-                <a:extLst>
-                  <a:ext uri="{0D108BD9-81ED-4DB2-BD59-A6C34878D82A}">
-                    <a16:rowId xmlns:a16="http://schemas.microsoft.com/office/drawing/2014/main" val="10003"/>
-                  </a:ext>
-                </a:extLst>
-              </a:tr>
-              <a:tr h="434340">
-                <a:tc>
-                  <a:txBody>
-                    <a:bodyPr/>
-                    <a:lstStyle/>
-                    <a:p>
-                      <a:r>
-                        <a:rPr sz="1000" b="1">
-                          <a:solidFill>
-                            <a:srgbClr val="333333"/>
-                          </a:solidFill>
-                          <a:latin typeface="Arial"/>
-                        </a:rPr>
-                        <a:t>Return rate, site-wide</a:t>
-                      </a:r>
-                    </a:p>
-                  </a:txBody>
-                  <a:tcPr marL="73152" marR="36576" anchor="ctr">
-                    <a:solidFill>
-                      <a:srgbClr val="F5F6F7"/>
-                    </a:solidFill>
-                  </a:tcPr>
-                </a:tc>
-                <a:tc>
-                  <a:txBody>
-                    <a:bodyPr/>
-                    <a:lstStyle/>
-                    <a:p>
-                      <a:r>
-                        <a:rPr sz="1000">
-                          <a:solidFill>
-                            <a:srgbClr val="333333"/>
-                          </a:solidFill>
-                          <a:latin typeface="Arial"/>
-                        </a:rPr>
-                        <a:t>6.6%</a:t>
-                      </a:r>
-                    </a:p>
-                  </a:txBody>
-                  <a:tcPr marL="73152" marR="36576" anchor="ctr">
-                    <a:solidFill>
-                      <a:srgbClr val="F5F6F7"/>
-                    </a:solidFill>
-                  </a:tcPr>
-                </a:tc>
-                <a:tc>
-                  <a:txBody>
-                    <a:bodyPr/>
-                    <a:lstStyle/>
-                    <a:p>
-                      <a:r>
-                        <a:rPr sz="1000">
-                          <a:solidFill>
-                            <a:srgbClr val="333333"/>
-                          </a:solidFill>
-                          <a:latin typeface="Arial"/>
-                        </a:rPr>
-                        <a:t>8.7%  (+2.1 pts)</a:t>
-                      </a:r>
-                    </a:p>
-                  </a:txBody>
-                  <a:tcPr marL="73152" marR="36576" anchor="ctr">
-                    <a:solidFill>
-                      <a:srgbClr val="F5F6F7"/>
-                    </a:solidFill>
-                  </a:tcPr>
-                </a:tc>
-                <a:tc>
-                  <a:txBody>
-                    <a:bodyPr/>
-                    <a:lstStyle/>
-                    <a:p>
-                      <a:r>
-                        <a:rPr sz="1000" b="1">
-                          <a:solidFill>
-                            <a:srgbClr val="757575"/>
-                          </a:solidFill>
-                          <a:latin typeface="Arial"/>
-                        </a:rPr>
-                        <a:t>WATCH</a:t>
-                      </a:r>
-                    </a:p>
-                  </a:txBody>
-                  <a:tcPr marL="73152" marR="36576" anchor="ctr">
-                    <a:solidFill>
-                      <a:srgbClr val="F5F6F7"/>
-                    </a:solidFill>
-                  </a:tcPr>
-                </a:tc>
-                <a:tc>
-                  <a:txBody>
-                    <a:bodyPr/>
-                    <a:lstStyle/>
-                    <a:p>
-                      <a:r>
-                        <a:rPr sz="950">
-                          <a:solidFill>
-                            <a:srgbClr val="757575"/>
-                          </a:solidFill>
-                          <a:latin typeface="Arial"/>
-                        </a:rPr>
-                        <a:t>Within the 1–3 pt launch expectation; still maturing post-period (9.4%)</a:t>
-                      </a:r>
-                    </a:p>
-                  </a:txBody>
-                  <a:tcPr marL="73152" marR="36576" anchor="ctr">
-                    <a:solidFill>
-                      <a:srgbClr val="F5F6F7"/>
-                    </a:solidFill>
-                  </a:tcPr>
-                </a:tc>
-                <a:extLst>
-                  <a:ext uri="{0D108BD9-81ED-4DB2-BD59-A6C34878D82A}">
-                    <a16:rowId xmlns:a16="http://schemas.microsoft.com/office/drawing/2014/main" val="10004"/>
-                  </a:ext>
-                </a:extLst>
-              </a:tr>
-              <a:tr h="434340">
-                <a:tc>
-                  <a:txBody>
-                    <a:bodyPr/>
-                    <a:lstStyle/>
-                    <a:p>
-                      <a:r>
-                        <a:rPr sz="1000" b="1">
-                          <a:solidFill>
-                            <a:srgbClr val="333333"/>
-                          </a:solidFill>
-                          <a:latin typeface="Arial"/>
-                        </a:rPr>
-                        <a:t>Return rate, Vestal Pro</a:t>
-                      </a:r>
-                    </a:p>
-                  </a:txBody>
-                  <a:tcPr marL="73152" marR="36576" anchor="ctr">
-                    <a:solidFill>
-                      <a:srgbClr val="FFFFFF"/>
-                    </a:solidFill>
-                  </a:tcPr>
-                </a:tc>
-                <a:tc>
-                  <a:txBody>
-                    <a:bodyPr/>
-                    <a:lstStyle/>
-                    <a:p>
-                      <a:r>
-                        <a:rPr sz="1000">
-                          <a:solidFill>
-                            <a:srgbClr val="333333"/>
-                          </a:solidFill>
-                          <a:latin typeface="Arial"/>
-                        </a:rPr>
-                        <a:t>—</a:t>
-                      </a:r>
-                    </a:p>
-                  </a:txBody>
-                  <a:tcPr marL="73152" marR="36576" anchor="ctr">
-                    <a:solidFill>
-                      <a:srgbClr val="FFFFFF"/>
-                    </a:solidFill>
-                  </a:tcPr>
-                </a:tc>
-                <a:tc>
-                  <a:txBody>
-                    <a:bodyPr/>
-                    <a:lstStyle/>
-                    <a:p>
-                      <a:r>
-                        <a:rPr sz="1000">
-                          <a:solidFill>
-                            <a:srgbClr val="333333"/>
-                          </a:solidFill>
-                          <a:latin typeface="Arial"/>
-                        </a:rPr>
-                        <a:t>14.4% → 19.8% post</a:t>
-                      </a:r>
-                    </a:p>
-                  </a:txBody>
-                  <a:tcPr marL="73152" marR="36576" anchor="ctr">
-                    <a:solidFill>
-                      <a:srgbClr val="FFFFFF"/>
-                    </a:solidFill>
-                  </a:tcPr>
-                </a:tc>
-                <a:tc>
-                  <a:txBody>
-                    <a:bodyPr/>
-                    <a:lstStyle/>
-                    <a:p>
-                      <a:r>
-                        <a:rPr sz="1000" b="1">
-                          <a:solidFill>
-                            <a:srgbClr val="757575"/>
-                          </a:solidFill>
-                          <a:latin typeface="Arial"/>
-                        </a:rPr>
-                        <a:t>WATCH</a:t>
-                      </a:r>
-                    </a:p>
-                  </a:txBody>
-                  <a:tcPr marL="73152" marR="36576" anchor="ctr">
-                    <a:solidFill>
-                      <a:srgbClr val="FFFFFF"/>
-                    </a:solidFill>
-                  </a:tcPr>
-                </a:tc>
-                <a:tc>
-                  <a:txBody>
-                    <a:bodyPr/>
-                    <a:lstStyle/>
-                    <a:p>
-                      <a:r>
-                        <a:rPr sz="950">
-                          <a:solidFill>
-                            <a:srgbClr val="757575"/>
-                          </a:solidFill>
-                          <a:latin typeface="Arial"/>
-                        </a:rPr>
-                        <a:t>≈2× fleet average; sizing-and-fit driven</a:t>
-                      </a:r>
-                    </a:p>
-                  </a:txBody>
-                  <a:tcPr marL="73152" marR="36576" anchor="ctr">
-                    <a:solidFill>
-                      <a:srgbClr val="FFFFFF"/>
-                    </a:solidFill>
-                  </a:tcPr>
-                </a:tc>
-                <a:extLst>
-                  <a:ext uri="{0D108BD9-81ED-4DB2-BD59-A6C34878D82A}">
-                    <a16:rowId xmlns:a16="http://schemas.microsoft.com/office/drawing/2014/main" val="10005"/>
-                  </a:ext>
-                </a:extLst>
-              </a:tr>
-              <a:tr h="434340">
-                <a:tc>
-                  <a:txBody>
-                    <a:bodyPr/>
-                    <a:lstStyle/>
-                    <a:p>
-                      <a:r>
-                        <a:rPr sz="1000" b="1">
-                          <a:solidFill>
-                            <a:srgbClr val="333333"/>
-                          </a:solidFill>
-                          <a:latin typeface="Arial"/>
-                        </a:rPr>
-                        <a:t>Service contact rate</a:t>
-                      </a:r>
-                    </a:p>
-                  </a:txBody>
-                  <a:tcPr marL="73152" marR="36576" anchor="ctr">
-                    <a:solidFill>
-                      <a:srgbClr val="F5F6F7"/>
-                    </a:solidFill>
-                  </a:tcPr>
-                </a:tc>
-                <a:tc>
-                  <a:txBody>
-                    <a:bodyPr/>
-                    <a:lstStyle/>
-                    <a:p>
-                      <a:r>
-                        <a:rPr sz="1000">
-                          <a:solidFill>
-                            <a:srgbClr val="333333"/>
-                          </a:solidFill>
-                          <a:latin typeface="Arial"/>
-                        </a:rPr>
-                        <a:t>3.5%</a:t>
-                      </a:r>
-                    </a:p>
-                  </a:txBody>
-                  <a:tcPr marL="73152" marR="36576" anchor="ctr">
-                    <a:solidFill>
-                      <a:srgbClr val="F5F6F7"/>
-                    </a:solidFill>
-                  </a:tcPr>
-                </a:tc>
-                <a:tc>
-                  <a:txBody>
-                    <a:bodyPr/>
-                    <a:lstStyle/>
-                    <a:p>
-                      <a:r>
-                        <a:rPr sz="1000">
-                          <a:solidFill>
-                            <a:srgbClr val="333333"/>
-                          </a:solidFill>
-                          <a:latin typeface="Arial"/>
-                        </a:rPr>
-                        <a:t>7.7% of orders</a:t>
-                      </a:r>
-                    </a:p>
-                  </a:txBody>
-                  <a:tcPr marL="73152" marR="36576" anchor="ctr">
-                    <a:solidFill>
-                      <a:srgbClr val="F5F6F7"/>
-                    </a:solidFill>
-                  </a:tcPr>
-                </a:tc>
-                <a:tc>
-                  <a:txBody>
-                    <a:bodyPr/>
-                    <a:lstStyle/>
-                    <a:p>
-                      <a:r>
-                        <a:rPr sz="1000" b="1">
-                          <a:solidFill>
-                            <a:srgbClr val="757575"/>
-                          </a:solidFill>
-                          <a:latin typeface="Arial"/>
-                        </a:rPr>
-                        <a:t>WATCH</a:t>
-                      </a:r>
-                    </a:p>
-                  </a:txBody>
-                  <a:tcPr marL="73152" marR="36576" anchor="ctr">
-                    <a:solidFill>
-                      <a:srgbClr val="F5F6F7"/>
-                    </a:solidFill>
-                  </a:tcPr>
-                </a:tc>
-                <a:tc>
-                  <a:txBody>
-                    <a:bodyPr/>
-                    <a:lstStyle/>
-                    <a:p>
-                      <a:r>
-                        <a:rPr sz="950">
-                          <a:solidFill>
-                            <a:srgbClr val="757575"/>
-                          </a:solidFill>
-                          <a:latin typeface="Arial"/>
-                        </a:rPr>
-                        <a:t>Sizing +199%, inventory +152%, comparison +109% vs pre-period</a:t>
-                      </a:r>
-                    </a:p>
-                  </a:txBody>
-                  <a:tcPr marL="73152" marR="36576" anchor="ctr">
-                    <a:solidFill>
-                      <a:srgbClr val="F5F6F7"/>
-                    </a:solidFill>
-                  </a:tcPr>
-                </a:tc>
-                <a:extLst>
-                  <a:ext uri="{0D108BD9-81ED-4DB2-BD59-A6C34878D82A}">
-                    <a16:rowId xmlns:a16="http://schemas.microsoft.com/office/drawing/2014/main" val="10006"/>
-                  </a:ext>
-                </a:extLst>
-              </a:tr>
-              <a:tr h="434340">
-                <a:tc>
-                  <a:txBody>
-                    <a:bodyPr/>
-                    <a:lstStyle/>
-                    <a:p>
-                      <a:r>
-                        <a:rPr sz="1000" b="1">
-                          <a:solidFill>
-                            <a:srgbClr val="333333"/>
-                          </a:solidFill>
-                          <a:latin typeface="Arial"/>
-                        </a:rPr>
-                        <a:t>Core-size availability, Vestal Pro</a:t>
-                      </a:r>
-                    </a:p>
-                  </a:txBody>
-                  <a:tcPr marL="73152" marR="36576" anchor="ctr">
-                    <a:solidFill>
-                      <a:srgbClr val="FFFFFF"/>
-                    </a:solidFill>
-                  </a:tcPr>
-                </a:tc>
-                <a:tc>
-                  <a:txBody>
-                    <a:bodyPr/>
-                    <a:lstStyle/>
-                    <a:p>
-                      <a:r>
-                        <a:rPr sz="1000">
-                          <a:solidFill>
-                            <a:srgbClr val="333333"/>
-                          </a:solidFill>
-                          <a:latin typeface="Arial"/>
-                        </a:rPr>
-                        <a:t>97%</a:t>
-                      </a:r>
-                    </a:p>
-                  </a:txBody>
-                  <a:tcPr marL="73152" marR="36576" anchor="ctr">
-                    <a:solidFill>
-                      <a:srgbClr val="FFFFFF"/>
-                    </a:solidFill>
-                  </a:tcPr>
-                </a:tc>
-                <a:tc>
-                  <a:txBody>
-                    <a:bodyPr/>
-                    <a:lstStyle/>
-                    <a:p>
-                      <a:r>
-                        <a:rPr sz="1000">
-                          <a:solidFill>
-                            <a:srgbClr val="333333"/>
-                          </a:solidFill>
-                          <a:latin typeface="Arial"/>
-                        </a:rPr>
-                        <a:t>56% by week 6</a:t>
-                      </a:r>
-                    </a:p>
-                  </a:txBody>
-                  <a:tcPr marL="73152" marR="36576" anchor="ctr">
-                    <a:solidFill>
-                      <a:srgbClr val="FFFFFF"/>
-                    </a:solidFill>
-                  </a:tcPr>
-                </a:tc>
-                <a:tc>
-                  <a:txBody>
-                    <a:bodyPr/>
-                    <a:lstStyle/>
-                    <a:p>
-                      <a:r>
-                        <a:rPr sz="1000" b="1">
-                          <a:solidFill>
-                            <a:srgbClr val="B3261E"/>
-                          </a:solidFill>
-                          <a:latin typeface="Arial"/>
-                        </a:rPr>
-                        <a:t>MISS</a:t>
-                      </a:r>
-                    </a:p>
-                  </a:txBody>
-                  <a:tcPr marL="73152" marR="36576" anchor="ctr">
-                    <a:solidFill>
-                      <a:srgbClr val="FFFFFF"/>
-                    </a:solidFill>
-                  </a:tcPr>
-                </a:tc>
-                <a:tc>
-                  <a:txBody>
-                    <a:bodyPr/>
-                    <a:lstStyle/>
-                    <a:p>
-                      <a:r>
-                        <a:rPr sz="950">
-                          <a:solidFill>
-                            <a:srgbClr val="757575"/>
-                          </a:solidFill>
-                          <a:latin typeface="Arial"/>
-                        </a:rPr>
-                        <a:t>Below 90% from week 3; ≈$20K modeled unmet demand</a:t>
-                      </a:r>
-                    </a:p>
-                  </a:txBody>
-                  <a:tcPr marL="73152" marR="36576" anchor="ctr">
-                    <a:solidFill>
-                      <a:srgbClr val="FFFFFF"/>
-                    </a:solidFill>
-                  </a:tcPr>
-                </a:tc>
-                <a:extLst>
-                  <a:ext uri="{0D108BD9-81ED-4DB2-BD59-A6C34878D82A}">
-                    <a16:rowId xmlns:a16="http://schemas.microsoft.com/office/drawing/2014/main" val="10007"/>
-                  </a:ext>
-                </a:extLst>
-              </a:tr>
-              <a:tr h="434340">
-                <a:tc>
-                  <a:txBody>
-                    <a:bodyPr/>
-                    <a:lstStyle/>
-                    <a:p>
-                      <a:r>
-                        <a:rPr sz="1000" b="1">
-                          <a:solidFill>
-                            <a:srgbClr val="333333"/>
-                          </a:solidFill>
-                          <a:latin typeface="Arial"/>
-                        </a:rPr>
-                        <a:t>Email / SMS unsubscribes</a:t>
-                      </a:r>
-                    </a:p>
-                  </a:txBody>
-                  <a:tcPr marL="73152" marR="36576" anchor="ctr">
-                    <a:solidFill>
-                      <a:srgbClr val="F5F6F7"/>
-                    </a:solidFill>
-                  </a:tcPr>
-                </a:tc>
-                <a:tc>
-                  <a:txBody>
-                    <a:bodyPr/>
-                    <a:lstStyle/>
-                    <a:p>
-                      <a:r>
-                        <a:rPr sz="1000">
-                          <a:solidFill>
-                            <a:srgbClr val="333333"/>
-                          </a:solidFill>
-                          <a:latin typeface="Arial"/>
-                        </a:rPr>
-                        <a:t>—</a:t>
-                      </a:r>
-                    </a:p>
-                  </a:txBody>
-                  <a:tcPr marL="73152" marR="36576" anchor="ctr">
-                    <a:solidFill>
-                      <a:srgbClr val="F5F6F7"/>
-                    </a:solidFill>
-                  </a:tcPr>
-                </a:tc>
-                <a:tc>
-                  <a:txBody>
-                    <a:bodyPr/>
-                    <a:lstStyle/>
-                    <a:p>
-                      <a:r>
-                        <a:rPr sz="1000">
-                          <a:solidFill>
-                            <a:srgbClr val="333333"/>
-                          </a:solidFill>
-                          <a:latin typeface="Arial"/>
-                        </a:rPr>
-                        <a:t>not measured</a:t>
-                      </a:r>
-                    </a:p>
-                  </a:txBody>
-                  <a:tcPr marL="73152" marR="36576" anchor="ctr">
-                    <a:solidFill>
-                      <a:srgbClr val="F5F6F7"/>
-                    </a:solidFill>
-                  </a:tcPr>
-                </a:tc>
-                <a:tc>
-                  <a:txBody>
-                    <a:bodyPr/>
-                    <a:lstStyle/>
-                    <a:p>
-                      <a:r>
-                        <a:rPr sz="1000" b="0">
-                          <a:solidFill>
-                            <a:srgbClr val="D9D9D9"/>
-                          </a:solidFill>
-                          <a:latin typeface="Arial"/>
-                        </a:rPr>
-                        <a:t>N/A</a:t>
-                      </a:r>
-                    </a:p>
-                  </a:txBody>
-                  <a:tcPr marL="73152" marR="36576" anchor="ctr">
-                    <a:solidFill>
-                      <a:srgbClr val="F5F6F7"/>
-                    </a:solidFill>
-                  </a:tcPr>
-                </a:tc>
-                <a:tc>
-                  <a:txBody>
-                    <a:bodyPr/>
-                    <a:lstStyle/>
-                    <a:p>
-                      <a:r>
-                        <a:rPr sz="950">
-                          <a:solidFill>
-                            <a:srgbClr val="757575"/>
-                          </a:solidFill>
-                          <a:latin typeface="Arial"/>
-                        </a:rPr>
-                        <a:t>No send-level CRM data captured — instrument next flight</a:t>
-                      </a:r>
-                    </a:p>
-                  </a:txBody>
-                  <a:tcPr marL="73152" marR="36576" anchor="ctr">
-                    <a:solidFill>
-                      <a:srgbClr val="F5F6F7"/>
-                    </a:solidFill>
-                  </a:tcPr>
-                </a:tc>
-                <a:extLst>
-                  <a:ext uri="{0D108BD9-81ED-4DB2-BD59-A6C34878D82A}">
-                    <a16:rowId xmlns:a16="http://schemas.microsoft.com/office/drawing/2014/main" val="10008"/>
-                  </a:ext>
-                </a:extLst>
-              </a:tr>
-              <a:tr h="434340">
-                <a:tc>
-                  <a:txBody>
-                    <a:bodyPr/>
-                    <a:lstStyle/>
-                    <a:p>
-                      <a:r>
-                        <a:rPr sz="1000" b="1">
-                          <a:solidFill>
-                            <a:srgbClr val="333333"/>
-                          </a:solidFill>
-                          <a:latin typeface="Arial"/>
-                        </a:rPr>
-                        <a:t>Gross margin</a:t>
-                      </a:r>
-                    </a:p>
-                  </a:txBody>
-                  <a:tcPr marL="73152" marR="36576" anchor="ctr">
-                    <a:solidFill>
-                      <a:srgbClr val="FFFFFF"/>
-                    </a:solidFill>
-                  </a:tcPr>
-                </a:tc>
-                <a:tc>
-                  <a:txBody>
-                    <a:bodyPr/>
-                    <a:lstStyle/>
-                    <a:p>
-                      <a:r>
-                        <a:rPr sz="1000">
-                          <a:solidFill>
-                            <a:srgbClr val="333333"/>
-                          </a:solidFill>
-                          <a:latin typeface="Arial"/>
-                        </a:rPr>
-                        <a:t>—</a:t>
-                      </a:r>
-                    </a:p>
-                  </a:txBody>
-                  <a:tcPr marL="73152" marR="36576" anchor="ctr">
-                    <a:solidFill>
-                      <a:srgbClr val="FFFFFF"/>
-                    </a:solidFill>
-                  </a:tcPr>
-                </a:tc>
-                <a:tc>
-                  <a:txBody>
-                    <a:bodyPr/>
-                    <a:lstStyle/>
-                    <a:p>
-                      <a:r>
-                        <a:rPr sz="1000">
-                          <a:solidFill>
-                            <a:srgbClr val="333333"/>
-                          </a:solidFill>
-                          <a:latin typeface="Arial"/>
-                        </a:rPr>
-                        <a:t>not measured</a:t>
-                      </a:r>
-                    </a:p>
-                  </a:txBody>
-                  <a:tcPr marL="73152" marR="36576" anchor="ctr">
-                    <a:solidFill>
-                      <a:srgbClr val="FFFFFF"/>
-                    </a:solidFill>
-                  </a:tcPr>
-                </a:tc>
-                <a:tc>
-                  <a:txBody>
-                    <a:bodyPr/>
-                    <a:lstStyle/>
-                    <a:p>
-                      <a:r>
-                        <a:rPr sz="1000" b="0">
-                          <a:solidFill>
-                            <a:srgbClr val="D9D9D9"/>
-                          </a:solidFill>
-                          <a:latin typeface="Arial"/>
-                        </a:rPr>
-                        <a:t>N/A</a:t>
-                      </a:r>
-                    </a:p>
-                  </a:txBody>
-                  <a:tcPr marL="73152" marR="36576" anchor="ctr">
-                    <a:solidFill>
-                      <a:srgbClr val="FFFFFF"/>
-                    </a:solidFill>
-                  </a:tcPr>
-                </a:tc>
-                <a:tc>
-                  <a:txBody>
-                    <a:bodyPr/>
-                    <a:lstStyle/>
-                    <a:p>
-                      <a:r>
-                        <a:rPr sz="950" dirty="0">
-                          <a:solidFill>
-                            <a:srgbClr val="757575"/>
-                          </a:solidFill>
-                          <a:latin typeface="Arial"/>
-                        </a:rPr>
-                        <a:t>COGS not tracked; price and discount proxies look healthy</a:t>
-                      </a:r>
-                    </a:p>
-                  </a:txBody>
-                  <a:tcPr marL="73152" marR="36576" anchor="ctr">
-                    <a:solidFill>
-                      <a:srgbClr val="FFFFFF"/>
-                    </a:solidFill>
-                  </a:tcPr>
-                </a:tc>
-                <a:extLst>
-                  <a:ext uri="{0D108BD9-81ED-4DB2-BD59-A6C34878D82A}">
-                    <a16:rowId xmlns:a16="http://schemas.microsoft.com/office/drawing/2014/main" val="10009"/>
-                  </a:ext>
-                </a:extLst>
-              </a:tr>
-            </a:tbl>
-          </a:graphicData>
-        </a:graphic>
-      </p:graphicFrame>
-      <p:sp>
-        <p:nvSpPr>
-          <p:cNvPr id="5" name="TextBox 4"/>
-          <p:cNvSpPr txBox="1"/>
-          <p:nvPr/>
-        </p:nvSpPr>
-        <p:spPr>
-          <a:xfrm>
-            <a:off x="502920" y="6510528"/>
-            <a:ext cx="10515600" cy="274320"/>
-          </a:xfrm>
-          <a:prstGeom prst="rect">
-            <a:avLst/>
-          </a:prstGeom>
-          <a:noFill/>
-        </p:spPr>
-        <p:txBody>
-          <a:bodyPr wrap="square" lIns="0" tIns="0" rIns="0" bIns="0" anchor="t">
-            <a:spAutoFit/>
-          </a:bodyPr>
-          <a:lstStyle/>
-          <a:p>
-            <a:pPr algn="l"/>
-            <a:r>
-              <a:rPr sz="800" b="0" i="0">
-                <a:solidFill>
-                  <a:srgbClr val="757575"/>
-                </a:solidFill>
-                <a:latin typeface="Arial"/>
-              </a:rPr>
-              <a:t>Salomon NA eCommerce · Vestal Pro launch readout · Illustrative synthetic case data</a:t>
-            </a:r>
-          </a:p>
-        </p:txBody>
-      </p:sp>
-      <p:sp>
-        <p:nvSpPr>
-          <p:cNvPr id="6" name="TextBox 5"/>
-          <p:cNvSpPr txBox="1"/>
-          <p:nvPr/>
-        </p:nvSpPr>
-        <p:spPr>
-          <a:xfrm>
-            <a:off x="11292840" y="6510528"/>
-            <a:ext cx="411480" cy="274320"/>
-          </a:xfrm>
-          <a:prstGeom prst="rect">
-            <a:avLst/>
-          </a:prstGeom>
-          <a:noFill/>
-        </p:spPr>
-        <p:txBody>
-          <a:bodyPr wrap="square" lIns="0" tIns="0" rIns="0" bIns="0" anchor="t">
-            <a:spAutoFit/>
-          </a:bodyPr>
-          <a:lstStyle/>
-          <a:p>
-            <a:pPr algn="r"/>
-            <a:r>
-              <a:rPr sz="800" b="0" i="0">
-                <a:solidFill>
-                  <a:srgbClr val="757575"/>
-                </a:solidFill>
-                <a:latin typeface="Arial"/>
-              </a:rPr>
-              <a:t>11</a:t>
-            </a:r>
-          </a:p>
-        </p:txBody>
-      </p:sp>
-      <p:pic>
-        <p:nvPicPr>
-          <p:cNvPr id="7" name="Picture 6" descr="salomon_wordmark_black.png"/>
-          <p:cNvPicPr>
-            <a:picLocks noChangeAspect="1"/>
-          </p:cNvPicPr>
-          <p:nvPr/>
-        </p:nvPicPr>
-        <p:blipFill>
-          <a:blip r:embed="rId2"/>
-          <a:stretch>
-            <a:fillRect/>
-          </a:stretch>
-        </p:blipFill>
-        <p:spPr>
-          <a:xfrm>
-            <a:off x="10698480" y="292608"/>
-            <a:ext cx="960120" cy="110013"/>
-          </a:xfrm>
-          <a:prstGeom prst="rect">
-            <a:avLst/>
-          </a:prstGeom>
-        </p:spPr>
-      </p:pic>
-    </p:spTree>
-  </p:cSld>
-  <p:clrMapOvr>
-    <a:masterClrMapping/>
-  </p:clrMapOvr>
-</p:sld>
-</file>
-
 <file path=ppt/slides/slide2.xml><?xml version="1.0" encoding="utf-8"?>
 <p:sld xmlns:a="http://schemas.openxmlformats.org/drawingml/2006/main" xmlns:r="http://schemas.openxmlformats.org/officeDocument/2006/relationships" xmlns:p="http://schemas.openxmlformats.org/presentationml/2006/main">
   <p:cSld>
@@ -9372,7 +8139,7 @@
         <p:spPr>
           <a:xfrm>
             <a:off x="6309360" y="1783080"/>
-            <a:ext cx="5394960" cy="1538883"/>
+            <a:ext cx="5394960" cy="1269578"/>
           </a:xfrm>
           <a:prstGeom prst="rect">
             <a:avLst/>
@@ -9493,22 +8260,6 @@
               </a:solidFill>
               <a:latin typeface="Arial"/>
             </a:endParaRPr>
-          </a:p>
-          <a:p>
-            <a:pPr algn="l">
-              <a:spcAft>
-                <a:spcPts val="600"/>
-              </a:spcAft>
-            </a:pPr>
-            <a:r>
-              <a:rPr sz="1250" b="0" i="0" dirty="0">
-                <a:solidFill>
-                  <a:srgbClr val="333333"/>
-                </a:solidFill>
-                <a:latin typeface="Arial"/>
-              </a:rPr>
-              <a:t>•  Guardrails: margin, returns, conversion, availability, service</a:t>
-            </a:r>
           </a:p>
         </p:txBody>
       </p:sp>
@@ -10215,7 +8966,7 @@
           <p:nvPr/>
         </p:nvPicPr>
         <p:blipFill>
-          <a:blip r:embed="rId2"/>
+          <a:blip r:embed="rId3"/>
           <a:stretch>
             <a:fillRect/>
           </a:stretch>
@@ -10235,6 +8986,11 @@
   <p:clrMapOvr>
     <a:masterClrMapping/>
   </p:clrMapOvr>
+  <p:extLst>
+    <p:ext uri="{6950BFC3-D8DA-4A85-94F7-54DA5524770B}">
+      <p188:commentRel xmlns:p188="http://schemas.microsoft.com/office/powerpoint/2018/8/main" r:id="rId2"/>
+    </p:ext>
+  </p:extLst>
 </p:sld>
 </file>
 
@@ -15424,7 +14180,7 @@
       </p:grpSpPr>
       <p:pic>
         <p:nvPicPr>
-          <p:cNvPr id="14" name="Picture 13" descr="The image shows a bar chart comparing actual revenue growth for adjacent categories (Adjacent-category revenue vs. expected baseline) in an active flight segment, with Trail Apparel and Trail Accessories, where the success criterion of a minimum 5% growth has been met, indicating significant positive results.&#10;&#10;AI-generated content may be incorrect.">
+          <p:cNvPr id="14" name="Picture 13">
             <a:extLst>
               <a:ext uri="{FF2B5EF4-FFF2-40B4-BE49-F238E27FC236}">
                 <a16:creationId xmlns:a16="http://schemas.microsoft.com/office/drawing/2014/main" id="{4A335441-E4DE-8121-4407-C74C03AA7598}"/>
@@ -15438,14 +14194,13 @@
         </p:nvPicPr>
         <p:blipFill>
           <a:blip r:embed="rId2"/>
-          <a:stretch>
-            <a:fillRect/>
-          </a:stretch>
+          <a:srcRect/>
+          <a:stretch/>
         </p:blipFill>
         <p:spPr>
           <a:xfrm>
             <a:off x="-1" y="1308688"/>
-            <a:ext cx="6832397" cy="4081459"/>
+            <a:ext cx="6832397" cy="4081458"/>
           </a:xfrm>
           <a:prstGeom prst="rect">
             <a:avLst/>
